--- a/samples/seller-cma/517-Larkwood-Ave-Listing-Presentation.pptx
+++ b/samples/seller-cma/517-Larkwood-Ave-Listing-Presentation.pptx
@@ -141,7 +141,7 @@
               <c:strCache>
                 <c:ptCount val="1"/>
                 <c:pt idx="0">
-                  <c:v>Renovated Pool Home (Sold)</c:v>
+                  <c:v>Comparable Sales</c:v>
                 </c:pt>
               </c:strCache>
             </c:strRef>
@@ -182,97 +182,97 @@
                   <c:v>1865</c:v>
                 </c:pt>
                 <c:pt idx="2">
+                  <c:v>1871</c:v>
+                </c:pt>
+                <c:pt idx="3">
+                  <c:v>1849</c:v>
+                </c:pt>
+                <c:pt idx="4">
                   <c:v>1865</c:v>
                 </c:pt>
-                <c:pt idx="3">
+                <c:pt idx="5">
+                  <c:v>1790</c:v>
+                </c:pt>
+                <c:pt idx="6">
+                  <c:v>1810</c:v>
+                </c:pt>
+                <c:pt idx="7">
                   <c:v>1702</c:v>
                 </c:pt>
-                <c:pt idx="4">
-                  <c:v>1871</c:v>
-                </c:pt>
-                <c:pt idx="5">
-                  <c:v>1849</c:v>
-                </c:pt>
-                <c:pt idx="6">
-                  <c:v>1790</c:v>
-                </c:pt>
-                <c:pt idx="7">
+                <c:pt idx="8">
+                  <c:v>1880</c:v>
+                </c:pt>
+                <c:pt idx="9">
                   <c:v>2260</c:v>
-                </c:pt>
-                <c:pt idx="8">
-                  <c:v>2150</c:v>
-                </c:pt>
-                <c:pt idx="9">
-                  <c:v>1880</c:v>
                 </c:pt>
                 <c:pt idx="10">
                   <c:v>1950</c:v>
                 </c:pt>
                 <c:pt idx="11">
-                  <c:v>1450</c:v>
+                  <c:v>2380</c:v>
                 </c:pt>
                 <c:pt idx="12">
                   <c:v>2150</c:v>
                 </c:pt>
                 <c:pt idx="13">
-                  <c:v>2260</c:v>
+                  <c:v>2380</c:v>
                 </c:pt>
                 <c:pt idx="14">
-                  <c:v>2380</c:v>
+                  <c:v>1740</c:v>
                 </c:pt>
                 <c:pt idx="15">
+                  <c:v>1880</c:v>
+                </c:pt>
+                <c:pt idx="16">
+                  <c:v>1950</c:v>
+                </c:pt>
+                <c:pt idx="17">
                   <c:v>1740</c:v>
                 </c:pt>
-                <c:pt idx="16">
+                <c:pt idx="18">
                   <c:v>1450</c:v>
                 </c:pt>
-                <c:pt idx="17">
-                  <c:v>1610</c:v>
-                </c:pt>
-                <c:pt idx="18">
-                  <c:v>1820</c:v>
-                </c:pt>
                 <c:pt idx="19">
-                  <c:v>1880</c:v>
+                  <c:v>2150</c:v>
                 </c:pt>
                 <c:pt idx="20">
                   <c:v>2380</c:v>
                 </c:pt>
                 <c:pt idx="21">
-                  <c:v>1810</c:v>
+                  <c:v>2260</c:v>
                 </c:pt>
                 <c:pt idx="22">
+                  <c:v>2380</c:v>
+                </c:pt>
+                <c:pt idx="23">
+                  <c:v>1740</c:v>
+                </c:pt>
+                <c:pt idx="24">
+                  <c:v>1450</c:v>
+                </c:pt>
+                <c:pt idx="25">
+                  <c:v>1610</c:v>
+                </c:pt>
+                <c:pt idx="26">
+                  <c:v>2380</c:v>
+                </c:pt>
+                <c:pt idx="27">
+                  <c:v>1820</c:v>
+                </c:pt>
+                <c:pt idx="28">
                   <c:v>1880</c:v>
                 </c:pt>
-                <c:pt idx="23">
-                  <c:v>1950</c:v>
-                </c:pt>
-                <c:pt idx="24">
+                <c:pt idx="29">
+                  <c:v>2040</c:v>
+                </c:pt>
+                <c:pt idx="30">
                   <c:v>2380</c:v>
                 </c:pt>
-                <c:pt idx="25">
+                <c:pt idx="31">
+                  <c:v>1610</c:v>
+                </c:pt>
+                <c:pt idx="32">
                   <c:v>2380</c:v>
-                </c:pt>
-                <c:pt idx="26">
-                  <c:v>1740</c:v>
-                </c:pt>
-                <c:pt idx="27">
-                  <c:v>1740</c:v>
-                </c:pt>
-                <c:pt idx="28">
-                  <c:v>2380</c:v>
-                </c:pt>
-                <c:pt idx="29">
-                  <c:v>2380</c:v>
-                </c:pt>
-                <c:pt idx="30">
-                  <c:v>2040</c:v>
-                </c:pt>
-                <c:pt idx="31">
-                  <c:v>2380</c:v>
-                </c:pt>
-                <c:pt idx="32">
-                  <c:v>1610</c:v>
                 </c:pt>
                 <c:pt idx="33">
                   <c:v>1849</c:v>
@@ -416,13 +416,13 @@
                   <c:v>495000</c:v>
                 </c:pt>
                 <c:pt idx="2">
+                  <c:v>427000</c:v>
+                </c:pt>
+                <c:pt idx="3">
+                  <c:v>429000</c:v>
+                </c:pt>
+                <c:pt idx="4">
                   <c:v>465000</c:v>
-                </c:pt>
-                <c:pt idx="3">
-                  <c:v>470000</c:v>
-                </c:pt>
-                <c:pt idx="4">
-                  <c:v/>
                 </c:pt>
                 <c:pt idx="5">
                   <c:v/>
@@ -648,514 +648,7 @@
               <c:strCache>
                 <c:ptCount val="1"/>
                 <c:pt idx="0">
-                  <c:v>Other Pool Home (Sold)</c:v>
-                </c:pt>
-              </c:strCache>
-            </c:strRef>
-          </c:tx>
-          <c:spPr>
-            <a:solidFill>
-              <a:srgbClr val="DD9577"/>
-            </a:solidFill>
-            <a:ln>
-              <a:noFill/>
-            </a:ln>
-            <a:effectLst/>
-          </c:spPr>
-          <c:marker>
-            <c:symbol val="triangle"/>
-            <c:size val="8"/>
-            <c:spPr>
-              <a:solidFill>
-                <a:srgbClr val="DD9577"/>
-              </a:solidFill>
-              <a:ln w="9525">
-                <a:solidFill>
-                  <a:srgbClr val="DD9577"/>
-                </a:solidFill>
-              </a:ln>
-            </c:spPr>
-          </c:marker>
-          <c:xVal>
-            <c:numRef>
-              <c:f>Sheet1!$A$2:$A$76</c:f>
-              <c:numCache>
-                <c:formatCode>General</c:formatCode>
-                <c:ptCount val="75"/>
-                <c:pt idx="0">
-                  <c:v>1824</c:v>
-                </c:pt>
-                <c:pt idx="1">
-                  <c:v>1865</c:v>
-                </c:pt>
-                <c:pt idx="2">
-                  <c:v>1865</c:v>
-                </c:pt>
-                <c:pt idx="3">
-                  <c:v>1702</c:v>
-                </c:pt>
-                <c:pt idx="4">
-                  <c:v>1871</c:v>
-                </c:pt>
-                <c:pt idx="5">
-                  <c:v>1849</c:v>
-                </c:pt>
-                <c:pt idx="6">
-                  <c:v>1790</c:v>
-                </c:pt>
-                <c:pt idx="7">
-                  <c:v>2260</c:v>
-                </c:pt>
-                <c:pt idx="8">
-                  <c:v>2150</c:v>
-                </c:pt>
-                <c:pt idx="9">
-                  <c:v>1880</c:v>
-                </c:pt>
-                <c:pt idx="10">
-                  <c:v>1950</c:v>
-                </c:pt>
-                <c:pt idx="11">
-                  <c:v>1450</c:v>
-                </c:pt>
-                <c:pt idx="12">
-                  <c:v>2150</c:v>
-                </c:pt>
-                <c:pt idx="13">
-                  <c:v>2260</c:v>
-                </c:pt>
-                <c:pt idx="14">
-                  <c:v>2380</c:v>
-                </c:pt>
-                <c:pt idx="15">
-                  <c:v>1740</c:v>
-                </c:pt>
-                <c:pt idx="16">
-                  <c:v>1450</c:v>
-                </c:pt>
-                <c:pt idx="17">
-                  <c:v>1610</c:v>
-                </c:pt>
-                <c:pt idx="18">
-                  <c:v>1820</c:v>
-                </c:pt>
-                <c:pt idx="19">
-                  <c:v>1880</c:v>
-                </c:pt>
-                <c:pt idx="20">
-                  <c:v>2380</c:v>
-                </c:pt>
-                <c:pt idx="21">
-                  <c:v>1810</c:v>
-                </c:pt>
-                <c:pt idx="22">
-                  <c:v>1880</c:v>
-                </c:pt>
-                <c:pt idx="23">
-                  <c:v>1950</c:v>
-                </c:pt>
-                <c:pt idx="24">
-                  <c:v>2380</c:v>
-                </c:pt>
-                <c:pt idx="25">
-                  <c:v>2380</c:v>
-                </c:pt>
-                <c:pt idx="26">
-                  <c:v>1740</c:v>
-                </c:pt>
-                <c:pt idx="27">
-                  <c:v>1740</c:v>
-                </c:pt>
-                <c:pt idx="28">
-                  <c:v>2380</c:v>
-                </c:pt>
-                <c:pt idx="29">
-                  <c:v>2380</c:v>
-                </c:pt>
-                <c:pt idx="30">
-                  <c:v>2040</c:v>
-                </c:pt>
-                <c:pt idx="31">
-                  <c:v>2380</c:v>
-                </c:pt>
-                <c:pt idx="32">
-                  <c:v>1610</c:v>
-                </c:pt>
-                <c:pt idx="33">
-                  <c:v>1849</c:v>
-                </c:pt>
-                <c:pt idx="34">
-                  <c:v>1943</c:v>
-                </c:pt>
-                <c:pt idx="35">
-                  <c:v>2400</c:v>
-                </c:pt>
-                <c:pt idx="36">
-                  <c:v>2400</c:v>
-                </c:pt>
-                <c:pt idx="37">
-                  <c:v>2400</c:v>
-                </c:pt>
-                <c:pt idx="38">
-                  <c:v>1650</c:v>
-                </c:pt>
-                <c:pt idx="39">
-                  <c:v>1500</c:v>
-                </c:pt>
-                <c:pt idx="40">
-                  <c:v>1650</c:v>
-                </c:pt>
-                <c:pt idx="41">
-                  <c:v>1900</c:v>
-                </c:pt>
-                <c:pt idx="42">
-                  <c:v>1650</c:v>
-                </c:pt>
-                <c:pt idx="43">
-                  <c:v>1900</c:v>
-                </c:pt>
-                <c:pt idx="44">
-                  <c:v>1650</c:v>
-                </c:pt>
-                <c:pt idx="45">
-                  <c:v>2100</c:v>
-                </c:pt>
-                <c:pt idx="46">
-                  <c:v>1450</c:v>
-                </c:pt>
-                <c:pt idx="47">
-                  <c:v>1485.1851851851852</c:v>
-                </c:pt>
-                <c:pt idx="48">
-                  <c:v>1520.3703703703704</c:v>
-                </c:pt>
-                <c:pt idx="49">
-                  <c:v>1555.5555555555557</c:v>
-                </c:pt>
-                <c:pt idx="50">
-                  <c:v>1590.7407407407406</c:v>
-                </c:pt>
-                <c:pt idx="51">
-                  <c:v>1625.9259259259259</c:v>
-                </c:pt>
-                <c:pt idx="52">
-                  <c:v>1661.111111111111</c:v>
-                </c:pt>
-                <c:pt idx="53">
-                  <c:v>1696.2962962962963</c:v>
-                </c:pt>
-                <c:pt idx="54">
-                  <c:v>1731.4814814814815</c:v>
-                </c:pt>
-                <c:pt idx="55">
-                  <c:v>1766.6666666666667</c:v>
-                </c:pt>
-                <c:pt idx="56">
-                  <c:v>1801.8518518518517</c:v>
-                </c:pt>
-                <c:pt idx="57">
-                  <c:v>1837.037037037037</c:v>
-                </c:pt>
-                <c:pt idx="58">
-                  <c:v>1872.2222222222222</c:v>
-                </c:pt>
-                <c:pt idx="59">
-                  <c:v>1907.4074074074074</c:v>
-                </c:pt>
-                <c:pt idx="60">
-                  <c:v>1942.5925925925926</c:v>
-                </c:pt>
-                <c:pt idx="61">
-                  <c:v>1977.7777777777778</c:v>
-                </c:pt>
-                <c:pt idx="62">
-                  <c:v>2012.962962962963</c:v>
-                </c:pt>
-                <c:pt idx="63">
-                  <c:v>2048.1481481481483</c:v>
-                </c:pt>
-                <c:pt idx="64">
-                  <c:v>2083.3333333333335</c:v>
-                </c:pt>
-                <c:pt idx="65">
-                  <c:v>2118.5185185185182</c:v>
-                </c:pt>
-                <c:pt idx="66">
-                  <c:v>2153.7037037037035</c:v>
-                </c:pt>
-                <c:pt idx="67">
-                  <c:v>2188.8888888888887</c:v>
-                </c:pt>
-                <c:pt idx="68">
-                  <c:v>2224.074074074074</c:v>
-                </c:pt>
-                <c:pt idx="69">
-                  <c:v>2259.259259259259</c:v>
-                </c:pt>
-                <c:pt idx="70">
-                  <c:v>2294.4444444444443</c:v>
-                </c:pt>
-                <c:pt idx="71">
-                  <c:v>2329.6296296296296</c:v>
-                </c:pt>
-                <c:pt idx="72">
-                  <c:v>2364.814814814815</c:v>
-                </c:pt>
-                <c:pt idx="73">
-                  <c:v>2400</c:v>
-                </c:pt>
-                <c:pt idx="74">
-                  <c:v>1849</c:v>
-                </c:pt>
-              </c:numCache>
-            </c:numRef>
-          </c:xVal>
-          <c:yVal>
-            <c:numRef>
-              <c:f>Sheet1!$C$2:$C$76</c:f>
-              <c:numCache>
-                <c:formatCode>General</c:formatCode>
-                <c:ptCount val="75"/>
-                <c:pt idx="0">
-                  <c:v/>
-                </c:pt>
-                <c:pt idx="1">
-                  <c:v/>
-                </c:pt>
-                <c:pt idx="2">
-                  <c:v/>
-                </c:pt>
-                <c:pt idx="3">
-                  <c:v/>
-                </c:pt>
-                <c:pt idx="4">
-                  <c:v>427000</c:v>
-                </c:pt>
-                <c:pt idx="5">
-                  <c:v>429000</c:v>
-                </c:pt>
-                <c:pt idx="6">
-                  <c:v>427000</c:v>
-                </c:pt>
-                <c:pt idx="7">
-                  <c:v>559500</c:v>
-                </c:pt>
-                <c:pt idx="8">
-                  <c:v>529500</c:v>
-                </c:pt>
-                <c:pt idx="9">
-                  <c:v>429500</c:v>
-                </c:pt>
-                <c:pt idx="10">
-                  <c:v>473000</c:v>
-                </c:pt>
-                <c:pt idx="11">
-                  <c:v>325500</c:v>
-                </c:pt>
-                <c:pt idx="12">
-                  <c:v>493000</c:v>
-                </c:pt>
-                <c:pt idx="13">
-                  <c:v>549500</c:v>
-                </c:pt>
-                <c:pt idx="14">
-                  <c:v>596500</c:v>
-                </c:pt>
-                <c:pt idx="15">
-                  <c:v>444500</c:v>
-                </c:pt>
-                <c:pt idx="16">
-                  <c:v>361500</c:v>
-                </c:pt>
-                <c:pt idx="17">
-                  <c:v>398000</c:v>
-                </c:pt>
-                <c:pt idx="18">
-                  <c:v>396500</c:v>
-                </c:pt>
-                <c:pt idx="19">
-                  <c:v>461000</c:v>
-                </c:pt>
-                <c:pt idx="20">
-                  <c:v>570000</c:v>
-                </c:pt>
-                <c:pt idx="21">
-                  <c:v/>
-                </c:pt>
-                <c:pt idx="22">
-                  <c:v/>
-                </c:pt>
-                <c:pt idx="23">
-                  <c:v/>
-                </c:pt>
-                <c:pt idx="24">
-                  <c:v/>
-                </c:pt>
-                <c:pt idx="25">
-                  <c:v/>
-                </c:pt>
-                <c:pt idx="26">
-                  <c:v/>
-                </c:pt>
-                <c:pt idx="27">
-                  <c:v/>
-                </c:pt>
-                <c:pt idx="28">
-                  <c:v/>
-                </c:pt>
-                <c:pt idx="29">
-                  <c:v/>
-                </c:pt>
-                <c:pt idx="30">
-                  <c:v/>
-                </c:pt>
-                <c:pt idx="31">
-                  <c:v/>
-                </c:pt>
-                <c:pt idx="32">
-                  <c:v/>
-                </c:pt>
-                <c:pt idx="33">
-                  <c:v/>
-                </c:pt>
-                <c:pt idx="34">
-                  <c:v/>
-                </c:pt>
-                <c:pt idx="35">
-                  <c:v/>
-                </c:pt>
-                <c:pt idx="36">
-                  <c:v/>
-                </c:pt>
-                <c:pt idx="37">
-                  <c:v/>
-                </c:pt>
-                <c:pt idx="38">
-                  <c:v/>
-                </c:pt>
-                <c:pt idx="39">
-                  <c:v/>
-                </c:pt>
-                <c:pt idx="40">
-                  <c:v/>
-                </c:pt>
-                <c:pt idx="41">
-                  <c:v/>
-                </c:pt>
-                <c:pt idx="42">
-                  <c:v/>
-                </c:pt>
-                <c:pt idx="43">
-                  <c:v/>
-                </c:pt>
-                <c:pt idx="44">
-                  <c:v/>
-                </c:pt>
-                <c:pt idx="45">
-                  <c:v/>
-                </c:pt>
-                <c:pt idx="46">
-                  <c:v/>
-                </c:pt>
-                <c:pt idx="47">
-                  <c:v/>
-                </c:pt>
-                <c:pt idx="48">
-                  <c:v/>
-                </c:pt>
-                <c:pt idx="49">
-                  <c:v/>
-                </c:pt>
-                <c:pt idx="50">
-                  <c:v/>
-                </c:pt>
-                <c:pt idx="51">
-                  <c:v/>
-                </c:pt>
-                <c:pt idx="52">
-                  <c:v/>
-                </c:pt>
-                <c:pt idx="53">
-                  <c:v/>
-                </c:pt>
-                <c:pt idx="54">
-                  <c:v/>
-                </c:pt>
-                <c:pt idx="55">
-                  <c:v/>
-                </c:pt>
-                <c:pt idx="56">
-                  <c:v/>
-                </c:pt>
-                <c:pt idx="57">
-                  <c:v/>
-                </c:pt>
-                <c:pt idx="58">
-                  <c:v/>
-                </c:pt>
-                <c:pt idx="59">
-                  <c:v/>
-                </c:pt>
-                <c:pt idx="60">
-                  <c:v/>
-                </c:pt>
-                <c:pt idx="61">
-                  <c:v/>
-                </c:pt>
-                <c:pt idx="62">
-                  <c:v/>
-                </c:pt>
-                <c:pt idx="63">
-                  <c:v/>
-                </c:pt>
-                <c:pt idx="64">
-                  <c:v/>
-                </c:pt>
-                <c:pt idx="65">
-                  <c:v/>
-                </c:pt>
-                <c:pt idx="66">
-                  <c:v/>
-                </c:pt>
-                <c:pt idx="67">
-                  <c:v/>
-                </c:pt>
-                <c:pt idx="68">
-                  <c:v/>
-                </c:pt>
-                <c:pt idx="69">
-                  <c:v/>
-                </c:pt>
-                <c:pt idx="70">
-                  <c:v/>
-                </c:pt>
-                <c:pt idx="71">
-                  <c:v/>
-                </c:pt>
-                <c:pt idx="72">
-                  <c:v/>
-                </c:pt>
-                <c:pt idx="73">
-                  <c:v/>
-                </c:pt>
-                <c:pt idx="74">
-                  <c:v/>
-                </c:pt>
-              </c:numCache>
-            </c:numRef>
-          </c:yVal>
-          <c:smooth val="0"/>
-        </c:ser>
-        <c:ser>
-          <c:idx val="2"/>
-          <c:order val="2"/>
-          <c:tx>
-            <c:strRef>
-              <c:f>Sheet1!$D$1</c:f>
-              <c:strCache>
-                <c:ptCount val="1"/>
-                <c:pt idx="0">
-                  <c:v>No Pool (Sold)</c:v>
+                  <c:v>Other Sales</c:v>
                 </c:pt>
               </c:strCache>
             </c:strRef>
@@ -1196,97 +689,97 @@
                   <c:v>1865</c:v>
                 </c:pt>
                 <c:pt idx="2">
+                  <c:v>1871</c:v>
+                </c:pt>
+                <c:pt idx="3">
+                  <c:v>1849</c:v>
+                </c:pt>
+                <c:pt idx="4">
                   <c:v>1865</c:v>
                 </c:pt>
-                <c:pt idx="3">
+                <c:pt idx="5">
+                  <c:v>1790</c:v>
+                </c:pt>
+                <c:pt idx="6">
+                  <c:v>1810</c:v>
+                </c:pt>
+                <c:pt idx="7">
                   <c:v>1702</c:v>
                 </c:pt>
-                <c:pt idx="4">
-                  <c:v>1871</c:v>
-                </c:pt>
-                <c:pt idx="5">
-                  <c:v>1849</c:v>
-                </c:pt>
-                <c:pt idx="6">
-                  <c:v>1790</c:v>
-                </c:pt>
-                <c:pt idx="7">
+                <c:pt idx="8">
+                  <c:v>1880</c:v>
+                </c:pt>
+                <c:pt idx="9">
                   <c:v>2260</c:v>
-                </c:pt>
-                <c:pt idx="8">
-                  <c:v>2150</c:v>
-                </c:pt>
-                <c:pt idx="9">
-                  <c:v>1880</c:v>
                 </c:pt>
                 <c:pt idx="10">
                   <c:v>1950</c:v>
                 </c:pt>
                 <c:pt idx="11">
-                  <c:v>1450</c:v>
+                  <c:v>2380</c:v>
                 </c:pt>
                 <c:pt idx="12">
                   <c:v>2150</c:v>
                 </c:pt>
                 <c:pt idx="13">
-                  <c:v>2260</c:v>
+                  <c:v>2380</c:v>
                 </c:pt>
                 <c:pt idx="14">
-                  <c:v>2380</c:v>
+                  <c:v>1740</c:v>
                 </c:pt>
                 <c:pt idx="15">
+                  <c:v>1880</c:v>
+                </c:pt>
+                <c:pt idx="16">
+                  <c:v>1950</c:v>
+                </c:pt>
+                <c:pt idx="17">
                   <c:v>1740</c:v>
                 </c:pt>
-                <c:pt idx="16">
+                <c:pt idx="18">
                   <c:v>1450</c:v>
                 </c:pt>
-                <c:pt idx="17">
-                  <c:v>1610</c:v>
-                </c:pt>
-                <c:pt idx="18">
-                  <c:v>1820</c:v>
-                </c:pt>
                 <c:pt idx="19">
-                  <c:v>1880</c:v>
+                  <c:v>2150</c:v>
                 </c:pt>
                 <c:pt idx="20">
                   <c:v>2380</c:v>
                 </c:pt>
                 <c:pt idx="21">
-                  <c:v>1810</c:v>
+                  <c:v>2260</c:v>
                 </c:pt>
                 <c:pt idx="22">
+                  <c:v>2380</c:v>
+                </c:pt>
+                <c:pt idx="23">
+                  <c:v>1740</c:v>
+                </c:pt>
+                <c:pt idx="24">
+                  <c:v>1450</c:v>
+                </c:pt>
+                <c:pt idx="25">
+                  <c:v>1610</c:v>
+                </c:pt>
+                <c:pt idx="26">
+                  <c:v>2380</c:v>
+                </c:pt>
+                <c:pt idx="27">
+                  <c:v>1820</c:v>
+                </c:pt>
+                <c:pt idx="28">
                   <c:v>1880</c:v>
                 </c:pt>
-                <c:pt idx="23">
-                  <c:v>1950</c:v>
-                </c:pt>
-                <c:pt idx="24">
+                <c:pt idx="29">
+                  <c:v>2040</c:v>
+                </c:pt>
+                <c:pt idx="30">
                   <c:v>2380</c:v>
                 </c:pt>
-                <c:pt idx="25">
+                <c:pt idx="31">
+                  <c:v>1610</c:v>
+                </c:pt>
+                <c:pt idx="32">
                   <c:v>2380</c:v>
-                </c:pt>
-                <c:pt idx="26">
-                  <c:v>1740</c:v>
-                </c:pt>
-                <c:pt idx="27">
-                  <c:v>1740</c:v>
-                </c:pt>
-                <c:pt idx="28">
-                  <c:v>2380</c:v>
-                </c:pt>
-                <c:pt idx="29">
-                  <c:v>2380</c:v>
-                </c:pt>
-                <c:pt idx="30">
-                  <c:v>2040</c:v>
-                </c:pt>
-                <c:pt idx="31">
-                  <c:v>2380</c:v>
-                </c:pt>
-                <c:pt idx="32">
-                  <c:v>1610</c:v>
                 </c:pt>
                 <c:pt idx="33">
                   <c:v>1849</c:v>
@@ -1419,7 +912,7 @@
           </c:xVal>
           <c:yVal>
             <c:numRef>
-              <c:f>Sheet1!$D$2:$D$76</c:f>
+              <c:f>Sheet1!$C$2:$C$76</c:f>
               <c:numCache>
                 <c:formatCode>General</c:formatCode>
                 <c:ptCount val="75"/>
@@ -1439,88 +932,88 @@
                   <c:v/>
                 </c:pt>
                 <c:pt idx="5">
-                  <c:v/>
+                  <c:v>427000</c:v>
                 </c:pt>
                 <c:pt idx="6">
-                  <c:v/>
+                  <c:v>435000</c:v>
                 </c:pt>
                 <c:pt idx="7">
-                  <c:v/>
+                  <c:v>470000</c:v>
                 </c:pt>
                 <c:pt idx="8">
-                  <c:v/>
+                  <c:v>454500</c:v>
                 </c:pt>
                 <c:pt idx="9">
-                  <c:v/>
+                  <c:v>559500</c:v>
                 </c:pt>
                 <c:pt idx="10">
-                  <c:v/>
+                  <c:v>446000</c:v>
                 </c:pt>
                 <c:pt idx="11">
-                  <c:v/>
+                  <c:v>575000</c:v>
                 </c:pt>
                 <c:pt idx="12">
-                  <c:v/>
+                  <c:v>529500</c:v>
                 </c:pt>
                 <c:pt idx="13">
-                  <c:v/>
+                  <c:v>516000</c:v>
                 </c:pt>
                 <c:pt idx="14">
-                  <c:v/>
+                  <c:v>364000</c:v>
                 </c:pt>
                 <c:pt idx="15">
-                  <c:v/>
+                  <c:v>429500</c:v>
                 </c:pt>
                 <c:pt idx="16">
-                  <c:v/>
+                  <c:v>473000</c:v>
                 </c:pt>
                 <c:pt idx="17">
-                  <c:v/>
+                  <c:v>391000</c:v>
                 </c:pt>
                 <c:pt idx="18">
-                  <c:v/>
+                  <c:v>325500</c:v>
                 </c:pt>
                 <c:pt idx="19">
-                  <c:v/>
+                  <c:v>493000</c:v>
                 </c:pt>
                 <c:pt idx="20">
-                  <c:v/>
+                  <c:v>578000</c:v>
                 </c:pt>
                 <c:pt idx="21">
-                  <c:v>435000</c:v>
+                  <c:v>549500</c:v>
                 </c:pt>
                 <c:pt idx="22">
-                  <c:v>454500</c:v>
+                  <c:v>596500</c:v>
                 </c:pt>
                 <c:pt idx="23">
-                  <c:v>446000</c:v>
+                  <c:v>444500</c:v>
                 </c:pt>
                 <c:pt idx="24">
-                  <c:v>575000</c:v>
+                  <c:v>361500</c:v>
                 </c:pt>
                 <c:pt idx="25">
-                  <c:v>516000</c:v>
+                  <c:v>398000</c:v>
                 </c:pt>
                 <c:pt idx="26">
-                  <c:v>364000</c:v>
+                  <c:v>526000</c:v>
                 </c:pt>
                 <c:pt idx="27">
-                  <c:v>391000</c:v>
+                  <c:v>396500</c:v>
                 </c:pt>
                 <c:pt idx="28">
-                  <c:v>578000</c:v>
+                  <c:v>461000</c:v>
                 </c:pt>
                 <c:pt idx="29">
-                  <c:v>526000</c:v>
+                  <c:v>477000</c:v>
                 </c:pt>
                 <c:pt idx="30">
-                  <c:v>477000</c:v>
+                  <c:v>535000</c:v>
                 </c:pt>
                 <c:pt idx="31">
-                  <c:v>535000</c:v>
+                  <c:v>367000</c:v>
                 </c:pt>
                 <c:pt idx="32">
-                  <c:v>367000</c:v>
+                  <c:v>570000</c:v>
                 </c:pt>
                 <c:pt idx="33">
                   <c:v/>
@@ -1654,11 +1147,11 @@
           <c:smooth val="0"/>
         </c:ser>
         <c:ser>
-          <c:idx val="3"/>
-          <c:order val="3"/>
+          <c:idx val="2"/>
+          <c:order val="2"/>
           <c:tx>
             <c:strRef>
-              <c:f>Sheet1!$E$1</c:f>
+              <c:f>Sheet1!$D$1</c:f>
               <c:strCache>
                 <c:ptCount val="1"/>
                 <c:pt idx="0">
@@ -1703,97 +1196,97 @@
                   <c:v>1865</c:v>
                 </c:pt>
                 <c:pt idx="2">
+                  <c:v>1871</c:v>
+                </c:pt>
+                <c:pt idx="3">
+                  <c:v>1849</c:v>
+                </c:pt>
+                <c:pt idx="4">
                   <c:v>1865</c:v>
                 </c:pt>
-                <c:pt idx="3">
+                <c:pt idx="5">
+                  <c:v>1790</c:v>
+                </c:pt>
+                <c:pt idx="6">
+                  <c:v>1810</c:v>
+                </c:pt>
+                <c:pt idx="7">
                   <c:v>1702</c:v>
                 </c:pt>
-                <c:pt idx="4">
-                  <c:v>1871</c:v>
-                </c:pt>
-                <c:pt idx="5">
-                  <c:v>1849</c:v>
-                </c:pt>
-                <c:pt idx="6">
-                  <c:v>1790</c:v>
-                </c:pt>
-                <c:pt idx="7">
+                <c:pt idx="8">
+                  <c:v>1880</c:v>
+                </c:pt>
+                <c:pt idx="9">
                   <c:v>2260</c:v>
-                </c:pt>
-                <c:pt idx="8">
-                  <c:v>2150</c:v>
-                </c:pt>
-                <c:pt idx="9">
-                  <c:v>1880</c:v>
                 </c:pt>
                 <c:pt idx="10">
                   <c:v>1950</c:v>
                 </c:pt>
                 <c:pt idx="11">
-                  <c:v>1450</c:v>
+                  <c:v>2380</c:v>
                 </c:pt>
                 <c:pt idx="12">
                   <c:v>2150</c:v>
                 </c:pt>
                 <c:pt idx="13">
-                  <c:v>2260</c:v>
+                  <c:v>2380</c:v>
                 </c:pt>
                 <c:pt idx="14">
-                  <c:v>2380</c:v>
+                  <c:v>1740</c:v>
                 </c:pt>
                 <c:pt idx="15">
+                  <c:v>1880</c:v>
+                </c:pt>
+                <c:pt idx="16">
+                  <c:v>1950</c:v>
+                </c:pt>
+                <c:pt idx="17">
                   <c:v>1740</c:v>
                 </c:pt>
-                <c:pt idx="16">
+                <c:pt idx="18">
                   <c:v>1450</c:v>
                 </c:pt>
-                <c:pt idx="17">
-                  <c:v>1610</c:v>
-                </c:pt>
-                <c:pt idx="18">
-                  <c:v>1820</c:v>
-                </c:pt>
                 <c:pt idx="19">
-                  <c:v>1880</c:v>
+                  <c:v>2150</c:v>
                 </c:pt>
                 <c:pt idx="20">
                   <c:v>2380</c:v>
                 </c:pt>
                 <c:pt idx="21">
-                  <c:v>1810</c:v>
+                  <c:v>2260</c:v>
                 </c:pt>
                 <c:pt idx="22">
+                  <c:v>2380</c:v>
+                </c:pt>
+                <c:pt idx="23">
+                  <c:v>1740</c:v>
+                </c:pt>
+                <c:pt idx="24">
+                  <c:v>1450</c:v>
+                </c:pt>
+                <c:pt idx="25">
+                  <c:v>1610</c:v>
+                </c:pt>
+                <c:pt idx="26">
+                  <c:v>2380</c:v>
+                </c:pt>
+                <c:pt idx="27">
+                  <c:v>1820</c:v>
+                </c:pt>
+                <c:pt idx="28">
                   <c:v>1880</c:v>
                 </c:pt>
-                <c:pt idx="23">
-                  <c:v>1950</c:v>
-                </c:pt>
-                <c:pt idx="24">
+                <c:pt idx="29">
+                  <c:v>2040</c:v>
+                </c:pt>
+                <c:pt idx="30">
                   <c:v>2380</c:v>
                 </c:pt>
-                <c:pt idx="25">
+                <c:pt idx="31">
+                  <c:v>1610</c:v>
+                </c:pt>
+                <c:pt idx="32">
                   <c:v>2380</c:v>
-                </c:pt>
-                <c:pt idx="26">
-                  <c:v>1740</c:v>
-                </c:pt>
-                <c:pt idx="27">
-                  <c:v>1740</c:v>
-                </c:pt>
-                <c:pt idx="28">
-                  <c:v>2380</c:v>
-                </c:pt>
-                <c:pt idx="29">
-                  <c:v>2380</c:v>
-                </c:pt>
-                <c:pt idx="30">
-                  <c:v>2040</c:v>
-                </c:pt>
-                <c:pt idx="31">
-                  <c:v>2380</c:v>
-                </c:pt>
-                <c:pt idx="32">
-                  <c:v>1610</c:v>
                 </c:pt>
                 <c:pt idx="33">
                   <c:v>1849</c:v>
@@ -1926,7 +1419,7 @@
           </c:xVal>
           <c:yVal>
             <c:numRef>
-              <c:f>Sheet1!$E$2:$E$76</c:f>
+              <c:f>Sheet1!$D$2:$D$76</c:f>
               <c:numCache>
                 <c:formatCode>General</c:formatCode>
                 <c:ptCount val="75"/>
@@ -2161,11 +1654,11 @@
           <c:smooth val="0"/>
         </c:ser>
         <c:ser>
-          <c:idx val="4"/>
-          <c:order val="4"/>
+          <c:idx val="3"/>
+          <c:order val="3"/>
           <c:tx>
             <c:strRef>
-              <c:f>Sheet1!$F$1</c:f>
+              <c:f>Sheet1!$E$1</c:f>
               <c:strCache>
                 <c:ptCount val="1"/>
                 <c:pt idx="0">
@@ -2202,97 +1695,97 @@
                   <c:v>1865</c:v>
                 </c:pt>
                 <c:pt idx="2">
+                  <c:v>1871</c:v>
+                </c:pt>
+                <c:pt idx="3">
+                  <c:v>1849</c:v>
+                </c:pt>
+                <c:pt idx="4">
                   <c:v>1865</c:v>
                 </c:pt>
-                <c:pt idx="3">
+                <c:pt idx="5">
+                  <c:v>1790</c:v>
+                </c:pt>
+                <c:pt idx="6">
+                  <c:v>1810</c:v>
+                </c:pt>
+                <c:pt idx="7">
                   <c:v>1702</c:v>
                 </c:pt>
-                <c:pt idx="4">
-                  <c:v>1871</c:v>
-                </c:pt>
-                <c:pt idx="5">
-                  <c:v>1849</c:v>
-                </c:pt>
-                <c:pt idx="6">
-                  <c:v>1790</c:v>
-                </c:pt>
-                <c:pt idx="7">
+                <c:pt idx="8">
+                  <c:v>1880</c:v>
+                </c:pt>
+                <c:pt idx="9">
                   <c:v>2260</c:v>
-                </c:pt>
-                <c:pt idx="8">
-                  <c:v>2150</c:v>
-                </c:pt>
-                <c:pt idx="9">
-                  <c:v>1880</c:v>
                 </c:pt>
                 <c:pt idx="10">
                   <c:v>1950</c:v>
                 </c:pt>
                 <c:pt idx="11">
-                  <c:v>1450</c:v>
+                  <c:v>2380</c:v>
                 </c:pt>
                 <c:pt idx="12">
                   <c:v>2150</c:v>
                 </c:pt>
                 <c:pt idx="13">
-                  <c:v>2260</c:v>
+                  <c:v>2380</c:v>
                 </c:pt>
                 <c:pt idx="14">
-                  <c:v>2380</c:v>
+                  <c:v>1740</c:v>
                 </c:pt>
                 <c:pt idx="15">
+                  <c:v>1880</c:v>
+                </c:pt>
+                <c:pt idx="16">
+                  <c:v>1950</c:v>
+                </c:pt>
+                <c:pt idx="17">
                   <c:v>1740</c:v>
                 </c:pt>
-                <c:pt idx="16">
+                <c:pt idx="18">
                   <c:v>1450</c:v>
                 </c:pt>
-                <c:pt idx="17">
-                  <c:v>1610</c:v>
-                </c:pt>
-                <c:pt idx="18">
-                  <c:v>1820</c:v>
-                </c:pt>
                 <c:pt idx="19">
-                  <c:v>1880</c:v>
+                  <c:v>2150</c:v>
                 </c:pt>
                 <c:pt idx="20">
                   <c:v>2380</c:v>
                 </c:pt>
                 <c:pt idx="21">
-                  <c:v>1810</c:v>
+                  <c:v>2260</c:v>
                 </c:pt>
                 <c:pt idx="22">
+                  <c:v>2380</c:v>
+                </c:pt>
+                <c:pt idx="23">
+                  <c:v>1740</c:v>
+                </c:pt>
+                <c:pt idx="24">
+                  <c:v>1450</c:v>
+                </c:pt>
+                <c:pt idx="25">
+                  <c:v>1610</c:v>
+                </c:pt>
+                <c:pt idx="26">
+                  <c:v>2380</c:v>
+                </c:pt>
+                <c:pt idx="27">
+                  <c:v>1820</c:v>
+                </c:pt>
+                <c:pt idx="28">
                   <c:v>1880</c:v>
                 </c:pt>
-                <c:pt idx="23">
-                  <c:v>1950</c:v>
-                </c:pt>
-                <c:pt idx="24">
+                <c:pt idx="29">
+                  <c:v>2040</c:v>
+                </c:pt>
+                <c:pt idx="30">
                   <c:v>2380</c:v>
                 </c:pt>
-                <c:pt idx="25">
+                <c:pt idx="31">
+                  <c:v>1610</c:v>
+                </c:pt>
+                <c:pt idx="32">
                   <c:v>2380</c:v>
-                </c:pt>
-                <c:pt idx="26">
-                  <c:v>1740</c:v>
-                </c:pt>
-                <c:pt idx="27">
-                  <c:v>1740</c:v>
-                </c:pt>
-                <c:pt idx="28">
-                  <c:v>2380</c:v>
-                </c:pt>
-                <c:pt idx="29">
-                  <c:v>2380</c:v>
-                </c:pt>
-                <c:pt idx="30">
-                  <c:v>2040</c:v>
-                </c:pt>
-                <c:pt idx="31">
-                  <c:v>2380</c:v>
-                </c:pt>
-                <c:pt idx="32">
-                  <c:v>1610</c:v>
                 </c:pt>
                 <c:pt idx="33">
                   <c:v>1849</c:v>
@@ -2425,7 +1918,7 @@
           </c:xVal>
           <c:yVal>
             <c:numRef>
-              <c:f>Sheet1!$F$2:$F$76</c:f>
+              <c:f>Sheet1!$E$2:$E$76</c:f>
               <c:numCache>
                 <c:formatCode>General</c:formatCode>
                 <c:ptCount val="75"/>
@@ -2660,11 +2153,11 @@
           <c:smooth val="0"/>
         </c:ser>
         <c:ser>
-          <c:idx val="5"/>
-          <c:order val="5"/>
+          <c:idx val="4"/>
+          <c:order val="4"/>
           <c:tx>
             <c:strRef>
-              <c:f>Sheet1!$G$1</c:f>
+              <c:f>Sheet1!$F$1</c:f>
               <c:strCache>
                 <c:ptCount val="1"/>
                 <c:pt idx="0">
@@ -2709,97 +2202,97 @@
                   <c:v>1865</c:v>
                 </c:pt>
                 <c:pt idx="2">
+                  <c:v>1871</c:v>
+                </c:pt>
+                <c:pt idx="3">
+                  <c:v>1849</c:v>
+                </c:pt>
+                <c:pt idx="4">
                   <c:v>1865</c:v>
                 </c:pt>
-                <c:pt idx="3">
+                <c:pt idx="5">
+                  <c:v>1790</c:v>
+                </c:pt>
+                <c:pt idx="6">
+                  <c:v>1810</c:v>
+                </c:pt>
+                <c:pt idx="7">
                   <c:v>1702</c:v>
                 </c:pt>
-                <c:pt idx="4">
-                  <c:v>1871</c:v>
-                </c:pt>
-                <c:pt idx="5">
-                  <c:v>1849</c:v>
-                </c:pt>
-                <c:pt idx="6">
-                  <c:v>1790</c:v>
-                </c:pt>
-                <c:pt idx="7">
+                <c:pt idx="8">
+                  <c:v>1880</c:v>
+                </c:pt>
+                <c:pt idx="9">
                   <c:v>2260</c:v>
-                </c:pt>
-                <c:pt idx="8">
-                  <c:v>2150</c:v>
-                </c:pt>
-                <c:pt idx="9">
-                  <c:v>1880</c:v>
                 </c:pt>
                 <c:pt idx="10">
                   <c:v>1950</c:v>
                 </c:pt>
                 <c:pt idx="11">
-                  <c:v>1450</c:v>
+                  <c:v>2380</c:v>
                 </c:pt>
                 <c:pt idx="12">
                   <c:v>2150</c:v>
                 </c:pt>
                 <c:pt idx="13">
-                  <c:v>2260</c:v>
+                  <c:v>2380</c:v>
                 </c:pt>
                 <c:pt idx="14">
-                  <c:v>2380</c:v>
+                  <c:v>1740</c:v>
                 </c:pt>
                 <c:pt idx="15">
+                  <c:v>1880</c:v>
+                </c:pt>
+                <c:pt idx="16">
+                  <c:v>1950</c:v>
+                </c:pt>
+                <c:pt idx="17">
                   <c:v>1740</c:v>
                 </c:pt>
-                <c:pt idx="16">
+                <c:pt idx="18">
                   <c:v>1450</c:v>
                 </c:pt>
-                <c:pt idx="17">
-                  <c:v>1610</c:v>
-                </c:pt>
-                <c:pt idx="18">
-                  <c:v>1820</c:v>
-                </c:pt>
                 <c:pt idx="19">
-                  <c:v>1880</c:v>
+                  <c:v>2150</c:v>
                 </c:pt>
                 <c:pt idx="20">
                   <c:v>2380</c:v>
                 </c:pt>
                 <c:pt idx="21">
-                  <c:v>1810</c:v>
+                  <c:v>2260</c:v>
                 </c:pt>
                 <c:pt idx="22">
+                  <c:v>2380</c:v>
+                </c:pt>
+                <c:pt idx="23">
+                  <c:v>1740</c:v>
+                </c:pt>
+                <c:pt idx="24">
+                  <c:v>1450</c:v>
+                </c:pt>
+                <c:pt idx="25">
+                  <c:v>1610</c:v>
+                </c:pt>
+                <c:pt idx="26">
+                  <c:v>2380</c:v>
+                </c:pt>
+                <c:pt idx="27">
+                  <c:v>1820</c:v>
+                </c:pt>
+                <c:pt idx="28">
                   <c:v>1880</c:v>
                 </c:pt>
-                <c:pt idx="23">
-                  <c:v>1950</c:v>
-                </c:pt>
-                <c:pt idx="24">
+                <c:pt idx="29">
+                  <c:v>2040</c:v>
+                </c:pt>
+                <c:pt idx="30">
                   <c:v>2380</c:v>
                 </c:pt>
-                <c:pt idx="25">
+                <c:pt idx="31">
+                  <c:v>1610</c:v>
+                </c:pt>
+                <c:pt idx="32">
                   <c:v>2380</c:v>
-                </c:pt>
-                <c:pt idx="26">
-                  <c:v>1740</c:v>
-                </c:pt>
-                <c:pt idx="27">
-                  <c:v>1740</c:v>
-                </c:pt>
-                <c:pt idx="28">
-                  <c:v>2380</c:v>
-                </c:pt>
-                <c:pt idx="29">
-                  <c:v>2380</c:v>
-                </c:pt>
-                <c:pt idx="30">
-                  <c:v>2040</c:v>
-                </c:pt>
-                <c:pt idx="31">
-                  <c:v>2380</c:v>
-                </c:pt>
-                <c:pt idx="32">
-                  <c:v>1610</c:v>
                 </c:pt>
                 <c:pt idx="33">
                   <c:v>1849</c:v>
@@ -2932,7 +2425,7 @@
           </c:xVal>
           <c:yVal>
             <c:numRef>
-              <c:f>Sheet1!$G$2:$G$76</c:f>
+              <c:f>Sheet1!$F$2:$F$76</c:f>
               <c:numCache>
                 <c:formatCode>General</c:formatCode>
                 <c:ptCount val="75"/>
@@ -18238,7 +17731,7 @@
                 <a:ea typeface="Arial" pitchFamily="34" charset="-122"/>
                 <a:cs typeface="Arial" pitchFamily="34" charset="-120"/>
               </a:rPr>
-              <a:t>Renovated pool homes sell well above the neighborhood trend. At $469,900, yours sits among them without testing the ceiling.</a:t>
+              <a:t>The renovated comparable sales sit well above the neighborhood trend. At $469,900, yours sits among them without testing the ceiling.</a:t>
             </a:r>
             <a:endParaRPr lang="en-US" sz="1300" dirty="0"/>
           </a:p>
@@ -18277,7 +17770,7 @@
                 <a:ea typeface="Arial" pitchFamily="34" charset="-122"/>
                 <a:cs typeface="Arial" pitchFamily="34" charset="-120"/>
               </a:rPr>
-              <a:t>Size alone predicts about $443K at your size.</a:t>
+              <a:t>Size alone predicts about $443K at your size. Your price is about $27K above the line.</a:t>
             </a:r>
             <a:endParaRPr lang="en-US" sz="1100" dirty="0"/>
           </a:p>

--- a/samples/seller-cma/517-Larkwood-Ave-Listing-Presentation.pptx
+++ b/samples/seller-cma/517-Larkwood-Ave-Listing-Presentation.pptx
@@ -1162,7 +1162,7 @@
           </c:tx>
           <c:spPr>
             <a:solidFill>
-              <a:srgbClr val="FFFFFF"/>
+              <a:srgbClr val="A3ADB6"/>
             </a:solidFill>
             <a:ln>
               <a:noFill/>
@@ -1174,7 +1174,7 @@
             <c:size val="7"/>
             <c:spPr>
               <a:solidFill>
-                <a:srgbClr val="FFFFFF"/>
+                <a:srgbClr val="DADEE2"/>
               </a:solidFill>
               <a:ln w="15875">
                 <a:solidFill>
@@ -2168,7 +2168,7 @@
           </c:tx>
           <c:spPr>
             <a:solidFill>
-              <a:srgbClr val="1F3A5F"/>
+              <a:srgbClr val="1A1A1A"/>
             </a:solidFill>
             <a:ln>
               <a:noFill/>
@@ -2180,7 +2180,7 @@
             <c:size val="14"/>
             <c:spPr>
               <a:solidFill>
-                <a:srgbClr val="1F3A5F"/>
+                <a:srgbClr val="1A1A1A"/>
               </a:solidFill>
               <a:ln w="12700">
                 <a:solidFill>
@@ -2752,7 +2752,7 @@
           <a:lstStyle/>
           <a:p>
             <a:pPr>
-              <a:defRPr sz="900" b="0" i="0" u="none" strike="noStrike">
+              <a:defRPr sz="1000" b="0" i="0" u="none" strike="noStrike">
                 <a:solidFill>
                   <a:srgbClr val="5A6672"/>
                 </a:solidFill>
@@ -2835,7 +2835,7 @@
           <a:lstStyle/>
           <a:p>
             <a:pPr>
-              <a:defRPr sz="900" b="0" i="0" u="none" strike="noStrike">
+              <a:defRPr sz="1000" b="0" i="0" u="none" strike="noStrike">
                 <a:solidFill>
                   <a:srgbClr val="5A6672"/>
                 </a:solidFill>
@@ -2865,7 +2865,7 @@
         <a:lstStyle/>
         <a:p>
           <a:pPr>
-            <a:defRPr sz="900">
+            <a:defRPr sz="1000">
               <a:solidFill>
                 <a:srgbClr val="1A1A1A"/>
               </a:solidFill>
@@ -3968,7 +3968,7 @@
           <a:p>
             <a:r>
               <a:rPr lang="en-US" dirty="0"/>
-              <a:t/>
+              <a:t>Holding costs: about $530 a month (loan interest, HOA, insurance and utilities; property tax is in the proration) for each option's time to contract plus 1 month to close. Commissions are negotiable and not set by law. Not included: this year's property tax proration. Taxes here are paid in arrears, so the seller credits the buyer from Jan 1; add the tax bill and the expected closing date to include it. Title company fees are typical local charges (settlement fee $700, title search $250, municipal lien search $125, recording $70); the title company's quote replaces them. Estimates only. Not included: mortgage payoff, tax proration and repairs; the closing agent provides exact figures.</a:t>
             </a:r>
             <a:endParaRPr lang="en-US" dirty="0"/>
           </a:p>
@@ -4056,7 +4056,7 @@
           <a:p>
             <a:r>
               <a:rPr lang="en-US" dirty="0"/>
-              <a:t/>
+              <a:t>Adjustments: about $75 per sq ft of size difference; $30,000–$45,000 for renovation level; $5,000–$10,000 for larger or better lots; 1–2% for market change since the sale; seller-paid costs subtracted. A broker's opinion of value from comparable sales, not an appraisal, and not for lending. Sales data: Stellar MLS as of 2026-09-22. Deemed reliable but not guaranteed. This comparative market analysis is an opinion of price, not an appraisal, and isn't for lending purposes. Payment, tax and cost figures are estimates only, not lending or tax advice. Equal Housing Opportunity.</a:t>
             </a:r>
             <a:endParaRPr lang="en-US" dirty="0"/>
           </a:p>
@@ -5115,7 +5115,7 @@
     <p:bg>
       <p:bgPr>
         <a:solidFill>
-          <a:srgbClr val="1F3A5F"/>
+          <a:srgbClr val="7B2400"/>
         </a:solidFill>
       </p:bgPr>
     </p:bg>
@@ -5148,11 +5148,11 @@
             <a:avLst/>
           </a:prstGeom>
           <a:solidFill>
-            <a:srgbClr val="C2410C"/>
+            <a:srgbClr val="F8E8E2"/>
           </a:solidFill>
           <a:ln w="12700">
             <a:solidFill>
-              <a:srgbClr val="C2410C"/>
+              <a:srgbClr val="F8E8E2"/>
             </a:solidFill>
             <a:prstDash val="solid"/>
           </a:ln>
@@ -5200,9 +5200,7 @@
           <a:ln/>
         </p:spPr>
         <p:txBody>
-          <a:bodyPr wrap="square" lIns="0" tIns="0" rIns="0" bIns="0" rtlCol="0" anchor="ctr">
-            <a:normAutofit/>
-          </a:bodyPr>
+          <a:bodyPr wrap="square" lIns="0" tIns="0" rIns="0" bIns="0" rtlCol="0" anchor="b"/>
           <a:lstStyle/>
           <a:p>
             <a:pPr indent="0" marL="0">
@@ -5231,7 +5229,7 @@
         </p:nvSpPr>
         <p:spPr>
           <a:xfrm>
-            <a:off x="457200" y="2560320"/>
+            <a:off x="457200" y="2606040"/>
             <a:ext cx="7772400" cy="411480"/>
           </a:xfrm>
           <a:prstGeom prst="rect">
@@ -5250,7 +5248,7 @@
             <a:r>
               <a:rPr lang="en-US" sz="1600" dirty="0">
                 <a:solidFill>
-                  <a:srgbClr val="F0D1C5"/>
+                  <a:srgbClr val="F8E8E2"/>
                 </a:solidFill>
                 <a:latin typeface="Arial" pitchFamily="34" charset="0"/>
                 <a:ea typeface="Arial" pitchFamily="34" charset="-122"/>
@@ -5271,7 +5269,7 @@
         <p:spPr>
           <a:xfrm>
             <a:off x="457200" y="3429000"/>
-            <a:ext cx="6400800" cy="1097280"/>
+            <a:ext cx="7772400" cy="1097280"/>
           </a:xfrm>
           <a:prstGeom prst="rect">
             <a:avLst/>
@@ -5292,7 +5290,7 @@
             <a:r>
               <a:rPr lang="en-US" sz="1200" b="1" dirty="0">
                 <a:solidFill>
-                  <a:srgbClr val="D2D8DF"/>
+                  <a:srgbClr val="F8E8E2"/>
                 </a:solidFill>
                 <a:latin typeface="Arial" pitchFamily="34" charset="0"/>
                 <a:ea typeface="Arial" pitchFamily="34" charset="-122"/>
@@ -5312,7 +5310,7 @@
             <a:r>
               <a:rPr lang="en-US" sz="1200" dirty="0">
                 <a:solidFill>
-                  <a:srgbClr val="D2D8DF"/>
+                  <a:srgbClr val="F8E8E2"/>
                 </a:solidFill>
                 <a:latin typeface="Arial" pitchFamily="34" charset="0"/>
                 <a:ea typeface="Arial" pitchFamily="34" charset="-122"/>
@@ -5332,7 +5330,7 @@
             <a:r>
               <a:rPr lang="en-US" sz="1200" dirty="0">
                 <a:solidFill>
-                  <a:srgbClr val="D2D8DF"/>
+                  <a:srgbClr val="F8E8E2"/>
                 </a:solidFill>
                 <a:latin typeface="Arial" pitchFamily="34" charset="0"/>
                 <a:ea typeface="Arial" pitchFamily="34" charset="-122"/>
@@ -5352,7 +5350,7 @@
             <a:r>
               <a:rPr lang="en-US" sz="1200" dirty="0">
                 <a:solidFill>
-                  <a:srgbClr val="D2D8DF"/>
+                  <a:srgbClr val="F8E8E2"/>
                 </a:solidFill>
                 <a:latin typeface="Arial" pitchFamily="34" charset="0"/>
                 <a:ea typeface="Arial" pitchFamily="34" charset="-122"/>
@@ -5604,7 +5602,7 @@
         <p:spPr>
           <a:xfrm>
             <a:off x="6172200" y="2651760"/>
-            <a:ext cx="2286000" cy="1097280"/>
+            <a:ext cx="2286000" cy="1463040"/>
           </a:xfrm>
           <a:prstGeom prst="rect">
             <a:avLst/>
@@ -5816,7 +5814,7 @@
                 <a:ea typeface="Arial" pitchFamily="34" charset="-122"/>
                 <a:cs typeface="Arial" pitchFamily="34" charset="-120"/>
               </a:rPr>
-              <a:t>Estimated monthly payment for a typical buyer</a:t>
+              <a:t>Estimated monthly payment, conventional loan with 5% down</a:t>
             </a:r>
             <a:endParaRPr lang="en-US" sz="1300" dirty="0"/>
           </a:p>
@@ -5915,7 +5913,7 @@
             <a:r>
               <a:rPr lang="en-US" sz="2800" b="1" dirty="0">
                 <a:solidFill>
-                  <a:srgbClr val="1F3A5F"/>
+                  <a:srgbClr val="C2410C"/>
                 </a:solidFill>
                 <a:latin typeface="Arial" pitchFamily="34" charset="0"/>
                 <a:ea typeface="Arial" pitchFamily="34" charset="-122"/>
@@ -5983,11 +5981,11 @@
             </a:avLst>
           </a:prstGeom>
           <a:solidFill>
-            <a:srgbClr val="E4E7EC"/>
+            <a:srgbClr val="FBF2EE"/>
           </a:solidFill>
           <a:ln w="19050">
             <a:solidFill>
-              <a:srgbClr val="1F3A5F"/>
+              <a:srgbClr val="C2410C"/>
             </a:solidFill>
             <a:prstDash val="solid"/>
           </a:ln>
@@ -6059,7 +6057,7 @@
             <a:r>
               <a:rPr lang="en-US" sz="2800" b="1" dirty="0">
                 <a:solidFill>
-                  <a:srgbClr val="1F3A5F"/>
+                  <a:srgbClr val="C2410C"/>
                 </a:solidFill>
                 <a:latin typeface="Arial" pitchFamily="34" charset="0"/>
                 <a:ea typeface="Arial" pitchFamily="34" charset="-122"/>
@@ -6203,7 +6201,7 @@
             <a:r>
               <a:rPr lang="en-US" sz="2800" b="1" dirty="0">
                 <a:solidFill>
-                  <a:srgbClr val="1F3A5F"/>
+                  <a:srgbClr val="C2410C"/>
                 </a:solidFill>
                 <a:latin typeface="Arial" pitchFamily="34" charset="0"/>
                 <a:ea typeface="Arial" pitchFamily="34" charset="-122"/>
@@ -6311,8 +6309,8 @@
         </p:nvSpPr>
         <p:spPr>
           <a:xfrm>
-            <a:off x="1143000" y="3429000"/>
-            <a:ext cx="7498080" cy="502920"/>
+            <a:off x="1143000" y="3383280"/>
+            <a:ext cx="7543800" cy="594360"/>
           </a:xfrm>
           <a:prstGeom prst="rect">
             <a:avLst/>
@@ -6539,11 +6537,11 @@
         <p:spPr>
           <a:xfrm>
             <a:off x="457200" y="1325880"/>
-            <a:ext cx="2560320" cy="1234440"/>
+            <a:ext cx="2560320" cy="1280160"/>
           </a:xfrm>
           <a:prstGeom prst="roundRect">
             <a:avLst>
-              <a:gd name="adj" fmla="val 5926"/>
+              <a:gd name="adj" fmla="val 5714"/>
             </a:avLst>
           </a:prstGeom>
           <a:solidFill>
@@ -6565,7 +6563,7 @@
         </p:nvSpPr>
         <p:spPr>
           <a:xfrm>
-            <a:off x="640080" y="1527048"/>
+            <a:off x="621792" y="1508760"/>
             <a:ext cx="411480" cy="411480"/>
           </a:xfrm>
           <a:prstGeom prst="ellipse">
@@ -6598,7 +6596,7 @@
         </p:blipFill>
         <p:spPr>
           <a:xfrm>
-            <a:off x="738835" y="1625803"/>
+            <a:off x="720547" y="1607515"/>
             <a:ext cx="213970" cy="213970"/>
           </a:xfrm>
           <a:prstGeom prst="rect">
@@ -6614,8 +6612,8 @@
         </p:nvSpPr>
         <p:spPr>
           <a:xfrm>
-            <a:off x="1188720" y="1527048"/>
-            <a:ext cx="1645920" cy="411480"/>
+            <a:off x="1143000" y="1481328"/>
+            <a:ext cx="1737360" cy="457200"/>
           </a:xfrm>
           <a:prstGeom prst="rect">
             <a:avLst/>
@@ -6653,8 +6651,8 @@
         </p:nvSpPr>
         <p:spPr>
           <a:xfrm>
-            <a:off x="640080" y="2039112"/>
-            <a:ext cx="2194560" cy="457200"/>
+            <a:off x="640080" y="2057400"/>
+            <a:ext cx="2194560" cy="475488"/>
           </a:xfrm>
           <a:prstGeom prst="rect">
             <a:avLst/>
@@ -6693,11 +6691,11 @@
         <p:spPr>
           <a:xfrm>
             <a:off x="3291840" y="1325880"/>
-            <a:ext cx="2560320" cy="1234440"/>
+            <a:ext cx="2560320" cy="1280160"/>
           </a:xfrm>
           <a:prstGeom prst="roundRect">
             <a:avLst>
-              <a:gd name="adj" fmla="val 5926"/>
+              <a:gd name="adj" fmla="val 5714"/>
             </a:avLst>
           </a:prstGeom>
           <a:solidFill>
@@ -6719,7 +6717,7 @@
         </p:nvSpPr>
         <p:spPr>
           <a:xfrm>
-            <a:off x="3474720" y="1527048"/>
+            <a:off x="3456432" y="1508760"/>
             <a:ext cx="411480" cy="411480"/>
           </a:xfrm>
           <a:prstGeom prst="ellipse">
@@ -6752,7 +6750,7 @@
         </p:blipFill>
         <p:spPr>
           <a:xfrm>
-            <a:off x="3573475" y="1625803"/>
+            <a:off x="3555187" y="1607515"/>
             <a:ext cx="213970" cy="213970"/>
           </a:xfrm>
           <a:prstGeom prst="rect">
@@ -6768,8 +6766,8 @@
         </p:nvSpPr>
         <p:spPr>
           <a:xfrm>
-            <a:off x="4023360" y="1527048"/>
-            <a:ext cx="1645920" cy="411480"/>
+            <a:off x="3977640" y="1481328"/>
+            <a:ext cx="1737360" cy="457200"/>
           </a:xfrm>
           <a:prstGeom prst="rect">
             <a:avLst/>
@@ -6785,7 +6783,7 @@
               <a:buNone/>
             </a:pPr>
             <a:r>
-              <a:rPr lang="en-US" sz="1300" b="1" dirty="0">
+              <a:rPr lang="en-US" sz="1250" b="1" dirty="0">
                 <a:solidFill>
                   <a:srgbClr val="1A1A1A"/>
                 </a:solidFill>
@@ -6795,7 +6793,7 @@
               </a:rPr>
               <a:t>Pre-Listing Inspection</a:t>
             </a:r>
-            <a:endParaRPr lang="en-US" sz="1300" dirty="0"/>
+            <a:endParaRPr lang="en-US" sz="1250" dirty="0"/>
           </a:p>
         </p:txBody>
       </p:sp>
@@ -6807,8 +6805,8 @@
         </p:nvSpPr>
         <p:spPr>
           <a:xfrm>
-            <a:off x="3474720" y="2039112"/>
-            <a:ext cx="2194560" cy="457200"/>
+            <a:off x="3474720" y="2057400"/>
+            <a:ext cx="2194560" cy="475488"/>
           </a:xfrm>
           <a:prstGeom prst="rect">
             <a:avLst/>
@@ -6847,11 +6845,11 @@
         <p:spPr>
           <a:xfrm>
             <a:off x="6126480" y="1325880"/>
-            <a:ext cx="2560320" cy="1234440"/>
+            <a:ext cx="2560320" cy="1280160"/>
           </a:xfrm>
           <a:prstGeom prst="roundRect">
             <a:avLst>
-              <a:gd name="adj" fmla="val 5926"/>
+              <a:gd name="adj" fmla="val 5714"/>
             </a:avLst>
           </a:prstGeom>
           <a:solidFill>
@@ -6873,7 +6871,7 @@
         </p:nvSpPr>
         <p:spPr>
           <a:xfrm>
-            <a:off x="6309360" y="1527048"/>
+            <a:off x="6291072" y="1508760"/>
             <a:ext cx="411480" cy="411480"/>
           </a:xfrm>
           <a:prstGeom prst="ellipse">
@@ -6906,7 +6904,7 @@
         </p:blipFill>
         <p:spPr>
           <a:xfrm>
-            <a:off x="6408115" y="1625803"/>
+            <a:off x="6389827" y="1607515"/>
             <a:ext cx="213970" cy="213970"/>
           </a:xfrm>
           <a:prstGeom prst="rect">
@@ -6922,8 +6920,8 @@
         </p:nvSpPr>
         <p:spPr>
           <a:xfrm>
-            <a:off x="6858000" y="1527048"/>
-            <a:ext cx="1645920" cy="411480"/>
+            <a:off x="6812280" y="1481328"/>
+            <a:ext cx="1737360" cy="457200"/>
           </a:xfrm>
           <a:prstGeom prst="rect">
             <a:avLst/>
@@ -6961,8 +6959,8 @@
         </p:nvSpPr>
         <p:spPr>
           <a:xfrm>
-            <a:off x="6309360" y="2039112"/>
-            <a:ext cx="2194560" cy="457200"/>
+            <a:off x="6309360" y="2057400"/>
+            <a:ext cx="2194560" cy="475488"/>
           </a:xfrm>
           <a:prstGeom prst="rect">
             <a:avLst/>
@@ -7001,11 +6999,11 @@
         <p:spPr>
           <a:xfrm>
             <a:off x="457200" y="2834640"/>
-            <a:ext cx="2560320" cy="1234440"/>
+            <a:ext cx="2560320" cy="1280160"/>
           </a:xfrm>
           <a:prstGeom prst="roundRect">
             <a:avLst>
-              <a:gd name="adj" fmla="val 5926"/>
+              <a:gd name="adj" fmla="val 5714"/>
             </a:avLst>
           </a:prstGeom>
           <a:solidFill>
@@ -7027,7 +7025,7 @@
         </p:nvSpPr>
         <p:spPr>
           <a:xfrm>
-            <a:off x="640080" y="3035808"/>
+            <a:off x="621792" y="3017520"/>
             <a:ext cx="411480" cy="411480"/>
           </a:xfrm>
           <a:prstGeom prst="ellipse">
@@ -7060,7 +7058,7 @@
         </p:blipFill>
         <p:spPr>
           <a:xfrm>
-            <a:off x="738835" y="3134563"/>
+            <a:off x="720547" y="3116275"/>
             <a:ext cx="213970" cy="213970"/>
           </a:xfrm>
           <a:prstGeom prst="rect">
@@ -7076,8 +7074,8 @@
         </p:nvSpPr>
         <p:spPr>
           <a:xfrm>
-            <a:off x="1188720" y="3035808"/>
-            <a:ext cx="1645920" cy="411480"/>
+            <a:off x="1143000" y="2990088"/>
+            <a:ext cx="1737360" cy="457200"/>
           </a:xfrm>
           <a:prstGeom prst="rect">
             <a:avLst/>
@@ -7115,8 +7113,8 @@
         </p:nvSpPr>
         <p:spPr>
           <a:xfrm>
-            <a:off x="640080" y="3547872"/>
-            <a:ext cx="2194560" cy="457200"/>
+            <a:off x="640080" y="3566160"/>
+            <a:ext cx="2194560" cy="475488"/>
           </a:xfrm>
           <a:prstGeom prst="rect">
             <a:avLst/>
@@ -7155,11 +7153,11 @@
         <p:spPr>
           <a:xfrm>
             <a:off x="3291840" y="2834640"/>
-            <a:ext cx="2560320" cy="1234440"/>
+            <a:ext cx="2560320" cy="1280160"/>
           </a:xfrm>
           <a:prstGeom prst="roundRect">
             <a:avLst>
-              <a:gd name="adj" fmla="val 5926"/>
+              <a:gd name="adj" fmla="val 5714"/>
             </a:avLst>
           </a:prstGeom>
           <a:solidFill>
@@ -7181,7 +7179,7 @@
         </p:nvSpPr>
         <p:spPr>
           <a:xfrm>
-            <a:off x="3474720" y="3035808"/>
+            <a:off x="3456432" y="3017520"/>
             <a:ext cx="411480" cy="411480"/>
           </a:xfrm>
           <a:prstGeom prst="ellipse">
@@ -7214,7 +7212,7 @@
         </p:blipFill>
         <p:spPr>
           <a:xfrm>
-            <a:off x="3573475" y="3134563"/>
+            <a:off x="3555187" y="3116275"/>
             <a:ext cx="213970" cy="213970"/>
           </a:xfrm>
           <a:prstGeom prst="rect">
@@ -7230,8 +7228,8 @@
         </p:nvSpPr>
         <p:spPr>
           <a:xfrm>
-            <a:off x="4023360" y="3035808"/>
-            <a:ext cx="1645920" cy="411480"/>
+            <a:off x="3977640" y="2990088"/>
+            <a:ext cx="1737360" cy="457200"/>
           </a:xfrm>
           <a:prstGeom prst="rect">
             <a:avLst/>
@@ -7269,8 +7267,8 @@
         </p:nvSpPr>
         <p:spPr>
           <a:xfrm>
-            <a:off x="3474720" y="3547872"/>
-            <a:ext cx="2194560" cy="457200"/>
+            <a:off x="3474720" y="3566160"/>
+            <a:ext cx="2194560" cy="475488"/>
           </a:xfrm>
           <a:prstGeom prst="rect">
             <a:avLst/>
@@ -7309,11 +7307,11 @@
         <p:spPr>
           <a:xfrm>
             <a:off x="6126480" y="2834640"/>
-            <a:ext cx="2560320" cy="1234440"/>
+            <a:ext cx="2560320" cy="1280160"/>
           </a:xfrm>
           <a:prstGeom prst="roundRect">
             <a:avLst>
-              <a:gd name="adj" fmla="val 5926"/>
+              <a:gd name="adj" fmla="val 5714"/>
             </a:avLst>
           </a:prstGeom>
           <a:solidFill>
@@ -7335,7 +7333,7 @@
         </p:nvSpPr>
         <p:spPr>
           <a:xfrm>
-            <a:off x="6309360" y="3035808"/>
+            <a:off x="6291072" y="3017520"/>
             <a:ext cx="411480" cy="411480"/>
           </a:xfrm>
           <a:prstGeom prst="ellipse">
@@ -7368,7 +7366,7 @@
         </p:blipFill>
         <p:spPr>
           <a:xfrm>
-            <a:off x="6408115" y="3134563"/>
+            <a:off x="6389827" y="3116275"/>
             <a:ext cx="213970" cy="213970"/>
           </a:xfrm>
           <a:prstGeom prst="rect">
@@ -7384,8 +7382,8 @@
         </p:nvSpPr>
         <p:spPr>
           <a:xfrm>
-            <a:off x="6858000" y="3035808"/>
-            <a:ext cx="1645920" cy="411480"/>
+            <a:off x="6812280" y="2990088"/>
+            <a:ext cx="1737360" cy="457200"/>
           </a:xfrm>
           <a:prstGeom prst="rect">
             <a:avLst/>
@@ -7423,8 +7421,8 @@
         </p:nvSpPr>
         <p:spPr>
           <a:xfrm>
-            <a:off x="6309360" y="3547872"/>
-            <a:ext cx="2194560" cy="457200"/>
+            <a:off x="6309360" y="3566160"/>
+            <a:ext cx="2194560" cy="475488"/>
           </a:xfrm>
           <a:prstGeom prst="rect">
             <a:avLst/>
@@ -7546,7 +7544,7 @@
     <p:bg>
       <p:bgPr>
         <a:solidFill>
-          <a:srgbClr val="1F3A5F"/>
+          <a:srgbClr val="7B2400"/>
         </a:solidFill>
       </p:bgPr>
     </p:bg>
@@ -7630,13 +7628,13 @@
             <a:r>
               <a:rPr lang="en-US" sz="1500" b="1" dirty="0">
                 <a:solidFill>
-                  <a:srgbClr val="F0D1C5"/>
-                </a:solidFill>
-                <a:latin typeface="Arial" pitchFamily="34" charset="0"/>
-                <a:ea typeface="Arial" pitchFamily="34" charset="-122"/>
-                <a:cs typeface="Arial" pitchFamily="34" charset="-120"/>
-              </a:rPr>
-              <a:t>What I Need from You</a:t>
+                  <a:srgbClr val="F8E8E2"/>
+                </a:solidFill>
+                <a:latin typeface="Arial" pitchFamily="34" charset="0"/>
+                <a:ea typeface="Arial" pitchFamily="34" charset="-122"/>
+                <a:cs typeface="Arial" pitchFamily="34" charset="-120"/>
+              </a:rPr>
+              <a:t>What We Need from You</a:t>
             </a:r>
             <a:endParaRPr lang="en-US" sz="1500" dirty="0"/>
           </a:p>
@@ -7651,7 +7649,7 @@
         <p:spPr>
           <a:xfrm>
             <a:off x="457200" y="1463040"/>
-            <a:ext cx="3931920" cy="2743200"/>
+            <a:ext cx="3931920" cy="2834640"/>
           </a:xfrm>
           <a:prstGeom prst="rect">
             <a:avLst/>
@@ -7796,7 +7794,7 @@
             <a:r>
               <a:rPr lang="en-US" sz="1500" b="1" dirty="0">
                 <a:solidFill>
-                  <a:srgbClr val="F0D1C5"/>
+                  <a:srgbClr val="F8E8E2"/>
                 </a:solidFill>
                 <a:latin typeface="Arial" pitchFamily="34" charset="0"/>
                 <a:ea typeface="Arial" pitchFamily="34" charset="-122"/>
@@ -7823,11 +7821,11 @@
             <a:avLst/>
           </a:prstGeom>
           <a:solidFill>
-            <a:srgbClr val="C2410C"/>
+            <a:srgbClr val="F8E8E2"/>
           </a:solidFill>
           <a:ln w="12700">
             <a:solidFill>
-              <a:srgbClr val="C2410C"/>
+              <a:srgbClr val="F8E8E2"/>
             </a:solidFill>
             <a:prstDash val="solid"/>
           </a:ln>
@@ -7860,7 +7858,7 @@
             <a:r>
               <a:rPr lang="en-US" sz="1300" b="1" dirty="0">
                 <a:solidFill>
-                  <a:srgbClr val="FFFFFF"/>
+                  <a:srgbClr val="7B2400"/>
                 </a:solidFill>
                 <a:latin typeface="Arial" pitchFamily="34" charset="0"/>
                 <a:ea typeface="Arial" pitchFamily="34" charset="-122"/>
@@ -7920,7 +7918,7 @@
         <p:spPr>
           <a:xfrm>
             <a:off x="5486400" y="1709928"/>
-            <a:ext cx="3200400" cy="274320"/>
+            <a:ext cx="3200400" cy="384048"/>
           </a:xfrm>
           <a:prstGeom prst="rect">
             <a:avLst/>
@@ -7929,7 +7927,7 @@
           <a:ln/>
         </p:spPr>
         <p:txBody>
-          <a:bodyPr wrap="square" lIns="0" tIns="0" rIns="0" bIns="0" rtlCol="0" anchor="ctr"/>
+          <a:bodyPr wrap="square" lIns="0" tIns="0" rIns="0" bIns="0" rtlCol="0" anchor="t"/>
           <a:lstStyle/>
           <a:p>
             <a:pPr indent="0" marL="0">
@@ -7938,7 +7936,7 @@
             <a:r>
               <a:rPr lang="en-US" sz="1100" dirty="0">
                 <a:solidFill>
-                  <a:srgbClr val="D2D8DF"/>
+                  <a:srgbClr val="F8E8E2"/>
                 </a:solidFill>
                 <a:latin typeface="Arial" pitchFamily="34" charset="0"/>
                 <a:ea typeface="Arial" pitchFamily="34" charset="-122"/>
@@ -7965,11 +7963,11 @@
             <a:avLst/>
           </a:prstGeom>
           <a:solidFill>
-            <a:srgbClr val="C2410C"/>
+            <a:srgbClr val="F8E8E2"/>
           </a:solidFill>
           <a:ln w="12700">
             <a:solidFill>
-              <a:srgbClr val="C2410C"/>
+              <a:srgbClr val="F8E8E2"/>
             </a:solidFill>
             <a:prstDash val="solid"/>
           </a:ln>
@@ -8002,7 +8000,7 @@
             <a:r>
               <a:rPr lang="en-US" sz="1300" b="1" dirty="0">
                 <a:solidFill>
-                  <a:srgbClr val="FFFFFF"/>
+                  <a:srgbClr val="7B2400"/>
                 </a:solidFill>
                 <a:latin typeface="Arial" pitchFamily="34" charset="0"/>
                 <a:ea typeface="Arial" pitchFamily="34" charset="-122"/>
@@ -8062,7 +8060,7 @@
         <p:spPr>
           <a:xfrm>
             <a:off x="5486400" y="2395728"/>
-            <a:ext cx="3200400" cy="274320"/>
+            <a:ext cx="3200400" cy="384048"/>
           </a:xfrm>
           <a:prstGeom prst="rect">
             <a:avLst/>
@@ -8071,7 +8069,7 @@
           <a:ln/>
         </p:spPr>
         <p:txBody>
-          <a:bodyPr wrap="square" lIns="0" tIns="0" rIns="0" bIns="0" rtlCol="0" anchor="ctr"/>
+          <a:bodyPr wrap="square" lIns="0" tIns="0" rIns="0" bIns="0" rtlCol="0" anchor="t"/>
           <a:lstStyle/>
           <a:p>
             <a:pPr indent="0" marL="0">
@@ -8080,7 +8078,7 @@
             <a:r>
               <a:rPr lang="en-US" sz="1100" dirty="0">
                 <a:solidFill>
-                  <a:srgbClr val="D2D8DF"/>
+                  <a:srgbClr val="F8E8E2"/>
                 </a:solidFill>
                 <a:latin typeface="Arial" pitchFamily="34" charset="0"/>
                 <a:ea typeface="Arial" pitchFamily="34" charset="-122"/>
@@ -8107,11 +8105,11 @@
             <a:avLst/>
           </a:prstGeom>
           <a:solidFill>
-            <a:srgbClr val="C2410C"/>
+            <a:srgbClr val="F8E8E2"/>
           </a:solidFill>
           <a:ln w="12700">
             <a:solidFill>
-              <a:srgbClr val="C2410C"/>
+              <a:srgbClr val="F8E8E2"/>
             </a:solidFill>
             <a:prstDash val="solid"/>
           </a:ln>
@@ -8144,7 +8142,7 @@
             <a:r>
               <a:rPr lang="en-US" sz="1300" b="1" dirty="0">
                 <a:solidFill>
-                  <a:srgbClr val="FFFFFF"/>
+                  <a:srgbClr val="7B2400"/>
                 </a:solidFill>
                 <a:latin typeface="Arial" pitchFamily="34" charset="0"/>
                 <a:ea typeface="Arial" pitchFamily="34" charset="-122"/>
@@ -8204,7 +8202,7 @@
         <p:spPr>
           <a:xfrm>
             <a:off x="5486400" y="3081528"/>
-            <a:ext cx="3200400" cy="274320"/>
+            <a:ext cx="3200400" cy="384048"/>
           </a:xfrm>
           <a:prstGeom prst="rect">
             <a:avLst/>
@@ -8213,7 +8211,7 @@
           <a:ln/>
         </p:spPr>
         <p:txBody>
-          <a:bodyPr wrap="square" lIns="0" tIns="0" rIns="0" bIns="0" rtlCol="0" anchor="ctr"/>
+          <a:bodyPr wrap="square" lIns="0" tIns="0" rIns="0" bIns="0" rtlCol="0" anchor="t"/>
           <a:lstStyle/>
           <a:p>
             <a:pPr indent="0" marL="0">
@@ -8222,7 +8220,7 @@
             <a:r>
               <a:rPr lang="en-US" sz="1100" dirty="0">
                 <a:solidFill>
-                  <a:srgbClr val="D2D8DF"/>
+                  <a:srgbClr val="F8E8E2"/>
                 </a:solidFill>
                 <a:latin typeface="Arial" pitchFamily="34" charset="0"/>
                 <a:ea typeface="Arial" pitchFamily="34" charset="-122"/>
@@ -8249,11 +8247,11 @@
             <a:avLst/>
           </a:prstGeom>
           <a:solidFill>
-            <a:srgbClr val="C2410C"/>
+            <a:srgbClr val="F8E8E2"/>
           </a:solidFill>
           <a:ln w="12700">
             <a:solidFill>
-              <a:srgbClr val="C2410C"/>
+              <a:srgbClr val="F8E8E2"/>
             </a:solidFill>
             <a:prstDash val="solid"/>
           </a:ln>
@@ -8286,7 +8284,7 @@
             <a:r>
               <a:rPr lang="en-US" sz="1300" b="1" dirty="0">
                 <a:solidFill>
-                  <a:srgbClr val="FFFFFF"/>
+                  <a:srgbClr val="7B2400"/>
                 </a:solidFill>
                 <a:latin typeface="Arial" pitchFamily="34" charset="0"/>
                 <a:ea typeface="Arial" pitchFamily="34" charset="-122"/>
@@ -8346,7 +8344,7 @@
         <p:spPr>
           <a:xfrm>
             <a:off x="5486400" y="3767328"/>
-            <a:ext cx="3200400" cy="274320"/>
+            <a:ext cx="3200400" cy="384048"/>
           </a:xfrm>
           <a:prstGeom prst="rect">
             <a:avLst/>
@@ -8355,7 +8353,7 @@
           <a:ln/>
         </p:spPr>
         <p:txBody>
-          <a:bodyPr wrap="square" lIns="0" tIns="0" rIns="0" bIns="0" rtlCol="0" anchor="ctr"/>
+          <a:bodyPr wrap="square" lIns="0" tIns="0" rIns="0" bIns="0" rtlCol="0" anchor="t"/>
           <a:lstStyle/>
           <a:p>
             <a:pPr indent="0" marL="0">
@@ -8364,7 +8362,7 @@
             <a:r>
               <a:rPr lang="en-US" sz="1100" dirty="0">
                 <a:solidFill>
-                  <a:srgbClr val="D2D8DF"/>
+                  <a:srgbClr val="F8E8E2"/>
                 </a:solidFill>
                 <a:latin typeface="Arial" pitchFamily="34" charset="0"/>
                 <a:ea typeface="Arial" pitchFamily="34" charset="-122"/>
@@ -8403,7 +8401,7 @@
             <a:r>
               <a:rPr lang="en-US" sz="1000" dirty="0">
                 <a:solidFill>
-                  <a:srgbClr val="D2D8DF"/>
+                  <a:srgbClr val="F8E8E2"/>
                 </a:solidFill>
                 <a:latin typeface="Arial" pitchFamily="34" charset="0"/>
                 <a:ea typeface="Arial" pitchFamily="34" charset="-122"/>
@@ -8514,7 +8512,7 @@
                 <a:gridCol w="1645920"/>
                 <a:gridCol w="1645920"/>
               </a:tblGrid>
-              <a:tr h="310896">
+              <a:tr h="292608">
                 <a:tc>
                   <a:txBody>
                     <a:bodyPr/>
@@ -8541,7 +8539,7 @@
                       </a:endParaRPr>
                     </a:p>
                   </a:txBody>
-                  <a:tcPr marL="54864" marR="54864" marT="54864" marB="54864">
+                  <a:tcPr marL="54864" marR="54864" marT="18288" marB="18288" anchor="ctr">
                     <a:lnL w="6350" cap="flat" cmpd="sng" algn="ctr">
                       <a:solidFill>
                         <a:srgbClr val="F8E8E2"/>
@@ -8609,7 +8607,7 @@
                       </a:endParaRPr>
                     </a:p>
                   </a:txBody>
-                  <a:tcPr marL="54864" marR="54864" marT="54864" marB="54864">
+                  <a:tcPr marL="54864" marR="54864" marT="18288" marB="18288" anchor="ctr">
                     <a:lnL w="6350" cap="flat" cmpd="sng" algn="ctr">
                       <a:solidFill>
                         <a:srgbClr val="F8E8E2"/>
@@ -8677,7 +8675,7 @@
                       </a:endParaRPr>
                     </a:p>
                   </a:txBody>
-                  <a:tcPr marL="54864" marR="54864" marT="54864" marB="54864">
+                  <a:tcPr marL="54864" marR="54864" marT="18288" marB="18288" anchor="ctr">
                     <a:lnL w="6350" cap="flat" cmpd="sng" algn="ctr">
                       <a:solidFill>
                         <a:srgbClr val="F8E8E2"/>
@@ -8745,7 +8743,7 @@
                       </a:endParaRPr>
                     </a:p>
                   </a:txBody>
-                  <a:tcPr marL="54864" marR="54864" marT="54864" marB="54864">
+                  <a:tcPr marL="54864" marR="54864" marT="18288" marB="18288" anchor="ctr">
                     <a:lnL w="6350" cap="flat" cmpd="sng" algn="ctr">
                       <a:solidFill>
                         <a:srgbClr val="F8E8E2"/>
@@ -8788,7 +8786,7 @@
                   </a:tcPr>
                 </a:tc>
               </a:tr>
-              <a:tr h="310896">
+              <a:tr h="292608">
                 <a:tc>
                   <a:txBody>
                     <a:bodyPr/>
@@ -8815,7 +8813,7 @@
                       </a:endParaRPr>
                     </a:p>
                   </a:txBody>
-                  <a:tcPr marL="54864" marR="54864" marT="54864" marB="54864">
+                  <a:tcPr marL="54864" marR="54864" marT="18288" marB="18288" anchor="ctr">
                     <a:lnL w="6350" cap="flat" cmpd="sng" algn="ctr">
                       <a:solidFill>
                         <a:srgbClr val="F8E8E2"/>
@@ -8883,7 +8881,7 @@
                       </a:endParaRPr>
                     </a:p>
                   </a:txBody>
-                  <a:tcPr marL="54864" marR="54864" marT="54864" marB="54864">
+                  <a:tcPr marL="54864" marR="54864" marT="18288" marB="18288" anchor="ctr">
                     <a:lnL w="6350" cap="flat" cmpd="sng" algn="ctr">
                       <a:solidFill>
                         <a:srgbClr val="F8E8E2"/>
@@ -8951,7 +8949,7 @@
                       </a:endParaRPr>
                     </a:p>
                   </a:txBody>
-                  <a:tcPr marL="54864" marR="54864" marT="54864" marB="54864">
+                  <a:tcPr marL="54864" marR="54864" marT="18288" marB="18288" anchor="ctr">
                     <a:lnL w="6350" cap="flat" cmpd="sng" algn="ctr">
                       <a:solidFill>
                         <a:srgbClr val="F8E8E2"/>
@@ -9019,7 +9017,7 @@
                       </a:endParaRPr>
                     </a:p>
                   </a:txBody>
-                  <a:tcPr marL="54864" marR="54864" marT="54864" marB="54864">
+                  <a:tcPr marL="54864" marR="54864" marT="18288" marB="18288" anchor="ctr">
                     <a:lnL w="6350" cap="flat" cmpd="sng" algn="ctr">
                       <a:solidFill>
                         <a:srgbClr val="F8E8E2"/>
@@ -9062,7 +9060,7 @@
                   </a:tcPr>
                 </a:tc>
               </a:tr>
-              <a:tr h="310896">
+              <a:tr h="292608">
                 <a:tc>
                   <a:txBody>
                     <a:bodyPr/>
@@ -9089,7 +9087,7 @@
                       </a:endParaRPr>
                     </a:p>
                   </a:txBody>
-                  <a:tcPr marL="54864" marR="54864" marT="54864" marB="54864">
+                  <a:tcPr marL="54864" marR="54864" marT="18288" marB="18288" anchor="ctr">
                     <a:lnL w="6350" cap="flat" cmpd="sng" algn="ctr">
                       <a:solidFill>
                         <a:srgbClr val="F8E8E2"/>
@@ -9157,7 +9155,7 @@
                       </a:endParaRPr>
                     </a:p>
                   </a:txBody>
-                  <a:tcPr marL="54864" marR="54864" marT="54864" marB="54864">
+                  <a:tcPr marL="54864" marR="54864" marT="18288" marB="18288" anchor="ctr">
                     <a:lnL w="6350" cap="flat" cmpd="sng" algn="ctr">
                       <a:solidFill>
                         <a:srgbClr val="F8E8E2"/>
@@ -9225,7 +9223,7 @@
                       </a:endParaRPr>
                     </a:p>
                   </a:txBody>
-                  <a:tcPr marL="54864" marR="54864" marT="54864" marB="54864">
+                  <a:tcPr marL="54864" marR="54864" marT="18288" marB="18288" anchor="ctr">
                     <a:lnL w="6350" cap="flat" cmpd="sng" algn="ctr">
                       <a:solidFill>
                         <a:srgbClr val="F8E8E2"/>
@@ -9293,7 +9291,7 @@
                       </a:endParaRPr>
                     </a:p>
                   </a:txBody>
-                  <a:tcPr marL="54864" marR="54864" marT="54864" marB="54864">
+                  <a:tcPr marL="54864" marR="54864" marT="18288" marB="18288" anchor="ctr">
                     <a:lnL w="6350" cap="flat" cmpd="sng" algn="ctr">
                       <a:solidFill>
                         <a:srgbClr val="F8E8E2"/>
@@ -9336,7 +9334,7 @@
                   </a:tcPr>
                 </a:tc>
               </a:tr>
-              <a:tr h="310896">
+              <a:tr h="292608">
                 <a:tc>
                   <a:txBody>
                     <a:bodyPr/>
@@ -9363,7 +9361,7 @@
                       </a:endParaRPr>
                     </a:p>
                   </a:txBody>
-                  <a:tcPr marL="54864" marR="54864" marT="54864" marB="54864">
+                  <a:tcPr marL="54864" marR="54864" marT="18288" marB="18288" anchor="ctr">
                     <a:lnL w="6350" cap="flat" cmpd="sng" algn="ctr">
                       <a:solidFill>
                         <a:srgbClr val="F8E8E2"/>
@@ -9431,7 +9429,7 @@
                       </a:endParaRPr>
                     </a:p>
                   </a:txBody>
-                  <a:tcPr marL="54864" marR="54864" marT="54864" marB="54864">
+                  <a:tcPr marL="54864" marR="54864" marT="18288" marB="18288" anchor="ctr">
                     <a:lnL w="6350" cap="flat" cmpd="sng" algn="ctr">
                       <a:solidFill>
                         <a:srgbClr val="F8E8E2"/>
@@ -9499,7 +9497,7 @@
                       </a:endParaRPr>
                     </a:p>
                   </a:txBody>
-                  <a:tcPr marL="54864" marR="54864" marT="54864" marB="54864">
+                  <a:tcPr marL="54864" marR="54864" marT="18288" marB="18288" anchor="ctr">
                     <a:lnL w="6350" cap="flat" cmpd="sng" algn="ctr">
                       <a:solidFill>
                         <a:srgbClr val="F8E8E2"/>
@@ -9567,7 +9565,7 @@
                       </a:endParaRPr>
                     </a:p>
                   </a:txBody>
-                  <a:tcPr marL="54864" marR="54864" marT="54864" marB="54864">
+                  <a:tcPr marL="54864" marR="54864" marT="18288" marB="18288" anchor="ctr">
                     <a:lnL w="6350" cap="flat" cmpd="sng" algn="ctr">
                       <a:solidFill>
                         <a:srgbClr val="F8E8E2"/>
@@ -9610,7 +9608,7 @@
                   </a:tcPr>
                 </a:tc>
               </a:tr>
-              <a:tr h="310896">
+              <a:tr h="292608">
                 <a:tc>
                   <a:txBody>
                     <a:bodyPr/>
@@ -9637,7 +9635,7 @@
                       </a:endParaRPr>
                     </a:p>
                   </a:txBody>
-                  <a:tcPr marL="54864" marR="54864" marT="54864" marB="54864">
+                  <a:tcPr marL="54864" marR="54864" marT="18288" marB="18288" anchor="ctr">
                     <a:lnL w="6350" cap="flat" cmpd="sng" algn="ctr">
                       <a:solidFill>
                         <a:srgbClr val="F8E8E2"/>
@@ -9705,7 +9703,7 @@
                       </a:endParaRPr>
                     </a:p>
                   </a:txBody>
-                  <a:tcPr marL="54864" marR="54864" marT="54864" marB="54864">
+                  <a:tcPr marL="54864" marR="54864" marT="18288" marB="18288" anchor="ctr">
                     <a:lnL w="6350" cap="flat" cmpd="sng" algn="ctr">
                       <a:solidFill>
                         <a:srgbClr val="F8E8E2"/>
@@ -9773,7 +9771,7 @@
                       </a:endParaRPr>
                     </a:p>
                   </a:txBody>
-                  <a:tcPr marL="54864" marR="54864" marT="54864" marB="54864">
+                  <a:tcPr marL="54864" marR="54864" marT="18288" marB="18288" anchor="ctr">
                     <a:lnL w="6350" cap="flat" cmpd="sng" algn="ctr">
                       <a:solidFill>
                         <a:srgbClr val="F8E8E2"/>
@@ -9841,7 +9839,7 @@
                       </a:endParaRPr>
                     </a:p>
                   </a:txBody>
-                  <a:tcPr marL="54864" marR="54864" marT="54864" marB="54864">
+                  <a:tcPr marL="54864" marR="54864" marT="18288" marB="18288" anchor="ctr">
                     <a:lnL w="6350" cap="flat" cmpd="sng" algn="ctr">
                       <a:solidFill>
                         <a:srgbClr val="F8E8E2"/>
@@ -9884,7 +9882,7 @@
                   </a:tcPr>
                 </a:tc>
               </a:tr>
-              <a:tr h="310896">
+              <a:tr h="292608">
                 <a:tc>
                   <a:txBody>
                     <a:bodyPr/>
@@ -9911,7 +9909,7 @@
                       </a:endParaRPr>
                     </a:p>
                   </a:txBody>
-                  <a:tcPr marL="54864" marR="54864" marT="54864" marB="54864">
+                  <a:tcPr marL="54864" marR="54864" marT="18288" marB="18288" anchor="ctr">
                     <a:lnL w="6350" cap="flat" cmpd="sng" algn="ctr">
                       <a:solidFill>
                         <a:srgbClr val="F8E8E2"/>
@@ -9979,7 +9977,7 @@
                       </a:endParaRPr>
                     </a:p>
                   </a:txBody>
-                  <a:tcPr marL="54864" marR="54864" marT="54864" marB="54864">
+                  <a:tcPr marL="54864" marR="54864" marT="18288" marB="18288" anchor="ctr">
                     <a:lnL w="6350" cap="flat" cmpd="sng" algn="ctr">
                       <a:solidFill>
                         <a:srgbClr val="F8E8E2"/>
@@ -10047,7 +10045,7 @@
                       </a:endParaRPr>
                     </a:p>
                   </a:txBody>
-                  <a:tcPr marL="54864" marR="54864" marT="54864" marB="54864">
+                  <a:tcPr marL="54864" marR="54864" marT="18288" marB="18288" anchor="ctr">
                     <a:lnL w="6350" cap="flat" cmpd="sng" algn="ctr">
                       <a:solidFill>
                         <a:srgbClr val="F8E8E2"/>
@@ -10115,7 +10113,7 @@
                       </a:endParaRPr>
                     </a:p>
                   </a:txBody>
-                  <a:tcPr marL="54864" marR="54864" marT="54864" marB="54864">
+                  <a:tcPr marL="54864" marR="54864" marT="18288" marB="18288" anchor="ctr">
                     <a:lnL w="6350" cap="flat" cmpd="sng" algn="ctr">
                       <a:solidFill>
                         <a:srgbClr val="F8E8E2"/>
@@ -10158,7 +10156,7 @@
                   </a:tcPr>
                 </a:tc>
               </a:tr>
-              <a:tr h="310896">
+              <a:tr h="292608">
                 <a:tc>
                   <a:txBody>
                     <a:bodyPr/>
@@ -10185,7 +10183,7 @@
                       </a:endParaRPr>
                     </a:p>
                   </a:txBody>
-                  <a:tcPr marL="54864" marR="54864" marT="54864" marB="54864">
+                  <a:tcPr marL="54864" marR="54864" marT="18288" marB="18288" anchor="ctr">
                     <a:lnL w="6350" cap="flat" cmpd="sng" algn="ctr">
                       <a:solidFill>
                         <a:srgbClr val="F8E8E2"/>
@@ -10253,7 +10251,7 @@
                       </a:endParaRPr>
                     </a:p>
                   </a:txBody>
-                  <a:tcPr marL="54864" marR="54864" marT="54864" marB="54864">
+                  <a:tcPr marL="54864" marR="54864" marT="18288" marB="18288" anchor="ctr">
                     <a:lnL w="6350" cap="flat" cmpd="sng" algn="ctr">
                       <a:solidFill>
                         <a:srgbClr val="F8E8E2"/>
@@ -10321,7 +10319,7 @@
                       </a:endParaRPr>
                     </a:p>
                   </a:txBody>
-                  <a:tcPr marL="54864" marR="54864" marT="54864" marB="54864">
+                  <a:tcPr marL="54864" marR="54864" marT="18288" marB="18288" anchor="ctr">
                     <a:lnL w="6350" cap="flat" cmpd="sng" algn="ctr">
                       <a:solidFill>
                         <a:srgbClr val="F8E8E2"/>
@@ -10389,7 +10387,7 @@
                       </a:endParaRPr>
                     </a:p>
                   </a:txBody>
-                  <a:tcPr marL="54864" marR="54864" marT="54864" marB="54864">
+                  <a:tcPr marL="54864" marR="54864" marT="18288" marB="18288" anchor="ctr">
                     <a:lnL w="6350" cap="flat" cmpd="sng" algn="ctr">
                       <a:solidFill>
                         <a:srgbClr val="F8E8E2"/>
@@ -10432,7 +10430,7 @@
                   </a:tcPr>
                 </a:tc>
               </a:tr>
-              <a:tr h="310896">
+              <a:tr h="292608">
                 <a:tc>
                   <a:txBody>
                     <a:bodyPr/>
@@ -10459,7 +10457,7 @@
                       </a:endParaRPr>
                     </a:p>
                   </a:txBody>
-                  <a:tcPr marL="54864" marR="54864" marT="54864" marB="54864">
+                  <a:tcPr marL="54864" marR="54864" marT="18288" marB="18288" anchor="ctr">
                     <a:lnL w="6350" cap="flat" cmpd="sng" algn="ctr">
                       <a:solidFill>
                         <a:srgbClr val="F8E8E2"/>
@@ -10527,7 +10525,7 @@
                       </a:endParaRPr>
                     </a:p>
                   </a:txBody>
-                  <a:tcPr marL="54864" marR="54864" marT="54864" marB="54864">
+                  <a:tcPr marL="54864" marR="54864" marT="18288" marB="18288" anchor="ctr">
                     <a:lnL w="6350" cap="flat" cmpd="sng" algn="ctr">
                       <a:solidFill>
                         <a:srgbClr val="F8E8E2"/>
@@ -10595,7 +10593,7 @@
                       </a:endParaRPr>
                     </a:p>
                   </a:txBody>
-                  <a:tcPr marL="54864" marR="54864" marT="54864" marB="54864">
+                  <a:tcPr marL="54864" marR="54864" marT="18288" marB="18288" anchor="ctr">
                     <a:lnL w="6350" cap="flat" cmpd="sng" algn="ctr">
                       <a:solidFill>
                         <a:srgbClr val="F8E8E2"/>
@@ -10663,7 +10661,7 @@
                       </a:endParaRPr>
                     </a:p>
                   </a:txBody>
-                  <a:tcPr marL="54864" marR="54864" marT="54864" marB="54864">
+                  <a:tcPr marL="54864" marR="54864" marT="18288" marB="18288" anchor="ctr">
                     <a:lnL w="6350" cap="flat" cmpd="sng" algn="ctr">
                       <a:solidFill>
                         <a:srgbClr val="F8E8E2"/>
@@ -10706,7 +10704,7 @@
                   </a:tcPr>
                 </a:tc>
               </a:tr>
-              <a:tr h="310896">
+              <a:tr h="292608">
                 <a:tc>
                   <a:txBody>
                     <a:bodyPr/>
@@ -10733,7 +10731,7 @@
                       </a:endParaRPr>
                     </a:p>
                   </a:txBody>
-                  <a:tcPr marL="54864" marR="54864" marT="54864" marB="54864">
+                  <a:tcPr marL="54864" marR="54864" marT="18288" marB="18288" anchor="ctr">
                     <a:lnL w="6350" cap="flat" cmpd="sng" algn="ctr">
                       <a:solidFill>
                         <a:srgbClr val="F8E8E2"/>
@@ -10801,7 +10799,7 @@
                       </a:endParaRPr>
                     </a:p>
                   </a:txBody>
-                  <a:tcPr marL="54864" marR="54864" marT="54864" marB="54864">
+                  <a:tcPr marL="54864" marR="54864" marT="18288" marB="18288" anchor="ctr">
                     <a:lnL w="6350" cap="flat" cmpd="sng" algn="ctr">
                       <a:solidFill>
                         <a:srgbClr val="F8E8E2"/>
@@ -10869,7 +10867,7 @@
                       </a:endParaRPr>
                     </a:p>
                   </a:txBody>
-                  <a:tcPr marL="54864" marR="54864" marT="54864" marB="54864">
+                  <a:tcPr marL="54864" marR="54864" marT="18288" marB="18288" anchor="ctr">
                     <a:lnL w="6350" cap="flat" cmpd="sng" algn="ctr">
                       <a:solidFill>
                         <a:srgbClr val="F8E8E2"/>
@@ -10937,7 +10935,7 @@
                       </a:endParaRPr>
                     </a:p>
                   </a:txBody>
-                  <a:tcPr marL="54864" marR="54864" marT="54864" marB="54864">
+                  <a:tcPr marL="54864" marR="54864" marT="18288" marB="18288" anchor="ctr">
                     <a:lnL w="6350" cap="flat" cmpd="sng" algn="ctr">
                       <a:solidFill>
                         <a:srgbClr val="F8E8E2"/>
@@ -10980,7 +10978,7 @@
                   </a:tcPr>
                 </a:tc>
               </a:tr>
-              <a:tr h="310896">
+              <a:tr h="292608">
                 <a:tc>
                   <a:txBody>
                     <a:bodyPr/>
@@ -11007,7 +11005,7 @@
                       </a:endParaRPr>
                     </a:p>
                   </a:txBody>
-                  <a:tcPr marL="54864" marR="54864" marT="54864" marB="54864">
+                  <a:tcPr marL="54864" marR="54864" marT="18288" marB="18288" anchor="ctr">
                     <a:lnL w="6350" cap="flat" cmpd="sng" algn="ctr">
                       <a:solidFill>
                         <a:srgbClr val="F8E8E2"/>
@@ -11075,7 +11073,7 @@
                       </a:endParaRPr>
                     </a:p>
                   </a:txBody>
-                  <a:tcPr marL="54864" marR="54864" marT="54864" marB="54864">
+                  <a:tcPr marL="54864" marR="54864" marT="18288" marB="18288" anchor="ctr">
                     <a:lnL w="6350" cap="flat" cmpd="sng" algn="ctr">
                       <a:solidFill>
                         <a:srgbClr val="F8E8E2"/>
@@ -11143,7 +11141,7 @@
                       </a:endParaRPr>
                     </a:p>
                   </a:txBody>
-                  <a:tcPr marL="54864" marR="54864" marT="54864" marB="54864">
+                  <a:tcPr marL="54864" marR="54864" marT="18288" marB="18288" anchor="ctr">
                     <a:lnL w="6350" cap="flat" cmpd="sng" algn="ctr">
                       <a:solidFill>
                         <a:srgbClr val="F8E8E2"/>
@@ -11211,7 +11209,7 @@
                       </a:endParaRPr>
                     </a:p>
                   </a:txBody>
-                  <a:tcPr marL="54864" marR="54864" marT="54864" marB="54864">
+                  <a:tcPr marL="54864" marR="54864" marT="18288" marB="18288" anchor="ctr">
                     <a:lnL w="6350" cap="flat" cmpd="sng" algn="ctr">
                       <a:solidFill>
                         <a:srgbClr val="F8E8E2"/>
@@ -11254,7 +11252,7 @@
                   </a:tcPr>
                 </a:tc>
               </a:tr>
-              <a:tr h="310896">
+              <a:tr h="292608">
                 <a:tc>
                   <a:txBody>
                     <a:bodyPr/>
@@ -11281,7 +11279,7 @@
                       </a:endParaRPr>
                     </a:p>
                   </a:txBody>
-                  <a:tcPr marL="54864" marR="54864" marT="54864" marB="54864">
+                  <a:tcPr marL="54864" marR="54864" marT="18288" marB="18288" anchor="ctr">
                     <a:lnL w="6350" cap="flat" cmpd="sng" algn="ctr">
                       <a:solidFill>
                         <a:srgbClr val="F8E8E2"/>
@@ -11349,7 +11347,7 @@
                       </a:endParaRPr>
                     </a:p>
                   </a:txBody>
-                  <a:tcPr marL="54864" marR="54864" marT="54864" marB="54864">
+                  <a:tcPr marL="54864" marR="54864" marT="18288" marB="18288" anchor="ctr">
                     <a:lnL w="6350" cap="flat" cmpd="sng" algn="ctr">
                       <a:solidFill>
                         <a:srgbClr val="F8E8E2"/>
@@ -11417,7 +11415,7 @@
                       </a:endParaRPr>
                     </a:p>
                   </a:txBody>
-                  <a:tcPr marL="54864" marR="54864" marT="54864" marB="54864">
+                  <a:tcPr marL="54864" marR="54864" marT="18288" marB="18288" anchor="ctr">
                     <a:lnL w="6350" cap="flat" cmpd="sng" algn="ctr">
                       <a:solidFill>
                         <a:srgbClr val="F8E8E2"/>
@@ -11485,7 +11483,7 @@
                       </a:endParaRPr>
                     </a:p>
                   </a:txBody>
-                  <a:tcPr marL="54864" marR="54864" marT="54864" marB="54864">
+                  <a:tcPr marL="54864" marR="54864" marT="18288" marB="18288" anchor="ctr">
                     <a:lnL w="6350" cap="flat" cmpd="sng" algn="ctr">
                       <a:solidFill>
                         <a:srgbClr val="F8E8E2"/>
@@ -11540,8 +11538,8 @@
         </p:nvSpPr>
         <p:spPr>
           <a:xfrm>
-            <a:off x="457200" y="3840480"/>
-            <a:ext cx="8229600" cy="845820"/>
+            <a:off x="457200" y="4361688"/>
+            <a:ext cx="8229600" cy="370332"/>
           </a:xfrm>
           <a:prstGeom prst="rect">
             <a:avLst/>
@@ -11550,16 +11548,14 @@
           <a:ln/>
         </p:spPr>
         <p:txBody>
-          <a:bodyPr wrap="square" lIns="0" tIns="0" rIns="0" bIns="0" rtlCol="0" anchor="t">
-            <a:normAutofit/>
-          </a:bodyPr>
+          <a:bodyPr wrap="square" lIns="0" tIns="0" rIns="0" bIns="0" rtlCol="0" anchor="t"/>
           <a:lstStyle/>
           <a:p>
             <a:pPr indent="0" marL="0">
               <a:buNone/>
             </a:pPr>
             <a:r>
-              <a:rPr lang="en-US" sz="950" dirty="0">
+              <a:rPr lang="en-US" sz="1000" dirty="0">
                 <a:solidFill>
                   <a:srgbClr val="5A6672"/>
                 </a:solidFill>
@@ -11567,15 +11563,15 @@
                 <a:ea typeface="Arial" pitchFamily="34" charset="-122"/>
                 <a:cs typeface="Arial" pitchFamily="34" charset="-120"/>
               </a:rPr>
-              <a:t>Holding costs: about $530 a month (loan interest, HOA, insurance and utilities; property tax is in the proration) for each option's time to contract plus 1 month to close. Commissions are negotiable and not set by law. Not included: this year's property tax proration. Taxes here are paid in arrears, so the seller credits the buyer from Jan 1; add the tax bill and the expected closing date to include it. Title company fees are typical local charges (settlement fee $700, title search $250, municipal lien search $125, recording $70); the title company's quote replaces them. Not included: mortgage payoff, this year's property tax proration, and repairs after inspection. Estimates only; the closing agent provides exact figures.</a:t>
-            </a:r>
-            <a:endParaRPr lang="en-US" sz="950" dirty="0"/>
-          </a:p>
-        </p:txBody>
-      </p:sp>
-      <p:sp>
-        <p:nvSpPr>
-          <p:cNvPr id="5" name="Text 2"/>
+              <a:t>Estimates only. Not included: mortgage payoff, tax proration and repairs; the closing agent provides exact figures. Commissions are negotiable and not set by law.</a:t>
+            </a:r>
+            <a:endParaRPr lang="en-US" sz="1000" dirty="0"/>
+          </a:p>
+        </p:txBody>
+      </p:sp>
+      <p:sp>
+        <p:nvSpPr>
+          <p:cNvPr id="6" name="Text 2"/>
           <p:cNvSpPr txBox="1"/>
           <p:nvPr/>
         </p:nvSpPr>
@@ -11614,7 +11610,7 @@
       </p:sp>
       <p:sp>
         <p:nvSpPr>
-          <p:cNvPr id="6" name="Text 3"/>
+          <p:cNvPr id="7" name="Text 3"/>
           <p:cNvSpPr txBox="1"/>
           <p:nvPr/>
         </p:nvSpPr>
@@ -11750,7 +11746,7 @@
                 <a:gridCol w="1645920"/>
                 <a:gridCol w="1645920"/>
               </a:tblGrid>
-              <a:tr h="310896">
+              <a:tr h="292608">
                 <a:tc>
                   <a:txBody>
                     <a:bodyPr/>
@@ -11777,7 +11773,7 @@
                       </a:endParaRPr>
                     </a:p>
                   </a:txBody>
-                  <a:tcPr marL="54864" marR="54864" marT="54864" marB="54864">
+                  <a:tcPr marL="54864" marR="54864" marT="18288" marB="18288" anchor="ctr">
                     <a:lnL w="6350" cap="flat" cmpd="sng" algn="ctr">
                       <a:solidFill>
                         <a:srgbClr val="F8E8E2"/>
@@ -11845,7 +11841,7 @@
                       </a:endParaRPr>
                     </a:p>
                   </a:txBody>
-                  <a:tcPr marL="54864" marR="54864" marT="54864" marB="54864">
+                  <a:tcPr marL="54864" marR="54864" marT="18288" marB="18288" anchor="ctr">
                     <a:lnL w="6350" cap="flat" cmpd="sng" algn="ctr">
                       <a:solidFill>
                         <a:srgbClr val="F8E8E2"/>
@@ -11913,7 +11909,7 @@
                       </a:endParaRPr>
                     </a:p>
                   </a:txBody>
-                  <a:tcPr marL="54864" marR="54864" marT="54864" marB="54864">
+                  <a:tcPr marL="54864" marR="54864" marT="18288" marB="18288" anchor="ctr">
                     <a:lnL w="6350" cap="flat" cmpd="sng" algn="ctr">
                       <a:solidFill>
                         <a:srgbClr val="F8E8E2"/>
@@ -11981,7 +11977,7 @@
                       </a:endParaRPr>
                     </a:p>
                   </a:txBody>
-                  <a:tcPr marL="54864" marR="54864" marT="54864" marB="54864">
+                  <a:tcPr marL="54864" marR="54864" marT="18288" marB="18288" anchor="ctr">
                     <a:lnL w="6350" cap="flat" cmpd="sng" algn="ctr">
                       <a:solidFill>
                         <a:srgbClr val="F8E8E2"/>
@@ -12024,7 +12020,7 @@
                   </a:tcPr>
                 </a:tc>
               </a:tr>
-              <a:tr h="310896">
+              <a:tr h="292608">
                 <a:tc>
                   <a:txBody>
                     <a:bodyPr/>
@@ -12051,7 +12047,7 @@
                       </a:endParaRPr>
                     </a:p>
                   </a:txBody>
-                  <a:tcPr marL="54864" marR="54864" marT="54864" marB="54864">
+                  <a:tcPr marL="54864" marR="54864" marT="18288" marB="18288" anchor="ctr">
                     <a:lnL w="6350" cap="flat" cmpd="sng" algn="ctr">
                       <a:solidFill>
                         <a:srgbClr val="F8E8E2"/>
@@ -12119,7 +12115,7 @@
                       </a:endParaRPr>
                     </a:p>
                   </a:txBody>
-                  <a:tcPr marL="54864" marR="54864" marT="54864" marB="54864">
+                  <a:tcPr marL="54864" marR="54864" marT="18288" marB="18288" anchor="ctr">
                     <a:lnL w="6350" cap="flat" cmpd="sng" algn="ctr">
                       <a:solidFill>
                         <a:srgbClr val="F8E8E2"/>
@@ -12187,7 +12183,7 @@
                       </a:endParaRPr>
                     </a:p>
                   </a:txBody>
-                  <a:tcPr marL="54864" marR="54864" marT="54864" marB="54864">
+                  <a:tcPr marL="54864" marR="54864" marT="18288" marB="18288" anchor="ctr">
                     <a:lnL w="6350" cap="flat" cmpd="sng" algn="ctr">
                       <a:solidFill>
                         <a:srgbClr val="F8E8E2"/>
@@ -12255,7 +12251,7 @@
                       </a:endParaRPr>
                     </a:p>
                   </a:txBody>
-                  <a:tcPr marL="54864" marR="54864" marT="54864" marB="54864">
+                  <a:tcPr marL="54864" marR="54864" marT="18288" marB="18288" anchor="ctr">
                     <a:lnL w="6350" cap="flat" cmpd="sng" algn="ctr">
                       <a:solidFill>
                         <a:srgbClr val="F8E8E2"/>
@@ -12298,7 +12294,7 @@
                   </a:tcPr>
                 </a:tc>
               </a:tr>
-              <a:tr h="310896">
+              <a:tr h="292608">
                 <a:tc>
                   <a:txBody>
                     <a:bodyPr/>
@@ -12325,7 +12321,7 @@
                       </a:endParaRPr>
                     </a:p>
                   </a:txBody>
-                  <a:tcPr marL="54864" marR="54864" marT="54864" marB="54864">
+                  <a:tcPr marL="54864" marR="54864" marT="18288" marB="18288" anchor="ctr">
                     <a:lnL w="6350" cap="flat" cmpd="sng" algn="ctr">
                       <a:solidFill>
                         <a:srgbClr val="F8E8E2"/>
@@ -12393,7 +12389,7 @@
                       </a:endParaRPr>
                     </a:p>
                   </a:txBody>
-                  <a:tcPr marL="54864" marR="54864" marT="54864" marB="54864">
+                  <a:tcPr marL="54864" marR="54864" marT="18288" marB="18288" anchor="ctr">
                     <a:lnL w="6350" cap="flat" cmpd="sng" algn="ctr">
                       <a:solidFill>
                         <a:srgbClr val="F8E8E2"/>
@@ -12461,7 +12457,7 @@
                       </a:endParaRPr>
                     </a:p>
                   </a:txBody>
-                  <a:tcPr marL="54864" marR="54864" marT="54864" marB="54864">
+                  <a:tcPr marL="54864" marR="54864" marT="18288" marB="18288" anchor="ctr">
                     <a:lnL w="6350" cap="flat" cmpd="sng" algn="ctr">
                       <a:solidFill>
                         <a:srgbClr val="F8E8E2"/>
@@ -12529,7 +12525,7 @@
                       </a:endParaRPr>
                     </a:p>
                   </a:txBody>
-                  <a:tcPr marL="54864" marR="54864" marT="54864" marB="54864">
+                  <a:tcPr marL="54864" marR="54864" marT="18288" marB="18288" anchor="ctr">
                     <a:lnL w="6350" cap="flat" cmpd="sng" algn="ctr">
                       <a:solidFill>
                         <a:srgbClr val="F8E8E2"/>
@@ -12572,7 +12568,7 @@
                   </a:tcPr>
                 </a:tc>
               </a:tr>
-              <a:tr h="310896">
+              <a:tr h="292608">
                 <a:tc>
                   <a:txBody>
                     <a:bodyPr/>
@@ -12599,7 +12595,7 @@
                       </a:endParaRPr>
                     </a:p>
                   </a:txBody>
-                  <a:tcPr marL="54864" marR="54864" marT="54864" marB="54864">
+                  <a:tcPr marL="54864" marR="54864" marT="18288" marB="18288" anchor="ctr">
                     <a:lnL w="6350" cap="flat" cmpd="sng" algn="ctr">
                       <a:solidFill>
                         <a:srgbClr val="F8E8E2"/>
@@ -12667,7 +12663,7 @@
                       </a:endParaRPr>
                     </a:p>
                   </a:txBody>
-                  <a:tcPr marL="54864" marR="54864" marT="54864" marB="54864">
+                  <a:tcPr marL="54864" marR="54864" marT="18288" marB="18288" anchor="ctr">
                     <a:lnL w="6350" cap="flat" cmpd="sng" algn="ctr">
                       <a:solidFill>
                         <a:srgbClr val="F8E8E2"/>
@@ -12735,7 +12731,7 @@
                       </a:endParaRPr>
                     </a:p>
                   </a:txBody>
-                  <a:tcPr marL="54864" marR="54864" marT="54864" marB="54864">
+                  <a:tcPr marL="54864" marR="54864" marT="18288" marB="18288" anchor="ctr">
                     <a:lnL w="6350" cap="flat" cmpd="sng" algn="ctr">
                       <a:solidFill>
                         <a:srgbClr val="F8E8E2"/>
@@ -12803,7 +12799,7 @@
                       </a:endParaRPr>
                     </a:p>
                   </a:txBody>
-                  <a:tcPr marL="54864" marR="54864" marT="54864" marB="54864">
+                  <a:tcPr marL="54864" marR="54864" marT="18288" marB="18288" anchor="ctr">
                     <a:lnL w="6350" cap="flat" cmpd="sng" algn="ctr">
                       <a:solidFill>
                         <a:srgbClr val="F8E8E2"/>
@@ -12846,7 +12842,7 @@
                   </a:tcPr>
                 </a:tc>
               </a:tr>
-              <a:tr h="310896">
+              <a:tr h="292608">
                 <a:tc>
                   <a:txBody>
                     <a:bodyPr/>
@@ -12873,7 +12869,7 @@
                       </a:endParaRPr>
                     </a:p>
                   </a:txBody>
-                  <a:tcPr marL="54864" marR="54864" marT="54864" marB="54864">
+                  <a:tcPr marL="54864" marR="54864" marT="18288" marB="18288" anchor="ctr">
                     <a:lnL w="6350" cap="flat" cmpd="sng" algn="ctr">
                       <a:solidFill>
                         <a:srgbClr val="F8E8E2"/>
@@ -12941,7 +12937,7 @@
                       </a:endParaRPr>
                     </a:p>
                   </a:txBody>
-                  <a:tcPr marL="54864" marR="54864" marT="54864" marB="54864">
+                  <a:tcPr marL="54864" marR="54864" marT="18288" marB="18288" anchor="ctr">
                     <a:lnL w="6350" cap="flat" cmpd="sng" algn="ctr">
                       <a:solidFill>
                         <a:srgbClr val="F8E8E2"/>
@@ -13009,7 +13005,7 @@
                       </a:endParaRPr>
                     </a:p>
                   </a:txBody>
-                  <a:tcPr marL="54864" marR="54864" marT="54864" marB="54864">
+                  <a:tcPr marL="54864" marR="54864" marT="18288" marB="18288" anchor="ctr">
                     <a:lnL w="6350" cap="flat" cmpd="sng" algn="ctr">
                       <a:solidFill>
                         <a:srgbClr val="F8E8E2"/>
@@ -13077,7 +13073,7 @@
                       </a:endParaRPr>
                     </a:p>
                   </a:txBody>
-                  <a:tcPr marL="54864" marR="54864" marT="54864" marB="54864">
+                  <a:tcPr marL="54864" marR="54864" marT="18288" marB="18288" anchor="ctr">
                     <a:lnL w="6350" cap="flat" cmpd="sng" algn="ctr">
                       <a:solidFill>
                         <a:srgbClr val="F8E8E2"/>
@@ -13120,7 +13116,7 @@
                   </a:tcPr>
                 </a:tc>
               </a:tr>
-              <a:tr h="310896">
+              <a:tr h="292608">
                 <a:tc>
                   <a:txBody>
                     <a:bodyPr/>
@@ -13147,7 +13143,7 @@
                       </a:endParaRPr>
                     </a:p>
                   </a:txBody>
-                  <a:tcPr marL="54864" marR="54864" marT="54864" marB="54864">
+                  <a:tcPr marL="54864" marR="54864" marT="18288" marB="18288" anchor="ctr">
                     <a:lnL w="6350" cap="flat" cmpd="sng" algn="ctr">
                       <a:solidFill>
                         <a:srgbClr val="F8E8E2"/>
@@ -13215,7 +13211,7 @@
                       </a:endParaRPr>
                     </a:p>
                   </a:txBody>
-                  <a:tcPr marL="54864" marR="54864" marT="54864" marB="54864">
+                  <a:tcPr marL="54864" marR="54864" marT="18288" marB="18288" anchor="ctr">
                     <a:lnL w="6350" cap="flat" cmpd="sng" algn="ctr">
                       <a:solidFill>
                         <a:srgbClr val="F8E8E2"/>
@@ -13283,7 +13279,7 @@
                       </a:endParaRPr>
                     </a:p>
                   </a:txBody>
-                  <a:tcPr marL="54864" marR="54864" marT="54864" marB="54864">
+                  <a:tcPr marL="54864" marR="54864" marT="18288" marB="18288" anchor="ctr">
                     <a:lnL w="6350" cap="flat" cmpd="sng" algn="ctr">
                       <a:solidFill>
                         <a:srgbClr val="F8E8E2"/>
@@ -13351,7 +13347,7 @@
                       </a:endParaRPr>
                     </a:p>
                   </a:txBody>
-                  <a:tcPr marL="54864" marR="54864" marT="54864" marB="54864">
+                  <a:tcPr marL="54864" marR="54864" marT="18288" marB="18288" anchor="ctr">
                     <a:lnL w="6350" cap="flat" cmpd="sng" algn="ctr">
                       <a:solidFill>
                         <a:srgbClr val="F8E8E2"/>
@@ -13394,7 +13390,7 @@
                   </a:tcPr>
                 </a:tc>
               </a:tr>
-              <a:tr h="310896">
+              <a:tr h="292608">
                 <a:tc>
                   <a:txBody>
                     <a:bodyPr/>
@@ -13406,7 +13402,7 @@
                       <a:r>
                         <a:rPr lang="en-US" sz="1100" b="1" dirty="0">
                           <a:solidFill>
-                            <a:srgbClr val="1F3A5F"/>
+                            <a:srgbClr val="1A1A1A"/>
                           </a:solidFill>
                           <a:latin typeface="Arial" pitchFamily="34" charset="0"/>
                           <a:ea typeface="Arial" pitchFamily="34" charset="-122"/>
@@ -13421,7 +13417,7 @@
                       </a:endParaRPr>
                     </a:p>
                   </a:txBody>
-                  <a:tcPr marL="54864" marR="54864" marT="54864" marB="54864">
+                  <a:tcPr marL="54864" marR="54864" marT="18288" marB="18288" anchor="ctr">
                     <a:lnL w="6350" cap="flat" cmpd="sng" algn="ctr">
                       <a:solidFill>
                         <a:srgbClr val="F8E8E2"/>
@@ -13459,7 +13455,7 @@
                       <a:tailEnd type="none" w="med" len="med"/>
                     </a:lnB>
                     <a:solidFill>
-                      <a:srgbClr val="E4E7EC"/>
+                      <a:srgbClr val="F8E8E2"/>
                     </a:solidFill>
                   </a:tcPr>
                 </a:tc>
@@ -13474,7 +13470,7 @@
                       <a:r>
                         <a:rPr lang="en-US" sz="1100" b="1" dirty="0">
                           <a:solidFill>
-                            <a:srgbClr val="1F3A5F"/>
+                            <a:srgbClr val="1A1A1A"/>
                           </a:solidFill>
                           <a:latin typeface="Arial" pitchFamily="34" charset="0"/>
                           <a:ea typeface="Arial" pitchFamily="34" charset="-122"/>
@@ -13489,7 +13485,7 @@
                       </a:endParaRPr>
                     </a:p>
                   </a:txBody>
-                  <a:tcPr marL="54864" marR="54864" marT="54864" marB="54864">
+                  <a:tcPr marL="54864" marR="54864" marT="18288" marB="18288" anchor="ctr">
                     <a:lnL w="6350" cap="flat" cmpd="sng" algn="ctr">
                       <a:solidFill>
                         <a:srgbClr val="F8E8E2"/>
@@ -13527,7 +13523,7 @@
                       <a:tailEnd type="none" w="med" len="med"/>
                     </a:lnB>
                     <a:solidFill>
-                      <a:srgbClr val="E4E7EC"/>
+                      <a:srgbClr val="F8E8E2"/>
                     </a:solidFill>
                   </a:tcPr>
                 </a:tc>
@@ -13542,7 +13538,7 @@
                       <a:r>
                         <a:rPr lang="en-US" sz="1100" dirty="0">
                           <a:solidFill>
-                            <a:srgbClr val="1F3A5F"/>
+                            <a:srgbClr val="1A1A1A"/>
                           </a:solidFill>
                           <a:latin typeface="Arial" pitchFamily="34" charset="0"/>
                           <a:ea typeface="Arial" pitchFamily="34" charset="-122"/>
@@ -13557,7 +13553,7 @@
                       </a:endParaRPr>
                     </a:p>
                   </a:txBody>
-                  <a:tcPr marL="54864" marR="54864" marT="54864" marB="54864">
+                  <a:tcPr marL="54864" marR="54864" marT="18288" marB="18288" anchor="ctr">
                     <a:lnL w="6350" cap="flat" cmpd="sng" algn="ctr">
                       <a:solidFill>
                         <a:srgbClr val="F8E8E2"/>
@@ -13595,7 +13591,7 @@
                       <a:tailEnd type="none" w="med" len="med"/>
                     </a:lnB>
                     <a:solidFill>
-                      <a:srgbClr val="E4E7EC"/>
+                      <a:srgbClr val="F8E8E2"/>
                     </a:solidFill>
                   </a:tcPr>
                 </a:tc>
@@ -13610,7 +13606,7 @@
                       <a:r>
                         <a:rPr lang="en-US" sz="1100" b="1" dirty="0">
                           <a:solidFill>
-                            <a:srgbClr val="1F3A5F"/>
+                            <a:srgbClr val="1A1A1A"/>
                           </a:solidFill>
                           <a:latin typeface="Arial" pitchFamily="34" charset="0"/>
                           <a:ea typeface="Arial" pitchFamily="34" charset="-122"/>
@@ -13625,7 +13621,7 @@
                       </a:endParaRPr>
                     </a:p>
                   </a:txBody>
-                  <a:tcPr marL="54864" marR="54864" marT="54864" marB="54864">
+                  <a:tcPr marL="54864" marR="54864" marT="18288" marB="18288" anchor="ctr">
                     <a:lnL w="6350" cap="flat" cmpd="sng" algn="ctr">
                       <a:solidFill>
                         <a:srgbClr val="F8E8E2"/>
@@ -13663,7 +13659,7 @@
                       <a:tailEnd type="none" w="med" len="med"/>
                     </a:lnB>
                     <a:solidFill>
-                      <a:srgbClr val="E4E7EC"/>
+                      <a:srgbClr val="F8E8E2"/>
                     </a:solidFill>
                   </a:tcPr>
                 </a:tc>
@@ -13680,8 +13676,8 @@
         </p:nvSpPr>
         <p:spPr>
           <a:xfrm>
-            <a:off x="457200" y="3410712"/>
-            <a:ext cx="8229600" cy="1275588"/>
+            <a:off x="457200" y="3191256"/>
+            <a:ext cx="8229600" cy="1540764"/>
           </a:xfrm>
           <a:prstGeom prst="rect">
             <a:avLst/>
@@ -13690,9 +13686,7 @@
           <a:ln/>
         </p:spPr>
         <p:txBody>
-          <a:bodyPr wrap="square" lIns="0" tIns="0" rIns="0" bIns="0" rtlCol="0" anchor="t">
-            <a:normAutofit/>
-          </a:bodyPr>
+          <a:bodyPr wrap="square" lIns="0" tIns="0" rIns="0" bIns="0" rtlCol="0" anchor="t"/>
           <a:lstStyle/>
           <a:p>
             <a:pPr indent="0" marL="0">
@@ -13707,7 +13701,7 @@
                 <a:ea typeface="Arial" pitchFamily="34" charset="-122"/>
                 <a:cs typeface="Arial" pitchFamily="34" charset="-120"/>
               </a:rPr>
-              <a:t>Adjustments: about $75 per sq ft of size difference; $30,000–$45,000 for renovation level; $5,000–$10,000 for larger or better lots; 1–2% for market change since the sale; seller-paid costs subtracted. This is a broker's opinion of value based on comparable sales, not an appraisal. Full detail is in the written analysis. Sales data: Stellar MLS as of 2026-09-22. Deemed reliable but not guaranteed. This comparative market analysis is an opinion of price, not an appraisal, and isn't for lending purposes. Payment, tax and cost figures are estimates only, not lending or tax advice. Equal Housing Opportunity.</a:t>
+              <a:t>A broker's opinion of value from comparable sales, not an appraisal, and not for lending. Sales data: Stellar MLS as of 2026-09-22. Deemed reliable but not guaranteed. Equal Housing Opportunity.</a:t>
             </a:r>
             <a:endParaRPr lang="en-US" sz="1000" dirty="0"/>
           </a:p>
@@ -13715,7 +13709,7 @@
       </p:sp>
       <p:sp>
         <p:nvSpPr>
-          <p:cNvPr id="5" name="Text 2"/>
+          <p:cNvPr id="6" name="Text 2"/>
           <p:cNvSpPr txBox="1"/>
           <p:nvPr/>
         </p:nvSpPr>
@@ -13754,7 +13748,7 @@
       </p:sp>
       <p:sp>
         <p:nvSpPr>
-          <p:cNvPr id="6" name="Text 3"/>
+          <p:cNvPr id="7" name="Text 3"/>
           <p:cNvSpPr txBox="1"/>
           <p:nvPr/>
         </p:nvSpPr>
@@ -13949,7 +13943,7 @@
         <p:spPr>
           <a:xfrm>
             <a:off x="457200" y="2834640"/>
-            <a:ext cx="4114800" cy="1097280"/>
+            <a:ext cx="4206240" cy="1280160"/>
           </a:xfrm>
           <a:prstGeom prst="rect">
             <a:avLst/>
@@ -14015,7 +14009,7 @@
         <p:spPr>
           <a:xfrm>
             <a:off x="5440680" y="1371600"/>
-            <a:ext cx="3108960" cy="274320"/>
+            <a:ext cx="3017520" cy="274320"/>
           </a:xfrm>
           <a:prstGeom prst="rect">
             <a:avLst/>
@@ -14054,7 +14048,7 @@
         <p:spPr>
           <a:xfrm>
             <a:off x="5440680" y="1645920"/>
-            <a:ext cx="3108960" cy="457200"/>
+            <a:ext cx="3017520" cy="457200"/>
           </a:xfrm>
           <a:prstGeom prst="rect">
             <a:avLst/>
@@ -14093,7 +14087,7 @@
         <p:spPr>
           <a:xfrm>
             <a:off x="5440680" y="2103120"/>
-            <a:ext cx="3108960" cy="256032"/>
+            <a:ext cx="3017520" cy="256032"/>
           </a:xfrm>
           <a:prstGeom prst="rect">
             <a:avLst/>
@@ -14159,7 +14153,7 @@
         <p:spPr>
           <a:xfrm>
             <a:off x="5440680" y="2834640"/>
-            <a:ext cx="3108960" cy="274320"/>
+            <a:ext cx="3017520" cy="274320"/>
           </a:xfrm>
           <a:prstGeom prst="rect">
             <a:avLst/>
@@ -14198,7 +14192,7 @@
         <p:spPr>
           <a:xfrm>
             <a:off x="5440680" y="3108960"/>
-            <a:ext cx="3108960" cy="457200"/>
+            <a:ext cx="3017520" cy="457200"/>
           </a:xfrm>
           <a:prstGeom prst="rect">
             <a:avLst/>
@@ -14214,7 +14208,7 @@
               <a:buNone/>
             </a:pPr>
             <a:r>
-              <a:rPr lang="en-US" sz="1900" b="1" dirty="0">
+              <a:rPr lang="en-US" sz="2150" b="1" dirty="0">
                 <a:solidFill>
                   <a:srgbClr val="1A1A1A"/>
                 </a:solidFill>
@@ -14224,7 +14218,7 @@
               </a:rPr>
               <a:t>Low-to-mid $460,000s</a:t>
             </a:r>
-            <a:endParaRPr lang="en-US" sz="1900" dirty="0"/>
+            <a:endParaRPr lang="en-US" sz="2150" dirty="0"/>
           </a:p>
         </p:txBody>
       </p:sp>
@@ -14237,7 +14231,7 @@
         <p:spPr>
           <a:xfrm>
             <a:off x="5440680" y="3566160"/>
-            <a:ext cx="3108960" cy="256032"/>
+            <a:ext cx="3017520" cy="256032"/>
           </a:xfrm>
           <a:prstGeom prst="rect">
             <a:avLst/>
@@ -14449,7 +14443,7 @@
                 <a:ea typeface="Arial" pitchFamily="34" charset="-122"/>
                 <a:cs typeface="Arial" pitchFamily="34" charset="-120"/>
               </a:rPr>
-              <a:t>Five steps from the neighborhood's sales to one number</a:t>
+              <a:t>From the neighborhood's sales to one number</a:t>
             </a:r>
             <a:endParaRPr lang="en-US" sz="1300" dirty="0"/>
           </a:p>
@@ -14463,20 +14457,41 @@
         </p:nvSpPr>
         <p:spPr>
           <a:xfrm>
-            <a:off x="457200" y="1600200"/>
-            <a:ext cx="1444752" cy="2011680"/>
-          </a:xfrm>
-          <a:prstGeom prst="roundRect">
-            <a:avLst>
-              <a:gd name="adj" fmla="val 5063"/>
-            </a:avLst>
+            <a:off x="612648" y="1481328"/>
+            <a:ext cx="0" cy="2029968"/>
+          </a:xfrm>
+          <a:prstGeom prst="line">
+            <a:avLst/>
+          </a:prstGeom>
+          <a:noFill/>
+          <a:ln w="19050">
+            <a:solidFill>
+              <a:srgbClr val="F8E8E2"/>
+            </a:solidFill>
+            <a:prstDash val="solid"/>
+          </a:ln>
+        </p:spPr>
+      </p:sp>
+      <p:sp>
+        <p:nvSpPr>
+          <p:cNvPr id="5" name="Shape 3"/>
+          <p:cNvSpPr/>
+          <p:nvPr/>
+        </p:nvSpPr>
+        <p:spPr>
+          <a:xfrm>
+            <a:off x="457200" y="1325880"/>
+            <a:ext cx="310896" cy="310896"/>
+          </a:xfrm>
+          <a:prstGeom prst="ellipse">
+            <a:avLst/>
           </a:prstGeom>
           <a:solidFill>
             <a:srgbClr val="FBF2EE"/>
           </a:solidFill>
           <a:ln w="12700">
             <a:solidFill>
-              <a:srgbClr val="FBF2EE"/>
+              <a:srgbClr val="C2410C"/>
             </a:solidFill>
             <a:prstDash val="solid"/>
           </a:ln>
@@ -14484,53 +14499,14 @@
       </p:sp>
       <p:sp>
         <p:nvSpPr>
-          <p:cNvPr id="5" name="Text 3"/>
-          <p:cNvSpPr txBox="1"/>
-          <p:nvPr/>
-        </p:nvSpPr>
-        <p:spPr>
-          <a:xfrm>
-            <a:off x="566928" y="1874520"/>
-            <a:ext cx="1225296" cy="640080"/>
-          </a:xfrm>
-          <a:prstGeom prst="rect">
-            <a:avLst/>
-          </a:prstGeom>
-          <a:noFill/>
-          <a:ln/>
-        </p:spPr>
-        <p:txBody>
-          <a:bodyPr wrap="square" lIns="0" tIns="0" rIns="0" bIns="0" rtlCol="0" anchor="ctr"/>
-          <a:lstStyle/>
-          <a:p>
-            <a:pPr algn="ctr" indent="0" marL="0">
-              <a:buNone/>
-            </a:pPr>
-            <a:r>
-              <a:rPr lang="en-US" sz="2600" b="1" dirty="0">
-                <a:solidFill>
-                  <a:srgbClr val="C2410C"/>
-                </a:solidFill>
-                <a:latin typeface="Arial" pitchFamily="34" charset="0"/>
-                <a:ea typeface="Arial" pitchFamily="34" charset="-122"/>
-                <a:cs typeface="Arial" pitchFamily="34" charset="-120"/>
-              </a:rPr>
-              <a:t>33</a:t>
-            </a:r>
-            <a:endParaRPr lang="en-US" sz="2600" dirty="0"/>
-          </a:p>
-        </p:txBody>
-      </p:sp>
-      <p:sp>
-        <p:nvSpPr>
           <p:cNvPr id="6" name="Text 4"/>
           <p:cNvSpPr txBox="1"/>
           <p:nvPr/>
         </p:nvSpPr>
         <p:spPr>
           <a:xfrm>
-            <a:off x="566928" y="2606040"/>
-            <a:ext cx="1225296" cy="868680"/>
+            <a:off x="457200" y="1325880"/>
+            <a:ext cx="310896" cy="310896"/>
           </a:xfrm>
           <a:prstGeom prst="rect">
             <a:avLst/>
@@ -14539,10 +14515,88 @@
           <a:ln/>
         </p:spPr>
         <p:txBody>
+          <a:bodyPr wrap="square" lIns="0" tIns="0" rIns="0" bIns="0" rtlCol="0" anchor="ctr"/>
+          <a:lstStyle/>
+          <a:p>
+            <a:pPr algn="ctr" indent="0" marL="0">
+              <a:buNone/>
+            </a:pPr>
+            <a:r>
+              <a:rPr lang="en-US" sz="1100" b="1" dirty="0">
+                <a:solidFill>
+                  <a:srgbClr val="A23200"/>
+                </a:solidFill>
+                <a:latin typeface="Arial" pitchFamily="34" charset="0"/>
+                <a:ea typeface="Arial" pitchFamily="34" charset="-122"/>
+                <a:cs typeface="Arial" pitchFamily="34" charset="-120"/>
+              </a:rPr>
+              <a:t>1</a:t>
+            </a:r>
+            <a:endParaRPr lang="en-US" sz="1100" dirty="0"/>
+          </a:p>
+        </p:txBody>
+      </p:sp>
+      <p:sp>
+        <p:nvSpPr>
+          <p:cNvPr id="7" name="Text 5"/>
+          <p:cNvSpPr txBox="1"/>
+          <p:nvPr/>
+        </p:nvSpPr>
+        <p:spPr>
+          <a:xfrm>
+            <a:off x="960120" y="1289304"/>
+            <a:ext cx="4297680" cy="347472"/>
+          </a:xfrm>
+          <a:prstGeom prst="rect">
+            <a:avLst/>
+          </a:prstGeom>
+          <a:noFill/>
+          <a:ln/>
+        </p:spPr>
+        <p:txBody>
+          <a:bodyPr wrap="square" lIns="0" tIns="0" rIns="0" bIns="0" rtlCol="0" anchor="ctr"/>
+          <a:lstStyle/>
+          <a:p>
+            <a:pPr indent="0" marL="0">
+              <a:buNone/>
+            </a:pPr>
+            <a:r>
+              <a:rPr lang="en-US" sz="2200" b="1" dirty="0">
+                <a:solidFill>
+                  <a:srgbClr val="C2410C"/>
+                </a:solidFill>
+                <a:latin typeface="Arial" pitchFamily="34" charset="0"/>
+                <a:ea typeface="Arial" pitchFamily="34" charset="-122"/>
+                <a:cs typeface="Arial" pitchFamily="34" charset="-120"/>
+              </a:rPr>
+              <a:t>33</a:t>
+            </a:r>
+            <a:endParaRPr lang="en-US" sz="2200" dirty="0"/>
+          </a:p>
+        </p:txBody>
+      </p:sp>
+      <p:sp>
+        <p:nvSpPr>
+          <p:cNvPr id="8" name="Text 6"/>
+          <p:cNvSpPr txBox="1"/>
+          <p:nvPr/>
+        </p:nvSpPr>
+        <p:spPr>
+          <a:xfrm>
+            <a:off x="960120" y="1636776"/>
+            <a:ext cx="4297680" cy="219456"/>
+          </a:xfrm>
+          <a:prstGeom prst="rect">
+            <a:avLst/>
+          </a:prstGeom>
+          <a:noFill/>
+          <a:ln/>
+        </p:spPr>
+        <p:txBody>
           <a:bodyPr wrap="square" lIns="0" tIns="0" rIns="0" bIns="0" rtlCol="0" anchor="t"/>
           <a:lstStyle/>
           <a:p>
-            <a:pPr algn="ctr" indent="0" marL="0">
+            <a:pPr indent="0" marL="0">
               <a:buNone/>
             </a:pPr>
             <a:r>
@@ -14562,51 +14616,24 @@
       </p:sp>
       <p:sp>
         <p:nvSpPr>
-          <p:cNvPr id="7" name="Shape 5"/>
+          <p:cNvPr id="9" name="Shape 7"/>
           <p:cNvSpPr/>
           <p:nvPr/>
         </p:nvSpPr>
         <p:spPr>
           <a:xfrm>
-            <a:off x="1956816" y="2487168"/>
-            <a:ext cx="137160" cy="237744"/>
-          </a:xfrm>
-          <a:prstGeom prst="chevron">
-            <a:avLst/>
-          </a:prstGeom>
-          <a:solidFill>
-            <a:srgbClr val="A3ADB6"/>
-          </a:solidFill>
-          <a:ln w="12700">
-            <a:solidFill>
-              <a:srgbClr val="A3ADB6"/>
-            </a:solidFill>
-            <a:prstDash val="solid"/>
-          </a:ln>
-        </p:spPr>
-      </p:sp>
-      <p:sp>
-        <p:nvSpPr>
-          <p:cNvPr id="8" name="Shape 6"/>
-          <p:cNvSpPr/>
-          <p:nvPr/>
-        </p:nvSpPr>
-        <p:spPr>
-          <a:xfrm>
-            <a:off x="2148840" y="1600200"/>
-            <a:ext cx="1444752" cy="2011680"/>
-          </a:xfrm>
-          <a:prstGeom prst="roundRect">
-            <a:avLst>
-              <a:gd name="adj" fmla="val 5063"/>
-            </a:avLst>
+            <a:off x="457200" y="2002536"/>
+            <a:ext cx="310896" cy="310896"/>
+          </a:xfrm>
+          <a:prstGeom prst="ellipse">
+            <a:avLst/>
           </a:prstGeom>
           <a:solidFill>
             <a:srgbClr val="FBF2EE"/>
           </a:solidFill>
           <a:ln w="12700">
             <a:solidFill>
-              <a:srgbClr val="FBF2EE"/>
+              <a:srgbClr val="C2410C"/>
             </a:solidFill>
             <a:prstDash val="solid"/>
           </a:ln>
@@ -14614,53 +14641,14 @@
       </p:sp>
       <p:sp>
         <p:nvSpPr>
-          <p:cNvPr id="9" name="Text 7"/>
-          <p:cNvSpPr txBox="1"/>
-          <p:nvPr/>
-        </p:nvSpPr>
-        <p:spPr>
-          <a:xfrm>
-            <a:off x="2258568" y="1874520"/>
-            <a:ext cx="1225296" cy="640080"/>
-          </a:xfrm>
-          <a:prstGeom prst="rect">
-            <a:avLst/>
-          </a:prstGeom>
-          <a:noFill/>
-          <a:ln/>
-        </p:spPr>
-        <p:txBody>
-          <a:bodyPr wrap="square" lIns="0" tIns="0" rIns="0" bIns="0" rtlCol="0" anchor="ctr"/>
-          <a:lstStyle/>
-          <a:p>
-            <a:pPr algn="ctr" indent="0" marL="0">
-              <a:buNone/>
-            </a:pPr>
-            <a:r>
-              <a:rPr lang="en-US" sz="2600" b="1" dirty="0">
-                <a:solidFill>
-                  <a:srgbClr val="C2410C"/>
-                </a:solidFill>
-                <a:latin typeface="Arial" pitchFamily="34" charset="0"/>
-                <a:ea typeface="Arial" pitchFamily="34" charset="-122"/>
-                <a:cs typeface="Arial" pitchFamily="34" charset="-120"/>
-              </a:rPr>
-              <a:t>5</a:t>
-            </a:r>
-            <a:endParaRPr lang="en-US" sz="2600" dirty="0"/>
-          </a:p>
-        </p:txBody>
-      </p:sp>
-      <p:sp>
-        <p:nvSpPr>
           <p:cNvPr id="10" name="Text 8"/>
           <p:cNvSpPr txBox="1"/>
           <p:nvPr/>
         </p:nvSpPr>
         <p:spPr>
           <a:xfrm>
-            <a:off x="2258568" y="2606040"/>
-            <a:ext cx="1225296" cy="868680"/>
+            <a:off x="457200" y="2002536"/>
+            <a:ext cx="310896" cy="310896"/>
           </a:xfrm>
           <a:prstGeom prst="rect">
             <a:avLst/>
@@ -14669,10 +14657,88 @@
           <a:ln/>
         </p:spPr>
         <p:txBody>
+          <a:bodyPr wrap="square" lIns="0" tIns="0" rIns="0" bIns="0" rtlCol="0" anchor="ctr"/>
+          <a:lstStyle/>
+          <a:p>
+            <a:pPr algn="ctr" indent="0" marL="0">
+              <a:buNone/>
+            </a:pPr>
+            <a:r>
+              <a:rPr lang="en-US" sz="1100" b="1" dirty="0">
+                <a:solidFill>
+                  <a:srgbClr val="A23200"/>
+                </a:solidFill>
+                <a:latin typeface="Arial" pitchFamily="34" charset="0"/>
+                <a:ea typeface="Arial" pitchFamily="34" charset="-122"/>
+                <a:cs typeface="Arial" pitchFamily="34" charset="-120"/>
+              </a:rPr>
+              <a:t>2</a:t>
+            </a:r>
+            <a:endParaRPr lang="en-US" sz="1100" dirty="0"/>
+          </a:p>
+        </p:txBody>
+      </p:sp>
+      <p:sp>
+        <p:nvSpPr>
+          <p:cNvPr id="11" name="Text 9"/>
+          <p:cNvSpPr txBox="1"/>
+          <p:nvPr/>
+        </p:nvSpPr>
+        <p:spPr>
+          <a:xfrm>
+            <a:off x="960120" y="1965960"/>
+            <a:ext cx="4297680" cy="347472"/>
+          </a:xfrm>
+          <a:prstGeom prst="rect">
+            <a:avLst/>
+          </a:prstGeom>
+          <a:noFill/>
+          <a:ln/>
+        </p:spPr>
+        <p:txBody>
+          <a:bodyPr wrap="square" lIns="0" tIns="0" rIns="0" bIns="0" rtlCol="0" anchor="ctr"/>
+          <a:lstStyle/>
+          <a:p>
+            <a:pPr indent="0" marL="0">
+              <a:buNone/>
+            </a:pPr>
+            <a:r>
+              <a:rPr lang="en-US" sz="2200" b="1" dirty="0">
+                <a:solidFill>
+                  <a:srgbClr val="C2410C"/>
+                </a:solidFill>
+                <a:latin typeface="Arial" pitchFamily="34" charset="0"/>
+                <a:ea typeface="Arial" pitchFamily="34" charset="-122"/>
+                <a:cs typeface="Arial" pitchFamily="34" charset="-120"/>
+              </a:rPr>
+              <a:t>5</a:t>
+            </a:r>
+            <a:endParaRPr lang="en-US" sz="2200" dirty="0"/>
+          </a:p>
+        </p:txBody>
+      </p:sp>
+      <p:sp>
+        <p:nvSpPr>
+          <p:cNvPr id="12" name="Text 10"/>
+          <p:cNvSpPr txBox="1"/>
+          <p:nvPr/>
+        </p:nvSpPr>
+        <p:spPr>
+          <a:xfrm>
+            <a:off x="960120" y="2313432"/>
+            <a:ext cx="4297680" cy="219456"/>
+          </a:xfrm>
+          <a:prstGeom prst="rect">
+            <a:avLst/>
+          </a:prstGeom>
+          <a:noFill/>
+          <a:ln/>
+        </p:spPr>
+        <p:txBody>
           <a:bodyPr wrap="square" lIns="0" tIns="0" rIns="0" bIns="0" rtlCol="0" anchor="t"/>
           <a:lstStyle/>
           <a:p>
-            <a:pPr algn="ctr" indent="0" marL="0">
+            <a:pPr indent="0" marL="0">
               <a:buNone/>
             </a:pPr>
             <a:r>
@@ -14692,51 +14758,24 @@
       </p:sp>
       <p:sp>
         <p:nvSpPr>
-          <p:cNvPr id="11" name="Shape 9"/>
+          <p:cNvPr id="13" name="Shape 11"/>
           <p:cNvSpPr/>
           <p:nvPr/>
         </p:nvSpPr>
         <p:spPr>
           <a:xfrm>
-            <a:off x="3648456" y="2487168"/>
-            <a:ext cx="137160" cy="237744"/>
-          </a:xfrm>
-          <a:prstGeom prst="chevron">
-            <a:avLst/>
-          </a:prstGeom>
-          <a:solidFill>
-            <a:srgbClr val="A3ADB6"/>
-          </a:solidFill>
-          <a:ln w="12700">
-            <a:solidFill>
-              <a:srgbClr val="A3ADB6"/>
-            </a:solidFill>
-            <a:prstDash val="solid"/>
-          </a:ln>
-        </p:spPr>
-      </p:sp>
-      <p:sp>
-        <p:nvSpPr>
-          <p:cNvPr id="12" name="Shape 10"/>
-          <p:cNvSpPr/>
-          <p:nvPr/>
-        </p:nvSpPr>
-        <p:spPr>
-          <a:xfrm>
-            <a:off x="3840480" y="1600200"/>
-            <a:ext cx="1444752" cy="2011680"/>
-          </a:xfrm>
-          <a:prstGeom prst="roundRect">
-            <a:avLst>
-              <a:gd name="adj" fmla="val 5063"/>
-            </a:avLst>
+            <a:off x="457200" y="2679192"/>
+            <a:ext cx="310896" cy="310896"/>
+          </a:xfrm>
+          <a:prstGeom prst="ellipse">
+            <a:avLst/>
           </a:prstGeom>
           <a:solidFill>
             <a:srgbClr val="FBF2EE"/>
           </a:solidFill>
           <a:ln w="12700">
             <a:solidFill>
-              <a:srgbClr val="FBF2EE"/>
+              <a:srgbClr val="C2410C"/>
             </a:solidFill>
             <a:prstDash val="solid"/>
           </a:ln>
@@ -14744,53 +14783,14 @@
       </p:sp>
       <p:sp>
         <p:nvSpPr>
-          <p:cNvPr id="13" name="Text 11"/>
-          <p:cNvSpPr txBox="1"/>
-          <p:nvPr/>
-        </p:nvSpPr>
-        <p:spPr>
-          <a:xfrm>
-            <a:off x="3950208" y="1874520"/>
-            <a:ext cx="1225296" cy="640080"/>
-          </a:xfrm>
-          <a:prstGeom prst="rect">
-            <a:avLst/>
-          </a:prstGeom>
-          <a:noFill/>
-          <a:ln/>
-        </p:spPr>
-        <p:txBody>
-          <a:bodyPr wrap="square" lIns="0" tIns="0" rIns="0" bIns="0" rtlCol="0" anchor="ctr"/>
-          <a:lstStyle/>
-          <a:p>
-            <a:pPr algn="ctr" indent="0" marL="0">
-              <a:buNone/>
-            </a:pPr>
-            <a:r>
-              <a:rPr lang="en-US" sz="1700" b="1" dirty="0">
-                <a:solidFill>
-                  <a:srgbClr val="C2410C"/>
-                </a:solidFill>
-                <a:latin typeface="Arial" pitchFamily="34" charset="0"/>
-                <a:ea typeface="Arial" pitchFamily="34" charset="-122"/>
-                <a:cs typeface="Arial" pitchFamily="34" charset="-120"/>
-              </a:rPr>
-              <a:t>$436K–$492K</a:t>
-            </a:r>
-            <a:endParaRPr lang="en-US" sz="1700" dirty="0"/>
-          </a:p>
-        </p:txBody>
-      </p:sp>
-      <p:sp>
-        <p:nvSpPr>
           <p:cNvPr id="14" name="Text 12"/>
           <p:cNvSpPr txBox="1"/>
           <p:nvPr/>
         </p:nvSpPr>
         <p:spPr>
           <a:xfrm>
-            <a:off x="3950208" y="2606040"/>
-            <a:ext cx="1225296" cy="868680"/>
+            <a:off x="457200" y="2679192"/>
+            <a:ext cx="310896" cy="310896"/>
           </a:xfrm>
           <a:prstGeom prst="rect">
             <a:avLst/>
@@ -14799,10 +14799,88 @@
           <a:ln/>
         </p:spPr>
         <p:txBody>
+          <a:bodyPr wrap="square" lIns="0" tIns="0" rIns="0" bIns="0" rtlCol="0" anchor="ctr"/>
+          <a:lstStyle/>
+          <a:p>
+            <a:pPr algn="ctr" indent="0" marL="0">
+              <a:buNone/>
+            </a:pPr>
+            <a:r>
+              <a:rPr lang="en-US" sz="1100" b="1" dirty="0">
+                <a:solidFill>
+                  <a:srgbClr val="A23200"/>
+                </a:solidFill>
+                <a:latin typeface="Arial" pitchFamily="34" charset="0"/>
+                <a:ea typeface="Arial" pitchFamily="34" charset="-122"/>
+                <a:cs typeface="Arial" pitchFamily="34" charset="-120"/>
+              </a:rPr>
+              <a:t>3</a:t>
+            </a:r>
+            <a:endParaRPr lang="en-US" sz="1100" dirty="0"/>
+          </a:p>
+        </p:txBody>
+      </p:sp>
+      <p:sp>
+        <p:nvSpPr>
+          <p:cNvPr id="15" name="Text 13"/>
+          <p:cNvSpPr txBox="1"/>
+          <p:nvPr/>
+        </p:nvSpPr>
+        <p:spPr>
+          <a:xfrm>
+            <a:off x="960120" y="2642616"/>
+            <a:ext cx="4297680" cy="347472"/>
+          </a:xfrm>
+          <a:prstGeom prst="rect">
+            <a:avLst/>
+          </a:prstGeom>
+          <a:noFill/>
+          <a:ln/>
+        </p:spPr>
+        <p:txBody>
+          <a:bodyPr wrap="square" lIns="0" tIns="0" rIns="0" bIns="0" rtlCol="0" anchor="ctr"/>
+          <a:lstStyle/>
+          <a:p>
+            <a:pPr indent="0" marL="0">
+              <a:buNone/>
+            </a:pPr>
+            <a:r>
+              <a:rPr lang="en-US" sz="2200" b="1" dirty="0">
+                <a:solidFill>
+                  <a:srgbClr val="C2410C"/>
+                </a:solidFill>
+                <a:latin typeface="Arial" pitchFamily="34" charset="0"/>
+                <a:ea typeface="Arial" pitchFamily="34" charset="-122"/>
+                <a:cs typeface="Arial" pitchFamily="34" charset="-120"/>
+              </a:rPr>
+              <a:t>$436K–$492K</a:t>
+            </a:r>
+            <a:endParaRPr lang="en-US" sz="2200" dirty="0"/>
+          </a:p>
+        </p:txBody>
+      </p:sp>
+      <p:sp>
+        <p:nvSpPr>
+          <p:cNvPr id="16" name="Text 14"/>
+          <p:cNvSpPr txBox="1"/>
+          <p:nvPr/>
+        </p:nvSpPr>
+        <p:spPr>
+          <a:xfrm>
+            <a:off x="960120" y="2990088"/>
+            <a:ext cx="4297680" cy="219456"/>
+          </a:xfrm>
+          <a:prstGeom prst="rect">
+            <a:avLst/>
+          </a:prstGeom>
+          <a:noFill/>
+          <a:ln/>
+        </p:spPr>
+        <p:txBody>
           <a:bodyPr wrap="square" lIns="0" tIns="0" rIns="0" bIns="0" rtlCol="0" anchor="t"/>
           <a:lstStyle/>
           <a:p>
-            <a:pPr algn="ctr" indent="0" marL="0">
+            <a:pPr indent="0" marL="0">
               <a:buNone/>
             </a:pPr>
             <a:r>
@@ -14822,51 +14900,24 @@
       </p:sp>
       <p:sp>
         <p:nvSpPr>
-          <p:cNvPr id="15" name="Shape 13"/>
+          <p:cNvPr id="17" name="Shape 15"/>
           <p:cNvSpPr/>
           <p:nvPr/>
         </p:nvSpPr>
         <p:spPr>
           <a:xfrm>
-            <a:off x="5340096" y="2487168"/>
-            <a:ext cx="137160" cy="237744"/>
-          </a:xfrm>
-          <a:prstGeom prst="chevron">
-            <a:avLst/>
-          </a:prstGeom>
-          <a:solidFill>
-            <a:srgbClr val="A3ADB6"/>
-          </a:solidFill>
-          <a:ln w="12700">
-            <a:solidFill>
-              <a:srgbClr val="A3ADB6"/>
-            </a:solidFill>
-            <a:prstDash val="solid"/>
-          </a:ln>
-        </p:spPr>
-      </p:sp>
-      <p:sp>
-        <p:nvSpPr>
-          <p:cNvPr id="16" name="Shape 14"/>
-          <p:cNvSpPr/>
-          <p:nvPr/>
-        </p:nvSpPr>
-        <p:spPr>
-          <a:xfrm>
-            <a:off x="5532120" y="1600200"/>
-            <a:ext cx="1444752" cy="2011680"/>
-          </a:xfrm>
-          <a:prstGeom prst="roundRect">
-            <a:avLst>
-              <a:gd name="adj" fmla="val 5063"/>
-            </a:avLst>
+            <a:off x="457200" y="3355848"/>
+            <a:ext cx="310896" cy="310896"/>
+          </a:xfrm>
+          <a:prstGeom prst="ellipse">
+            <a:avLst/>
           </a:prstGeom>
           <a:solidFill>
             <a:srgbClr val="FBF2EE"/>
           </a:solidFill>
           <a:ln w="12700">
             <a:solidFill>
-              <a:srgbClr val="FBF2EE"/>
+              <a:srgbClr val="C2410C"/>
             </a:solidFill>
             <a:prstDash val="solid"/>
           </a:ln>
@@ -14874,53 +14925,14 @@
       </p:sp>
       <p:sp>
         <p:nvSpPr>
-          <p:cNvPr id="17" name="Text 15"/>
-          <p:cNvSpPr txBox="1"/>
-          <p:nvPr/>
-        </p:nvSpPr>
-        <p:spPr>
-          <a:xfrm>
-            <a:off x="5641848" y="1874520"/>
-            <a:ext cx="1225296" cy="640080"/>
-          </a:xfrm>
-          <a:prstGeom prst="rect">
-            <a:avLst/>
-          </a:prstGeom>
-          <a:noFill/>
-          <a:ln/>
-        </p:spPr>
-        <p:txBody>
-          <a:bodyPr wrap="square" lIns="0" tIns="0" rIns="0" bIns="0" rtlCol="0" anchor="ctr"/>
-          <a:lstStyle/>
-          <a:p>
-            <a:pPr algn="ctr" indent="0" marL="0">
-              <a:buNone/>
-            </a:pPr>
-            <a:r>
-              <a:rPr lang="en-US" sz="1700" b="1" dirty="0">
-                <a:solidFill>
-                  <a:srgbClr val="C2410C"/>
-                </a:solidFill>
-                <a:latin typeface="Arial" pitchFamily="34" charset="0"/>
-                <a:ea typeface="Arial" pitchFamily="34" charset="-122"/>
-                <a:cs typeface="Arial" pitchFamily="34" charset="-120"/>
-              </a:rPr>
-              <a:t>$469,800</a:t>
-            </a:r>
-            <a:endParaRPr lang="en-US" sz="1700" dirty="0"/>
-          </a:p>
-        </p:txBody>
-      </p:sp>
-      <p:sp>
-        <p:nvSpPr>
           <p:cNvPr id="18" name="Text 16"/>
           <p:cNvSpPr txBox="1"/>
           <p:nvPr/>
         </p:nvSpPr>
         <p:spPr>
           <a:xfrm>
-            <a:off x="5641848" y="2606040"/>
-            <a:ext cx="1225296" cy="868680"/>
+            <a:off x="457200" y="3355848"/>
+            <a:ext cx="310896" cy="310896"/>
           </a:xfrm>
           <a:prstGeom prst="rect">
             <a:avLst/>
@@ -14929,10 +14941,88 @@
           <a:ln/>
         </p:spPr>
         <p:txBody>
+          <a:bodyPr wrap="square" lIns="0" tIns="0" rIns="0" bIns="0" rtlCol="0" anchor="ctr"/>
+          <a:lstStyle/>
+          <a:p>
+            <a:pPr algn="ctr" indent="0" marL="0">
+              <a:buNone/>
+            </a:pPr>
+            <a:r>
+              <a:rPr lang="en-US" sz="1100" b="1" dirty="0">
+                <a:solidFill>
+                  <a:srgbClr val="A23200"/>
+                </a:solidFill>
+                <a:latin typeface="Arial" pitchFamily="34" charset="0"/>
+                <a:ea typeface="Arial" pitchFamily="34" charset="-122"/>
+                <a:cs typeface="Arial" pitchFamily="34" charset="-120"/>
+              </a:rPr>
+              <a:t>4</a:t>
+            </a:r>
+            <a:endParaRPr lang="en-US" sz="1100" dirty="0"/>
+          </a:p>
+        </p:txBody>
+      </p:sp>
+      <p:sp>
+        <p:nvSpPr>
+          <p:cNvPr id="19" name="Text 17"/>
+          <p:cNvSpPr txBox="1"/>
+          <p:nvPr/>
+        </p:nvSpPr>
+        <p:spPr>
+          <a:xfrm>
+            <a:off x="960120" y="3319272"/>
+            <a:ext cx="4297680" cy="347472"/>
+          </a:xfrm>
+          <a:prstGeom prst="rect">
+            <a:avLst/>
+          </a:prstGeom>
+          <a:noFill/>
+          <a:ln/>
+        </p:spPr>
+        <p:txBody>
+          <a:bodyPr wrap="square" lIns="0" tIns="0" rIns="0" bIns="0" rtlCol="0" anchor="ctr"/>
+          <a:lstStyle/>
+          <a:p>
+            <a:pPr indent="0" marL="0">
+              <a:buNone/>
+            </a:pPr>
+            <a:r>
+              <a:rPr lang="en-US" sz="2200" b="1" dirty="0">
+                <a:solidFill>
+                  <a:srgbClr val="C2410C"/>
+                </a:solidFill>
+                <a:latin typeface="Arial" pitchFamily="34" charset="0"/>
+                <a:ea typeface="Arial" pitchFamily="34" charset="-122"/>
+                <a:cs typeface="Arial" pitchFamily="34" charset="-120"/>
+              </a:rPr>
+              <a:t>$469,800</a:t>
+            </a:r>
+            <a:endParaRPr lang="en-US" sz="2200" dirty="0"/>
+          </a:p>
+        </p:txBody>
+      </p:sp>
+      <p:sp>
+        <p:nvSpPr>
+          <p:cNvPr id="20" name="Text 18"/>
+          <p:cNvSpPr txBox="1"/>
+          <p:nvPr/>
+        </p:nvSpPr>
+        <p:spPr>
+          <a:xfrm>
+            <a:off x="960120" y="3666744"/>
+            <a:ext cx="4297680" cy="219456"/>
+          </a:xfrm>
+          <a:prstGeom prst="rect">
+            <a:avLst/>
+          </a:prstGeom>
+          <a:noFill/>
+          <a:ln/>
+        </p:spPr>
+        <p:txBody>
           <a:bodyPr wrap="square" lIns="0" tIns="0" rIns="0" bIns="0" rtlCol="0" anchor="t"/>
           <a:lstStyle/>
           <a:p>
-            <a:pPr algn="ctr" indent="0" marL="0">
+            <a:pPr indent="0" marL="0">
               <a:buNone/>
             </a:pPr>
             <a:r>
@@ -14952,43 +15042,18 @@
       </p:sp>
       <p:sp>
         <p:nvSpPr>
-          <p:cNvPr id="19" name="Shape 17"/>
+          <p:cNvPr id="21" name="Shape 19"/>
           <p:cNvSpPr/>
           <p:nvPr/>
         </p:nvSpPr>
         <p:spPr>
           <a:xfrm>
-            <a:off x="7031736" y="2487168"/>
-            <a:ext cx="137160" cy="237744"/>
-          </a:xfrm>
-          <a:prstGeom prst="chevron">
-            <a:avLst/>
-          </a:prstGeom>
-          <a:solidFill>
-            <a:srgbClr val="A3ADB6"/>
-          </a:solidFill>
-          <a:ln w="12700">
-            <a:solidFill>
-              <a:srgbClr val="A3ADB6"/>
-            </a:solidFill>
-            <a:prstDash val="solid"/>
-          </a:ln>
-        </p:spPr>
-      </p:sp>
-      <p:sp>
-        <p:nvSpPr>
-          <p:cNvPr id="20" name="Shape 18"/>
-          <p:cNvSpPr/>
-          <p:nvPr/>
-        </p:nvSpPr>
-        <p:spPr>
-          <a:xfrm>
-            <a:off x="7223760" y="1600200"/>
-            <a:ext cx="1444752" cy="2011680"/>
+            <a:off x="5669280" y="1280160"/>
+            <a:ext cx="3017520" cy="2651760"/>
           </a:xfrm>
           <a:prstGeom prst="roundRect">
             <a:avLst>
-              <a:gd name="adj" fmla="val 5063"/>
+              <a:gd name="adj" fmla="val 2759"/>
             </a:avLst>
           </a:prstGeom>
           <a:solidFill>
@@ -15004,53 +15069,14 @@
       </p:sp>
       <p:sp>
         <p:nvSpPr>
-          <p:cNvPr id="21" name="Text 19"/>
-          <p:cNvSpPr txBox="1"/>
-          <p:nvPr/>
-        </p:nvSpPr>
-        <p:spPr>
-          <a:xfrm>
-            <a:off x="7333488" y="1874520"/>
-            <a:ext cx="1225296" cy="640080"/>
-          </a:xfrm>
-          <a:prstGeom prst="rect">
-            <a:avLst/>
-          </a:prstGeom>
-          <a:noFill/>
-          <a:ln/>
-        </p:spPr>
-        <p:txBody>
-          <a:bodyPr wrap="square" lIns="0" tIns="0" rIns="0" bIns="0" rtlCol="0" anchor="ctr"/>
-          <a:lstStyle/>
-          <a:p>
-            <a:pPr algn="ctr" indent="0" marL="0">
-              <a:buNone/>
-            </a:pPr>
-            <a:r>
-              <a:rPr lang="en-US" sz="1700" b="1" dirty="0">
-                <a:solidFill>
-                  <a:srgbClr val="FFFFFF"/>
-                </a:solidFill>
-                <a:latin typeface="Arial" pitchFamily="34" charset="0"/>
-                <a:ea typeface="Arial" pitchFamily="34" charset="-122"/>
-                <a:cs typeface="Arial" pitchFamily="34" charset="-120"/>
-              </a:rPr>
-              <a:t>$469,900</a:t>
-            </a:r>
-            <a:endParaRPr lang="en-US" sz="1700" dirty="0"/>
-          </a:p>
-        </p:txBody>
-      </p:sp>
-      <p:sp>
-        <p:nvSpPr>
           <p:cNvPr id="22" name="Text 20"/>
           <p:cNvSpPr txBox="1"/>
           <p:nvPr/>
         </p:nvSpPr>
         <p:spPr>
           <a:xfrm>
-            <a:off x="7333488" y="2606040"/>
-            <a:ext cx="1225296" cy="868680"/>
+            <a:off x="5943600" y="1554480"/>
+            <a:ext cx="2468880" cy="274320"/>
           </a:xfrm>
           <a:prstGeom prst="rect">
             <a:avLst/>
@@ -15059,14 +15085,14 @@
           <a:ln/>
         </p:spPr>
         <p:txBody>
-          <a:bodyPr wrap="square" lIns="0" tIns="0" rIns="0" bIns="0" rtlCol="0" anchor="t"/>
-          <a:lstStyle/>
-          <a:p>
-            <a:pPr algn="ctr" indent="0" marL="0">
-              <a:buNone/>
-            </a:pPr>
-            <a:r>
-              <a:rPr lang="en-US" sz="1200" dirty="0">
+          <a:bodyPr wrap="square" lIns="0" tIns="0" rIns="0" bIns="0" rtlCol="0" anchor="ctr"/>
+          <a:lstStyle/>
+          <a:p>
+            <a:pPr indent="0" marL="0">
+              <a:buNone/>
+            </a:pPr>
+            <a:r>
+              <a:rPr lang="en-US" sz="1300" dirty="0">
                 <a:solidFill>
                   <a:srgbClr val="FFFFFF"/>
                 </a:solidFill>
@@ -15074,9 +15100,9 @@
                 <a:ea typeface="Arial" pitchFamily="34" charset="-122"/>
                 <a:cs typeface="Arial" pitchFamily="34" charset="-120"/>
               </a:rPr>
-              <a:t>recommended list price</a:t>
-            </a:r>
-            <a:endParaRPr lang="en-US" sz="1200" dirty="0"/>
+              <a:t>Recommended List Price</a:t>
+            </a:r>
+            <a:endParaRPr lang="en-US" sz="1300" dirty="0"/>
           </a:p>
         </p:txBody>
       </p:sp>
@@ -15088,8 +15114,8 @@
         </p:nvSpPr>
         <p:spPr>
           <a:xfrm>
-            <a:off x="457200" y="3931920"/>
-            <a:ext cx="8229600" cy="457200"/>
+            <a:off x="5943600" y="1874520"/>
+            <a:ext cx="2468880" cy="731520"/>
           </a:xfrm>
           <a:prstGeom prst="rect">
             <a:avLst/>
@@ -15105,17 +15131,17 @@
               <a:buNone/>
             </a:pPr>
             <a:r>
-              <a:rPr lang="en-US" sz="1200" dirty="0">
-                <a:solidFill>
-                  <a:srgbClr val="5A6672"/>
-                </a:solidFill>
-                <a:latin typeface="Arial" pitchFamily="34" charset="0"/>
-                <a:ea typeface="Arial" pitchFamily="34" charset="-122"/>
-                <a:cs typeface="Arial" pitchFamily="34" charset="-120"/>
-              </a:rPr>
-              <a:t>Adjustments cover size, larger corner lot, market since the sale, documented recent systems, renovation, partial update vs. full renovation, larger canal lot and seller credits.</a:t>
-            </a:r>
-            <a:endParaRPr lang="en-US" sz="1200" dirty="0"/>
+              <a:rPr lang="en-US" sz="4000" b="1" dirty="0">
+                <a:solidFill>
+                  <a:srgbClr val="FFFFFF"/>
+                </a:solidFill>
+                <a:latin typeface="Arial" pitchFamily="34" charset="0"/>
+                <a:ea typeface="Arial" pitchFamily="34" charset="-122"/>
+                <a:cs typeface="Arial" pitchFamily="34" charset="-120"/>
+              </a:rPr>
+              <a:t>$469,900</a:t>
+            </a:r>
+            <a:endParaRPr lang="en-US" sz="4000" dirty="0"/>
           </a:p>
         </p:txBody>
       </p:sp>
@@ -15127,6 +15153,123 @@
         </p:nvSpPr>
         <p:spPr>
           <a:xfrm>
+            <a:off x="5943600" y="3154680"/>
+            <a:ext cx="2468880" cy="228600"/>
+          </a:xfrm>
+          <a:prstGeom prst="rect">
+            <a:avLst/>
+          </a:prstGeom>
+          <a:noFill/>
+          <a:ln/>
+        </p:spPr>
+        <p:txBody>
+          <a:bodyPr wrap="square" lIns="0" tIns="0" rIns="0" bIns="0" rtlCol="0" anchor="ctr"/>
+          <a:lstStyle/>
+          <a:p>
+            <a:pPr indent="0" marL="0">
+              <a:buNone/>
+            </a:pPr>
+            <a:r>
+              <a:rPr lang="en-US" sz="1100" dirty="0">
+                <a:solidFill>
+                  <a:srgbClr val="FFFFFF"/>
+                </a:solidFill>
+                <a:latin typeface="Arial" pitchFamily="34" charset="0"/>
+                <a:ea typeface="Arial" pitchFamily="34" charset="-122"/>
+                <a:cs typeface="Arial" pitchFamily="34" charset="-120"/>
+              </a:rPr>
+              <a:t>Supported Value Range</a:t>
+            </a:r>
+            <a:endParaRPr lang="en-US" sz="1100" dirty="0"/>
+          </a:p>
+        </p:txBody>
+      </p:sp>
+      <p:sp>
+        <p:nvSpPr>
+          <p:cNvPr id="25" name="Text 23"/>
+          <p:cNvSpPr txBox="1"/>
+          <p:nvPr/>
+        </p:nvSpPr>
+        <p:spPr>
+          <a:xfrm>
+            <a:off x="5943600" y="3383280"/>
+            <a:ext cx="2468880" cy="320040"/>
+          </a:xfrm>
+          <a:prstGeom prst="rect">
+            <a:avLst/>
+          </a:prstGeom>
+          <a:noFill/>
+          <a:ln/>
+        </p:spPr>
+        <p:txBody>
+          <a:bodyPr wrap="square" lIns="0" tIns="0" rIns="0" bIns="0" rtlCol="0" anchor="ctr"/>
+          <a:lstStyle/>
+          <a:p>
+            <a:pPr indent="0" marL="0">
+              <a:buNone/>
+            </a:pPr>
+            <a:r>
+              <a:rPr lang="en-US" sz="1800" b="1" dirty="0">
+                <a:solidFill>
+                  <a:srgbClr val="FFFFFF"/>
+                </a:solidFill>
+                <a:latin typeface="Arial" pitchFamily="34" charset="0"/>
+                <a:ea typeface="Arial" pitchFamily="34" charset="-122"/>
+                <a:cs typeface="Arial" pitchFamily="34" charset="-120"/>
+              </a:rPr>
+              <a:t>$455K – $480K</a:t>
+            </a:r>
+            <a:endParaRPr lang="en-US" sz="1800" dirty="0"/>
+          </a:p>
+        </p:txBody>
+      </p:sp>
+      <p:sp>
+        <p:nvSpPr>
+          <p:cNvPr id="26" name="Text 24"/>
+          <p:cNvSpPr txBox="1"/>
+          <p:nvPr/>
+        </p:nvSpPr>
+        <p:spPr>
+          <a:xfrm>
+            <a:off x="457200" y="4160520"/>
+            <a:ext cx="8229600" cy="502920"/>
+          </a:xfrm>
+          <a:prstGeom prst="rect">
+            <a:avLst/>
+          </a:prstGeom>
+          <a:noFill/>
+          <a:ln/>
+        </p:spPr>
+        <p:txBody>
+          <a:bodyPr wrap="square" lIns="0" tIns="0" rIns="0" bIns="0" rtlCol="0" anchor="t"/>
+          <a:lstStyle/>
+          <a:p>
+            <a:pPr indent="0" marL="0">
+              <a:buNone/>
+            </a:pPr>
+            <a:r>
+              <a:rPr lang="en-US" sz="1100" dirty="0">
+                <a:solidFill>
+                  <a:srgbClr val="5A6672"/>
+                </a:solidFill>
+                <a:latin typeface="Arial" pitchFamily="34" charset="0"/>
+                <a:ea typeface="Arial" pitchFamily="34" charset="-122"/>
+                <a:cs typeface="Arial" pitchFamily="34" charset="-120"/>
+              </a:rPr>
+              <a:t>Adjustments cover size, larger corner lot, market since the sale, documented recent systems, renovation, partial update vs. full renovation, larger canal lot and seller credits.</a:t>
+            </a:r>
+            <a:endParaRPr lang="en-US" sz="1100" dirty="0"/>
+          </a:p>
+        </p:txBody>
+      </p:sp>
+      <p:sp>
+        <p:nvSpPr>
+          <p:cNvPr id="27" name="Text 25"/>
+          <p:cNvSpPr txBox="1"/>
+          <p:nvPr/>
+        </p:nvSpPr>
+        <p:spPr>
+          <a:xfrm>
             <a:off x="457200" y="4796028"/>
             <a:ext cx="6858000" cy="228600"/>
           </a:xfrm>
@@ -15160,7 +15303,7 @@
       </p:sp>
       <p:sp>
         <p:nvSpPr>
-          <p:cNvPr id="25" name="Text 23"/>
+          <p:cNvPr id="28" name="Text 26"/>
           <p:cNvSpPr txBox="1"/>
           <p:nvPr/>
         </p:nvSpPr>
@@ -15326,7 +15469,7 @@
         <p:spPr>
           <a:xfrm>
             <a:off x="1143000" y="1143000"/>
-            <a:ext cx="4023360" cy="274320"/>
+            <a:ext cx="4114800" cy="274320"/>
           </a:xfrm>
           <a:prstGeom prst="rect">
             <a:avLst/>
@@ -15364,8 +15507,8 @@
         </p:nvSpPr>
         <p:spPr>
           <a:xfrm>
-            <a:off x="1143000" y="1417320"/>
-            <a:ext cx="4023360" cy="411480"/>
+            <a:off x="1143000" y="1426464"/>
+            <a:ext cx="4114800" cy="420624"/>
           </a:xfrm>
           <a:prstGeom prst="rect">
             <a:avLst/>
@@ -15453,7 +15596,7 @@
         <p:spPr>
           <a:xfrm>
             <a:off x="1143000" y="1947672"/>
-            <a:ext cx="4023360" cy="274320"/>
+            <a:ext cx="4114800" cy="274320"/>
           </a:xfrm>
           <a:prstGeom prst="rect">
             <a:avLst/>
@@ -15491,8 +15634,8 @@
         </p:nvSpPr>
         <p:spPr>
           <a:xfrm>
-            <a:off x="1143000" y="2221992"/>
-            <a:ext cx="4023360" cy="411480"/>
+            <a:off x="1143000" y="2231136"/>
+            <a:ext cx="4114800" cy="420624"/>
           </a:xfrm>
           <a:prstGeom prst="rect">
             <a:avLst/>
@@ -15580,7 +15723,7 @@
         <p:spPr>
           <a:xfrm>
             <a:off x="1143000" y="2752344"/>
-            <a:ext cx="4023360" cy="274320"/>
+            <a:ext cx="4114800" cy="274320"/>
           </a:xfrm>
           <a:prstGeom prst="rect">
             <a:avLst/>
@@ -15618,8 +15761,8 @@
         </p:nvSpPr>
         <p:spPr>
           <a:xfrm>
-            <a:off x="1143000" y="3026664"/>
-            <a:ext cx="4023360" cy="411480"/>
+            <a:off x="1143000" y="3035808"/>
+            <a:ext cx="4114800" cy="420624"/>
           </a:xfrm>
           <a:prstGeom prst="rect">
             <a:avLst/>
@@ -15707,7 +15850,7 @@
         <p:spPr>
           <a:xfrm>
             <a:off x="1143000" y="3557016"/>
-            <a:ext cx="4023360" cy="274320"/>
+            <a:ext cx="4114800" cy="274320"/>
           </a:xfrm>
           <a:prstGeom prst="rect">
             <a:avLst/>
@@ -15745,8 +15888,8 @@
         </p:nvSpPr>
         <p:spPr>
           <a:xfrm>
-            <a:off x="1143000" y="3831336"/>
-            <a:ext cx="4023360" cy="411480"/>
+            <a:off x="1143000" y="3840480"/>
+            <a:ext cx="4114800" cy="420624"/>
           </a:xfrm>
           <a:prstGeom prst="rect">
             <a:avLst/>
@@ -15785,19 +15928,19 @@
         <p:spPr>
           <a:xfrm>
             <a:off x="5486400" y="1143000"/>
-            <a:ext cx="3200400" cy="3108960"/>
+            <a:ext cx="3200400" cy="3154680"/>
           </a:xfrm>
           <a:prstGeom prst="roundRect">
             <a:avLst>
-              <a:gd name="adj" fmla="val 2353"/>
+              <a:gd name="adj" fmla="val 2319"/>
             </a:avLst>
           </a:prstGeom>
           <a:solidFill>
-            <a:srgbClr val="E4E7EC"/>
+            <a:srgbClr val="F8E8E2"/>
           </a:solidFill>
           <a:ln w="12700">
             <a:solidFill>
-              <a:srgbClr val="E4E7EC"/>
+              <a:srgbClr val="F8E8E2"/>
             </a:solidFill>
             <a:prstDash val="solid"/>
           </a:ln>
@@ -15812,7 +15955,7 @@
         <p:spPr>
           <a:xfrm>
             <a:off x="5715000" y="1325880"/>
-            <a:ext cx="2834640" cy="320040"/>
+            <a:ext cx="2788920" cy="320040"/>
           </a:xfrm>
           <a:prstGeom prst="rect">
             <a:avLst/>
@@ -15830,7 +15973,7 @@
             <a:r>
               <a:rPr lang="en-US" sz="1500" b="1" dirty="0">
                 <a:solidFill>
-                  <a:srgbClr val="1F3A5F"/>
+                  <a:srgbClr val="A23200"/>
                 </a:solidFill>
                 <a:latin typeface="Arial" pitchFamily="34" charset="0"/>
                 <a:ea typeface="Arial" pitchFamily="34" charset="-122"/>
@@ -15857,11 +16000,11 @@
             <a:avLst/>
           </a:prstGeom>
           <a:solidFill>
-            <a:srgbClr val="1F3A5F"/>
+            <a:srgbClr val="7B2400"/>
           </a:solidFill>
           <a:ln w="12700">
             <a:solidFill>
-              <a:srgbClr val="1F3A5F"/>
+              <a:srgbClr val="7B2400"/>
             </a:solidFill>
             <a:prstDash val="solid"/>
           </a:ln>
@@ -15938,8 +16081,8 @@
         </p:nvSpPr>
         <p:spPr>
           <a:xfrm>
-            <a:off x="6263640" y="2103120"/>
-            <a:ext cx="2286000" cy="731520"/>
+            <a:off x="6263640" y="2121408"/>
+            <a:ext cx="2286000" cy="777240"/>
           </a:xfrm>
           <a:prstGeom prst="rect">
             <a:avLst/>
@@ -15977,18 +16120,18 @@
         </p:nvSpPr>
         <p:spPr>
           <a:xfrm>
-            <a:off x="5715000" y="2971800"/>
+            <a:off x="5715000" y="3017520"/>
             <a:ext cx="411480" cy="411480"/>
           </a:xfrm>
           <a:prstGeom prst="ellipse">
             <a:avLst/>
           </a:prstGeom>
           <a:solidFill>
-            <a:srgbClr val="1F3A5F"/>
+            <a:srgbClr val="7B2400"/>
           </a:solidFill>
           <a:ln w="12700">
             <a:solidFill>
-              <a:srgbClr val="1F3A5F"/>
+              <a:srgbClr val="7B2400"/>
             </a:solidFill>
             <a:prstDash val="solid"/>
           </a:ln>
@@ -16010,7 +16153,7 @@
         </p:blipFill>
         <p:spPr>
           <a:xfrm>
-            <a:off x="5813755" y="3070555"/>
+            <a:off x="5813755" y="3116275"/>
             <a:ext cx="213970" cy="213970"/>
           </a:xfrm>
           <a:prstGeom prst="rect">
@@ -16026,7 +16169,7 @@
         </p:nvSpPr>
         <p:spPr>
           <a:xfrm>
-            <a:off x="6263640" y="2971800"/>
+            <a:off x="6263640" y="3017520"/>
             <a:ext cx="2286000" cy="274320"/>
           </a:xfrm>
           <a:prstGeom prst="rect">
@@ -16065,8 +16208,8 @@
         </p:nvSpPr>
         <p:spPr>
           <a:xfrm>
-            <a:off x="6263640" y="3246120"/>
-            <a:ext cx="2286000" cy="731520"/>
+            <a:off x="6263640" y="3310128"/>
+            <a:ext cx="2286000" cy="777240"/>
           </a:xfrm>
           <a:prstGeom prst="rect">
             <a:avLst/>
@@ -16292,8 +16435,8 @@
         </p:nvSpPr>
         <p:spPr>
           <a:xfrm>
-            <a:off x="5596128" y="1325880"/>
-            <a:ext cx="1188720" cy="2468880"/>
+            <a:off x="5532120" y="1325880"/>
+            <a:ext cx="1143000" cy="2468880"/>
           </a:xfrm>
           <a:prstGeom prst="rect">
             <a:avLst/>
@@ -16379,7 +16522,7 @@
         </p:nvSpPr>
         <p:spPr>
           <a:xfrm>
-            <a:off x="4882896" y="1325880"/>
+            <a:off x="4846320" y="1325880"/>
             <a:ext cx="0" cy="2468880"/>
           </a:xfrm>
           <a:prstGeom prst="line">
@@ -16402,7 +16545,7 @@
         </p:nvSpPr>
         <p:spPr>
           <a:xfrm>
-            <a:off x="4517136" y="3840480"/>
+            <a:off x="4480560" y="3840480"/>
             <a:ext cx="731520" cy="228600"/>
           </a:xfrm>
           <a:prstGeom prst="rect">
@@ -16441,7 +16584,7 @@
         </p:nvSpPr>
         <p:spPr>
           <a:xfrm>
-            <a:off x="5833872" y="1325880"/>
+            <a:off x="5760720" y="1325880"/>
             <a:ext cx="0" cy="2468880"/>
           </a:xfrm>
           <a:prstGeom prst="line">
@@ -16464,7 +16607,7 @@
         </p:nvSpPr>
         <p:spPr>
           <a:xfrm>
-            <a:off x="5468112" y="3840480"/>
+            <a:off x="5394960" y="3840480"/>
             <a:ext cx="731520" cy="228600"/>
           </a:xfrm>
           <a:prstGeom prst="rect">
@@ -16503,7 +16646,7 @@
         </p:nvSpPr>
         <p:spPr>
           <a:xfrm>
-            <a:off x="6784848" y="1325880"/>
+            <a:off x="6675120" y="1325880"/>
             <a:ext cx="0" cy="2468880"/>
           </a:xfrm>
           <a:prstGeom prst="line">
@@ -16526,7 +16669,7 @@
         </p:nvSpPr>
         <p:spPr>
           <a:xfrm>
-            <a:off x="6419088" y="3840480"/>
+            <a:off x="6309360" y="3840480"/>
             <a:ext cx="731520" cy="228600"/>
           </a:xfrm>
           <a:prstGeom prst="rect">
@@ -16565,7 +16708,7 @@
         </p:nvSpPr>
         <p:spPr>
           <a:xfrm>
-            <a:off x="7735824" y="1325880"/>
+            <a:off x="7589520" y="1325880"/>
             <a:ext cx="0" cy="2468880"/>
           </a:xfrm>
           <a:prstGeom prst="line">
@@ -16588,7 +16731,7 @@
         </p:nvSpPr>
         <p:spPr>
           <a:xfrm>
-            <a:off x="7370064" y="3840480"/>
+            <a:off x="7223760" y="3840480"/>
             <a:ext cx="731520" cy="228600"/>
           </a:xfrm>
           <a:prstGeom prst="rect">
@@ -16627,7 +16770,7 @@
         </p:nvSpPr>
         <p:spPr>
           <a:xfrm>
-            <a:off x="8686800" y="1325880"/>
+            <a:off x="8503920" y="1325880"/>
             <a:ext cx="0" cy="2468880"/>
           </a:xfrm>
           <a:prstGeom prst="line">
@@ -16650,7 +16793,7 @@
         </p:nvSpPr>
         <p:spPr>
           <a:xfrm>
-            <a:off x="8321040" y="3840480"/>
+            <a:off x="8138160" y="3840480"/>
             <a:ext cx="731520" cy="228600"/>
           </a:xfrm>
           <a:prstGeom prst="rect">
@@ -16689,7 +16832,7 @@
         </p:nvSpPr>
         <p:spPr>
           <a:xfrm>
-            <a:off x="6304605" y="1188720"/>
+            <a:off x="6213348" y="1188720"/>
             <a:ext cx="0" cy="2606040"/>
           </a:xfrm>
           <a:prstGeom prst="line">
@@ -16698,7 +16841,7 @@
           <a:noFill/>
           <a:ln w="25400">
             <a:solidFill>
-              <a:srgbClr val="1F3A5F"/>
+              <a:srgbClr val="1A1A1A"/>
             </a:solidFill>
             <a:prstDash val="dash"/>
           </a:ln>
@@ -16712,7 +16855,7 @@
         </p:nvSpPr>
         <p:spPr>
           <a:xfrm>
-            <a:off x="5298765" y="960120"/>
+            <a:off x="5207508" y="960120"/>
             <a:ext cx="2011680" cy="228600"/>
           </a:xfrm>
           <a:prstGeom prst="rect">
@@ -16731,7 +16874,7 @@
             <a:r>
               <a:rPr lang="en-US" sz="1000" b="1" dirty="0">
                 <a:solidFill>
-                  <a:srgbClr val="1F3A5F"/>
+                  <a:srgbClr val="1A1A1A"/>
                 </a:solidFill>
                 <a:latin typeface="Arial" pitchFamily="34" charset="0"/>
                 <a:ea typeface="Arial" pitchFamily="34" charset="-122"/>
@@ -16752,7 +16895,7 @@
         <p:spPr>
           <a:xfrm>
             <a:off x="457200" y="1417320"/>
-            <a:ext cx="3383280" cy="219456"/>
+            <a:ext cx="3291840" cy="219456"/>
           </a:xfrm>
           <a:prstGeom prst="rect">
             <a:avLst/>
@@ -16791,7 +16934,7 @@
         <p:spPr>
           <a:xfrm>
             <a:off x="457200" y="1618488"/>
-            <a:ext cx="3383280" cy="201168"/>
+            <a:ext cx="3291840" cy="201168"/>
           </a:xfrm>
           <a:prstGeom prst="rect">
             <a:avLst/>
@@ -16829,7 +16972,7 @@
         </p:nvSpPr>
         <p:spPr>
           <a:xfrm>
-            <a:off x="7287402" y="1536192"/>
+            <a:off x="7155180" y="1536192"/>
             <a:ext cx="164592" cy="164592"/>
           </a:xfrm>
           <a:prstGeom prst="ellipse">
@@ -16854,7 +16997,7 @@
         </p:nvSpPr>
         <p:spPr>
           <a:xfrm>
-            <a:off x="7479426" y="1490472"/>
+            <a:off x="7347204" y="1490472"/>
             <a:ext cx="640080" cy="237744"/>
           </a:xfrm>
           <a:prstGeom prst="rect">
@@ -16894,7 +17037,7 @@
         <p:spPr>
           <a:xfrm>
             <a:off x="457200" y="1874520"/>
-            <a:ext cx="3383280" cy="219456"/>
+            <a:ext cx="3291840" cy="219456"/>
           </a:xfrm>
           <a:prstGeom prst="rect">
             <a:avLst/>
@@ -16933,7 +17076,7 @@
         <p:spPr>
           <a:xfrm>
             <a:off x="457200" y="2075688"/>
-            <a:ext cx="3383280" cy="201168"/>
+            <a:ext cx="3291840" cy="201168"/>
           </a:xfrm>
           <a:prstGeom prst="rect">
             <a:avLst/>
@@ -16971,7 +17114,7 @@
         </p:nvSpPr>
         <p:spPr>
           <a:xfrm>
-            <a:off x="6883237" y="1993392"/>
+            <a:off x="6766560" y="1993392"/>
             <a:ext cx="164592" cy="164592"/>
           </a:xfrm>
           <a:prstGeom prst="ellipse">
@@ -16996,7 +17139,7 @@
         </p:nvSpPr>
         <p:spPr>
           <a:xfrm>
-            <a:off x="7075261" y="1947672"/>
+            <a:off x="6958584" y="1947672"/>
             <a:ext cx="640080" cy="237744"/>
           </a:xfrm>
           <a:prstGeom prst="rect">
@@ -17036,7 +17179,7 @@
         <p:spPr>
           <a:xfrm>
             <a:off x="457200" y="2331720"/>
-            <a:ext cx="3383280" cy="219456"/>
+            <a:ext cx="3291840" cy="219456"/>
           </a:xfrm>
           <a:prstGeom prst="rect">
             <a:avLst/>
@@ -17075,7 +17218,7 @@
         <p:spPr>
           <a:xfrm>
             <a:off x="457200" y="2532888"/>
-            <a:ext cx="3383280" cy="201168"/>
+            <a:ext cx="3291840" cy="201168"/>
           </a:xfrm>
           <a:prstGeom prst="rect">
             <a:avLst/>
@@ -17113,7 +17256,7 @@
         </p:nvSpPr>
         <p:spPr>
           <a:xfrm>
-            <a:off x="6217554" y="2450592"/>
+            <a:off x="6126480" y="2450592"/>
             <a:ext cx="164592" cy="164592"/>
           </a:xfrm>
           <a:prstGeom prst="ellipse">
@@ -17138,7 +17281,7 @@
         </p:nvSpPr>
         <p:spPr>
           <a:xfrm>
-            <a:off x="6409578" y="2404872"/>
+            <a:off x="6318504" y="2404872"/>
             <a:ext cx="640080" cy="237744"/>
           </a:xfrm>
           <a:prstGeom prst="rect">
@@ -17178,7 +17321,7 @@
         <p:spPr>
           <a:xfrm>
             <a:off x="457200" y="2788920"/>
-            <a:ext cx="3383280" cy="219456"/>
+            <a:ext cx="3291840" cy="219456"/>
           </a:xfrm>
           <a:prstGeom prst="rect">
             <a:avLst/>
@@ -17217,7 +17360,7 @@
         <p:spPr>
           <a:xfrm>
             <a:off x="457200" y="2990088"/>
-            <a:ext cx="3383280" cy="201168"/>
+            <a:ext cx="3291840" cy="201168"/>
           </a:xfrm>
           <a:prstGeom prst="rect">
             <a:avLst/>
@@ -17255,7 +17398,7 @@
         </p:nvSpPr>
         <p:spPr>
           <a:xfrm>
-            <a:off x="4724522" y="2907792"/>
+            <a:off x="4690872" y="2907792"/>
             <a:ext cx="164592" cy="164592"/>
           </a:xfrm>
           <a:prstGeom prst="ellipse">
@@ -17280,7 +17423,7 @@
         </p:nvSpPr>
         <p:spPr>
           <a:xfrm>
-            <a:off x="4916546" y="2862072"/>
+            <a:off x="4882896" y="2862072"/>
             <a:ext cx="640080" cy="237744"/>
           </a:xfrm>
           <a:prstGeom prst="rect">
@@ -17320,7 +17463,7 @@
         <p:spPr>
           <a:xfrm>
             <a:off x="457200" y="3246120"/>
-            <a:ext cx="3383280" cy="219456"/>
+            <a:ext cx="3291840" cy="219456"/>
           </a:xfrm>
           <a:prstGeom prst="rect">
             <a:avLst/>
@@ -17359,7 +17502,7 @@
         <p:spPr>
           <a:xfrm>
             <a:off x="457200" y="3447288"/>
-            <a:ext cx="3383280" cy="201168"/>
+            <a:ext cx="3291840" cy="201168"/>
           </a:xfrm>
           <a:prstGeom prst="rect">
             <a:avLst/>
@@ -17397,7 +17540,7 @@
         </p:nvSpPr>
         <p:spPr>
           <a:xfrm>
-            <a:off x="4619915" y="3364992"/>
+            <a:off x="4590288" y="3364992"/>
             <a:ext cx="164592" cy="164592"/>
           </a:xfrm>
           <a:prstGeom prst="ellipse">
@@ -17422,7 +17565,7 @@
         </p:nvSpPr>
         <p:spPr>
           <a:xfrm>
-            <a:off x="4811939" y="3319272"/>
+            <a:off x="4782312" y="3319272"/>
             <a:ext cx="640080" cy="237744"/>
           </a:xfrm>
           <a:prstGeom prst="rect">
@@ -17461,8 +17604,8 @@
         </p:nvSpPr>
         <p:spPr>
           <a:xfrm>
-            <a:off x="457200" y="4160520"/>
-            <a:ext cx="8229600" cy="457200"/>
+            <a:off x="457200" y="4114800"/>
+            <a:ext cx="8229600" cy="502920"/>
           </a:xfrm>
           <a:prstGeom prst="rect">
             <a:avLst/>
@@ -17471,7 +17614,7 @@
           <a:ln/>
         </p:spPr>
         <p:txBody>
-          <a:bodyPr wrap="square" lIns="0" tIns="0" rIns="0" bIns="0" rtlCol="0" anchor="ctr"/>
+          <a:bodyPr wrap="square" lIns="0" tIns="0" rIns="0" bIns="0" rtlCol="0" anchor="t"/>
           <a:lstStyle/>
           <a:p>
             <a:pPr indent="0" marL="0">
@@ -17662,8 +17805,8 @@
           <p:nvPr/>
         </p:nvGraphicFramePr>
         <p:xfrm>
-          <a:off x="457200" y="960120"/>
-          <a:ext cx="5577840" cy="3749040"/>
+          <a:off x="365760" y="868680"/>
+          <a:ext cx="6537960" cy="3931920"/>
         </p:xfrm>
         <a:graphic xmlns:a="http://schemas.openxmlformats.org/drawingml/2006/main">
           <a:graphicData uri="http://schemas.openxmlformats.org/drawingml/2006/chart">
@@ -17679,20 +17822,18 @@
         </p:nvSpPr>
         <p:spPr>
           <a:xfrm>
-            <a:off x="6263640" y="1143000"/>
-            <a:ext cx="2423160" cy="2514600"/>
-          </a:xfrm>
-          <a:prstGeom prst="roundRect">
-            <a:avLst>
-              <a:gd name="adj" fmla="val 3019"/>
-            </a:avLst>
+            <a:off x="6949440" y="1143000"/>
+            <a:ext cx="45720" cy="3017520"/>
+          </a:xfrm>
+          <a:prstGeom prst="rect">
+            <a:avLst/>
           </a:prstGeom>
           <a:solidFill>
-            <a:srgbClr val="FBF2EE"/>
+            <a:srgbClr val="C2410C"/>
           </a:solidFill>
           <a:ln w="12700">
             <a:solidFill>
-              <a:srgbClr val="FBF2EE"/>
+              <a:srgbClr val="C2410C"/>
             </a:solidFill>
             <a:prstDash val="solid"/>
           </a:ln>
@@ -17706,8 +17847,8 @@
         </p:nvSpPr>
         <p:spPr>
           <a:xfrm>
-            <a:off x="6446520" y="1325880"/>
-            <a:ext cx="2103120" cy="1417320"/>
+            <a:off x="7086600" y="1143000"/>
+            <a:ext cx="1600200" cy="2011680"/>
           </a:xfrm>
           <a:prstGeom prst="rect">
             <a:avLst/>
@@ -17745,8 +17886,8 @@
         </p:nvSpPr>
         <p:spPr>
           <a:xfrm>
-            <a:off x="6446520" y="2788920"/>
-            <a:ext cx="2103120" cy="777240"/>
+            <a:off x="7086600" y="2910840"/>
+            <a:ext cx="1600200" cy="1249680"/>
           </a:xfrm>
           <a:prstGeom prst="rect">
             <a:avLst/>
@@ -17972,12 +18113,12 @@
         </p:nvSpPr>
         <p:spPr>
           <a:xfrm>
-            <a:off x="457200" y="1417320"/>
-            <a:ext cx="1874520" cy="2103120"/>
+            <a:off x="457200" y="1325880"/>
+            <a:ext cx="1885950" cy="2423160"/>
           </a:xfrm>
           <a:prstGeom prst="roundRect">
             <a:avLst>
-              <a:gd name="adj" fmla="val 3902"/>
+              <a:gd name="adj" fmla="val 3879"/>
             </a:avLst>
           </a:prstGeom>
           <a:solidFill>
@@ -17999,7 +18140,7 @@
         </p:nvSpPr>
         <p:spPr>
           <a:xfrm>
-            <a:off x="640080" y="1600200"/>
+            <a:off x="640080" y="1508760"/>
             <a:ext cx="411480" cy="411480"/>
           </a:xfrm>
           <a:prstGeom prst="ellipse">
@@ -18032,7 +18173,7 @@
         </p:blipFill>
         <p:spPr>
           <a:xfrm>
-            <a:off x="738835" y="1698955"/>
+            <a:off x="738835" y="1607515"/>
             <a:ext cx="213970" cy="213970"/>
           </a:xfrm>
           <a:prstGeom prst="rect">
@@ -18048,8 +18189,8 @@
         </p:nvSpPr>
         <p:spPr>
           <a:xfrm>
-            <a:off x="640080" y="2103120"/>
-            <a:ext cx="1508760" cy="457200"/>
+            <a:off x="640080" y="2011680"/>
+            <a:ext cx="1520190" cy="384048"/>
           </a:xfrm>
           <a:prstGeom prst="rect">
             <a:avLst/>
@@ -18065,9 +18206,9 @@
               <a:buNone/>
             </a:pPr>
             <a:r>
-              <a:rPr lang="en-US" sz="1200" dirty="0">
-                <a:solidFill>
-                  <a:srgbClr val="5A6672"/>
+              <a:rPr lang="en-US" sz="1200" b="1" dirty="0">
+                <a:solidFill>
+                  <a:srgbClr val="1A1A1A"/>
                 </a:solidFill>
                 <a:latin typeface="Arial" pitchFamily="34" charset="0"/>
                 <a:ea typeface="Arial" pitchFamily="34" charset="-122"/>
@@ -18087,8 +18228,8 @@
         </p:nvSpPr>
         <p:spPr>
           <a:xfrm>
-            <a:off x="640080" y="2606040"/>
-            <a:ext cx="1508760" cy="274320"/>
+            <a:off x="640080" y="2487168"/>
+            <a:ext cx="1520190" cy="182880"/>
           </a:xfrm>
           <a:prstGeom prst="rect">
             <a:avLst/>
@@ -18104,7 +18245,7 @@
               <a:buNone/>
             </a:pPr>
             <a:r>
-              <a:rPr lang="en-US" sz="1300" dirty="0">
+              <a:rPr lang="en-US" sz="900" dirty="0">
                 <a:solidFill>
                   <a:srgbClr val="5A6672"/>
                 </a:solidFill>
@@ -18112,9 +18253,9 @@
                 <a:ea typeface="Arial" pitchFamily="34" charset="-122"/>
                 <a:cs typeface="Arial" pitchFamily="34" charset="-120"/>
               </a:rPr>
-              <a:t>100%</a:t>
-            </a:r>
-            <a:endParaRPr lang="en-US" sz="1300" dirty="0"/>
+              <a:t>Spring</a:t>
+            </a:r>
+            <a:endParaRPr lang="en-US" sz="900" dirty="0"/>
           </a:p>
         </p:txBody>
       </p:sp>
@@ -18126,8 +18267,8 @@
         </p:nvSpPr>
         <p:spPr>
           <a:xfrm>
-            <a:off x="640080" y="2606040"/>
-            <a:ext cx="1508760" cy="274320"/>
+            <a:off x="640080" y="2660904"/>
+            <a:ext cx="1520190" cy="274320"/>
           </a:xfrm>
           <a:prstGeom prst="rect">
             <a:avLst/>
@@ -18139,11 +18280,11 @@
           <a:bodyPr wrap="square" lIns="0" tIns="0" rIns="0" bIns="0" rtlCol="0" anchor="ctr"/>
           <a:lstStyle/>
           <a:p>
-            <a:pPr algn="r" indent="0" marL="0">
-              <a:buNone/>
-            </a:pPr>
-            <a:r>
-              <a:rPr lang="en-US" sz="900" dirty="0">
+            <a:pPr indent="0" marL="0">
+              <a:buNone/>
+            </a:pPr>
+            <a:r>
+              <a:rPr lang="en-US" sz="1500" dirty="0">
                 <a:solidFill>
                   <a:srgbClr val="5A6672"/>
                 </a:solidFill>
@@ -18151,9 +18292,9 @@
                 <a:ea typeface="Arial" pitchFamily="34" charset="-122"/>
                 <a:cs typeface="Arial" pitchFamily="34" charset="-120"/>
               </a:rPr>
-              <a:t>Spring</a:t>
-            </a:r>
-            <a:endParaRPr lang="en-US" sz="900" dirty="0"/>
+              <a:t>100%</a:t>
+            </a:r>
+            <a:endParaRPr lang="en-US" sz="1500" dirty="0"/>
           </a:p>
         </p:txBody>
       </p:sp>
@@ -18165,8 +18306,8 @@
         </p:nvSpPr>
         <p:spPr>
           <a:xfrm>
-            <a:off x="640080" y="2898648"/>
-            <a:ext cx="1508760" cy="457200"/>
+            <a:off x="640080" y="3026664"/>
+            <a:ext cx="1520190" cy="182880"/>
           </a:xfrm>
           <a:prstGeom prst="rect">
             <a:avLst/>
@@ -18182,17 +18323,17 @@
               <a:buNone/>
             </a:pPr>
             <a:r>
-              <a:rPr lang="en-US" sz="2600" b="1" dirty="0">
-                <a:solidFill>
-                  <a:srgbClr val="C2410C"/>
-                </a:solidFill>
-                <a:latin typeface="Arial" pitchFamily="34" charset="0"/>
-                <a:ea typeface="Arial" pitchFamily="34" charset="-122"/>
-                <a:cs typeface="Arial" pitchFamily="34" charset="-120"/>
-              </a:rPr>
-              <a:t>95.2%</a:t>
-            </a:r>
-            <a:endParaRPr lang="en-US" sz="2600" dirty="0"/>
+              <a:rPr lang="en-US" sz="900" b="1" dirty="0">
+                <a:solidFill>
+                  <a:srgbClr val="A23200"/>
+                </a:solidFill>
+                <a:latin typeface="Arial" pitchFamily="34" charset="0"/>
+                <a:ea typeface="Arial" pitchFamily="34" charset="-122"/>
+                <a:cs typeface="Arial" pitchFamily="34" charset="-120"/>
+              </a:rPr>
+              <a:t>Now</a:t>
+            </a:r>
+            <a:endParaRPr lang="en-US" sz="900" dirty="0"/>
           </a:p>
         </p:txBody>
       </p:sp>
@@ -18204,8 +18345,8 @@
         </p:nvSpPr>
         <p:spPr>
           <a:xfrm>
-            <a:off x="640080" y="3017520"/>
-            <a:ext cx="1508760" cy="274320"/>
+            <a:off x="640080" y="3191256"/>
+            <a:ext cx="1520190" cy="438912"/>
           </a:xfrm>
           <a:prstGeom prst="rect">
             <a:avLst/>
@@ -18217,21 +18358,21 @@
           <a:bodyPr wrap="square" lIns="0" tIns="0" rIns="0" bIns="0" rtlCol="0" anchor="ctr"/>
           <a:lstStyle/>
           <a:p>
-            <a:pPr algn="r" indent="0" marL="0">
-              <a:buNone/>
-            </a:pPr>
-            <a:r>
-              <a:rPr lang="en-US" sz="900" dirty="0">
-                <a:solidFill>
-                  <a:srgbClr val="5A6672"/>
-                </a:solidFill>
-                <a:latin typeface="Arial" pitchFamily="34" charset="0"/>
-                <a:ea typeface="Arial" pitchFamily="34" charset="-122"/>
-                <a:cs typeface="Arial" pitchFamily="34" charset="-120"/>
-              </a:rPr>
-              <a:t>Now</a:t>
-            </a:r>
-            <a:endParaRPr lang="en-US" sz="900" dirty="0"/>
+            <a:pPr indent="0" marL="0">
+              <a:buNone/>
+            </a:pPr>
+            <a:r>
+              <a:rPr lang="en-US" sz="2800" b="1" dirty="0">
+                <a:solidFill>
+                  <a:srgbClr val="C2410C"/>
+                </a:solidFill>
+                <a:latin typeface="Arial" pitchFamily="34" charset="0"/>
+                <a:ea typeface="Arial" pitchFamily="34" charset="-122"/>
+                <a:cs typeface="Arial" pitchFamily="34" charset="-120"/>
+              </a:rPr>
+              <a:t>95.2%</a:t>
+            </a:r>
+            <a:endParaRPr lang="en-US" sz="2800" dirty="0"/>
           </a:p>
         </p:txBody>
       </p:sp>
@@ -18243,12 +18384,12 @@
         </p:nvSpPr>
         <p:spPr>
           <a:xfrm>
-            <a:off x="2606040" y="1417320"/>
-            <a:ext cx="1874520" cy="2103120"/>
+            <a:off x="2571750" y="1325880"/>
+            <a:ext cx="1885950" cy="2423160"/>
           </a:xfrm>
           <a:prstGeom prst="roundRect">
             <a:avLst>
-              <a:gd name="adj" fmla="val 3902"/>
+              <a:gd name="adj" fmla="val 3879"/>
             </a:avLst>
           </a:prstGeom>
           <a:solidFill>
@@ -18270,7 +18411,7 @@
         </p:nvSpPr>
         <p:spPr>
           <a:xfrm>
-            <a:off x="2788920" y="1600200"/>
+            <a:off x="2754630" y="1508760"/>
             <a:ext cx="411480" cy="411480"/>
           </a:xfrm>
           <a:prstGeom prst="ellipse">
@@ -18303,7 +18444,7 @@
         </p:blipFill>
         <p:spPr>
           <a:xfrm>
-            <a:off x="2887675" y="1698955"/>
+            <a:off x="2853385" y="1607515"/>
             <a:ext cx="213970" cy="213970"/>
           </a:xfrm>
           <a:prstGeom prst="rect">
@@ -18319,8 +18460,8 @@
         </p:nvSpPr>
         <p:spPr>
           <a:xfrm>
-            <a:off x="2788920" y="2103120"/>
-            <a:ext cx="1508760" cy="457200"/>
+            <a:off x="2754630" y="2011680"/>
+            <a:ext cx="1520190" cy="384048"/>
           </a:xfrm>
           <a:prstGeom prst="rect">
             <a:avLst/>
@@ -18336,9 +18477,9 @@
               <a:buNone/>
             </a:pPr>
             <a:r>
-              <a:rPr lang="en-US" sz="1200" dirty="0">
-                <a:solidFill>
-                  <a:srgbClr val="5A6672"/>
+              <a:rPr lang="en-US" sz="1200" b="1" dirty="0">
+                <a:solidFill>
+                  <a:srgbClr val="1A1A1A"/>
                 </a:solidFill>
                 <a:latin typeface="Arial" pitchFamily="34" charset="0"/>
                 <a:ea typeface="Arial" pitchFamily="34" charset="-122"/>
@@ -18358,8 +18499,8 @@
         </p:nvSpPr>
         <p:spPr>
           <a:xfrm>
-            <a:off x="2788920" y="2606040"/>
-            <a:ext cx="1508760" cy="274320"/>
+            <a:off x="2754630" y="2487168"/>
+            <a:ext cx="1520190" cy="182880"/>
           </a:xfrm>
           <a:prstGeom prst="rect">
             <a:avLst/>
@@ -18375,7 +18516,7 @@
               <a:buNone/>
             </a:pPr>
             <a:r>
-              <a:rPr lang="en-US" sz="1300" dirty="0">
+              <a:rPr lang="en-US" sz="900" dirty="0">
                 <a:solidFill>
                   <a:srgbClr val="5A6672"/>
                 </a:solidFill>
@@ -18383,9 +18524,9 @@
                 <a:ea typeface="Arial" pitchFamily="34" charset="-122"/>
                 <a:cs typeface="Arial" pitchFamily="34" charset="-120"/>
               </a:rPr>
-              <a:t>8</a:t>
-            </a:r>
-            <a:endParaRPr lang="en-US" sz="1300" dirty="0"/>
+              <a:t>Spring</a:t>
+            </a:r>
+            <a:endParaRPr lang="en-US" sz="900" dirty="0"/>
           </a:p>
         </p:txBody>
       </p:sp>
@@ -18397,8 +18538,8 @@
         </p:nvSpPr>
         <p:spPr>
           <a:xfrm>
-            <a:off x="2788920" y="2606040"/>
-            <a:ext cx="1508760" cy="274320"/>
+            <a:off x="2754630" y="2660904"/>
+            <a:ext cx="1520190" cy="274320"/>
           </a:xfrm>
           <a:prstGeom prst="rect">
             <a:avLst/>
@@ -18410,11 +18551,11 @@
           <a:bodyPr wrap="square" lIns="0" tIns="0" rIns="0" bIns="0" rtlCol="0" anchor="ctr"/>
           <a:lstStyle/>
           <a:p>
-            <a:pPr algn="r" indent="0" marL="0">
-              <a:buNone/>
-            </a:pPr>
-            <a:r>
-              <a:rPr lang="en-US" sz="900" dirty="0">
+            <a:pPr indent="0" marL="0">
+              <a:buNone/>
+            </a:pPr>
+            <a:r>
+              <a:rPr lang="en-US" sz="1500" dirty="0">
                 <a:solidFill>
                   <a:srgbClr val="5A6672"/>
                 </a:solidFill>
@@ -18422,9 +18563,9 @@
                 <a:ea typeface="Arial" pitchFamily="34" charset="-122"/>
                 <a:cs typeface="Arial" pitchFamily="34" charset="-120"/>
               </a:rPr>
-              <a:t>Spring</a:t>
-            </a:r>
-            <a:endParaRPr lang="en-US" sz="900" dirty="0"/>
+              <a:t>8</a:t>
+            </a:r>
+            <a:endParaRPr lang="en-US" sz="1500" dirty="0"/>
           </a:p>
         </p:txBody>
       </p:sp>
@@ -18436,8 +18577,8 @@
         </p:nvSpPr>
         <p:spPr>
           <a:xfrm>
-            <a:off x="2788920" y="2898648"/>
-            <a:ext cx="1508760" cy="457200"/>
+            <a:off x="2754630" y="3026664"/>
+            <a:ext cx="1520190" cy="182880"/>
           </a:xfrm>
           <a:prstGeom prst="rect">
             <a:avLst/>
@@ -18453,17 +18594,17 @@
               <a:buNone/>
             </a:pPr>
             <a:r>
-              <a:rPr lang="en-US" sz="2600" b="1" dirty="0">
-                <a:solidFill>
-                  <a:srgbClr val="C2410C"/>
-                </a:solidFill>
-                <a:latin typeface="Arial" pitchFamily="34" charset="0"/>
-                <a:ea typeface="Arial" pitchFamily="34" charset="-122"/>
-                <a:cs typeface="Arial" pitchFamily="34" charset="-120"/>
-              </a:rPr>
-              <a:t>22</a:t>
-            </a:r>
-            <a:endParaRPr lang="en-US" sz="2600" dirty="0"/>
+              <a:rPr lang="en-US" sz="900" b="1" dirty="0">
+                <a:solidFill>
+                  <a:srgbClr val="A23200"/>
+                </a:solidFill>
+                <a:latin typeface="Arial" pitchFamily="34" charset="0"/>
+                <a:ea typeface="Arial" pitchFamily="34" charset="-122"/>
+                <a:cs typeface="Arial" pitchFamily="34" charset="-120"/>
+              </a:rPr>
+              <a:t>Now</a:t>
+            </a:r>
+            <a:endParaRPr lang="en-US" sz="900" dirty="0"/>
           </a:p>
         </p:txBody>
       </p:sp>
@@ -18475,8 +18616,8 @@
         </p:nvSpPr>
         <p:spPr>
           <a:xfrm>
-            <a:off x="2788920" y="3017520"/>
-            <a:ext cx="1508760" cy="274320"/>
+            <a:off x="2754630" y="3191256"/>
+            <a:ext cx="1520190" cy="438912"/>
           </a:xfrm>
           <a:prstGeom prst="rect">
             <a:avLst/>
@@ -18488,21 +18629,21 @@
           <a:bodyPr wrap="square" lIns="0" tIns="0" rIns="0" bIns="0" rtlCol="0" anchor="ctr"/>
           <a:lstStyle/>
           <a:p>
-            <a:pPr algn="r" indent="0" marL="0">
-              <a:buNone/>
-            </a:pPr>
-            <a:r>
-              <a:rPr lang="en-US" sz="900" dirty="0">
-                <a:solidFill>
-                  <a:srgbClr val="5A6672"/>
-                </a:solidFill>
-                <a:latin typeface="Arial" pitchFamily="34" charset="0"/>
-                <a:ea typeface="Arial" pitchFamily="34" charset="-122"/>
-                <a:cs typeface="Arial" pitchFamily="34" charset="-120"/>
-              </a:rPr>
-              <a:t>Now</a:t>
-            </a:r>
-            <a:endParaRPr lang="en-US" sz="900" dirty="0"/>
+            <a:pPr indent="0" marL="0">
+              <a:buNone/>
+            </a:pPr>
+            <a:r>
+              <a:rPr lang="en-US" sz="2800" b="1" dirty="0">
+                <a:solidFill>
+                  <a:srgbClr val="C2410C"/>
+                </a:solidFill>
+                <a:latin typeface="Arial" pitchFamily="34" charset="0"/>
+                <a:ea typeface="Arial" pitchFamily="34" charset="-122"/>
+                <a:cs typeface="Arial" pitchFamily="34" charset="-120"/>
+              </a:rPr>
+              <a:t>22</a:t>
+            </a:r>
+            <a:endParaRPr lang="en-US" sz="2800" dirty="0"/>
           </a:p>
         </p:txBody>
       </p:sp>
@@ -18514,12 +18655,12 @@
         </p:nvSpPr>
         <p:spPr>
           <a:xfrm>
-            <a:off x="4754880" y="1417320"/>
-            <a:ext cx="1874520" cy="2103120"/>
+            <a:off x="4686300" y="1325880"/>
+            <a:ext cx="1885950" cy="2423160"/>
           </a:xfrm>
           <a:prstGeom prst="roundRect">
             <a:avLst>
-              <a:gd name="adj" fmla="val 3902"/>
+              <a:gd name="adj" fmla="val 3879"/>
             </a:avLst>
           </a:prstGeom>
           <a:solidFill>
@@ -18541,7 +18682,7 @@
         </p:nvSpPr>
         <p:spPr>
           <a:xfrm>
-            <a:off x="4937760" y="1600200"/>
+            <a:off x="4869180" y="1508760"/>
             <a:ext cx="411480" cy="411480"/>
           </a:xfrm>
           <a:prstGeom prst="ellipse">
@@ -18574,7 +18715,7 @@
         </p:blipFill>
         <p:spPr>
           <a:xfrm>
-            <a:off x="5036515" y="1698955"/>
+            <a:off x="4967935" y="1607515"/>
             <a:ext cx="213970" cy="213970"/>
           </a:xfrm>
           <a:prstGeom prst="rect">
@@ -18590,8 +18731,8 @@
         </p:nvSpPr>
         <p:spPr>
           <a:xfrm>
-            <a:off x="4937760" y="2103120"/>
-            <a:ext cx="1508760" cy="457200"/>
+            <a:off x="4869180" y="2011680"/>
+            <a:ext cx="1520190" cy="384048"/>
           </a:xfrm>
           <a:prstGeom prst="rect">
             <a:avLst/>
@@ -18607,9 +18748,9 @@
               <a:buNone/>
             </a:pPr>
             <a:r>
-              <a:rPr lang="en-US" sz="1200" dirty="0">
-                <a:solidFill>
-                  <a:srgbClr val="5A6672"/>
+              <a:rPr lang="en-US" sz="1200" b="1" dirty="0">
+                <a:solidFill>
+                  <a:srgbClr val="1A1A1A"/>
                 </a:solidFill>
                 <a:latin typeface="Arial" pitchFamily="34" charset="0"/>
                 <a:ea typeface="Arial" pitchFamily="34" charset="-122"/>
@@ -18629,8 +18770,8 @@
         </p:nvSpPr>
         <p:spPr>
           <a:xfrm>
-            <a:off x="4937760" y="2606040"/>
-            <a:ext cx="1508760" cy="274320"/>
+            <a:off x="4869180" y="2487168"/>
+            <a:ext cx="1520190" cy="182880"/>
           </a:xfrm>
           <a:prstGeom prst="rect">
             <a:avLst/>
@@ -18646,7 +18787,7 @@
               <a:buNone/>
             </a:pPr>
             <a:r>
-              <a:rPr lang="en-US" sz="1300" dirty="0">
+              <a:rPr lang="en-US" sz="900" dirty="0">
                 <a:solidFill>
                   <a:srgbClr val="5A6672"/>
                 </a:solidFill>
@@ -18654,9 +18795,9 @@
                 <a:ea typeface="Arial" pitchFamily="34" charset="-122"/>
                 <a:cs typeface="Arial" pitchFamily="34" charset="-120"/>
               </a:rPr>
-              <a:t>50%</a:t>
-            </a:r>
-            <a:endParaRPr lang="en-US" sz="1300" dirty="0"/>
+              <a:t>Spring</a:t>
+            </a:r>
+            <a:endParaRPr lang="en-US" sz="900" dirty="0"/>
           </a:p>
         </p:txBody>
       </p:sp>
@@ -18668,8 +18809,8 @@
         </p:nvSpPr>
         <p:spPr>
           <a:xfrm>
-            <a:off x="4937760" y="2606040"/>
-            <a:ext cx="1508760" cy="274320"/>
+            <a:off x="4869180" y="2660904"/>
+            <a:ext cx="1520190" cy="274320"/>
           </a:xfrm>
           <a:prstGeom prst="rect">
             <a:avLst/>
@@ -18681,11 +18822,11 @@
           <a:bodyPr wrap="square" lIns="0" tIns="0" rIns="0" bIns="0" rtlCol="0" anchor="ctr"/>
           <a:lstStyle/>
           <a:p>
-            <a:pPr algn="r" indent="0" marL="0">
-              <a:buNone/>
-            </a:pPr>
-            <a:r>
-              <a:rPr lang="en-US" sz="900" dirty="0">
+            <a:pPr indent="0" marL="0">
+              <a:buNone/>
+            </a:pPr>
+            <a:r>
+              <a:rPr lang="en-US" sz="1500" dirty="0">
                 <a:solidFill>
                   <a:srgbClr val="5A6672"/>
                 </a:solidFill>
@@ -18693,9 +18834,9 @@
                 <a:ea typeface="Arial" pitchFamily="34" charset="-122"/>
                 <a:cs typeface="Arial" pitchFamily="34" charset="-120"/>
               </a:rPr>
-              <a:t>Spring</a:t>
-            </a:r>
-            <a:endParaRPr lang="en-US" sz="900" dirty="0"/>
+              <a:t>50%</a:t>
+            </a:r>
+            <a:endParaRPr lang="en-US" sz="1500" dirty="0"/>
           </a:p>
         </p:txBody>
       </p:sp>
@@ -18707,8 +18848,8 @@
         </p:nvSpPr>
         <p:spPr>
           <a:xfrm>
-            <a:off x="4937760" y="2898648"/>
-            <a:ext cx="1508760" cy="457200"/>
+            <a:off x="4869180" y="3026664"/>
+            <a:ext cx="1520190" cy="182880"/>
           </a:xfrm>
           <a:prstGeom prst="rect">
             <a:avLst/>
@@ -18724,17 +18865,17 @@
               <a:buNone/>
             </a:pPr>
             <a:r>
-              <a:rPr lang="en-US" sz="2600" b="1" dirty="0">
-                <a:solidFill>
-                  <a:srgbClr val="C2410C"/>
-                </a:solidFill>
-                <a:latin typeface="Arial" pitchFamily="34" charset="0"/>
-                <a:ea typeface="Arial" pitchFamily="34" charset="-122"/>
-                <a:cs typeface="Arial" pitchFamily="34" charset="-120"/>
-              </a:rPr>
-              <a:t>89%</a:t>
-            </a:r>
-            <a:endParaRPr lang="en-US" sz="2600" dirty="0"/>
+              <a:rPr lang="en-US" sz="900" b="1" dirty="0">
+                <a:solidFill>
+                  <a:srgbClr val="A23200"/>
+                </a:solidFill>
+                <a:latin typeface="Arial" pitchFamily="34" charset="0"/>
+                <a:ea typeface="Arial" pitchFamily="34" charset="-122"/>
+                <a:cs typeface="Arial" pitchFamily="34" charset="-120"/>
+              </a:rPr>
+              <a:t>Now</a:t>
+            </a:r>
+            <a:endParaRPr lang="en-US" sz="900" dirty="0"/>
           </a:p>
         </p:txBody>
       </p:sp>
@@ -18746,8 +18887,8 @@
         </p:nvSpPr>
         <p:spPr>
           <a:xfrm>
-            <a:off x="4937760" y="3017520"/>
-            <a:ext cx="1508760" cy="274320"/>
+            <a:off x="4869180" y="3191256"/>
+            <a:ext cx="1520190" cy="438912"/>
           </a:xfrm>
           <a:prstGeom prst="rect">
             <a:avLst/>
@@ -18759,21 +18900,21 @@
           <a:bodyPr wrap="square" lIns="0" tIns="0" rIns="0" bIns="0" rtlCol="0" anchor="ctr"/>
           <a:lstStyle/>
           <a:p>
-            <a:pPr algn="r" indent="0" marL="0">
-              <a:buNone/>
-            </a:pPr>
-            <a:r>
-              <a:rPr lang="en-US" sz="900" dirty="0">
-                <a:solidFill>
-                  <a:srgbClr val="5A6672"/>
-                </a:solidFill>
-                <a:latin typeface="Arial" pitchFamily="34" charset="0"/>
-                <a:ea typeface="Arial" pitchFamily="34" charset="-122"/>
-                <a:cs typeface="Arial" pitchFamily="34" charset="-120"/>
-              </a:rPr>
-              <a:t>Now</a:t>
-            </a:r>
-            <a:endParaRPr lang="en-US" sz="900" dirty="0"/>
+            <a:pPr indent="0" marL="0">
+              <a:buNone/>
+            </a:pPr>
+            <a:r>
+              <a:rPr lang="en-US" sz="2800" b="1" dirty="0">
+                <a:solidFill>
+                  <a:srgbClr val="C2410C"/>
+                </a:solidFill>
+                <a:latin typeface="Arial" pitchFamily="34" charset="0"/>
+                <a:ea typeface="Arial" pitchFamily="34" charset="-122"/>
+                <a:cs typeface="Arial" pitchFamily="34" charset="-120"/>
+              </a:rPr>
+              <a:t>89%</a:t>
+            </a:r>
+            <a:endParaRPr lang="en-US" sz="2800" dirty="0"/>
           </a:p>
         </p:txBody>
       </p:sp>
@@ -18785,12 +18926,12 @@
         </p:nvSpPr>
         <p:spPr>
           <a:xfrm>
-            <a:off x="6903720" y="1417320"/>
-            <a:ext cx="1874520" cy="2103120"/>
+            <a:off x="6800850" y="1325880"/>
+            <a:ext cx="1885950" cy="2423160"/>
           </a:xfrm>
           <a:prstGeom prst="roundRect">
             <a:avLst>
-              <a:gd name="adj" fmla="val 3902"/>
+              <a:gd name="adj" fmla="val 3879"/>
             </a:avLst>
           </a:prstGeom>
           <a:solidFill>
@@ -18812,7 +18953,7 @@
         </p:nvSpPr>
         <p:spPr>
           <a:xfrm>
-            <a:off x="7086600" y="1600200"/>
+            <a:off x="6983730" y="1508760"/>
             <a:ext cx="411480" cy="411480"/>
           </a:xfrm>
           <a:prstGeom prst="ellipse">
@@ -18845,7 +18986,7 @@
         </p:blipFill>
         <p:spPr>
           <a:xfrm>
-            <a:off x="7185355" y="1698955"/>
+            <a:off x="7082485" y="1607515"/>
             <a:ext cx="213970" cy="213970"/>
           </a:xfrm>
           <a:prstGeom prst="rect">
@@ -18861,8 +19002,8 @@
         </p:nvSpPr>
         <p:spPr>
           <a:xfrm>
-            <a:off x="7086600" y="2103120"/>
-            <a:ext cx="1508760" cy="457200"/>
+            <a:off x="6983730" y="2011680"/>
+            <a:ext cx="1520190" cy="384048"/>
           </a:xfrm>
           <a:prstGeom prst="rect">
             <a:avLst/>
@@ -18878,9 +19019,9 @@
               <a:buNone/>
             </a:pPr>
             <a:r>
-              <a:rPr lang="en-US" sz="1200" dirty="0">
-                <a:solidFill>
-                  <a:srgbClr val="5A6672"/>
+              <a:rPr lang="en-US" sz="1200" b="1" dirty="0">
+                <a:solidFill>
+                  <a:srgbClr val="1A1A1A"/>
                 </a:solidFill>
                 <a:latin typeface="Arial" pitchFamily="34" charset="0"/>
                 <a:ea typeface="Arial" pitchFamily="34" charset="-122"/>
@@ -18900,8 +19041,8 @@
         </p:nvSpPr>
         <p:spPr>
           <a:xfrm>
-            <a:off x="7086600" y="2606040"/>
-            <a:ext cx="1508760" cy="274320"/>
+            <a:off x="6983730" y="2487168"/>
+            <a:ext cx="1520190" cy="182880"/>
           </a:xfrm>
           <a:prstGeom prst="rect">
             <a:avLst/>
@@ -18917,7 +19058,7 @@
               <a:buNone/>
             </a:pPr>
             <a:r>
-              <a:rPr lang="en-US" sz="1300" dirty="0">
+              <a:rPr lang="en-US" sz="900" dirty="0">
                 <a:solidFill>
                   <a:srgbClr val="5A6672"/>
                 </a:solidFill>
@@ -18925,9 +19066,9 @@
                 <a:ea typeface="Arial" pitchFamily="34" charset="-122"/>
                 <a:cs typeface="Arial" pitchFamily="34" charset="-120"/>
               </a:rPr>
-              <a:t>~6.3%</a:t>
-            </a:r>
-            <a:endParaRPr lang="en-US" sz="1300" dirty="0"/>
+              <a:t>Spring</a:t>
+            </a:r>
+            <a:endParaRPr lang="en-US" sz="900" dirty="0"/>
           </a:p>
         </p:txBody>
       </p:sp>
@@ -18939,8 +19080,8 @@
         </p:nvSpPr>
         <p:spPr>
           <a:xfrm>
-            <a:off x="7086600" y="2606040"/>
-            <a:ext cx="1508760" cy="274320"/>
+            <a:off x="6983730" y="2660904"/>
+            <a:ext cx="1520190" cy="274320"/>
           </a:xfrm>
           <a:prstGeom prst="rect">
             <a:avLst/>
@@ -18952,11 +19093,11 @@
           <a:bodyPr wrap="square" lIns="0" tIns="0" rIns="0" bIns="0" rtlCol="0" anchor="ctr"/>
           <a:lstStyle/>
           <a:p>
-            <a:pPr algn="r" indent="0" marL="0">
-              <a:buNone/>
-            </a:pPr>
-            <a:r>
-              <a:rPr lang="en-US" sz="900" dirty="0">
+            <a:pPr indent="0" marL="0">
+              <a:buNone/>
+            </a:pPr>
+            <a:r>
+              <a:rPr lang="en-US" sz="1500" dirty="0">
                 <a:solidFill>
                   <a:srgbClr val="5A6672"/>
                 </a:solidFill>
@@ -18964,9 +19105,9 @@
                 <a:ea typeface="Arial" pitchFamily="34" charset="-122"/>
                 <a:cs typeface="Arial" pitchFamily="34" charset="-120"/>
               </a:rPr>
-              <a:t>Spring</a:t>
-            </a:r>
-            <a:endParaRPr lang="en-US" sz="900" dirty="0"/>
+              <a:t>~6.3%</a:t>
+            </a:r>
+            <a:endParaRPr lang="en-US" sz="1500" dirty="0"/>
           </a:p>
         </p:txBody>
       </p:sp>
@@ -18978,8 +19119,8 @@
         </p:nvSpPr>
         <p:spPr>
           <a:xfrm>
-            <a:off x="7086600" y="2898648"/>
-            <a:ext cx="1508760" cy="457200"/>
+            <a:off x="6983730" y="3026664"/>
+            <a:ext cx="1520190" cy="182880"/>
           </a:xfrm>
           <a:prstGeom prst="rect">
             <a:avLst/>
@@ -18995,17 +19136,17 @@
               <a:buNone/>
             </a:pPr>
             <a:r>
-              <a:rPr lang="en-US" sz="2600" b="1" dirty="0">
-                <a:solidFill>
-                  <a:srgbClr val="C2410C"/>
-                </a:solidFill>
-                <a:latin typeface="Arial" pitchFamily="34" charset="0"/>
-                <a:ea typeface="Arial" pitchFamily="34" charset="-122"/>
-                <a:cs typeface="Arial" pitchFamily="34" charset="-120"/>
-              </a:rPr>
-              <a:t>6.95%</a:t>
-            </a:r>
-            <a:endParaRPr lang="en-US" sz="2600" dirty="0"/>
+              <a:rPr lang="en-US" sz="900" b="1" dirty="0">
+                <a:solidFill>
+                  <a:srgbClr val="A23200"/>
+                </a:solidFill>
+                <a:latin typeface="Arial" pitchFamily="34" charset="0"/>
+                <a:ea typeface="Arial" pitchFamily="34" charset="-122"/>
+                <a:cs typeface="Arial" pitchFamily="34" charset="-120"/>
+              </a:rPr>
+              <a:t>Now</a:t>
+            </a:r>
+            <a:endParaRPr lang="en-US" sz="900" dirty="0"/>
           </a:p>
         </p:txBody>
       </p:sp>
@@ -19017,8 +19158,8 @@
         </p:nvSpPr>
         <p:spPr>
           <a:xfrm>
-            <a:off x="7086600" y="3017520"/>
-            <a:ext cx="1508760" cy="274320"/>
+            <a:off x="6983730" y="3191256"/>
+            <a:ext cx="1520190" cy="438912"/>
           </a:xfrm>
           <a:prstGeom prst="rect">
             <a:avLst/>
@@ -19030,21 +19171,21 @@
           <a:bodyPr wrap="square" lIns="0" tIns="0" rIns="0" bIns="0" rtlCol="0" anchor="ctr"/>
           <a:lstStyle/>
           <a:p>
-            <a:pPr algn="r" indent="0" marL="0">
-              <a:buNone/>
-            </a:pPr>
-            <a:r>
-              <a:rPr lang="en-US" sz="900" dirty="0">
-                <a:solidFill>
-                  <a:srgbClr val="5A6672"/>
-                </a:solidFill>
-                <a:latin typeface="Arial" pitchFamily="34" charset="0"/>
-                <a:ea typeface="Arial" pitchFamily="34" charset="-122"/>
-                <a:cs typeface="Arial" pitchFamily="34" charset="-120"/>
-              </a:rPr>
-              <a:t>Now</a:t>
-            </a:r>
-            <a:endParaRPr lang="en-US" sz="900" dirty="0"/>
+            <a:pPr indent="0" marL="0">
+              <a:buNone/>
+            </a:pPr>
+            <a:r>
+              <a:rPr lang="en-US" sz="2800" b="1" dirty="0">
+                <a:solidFill>
+                  <a:srgbClr val="C2410C"/>
+                </a:solidFill>
+                <a:latin typeface="Arial" pitchFamily="34" charset="0"/>
+                <a:ea typeface="Arial" pitchFamily="34" charset="-122"/>
+                <a:cs typeface="Arial" pitchFamily="34" charset="-120"/>
+              </a:rPr>
+              <a:t>6.95%</a:t>
+            </a:r>
+            <a:endParaRPr lang="en-US" sz="2800" dirty="0"/>
           </a:p>
         </p:txBody>
       </p:sp>
@@ -19056,8 +19197,8 @@
         </p:nvSpPr>
         <p:spPr>
           <a:xfrm>
-            <a:off x="457200" y="3840480"/>
-            <a:ext cx="8229600" cy="457200"/>
+            <a:off x="457200" y="4005072"/>
+            <a:ext cx="8229600" cy="548640"/>
           </a:xfrm>
           <a:prstGeom prst="rect">
             <a:avLst/>
@@ -19066,7 +19207,7 @@
           <a:ln/>
         </p:spPr>
         <p:txBody>
-          <a:bodyPr wrap="square" lIns="0" tIns="0" rIns="0" bIns="0" rtlCol="0" anchor="ctr"/>
+          <a:bodyPr wrap="square" lIns="0" tIns="0" rIns="0" bIns="0" rtlCol="0" anchor="t"/>
           <a:lstStyle/>
           <a:p>
             <a:pPr indent="0" marL="0">
@@ -19284,11 +19425,11 @@
         <p:spPr>
           <a:xfrm>
             <a:off x="457200" y="1371600"/>
-            <a:ext cx="2560320" cy="2331720"/>
+            <a:ext cx="2560320" cy="2377440"/>
           </a:xfrm>
           <a:prstGeom prst="roundRect">
             <a:avLst>
-              <a:gd name="adj" fmla="val 3137"/>
+              <a:gd name="adj" fmla="val 3077"/>
             </a:avLst>
           </a:prstGeom>
           <a:solidFill>
@@ -19414,7 +19555,7 @@
             <a:r>
               <a:rPr lang="en-US" sz="1100" b="1" dirty="0">
                 <a:solidFill>
-                  <a:srgbClr val="1F3A5F"/>
+                  <a:srgbClr val="A23200"/>
                 </a:solidFill>
                 <a:latin typeface="Arial" pitchFamily="34" charset="0"/>
                 <a:ea typeface="Arial" pitchFamily="34" charset="-122"/>
@@ -19435,7 +19576,7 @@
         <p:spPr>
           <a:xfrm>
             <a:off x="658368" y="2651760"/>
-            <a:ext cx="2157984" cy="914400"/>
+            <a:ext cx="2157984" cy="960120"/>
           </a:xfrm>
           <a:prstGeom prst="rect">
             <a:avLst/>
@@ -19474,11 +19615,11 @@
         <p:spPr>
           <a:xfrm>
             <a:off x="3291840" y="1371600"/>
-            <a:ext cx="2560320" cy="2331720"/>
+            <a:ext cx="2560320" cy="2377440"/>
           </a:xfrm>
           <a:prstGeom prst="roundRect">
             <a:avLst>
-              <a:gd name="adj" fmla="val 3137"/>
+              <a:gd name="adj" fmla="val 3077"/>
             </a:avLst>
           </a:prstGeom>
           <a:solidFill>
@@ -19604,7 +19745,7 @@
             <a:r>
               <a:rPr lang="en-US" sz="1100" b="1" dirty="0">
                 <a:solidFill>
-                  <a:srgbClr val="1F3A5F"/>
+                  <a:srgbClr val="A23200"/>
                 </a:solidFill>
                 <a:latin typeface="Arial" pitchFamily="34" charset="0"/>
                 <a:ea typeface="Arial" pitchFamily="34" charset="-122"/>
@@ -19625,7 +19766,7 @@
         <p:spPr>
           <a:xfrm>
             <a:off x="3493008" y="2651760"/>
-            <a:ext cx="2157984" cy="914400"/>
+            <a:ext cx="2157984" cy="960120"/>
           </a:xfrm>
           <a:prstGeom prst="rect">
             <a:avLst/>
@@ -19664,11 +19805,11 @@
         <p:spPr>
           <a:xfrm>
             <a:off x="6126480" y="1371600"/>
-            <a:ext cx="2560320" cy="2331720"/>
+            <a:ext cx="2560320" cy="2377440"/>
           </a:xfrm>
           <a:prstGeom prst="roundRect">
             <a:avLst>
-              <a:gd name="adj" fmla="val 3137"/>
+              <a:gd name="adj" fmla="val 3077"/>
             </a:avLst>
           </a:prstGeom>
           <a:solidFill>
@@ -19794,7 +19935,7 @@
             <a:r>
               <a:rPr lang="en-US" sz="1100" b="1" dirty="0">
                 <a:solidFill>
-                  <a:srgbClr val="1F3A5F"/>
+                  <a:srgbClr val="A23200"/>
                 </a:solidFill>
                 <a:latin typeface="Arial" pitchFamily="34" charset="0"/>
                 <a:ea typeface="Arial" pitchFamily="34" charset="-122"/>
@@ -19815,7 +19956,7 @@
         <p:spPr>
           <a:xfrm>
             <a:off x="6327648" y="2651760"/>
-            <a:ext cx="2157984" cy="914400"/>
+            <a:ext cx="2157984" cy="960120"/>
           </a:xfrm>
           <a:prstGeom prst="rect">
             <a:avLst/>
@@ -19854,7 +19995,7 @@
         <p:spPr>
           <a:xfrm>
             <a:off x="457200" y="3977640"/>
-            <a:ext cx="8229600" cy="365760"/>
+            <a:ext cx="8229600" cy="502920"/>
           </a:xfrm>
           <a:prstGeom prst="rect">
             <a:avLst/>
@@ -19863,7 +20004,7 @@
           <a:ln/>
         </p:spPr>
         <p:txBody>
-          <a:bodyPr wrap="square" lIns="0" tIns="0" rIns="0" bIns="0" rtlCol="0" anchor="ctr"/>
+          <a:bodyPr wrap="square" lIns="0" tIns="0" rIns="0" bIns="0" rtlCol="0" anchor="t"/>
           <a:lstStyle/>
           <a:p>
             <a:pPr indent="0" marL="0">
@@ -20042,7 +20183,7 @@
         <p:spPr>
           <a:xfrm>
             <a:off x="457200" y="1051560"/>
-            <a:ext cx="2560320" cy="2971800"/>
+            <a:ext cx="2560320" cy="3017520"/>
           </a:xfrm>
           <a:prstGeom prst="roundRect">
             <a:avLst>
@@ -20107,8 +20248,8 @@
         </p:nvSpPr>
         <p:spPr>
           <a:xfrm>
-            <a:off x="658368" y="2103120"/>
-            <a:ext cx="1280160" cy="365760"/>
+            <a:off x="658368" y="2075688"/>
+            <a:ext cx="1113584" cy="347472"/>
           </a:xfrm>
           <a:prstGeom prst="rect">
             <a:avLst/>
@@ -20146,8 +20287,8 @@
         </p:nvSpPr>
         <p:spPr>
           <a:xfrm>
-            <a:off x="1828800" y="2103120"/>
-            <a:ext cx="987552" cy="365760"/>
+            <a:off x="1863392" y="2075688"/>
+            <a:ext cx="952960" cy="347472"/>
           </a:xfrm>
           <a:prstGeom prst="rect">
             <a:avLst/>
@@ -20185,8 +20326,8 @@
         </p:nvSpPr>
         <p:spPr>
           <a:xfrm>
-            <a:off x="658368" y="2514600"/>
-            <a:ext cx="1280160" cy="365760"/>
+            <a:off x="658368" y="2459736"/>
+            <a:ext cx="1313962" cy="347472"/>
           </a:xfrm>
           <a:prstGeom prst="rect">
             <a:avLst/>
@@ -20224,8 +20365,8 @@
         </p:nvSpPr>
         <p:spPr>
           <a:xfrm>
-            <a:off x="1828800" y="2514600"/>
-            <a:ext cx="987552" cy="365760"/>
+            <a:off x="2063770" y="2459736"/>
+            <a:ext cx="752582" cy="347472"/>
           </a:xfrm>
           <a:prstGeom prst="rect">
             <a:avLst/>
@@ -20263,8 +20404,8 @@
         </p:nvSpPr>
         <p:spPr>
           <a:xfrm>
-            <a:off x="658368" y="2926080"/>
-            <a:ext cx="1280160" cy="365760"/>
+            <a:off x="658368" y="2843784"/>
+            <a:ext cx="1409430" cy="347472"/>
           </a:xfrm>
           <a:prstGeom prst="rect">
             <a:avLst/>
@@ -20280,7 +20421,7 @@
               <a:buNone/>
             </a:pPr>
             <a:r>
-              <a:rPr lang="en-US" sz="1100" dirty="0">
+              <a:rPr lang="en-US" sz="1050" dirty="0">
                 <a:solidFill>
                   <a:srgbClr val="5A6672"/>
                 </a:solidFill>
@@ -20290,7 +20431,7 @@
               </a:rPr>
               <a:t>Seller Credit Assumed</a:t>
             </a:r>
-            <a:endParaRPr lang="en-US" sz="1100" dirty="0"/>
+            <a:endParaRPr lang="en-US" sz="1050" dirty="0"/>
           </a:p>
         </p:txBody>
       </p:sp>
@@ -20302,8 +20443,8 @@
         </p:nvSpPr>
         <p:spPr>
           <a:xfrm>
-            <a:off x="1828800" y="2926080"/>
-            <a:ext cx="987552" cy="365760"/>
+            <a:off x="2159238" y="2843784"/>
+            <a:ext cx="657114" cy="347472"/>
           </a:xfrm>
           <a:prstGeom prst="rect">
             <a:avLst/>
@@ -20341,8 +20482,8 @@
         </p:nvSpPr>
         <p:spPr>
           <a:xfrm>
-            <a:off x="658368" y="3337560"/>
-            <a:ext cx="2157984" cy="594360"/>
+            <a:off x="658368" y="3291840"/>
+            <a:ext cx="2157984" cy="685800"/>
           </a:xfrm>
           <a:prstGeom prst="rect">
             <a:avLst/>
@@ -20381,7 +20522,7 @@
         <p:spPr>
           <a:xfrm>
             <a:off x="3291840" y="1051560"/>
-            <a:ext cx="2560320" cy="2971800"/>
+            <a:ext cx="2560320" cy="3017520"/>
           </a:xfrm>
           <a:prstGeom prst="roundRect">
             <a:avLst>
@@ -20485,8 +20626,8 @@
         </p:nvSpPr>
         <p:spPr>
           <a:xfrm>
-            <a:off x="3493008" y="2103120"/>
-            <a:ext cx="1280160" cy="365760"/>
+            <a:off x="3493008" y="2075688"/>
+            <a:ext cx="1180377" cy="347472"/>
           </a:xfrm>
           <a:prstGeom prst="rect">
             <a:avLst/>
@@ -20524,8 +20665,8 @@
         </p:nvSpPr>
         <p:spPr>
           <a:xfrm>
-            <a:off x="4663440" y="2103120"/>
-            <a:ext cx="987552" cy="365760"/>
+            <a:off x="4764825" y="2075688"/>
+            <a:ext cx="886167" cy="347472"/>
           </a:xfrm>
           <a:prstGeom prst="rect">
             <a:avLst/>
@@ -20563,8 +20704,8 @@
         </p:nvSpPr>
         <p:spPr>
           <a:xfrm>
-            <a:off x="3493008" y="2514600"/>
-            <a:ext cx="1280160" cy="365760"/>
+            <a:off x="3493008" y="2459736"/>
+            <a:ext cx="1313962" cy="347472"/>
           </a:xfrm>
           <a:prstGeom prst="rect">
             <a:avLst/>
@@ -20602,8 +20743,8 @@
         </p:nvSpPr>
         <p:spPr>
           <a:xfrm>
-            <a:off x="4663440" y="2514600"/>
-            <a:ext cx="987552" cy="365760"/>
+            <a:off x="4898410" y="2459736"/>
+            <a:ext cx="752582" cy="347472"/>
           </a:xfrm>
           <a:prstGeom prst="rect">
             <a:avLst/>
@@ -20641,8 +20782,8 @@
         </p:nvSpPr>
         <p:spPr>
           <a:xfrm>
-            <a:off x="3493008" y="2926080"/>
-            <a:ext cx="1280160" cy="365760"/>
+            <a:off x="3493008" y="2843784"/>
+            <a:ext cx="1409430" cy="347472"/>
           </a:xfrm>
           <a:prstGeom prst="rect">
             <a:avLst/>
@@ -20658,7 +20799,7 @@
               <a:buNone/>
             </a:pPr>
             <a:r>
-              <a:rPr lang="en-US" sz="1100" dirty="0">
+              <a:rPr lang="en-US" sz="1050" dirty="0">
                 <a:solidFill>
                   <a:srgbClr val="FFFFFF"/>
                 </a:solidFill>
@@ -20668,7 +20809,7 @@
               </a:rPr>
               <a:t>Seller Credit Assumed</a:t>
             </a:r>
-            <a:endParaRPr lang="en-US" sz="1100" dirty="0"/>
+            <a:endParaRPr lang="en-US" sz="1050" dirty="0"/>
           </a:p>
         </p:txBody>
       </p:sp>
@@ -20680,8 +20821,8 @@
         </p:nvSpPr>
         <p:spPr>
           <a:xfrm>
-            <a:off x="4663440" y="2926080"/>
-            <a:ext cx="987552" cy="365760"/>
+            <a:off x="4993878" y="2843784"/>
+            <a:ext cx="657114" cy="347472"/>
           </a:xfrm>
           <a:prstGeom prst="rect">
             <a:avLst/>
@@ -20719,8 +20860,8 @@
         </p:nvSpPr>
         <p:spPr>
           <a:xfrm>
-            <a:off x="3493008" y="3337560"/>
-            <a:ext cx="2157984" cy="594360"/>
+            <a:off x="3493008" y="3291840"/>
+            <a:ext cx="2157984" cy="685800"/>
           </a:xfrm>
           <a:prstGeom prst="rect">
             <a:avLst/>
@@ -20759,7 +20900,7 @@
         <p:spPr>
           <a:xfrm>
             <a:off x="6126480" y="1051560"/>
-            <a:ext cx="2560320" cy="2971800"/>
+            <a:ext cx="2560320" cy="3017520"/>
           </a:xfrm>
           <a:prstGeom prst="roundRect">
             <a:avLst>
@@ -20824,8 +20965,8 @@
         </p:nvSpPr>
         <p:spPr>
           <a:xfrm>
-            <a:off x="6327648" y="2103120"/>
-            <a:ext cx="1280160" cy="365760"/>
+            <a:off x="6327648" y="2075688"/>
+            <a:ext cx="1180377" cy="347472"/>
           </a:xfrm>
           <a:prstGeom prst="rect">
             <a:avLst/>
@@ -20863,8 +21004,8 @@
         </p:nvSpPr>
         <p:spPr>
           <a:xfrm>
-            <a:off x="7498080" y="2103120"/>
-            <a:ext cx="987552" cy="365760"/>
+            <a:off x="7599465" y="2075688"/>
+            <a:ext cx="886167" cy="347472"/>
           </a:xfrm>
           <a:prstGeom prst="rect">
             <a:avLst/>
@@ -20902,8 +21043,8 @@
         </p:nvSpPr>
         <p:spPr>
           <a:xfrm>
-            <a:off x="6327648" y="2514600"/>
-            <a:ext cx="1280160" cy="365760"/>
+            <a:off x="6327648" y="2459736"/>
+            <a:ext cx="1313962" cy="347472"/>
           </a:xfrm>
           <a:prstGeom prst="rect">
             <a:avLst/>
@@ -20941,8 +21082,8 @@
         </p:nvSpPr>
         <p:spPr>
           <a:xfrm>
-            <a:off x="7498080" y="2514600"/>
-            <a:ext cx="987552" cy="365760"/>
+            <a:off x="7733050" y="2459736"/>
+            <a:ext cx="752582" cy="347472"/>
           </a:xfrm>
           <a:prstGeom prst="rect">
             <a:avLst/>
@@ -20980,8 +21121,8 @@
         </p:nvSpPr>
         <p:spPr>
           <a:xfrm>
-            <a:off x="6327648" y="2926080"/>
-            <a:ext cx="1280160" cy="365760"/>
+            <a:off x="6327648" y="2843784"/>
+            <a:ext cx="1504897" cy="347472"/>
           </a:xfrm>
           <a:prstGeom prst="rect">
             <a:avLst/>
@@ -21019,8 +21160,8 @@
         </p:nvSpPr>
         <p:spPr>
           <a:xfrm>
-            <a:off x="7498080" y="2926080"/>
-            <a:ext cx="987552" cy="365760"/>
+            <a:off x="7923985" y="2843784"/>
+            <a:ext cx="561647" cy="347472"/>
           </a:xfrm>
           <a:prstGeom prst="rect">
             <a:avLst/>
@@ -21058,8 +21199,8 @@
         </p:nvSpPr>
         <p:spPr>
           <a:xfrm>
-            <a:off x="6327648" y="3337560"/>
-            <a:ext cx="2157984" cy="594360"/>
+            <a:off x="6327648" y="3291840"/>
+            <a:ext cx="2157984" cy="685800"/>
           </a:xfrm>
           <a:prstGeom prst="rect">
             <a:avLst/>
@@ -21098,7 +21239,7 @@
         <p:spPr>
           <a:xfrm>
             <a:off x="457200" y="4206240"/>
-            <a:ext cx="8229600" cy="320040"/>
+            <a:ext cx="8229600" cy="365760"/>
           </a:xfrm>
           <a:prstGeom prst="rect">
             <a:avLst/>

--- a/samples/seller-cma/517-Larkwood-Ave-Listing-Presentation.pptx
+++ b/samples/seller-cma/517-Larkwood-Ave-Listing-Presentation.pptx
@@ -141,513 +141,6 @@
               <c:strCache>
                 <c:ptCount val="1"/>
                 <c:pt idx="0">
-                  <c:v>Comparable Sales</c:v>
-                </c:pt>
-              </c:strCache>
-            </c:strRef>
-          </c:tx>
-          <c:spPr>
-            <a:solidFill>
-              <a:srgbClr val="C2410C"/>
-            </a:solidFill>
-            <a:ln>
-              <a:noFill/>
-            </a:ln>
-            <a:effectLst/>
-          </c:spPr>
-          <c:marker>
-            <c:symbol val="circle"/>
-            <c:size val="8"/>
-            <c:spPr>
-              <a:solidFill>
-                <a:srgbClr val="C2410C"/>
-              </a:solidFill>
-              <a:ln w="9525">
-                <a:solidFill>
-                  <a:srgbClr val="C2410C"/>
-                </a:solidFill>
-              </a:ln>
-            </c:spPr>
-          </c:marker>
-          <c:xVal>
-            <c:numRef>
-              <c:f>Sheet1!$A$2:$A$76</c:f>
-              <c:numCache>
-                <c:formatCode>General</c:formatCode>
-                <c:ptCount val="75"/>
-                <c:pt idx="0">
-                  <c:v>1824</c:v>
-                </c:pt>
-                <c:pt idx="1">
-                  <c:v>1865</c:v>
-                </c:pt>
-                <c:pt idx="2">
-                  <c:v>1871</c:v>
-                </c:pt>
-                <c:pt idx="3">
-                  <c:v>1849</c:v>
-                </c:pt>
-                <c:pt idx="4">
-                  <c:v>1865</c:v>
-                </c:pt>
-                <c:pt idx="5">
-                  <c:v>1790</c:v>
-                </c:pt>
-                <c:pt idx="6">
-                  <c:v>1810</c:v>
-                </c:pt>
-                <c:pt idx="7">
-                  <c:v>1702</c:v>
-                </c:pt>
-                <c:pt idx="8">
-                  <c:v>1880</c:v>
-                </c:pt>
-                <c:pt idx="9">
-                  <c:v>2260</c:v>
-                </c:pt>
-                <c:pt idx="10">
-                  <c:v>1950</c:v>
-                </c:pt>
-                <c:pt idx="11">
-                  <c:v>2380</c:v>
-                </c:pt>
-                <c:pt idx="12">
-                  <c:v>2150</c:v>
-                </c:pt>
-                <c:pt idx="13">
-                  <c:v>2380</c:v>
-                </c:pt>
-                <c:pt idx="14">
-                  <c:v>1740</c:v>
-                </c:pt>
-                <c:pt idx="15">
-                  <c:v>1880</c:v>
-                </c:pt>
-                <c:pt idx="16">
-                  <c:v>1950</c:v>
-                </c:pt>
-                <c:pt idx="17">
-                  <c:v>1740</c:v>
-                </c:pt>
-                <c:pt idx="18">
-                  <c:v>1450</c:v>
-                </c:pt>
-                <c:pt idx="19">
-                  <c:v>2150</c:v>
-                </c:pt>
-                <c:pt idx="20">
-                  <c:v>2380</c:v>
-                </c:pt>
-                <c:pt idx="21">
-                  <c:v>2260</c:v>
-                </c:pt>
-                <c:pt idx="22">
-                  <c:v>2380</c:v>
-                </c:pt>
-                <c:pt idx="23">
-                  <c:v>1740</c:v>
-                </c:pt>
-                <c:pt idx="24">
-                  <c:v>1450</c:v>
-                </c:pt>
-                <c:pt idx="25">
-                  <c:v>1610</c:v>
-                </c:pt>
-                <c:pt idx="26">
-                  <c:v>2380</c:v>
-                </c:pt>
-                <c:pt idx="27">
-                  <c:v>1820</c:v>
-                </c:pt>
-                <c:pt idx="28">
-                  <c:v>1880</c:v>
-                </c:pt>
-                <c:pt idx="29">
-                  <c:v>2040</c:v>
-                </c:pt>
-                <c:pt idx="30">
-                  <c:v>2380</c:v>
-                </c:pt>
-                <c:pt idx="31">
-                  <c:v>1610</c:v>
-                </c:pt>
-                <c:pt idx="32">
-                  <c:v>2380</c:v>
-                </c:pt>
-                <c:pt idx="33">
-                  <c:v>1849</c:v>
-                </c:pt>
-                <c:pt idx="34">
-                  <c:v>1943</c:v>
-                </c:pt>
-                <c:pt idx="35">
-                  <c:v>2400</c:v>
-                </c:pt>
-                <c:pt idx="36">
-                  <c:v>2400</c:v>
-                </c:pt>
-                <c:pt idx="37">
-                  <c:v>2400</c:v>
-                </c:pt>
-                <c:pt idx="38">
-                  <c:v>1650</c:v>
-                </c:pt>
-                <c:pt idx="39">
-                  <c:v>1500</c:v>
-                </c:pt>
-                <c:pt idx="40">
-                  <c:v>1650</c:v>
-                </c:pt>
-                <c:pt idx="41">
-                  <c:v>1900</c:v>
-                </c:pt>
-                <c:pt idx="42">
-                  <c:v>1650</c:v>
-                </c:pt>
-                <c:pt idx="43">
-                  <c:v>1900</c:v>
-                </c:pt>
-                <c:pt idx="44">
-                  <c:v>1650</c:v>
-                </c:pt>
-                <c:pt idx="45">
-                  <c:v>2100</c:v>
-                </c:pt>
-                <c:pt idx="46">
-                  <c:v>1450</c:v>
-                </c:pt>
-                <c:pt idx="47">
-                  <c:v>1485.1851851851852</c:v>
-                </c:pt>
-                <c:pt idx="48">
-                  <c:v>1520.3703703703704</c:v>
-                </c:pt>
-                <c:pt idx="49">
-                  <c:v>1555.5555555555557</c:v>
-                </c:pt>
-                <c:pt idx="50">
-                  <c:v>1590.7407407407406</c:v>
-                </c:pt>
-                <c:pt idx="51">
-                  <c:v>1625.9259259259259</c:v>
-                </c:pt>
-                <c:pt idx="52">
-                  <c:v>1661.111111111111</c:v>
-                </c:pt>
-                <c:pt idx="53">
-                  <c:v>1696.2962962962963</c:v>
-                </c:pt>
-                <c:pt idx="54">
-                  <c:v>1731.4814814814815</c:v>
-                </c:pt>
-                <c:pt idx="55">
-                  <c:v>1766.6666666666667</c:v>
-                </c:pt>
-                <c:pt idx="56">
-                  <c:v>1801.8518518518517</c:v>
-                </c:pt>
-                <c:pt idx="57">
-                  <c:v>1837.037037037037</c:v>
-                </c:pt>
-                <c:pt idx="58">
-                  <c:v>1872.2222222222222</c:v>
-                </c:pt>
-                <c:pt idx="59">
-                  <c:v>1907.4074074074074</c:v>
-                </c:pt>
-                <c:pt idx="60">
-                  <c:v>1942.5925925925926</c:v>
-                </c:pt>
-                <c:pt idx="61">
-                  <c:v>1977.7777777777778</c:v>
-                </c:pt>
-                <c:pt idx="62">
-                  <c:v>2012.962962962963</c:v>
-                </c:pt>
-                <c:pt idx="63">
-                  <c:v>2048.1481481481483</c:v>
-                </c:pt>
-                <c:pt idx="64">
-                  <c:v>2083.3333333333335</c:v>
-                </c:pt>
-                <c:pt idx="65">
-                  <c:v>2118.5185185185182</c:v>
-                </c:pt>
-                <c:pt idx="66">
-                  <c:v>2153.7037037037035</c:v>
-                </c:pt>
-                <c:pt idx="67">
-                  <c:v>2188.8888888888887</c:v>
-                </c:pt>
-                <c:pt idx="68">
-                  <c:v>2224.074074074074</c:v>
-                </c:pt>
-                <c:pt idx="69">
-                  <c:v>2259.259259259259</c:v>
-                </c:pt>
-                <c:pt idx="70">
-                  <c:v>2294.4444444444443</c:v>
-                </c:pt>
-                <c:pt idx="71">
-                  <c:v>2329.6296296296296</c:v>
-                </c:pt>
-                <c:pt idx="72">
-                  <c:v>2364.814814814815</c:v>
-                </c:pt>
-                <c:pt idx="73">
-                  <c:v>2400</c:v>
-                </c:pt>
-                <c:pt idx="74">
-                  <c:v>1849</c:v>
-                </c:pt>
-              </c:numCache>
-            </c:numRef>
-          </c:xVal>
-          <c:yVal>
-            <c:numRef>
-              <c:f>Sheet1!$B$2:$B$76</c:f>
-              <c:numCache>
-                <c:formatCode>General</c:formatCode>
-                <c:ptCount val="75"/>
-                <c:pt idx="0">
-                  <c:v>505500</c:v>
-                </c:pt>
-                <c:pt idx="1">
-                  <c:v>495000</c:v>
-                </c:pt>
-                <c:pt idx="2">
-                  <c:v>427000</c:v>
-                </c:pt>
-                <c:pt idx="3">
-                  <c:v>429000</c:v>
-                </c:pt>
-                <c:pt idx="4">
-                  <c:v>465000</c:v>
-                </c:pt>
-                <c:pt idx="5">
-                  <c:v/>
-                </c:pt>
-                <c:pt idx="6">
-                  <c:v/>
-                </c:pt>
-                <c:pt idx="7">
-                  <c:v/>
-                </c:pt>
-                <c:pt idx="8">
-                  <c:v/>
-                </c:pt>
-                <c:pt idx="9">
-                  <c:v/>
-                </c:pt>
-                <c:pt idx="10">
-                  <c:v/>
-                </c:pt>
-                <c:pt idx="11">
-                  <c:v/>
-                </c:pt>
-                <c:pt idx="12">
-                  <c:v/>
-                </c:pt>
-                <c:pt idx="13">
-                  <c:v/>
-                </c:pt>
-                <c:pt idx="14">
-                  <c:v/>
-                </c:pt>
-                <c:pt idx="15">
-                  <c:v/>
-                </c:pt>
-                <c:pt idx="16">
-                  <c:v/>
-                </c:pt>
-                <c:pt idx="17">
-                  <c:v/>
-                </c:pt>
-                <c:pt idx="18">
-                  <c:v/>
-                </c:pt>
-                <c:pt idx="19">
-                  <c:v/>
-                </c:pt>
-                <c:pt idx="20">
-                  <c:v/>
-                </c:pt>
-                <c:pt idx="21">
-                  <c:v/>
-                </c:pt>
-                <c:pt idx="22">
-                  <c:v/>
-                </c:pt>
-                <c:pt idx="23">
-                  <c:v/>
-                </c:pt>
-                <c:pt idx="24">
-                  <c:v/>
-                </c:pt>
-                <c:pt idx="25">
-                  <c:v/>
-                </c:pt>
-                <c:pt idx="26">
-                  <c:v/>
-                </c:pt>
-                <c:pt idx="27">
-                  <c:v/>
-                </c:pt>
-                <c:pt idx="28">
-                  <c:v/>
-                </c:pt>
-                <c:pt idx="29">
-                  <c:v/>
-                </c:pt>
-                <c:pt idx="30">
-                  <c:v/>
-                </c:pt>
-                <c:pt idx="31">
-                  <c:v/>
-                </c:pt>
-                <c:pt idx="32">
-                  <c:v/>
-                </c:pt>
-                <c:pt idx="33">
-                  <c:v/>
-                </c:pt>
-                <c:pt idx="34">
-                  <c:v/>
-                </c:pt>
-                <c:pt idx="35">
-                  <c:v/>
-                </c:pt>
-                <c:pt idx="36">
-                  <c:v/>
-                </c:pt>
-                <c:pt idx="37">
-                  <c:v/>
-                </c:pt>
-                <c:pt idx="38">
-                  <c:v/>
-                </c:pt>
-                <c:pt idx="39">
-                  <c:v/>
-                </c:pt>
-                <c:pt idx="40">
-                  <c:v/>
-                </c:pt>
-                <c:pt idx="41">
-                  <c:v/>
-                </c:pt>
-                <c:pt idx="42">
-                  <c:v/>
-                </c:pt>
-                <c:pt idx="43">
-                  <c:v/>
-                </c:pt>
-                <c:pt idx="44">
-                  <c:v/>
-                </c:pt>
-                <c:pt idx="45">
-                  <c:v/>
-                </c:pt>
-                <c:pt idx="46">
-                  <c:v/>
-                </c:pt>
-                <c:pt idx="47">
-                  <c:v/>
-                </c:pt>
-                <c:pt idx="48">
-                  <c:v/>
-                </c:pt>
-                <c:pt idx="49">
-                  <c:v/>
-                </c:pt>
-                <c:pt idx="50">
-                  <c:v/>
-                </c:pt>
-                <c:pt idx="51">
-                  <c:v/>
-                </c:pt>
-                <c:pt idx="52">
-                  <c:v/>
-                </c:pt>
-                <c:pt idx="53">
-                  <c:v/>
-                </c:pt>
-                <c:pt idx="54">
-                  <c:v/>
-                </c:pt>
-                <c:pt idx="55">
-                  <c:v/>
-                </c:pt>
-                <c:pt idx="56">
-                  <c:v/>
-                </c:pt>
-                <c:pt idx="57">
-                  <c:v/>
-                </c:pt>
-                <c:pt idx="58">
-                  <c:v/>
-                </c:pt>
-                <c:pt idx="59">
-                  <c:v/>
-                </c:pt>
-                <c:pt idx="60">
-                  <c:v/>
-                </c:pt>
-                <c:pt idx="61">
-                  <c:v/>
-                </c:pt>
-                <c:pt idx="62">
-                  <c:v/>
-                </c:pt>
-                <c:pt idx="63">
-                  <c:v/>
-                </c:pt>
-                <c:pt idx="64">
-                  <c:v/>
-                </c:pt>
-                <c:pt idx="65">
-                  <c:v/>
-                </c:pt>
-                <c:pt idx="66">
-                  <c:v/>
-                </c:pt>
-                <c:pt idx="67">
-                  <c:v/>
-                </c:pt>
-                <c:pt idx="68">
-                  <c:v/>
-                </c:pt>
-                <c:pt idx="69">
-                  <c:v/>
-                </c:pt>
-                <c:pt idx="70">
-                  <c:v/>
-                </c:pt>
-                <c:pt idx="71">
-                  <c:v/>
-                </c:pt>
-                <c:pt idx="72">
-                  <c:v/>
-                </c:pt>
-                <c:pt idx="73">
-                  <c:v/>
-                </c:pt>
-                <c:pt idx="74">
-                  <c:v/>
-                </c:pt>
-              </c:numCache>
-            </c:numRef>
-          </c:yVal>
-          <c:smooth val="0"/>
-        </c:ser>
-        <c:ser>
-          <c:idx val="1"/>
-          <c:order val="1"/>
-          <c:tx>
-            <c:strRef>
-              <c:f>Sheet1!$C$1</c:f>
-              <c:strCache>
-                <c:ptCount val="1"/>
-                <c:pt idx="0">
                   <c:v>Other Sales</c:v>
                 </c:pt>
               </c:strCache>
@@ -663,16 +156,14 @@
             <a:effectLst/>
           </c:spPr>
           <c:marker>
-            <c:symbol val="square"/>
-            <c:size val="6"/>
+            <c:symbol val="circle"/>
+            <c:size val="5"/>
             <c:spPr>
               <a:solidFill>
-                <a:srgbClr val="A3ADB6"/>
+                <a:srgbClr val="DADEE2"/>
               </a:solidFill>
-              <a:ln w="9525">
-                <a:solidFill>
-                  <a:srgbClr val="A3ADB6"/>
-                </a:solidFill>
+              <a:ln>
+                <a:noFill/>
               </a:ln>
             </c:spPr>
           </c:marker>
@@ -683,226 +174,226 @@
                 <c:formatCode>General</c:formatCode>
                 <c:ptCount val="75"/>
                 <c:pt idx="0">
+                  <c:v>1790</c:v>
+                </c:pt>
+                <c:pt idx="1">
+                  <c:v>1810</c:v>
+                </c:pt>
+                <c:pt idx="2">
+                  <c:v>1702</c:v>
+                </c:pt>
+                <c:pt idx="3">
+                  <c:v>1880</c:v>
+                </c:pt>
+                <c:pt idx="4">
+                  <c:v>2260</c:v>
+                </c:pt>
+                <c:pt idx="5">
+                  <c:v>1950</c:v>
+                </c:pt>
+                <c:pt idx="6">
+                  <c:v>2380</c:v>
+                </c:pt>
+                <c:pt idx="7">
+                  <c:v>2150</c:v>
+                </c:pt>
+                <c:pt idx="8">
+                  <c:v>2380</c:v>
+                </c:pt>
+                <c:pt idx="9">
+                  <c:v>1740</c:v>
+                </c:pt>
+                <c:pt idx="10">
+                  <c:v>1880</c:v>
+                </c:pt>
+                <c:pt idx="11">
+                  <c:v>1950</c:v>
+                </c:pt>
+                <c:pt idx="12">
+                  <c:v>1740</c:v>
+                </c:pt>
+                <c:pt idx="13">
+                  <c:v>1450</c:v>
+                </c:pt>
+                <c:pt idx="14">
+                  <c:v>2150</c:v>
+                </c:pt>
+                <c:pt idx="15">
+                  <c:v>2380</c:v>
+                </c:pt>
+                <c:pt idx="16">
+                  <c:v>2260</c:v>
+                </c:pt>
+                <c:pt idx="17">
+                  <c:v>2380</c:v>
+                </c:pt>
+                <c:pt idx="18">
+                  <c:v>1740</c:v>
+                </c:pt>
+                <c:pt idx="19">
+                  <c:v>1450</c:v>
+                </c:pt>
+                <c:pt idx="20">
+                  <c:v>1610</c:v>
+                </c:pt>
+                <c:pt idx="21">
+                  <c:v>2380</c:v>
+                </c:pt>
+                <c:pt idx="22">
+                  <c:v>1820</c:v>
+                </c:pt>
+                <c:pt idx="23">
+                  <c:v>1880</c:v>
+                </c:pt>
+                <c:pt idx="24">
+                  <c:v>2040</c:v>
+                </c:pt>
+                <c:pt idx="25">
+                  <c:v>2380</c:v>
+                </c:pt>
+                <c:pt idx="26">
+                  <c:v>1610</c:v>
+                </c:pt>
+                <c:pt idx="27">
+                  <c:v>2380</c:v>
+                </c:pt>
+                <c:pt idx="28">
+                  <c:v>1849</c:v>
+                </c:pt>
+                <c:pt idx="29">
+                  <c:v>1943</c:v>
+                </c:pt>
+                <c:pt idx="30">
+                  <c:v>2400</c:v>
+                </c:pt>
+                <c:pt idx="31">
+                  <c:v>2400</c:v>
+                </c:pt>
+                <c:pt idx="32">
+                  <c:v>2400</c:v>
+                </c:pt>
+                <c:pt idx="33">
+                  <c:v>1650</c:v>
+                </c:pt>
+                <c:pt idx="34">
+                  <c:v>1500</c:v>
+                </c:pt>
+                <c:pt idx="35">
+                  <c:v>1650</c:v>
+                </c:pt>
+                <c:pt idx="36">
+                  <c:v>1900</c:v>
+                </c:pt>
+                <c:pt idx="37">
+                  <c:v>1650</c:v>
+                </c:pt>
+                <c:pt idx="38">
+                  <c:v>1900</c:v>
+                </c:pt>
+                <c:pt idx="39">
+                  <c:v>1650</c:v>
+                </c:pt>
+                <c:pt idx="40">
+                  <c:v>2100</c:v>
+                </c:pt>
+                <c:pt idx="41">
+                  <c:v>1450</c:v>
+                </c:pt>
+                <c:pt idx="42">
+                  <c:v>1485.1851851851852</c:v>
+                </c:pt>
+                <c:pt idx="43">
+                  <c:v>1520.3703703703704</c:v>
+                </c:pt>
+                <c:pt idx="44">
+                  <c:v>1555.5555555555557</c:v>
+                </c:pt>
+                <c:pt idx="45">
+                  <c:v>1590.7407407407406</c:v>
+                </c:pt>
+                <c:pt idx="46">
+                  <c:v>1625.9259259259259</c:v>
+                </c:pt>
+                <c:pt idx="47">
+                  <c:v>1661.111111111111</c:v>
+                </c:pt>
+                <c:pt idx="48">
+                  <c:v>1696.2962962962963</c:v>
+                </c:pt>
+                <c:pt idx="49">
+                  <c:v>1731.4814814814815</c:v>
+                </c:pt>
+                <c:pt idx="50">
+                  <c:v>1766.6666666666667</c:v>
+                </c:pt>
+                <c:pt idx="51">
+                  <c:v>1801.8518518518517</c:v>
+                </c:pt>
+                <c:pt idx="52">
+                  <c:v>1837.037037037037</c:v>
+                </c:pt>
+                <c:pt idx="53">
+                  <c:v>1872.2222222222222</c:v>
+                </c:pt>
+                <c:pt idx="54">
+                  <c:v>1907.4074074074074</c:v>
+                </c:pt>
+                <c:pt idx="55">
+                  <c:v>1942.5925925925926</c:v>
+                </c:pt>
+                <c:pt idx="56">
+                  <c:v>1977.7777777777778</c:v>
+                </c:pt>
+                <c:pt idx="57">
+                  <c:v>2012.962962962963</c:v>
+                </c:pt>
+                <c:pt idx="58">
+                  <c:v>2048.1481481481483</c:v>
+                </c:pt>
+                <c:pt idx="59">
+                  <c:v>2083.3333333333335</c:v>
+                </c:pt>
+                <c:pt idx="60">
+                  <c:v>2118.5185185185182</c:v>
+                </c:pt>
+                <c:pt idx="61">
+                  <c:v>2153.7037037037035</c:v>
+                </c:pt>
+                <c:pt idx="62">
+                  <c:v>2188.8888888888887</c:v>
+                </c:pt>
+                <c:pt idx="63">
+                  <c:v>2224.074074074074</c:v>
+                </c:pt>
+                <c:pt idx="64">
+                  <c:v>2259.259259259259</c:v>
+                </c:pt>
+                <c:pt idx="65">
+                  <c:v>2294.4444444444443</c:v>
+                </c:pt>
+                <c:pt idx="66">
+                  <c:v>2329.6296296296296</c:v>
+                </c:pt>
+                <c:pt idx="67">
+                  <c:v>2364.814814814815</c:v>
+                </c:pt>
+                <c:pt idx="68">
+                  <c:v>2400</c:v>
+                </c:pt>
+                <c:pt idx="69">
                   <c:v>1824</c:v>
                 </c:pt>
-                <c:pt idx="1">
+                <c:pt idx="70">
                   <c:v>1865</c:v>
                 </c:pt>
-                <c:pt idx="2">
+                <c:pt idx="71">
                   <c:v>1871</c:v>
                 </c:pt>
-                <c:pt idx="3">
+                <c:pt idx="72">
                   <c:v>1849</c:v>
                 </c:pt>
-                <c:pt idx="4">
+                <c:pt idx="73">
                   <c:v>1865</c:v>
-                </c:pt>
-                <c:pt idx="5">
-                  <c:v>1790</c:v>
-                </c:pt>
-                <c:pt idx="6">
-                  <c:v>1810</c:v>
-                </c:pt>
-                <c:pt idx="7">
-                  <c:v>1702</c:v>
-                </c:pt>
-                <c:pt idx="8">
-                  <c:v>1880</c:v>
-                </c:pt>
-                <c:pt idx="9">
-                  <c:v>2260</c:v>
-                </c:pt>
-                <c:pt idx="10">
-                  <c:v>1950</c:v>
-                </c:pt>
-                <c:pt idx="11">
-                  <c:v>2380</c:v>
-                </c:pt>
-                <c:pt idx="12">
-                  <c:v>2150</c:v>
-                </c:pt>
-                <c:pt idx="13">
-                  <c:v>2380</c:v>
-                </c:pt>
-                <c:pt idx="14">
-                  <c:v>1740</c:v>
-                </c:pt>
-                <c:pt idx="15">
-                  <c:v>1880</c:v>
-                </c:pt>
-                <c:pt idx="16">
-                  <c:v>1950</c:v>
-                </c:pt>
-                <c:pt idx="17">
-                  <c:v>1740</c:v>
-                </c:pt>
-                <c:pt idx="18">
-                  <c:v>1450</c:v>
-                </c:pt>
-                <c:pt idx="19">
-                  <c:v>2150</c:v>
-                </c:pt>
-                <c:pt idx="20">
-                  <c:v>2380</c:v>
-                </c:pt>
-                <c:pt idx="21">
-                  <c:v>2260</c:v>
-                </c:pt>
-                <c:pt idx="22">
-                  <c:v>2380</c:v>
-                </c:pt>
-                <c:pt idx="23">
-                  <c:v>1740</c:v>
-                </c:pt>
-                <c:pt idx="24">
-                  <c:v>1450</c:v>
-                </c:pt>
-                <c:pt idx="25">
-                  <c:v>1610</c:v>
-                </c:pt>
-                <c:pt idx="26">
-                  <c:v>2380</c:v>
-                </c:pt>
-                <c:pt idx="27">
-                  <c:v>1820</c:v>
-                </c:pt>
-                <c:pt idx="28">
-                  <c:v>1880</c:v>
-                </c:pt>
-                <c:pt idx="29">
-                  <c:v>2040</c:v>
-                </c:pt>
-                <c:pt idx="30">
-                  <c:v>2380</c:v>
-                </c:pt>
-                <c:pt idx="31">
-                  <c:v>1610</c:v>
-                </c:pt>
-                <c:pt idx="32">
-                  <c:v>2380</c:v>
-                </c:pt>
-                <c:pt idx="33">
-                  <c:v>1849</c:v>
-                </c:pt>
-                <c:pt idx="34">
-                  <c:v>1943</c:v>
-                </c:pt>
-                <c:pt idx="35">
-                  <c:v>2400</c:v>
-                </c:pt>
-                <c:pt idx="36">
-                  <c:v>2400</c:v>
-                </c:pt>
-                <c:pt idx="37">
-                  <c:v>2400</c:v>
-                </c:pt>
-                <c:pt idx="38">
-                  <c:v>1650</c:v>
-                </c:pt>
-                <c:pt idx="39">
-                  <c:v>1500</c:v>
-                </c:pt>
-                <c:pt idx="40">
-                  <c:v>1650</c:v>
-                </c:pt>
-                <c:pt idx="41">
-                  <c:v>1900</c:v>
-                </c:pt>
-                <c:pt idx="42">
-                  <c:v>1650</c:v>
-                </c:pt>
-                <c:pt idx="43">
-                  <c:v>1900</c:v>
-                </c:pt>
-                <c:pt idx="44">
-                  <c:v>1650</c:v>
-                </c:pt>
-                <c:pt idx="45">
-                  <c:v>2100</c:v>
-                </c:pt>
-                <c:pt idx="46">
-                  <c:v>1450</c:v>
-                </c:pt>
-                <c:pt idx="47">
-                  <c:v>1485.1851851851852</c:v>
-                </c:pt>
-                <c:pt idx="48">
-                  <c:v>1520.3703703703704</c:v>
-                </c:pt>
-                <c:pt idx="49">
-                  <c:v>1555.5555555555557</c:v>
-                </c:pt>
-                <c:pt idx="50">
-                  <c:v>1590.7407407407406</c:v>
-                </c:pt>
-                <c:pt idx="51">
-                  <c:v>1625.9259259259259</c:v>
-                </c:pt>
-                <c:pt idx="52">
-                  <c:v>1661.111111111111</c:v>
-                </c:pt>
-                <c:pt idx="53">
-                  <c:v>1696.2962962962963</c:v>
-                </c:pt>
-                <c:pt idx="54">
-                  <c:v>1731.4814814814815</c:v>
-                </c:pt>
-                <c:pt idx="55">
-                  <c:v>1766.6666666666667</c:v>
-                </c:pt>
-                <c:pt idx="56">
-                  <c:v>1801.8518518518517</c:v>
-                </c:pt>
-                <c:pt idx="57">
-                  <c:v>1837.037037037037</c:v>
-                </c:pt>
-                <c:pt idx="58">
-                  <c:v>1872.2222222222222</c:v>
-                </c:pt>
-                <c:pt idx="59">
-                  <c:v>1907.4074074074074</c:v>
-                </c:pt>
-                <c:pt idx="60">
-                  <c:v>1942.5925925925926</c:v>
-                </c:pt>
-                <c:pt idx="61">
-                  <c:v>1977.7777777777778</c:v>
-                </c:pt>
-                <c:pt idx="62">
-                  <c:v>2012.962962962963</c:v>
-                </c:pt>
-                <c:pt idx="63">
-                  <c:v>2048.1481481481483</c:v>
-                </c:pt>
-                <c:pt idx="64">
-                  <c:v>2083.3333333333335</c:v>
-                </c:pt>
-                <c:pt idx="65">
-                  <c:v>2118.5185185185182</c:v>
-                </c:pt>
-                <c:pt idx="66">
-                  <c:v>2153.7037037037035</c:v>
-                </c:pt>
-                <c:pt idx="67">
-                  <c:v>2188.8888888888887</c:v>
-                </c:pt>
-                <c:pt idx="68">
-                  <c:v>2224.074074074074</c:v>
-                </c:pt>
-                <c:pt idx="69">
-                  <c:v>2259.259259259259</c:v>
-                </c:pt>
-                <c:pt idx="70">
-                  <c:v>2294.4444444444443</c:v>
-                </c:pt>
-                <c:pt idx="71">
-                  <c:v>2329.6296296296296</c:v>
-                </c:pt>
-                <c:pt idx="72">
-                  <c:v>2364.814814814815</c:v>
-                </c:pt>
-                <c:pt idx="73">
-                  <c:v>2400</c:v>
                 </c:pt>
                 <c:pt idx="74">
                   <c:v>1849</c:v>
@@ -912,108 +403,108 @@
           </c:xVal>
           <c:yVal>
             <c:numRef>
-              <c:f>Sheet1!$C$2:$C$76</c:f>
+              <c:f>Sheet1!$B$2:$B$76</c:f>
               <c:numCache>
                 <c:formatCode>General</c:formatCode>
                 <c:ptCount val="75"/>
                 <c:pt idx="0">
-                  <c:v/>
+                  <c:v>427000</c:v>
                 </c:pt>
                 <c:pt idx="1">
-                  <c:v/>
+                  <c:v>435000</c:v>
                 </c:pt>
                 <c:pt idx="2">
-                  <c:v/>
+                  <c:v>470000</c:v>
                 </c:pt>
                 <c:pt idx="3">
-                  <c:v/>
+                  <c:v>454500</c:v>
                 </c:pt>
                 <c:pt idx="4">
-                  <c:v/>
+                  <c:v>559500</c:v>
                 </c:pt>
                 <c:pt idx="5">
-                  <c:v>427000</c:v>
+                  <c:v>446000</c:v>
                 </c:pt>
                 <c:pt idx="6">
-                  <c:v>435000</c:v>
+                  <c:v>575000</c:v>
                 </c:pt>
                 <c:pt idx="7">
-                  <c:v>470000</c:v>
+                  <c:v>529500</c:v>
                 </c:pt>
                 <c:pt idx="8">
-                  <c:v>454500</c:v>
+                  <c:v>516000</c:v>
                 </c:pt>
                 <c:pt idx="9">
-                  <c:v>559500</c:v>
+                  <c:v>364000</c:v>
                 </c:pt>
                 <c:pt idx="10">
-                  <c:v>446000</c:v>
+                  <c:v>429500</c:v>
                 </c:pt>
                 <c:pt idx="11">
-                  <c:v>575000</c:v>
+                  <c:v>473000</c:v>
                 </c:pt>
                 <c:pt idx="12">
-                  <c:v>529500</c:v>
+                  <c:v>391000</c:v>
                 </c:pt>
                 <c:pt idx="13">
-                  <c:v>516000</c:v>
+                  <c:v>325500</c:v>
                 </c:pt>
                 <c:pt idx="14">
-                  <c:v>364000</c:v>
+                  <c:v>493000</c:v>
                 </c:pt>
                 <c:pt idx="15">
-                  <c:v>429500</c:v>
+                  <c:v>578000</c:v>
                 </c:pt>
                 <c:pt idx="16">
-                  <c:v>473000</c:v>
+                  <c:v>549500</c:v>
                 </c:pt>
                 <c:pt idx="17">
-                  <c:v>391000</c:v>
+                  <c:v>596500</c:v>
                 </c:pt>
                 <c:pt idx="18">
-                  <c:v>325500</c:v>
+                  <c:v>444500</c:v>
                 </c:pt>
                 <c:pt idx="19">
-                  <c:v>493000</c:v>
+                  <c:v>361500</c:v>
                 </c:pt>
                 <c:pt idx="20">
-                  <c:v>578000</c:v>
+                  <c:v>398000</c:v>
                 </c:pt>
                 <c:pt idx="21">
-                  <c:v>549500</c:v>
+                  <c:v>526000</c:v>
                 </c:pt>
                 <c:pt idx="22">
-                  <c:v>596500</c:v>
+                  <c:v>396500</c:v>
                 </c:pt>
                 <c:pt idx="23">
-                  <c:v>444500</c:v>
+                  <c:v>461000</c:v>
                 </c:pt>
                 <c:pt idx="24">
-                  <c:v>361500</c:v>
+                  <c:v>477000</c:v>
                 </c:pt>
                 <c:pt idx="25">
-                  <c:v>398000</c:v>
+                  <c:v>535000</c:v>
                 </c:pt>
                 <c:pt idx="26">
-                  <c:v>526000</c:v>
+                  <c:v>367000</c:v>
                 </c:pt>
                 <c:pt idx="27">
-                  <c:v>396500</c:v>
+                  <c:v>570000</c:v>
                 </c:pt>
                 <c:pt idx="28">
-                  <c:v>461000</c:v>
+                  <c:v/>
                 </c:pt>
                 <c:pt idx="29">
-                  <c:v>477000</c:v>
+                  <c:v/>
                 </c:pt>
                 <c:pt idx="30">
-                  <c:v>535000</c:v>
+                  <c:v/>
                 </c:pt>
                 <c:pt idx="31">
-                  <c:v>367000</c:v>
+                  <c:v/>
                 </c:pt>
                 <c:pt idx="32">
-                  <c:v>570000</c:v>
+                  <c:v/>
                 </c:pt>
                 <c:pt idx="33">
                   <c:v/>
@@ -1147,11 +638,11 @@
           <c:smooth val="0"/>
         </c:ser>
         <c:ser>
-          <c:idx val="2"/>
-          <c:order val="2"/>
+          <c:idx val="1"/>
+          <c:order val="1"/>
           <c:tx>
             <c:strRef>
-              <c:f>Sheet1!$D$1</c:f>
+              <c:f>Sheet1!$C$1</c:f>
               <c:strCache>
                 <c:ptCount val="1"/>
                 <c:pt idx="0">
@@ -1174,7 +665,7 @@
             <c:size val="7"/>
             <c:spPr>
               <a:solidFill>
-                <a:srgbClr val="DADEE2"/>
+                <a:srgbClr val="A3ADB6"/>
               </a:solidFill>
               <a:ln w="15875">
                 <a:solidFill>
@@ -1190,226 +681,226 @@
                 <c:formatCode>General</c:formatCode>
                 <c:ptCount val="75"/>
                 <c:pt idx="0">
+                  <c:v>1790</c:v>
+                </c:pt>
+                <c:pt idx="1">
+                  <c:v>1810</c:v>
+                </c:pt>
+                <c:pt idx="2">
+                  <c:v>1702</c:v>
+                </c:pt>
+                <c:pt idx="3">
+                  <c:v>1880</c:v>
+                </c:pt>
+                <c:pt idx="4">
+                  <c:v>2260</c:v>
+                </c:pt>
+                <c:pt idx="5">
+                  <c:v>1950</c:v>
+                </c:pt>
+                <c:pt idx="6">
+                  <c:v>2380</c:v>
+                </c:pt>
+                <c:pt idx="7">
+                  <c:v>2150</c:v>
+                </c:pt>
+                <c:pt idx="8">
+                  <c:v>2380</c:v>
+                </c:pt>
+                <c:pt idx="9">
+                  <c:v>1740</c:v>
+                </c:pt>
+                <c:pt idx="10">
+                  <c:v>1880</c:v>
+                </c:pt>
+                <c:pt idx="11">
+                  <c:v>1950</c:v>
+                </c:pt>
+                <c:pt idx="12">
+                  <c:v>1740</c:v>
+                </c:pt>
+                <c:pt idx="13">
+                  <c:v>1450</c:v>
+                </c:pt>
+                <c:pt idx="14">
+                  <c:v>2150</c:v>
+                </c:pt>
+                <c:pt idx="15">
+                  <c:v>2380</c:v>
+                </c:pt>
+                <c:pt idx="16">
+                  <c:v>2260</c:v>
+                </c:pt>
+                <c:pt idx="17">
+                  <c:v>2380</c:v>
+                </c:pt>
+                <c:pt idx="18">
+                  <c:v>1740</c:v>
+                </c:pt>
+                <c:pt idx="19">
+                  <c:v>1450</c:v>
+                </c:pt>
+                <c:pt idx="20">
+                  <c:v>1610</c:v>
+                </c:pt>
+                <c:pt idx="21">
+                  <c:v>2380</c:v>
+                </c:pt>
+                <c:pt idx="22">
+                  <c:v>1820</c:v>
+                </c:pt>
+                <c:pt idx="23">
+                  <c:v>1880</c:v>
+                </c:pt>
+                <c:pt idx="24">
+                  <c:v>2040</c:v>
+                </c:pt>
+                <c:pt idx="25">
+                  <c:v>2380</c:v>
+                </c:pt>
+                <c:pt idx="26">
+                  <c:v>1610</c:v>
+                </c:pt>
+                <c:pt idx="27">
+                  <c:v>2380</c:v>
+                </c:pt>
+                <c:pt idx="28">
+                  <c:v>1849</c:v>
+                </c:pt>
+                <c:pt idx="29">
+                  <c:v>1943</c:v>
+                </c:pt>
+                <c:pt idx="30">
+                  <c:v>2400</c:v>
+                </c:pt>
+                <c:pt idx="31">
+                  <c:v>2400</c:v>
+                </c:pt>
+                <c:pt idx="32">
+                  <c:v>2400</c:v>
+                </c:pt>
+                <c:pt idx="33">
+                  <c:v>1650</c:v>
+                </c:pt>
+                <c:pt idx="34">
+                  <c:v>1500</c:v>
+                </c:pt>
+                <c:pt idx="35">
+                  <c:v>1650</c:v>
+                </c:pt>
+                <c:pt idx="36">
+                  <c:v>1900</c:v>
+                </c:pt>
+                <c:pt idx="37">
+                  <c:v>1650</c:v>
+                </c:pt>
+                <c:pt idx="38">
+                  <c:v>1900</c:v>
+                </c:pt>
+                <c:pt idx="39">
+                  <c:v>1650</c:v>
+                </c:pt>
+                <c:pt idx="40">
+                  <c:v>2100</c:v>
+                </c:pt>
+                <c:pt idx="41">
+                  <c:v>1450</c:v>
+                </c:pt>
+                <c:pt idx="42">
+                  <c:v>1485.1851851851852</c:v>
+                </c:pt>
+                <c:pt idx="43">
+                  <c:v>1520.3703703703704</c:v>
+                </c:pt>
+                <c:pt idx="44">
+                  <c:v>1555.5555555555557</c:v>
+                </c:pt>
+                <c:pt idx="45">
+                  <c:v>1590.7407407407406</c:v>
+                </c:pt>
+                <c:pt idx="46">
+                  <c:v>1625.9259259259259</c:v>
+                </c:pt>
+                <c:pt idx="47">
+                  <c:v>1661.111111111111</c:v>
+                </c:pt>
+                <c:pt idx="48">
+                  <c:v>1696.2962962962963</c:v>
+                </c:pt>
+                <c:pt idx="49">
+                  <c:v>1731.4814814814815</c:v>
+                </c:pt>
+                <c:pt idx="50">
+                  <c:v>1766.6666666666667</c:v>
+                </c:pt>
+                <c:pt idx="51">
+                  <c:v>1801.8518518518517</c:v>
+                </c:pt>
+                <c:pt idx="52">
+                  <c:v>1837.037037037037</c:v>
+                </c:pt>
+                <c:pt idx="53">
+                  <c:v>1872.2222222222222</c:v>
+                </c:pt>
+                <c:pt idx="54">
+                  <c:v>1907.4074074074074</c:v>
+                </c:pt>
+                <c:pt idx="55">
+                  <c:v>1942.5925925925926</c:v>
+                </c:pt>
+                <c:pt idx="56">
+                  <c:v>1977.7777777777778</c:v>
+                </c:pt>
+                <c:pt idx="57">
+                  <c:v>2012.962962962963</c:v>
+                </c:pt>
+                <c:pt idx="58">
+                  <c:v>2048.1481481481483</c:v>
+                </c:pt>
+                <c:pt idx="59">
+                  <c:v>2083.3333333333335</c:v>
+                </c:pt>
+                <c:pt idx="60">
+                  <c:v>2118.5185185185182</c:v>
+                </c:pt>
+                <c:pt idx="61">
+                  <c:v>2153.7037037037035</c:v>
+                </c:pt>
+                <c:pt idx="62">
+                  <c:v>2188.8888888888887</c:v>
+                </c:pt>
+                <c:pt idx="63">
+                  <c:v>2224.074074074074</c:v>
+                </c:pt>
+                <c:pt idx="64">
+                  <c:v>2259.259259259259</c:v>
+                </c:pt>
+                <c:pt idx="65">
+                  <c:v>2294.4444444444443</c:v>
+                </c:pt>
+                <c:pt idx="66">
+                  <c:v>2329.6296296296296</c:v>
+                </c:pt>
+                <c:pt idx="67">
+                  <c:v>2364.814814814815</c:v>
+                </c:pt>
+                <c:pt idx="68">
+                  <c:v>2400</c:v>
+                </c:pt>
+                <c:pt idx="69">
                   <c:v>1824</c:v>
                 </c:pt>
-                <c:pt idx="1">
+                <c:pt idx="70">
                   <c:v>1865</c:v>
                 </c:pt>
-                <c:pt idx="2">
+                <c:pt idx="71">
                   <c:v>1871</c:v>
                 </c:pt>
-                <c:pt idx="3">
+                <c:pt idx="72">
                   <c:v>1849</c:v>
                 </c:pt>
-                <c:pt idx="4">
+                <c:pt idx="73">
                   <c:v>1865</c:v>
-                </c:pt>
-                <c:pt idx="5">
-                  <c:v>1790</c:v>
-                </c:pt>
-                <c:pt idx="6">
-                  <c:v>1810</c:v>
-                </c:pt>
-                <c:pt idx="7">
-                  <c:v>1702</c:v>
-                </c:pt>
-                <c:pt idx="8">
-                  <c:v>1880</c:v>
-                </c:pt>
-                <c:pt idx="9">
-                  <c:v>2260</c:v>
-                </c:pt>
-                <c:pt idx="10">
-                  <c:v>1950</c:v>
-                </c:pt>
-                <c:pt idx="11">
-                  <c:v>2380</c:v>
-                </c:pt>
-                <c:pt idx="12">
-                  <c:v>2150</c:v>
-                </c:pt>
-                <c:pt idx="13">
-                  <c:v>2380</c:v>
-                </c:pt>
-                <c:pt idx="14">
-                  <c:v>1740</c:v>
-                </c:pt>
-                <c:pt idx="15">
-                  <c:v>1880</c:v>
-                </c:pt>
-                <c:pt idx="16">
-                  <c:v>1950</c:v>
-                </c:pt>
-                <c:pt idx="17">
-                  <c:v>1740</c:v>
-                </c:pt>
-                <c:pt idx="18">
-                  <c:v>1450</c:v>
-                </c:pt>
-                <c:pt idx="19">
-                  <c:v>2150</c:v>
-                </c:pt>
-                <c:pt idx="20">
-                  <c:v>2380</c:v>
-                </c:pt>
-                <c:pt idx="21">
-                  <c:v>2260</c:v>
-                </c:pt>
-                <c:pt idx="22">
-                  <c:v>2380</c:v>
-                </c:pt>
-                <c:pt idx="23">
-                  <c:v>1740</c:v>
-                </c:pt>
-                <c:pt idx="24">
-                  <c:v>1450</c:v>
-                </c:pt>
-                <c:pt idx="25">
-                  <c:v>1610</c:v>
-                </c:pt>
-                <c:pt idx="26">
-                  <c:v>2380</c:v>
-                </c:pt>
-                <c:pt idx="27">
-                  <c:v>1820</c:v>
-                </c:pt>
-                <c:pt idx="28">
-                  <c:v>1880</c:v>
-                </c:pt>
-                <c:pt idx="29">
-                  <c:v>2040</c:v>
-                </c:pt>
-                <c:pt idx="30">
-                  <c:v>2380</c:v>
-                </c:pt>
-                <c:pt idx="31">
-                  <c:v>1610</c:v>
-                </c:pt>
-                <c:pt idx="32">
-                  <c:v>2380</c:v>
-                </c:pt>
-                <c:pt idx="33">
-                  <c:v>1849</c:v>
-                </c:pt>
-                <c:pt idx="34">
-                  <c:v>1943</c:v>
-                </c:pt>
-                <c:pt idx="35">
-                  <c:v>2400</c:v>
-                </c:pt>
-                <c:pt idx="36">
-                  <c:v>2400</c:v>
-                </c:pt>
-                <c:pt idx="37">
-                  <c:v>2400</c:v>
-                </c:pt>
-                <c:pt idx="38">
-                  <c:v>1650</c:v>
-                </c:pt>
-                <c:pt idx="39">
-                  <c:v>1500</c:v>
-                </c:pt>
-                <c:pt idx="40">
-                  <c:v>1650</c:v>
-                </c:pt>
-                <c:pt idx="41">
-                  <c:v>1900</c:v>
-                </c:pt>
-                <c:pt idx="42">
-                  <c:v>1650</c:v>
-                </c:pt>
-                <c:pt idx="43">
-                  <c:v>1900</c:v>
-                </c:pt>
-                <c:pt idx="44">
-                  <c:v>1650</c:v>
-                </c:pt>
-                <c:pt idx="45">
-                  <c:v>2100</c:v>
-                </c:pt>
-                <c:pt idx="46">
-                  <c:v>1450</c:v>
-                </c:pt>
-                <c:pt idx="47">
-                  <c:v>1485.1851851851852</c:v>
-                </c:pt>
-                <c:pt idx="48">
-                  <c:v>1520.3703703703704</c:v>
-                </c:pt>
-                <c:pt idx="49">
-                  <c:v>1555.5555555555557</c:v>
-                </c:pt>
-                <c:pt idx="50">
-                  <c:v>1590.7407407407406</c:v>
-                </c:pt>
-                <c:pt idx="51">
-                  <c:v>1625.9259259259259</c:v>
-                </c:pt>
-                <c:pt idx="52">
-                  <c:v>1661.111111111111</c:v>
-                </c:pt>
-                <c:pt idx="53">
-                  <c:v>1696.2962962962963</c:v>
-                </c:pt>
-                <c:pt idx="54">
-                  <c:v>1731.4814814814815</c:v>
-                </c:pt>
-                <c:pt idx="55">
-                  <c:v>1766.6666666666667</c:v>
-                </c:pt>
-                <c:pt idx="56">
-                  <c:v>1801.8518518518517</c:v>
-                </c:pt>
-                <c:pt idx="57">
-                  <c:v>1837.037037037037</c:v>
-                </c:pt>
-                <c:pt idx="58">
-                  <c:v>1872.2222222222222</c:v>
-                </c:pt>
-                <c:pt idx="59">
-                  <c:v>1907.4074074074074</c:v>
-                </c:pt>
-                <c:pt idx="60">
-                  <c:v>1942.5925925925926</c:v>
-                </c:pt>
-                <c:pt idx="61">
-                  <c:v>1977.7777777777778</c:v>
-                </c:pt>
-                <c:pt idx="62">
-                  <c:v>2012.962962962963</c:v>
-                </c:pt>
-                <c:pt idx="63">
-                  <c:v>2048.1481481481483</c:v>
-                </c:pt>
-                <c:pt idx="64">
-                  <c:v>2083.3333333333335</c:v>
-                </c:pt>
-                <c:pt idx="65">
-                  <c:v>2118.5185185185182</c:v>
-                </c:pt>
-                <c:pt idx="66">
-                  <c:v>2153.7037037037035</c:v>
-                </c:pt>
-                <c:pt idx="67">
-                  <c:v>2188.8888888888887</c:v>
-                </c:pt>
-                <c:pt idx="68">
-                  <c:v>2224.074074074074</c:v>
-                </c:pt>
-                <c:pt idx="69">
-                  <c:v>2259.259259259259</c:v>
-                </c:pt>
-                <c:pt idx="70">
-                  <c:v>2294.4444444444443</c:v>
-                </c:pt>
-                <c:pt idx="71">
-                  <c:v>2329.6296296296296</c:v>
-                </c:pt>
-                <c:pt idx="72">
-                  <c:v>2364.814814814815</c:v>
-                </c:pt>
-                <c:pt idx="73">
-                  <c:v>2400</c:v>
                 </c:pt>
                 <c:pt idx="74">
                   <c:v>1849</c:v>
@@ -1419,7 +910,7 @@
           </c:xVal>
           <c:yVal>
             <c:numRef>
-              <c:f>Sheet1!$D$2:$D$76</c:f>
+              <c:f>Sheet1!$C$2:$C$76</c:f>
               <c:numCache>
                 <c:formatCode>General</c:formatCode>
                 <c:ptCount val="75"/>
@@ -1508,58 +999,58 @@
                   <c:v/>
                 </c:pt>
                 <c:pt idx="28">
-                  <c:v/>
+                  <c:v>400000</c:v>
                 </c:pt>
                 <c:pt idx="29">
-                  <c:v/>
+                  <c:v>565000</c:v>
                 </c:pt>
                 <c:pt idx="30">
-                  <c:v/>
+                  <c:v>470000</c:v>
                 </c:pt>
                 <c:pt idx="31">
-                  <c:v/>
+                  <c:v>449000</c:v>
                 </c:pt>
                 <c:pt idx="32">
-                  <c:v/>
+                  <c:v>490000</c:v>
                 </c:pt>
                 <c:pt idx="33">
-                  <c:v>400000</c:v>
+                  <c:v>391900</c:v>
                 </c:pt>
                 <c:pt idx="34">
-                  <c:v>565000</c:v>
+                  <c:v>368900</c:v>
                 </c:pt>
                 <c:pt idx="35">
-                  <c:v>470000</c:v>
+                  <c:v>390900</c:v>
                 </c:pt>
                 <c:pt idx="36">
-                  <c:v>449000</c:v>
+                  <c:v>486900</c:v>
                 </c:pt>
                 <c:pt idx="37">
-                  <c:v>490000</c:v>
+                  <c:v>388900</c:v>
                 </c:pt>
                 <c:pt idx="38">
-                  <c:v>391900</c:v>
+                  <c:v>464900</c:v>
                 </c:pt>
                 <c:pt idx="39">
-                  <c:v>368900</c:v>
+                  <c:v>425900</c:v>
                 </c:pt>
                 <c:pt idx="40">
-                  <c:v>390900</c:v>
+                  <c:v>530900</c:v>
                 </c:pt>
                 <c:pt idx="41">
-                  <c:v>486900</c:v>
+                  <c:v/>
                 </c:pt>
                 <c:pt idx="42">
-                  <c:v>388900</c:v>
+                  <c:v/>
                 </c:pt>
                 <c:pt idx="43">
-                  <c:v>464900</c:v>
+                  <c:v/>
                 </c:pt>
                 <c:pt idx="44">
-                  <c:v>425900</c:v>
+                  <c:v/>
                 </c:pt>
                 <c:pt idx="45">
-                  <c:v>530900</c:v>
+                  <c:v/>
                 </c:pt>
                 <c:pt idx="46">
                   <c:v/>
@@ -1654,11 +1145,11 @@
           <c:smooth val="0"/>
         </c:ser>
         <c:ser>
-          <c:idx val="3"/>
-          <c:order val="3"/>
+          <c:idx val="2"/>
+          <c:order val="2"/>
           <c:tx>
             <c:strRef>
-              <c:f>Sheet1!$E$1</c:f>
+              <c:f>Sheet1!$D$1</c:f>
               <c:strCache>
                 <c:ptCount val="1"/>
                 <c:pt idx="0">
@@ -1689,226 +1180,733 @@
                 <c:formatCode>General</c:formatCode>
                 <c:ptCount val="75"/>
                 <c:pt idx="0">
+                  <c:v>1790</c:v>
+                </c:pt>
+                <c:pt idx="1">
+                  <c:v>1810</c:v>
+                </c:pt>
+                <c:pt idx="2">
+                  <c:v>1702</c:v>
+                </c:pt>
+                <c:pt idx="3">
+                  <c:v>1880</c:v>
+                </c:pt>
+                <c:pt idx="4">
+                  <c:v>2260</c:v>
+                </c:pt>
+                <c:pt idx="5">
+                  <c:v>1950</c:v>
+                </c:pt>
+                <c:pt idx="6">
+                  <c:v>2380</c:v>
+                </c:pt>
+                <c:pt idx="7">
+                  <c:v>2150</c:v>
+                </c:pt>
+                <c:pt idx="8">
+                  <c:v>2380</c:v>
+                </c:pt>
+                <c:pt idx="9">
+                  <c:v>1740</c:v>
+                </c:pt>
+                <c:pt idx="10">
+                  <c:v>1880</c:v>
+                </c:pt>
+                <c:pt idx="11">
+                  <c:v>1950</c:v>
+                </c:pt>
+                <c:pt idx="12">
+                  <c:v>1740</c:v>
+                </c:pt>
+                <c:pt idx="13">
+                  <c:v>1450</c:v>
+                </c:pt>
+                <c:pt idx="14">
+                  <c:v>2150</c:v>
+                </c:pt>
+                <c:pt idx="15">
+                  <c:v>2380</c:v>
+                </c:pt>
+                <c:pt idx="16">
+                  <c:v>2260</c:v>
+                </c:pt>
+                <c:pt idx="17">
+                  <c:v>2380</c:v>
+                </c:pt>
+                <c:pt idx="18">
+                  <c:v>1740</c:v>
+                </c:pt>
+                <c:pt idx="19">
+                  <c:v>1450</c:v>
+                </c:pt>
+                <c:pt idx="20">
+                  <c:v>1610</c:v>
+                </c:pt>
+                <c:pt idx="21">
+                  <c:v>2380</c:v>
+                </c:pt>
+                <c:pt idx="22">
+                  <c:v>1820</c:v>
+                </c:pt>
+                <c:pt idx="23">
+                  <c:v>1880</c:v>
+                </c:pt>
+                <c:pt idx="24">
+                  <c:v>2040</c:v>
+                </c:pt>
+                <c:pt idx="25">
+                  <c:v>2380</c:v>
+                </c:pt>
+                <c:pt idx="26">
+                  <c:v>1610</c:v>
+                </c:pt>
+                <c:pt idx="27">
+                  <c:v>2380</c:v>
+                </c:pt>
+                <c:pt idx="28">
+                  <c:v>1849</c:v>
+                </c:pt>
+                <c:pt idx="29">
+                  <c:v>1943</c:v>
+                </c:pt>
+                <c:pt idx="30">
+                  <c:v>2400</c:v>
+                </c:pt>
+                <c:pt idx="31">
+                  <c:v>2400</c:v>
+                </c:pt>
+                <c:pt idx="32">
+                  <c:v>2400</c:v>
+                </c:pt>
+                <c:pt idx="33">
+                  <c:v>1650</c:v>
+                </c:pt>
+                <c:pt idx="34">
+                  <c:v>1500</c:v>
+                </c:pt>
+                <c:pt idx="35">
+                  <c:v>1650</c:v>
+                </c:pt>
+                <c:pt idx="36">
+                  <c:v>1900</c:v>
+                </c:pt>
+                <c:pt idx="37">
+                  <c:v>1650</c:v>
+                </c:pt>
+                <c:pt idx="38">
+                  <c:v>1900</c:v>
+                </c:pt>
+                <c:pt idx="39">
+                  <c:v>1650</c:v>
+                </c:pt>
+                <c:pt idx="40">
+                  <c:v>2100</c:v>
+                </c:pt>
+                <c:pt idx="41">
+                  <c:v>1450</c:v>
+                </c:pt>
+                <c:pt idx="42">
+                  <c:v>1485.1851851851852</c:v>
+                </c:pt>
+                <c:pt idx="43">
+                  <c:v>1520.3703703703704</c:v>
+                </c:pt>
+                <c:pt idx="44">
+                  <c:v>1555.5555555555557</c:v>
+                </c:pt>
+                <c:pt idx="45">
+                  <c:v>1590.7407407407406</c:v>
+                </c:pt>
+                <c:pt idx="46">
+                  <c:v>1625.9259259259259</c:v>
+                </c:pt>
+                <c:pt idx="47">
+                  <c:v>1661.111111111111</c:v>
+                </c:pt>
+                <c:pt idx="48">
+                  <c:v>1696.2962962962963</c:v>
+                </c:pt>
+                <c:pt idx="49">
+                  <c:v>1731.4814814814815</c:v>
+                </c:pt>
+                <c:pt idx="50">
+                  <c:v>1766.6666666666667</c:v>
+                </c:pt>
+                <c:pt idx="51">
+                  <c:v>1801.8518518518517</c:v>
+                </c:pt>
+                <c:pt idx="52">
+                  <c:v>1837.037037037037</c:v>
+                </c:pt>
+                <c:pt idx="53">
+                  <c:v>1872.2222222222222</c:v>
+                </c:pt>
+                <c:pt idx="54">
+                  <c:v>1907.4074074074074</c:v>
+                </c:pt>
+                <c:pt idx="55">
+                  <c:v>1942.5925925925926</c:v>
+                </c:pt>
+                <c:pt idx="56">
+                  <c:v>1977.7777777777778</c:v>
+                </c:pt>
+                <c:pt idx="57">
+                  <c:v>2012.962962962963</c:v>
+                </c:pt>
+                <c:pt idx="58">
+                  <c:v>2048.1481481481483</c:v>
+                </c:pt>
+                <c:pt idx="59">
+                  <c:v>2083.3333333333335</c:v>
+                </c:pt>
+                <c:pt idx="60">
+                  <c:v>2118.5185185185182</c:v>
+                </c:pt>
+                <c:pt idx="61">
+                  <c:v>2153.7037037037035</c:v>
+                </c:pt>
+                <c:pt idx="62">
+                  <c:v>2188.8888888888887</c:v>
+                </c:pt>
+                <c:pt idx="63">
+                  <c:v>2224.074074074074</c:v>
+                </c:pt>
+                <c:pt idx="64">
+                  <c:v>2259.259259259259</c:v>
+                </c:pt>
+                <c:pt idx="65">
+                  <c:v>2294.4444444444443</c:v>
+                </c:pt>
+                <c:pt idx="66">
+                  <c:v>2329.6296296296296</c:v>
+                </c:pt>
+                <c:pt idx="67">
+                  <c:v>2364.814814814815</c:v>
+                </c:pt>
+                <c:pt idx="68">
+                  <c:v>2400</c:v>
+                </c:pt>
+                <c:pt idx="69">
                   <c:v>1824</c:v>
                 </c:pt>
+                <c:pt idx="70">
+                  <c:v>1865</c:v>
+                </c:pt>
+                <c:pt idx="71">
+                  <c:v>1871</c:v>
+                </c:pt>
+                <c:pt idx="72">
+                  <c:v>1849</c:v>
+                </c:pt>
+                <c:pt idx="73">
+                  <c:v>1865</c:v>
+                </c:pt>
+                <c:pt idx="74">
+                  <c:v>1849</c:v>
+                </c:pt>
+              </c:numCache>
+            </c:numRef>
+          </c:xVal>
+          <c:yVal>
+            <c:numRef>
+              <c:f>Sheet1!$D$2:$D$76</c:f>
+              <c:numCache>
+                <c:formatCode>General</c:formatCode>
+                <c:ptCount val="75"/>
+                <c:pt idx="0">
+                  <c:v/>
+                </c:pt>
                 <c:pt idx="1">
+                  <c:v/>
+                </c:pt>
+                <c:pt idx="2">
+                  <c:v/>
+                </c:pt>
+                <c:pt idx="3">
+                  <c:v/>
+                </c:pt>
+                <c:pt idx="4">
+                  <c:v/>
+                </c:pt>
+                <c:pt idx="5">
+                  <c:v/>
+                </c:pt>
+                <c:pt idx="6">
+                  <c:v/>
+                </c:pt>
+                <c:pt idx="7">
+                  <c:v/>
+                </c:pt>
+                <c:pt idx="8">
+                  <c:v/>
+                </c:pt>
+                <c:pt idx="9">
+                  <c:v/>
+                </c:pt>
+                <c:pt idx="10">
+                  <c:v/>
+                </c:pt>
+                <c:pt idx="11">
+                  <c:v/>
+                </c:pt>
+                <c:pt idx="12">
+                  <c:v/>
+                </c:pt>
+                <c:pt idx="13">
+                  <c:v/>
+                </c:pt>
+                <c:pt idx="14">
+                  <c:v/>
+                </c:pt>
+                <c:pt idx="15">
+                  <c:v/>
+                </c:pt>
+                <c:pt idx="16">
+                  <c:v/>
+                </c:pt>
+                <c:pt idx="17">
+                  <c:v/>
+                </c:pt>
+                <c:pt idx="18">
+                  <c:v/>
+                </c:pt>
+                <c:pt idx="19">
+                  <c:v/>
+                </c:pt>
+                <c:pt idx="20">
+                  <c:v/>
+                </c:pt>
+                <c:pt idx="21">
+                  <c:v/>
+                </c:pt>
+                <c:pt idx="22">
+                  <c:v/>
+                </c:pt>
+                <c:pt idx="23">
+                  <c:v/>
+                </c:pt>
+                <c:pt idx="24">
+                  <c:v/>
+                </c:pt>
+                <c:pt idx="25">
+                  <c:v/>
+                </c:pt>
+                <c:pt idx="26">
+                  <c:v/>
+                </c:pt>
+                <c:pt idx="27">
+                  <c:v/>
+                </c:pt>
+                <c:pt idx="28">
+                  <c:v/>
+                </c:pt>
+                <c:pt idx="29">
+                  <c:v/>
+                </c:pt>
+                <c:pt idx="30">
+                  <c:v/>
+                </c:pt>
+                <c:pt idx="31">
+                  <c:v/>
+                </c:pt>
+                <c:pt idx="32">
+                  <c:v/>
+                </c:pt>
+                <c:pt idx="33">
+                  <c:v/>
+                </c:pt>
+                <c:pt idx="34">
+                  <c:v/>
+                </c:pt>
+                <c:pt idx="35">
+                  <c:v/>
+                </c:pt>
+                <c:pt idx="36">
+                  <c:v/>
+                </c:pt>
+                <c:pt idx="37">
+                  <c:v/>
+                </c:pt>
+                <c:pt idx="38">
+                  <c:v/>
+                </c:pt>
+                <c:pt idx="39">
+                  <c:v/>
+                </c:pt>
+                <c:pt idx="40">
+                  <c:v/>
+                </c:pt>
+                <c:pt idx="41">
+                  <c:v>353370.74537409266</c:v>
+                </c:pt>
+                <c:pt idx="42">
+                  <c:v>361279.9692978465</c:v>
+                </c:pt>
+                <c:pt idx="43">
+                  <c:v>369189.1932216004</c:v>
+                </c:pt>
+                <c:pt idx="44">
+                  <c:v>377098.41714535427</c:v>
+                </c:pt>
+                <c:pt idx="45">
+                  <c:v>385007.6410691081</c:v>
+                </c:pt>
+                <c:pt idx="46">
+                  <c:v>392916.864992862</c:v>
+                </c:pt>
+                <c:pt idx="47">
+                  <c:v>400826.0889166159</c:v>
+                </c:pt>
+                <c:pt idx="48">
+                  <c:v>408735.31284036976</c:v>
+                </c:pt>
+                <c:pt idx="49">
+                  <c:v>416644.53676412365</c:v>
+                </c:pt>
+                <c:pt idx="50">
+                  <c:v>424553.7606878775</c:v>
+                </c:pt>
+                <c:pt idx="51">
+                  <c:v>432462.9846116313</c:v>
+                </c:pt>
+                <c:pt idx="52">
+                  <c:v>440372.2085353852</c:v>
+                </c:pt>
+                <c:pt idx="53">
+                  <c:v>448281.4324591391</c:v>
+                </c:pt>
+                <c:pt idx="54">
+                  <c:v>456190.656382893</c:v>
+                </c:pt>
+                <c:pt idx="55">
+                  <c:v>464099.88030664687</c:v>
+                </c:pt>
+                <c:pt idx="56">
+                  <c:v>472009.10423040076</c:v>
+                </c:pt>
+                <c:pt idx="57">
+                  <c:v>479918.32815415465</c:v>
+                </c:pt>
+                <c:pt idx="58">
+                  <c:v>487827.5520779085</c:v>
+                </c:pt>
+                <c:pt idx="59">
+                  <c:v>495736.77600166237</c:v>
+                </c:pt>
+                <c:pt idx="60">
+                  <c:v>503645.99992541614</c:v>
+                </c:pt>
+                <c:pt idx="61">
+                  <c:v>511555.22384917</c:v>
+                </c:pt>
+                <c:pt idx="62">
+                  <c:v>519464.4477729239</c:v>
+                </c:pt>
+                <c:pt idx="63">
+                  <c:v>527373.6716966778</c:v>
+                </c:pt>
+                <c:pt idx="64">
+                  <c:v>535282.8956204318</c:v>
+                </c:pt>
+                <c:pt idx="65">
+                  <c:v>543192.1195441856</c:v>
+                </c:pt>
+                <c:pt idx="66">
+                  <c:v>551101.3434679394</c:v>
+                </c:pt>
+                <c:pt idx="67">
+                  <c:v>559010.5673916934</c:v>
+                </c:pt>
+                <c:pt idx="68">
+                  <c:v>566919.7913154473</c:v>
+                </c:pt>
+                <c:pt idx="69">
+                  <c:v/>
+                </c:pt>
+                <c:pt idx="70">
+                  <c:v/>
+                </c:pt>
+                <c:pt idx="71">
+                  <c:v/>
+                </c:pt>
+                <c:pt idx="72">
+                  <c:v/>
+                </c:pt>
+                <c:pt idx="73">
+                  <c:v/>
+                </c:pt>
+                <c:pt idx="74">
+                  <c:v/>
+                </c:pt>
+              </c:numCache>
+            </c:numRef>
+          </c:yVal>
+          <c:smooth val="0"/>
+        </c:ser>
+        <c:ser>
+          <c:idx val="3"/>
+          <c:order val="3"/>
+          <c:tx>
+            <c:strRef>
+              <c:f>Sheet1!$E$1</c:f>
+              <c:strCache>
+                <c:ptCount val="1"/>
+                <c:pt idx="0">
+                  <c:v>Comparable Sales</c:v>
+                </c:pt>
+              </c:strCache>
+            </c:strRef>
+          </c:tx>
+          <c:spPr>
+            <a:solidFill>
+              <a:srgbClr val="C2410C"/>
+            </a:solidFill>
+            <a:ln>
+              <a:noFill/>
+            </a:ln>
+            <a:effectLst/>
+          </c:spPr>
+          <c:marker>
+            <c:symbol val="circle"/>
+            <c:size val="8"/>
+            <c:spPr>
+              <a:solidFill>
+                <a:srgbClr val="C2410C"/>
+              </a:solidFill>
+              <a:ln w="9525">
+                <a:solidFill>
+                  <a:srgbClr val="C2410C"/>
+                </a:solidFill>
+              </a:ln>
+            </c:spPr>
+          </c:marker>
+          <c:xVal>
+            <c:numRef>
+              <c:f>Sheet1!$A$2:$A$76</c:f>
+              <c:numCache>
+                <c:formatCode>General</c:formatCode>
+                <c:ptCount val="75"/>
+                <c:pt idx="0">
+                  <c:v>1790</c:v>
+                </c:pt>
+                <c:pt idx="1">
+                  <c:v>1810</c:v>
+                </c:pt>
+                <c:pt idx="2">
+                  <c:v>1702</c:v>
+                </c:pt>
+                <c:pt idx="3">
+                  <c:v>1880</c:v>
+                </c:pt>
+                <c:pt idx="4">
+                  <c:v>2260</c:v>
+                </c:pt>
+                <c:pt idx="5">
+                  <c:v>1950</c:v>
+                </c:pt>
+                <c:pt idx="6">
+                  <c:v>2380</c:v>
+                </c:pt>
+                <c:pt idx="7">
+                  <c:v>2150</c:v>
+                </c:pt>
+                <c:pt idx="8">
+                  <c:v>2380</c:v>
+                </c:pt>
+                <c:pt idx="9">
+                  <c:v>1740</c:v>
+                </c:pt>
+                <c:pt idx="10">
+                  <c:v>1880</c:v>
+                </c:pt>
+                <c:pt idx="11">
+                  <c:v>1950</c:v>
+                </c:pt>
+                <c:pt idx="12">
+                  <c:v>1740</c:v>
+                </c:pt>
+                <c:pt idx="13">
+                  <c:v>1450</c:v>
+                </c:pt>
+                <c:pt idx="14">
+                  <c:v>2150</c:v>
+                </c:pt>
+                <c:pt idx="15">
+                  <c:v>2380</c:v>
+                </c:pt>
+                <c:pt idx="16">
+                  <c:v>2260</c:v>
+                </c:pt>
+                <c:pt idx="17">
+                  <c:v>2380</c:v>
+                </c:pt>
+                <c:pt idx="18">
+                  <c:v>1740</c:v>
+                </c:pt>
+                <c:pt idx="19">
+                  <c:v>1450</c:v>
+                </c:pt>
+                <c:pt idx="20">
+                  <c:v>1610</c:v>
+                </c:pt>
+                <c:pt idx="21">
+                  <c:v>2380</c:v>
+                </c:pt>
+                <c:pt idx="22">
+                  <c:v>1820</c:v>
+                </c:pt>
+                <c:pt idx="23">
+                  <c:v>1880</c:v>
+                </c:pt>
+                <c:pt idx="24">
+                  <c:v>2040</c:v>
+                </c:pt>
+                <c:pt idx="25">
+                  <c:v>2380</c:v>
+                </c:pt>
+                <c:pt idx="26">
+                  <c:v>1610</c:v>
+                </c:pt>
+                <c:pt idx="27">
+                  <c:v>2380</c:v>
+                </c:pt>
+                <c:pt idx="28">
+                  <c:v>1849</c:v>
+                </c:pt>
+                <c:pt idx="29">
+                  <c:v>1943</c:v>
+                </c:pt>
+                <c:pt idx="30">
+                  <c:v>2400</c:v>
+                </c:pt>
+                <c:pt idx="31">
+                  <c:v>2400</c:v>
+                </c:pt>
+                <c:pt idx="32">
+                  <c:v>2400</c:v>
+                </c:pt>
+                <c:pt idx="33">
+                  <c:v>1650</c:v>
+                </c:pt>
+                <c:pt idx="34">
+                  <c:v>1500</c:v>
+                </c:pt>
+                <c:pt idx="35">
+                  <c:v>1650</c:v>
+                </c:pt>
+                <c:pt idx="36">
+                  <c:v>1900</c:v>
+                </c:pt>
+                <c:pt idx="37">
+                  <c:v>1650</c:v>
+                </c:pt>
+                <c:pt idx="38">
+                  <c:v>1900</c:v>
+                </c:pt>
+                <c:pt idx="39">
+                  <c:v>1650</c:v>
+                </c:pt>
+                <c:pt idx="40">
+                  <c:v>2100</c:v>
+                </c:pt>
+                <c:pt idx="41">
+                  <c:v>1450</c:v>
+                </c:pt>
+                <c:pt idx="42">
+                  <c:v>1485.1851851851852</c:v>
+                </c:pt>
+                <c:pt idx="43">
+                  <c:v>1520.3703703703704</c:v>
+                </c:pt>
+                <c:pt idx="44">
+                  <c:v>1555.5555555555557</c:v>
+                </c:pt>
+                <c:pt idx="45">
+                  <c:v>1590.7407407407406</c:v>
+                </c:pt>
+                <c:pt idx="46">
+                  <c:v>1625.9259259259259</c:v>
+                </c:pt>
+                <c:pt idx="47">
+                  <c:v>1661.111111111111</c:v>
+                </c:pt>
+                <c:pt idx="48">
+                  <c:v>1696.2962962962963</c:v>
+                </c:pt>
+                <c:pt idx="49">
+                  <c:v>1731.4814814814815</c:v>
+                </c:pt>
+                <c:pt idx="50">
+                  <c:v>1766.6666666666667</c:v>
+                </c:pt>
+                <c:pt idx="51">
+                  <c:v>1801.8518518518517</c:v>
+                </c:pt>
+                <c:pt idx="52">
+                  <c:v>1837.037037037037</c:v>
+                </c:pt>
+                <c:pt idx="53">
+                  <c:v>1872.2222222222222</c:v>
+                </c:pt>
+                <c:pt idx="54">
+                  <c:v>1907.4074074074074</c:v>
+                </c:pt>
+                <c:pt idx="55">
+                  <c:v>1942.5925925925926</c:v>
+                </c:pt>
+                <c:pt idx="56">
+                  <c:v>1977.7777777777778</c:v>
+                </c:pt>
+                <c:pt idx="57">
+                  <c:v>2012.962962962963</c:v>
+                </c:pt>
+                <c:pt idx="58">
+                  <c:v>2048.1481481481483</c:v>
+                </c:pt>
+                <c:pt idx="59">
+                  <c:v>2083.3333333333335</c:v>
+                </c:pt>
+                <c:pt idx="60">
+                  <c:v>2118.5185185185182</c:v>
+                </c:pt>
+                <c:pt idx="61">
+                  <c:v>2153.7037037037035</c:v>
+                </c:pt>
+                <c:pt idx="62">
+                  <c:v>2188.8888888888887</c:v>
+                </c:pt>
+                <c:pt idx="63">
+                  <c:v>2224.074074074074</c:v>
+                </c:pt>
+                <c:pt idx="64">
+                  <c:v>2259.259259259259</c:v>
+                </c:pt>
+                <c:pt idx="65">
+                  <c:v>2294.4444444444443</c:v>
+                </c:pt>
+                <c:pt idx="66">
+                  <c:v>2329.6296296296296</c:v>
+                </c:pt>
+                <c:pt idx="67">
+                  <c:v>2364.814814814815</c:v>
+                </c:pt>
+                <c:pt idx="68">
+                  <c:v>2400</c:v>
+                </c:pt>
+                <c:pt idx="69">
+                  <c:v>1824</c:v>
+                </c:pt>
+                <c:pt idx="70">
                   <c:v>1865</c:v>
                 </c:pt>
-                <c:pt idx="2">
+                <c:pt idx="71">
                   <c:v>1871</c:v>
                 </c:pt>
-                <c:pt idx="3">
+                <c:pt idx="72">
                   <c:v>1849</c:v>
                 </c:pt>
-                <c:pt idx="4">
+                <c:pt idx="73">
                   <c:v>1865</c:v>
-                </c:pt>
-                <c:pt idx="5">
-                  <c:v>1790</c:v>
-                </c:pt>
-                <c:pt idx="6">
-                  <c:v>1810</c:v>
-                </c:pt>
-                <c:pt idx="7">
-                  <c:v>1702</c:v>
-                </c:pt>
-                <c:pt idx="8">
-                  <c:v>1880</c:v>
-                </c:pt>
-                <c:pt idx="9">
-                  <c:v>2260</c:v>
-                </c:pt>
-                <c:pt idx="10">
-                  <c:v>1950</c:v>
-                </c:pt>
-                <c:pt idx="11">
-                  <c:v>2380</c:v>
-                </c:pt>
-                <c:pt idx="12">
-                  <c:v>2150</c:v>
-                </c:pt>
-                <c:pt idx="13">
-                  <c:v>2380</c:v>
-                </c:pt>
-                <c:pt idx="14">
-                  <c:v>1740</c:v>
-                </c:pt>
-                <c:pt idx="15">
-                  <c:v>1880</c:v>
-                </c:pt>
-                <c:pt idx="16">
-                  <c:v>1950</c:v>
-                </c:pt>
-                <c:pt idx="17">
-                  <c:v>1740</c:v>
-                </c:pt>
-                <c:pt idx="18">
-                  <c:v>1450</c:v>
-                </c:pt>
-                <c:pt idx="19">
-                  <c:v>2150</c:v>
-                </c:pt>
-                <c:pt idx="20">
-                  <c:v>2380</c:v>
-                </c:pt>
-                <c:pt idx="21">
-                  <c:v>2260</c:v>
-                </c:pt>
-                <c:pt idx="22">
-                  <c:v>2380</c:v>
-                </c:pt>
-                <c:pt idx="23">
-                  <c:v>1740</c:v>
-                </c:pt>
-                <c:pt idx="24">
-                  <c:v>1450</c:v>
-                </c:pt>
-                <c:pt idx="25">
-                  <c:v>1610</c:v>
-                </c:pt>
-                <c:pt idx="26">
-                  <c:v>2380</c:v>
-                </c:pt>
-                <c:pt idx="27">
-                  <c:v>1820</c:v>
-                </c:pt>
-                <c:pt idx="28">
-                  <c:v>1880</c:v>
-                </c:pt>
-                <c:pt idx="29">
-                  <c:v>2040</c:v>
-                </c:pt>
-                <c:pt idx="30">
-                  <c:v>2380</c:v>
-                </c:pt>
-                <c:pt idx="31">
-                  <c:v>1610</c:v>
-                </c:pt>
-                <c:pt idx="32">
-                  <c:v>2380</c:v>
-                </c:pt>
-                <c:pt idx="33">
-                  <c:v>1849</c:v>
-                </c:pt>
-                <c:pt idx="34">
-                  <c:v>1943</c:v>
-                </c:pt>
-                <c:pt idx="35">
-                  <c:v>2400</c:v>
-                </c:pt>
-                <c:pt idx="36">
-                  <c:v>2400</c:v>
-                </c:pt>
-                <c:pt idx="37">
-                  <c:v>2400</c:v>
-                </c:pt>
-                <c:pt idx="38">
-                  <c:v>1650</c:v>
-                </c:pt>
-                <c:pt idx="39">
-                  <c:v>1500</c:v>
-                </c:pt>
-                <c:pt idx="40">
-                  <c:v>1650</c:v>
-                </c:pt>
-                <c:pt idx="41">
-                  <c:v>1900</c:v>
-                </c:pt>
-                <c:pt idx="42">
-                  <c:v>1650</c:v>
-                </c:pt>
-                <c:pt idx="43">
-                  <c:v>1900</c:v>
-                </c:pt>
-                <c:pt idx="44">
-                  <c:v>1650</c:v>
-                </c:pt>
-                <c:pt idx="45">
-                  <c:v>2100</c:v>
-                </c:pt>
-                <c:pt idx="46">
-                  <c:v>1450</c:v>
-                </c:pt>
-                <c:pt idx="47">
-                  <c:v>1485.1851851851852</c:v>
-                </c:pt>
-                <c:pt idx="48">
-                  <c:v>1520.3703703703704</c:v>
-                </c:pt>
-                <c:pt idx="49">
-                  <c:v>1555.5555555555557</c:v>
-                </c:pt>
-                <c:pt idx="50">
-                  <c:v>1590.7407407407406</c:v>
-                </c:pt>
-                <c:pt idx="51">
-                  <c:v>1625.9259259259259</c:v>
-                </c:pt>
-                <c:pt idx="52">
-                  <c:v>1661.111111111111</c:v>
-                </c:pt>
-                <c:pt idx="53">
-                  <c:v>1696.2962962962963</c:v>
-                </c:pt>
-                <c:pt idx="54">
-                  <c:v>1731.4814814814815</c:v>
-                </c:pt>
-                <c:pt idx="55">
-                  <c:v>1766.6666666666667</c:v>
-                </c:pt>
-                <c:pt idx="56">
-                  <c:v>1801.8518518518517</c:v>
-                </c:pt>
-                <c:pt idx="57">
-                  <c:v>1837.037037037037</c:v>
-                </c:pt>
-                <c:pt idx="58">
-                  <c:v>1872.2222222222222</c:v>
-                </c:pt>
-                <c:pt idx="59">
-                  <c:v>1907.4074074074074</c:v>
-                </c:pt>
-                <c:pt idx="60">
-                  <c:v>1942.5925925925926</c:v>
-                </c:pt>
-                <c:pt idx="61">
-                  <c:v>1977.7777777777778</c:v>
-                </c:pt>
-                <c:pt idx="62">
-                  <c:v>2012.962962962963</c:v>
-                </c:pt>
-                <c:pt idx="63">
-                  <c:v>2048.1481481481483</c:v>
-                </c:pt>
-                <c:pt idx="64">
-                  <c:v>2083.3333333333335</c:v>
-                </c:pt>
-                <c:pt idx="65">
-                  <c:v>2118.5185185185182</c:v>
-                </c:pt>
-                <c:pt idx="66">
-                  <c:v>2153.7037037037035</c:v>
-                </c:pt>
-                <c:pt idx="67">
-                  <c:v>2188.8888888888887</c:v>
-                </c:pt>
-                <c:pt idx="68">
-                  <c:v>2224.074074074074</c:v>
-                </c:pt>
-                <c:pt idx="69">
-                  <c:v>2259.259259259259</c:v>
-                </c:pt>
-                <c:pt idx="70">
-                  <c:v>2294.4444444444443</c:v>
-                </c:pt>
-                <c:pt idx="71">
-                  <c:v>2329.6296296296296</c:v>
-                </c:pt>
-                <c:pt idx="72">
-                  <c:v>2364.814814814815</c:v>
-                </c:pt>
-                <c:pt idx="73">
-                  <c:v>2400</c:v>
                 </c:pt>
                 <c:pt idx="74">
                   <c:v>1849</c:v>
@@ -2061,88 +2059,88 @@
                   <c:v/>
                 </c:pt>
                 <c:pt idx="46">
-                  <c:v>353370.74537409266</c:v>
+                  <c:v/>
                 </c:pt>
                 <c:pt idx="47">
-                  <c:v>361279.9692978465</c:v>
+                  <c:v/>
                 </c:pt>
                 <c:pt idx="48">
-                  <c:v>369189.1932216004</c:v>
+                  <c:v/>
                 </c:pt>
                 <c:pt idx="49">
-                  <c:v>377098.41714535427</c:v>
+                  <c:v/>
                 </c:pt>
                 <c:pt idx="50">
-                  <c:v>385007.6410691081</c:v>
+                  <c:v/>
                 </c:pt>
                 <c:pt idx="51">
-                  <c:v>392916.864992862</c:v>
+                  <c:v/>
                 </c:pt>
                 <c:pt idx="52">
-                  <c:v>400826.0889166159</c:v>
+                  <c:v/>
                 </c:pt>
                 <c:pt idx="53">
-                  <c:v>408735.31284036976</c:v>
+                  <c:v/>
                 </c:pt>
                 <c:pt idx="54">
-                  <c:v>416644.53676412365</c:v>
+                  <c:v/>
                 </c:pt>
                 <c:pt idx="55">
-                  <c:v>424553.7606878775</c:v>
+                  <c:v/>
                 </c:pt>
                 <c:pt idx="56">
-                  <c:v>432462.9846116313</c:v>
+                  <c:v/>
                 </c:pt>
                 <c:pt idx="57">
-                  <c:v>440372.2085353852</c:v>
+                  <c:v/>
                 </c:pt>
                 <c:pt idx="58">
-                  <c:v>448281.4324591391</c:v>
+                  <c:v/>
                 </c:pt>
                 <c:pt idx="59">
-                  <c:v>456190.656382893</c:v>
+                  <c:v/>
                 </c:pt>
                 <c:pt idx="60">
-                  <c:v>464099.88030664687</c:v>
+                  <c:v/>
                 </c:pt>
                 <c:pt idx="61">
-                  <c:v>472009.10423040076</c:v>
+                  <c:v/>
                 </c:pt>
                 <c:pt idx="62">
-                  <c:v>479918.32815415465</c:v>
+                  <c:v/>
                 </c:pt>
                 <c:pt idx="63">
-                  <c:v>487827.5520779085</c:v>
+                  <c:v/>
                 </c:pt>
                 <c:pt idx="64">
-                  <c:v>495736.77600166237</c:v>
+                  <c:v/>
                 </c:pt>
                 <c:pt idx="65">
-                  <c:v>503645.99992541614</c:v>
+                  <c:v/>
                 </c:pt>
                 <c:pt idx="66">
-                  <c:v>511555.22384917</c:v>
+                  <c:v/>
                 </c:pt>
                 <c:pt idx="67">
-                  <c:v>519464.4477729239</c:v>
+                  <c:v/>
                 </c:pt>
                 <c:pt idx="68">
-                  <c:v>527373.6716966778</c:v>
+                  <c:v/>
                 </c:pt>
                 <c:pt idx="69">
-                  <c:v>535282.8956204318</c:v>
+                  <c:v>505500</c:v>
                 </c:pt>
                 <c:pt idx="70">
-                  <c:v>543192.1195441856</c:v>
+                  <c:v>495000</c:v>
                 </c:pt>
                 <c:pt idx="71">
-                  <c:v>551101.3434679394</c:v>
+                  <c:v>427000</c:v>
                 </c:pt>
                 <c:pt idx="72">
-                  <c:v>559010.5673916934</c:v>
+                  <c:v>429000</c:v>
                 </c:pt>
                 <c:pt idx="73">
-                  <c:v>566919.7913154473</c:v>
+                  <c:v>465000</c:v>
                 </c:pt>
                 <c:pt idx="74">
                   <c:v/>
@@ -2196,226 +2194,226 @@
                 <c:formatCode>General</c:formatCode>
                 <c:ptCount val="75"/>
                 <c:pt idx="0">
+                  <c:v>1790</c:v>
+                </c:pt>
+                <c:pt idx="1">
+                  <c:v>1810</c:v>
+                </c:pt>
+                <c:pt idx="2">
+                  <c:v>1702</c:v>
+                </c:pt>
+                <c:pt idx="3">
+                  <c:v>1880</c:v>
+                </c:pt>
+                <c:pt idx="4">
+                  <c:v>2260</c:v>
+                </c:pt>
+                <c:pt idx="5">
+                  <c:v>1950</c:v>
+                </c:pt>
+                <c:pt idx="6">
+                  <c:v>2380</c:v>
+                </c:pt>
+                <c:pt idx="7">
+                  <c:v>2150</c:v>
+                </c:pt>
+                <c:pt idx="8">
+                  <c:v>2380</c:v>
+                </c:pt>
+                <c:pt idx="9">
+                  <c:v>1740</c:v>
+                </c:pt>
+                <c:pt idx="10">
+                  <c:v>1880</c:v>
+                </c:pt>
+                <c:pt idx="11">
+                  <c:v>1950</c:v>
+                </c:pt>
+                <c:pt idx="12">
+                  <c:v>1740</c:v>
+                </c:pt>
+                <c:pt idx="13">
+                  <c:v>1450</c:v>
+                </c:pt>
+                <c:pt idx="14">
+                  <c:v>2150</c:v>
+                </c:pt>
+                <c:pt idx="15">
+                  <c:v>2380</c:v>
+                </c:pt>
+                <c:pt idx="16">
+                  <c:v>2260</c:v>
+                </c:pt>
+                <c:pt idx="17">
+                  <c:v>2380</c:v>
+                </c:pt>
+                <c:pt idx="18">
+                  <c:v>1740</c:v>
+                </c:pt>
+                <c:pt idx="19">
+                  <c:v>1450</c:v>
+                </c:pt>
+                <c:pt idx="20">
+                  <c:v>1610</c:v>
+                </c:pt>
+                <c:pt idx="21">
+                  <c:v>2380</c:v>
+                </c:pt>
+                <c:pt idx="22">
+                  <c:v>1820</c:v>
+                </c:pt>
+                <c:pt idx="23">
+                  <c:v>1880</c:v>
+                </c:pt>
+                <c:pt idx="24">
+                  <c:v>2040</c:v>
+                </c:pt>
+                <c:pt idx="25">
+                  <c:v>2380</c:v>
+                </c:pt>
+                <c:pt idx="26">
+                  <c:v>1610</c:v>
+                </c:pt>
+                <c:pt idx="27">
+                  <c:v>2380</c:v>
+                </c:pt>
+                <c:pt idx="28">
+                  <c:v>1849</c:v>
+                </c:pt>
+                <c:pt idx="29">
+                  <c:v>1943</c:v>
+                </c:pt>
+                <c:pt idx="30">
+                  <c:v>2400</c:v>
+                </c:pt>
+                <c:pt idx="31">
+                  <c:v>2400</c:v>
+                </c:pt>
+                <c:pt idx="32">
+                  <c:v>2400</c:v>
+                </c:pt>
+                <c:pt idx="33">
+                  <c:v>1650</c:v>
+                </c:pt>
+                <c:pt idx="34">
+                  <c:v>1500</c:v>
+                </c:pt>
+                <c:pt idx="35">
+                  <c:v>1650</c:v>
+                </c:pt>
+                <c:pt idx="36">
+                  <c:v>1900</c:v>
+                </c:pt>
+                <c:pt idx="37">
+                  <c:v>1650</c:v>
+                </c:pt>
+                <c:pt idx="38">
+                  <c:v>1900</c:v>
+                </c:pt>
+                <c:pt idx="39">
+                  <c:v>1650</c:v>
+                </c:pt>
+                <c:pt idx="40">
+                  <c:v>2100</c:v>
+                </c:pt>
+                <c:pt idx="41">
+                  <c:v>1450</c:v>
+                </c:pt>
+                <c:pt idx="42">
+                  <c:v>1485.1851851851852</c:v>
+                </c:pt>
+                <c:pt idx="43">
+                  <c:v>1520.3703703703704</c:v>
+                </c:pt>
+                <c:pt idx="44">
+                  <c:v>1555.5555555555557</c:v>
+                </c:pt>
+                <c:pt idx="45">
+                  <c:v>1590.7407407407406</c:v>
+                </c:pt>
+                <c:pt idx="46">
+                  <c:v>1625.9259259259259</c:v>
+                </c:pt>
+                <c:pt idx="47">
+                  <c:v>1661.111111111111</c:v>
+                </c:pt>
+                <c:pt idx="48">
+                  <c:v>1696.2962962962963</c:v>
+                </c:pt>
+                <c:pt idx="49">
+                  <c:v>1731.4814814814815</c:v>
+                </c:pt>
+                <c:pt idx="50">
+                  <c:v>1766.6666666666667</c:v>
+                </c:pt>
+                <c:pt idx="51">
+                  <c:v>1801.8518518518517</c:v>
+                </c:pt>
+                <c:pt idx="52">
+                  <c:v>1837.037037037037</c:v>
+                </c:pt>
+                <c:pt idx="53">
+                  <c:v>1872.2222222222222</c:v>
+                </c:pt>
+                <c:pt idx="54">
+                  <c:v>1907.4074074074074</c:v>
+                </c:pt>
+                <c:pt idx="55">
+                  <c:v>1942.5925925925926</c:v>
+                </c:pt>
+                <c:pt idx="56">
+                  <c:v>1977.7777777777778</c:v>
+                </c:pt>
+                <c:pt idx="57">
+                  <c:v>2012.962962962963</c:v>
+                </c:pt>
+                <c:pt idx="58">
+                  <c:v>2048.1481481481483</c:v>
+                </c:pt>
+                <c:pt idx="59">
+                  <c:v>2083.3333333333335</c:v>
+                </c:pt>
+                <c:pt idx="60">
+                  <c:v>2118.5185185185182</c:v>
+                </c:pt>
+                <c:pt idx="61">
+                  <c:v>2153.7037037037035</c:v>
+                </c:pt>
+                <c:pt idx="62">
+                  <c:v>2188.8888888888887</c:v>
+                </c:pt>
+                <c:pt idx="63">
+                  <c:v>2224.074074074074</c:v>
+                </c:pt>
+                <c:pt idx="64">
+                  <c:v>2259.259259259259</c:v>
+                </c:pt>
+                <c:pt idx="65">
+                  <c:v>2294.4444444444443</c:v>
+                </c:pt>
+                <c:pt idx="66">
+                  <c:v>2329.6296296296296</c:v>
+                </c:pt>
+                <c:pt idx="67">
+                  <c:v>2364.814814814815</c:v>
+                </c:pt>
+                <c:pt idx="68">
+                  <c:v>2400</c:v>
+                </c:pt>
+                <c:pt idx="69">
                   <c:v>1824</c:v>
                 </c:pt>
-                <c:pt idx="1">
+                <c:pt idx="70">
                   <c:v>1865</c:v>
                 </c:pt>
-                <c:pt idx="2">
+                <c:pt idx="71">
                   <c:v>1871</c:v>
                 </c:pt>
-                <c:pt idx="3">
+                <c:pt idx="72">
                   <c:v>1849</c:v>
                 </c:pt>
-                <c:pt idx="4">
+                <c:pt idx="73">
                   <c:v>1865</c:v>
-                </c:pt>
-                <c:pt idx="5">
-                  <c:v>1790</c:v>
-                </c:pt>
-                <c:pt idx="6">
-                  <c:v>1810</c:v>
-                </c:pt>
-                <c:pt idx="7">
-                  <c:v>1702</c:v>
-                </c:pt>
-                <c:pt idx="8">
-                  <c:v>1880</c:v>
-                </c:pt>
-                <c:pt idx="9">
-                  <c:v>2260</c:v>
-                </c:pt>
-                <c:pt idx="10">
-                  <c:v>1950</c:v>
-                </c:pt>
-                <c:pt idx="11">
-                  <c:v>2380</c:v>
-                </c:pt>
-                <c:pt idx="12">
-                  <c:v>2150</c:v>
-                </c:pt>
-                <c:pt idx="13">
-                  <c:v>2380</c:v>
-                </c:pt>
-                <c:pt idx="14">
-                  <c:v>1740</c:v>
-                </c:pt>
-                <c:pt idx="15">
-                  <c:v>1880</c:v>
-                </c:pt>
-                <c:pt idx="16">
-                  <c:v>1950</c:v>
-                </c:pt>
-                <c:pt idx="17">
-                  <c:v>1740</c:v>
-                </c:pt>
-                <c:pt idx="18">
-                  <c:v>1450</c:v>
-                </c:pt>
-                <c:pt idx="19">
-                  <c:v>2150</c:v>
-                </c:pt>
-                <c:pt idx="20">
-                  <c:v>2380</c:v>
-                </c:pt>
-                <c:pt idx="21">
-                  <c:v>2260</c:v>
-                </c:pt>
-                <c:pt idx="22">
-                  <c:v>2380</c:v>
-                </c:pt>
-                <c:pt idx="23">
-                  <c:v>1740</c:v>
-                </c:pt>
-                <c:pt idx="24">
-                  <c:v>1450</c:v>
-                </c:pt>
-                <c:pt idx="25">
-                  <c:v>1610</c:v>
-                </c:pt>
-                <c:pt idx="26">
-                  <c:v>2380</c:v>
-                </c:pt>
-                <c:pt idx="27">
-                  <c:v>1820</c:v>
-                </c:pt>
-                <c:pt idx="28">
-                  <c:v>1880</c:v>
-                </c:pt>
-                <c:pt idx="29">
-                  <c:v>2040</c:v>
-                </c:pt>
-                <c:pt idx="30">
-                  <c:v>2380</c:v>
-                </c:pt>
-                <c:pt idx="31">
-                  <c:v>1610</c:v>
-                </c:pt>
-                <c:pt idx="32">
-                  <c:v>2380</c:v>
-                </c:pt>
-                <c:pt idx="33">
-                  <c:v>1849</c:v>
-                </c:pt>
-                <c:pt idx="34">
-                  <c:v>1943</c:v>
-                </c:pt>
-                <c:pt idx="35">
-                  <c:v>2400</c:v>
-                </c:pt>
-                <c:pt idx="36">
-                  <c:v>2400</c:v>
-                </c:pt>
-                <c:pt idx="37">
-                  <c:v>2400</c:v>
-                </c:pt>
-                <c:pt idx="38">
-                  <c:v>1650</c:v>
-                </c:pt>
-                <c:pt idx="39">
-                  <c:v>1500</c:v>
-                </c:pt>
-                <c:pt idx="40">
-                  <c:v>1650</c:v>
-                </c:pt>
-                <c:pt idx="41">
-                  <c:v>1900</c:v>
-                </c:pt>
-                <c:pt idx="42">
-                  <c:v>1650</c:v>
-                </c:pt>
-                <c:pt idx="43">
-                  <c:v>1900</c:v>
-                </c:pt>
-                <c:pt idx="44">
-                  <c:v>1650</c:v>
-                </c:pt>
-                <c:pt idx="45">
-                  <c:v>2100</c:v>
-                </c:pt>
-                <c:pt idx="46">
-                  <c:v>1450</c:v>
-                </c:pt>
-                <c:pt idx="47">
-                  <c:v>1485.1851851851852</c:v>
-                </c:pt>
-                <c:pt idx="48">
-                  <c:v>1520.3703703703704</c:v>
-                </c:pt>
-                <c:pt idx="49">
-                  <c:v>1555.5555555555557</c:v>
-                </c:pt>
-                <c:pt idx="50">
-                  <c:v>1590.7407407407406</c:v>
-                </c:pt>
-                <c:pt idx="51">
-                  <c:v>1625.9259259259259</c:v>
-                </c:pt>
-                <c:pt idx="52">
-                  <c:v>1661.111111111111</c:v>
-                </c:pt>
-                <c:pt idx="53">
-                  <c:v>1696.2962962962963</c:v>
-                </c:pt>
-                <c:pt idx="54">
-                  <c:v>1731.4814814814815</c:v>
-                </c:pt>
-                <c:pt idx="55">
-                  <c:v>1766.6666666666667</c:v>
-                </c:pt>
-                <c:pt idx="56">
-                  <c:v>1801.8518518518517</c:v>
-                </c:pt>
-                <c:pt idx="57">
-                  <c:v>1837.037037037037</c:v>
-                </c:pt>
-                <c:pt idx="58">
-                  <c:v>1872.2222222222222</c:v>
-                </c:pt>
-                <c:pt idx="59">
-                  <c:v>1907.4074074074074</c:v>
-                </c:pt>
-                <c:pt idx="60">
-                  <c:v>1942.5925925925926</c:v>
-                </c:pt>
-                <c:pt idx="61">
-                  <c:v>1977.7777777777778</c:v>
-                </c:pt>
-                <c:pt idx="62">
-                  <c:v>2012.962962962963</c:v>
-                </c:pt>
-                <c:pt idx="63">
-                  <c:v>2048.1481481481483</c:v>
-                </c:pt>
-                <c:pt idx="64">
-                  <c:v>2083.3333333333335</c:v>
-                </c:pt>
-                <c:pt idx="65">
-                  <c:v>2118.5185185185182</c:v>
-                </c:pt>
-                <c:pt idx="66">
-                  <c:v>2153.7037037037035</c:v>
-                </c:pt>
-                <c:pt idx="67">
-                  <c:v>2188.8888888888887</c:v>
-                </c:pt>
-                <c:pt idx="68">
-                  <c:v>2224.074074074074</c:v>
-                </c:pt>
-                <c:pt idx="69">
-                  <c:v>2259.259259259259</c:v>
-                </c:pt>
-                <c:pt idx="70">
-                  <c:v>2294.4444444444443</c:v>
-                </c:pt>
-                <c:pt idx="71">
-                  <c:v>2329.6296296296296</c:v>
-                </c:pt>
-                <c:pt idx="72">
-                  <c:v>2364.814814814815</c:v>
-                </c:pt>
-                <c:pt idx="73">
-                  <c:v>2400</c:v>
                 </c:pt>
                 <c:pt idx="74">
                   <c:v>1849</c:v>

--- a/samples/seller-cma/517-Larkwood-Ave-Listing-Presentation.pptx
+++ b/samples/seller-cma/517-Larkwood-Ave-Listing-Presentation.pptx
@@ -5252,7 +5252,7 @@
                 <a:ea typeface="Arial" pitchFamily="34" charset="-122"/>
                 <a:cs typeface="Arial" pitchFamily="34" charset="-120"/>
               </a:rPr>
-              <a:t>Listing Presentation · Harrow Springs, Fernwood Park</a:t>
+              <a:t>Listing Presentation · Casselberry, Fernwood Park</a:t>
             </a:r>
             <a:endParaRPr lang="en-US" sz="1600" dirty="0"/>
           </a:p>
@@ -5917,7 +5917,7 @@
                 <a:ea typeface="Arial" pitchFamily="34" charset="-122"/>
                 <a:cs typeface="Arial" pitchFamily="34" charset="-120"/>
               </a:rPr>
-              <a:t>$4,228/mo</a:t>
+              <a:t>$4,169/mo</a:t>
             </a:r>
             <a:endParaRPr lang="en-US" sz="2800" dirty="0"/>
           </a:p>
@@ -6061,7 +6061,7 @@
                 <a:ea typeface="Arial" pitchFamily="34" charset="-122"/>
                 <a:cs typeface="Arial" pitchFamily="34" charset="-120"/>
               </a:rPr>
-              <a:t>$4,146/mo</a:t>
+              <a:t>$4,087/mo</a:t>
             </a:r>
             <a:endParaRPr lang="en-US" sz="2800" dirty="0"/>
           </a:p>
@@ -6205,7 +6205,7 @@
                 <a:ea typeface="Arial" pitchFamily="34" charset="-122"/>
                 <a:cs typeface="Arial" pitchFamily="34" charset="-120"/>
               </a:rPr>
-              <a:t>$4,064/mo</a:t>
+              <a:t>$4,005/mo</a:t>
             </a:r>
             <a:endParaRPr lang="en-US" sz="2800" dirty="0"/>
           </a:p>

--- a/samples/seller-cma/517-Larkwood-Ave-Listing-Presentation.pptx
+++ b/samples/seller-cma/517-Larkwood-Ave-Listing-Presentation.pptx
@@ -3966,7 +3966,7 @@
           <a:p>
             <a:r>
               <a:rPr lang="en-US" dirty="0"/>
-              <a:t>Holding costs: about $530 a month (loan interest, HOA, insurance and utilities; property tax is in the proration) for each option's time to contract plus 1 month to close. Commissions are negotiable and not set by law. Not included: this year's property tax proration. Taxes here are paid in arrears, so the seller credits the buyer from Jan 1; add the tax bill and the expected closing date to include it. Title company fees are typical local charges (settlement fee $700, title search $250, municipal lien search $125, recording $70); the title company's quote replaces them. Estimates only. Not included: mortgage payoff, tax proration and repairs; the closing agent provides exact figures.</a:t>
+              <a:t>Holding costs: about $530 a month (HOA, insurance and utilities; no loan interest, since no mortgage payoff was given; property tax is not included) for each option's time to contract plus 1 month to close. Commissions are negotiable and not set by law. Not included: this year's property tax proration. Taxes here are paid in arrears, so the seller credits the buyer from Jan 1; add the tax bill and the expected closing date to include it. Title company fees are typical local charges (settlement fee $700, title search $250, municipal lien search $125, recording $70); the title company's quote replaces them. Estimates only. Not included: mortgage payoff, tax proration and repairs; the closing agent provides exact figures.</a:t>
             </a:r>
             <a:endParaRPr lang="en-US" dirty="0"/>
           </a:p>
@@ -17008,7 +17008,7 @@
           <a:bodyPr wrap="square" lIns="0" tIns="0" rIns="0" bIns="0" rtlCol="0" anchor="ctr"/>
           <a:lstStyle/>
           <a:p>
-            <a:pPr indent="0" marL="0">
+            <a:pPr algn="l" indent="0" marL="0">
               <a:buNone/>
             </a:pPr>
             <a:r>
@@ -17150,7 +17150,7 @@
           <a:bodyPr wrap="square" lIns="0" tIns="0" rIns="0" bIns="0" rtlCol="0" anchor="ctr"/>
           <a:lstStyle/>
           <a:p>
-            <a:pPr indent="0" marL="0">
+            <a:pPr algn="l" indent="0" marL="0">
               <a:buNone/>
             </a:pPr>
             <a:r>
@@ -17292,7 +17292,7 @@
           <a:bodyPr wrap="square" lIns="0" tIns="0" rIns="0" bIns="0" rtlCol="0" anchor="ctr"/>
           <a:lstStyle/>
           <a:p>
-            <a:pPr indent="0" marL="0">
+            <a:pPr algn="l" indent="0" marL="0">
               <a:buNone/>
             </a:pPr>
             <a:r>
@@ -17434,7 +17434,7 @@
           <a:bodyPr wrap="square" lIns="0" tIns="0" rIns="0" bIns="0" rtlCol="0" anchor="ctr"/>
           <a:lstStyle/>
           <a:p>
-            <a:pPr indent="0" marL="0">
+            <a:pPr algn="l" indent="0" marL="0">
               <a:buNone/>
             </a:pPr>
             <a:r>
@@ -17576,7 +17576,7 @@
           <a:bodyPr wrap="square" lIns="0" tIns="0" rIns="0" bIns="0" rtlCol="0" anchor="ctr"/>
           <a:lstStyle/>
           <a:p>
-            <a:pPr indent="0" marL="0">
+            <a:pPr algn="l" indent="0" marL="0">
               <a:buNone/>
             </a:pPr>
             <a:r>

--- a/samples/seller-cma/517-Larkwood-Ave-Listing-Presentation.pptx
+++ b/samples/seller-cma/517-Larkwood-Ave-Listing-Presentation.pptx
@@ -2973,13 +2973,13 @@
                 <c:formatCode>General</c:formatCode>
                 <c:ptCount val="3"/>
                 <c:pt idx="0">
-                  <c:v>423074</c:v>
+                  <c:v>421368</c:v>
                 </c:pt>
                 <c:pt idx="1">
-                  <c:v>422136</c:v>
+                  <c:v>421060</c:v>
                 </c:pt>
                 <c:pt idx="2">
-                  <c:v>425260</c:v>
+                  <c:v>424486</c:v>
                 </c:pt>
               </c:numCache>
             </c:numRef>
@@ -3966,7 +3966,7 @@
           <a:p>
             <a:r>
               <a:rPr lang="en-US" dirty="0"/>
-              <a:t>Holding costs: about $530 a month (HOA, insurance and utilities; no loan interest, since no mortgage payoff was given; property tax is not included) for each option's time to contract plus 1 month to close. Commissions are negotiable and not set by law. Not included: this year's property tax proration. Taxes here are paid in arrears, so the seller credits the buyer from Jan 1; add the tax bill and the expected closing date to include it. Title company fees are typical local charges (settlement fee $700, title search $250, municipal lien search $125, recording $70); the title company's quote replaces them. Estimates only. Not included: mortgage payoff, tax proration and repairs; the closing agent provides exact figures.</a:t>
+              <a:t>Holding costs: about $530 a month (insurance and utilities; no loan interest, since no mortgage payoff was given; property tax is not included) for each option's time to contract plus 1 month to close. Commissions are negotiable and not set by law. Not included: this year's property tax proration. Taxes here are paid in arrears, so the seller credits the buyer from Jan 1; add the tax bill and the expected closing date to include it. Title company fees are typical local charges (settlement fee $700, title search $250, municipal lien search $125, recording $70); the title company's quote replaces them. Estimates only. Not included: mortgage payoff, tax proration and repairs; the closing agent provides exact figures.</a:t>
             </a:r>
             <a:endParaRPr lang="en-US" dirty="0"/>
           </a:p>
@@ -5464,7 +5464,7 @@
                 <a:ea typeface="Arial" pitchFamily="34" charset="-122"/>
                 <a:cs typeface="Arial" pitchFamily="34" charset="-120"/>
               </a:rPr>
-              <a:t>Estimated net before mortgage payoff</a:t>
+              <a:t>Estimated net before mortgage payoff, after holding costs</a:t>
             </a:r>
             <a:endParaRPr lang="en-US" sz="1300" dirty="0"/>
           </a:p>

--- a/samples/seller-cma/517-Larkwood-Ave-Listing-Presentation.pptx
+++ b/samples/seller-cma/517-Larkwood-Ave-Listing-Presentation.pptx
@@ -2973,7 +2973,7 @@
                 <c:formatCode>General</c:formatCode>
                 <c:ptCount val="3"/>
                 <c:pt idx="0">
-                  <c:v>421368</c:v>
+                  <c:v>420954</c:v>
                 </c:pt>
                 <c:pt idx="1">
                   <c:v>421060</c:v>
@@ -5546,7 +5546,7 @@
                 <a:ea typeface="Arial" pitchFamily="34" charset="-122"/>
                 <a:cs typeface="Arial" pitchFamily="34" charset="-120"/>
               </a:rPr>
-              <a:t>$3,426</a:t>
+              <a:t>$3,532</a:t>
             </a:r>
             <a:endParaRPr lang="en-US" sz="3200" dirty="0"/>
           </a:p>
@@ -11062,7 +11062,7 @@
                           <a:ea typeface="Arial" pitchFamily="34" charset="-122"/>
                           <a:cs typeface="Arial" pitchFamily="34" charset="-120"/>
                         </a:rPr>
-                        <a:t>−$1,706</a:t>
+                        <a:t>−$2,120</a:t>
                       </a:r>
                       <a:endParaRPr lang="en-US" sz="1100" dirty="0">
                         <a:latin typeface="Arial" charset="0"/>
@@ -11336,7 +11336,7 @@
                           <a:ea typeface="Arial" pitchFamily="34" charset="-122"/>
                           <a:cs typeface="Arial" pitchFamily="34" charset="-120"/>
                         </a:rPr>
-                        <a:t>$421,368</a:t>
+                        <a:t>$420,954</a:t>
                       </a:r>
                       <a:endParaRPr lang="en-US" sz="1100" dirty="0">
                         <a:latin typeface="Arial" charset="0"/>
@@ -15657,7 +15657,7 @@
                 <a:ea typeface="Arial" pitchFamily="34" charset="-122"/>
                 <a:cs typeface="Arial" pitchFamily="34" charset="-120"/>
               </a:rPr>
-              <a:t>Worth about $25,000 against similar homes without one.</a:t>
+              <a:t>Every one of the closest sales had one, so it keeps your home in that group.</a:t>
             </a:r>
             <a:endParaRPr lang="en-US" sz="1200" dirty="0"/>
           </a:p>
@@ -15911,7 +15911,7 @@
                 <a:ea typeface="Arial" pitchFamily="34" charset="-122"/>
                 <a:cs typeface="Arial" pitchFamily="34" charset="-120"/>
               </a:rPr>
-              <a:t>Outside the high-risk flood zone, so lenders don't require flood insurance.</a:t>
+              <a:t>Outside the high-risk flood zones; buyers still get their own flood insurance quote.</a:t>
             </a:r>
             <a:endParaRPr lang="en-US" sz="1200" dirty="0"/>
           </a:p>
@@ -20247,7 +20247,7 @@
         <p:spPr>
           <a:xfrm>
             <a:off x="658368" y="2075688"/>
-            <a:ext cx="1113584" cy="347472"/>
+            <a:ext cx="1075809" cy="347472"/>
           </a:xfrm>
           <a:prstGeom prst="rect">
             <a:avLst/>
@@ -20285,8 +20285,8 @@
         </p:nvSpPr>
         <p:spPr>
           <a:xfrm>
-            <a:off x="1863392" y="2075688"/>
-            <a:ext cx="952960" cy="347472"/>
+            <a:off x="1825617" y="2075688"/>
+            <a:ext cx="990735" cy="347472"/>
           </a:xfrm>
           <a:prstGeom prst="rect">
             <a:avLst/>
@@ -20310,7 +20310,7 @@
                 <a:ea typeface="Arial" pitchFamily="34" charset="-122"/>
                 <a:cs typeface="Arial" pitchFamily="34" charset="-120"/>
               </a:rPr>
-              <a:t>45–90 days</a:t>
+              <a:t>2–4 months</a:t>
             </a:r>
             <a:endParaRPr lang="en-US" sz="1300" dirty="0"/>
           </a:p>

--- a/samples/seller-cma/517-Larkwood-Ave-Listing-Presentation.pptx
+++ b/samples/seller-cma/517-Larkwood-Ave-Listing-Presentation.pptx
@@ -4054,7 +4054,7 @@
           <a:p>
             <a:r>
               <a:rPr lang="en-US" dirty="0"/>
-              <a:t>Adjustments: about $75 per sq ft of size difference; $30,000–$45,000 for renovation level; $5,000–$10,000 for larger or better lots; 1–2% for market change since the sale; seller-paid costs subtracted. A broker's opinion of value from comparable sales, not an appraisal, and not for lending. Sales data: Stellar MLS as of 2026-09-22. Deemed reliable but not guaranteed. This comparative market analysis is an opinion of price, not an appraisal, and isn't for lending purposes. Payment, tax and cost figures are estimates only, not lending or tax advice. Equal Housing Opportunity.</a:t>
+              <a:t>Adjustments: about $75 per sq ft of size difference; $30,000–$45,000 for renovation level; $5,000–$10,000 for larger or better lots; 1–2% for market change since the sale; seller-paid costs subtracted. A broker's opinion of value from comparable sales, not an appraisal, and not for lending. Sales data: Stellar MLS as of September 22, 2026. Deemed reliable but not guaranteed. This comparative market analysis is an opinion of price, not an appraisal, and isn't for lending purposes. Payment, tax and cost figures are estimates only, not lending or tax advice. Equal Housing Opportunity.</a:t>
             </a:r>
             <a:endParaRPr lang="en-US" dirty="0"/>
           </a:p>
@@ -5464,7 +5464,7 @@
                 <a:ea typeface="Arial" pitchFamily="34" charset="-122"/>
                 <a:cs typeface="Arial" pitchFamily="34" charset="-120"/>
               </a:rPr>
-              <a:t>Estimated net before mortgage payoff, after holding costs</a:t>
+              <a:t>Net after holding costs, before mortgage payoff</a:t>
             </a:r>
             <a:endParaRPr lang="en-US" sz="1300" dirty="0"/>
           </a:p>
@@ -13699,7 +13699,7 @@
                 <a:ea typeface="Arial" pitchFamily="34" charset="-122"/>
                 <a:cs typeface="Arial" pitchFamily="34" charset="-120"/>
               </a:rPr>
-              <a:t>A broker's opinion of value from comparable sales, not an appraisal, and not for lending. Sales data: Stellar MLS as of 2026-09-22. Deemed reliable but not guaranteed. Equal Housing Opportunity.</a:t>
+              <a:t>A broker's opinion of value from comparable sales, not an appraisal, and not for lending. Sales data: Stellar MLS as of September 22, 2026. Deemed reliable but not guaranteed. Equal Housing Opportunity.</a:t>
             </a:r>
             <a:endParaRPr lang="en-US" sz="1000" dirty="0"/>
           </a:p>

--- a/samples/seller-cma/517-Larkwood-Ave-Listing-Presentation.pptx
+++ b/samples/seller-cma/517-Larkwood-Ave-Listing-Presentation.pptx
@@ -128,7 +128,17 @@
   <c:chart>
     <c:autoTitleDeleted val="1"/>
     <c:plotArea>
-      <c:layout/>
+      <c:layout>
+        <c:manualLayout>
+          <c:layoutTarget val="inner"/>
+          <c:xMode val="edge"/>
+          <c:yMode val="edge"/>
+          <c:x val="0.12"/>
+          <c:y val="0.03"/>
+          <c:w val="0.85"/>
+          <c:h val="0.8"/>
+        </c:manualLayout>
+      </c:layout>
       <c:scatterChart>
         <c:scatterStyle val="lineMarker"/>
         <c:varyColors val="0"/>
@@ -148,7 +158,7 @@
           </c:tx>
           <c:spPr>
             <a:solidFill>
-              <a:srgbClr val="A3ADB6"/>
+              <a:srgbClr val="DBDBDB"/>
             </a:solidFill>
             <a:ln>
               <a:noFill/>
@@ -160,7 +170,7 @@
             <c:size val="5"/>
             <c:spPr>
               <a:solidFill>
-                <a:srgbClr val="DADEE2"/>
+                <a:srgbClr val="DBDBDB"/>
               </a:solidFill>
               <a:ln>
                 <a:noFill/>
@@ -653,7 +663,7 @@
           </c:tx>
           <c:spPr>
             <a:solidFill>
-              <a:srgbClr val="A3ADB6"/>
+              <a:srgbClr val="A6A6A6"/>
             </a:solidFill>
             <a:ln>
               <a:noFill/>
@@ -665,11 +675,11 @@
             <c:size val="7"/>
             <c:spPr>
               <a:solidFill>
-                <a:srgbClr val="A3ADB6"/>
+                <a:srgbClr val="A6A6A6"/>
               </a:solidFill>
               <a:ln w="15875">
                 <a:solidFill>
-                  <a:srgbClr val="A3ADB6"/>
+                  <a:srgbClr val="A6A6A6"/>
                 </a:solidFill>
               </a:ln>
             </c:spPr>
@@ -1160,11 +1170,11 @@
           </c:tx>
           <c:spPr>
             <a:solidFill>
-              <a:srgbClr val="5A6672"/>
+              <a:srgbClr val="5E5E5E"/>
             </a:solidFill>
             <a:ln w="15875">
               <a:solidFill>
-                <a:srgbClr val="5A6672"/>
+                <a:srgbClr val="5E5E5E"/>
               </a:solidFill>
               <a:prstDash val="dash"/>
             </a:ln>
@@ -2712,7 +2722,7 @@
                 <a:pPr>
                   <a:defRPr sz="1000" b="0" i="0" u="none" strike="noStrike">
                     <a:solidFill>
-                      <a:srgbClr val="5A6672"/>
+                      <a:srgbClr val="5E5E5E"/>
                     </a:solidFill>
                     <a:latin typeface="Arial"/>
                   </a:defRPr>
@@ -2720,7 +2730,7 @@
                 <a:r>
                   <a:rPr sz="1000" b="0" i="0" u="none" strike="noStrike">
                     <a:solidFill>
-                      <a:srgbClr val="5A6672"/>
+                      <a:srgbClr val="5E5E5E"/>
                     </a:solidFill>
                     <a:latin typeface="Arial"/>
                   </a:rPr>
@@ -2752,7 +2762,7 @@
             <a:pPr>
               <a:defRPr sz="1000" b="0" i="0" u="none" strike="noStrike">
                 <a:solidFill>
-                  <a:srgbClr val="5A6672"/>
+                  <a:srgbClr val="5E5E5E"/>
                 </a:solidFill>
                 <a:latin typeface="Arial"/>
               </a:defRPr>
@@ -2795,7 +2805,7 @@
                 <a:pPr>
                   <a:defRPr sz="1000" b="0" i="0" u="none" strike="noStrike">
                     <a:solidFill>
-                      <a:srgbClr val="5A6672"/>
+                      <a:srgbClr val="5E5E5E"/>
                     </a:solidFill>
                     <a:latin typeface="Arial"/>
                   </a:defRPr>
@@ -2803,7 +2813,7 @@
                 <a:r>
                   <a:rPr sz="1000" b="0" i="0" u="none" strike="noStrike">
                     <a:solidFill>
-                      <a:srgbClr val="5A6672"/>
+                      <a:srgbClr val="5E5E5E"/>
                     </a:solidFill>
                     <a:latin typeface="Arial"/>
                   </a:rPr>
@@ -2835,7 +2845,7 @@
             <a:pPr>
               <a:defRPr sz="1000" b="0" i="0" u="none" strike="noStrike">
                 <a:solidFill>
-                  <a:srgbClr val="5A6672"/>
+                  <a:srgbClr val="5E5E5E"/>
                 </a:solidFill>
                 <a:latin typeface="Arial"/>
               </a:defRPr>
@@ -2846,6 +2856,7 @@
         <c:crossAx val="2094734554"/>
         <c:crosses val="autoZero"/>
         <c:crossBetween val="midCat"/>
+        <c:majorUnit val="50000"/>
       </c:valAx>
       <c:spPr>
         <a:noFill/>
@@ -2855,24 +2866,6 @@
         <a:effectLst/>
       </c:spPr>
     </c:plotArea>
-    <c:legend>
-      <c:legendPos val="b"/>
-      <c:overlay val="0"/>
-      <c:txPr>
-        <a:bodyPr/>
-        <a:lstStyle/>
-        <a:p>
-          <a:pPr>
-            <a:defRPr sz="1000">
-              <a:solidFill>
-                <a:srgbClr val="1A1A1A"/>
-              </a:solidFill>
-            </a:defRPr>
-          </a:pPr>
-          <a:endParaRPr lang="en-US"/>
-        </a:p>
-      </c:txPr>
-    </c:legend>
     <c:plotVisOnly val="1"/>
     <c:dispBlanksAs val="span"/>
     <c:showDLblsOverMax val="1"/>
@@ -2973,13 +2966,13 @@
                 <c:formatCode>General</c:formatCode>
                 <c:ptCount val="3"/>
                 <c:pt idx="0">
-                  <c:v>420954</c:v>
+                  <c:v>409698</c:v>
                 </c:pt>
                 <c:pt idx="1">
-                  <c:v>421060</c:v>
+                  <c:v>410742</c:v>
                 </c:pt>
                 <c:pt idx="2">
-                  <c:v>424486</c:v>
+                  <c:v>402442</c:v>
                 </c:pt>
               </c:numCache>
             </c:numRef>
@@ -3095,7 +3088,7 @@
             <a:pPr>
               <a:defRPr sz="900" b="0" i="0" u="none" strike="noStrike">
                 <a:solidFill>
-                  <a:srgbClr val="5A6672"/>
+                  <a:srgbClr val="5E5E5E"/>
                 </a:solidFill>
                 <a:latin typeface="Arial"/>
               </a:defRPr>
@@ -5458,7 +5451,7 @@
             <a:r>
               <a:rPr lang="en-US" sz="1300" dirty="0">
                 <a:solidFill>
-                  <a:srgbClr val="5A6672"/>
+                  <a:srgbClr val="5E5E5E"/>
                 </a:solidFill>
                 <a:latin typeface="Arial" pitchFamily="34" charset="0"/>
                 <a:ea typeface="Arial" pitchFamily="34" charset="-122"/>
@@ -5546,7 +5539,7 @@
                 <a:ea typeface="Arial" pitchFamily="34" charset="-122"/>
                 <a:cs typeface="Arial" pitchFamily="34" charset="-120"/>
               </a:rPr>
-              <a:t>$3,532</a:t>
+              <a:t>$8,300</a:t>
             </a:r>
             <a:endParaRPr lang="en-US" sz="3200" dirty="0"/>
           </a:p>
@@ -5579,7 +5572,7 @@
             <a:r>
               <a:rPr lang="en-US" sz="1100" dirty="0">
                 <a:solidFill>
-                  <a:srgbClr val="5A6672"/>
+                  <a:srgbClr val="5E5E5E"/>
                 </a:solidFill>
                 <a:latin typeface="Arial" pitchFamily="34" charset="0"/>
                 <a:ea typeface="Arial" pitchFamily="34" charset="-122"/>
@@ -5657,7 +5650,7 @@
             <a:r>
               <a:rPr lang="en-US" sz="800" dirty="0">
                 <a:solidFill>
-                  <a:srgbClr val="5A6672"/>
+                  <a:srgbClr val="5E5E5E"/>
                 </a:solidFill>
                 <a:latin typeface="Arial" pitchFamily="34" charset="0"/>
                 <a:ea typeface="Arial" pitchFamily="34" charset="-122"/>
@@ -5696,7 +5689,7 @@
             <a:r>
               <a:rPr lang="en-US" sz="800" dirty="0">
                 <a:solidFill>
-                  <a:srgbClr val="5A6672"/>
+                  <a:srgbClr val="5E5E5E"/>
                 </a:solidFill>
                 <a:latin typeface="Arial" pitchFamily="34" charset="0"/>
                 <a:ea typeface="Arial" pitchFamily="34" charset="-122"/>
@@ -5806,7 +5799,7 @@
             <a:r>
               <a:rPr lang="en-US" sz="1300" dirty="0">
                 <a:solidFill>
-                  <a:srgbClr val="5A6672"/>
+                  <a:srgbClr val="5E5E5E"/>
                 </a:solidFill>
                 <a:latin typeface="Arial" pitchFamily="34" charset="0"/>
                 <a:ea typeface="Arial" pitchFamily="34" charset="-122"/>
@@ -5950,7 +5943,7 @@
             <a:r>
               <a:rPr lang="en-US" sz="1100" dirty="0">
                 <a:solidFill>
-                  <a:srgbClr val="5A6672"/>
+                  <a:srgbClr val="5E5E5E"/>
                 </a:solidFill>
                 <a:latin typeface="Arial" pitchFamily="34" charset="0"/>
                 <a:ea typeface="Arial" pitchFamily="34" charset="-122"/>
@@ -6094,7 +6087,7 @@
             <a:r>
               <a:rPr lang="en-US" sz="1100" dirty="0">
                 <a:solidFill>
-                  <a:srgbClr val="5A6672"/>
+                  <a:srgbClr val="5E5E5E"/>
                 </a:solidFill>
                 <a:latin typeface="Arial" pitchFamily="34" charset="0"/>
                 <a:ea typeface="Arial" pitchFamily="34" charset="-122"/>
@@ -6238,7 +6231,7 @@
             <a:r>
               <a:rPr lang="en-US" sz="1100" dirty="0">
                 <a:solidFill>
-                  <a:srgbClr val="5A6672"/>
+                  <a:srgbClr val="5E5E5E"/>
                 </a:solidFill>
                 <a:latin typeface="Arial" pitchFamily="34" charset="0"/>
                 <a:ea typeface="Arial" pitchFamily="34" charset="-122"/>
@@ -6365,7 +6358,7 @@
             <a:r>
               <a:rPr lang="en-US" sz="800" dirty="0">
                 <a:solidFill>
-                  <a:srgbClr val="5A6672"/>
+                  <a:srgbClr val="5E5E5E"/>
                 </a:solidFill>
                 <a:latin typeface="Arial" pitchFamily="34" charset="0"/>
                 <a:ea typeface="Arial" pitchFamily="34" charset="-122"/>
@@ -6404,7 +6397,7 @@
             <a:r>
               <a:rPr lang="en-US" sz="800" dirty="0">
                 <a:solidFill>
-                  <a:srgbClr val="5A6672"/>
+                  <a:srgbClr val="5E5E5E"/>
                 </a:solidFill>
                 <a:latin typeface="Arial" pitchFamily="34" charset="0"/>
                 <a:ea typeface="Arial" pitchFamily="34" charset="-122"/>
@@ -6514,7 +6507,7 @@
             <a:r>
               <a:rPr lang="en-US" sz="1300" dirty="0">
                 <a:solidFill>
-                  <a:srgbClr val="5A6672"/>
+                  <a:srgbClr val="5E5E5E"/>
                 </a:solidFill>
                 <a:latin typeface="Arial" pitchFamily="34" charset="0"/>
                 <a:ea typeface="Arial" pitchFamily="34" charset="-122"/>
@@ -6668,7 +6661,7 @@
             <a:r>
               <a:rPr lang="en-US" sz="1100" dirty="0">
                 <a:solidFill>
-                  <a:srgbClr val="5A6672"/>
+                  <a:srgbClr val="5E5E5E"/>
                 </a:solidFill>
                 <a:latin typeface="Arial" pitchFamily="34" charset="0"/>
                 <a:ea typeface="Arial" pitchFamily="34" charset="-122"/>
@@ -6822,7 +6815,7 @@
             <a:r>
               <a:rPr lang="en-US" sz="1100" dirty="0">
                 <a:solidFill>
-                  <a:srgbClr val="5A6672"/>
+                  <a:srgbClr val="5E5E5E"/>
                 </a:solidFill>
                 <a:latin typeface="Arial" pitchFamily="34" charset="0"/>
                 <a:ea typeface="Arial" pitchFamily="34" charset="-122"/>
@@ -6976,7 +6969,7 @@
             <a:r>
               <a:rPr lang="en-US" sz="1100" dirty="0">
                 <a:solidFill>
-                  <a:srgbClr val="5A6672"/>
+                  <a:srgbClr val="5E5E5E"/>
                 </a:solidFill>
                 <a:latin typeface="Arial" pitchFamily="34" charset="0"/>
                 <a:ea typeface="Arial" pitchFamily="34" charset="-122"/>
@@ -7097,7 +7090,7 @@
                 <a:ea typeface="Arial" pitchFamily="34" charset="-122"/>
                 <a:cs typeface="Arial" pitchFamily="34" charset="-120"/>
               </a:rPr>
-              <a:t>Easy Showings</a:t>
+              <a:t>Seller-Credit Budget</a:t>
             </a:r>
             <a:endParaRPr lang="en-US" sz="1300" dirty="0"/>
           </a:p>
@@ -7130,13 +7123,13 @@
             <a:r>
               <a:rPr lang="en-US" sz="1100" dirty="0">
                 <a:solidFill>
-                  <a:srgbClr val="5A6672"/>
-                </a:solidFill>
-                <a:latin typeface="Arial" pitchFamily="34" charset="0"/>
-                <a:ea typeface="Arial" pitchFamily="34" charset="-122"/>
-                <a:cs typeface="Arial" pitchFamily="34" charset="-120"/>
-              </a:rPr>
-              <a:t>Lockbox access with short notice</a:t>
+                  <a:srgbClr val="5E5E5E"/>
+                </a:solidFill>
+                <a:latin typeface="Arial" pitchFamily="34" charset="0"/>
+                <a:ea typeface="Arial" pitchFamily="34" charset="-122"/>
+                <a:cs typeface="Arial" pitchFamily="34" charset="-120"/>
+              </a:rPr>
+              <a:t>Decide it now, before offers arrive</a:t>
             </a:r>
             <a:endParaRPr lang="en-US" sz="1100" dirty="0"/>
           </a:p>
@@ -7251,7 +7244,7 @@
                 <a:ea typeface="Arial" pitchFamily="34" charset="-122"/>
                 <a:cs typeface="Arial" pitchFamily="34" charset="-120"/>
               </a:rPr>
-              <a:t>Seller-Credit Budget</a:t>
+              <a:t>3-Week Review</a:t>
             </a:r>
             <a:endParaRPr lang="en-US" sz="1300" dirty="0"/>
           </a:p>
@@ -7284,13 +7277,13 @@
             <a:r>
               <a:rPr lang="en-US" sz="1100" dirty="0">
                 <a:solidFill>
-                  <a:srgbClr val="5A6672"/>
-                </a:solidFill>
-                <a:latin typeface="Arial" pitchFamily="34" charset="0"/>
-                <a:ea typeface="Arial" pitchFamily="34" charset="-122"/>
-                <a:cs typeface="Arial" pitchFamily="34" charset="-120"/>
-              </a:rPr>
-              <a:t>Decide it now, before offers arrive</a:t>
+                  <a:srgbClr val="5E5E5E"/>
+                </a:solidFill>
+                <a:latin typeface="Arial" pitchFamily="34" charset="0"/>
+                <a:ea typeface="Arial" pitchFamily="34" charset="-122"/>
+                <a:cs typeface="Arial" pitchFamily="34" charset="-120"/>
+              </a:rPr>
+              <a:t>Steady showings but no offer? Revisit the price</a:t>
             </a:r>
             <a:endParaRPr lang="en-US" sz="1100" dirty="0"/>
           </a:p>
@@ -7298,161 +7291,7 @@
       </p:sp>
       <p:sp>
         <p:nvSpPr>
-          <p:cNvPr id="29" name="Shape 22"/>
-          <p:cNvSpPr/>
-          <p:nvPr/>
-        </p:nvSpPr>
-        <p:spPr>
-          <a:xfrm>
-            <a:off x="6126480" y="2834640"/>
-            <a:ext cx="2560320" cy="1280160"/>
-          </a:xfrm>
-          <a:prstGeom prst="roundRect">
-            <a:avLst>
-              <a:gd name="adj" fmla="val 5714"/>
-            </a:avLst>
-          </a:prstGeom>
-          <a:solidFill>
-            <a:srgbClr val="FBF2EE"/>
-          </a:solidFill>
-          <a:ln w="12700">
-            <a:solidFill>
-              <a:srgbClr val="FBF2EE"/>
-            </a:solidFill>
-            <a:prstDash val="solid"/>
-          </a:ln>
-        </p:spPr>
-      </p:sp>
-      <p:sp>
-        <p:nvSpPr>
-          <p:cNvPr id="30" name="Shape 23"/>
-          <p:cNvSpPr/>
-          <p:nvPr/>
-        </p:nvSpPr>
-        <p:spPr>
-          <a:xfrm>
-            <a:off x="6291072" y="3017520"/>
-            <a:ext cx="411480" cy="411480"/>
-          </a:xfrm>
-          <a:prstGeom prst="ellipse">
-            <a:avLst/>
-          </a:prstGeom>
-          <a:solidFill>
-            <a:srgbClr val="C2410C"/>
-          </a:solidFill>
-          <a:ln w="12700">
-            <a:solidFill>
-              <a:srgbClr val="C2410C"/>
-            </a:solidFill>
-            <a:prstDash val="solid"/>
-          </a:ln>
-        </p:spPr>
-      </p:sp>
-      <p:pic>
-        <p:nvPicPr>
-          <p:cNvPr id="31" name="Image 5" descr="preencoded.png">    </p:cNvPr>
-          <p:cNvPicPr>
-            <a:picLocks noChangeAspect="1"/>
-          </p:cNvPicPr>
-          <p:nvPr/>
-        </p:nvPicPr>
-        <p:blipFill>
-          <a:blip r:embed="rId6"/>
-          <a:stretch>
-            <a:fillRect/>
-          </a:stretch>
-        </p:blipFill>
-        <p:spPr>
-          <a:xfrm>
-            <a:off x="6389827" y="3116275"/>
-            <a:ext cx="213970" cy="213970"/>
-          </a:xfrm>
-          <a:prstGeom prst="rect">
-            <a:avLst/>
-          </a:prstGeom>
-        </p:spPr>
-      </p:pic>
-      <p:sp>
-        <p:nvSpPr>
-          <p:cNvPr id="32" name="Text 24"/>
-          <p:cNvSpPr txBox="1"/>
-          <p:nvPr/>
-        </p:nvSpPr>
-        <p:spPr>
-          <a:xfrm>
-            <a:off x="6812280" y="2990088"/>
-            <a:ext cx="1737360" cy="457200"/>
-          </a:xfrm>
-          <a:prstGeom prst="rect">
-            <a:avLst/>
-          </a:prstGeom>
-          <a:noFill/>
-          <a:ln/>
-        </p:spPr>
-        <p:txBody>
-          <a:bodyPr wrap="square" lIns="0" tIns="0" rIns="0" bIns="0" rtlCol="0" anchor="ctr"/>
-          <a:lstStyle/>
-          <a:p>
-            <a:pPr indent="0" marL="0">
-              <a:buNone/>
-            </a:pPr>
-            <a:r>
-              <a:rPr lang="en-US" sz="1300" b="1" dirty="0">
-                <a:solidFill>
-                  <a:srgbClr val="1A1A1A"/>
-                </a:solidFill>
-                <a:latin typeface="Arial" pitchFamily="34" charset="0"/>
-                <a:ea typeface="Arial" pitchFamily="34" charset="-122"/>
-                <a:cs typeface="Arial" pitchFamily="34" charset="-120"/>
-              </a:rPr>
-              <a:t>3-Week Review</a:t>
-            </a:r>
-            <a:endParaRPr lang="en-US" sz="1300" dirty="0"/>
-          </a:p>
-        </p:txBody>
-      </p:sp>
-      <p:sp>
-        <p:nvSpPr>
-          <p:cNvPr id="33" name="Text 25"/>
-          <p:cNvSpPr txBox="1"/>
-          <p:nvPr/>
-        </p:nvSpPr>
-        <p:spPr>
-          <a:xfrm>
-            <a:off x="6309360" y="3566160"/>
-            <a:ext cx="2194560" cy="475488"/>
-          </a:xfrm>
-          <a:prstGeom prst="rect">
-            <a:avLst/>
-          </a:prstGeom>
-          <a:noFill/>
-          <a:ln/>
-        </p:spPr>
-        <p:txBody>
-          <a:bodyPr wrap="square" lIns="0" tIns="0" rIns="0" bIns="0" rtlCol="0" anchor="t"/>
-          <a:lstStyle/>
-          <a:p>
-            <a:pPr indent="0" marL="0">
-              <a:buNone/>
-            </a:pPr>
-            <a:r>
-              <a:rPr lang="en-US" sz="1100" dirty="0">
-                <a:solidFill>
-                  <a:srgbClr val="5A6672"/>
-                </a:solidFill>
-                <a:latin typeface="Arial" pitchFamily="34" charset="0"/>
-                <a:ea typeface="Arial" pitchFamily="34" charset="-122"/>
-                <a:cs typeface="Arial" pitchFamily="34" charset="-120"/>
-              </a:rPr>
-              <a:t>Steady showings but no offer? Revisit the price</a:t>
-            </a:r>
-            <a:endParaRPr lang="en-US" sz="1100" dirty="0"/>
-          </a:p>
-        </p:txBody>
-      </p:sp>
-      <p:sp>
-        <p:nvSpPr>
-          <p:cNvPr id="34" name="Text 26"/>
+          <p:cNvPr id="29" name="Text 22"/>
           <p:cNvSpPr txBox="1"/>
           <p:nvPr/>
         </p:nvSpPr>
@@ -7477,7 +7316,7 @@
             <a:r>
               <a:rPr lang="en-US" sz="800" dirty="0">
                 <a:solidFill>
-                  <a:srgbClr val="5A6672"/>
+                  <a:srgbClr val="5E5E5E"/>
                 </a:solidFill>
                 <a:latin typeface="Arial" pitchFamily="34" charset="0"/>
                 <a:ea typeface="Arial" pitchFamily="34" charset="-122"/>
@@ -7491,7 +7330,7 @@
       </p:sp>
       <p:sp>
         <p:nvSpPr>
-          <p:cNvPr id="35" name="Text 27"/>
+          <p:cNvPr id="30" name="Text 23"/>
           <p:cNvSpPr txBox="1"/>
           <p:nvPr/>
         </p:nvSpPr>
@@ -7516,7 +7355,7 @@
             <a:r>
               <a:rPr lang="en-US" sz="800" dirty="0">
                 <a:solidFill>
-                  <a:srgbClr val="5A6672"/>
+                  <a:srgbClr val="5E5E5E"/>
                 </a:solidFill>
                 <a:latin typeface="Arial" pitchFamily="34" charset="0"/>
                 <a:ea typeface="Arial" pitchFamily="34" charset="-122"/>
@@ -8522,7 +8361,7 @@
                       <a:r>
                         <a:rPr lang="en-US" sz="1100" b="1" dirty="0">
                           <a:solidFill>
-                            <a:srgbClr val="FFFFFF"/>
+                            <a:srgbClr val="A23200"/>
                           </a:solidFill>
                           <a:latin typeface="Arial" pitchFamily="34" charset="0"/>
                           <a:ea typeface="Arial" pitchFamily="34" charset="-122"/>
@@ -8538,36 +8377,18 @@
                     </a:p>
                   </a:txBody>
                   <a:tcPr marL="54864" marR="54864" marT="18288" marB="18288" anchor="ctr">
-                    <a:lnL w="6350" cap="flat" cmpd="sng" algn="ctr">
+                    <a:lnL w="0" cap="flat" cmpd="sng" algn="ctr">
+                      <a:noFill/>
+                    </a:lnL>
+                    <a:lnR w="0" cap="flat" cmpd="sng" algn="ctr">
+                      <a:noFill/>
+                    </a:lnR>
+                    <a:lnT w="0" cap="flat" cmpd="sng" algn="ctr">
+                      <a:noFill/>
+                    </a:lnT>
+                    <a:lnB w="19050" cap="flat" cmpd="sng" algn="ctr">
                       <a:solidFill>
-                        <a:srgbClr val="F8E8E2"/>
-                      </a:solidFill>
-                      <a:prstDash val="solid"/>
-                      <a:round/>
-                      <a:headEnd type="none" w="med" len="med"/>
-                      <a:tailEnd type="none" w="med" len="med"/>
-                    </a:lnL>
-                    <a:lnR w="6350" cap="flat" cmpd="sng" algn="ctr">
-                      <a:solidFill>
-                        <a:srgbClr val="F8E8E2"/>
-                      </a:solidFill>
-                      <a:prstDash val="solid"/>
-                      <a:round/>
-                      <a:headEnd type="none" w="med" len="med"/>
-                      <a:tailEnd type="none" w="med" len="med"/>
-                    </a:lnR>
-                    <a:lnT w="6350" cap="flat" cmpd="sng" algn="ctr">
-                      <a:solidFill>
-                        <a:srgbClr val="F8E8E2"/>
-                      </a:solidFill>
-                      <a:prstDash val="solid"/>
-                      <a:round/>
-                      <a:headEnd type="none" w="med" len="med"/>
-                      <a:tailEnd type="none" w="med" len="med"/>
-                    </a:lnT>
-                    <a:lnB w="6350" cap="flat" cmpd="sng" algn="ctr">
-                      <a:solidFill>
-                        <a:srgbClr val="F8E8E2"/>
+                        <a:srgbClr val="C2410C"/>
                       </a:solidFill>
                       <a:prstDash val="solid"/>
                       <a:round/>
@@ -8575,7 +8396,7 @@
                       <a:tailEnd type="none" w="med" len="med"/>
                     </a:lnB>
                     <a:solidFill>
-                      <a:srgbClr val="C2410C"/>
+                      <a:srgbClr val="FFFFFF"/>
                     </a:solidFill>
                   </a:tcPr>
                 </a:tc>
@@ -8590,7 +8411,7 @@
                       <a:r>
                         <a:rPr lang="en-US" sz="1100" b="1" dirty="0">
                           <a:solidFill>
-                            <a:srgbClr val="FFFFFF"/>
+                            <a:srgbClr val="A23200"/>
                           </a:solidFill>
                           <a:latin typeface="Arial" pitchFamily="34" charset="0"/>
                           <a:ea typeface="Arial" pitchFamily="34" charset="-122"/>
@@ -8606,36 +8427,18 @@
                     </a:p>
                   </a:txBody>
                   <a:tcPr marL="54864" marR="54864" marT="18288" marB="18288" anchor="ctr">
-                    <a:lnL w="6350" cap="flat" cmpd="sng" algn="ctr">
+                    <a:lnL w="0" cap="flat" cmpd="sng" algn="ctr">
+                      <a:noFill/>
+                    </a:lnL>
+                    <a:lnR w="0" cap="flat" cmpd="sng" algn="ctr">
+                      <a:noFill/>
+                    </a:lnR>
+                    <a:lnT w="0" cap="flat" cmpd="sng" algn="ctr">
+                      <a:noFill/>
+                    </a:lnT>
+                    <a:lnB w="19050" cap="flat" cmpd="sng" algn="ctr">
                       <a:solidFill>
-                        <a:srgbClr val="F8E8E2"/>
-                      </a:solidFill>
-                      <a:prstDash val="solid"/>
-                      <a:round/>
-                      <a:headEnd type="none" w="med" len="med"/>
-                      <a:tailEnd type="none" w="med" len="med"/>
-                    </a:lnL>
-                    <a:lnR w="6350" cap="flat" cmpd="sng" algn="ctr">
-                      <a:solidFill>
-                        <a:srgbClr val="F8E8E2"/>
-                      </a:solidFill>
-                      <a:prstDash val="solid"/>
-                      <a:round/>
-                      <a:headEnd type="none" w="med" len="med"/>
-                      <a:tailEnd type="none" w="med" len="med"/>
-                    </a:lnR>
-                    <a:lnT w="6350" cap="flat" cmpd="sng" algn="ctr">
-                      <a:solidFill>
-                        <a:srgbClr val="F8E8E2"/>
-                      </a:solidFill>
-                      <a:prstDash val="solid"/>
-                      <a:round/>
-                      <a:headEnd type="none" w="med" len="med"/>
-                      <a:tailEnd type="none" w="med" len="med"/>
-                    </a:lnT>
-                    <a:lnB w="6350" cap="flat" cmpd="sng" algn="ctr">
-                      <a:solidFill>
-                        <a:srgbClr val="F8E8E2"/>
+                        <a:srgbClr val="C2410C"/>
                       </a:solidFill>
                       <a:prstDash val="solid"/>
                       <a:round/>
@@ -8643,7 +8446,7 @@
                       <a:tailEnd type="none" w="med" len="med"/>
                     </a:lnB>
                     <a:solidFill>
-                      <a:srgbClr val="C2410C"/>
+                      <a:srgbClr val="FFFFFF"/>
                     </a:solidFill>
                   </a:tcPr>
                 </a:tc>
@@ -8658,7 +8461,7 @@
                       <a:r>
                         <a:rPr lang="en-US" sz="1100" b="1" dirty="0">
                           <a:solidFill>
-                            <a:srgbClr val="FFFFFF"/>
+                            <a:srgbClr val="A23200"/>
                           </a:solidFill>
                           <a:latin typeface="Arial" pitchFamily="34" charset="0"/>
                           <a:ea typeface="Arial" pitchFamily="34" charset="-122"/>
@@ -8674,36 +8477,18 @@
                     </a:p>
                   </a:txBody>
                   <a:tcPr marL="54864" marR="54864" marT="18288" marB="18288" anchor="ctr">
-                    <a:lnL w="6350" cap="flat" cmpd="sng" algn="ctr">
+                    <a:lnL w="0" cap="flat" cmpd="sng" algn="ctr">
+                      <a:noFill/>
+                    </a:lnL>
+                    <a:lnR w="0" cap="flat" cmpd="sng" algn="ctr">
+                      <a:noFill/>
+                    </a:lnR>
+                    <a:lnT w="0" cap="flat" cmpd="sng" algn="ctr">
+                      <a:noFill/>
+                    </a:lnT>
+                    <a:lnB w="19050" cap="flat" cmpd="sng" algn="ctr">
                       <a:solidFill>
-                        <a:srgbClr val="F8E8E2"/>
-                      </a:solidFill>
-                      <a:prstDash val="solid"/>
-                      <a:round/>
-                      <a:headEnd type="none" w="med" len="med"/>
-                      <a:tailEnd type="none" w="med" len="med"/>
-                    </a:lnL>
-                    <a:lnR w="6350" cap="flat" cmpd="sng" algn="ctr">
-                      <a:solidFill>
-                        <a:srgbClr val="F8E8E2"/>
-                      </a:solidFill>
-                      <a:prstDash val="solid"/>
-                      <a:round/>
-                      <a:headEnd type="none" w="med" len="med"/>
-                      <a:tailEnd type="none" w="med" len="med"/>
-                    </a:lnR>
-                    <a:lnT w="6350" cap="flat" cmpd="sng" algn="ctr">
-                      <a:solidFill>
-                        <a:srgbClr val="F8E8E2"/>
-                      </a:solidFill>
-                      <a:prstDash val="solid"/>
-                      <a:round/>
-                      <a:headEnd type="none" w="med" len="med"/>
-                      <a:tailEnd type="none" w="med" len="med"/>
-                    </a:lnT>
-                    <a:lnB w="6350" cap="flat" cmpd="sng" algn="ctr">
-                      <a:solidFill>
-                        <a:srgbClr val="F8E8E2"/>
+                        <a:srgbClr val="C2410C"/>
                       </a:solidFill>
                       <a:prstDash val="solid"/>
                       <a:round/>
@@ -8711,7 +8496,7 @@
                       <a:tailEnd type="none" w="med" len="med"/>
                     </a:lnB>
                     <a:solidFill>
-                      <a:srgbClr val="C2410C"/>
+                      <a:srgbClr val="FFFFFF"/>
                     </a:solidFill>
                   </a:tcPr>
                 </a:tc>
@@ -8726,7 +8511,7 @@
                       <a:r>
                         <a:rPr lang="en-US" sz="1100" b="1" dirty="0">
                           <a:solidFill>
-                            <a:srgbClr val="FFFFFF"/>
+                            <a:srgbClr val="A23200"/>
                           </a:solidFill>
                           <a:latin typeface="Arial" pitchFamily="34" charset="0"/>
                           <a:ea typeface="Arial" pitchFamily="34" charset="-122"/>
@@ -8742,36 +8527,18 @@
                     </a:p>
                   </a:txBody>
                   <a:tcPr marL="54864" marR="54864" marT="18288" marB="18288" anchor="ctr">
-                    <a:lnL w="6350" cap="flat" cmpd="sng" algn="ctr">
+                    <a:lnL w="0" cap="flat" cmpd="sng" algn="ctr">
+                      <a:noFill/>
+                    </a:lnL>
+                    <a:lnR w="0" cap="flat" cmpd="sng" algn="ctr">
+                      <a:noFill/>
+                    </a:lnR>
+                    <a:lnT w="0" cap="flat" cmpd="sng" algn="ctr">
+                      <a:noFill/>
+                    </a:lnT>
+                    <a:lnB w="19050" cap="flat" cmpd="sng" algn="ctr">
                       <a:solidFill>
-                        <a:srgbClr val="F8E8E2"/>
-                      </a:solidFill>
-                      <a:prstDash val="solid"/>
-                      <a:round/>
-                      <a:headEnd type="none" w="med" len="med"/>
-                      <a:tailEnd type="none" w="med" len="med"/>
-                    </a:lnL>
-                    <a:lnR w="6350" cap="flat" cmpd="sng" algn="ctr">
-                      <a:solidFill>
-                        <a:srgbClr val="F8E8E2"/>
-                      </a:solidFill>
-                      <a:prstDash val="solid"/>
-                      <a:round/>
-                      <a:headEnd type="none" w="med" len="med"/>
-                      <a:tailEnd type="none" w="med" len="med"/>
-                    </a:lnR>
-                    <a:lnT w="6350" cap="flat" cmpd="sng" algn="ctr">
-                      <a:solidFill>
-                        <a:srgbClr val="F8E8E2"/>
-                      </a:solidFill>
-                      <a:prstDash val="solid"/>
-                      <a:round/>
-                      <a:headEnd type="none" w="med" len="med"/>
-                      <a:tailEnd type="none" w="med" len="med"/>
-                    </a:lnT>
-                    <a:lnB w="6350" cap="flat" cmpd="sng" algn="ctr">
-                      <a:solidFill>
-                        <a:srgbClr val="F8E8E2"/>
+                        <a:srgbClr val="C2410C"/>
                       </a:solidFill>
                       <a:prstDash val="solid"/>
                       <a:round/>
@@ -8779,7 +8546,7 @@
                       <a:tailEnd type="none" w="med" len="med"/>
                     </a:lnB>
                     <a:solidFill>
-                      <a:srgbClr val="C2410C"/>
+                      <a:srgbClr val="FFFFFF"/>
                     </a:solidFill>
                   </a:tcPr>
                 </a:tc>
@@ -8812,32 +8579,14 @@
                     </a:p>
                   </a:txBody>
                   <a:tcPr marL="54864" marR="54864" marT="18288" marB="18288" anchor="ctr">
-                    <a:lnL w="6350" cap="flat" cmpd="sng" algn="ctr">
-                      <a:solidFill>
-                        <a:srgbClr val="F8E8E2"/>
-                      </a:solidFill>
-                      <a:prstDash val="solid"/>
-                      <a:round/>
-                      <a:headEnd type="none" w="med" len="med"/>
-                      <a:tailEnd type="none" w="med" len="med"/>
+                    <a:lnL w="0" cap="flat" cmpd="sng" algn="ctr">
+                      <a:noFill/>
                     </a:lnL>
-                    <a:lnR w="6350" cap="flat" cmpd="sng" algn="ctr">
-                      <a:solidFill>
-                        <a:srgbClr val="F8E8E2"/>
-                      </a:solidFill>
-                      <a:prstDash val="solid"/>
-                      <a:round/>
-                      <a:headEnd type="none" w="med" len="med"/>
-                      <a:tailEnd type="none" w="med" len="med"/>
+                    <a:lnR w="0" cap="flat" cmpd="sng" algn="ctr">
+                      <a:noFill/>
                     </a:lnR>
-                    <a:lnT w="6350" cap="flat" cmpd="sng" algn="ctr">
-                      <a:solidFill>
-                        <a:srgbClr val="F8E8E2"/>
-                      </a:solidFill>
-                      <a:prstDash val="solid"/>
-                      <a:round/>
-                      <a:headEnd type="none" w="med" len="med"/>
-                      <a:tailEnd type="none" w="med" len="med"/>
+                    <a:lnT w="0" cap="flat" cmpd="sng" algn="ctr">
+                      <a:noFill/>
                     </a:lnT>
                     <a:lnB w="6350" cap="flat" cmpd="sng" algn="ctr">
                       <a:solidFill>
@@ -8870,7 +8619,7 @@
                           <a:ea typeface="Arial" pitchFamily="34" charset="-122"/>
                           <a:cs typeface="Arial" pitchFamily="34" charset="-120"/>
                         </a:rPr>
-                        <a:t>$463,000</a:t>
+                        <a:t>$451,000</a:t>
                       </a:r>
                       <a:endParaRPr lang="en-US" sz="1100" dirty="0">
                         <a:latin typeface="Arial" charset="0"/>
@@ -8880,32 +8629,14 @@
                     </a:p>
                   </a:txBody>
                   <a:tcPr marL="54864" marR="54864" marT="18288" marB="18288" anchor="ctr">
-                    <a:lnL w="6350" cap="flat" cmpd="sng" algn="ctr">
-                      <a:solidFill>
-                        <a:srgbClr val="F8E8E2"/>
-                      </a:solidFill>
-                      <a:prstDash val="solid"/>
-                      <a:round/>
-                      <a:headEnd type="none" w="med" len="med"/>
-                      <a:tailEnd type="none" w="med" len="med"/>
+                    <a:lnL w="0" cap="flat" cmpd="sng" algn="ctr">
+                      <a:noFill/>
                     </a:lnL>
-                    <a:lnR w="6350" cap="flat" cmpd="sng" algn="ctr">
-                      <a:solidFill>
-                        <a:srgbClr val="F8E8E2"/>
-                      </a:solidFill>
-                      <a:prstDash val="solid"/>
-                      <a:round/>
-                      <a:headEnd type="none" w="med" len="med"/>
-                      <a:tailEnd type="none" w="med" len="med"/>
+                    <a:lnR w="0" cap="flat" cmpd="sng" algn="ctr">
+                      <a:noFill/>
                     </a:lnR>
-                    <a:lnT w="6350" cap="flat" cmpd="sng" algn="ctr">
-                      <a:solidFill>
-                        <a:srgbClr val="F8E8E2"/>
-                      </a:solidFill>
-                      <a:prstDash val="solid"/>
-                      <a:round/>
-                      <a:headEnd type="none" w="med" len="med"/>
-                      <a:tailEnd type="none" w="med" len="med"/>
+                    <a:lnT w="0" cap="flat" cmpd="sng" algn="ctr">
+                      <a:noFill/>
                     </a:lnT>
                     <a:lnB w="6350" cap="flat" cmpd="sng" algn="ctr">
                       <a:solidFill>
@@ -8938,7 +8669,7 @@
                           <a:ea typeface="Arial" pitchFamily="34" charset="-122"/>
                           <a:cs typeface="Arial" pitchFamily="34" charset="-120"/>
                         </a:rPr>
-                        <a:t>$462,000</a:t>
+                        <a:t>$451,000</a:t>
                       </a:r>
                       <a:endParaRPr lang="en-US" sz="1100" dirty="0">
                         <a:latin typeface="Arial" charset="0"/>
@@ -8948,32 +8679,14 @@
                     </a:p>
                   </a:txBody>
                   <a:tcPr marL="54864" marR="54864" marT="18288" marB="18288" anchor="ctr">
-                    <a:lnL w="6350" cap="flat" cmpd="sng" algn="ctr">
-                      <a:solidFill>
-                        <a:srgbClr val="F8E8E2"/>
-                      </a:solidFill>
-                      <a:prstDash val="solid"/>
-                      <a:round/>
-                      <a:headEnd type="none" w="med" len="med"/>
-                      <a:tailEnd type="none" w="med" len="med"/>
+                    <a:lnL w="0" cap="flat" cmpd="sng" algn="ctr">
+                      <a:noFill/>
                     </a:lnL>
-                    <a:lnR w="6350" cap="flat" cmpd="sng" algn="ctr">
-                      <a:solidFill>
-                        <a:srgbClr val="F8E8E2"/>
-                      </a:solidFill>
-                      <a:prstDash val="solid"/>
-                      <a:round/>
-                      <a:headEnd type="none" w="med" len="med"/>
-                      <a:tailEnd type="none" w="med" len="med"/>
+                    <a:lnR w="0" cap="flat" cmpd="sng" algn="ctr">
+                      <a:noFill/>
                     </a:lnR>
-                    <a:lnT w="6350" cap="flat" cmpd="sng" algn="ctr">
-                      <a:solidFill>
-                        <a:srgbClr val="F8E8E2"/>
-                      </a:solidFill>
-                      <a:prstDash val="solid"/>
-                      <a:round/>
-                      <a:headEnd type="none" w="med" len="med"/>
-                      <a:tailEnd type="none" w="med" len="med"/>
+                    <a:lnT w="0" cap="flat" cmpd="sng" algn="ctr">
+                      <a:noFill/>
                     </a:lnT>
                     <a:lnB w="6350" cap="flat" cmpd="sng" algn="ctr">
                       <a:solidFill>
@@ -9006,7 +8719,7 @@
                           <a:ea typeface="Arial" pitchFamily="34" charset="-122"/>
                           <a:cs typeface="Arial" pitchFamily="34" charset="-120"/>
                         </a:rPr>
-                        <a:t>$460,000</a:t>
+                        <a:t>$436,500</a:t>
                       </a:r>
                       <a:endParaRPr lang="en-US" sz="1100" dirty="0">
                         <a:latin typeface="Arial" charset="0"/>
@@ -9016,32 +8729,14 @@
                     </a:p>
                   </a:txBody>
                   <a:tcPr marL="54864" marR="54864" marT="18288" marB="18288" anchor="ctr">
-                    <a:lnL w="6350" cap="flat" cmpd="sng" algn="ctr">
-                      <a:solidFill>
-                        <a:srgbClr val="F8E8E2"/>
-                      </a:solidFill>
-                      <a:prstDash val="solid"/>
-                      <a:round/>
-                      <a:headEnd type="none" w="med" len="med"/>
-                      <a:tailEnd type="none" w="med" len="med"/>
+                    <a:lnL w="0" cap="flat" cmpd="sng" algn="ctr">
+                      <a:noFill/>
                     </a:lnL>
-                    <a:lnR w="6350" cap="flat" cmpd="sng" algn="ctr">
-                      <a:solidFill>
-                        <a:srgbClr val="F8E8E2"/>
-                      </a:solidFill>
-                      <a:prstDash val="solid"/>
-                      <a:round/>
-                      <a:headEnd type="none" w="med" len="med"/>
-                      <a:tailEnd type="none" w="med" len="med"/>
+                    <a:lnR w="0" cap="flat" cmpd="sng" algn="ctr">
+                      <a:noFill/>
                     </a:lnR>
-                    <a:lnT w="6350" cap="flat" cmpd="sng" algn="ctr">
-                      <a:solidFill>
-                        <a:srgbClr val="F8E8E2"/>
-                      </a:solidFill>
-                      <a:prstDash val="solid"/>
-                      <a:round/>
-                      <a:headEnd type="none" w="med" len="med"/>
-                      <a:tailEnd type="none" w="med" len="med"/>
+                    <a:lnT w="0" cap="flat" cmpd="sng" algn="ctr">
+                      <a:noFill/>
                     </a:lnT>
                     <a:lnB w="6350" cap="flat" cmpd="sng" algn="ctr">
                       <a:solidFill>
@@ -9086,32 +8781,14 @@
                     </a:p>
                   </a:txBody>
                   <a:tcPr marL="54864" marR="54864" marT="18288" marB="18288" anchor="ctr">
-                    <a:lnL w="6350" cap="flat" cmpd="sng" algn="ctr">
-                      <a:solidFill>
-                        <a:srgbClr val="F8E8E2"/>
-                      </a:solidFill>
-                      <a:prstDash val="solid"/>
-                      <a:round/>
-                      <a:headEnd type="none" w="med" len="med"/>
-                      <a:tailEnd type="none" w="med" len="med"/>
+                    <a:lnL w="0" cap="flat" cmpd="sng" algn="ctr">
+                      <a:noFill/>
                     </a:lnL>
-                    <a:lnR w="6350" cap="flat" cmpd="sng" algn="ctr">
-                      <a:solidFill>
-                        <a:srgbClr val="F8E8E2"/>
-                      </a:solidFill>
-                      <a:prstDash val="solid"/>
-                      <a:round/>
-                      <a:headEnd type="none" w="med" len="med"/>
-                      <a:tailEnd type="none" w="med" len="med"/>
+                    <a:lnR w="0" cap="flat" cmpd="sng" algn="ctr">
+                      <a:noFill/>
                     </a:lnR>
-                    <a:lnT w="6350" cap="flat" cmpd="sng" algn="ctr">
-                      <a:solidFill>
-                        <a:srgbClr val="F8E8E2"/>
-                      </a:solidFill>
-                      <a:prstDash val="solid"/>
-                      <a:round/>
-                      <a:headEnd type="none" w="med" len="med"/>
-                      <a:tailEnd type="none" w="med" len="med"/>
+                    <a:lnT w="0" cap="flat" cmpd="sng" algn="ctr">
+                      <a:noFill/>
                     </a:lnT>
                     <a:lnB w="6350" cap="flat" cmpd="sng" algn="ctr">
                       <a:solidFill>
@@ -9123,7 +8800,7 @@
                       <a:tailEnd type="none" w="med" len="med"/>
                     </a:lnB>
                     <a:solidFill>
-                      <a:srgbClr val="FDF7F5"/>
+                      <a:srgbClr val="FFFFFF"/>
                     </a:solidFill>
                   </a:tcPr>
                 </a:tc>
@@ -9144,7 +8821,7 @@
                           <a:ea typeface="Arial" pitchFamily="34" charset="-122"/>
                           <a:cs typeface="Arial" pitchFamily="34" charset="-120"/>
                         </a:rPr>
-                        <a:t>−$11,575</a:t>
+                        <a:t>−$11,275</a:t>
                       </a:r>
                       <a:endParaRPr lang="en-US" sz="1100" dirty="0">
                         <a:latin typeface="Arial" charset="0"/>
@@ -9154,32 +8831,14 @@
                     </a:p>
                   </a:txBody>
                   <a:tcPr marL="54864" marR="54864" marT="18288" marB="18288" anchor="ctr">
-                    <a:lnL w="6350" cap="flat" cmpd="sng" algn="ctr">
-                      <a:solidFill>
-                        <a:srgbClr val="F8E8E2"/>
-                      </a:solidFill>
-                      <a:prstDash val="solid"/>
-                      <a:round/>
-                      <a:headEnd type="none" w="med" len="med"/>
-                      <a:tailEnd type="none" w="med" len="med"/>
+                    <a:lnL w="0" cap="flat" cmpd="sng" algn="ctr">
+                      <a:noFill/>
                     </a:lnL>
-                    <a:lnR w="6350" cap="flat" cmpd="sng" algn="ctr">
-                      <a:solidFill>
-                        <a:srgbClr val="F8E8E2"/>
-                      </a:solidFill>
-                      <a:prstDash val="solid"/>
-                      <a:round/>
-                      <a:headEnd type="none" w="med" len="med"/>
-                      <a:tailEnd type="none" w="med" len="med"/>
+                    <a:lnR w="0" cap="flat" cmpd="sng" algn="ctr">
+                      <a:noFill/>
                     </a:lnR>
-                    <a:lnT w="6350" cap="flat" cmpd="sng" algn="ctr">
-                      <a:solidFill>
-                        <a:srgbClr val="F8E8E2"/>
-                      </a:solidFill>
-                      <a:prstDash val="solid"/>
-                      <a:round/>
-                      <a:headEnd type="none" w="med" len="med"/>
-                      <a:tailEnd type="none" w="med" len="med"/>
+                    <a:lnT w="0" cap="flat" cmpd="sng" algn="ctr">
+                      <a:noFill/>
                     </a:lnT>
                     <a:lnB w="6350" cap="flat" cmpd="sng" algn="ctr">
                       <a:solidFill>
@@ -9191,7 +8850,7 @@
                       <a:tailEnd type="none" w="med" len="med"/>
                     </a:lnB>
                     <a:solidFill>
-                      <a:srgbClr val="FDF7F5"/>
+                      <a:srgbClr val="FFFFFF"/>
                     </a:solidFill>
                   </a:tcPr>
                 </a:tc>
@@ -9212,7 +8871,7 @@
                           <a:ea typeface="Arial" pitchFamily="34" charset="-122"/>
                           <a:cs typeface="Arial" pitchFamily="34" charset="-120"/>
                         </a:rPr>
-                        <a:t>−$11,550</a:t>
+                        <a:t>−$11,275</a:t>
                       </a:r>
                       <a:endParaRPr lang="en-US" sz="1100" dirty="0">
                         <a:latin typeface="Arial" charset="0"/>
@@ -9222,32 +8881,14 @@
                     </a:p>
                   </a:txBody>
                   <a:tcPr marL="54864" marR="54864" marT="18288" marB="18288" anchor="ctr">
-                    <a:lnL w="6350" cap="flat" cmpd="sng" algn="ctr">
-                      <a:solidFill>
-                        <a:srgbClr val="F8E8E2"/>
-                      </a:solidFill>
-                      <a:prstDash val="solid"/>
-                      <a:round/>
-                      <a:headEnd type="none" w="med" len="med"/>
-                      <a:tailEnd type="none" w="med" len="med"/>
+                    <a:lnL w="0" cap="flat" cmpd="sng" algn="ctr">
+                      <a:noFill/>
                     </a:lnL>
-                    <a:lnR w="6350" cap="flat" cmpd="sng" algn="ctr">
-                      <a:solidFill>
-                        <a:srgbClr val="F8E8E2"/>
-                      </a:solidFill>
-                      <a:prstDash val="solid"/>
-                      <a:round/>
-                      <a:headEnd type="none" w="med" len="med"/>
-                      <a:tailEnd type="none" w="med" len="med"/>
+                    <a:lnR w="0" cap="flat" cmpd="sng" algn="ctr">
+                      <a:noFill/>
                     </a:lnR>
-                    <a:lnT w="6350" cap="flat" cmpd="sng" algn="ctr">
-                      <a:solidFill>
-                        <a:srgbClr val="F8E8E2"/>
-                      </a:solidFill>
-                      <a:prstDash val="solid"/>
-                      <a:round/>
-                      <a:headEnd type="none" w="med" len="med"/>
-                      <a:tailEnd type="none" w="med" len="med"/>
+                    <a:lnT w="0" cap="flat" cmpd="sng" algn="ctr">
+                      <a:noFill/>
                     </a:lnT>
                     <a:lnB w="6350" cap="flat" cmpd="sng" algn="ctr">
                       <a:solidFill>
@@ -9259,7 +8900,7 @@
                       <a:tailEnd type="none" w="med" len="med"/>
                     </a:lnB>
                     <a:solidFill>
-                      <a:srgbClr val="FDF7F5"/>
+                      <a:srgbClr val="FFFFFF"/>
                     </a:solidFill>
                   </a:tcPr>
                 </a:tc>
@@ -9280,7 +8921,7 @@
                           <a:ea typeface="Arial" pitchFamily="34" charset="-122"/>
                           <a:cs typeface="Arial" pitchFamily="34" charset="-120"/>
                         </a:rPr>
-                        <a:t>−$11,500</a:t>
+                        <a:t>−$10,912</a:t>
                       </a:r>
                       <a:endParaRPr lang="en-US" sz="1100" dirty="0">
                         <a:latin typeface="Arial" charset="0"/>
@@ -9290,32 +8931,14 @@
                     </a:p>
                   </a:txBody>
                   <a:tcPr marL="54864" marR="54864" marT="18288" marB="18288" anchor="ctr">
-                    <a:lnL w="6350" cap="flat" cmpd="sng" algn="ctr">
-                      <a:solidFill>
-                        <a:srgbClr val="F8E8E2"/>
-                      </a:solidFill>
-                      <a:prstDash val="solid"/>
-                      <a:round/>
-                      <a:headEnd type="none" w="med" len="med"/>
-                      <a:tailEnd type="none" w="med" len="med"/>
+                    <a:lnL w="0" cap="flat" cmpd="sng" algn="ctr">
+                      <a:noFill/>
                     </a:lnL>
-                    <a:lnR w="6350" cap="flat" cmpd="sng" algn="ctr">
-                      <a:solidFill>
-                        <a:srgbClr val="F8E8E2"/>
-                      </a:solidFill>
-                      <a:prstDash val="solid"/>
-                      <a:round/>
-                      <a:headEnd type="none" w="med" len="med"/>
-                      <a:tailEnd type="none" w="med" len="med"/>
+                    <a:lnR w="0" cap="flat" cmpd="sng" algn="ctr">
+                      <a:noFill/>
                     </a:lnR>
-                    <a:lnT w="6350" cap="flat" cmpd="sng" algn="ctr">
-                      <a:solidFill>
-                        <a:srgbClr val="F8E8E2"/>
-                      </a:solidFill>
-                      <a:prstDash val="solid"/>
-                      <a:round/>
-                      <a:headEnd type="none" w="med" len="med"/>
-                      <a:tailEnd type="none" w="med" len="med"/>
+                    <a:lnT w="0" cap="flat" cmpd="sng" algn="ctr">
+                      <a:noFill/>
                     </a:lnT>
                     <a:lnB w="6350" cap="flat" cmpd="sng" algn="ctr">
                       <a:solidFill>
@@ -9327,7 +8950,7 @@
                       <a:tailEnd type="none" w="med" len="med"/>
                     </a:lnB>
                     <a:solidFill>
-                      <a:srgbClr val="FDF7F5"/>
+                      <a:srgbClr val="FFFFFF"/>
                     </a:solidFill>
                   </a:tcPr>
                 </a:tc>
@@ -9360,32 +8983,14 @@
                     </a:p>
                   </a:txBody>
                   <a:tcPr marL="54864" marR="54864" marT="18288" marB="18288" anchor="ctr">
-                    <a:lnL w="6350" cap="flat" cmpd="sng" algn="ctr">
-                      <a:solidFill>
-                        <a:srgbClr val="F8E8E2"/>
-                      </a:solidFill>
-                      <a:prstDash val="solid"/>
-                      <a:round/>
-                      <a:headEnd type="none" w="med" len="med"/>
-                      <a:tailEnd type="none" w="med" len="med"/>
+                    <a:lnL w="0" cap="flat" cmpd="sng" algn="ctr">
+                      <a:noFill/>
                     </a:lnL>
-                    <a:lnR w="6350" cap="flat" cmpd="sng" algn="ctr">
-                      <a:solidFill>
-                        <a:srgbClr val="F8E8E2"/>
-                      </a:solidFill>
-                      <a:prstDash val="solid"/>
-                      <a:round/>
-                      <a:headEnd type="none" w="med" len="med"/>
-                      <a:tailEnd type="none" w="med" len="med"/>
+                    <a:lnR w="0" cap="flat" cmpd="sng" algn="ctr">
+                      <a:noFill/>
                     </a:lnR>
-                    <a:lnT w="6350" cap="flat" cmpd="sng" algn="ctr">
-                      <a:solidFill>
-                        <a:srgbClr val="F8E8E2"/>
-                      </a:solidFill>
-                      <a:prstDash val="solid"/>
-                      <a:round/>
-                      <a:headEnd type="none" w="med" len="med"/>
-                      <a:tailEnd type="none" w="med" len="med"/>
+                    <a:lnT w="0" cap="flat" cmpd="sng" algn="ctr">
+                      <a:noFill/>
                     </a:lnT>
                     <a:lnB w="6350" cap="flat" cmpd="sng" algn="ctr">
                       <a:solidFill>
@@ -9418,7 +9023,7 @@
                           <a:ea typeface="Arial" pitchFamily="34" charset="-122"/>
                           <a:cs typeface="Arial" pitchFamily="34" charset="-120"/>
                         </a:rPr>
-                        <a:t>−$11,575</a:t>
+                        <a:t>−$11,275</a:t>
                       </a:r>
                       <a:endParaRPr lang="en-US" sz="1100" dirty="0">
                         <a:latin typeface="Arial" charset="0"/>
@@ -9428,32 +9033,14 @@
                     </a:p>
                   </a:txBody>
                   <a:tcPr marL="54864" marR="54864" marT="18288" marB="18288" anchor="ctr">
-                    <a:lnL w="6350" cap="flat" cmpd="sng" algn="ctr">
-                      <a:solidFill>
-                        <a:srgbClr val="F8E8E2"/>
-                      </a:solidFill>
-                      <a:prstDash val="solid"/>
-                      <a:round/>
-                      <a:headEnd type="none" w="med" len="med"/>
-                      <a:tailEnd type="none" w="med" len="med"/>
+                    <a:lnL w="0" cap="flat" cmpd="sng" algn="ctr">
+                      <a:noFill/>
                     </a:lnL>
-                    <a:lnR w="6350" cap="flat" cmpd="sng" algn="ctr">
-                      <a:solidFill>
-                        <a:srgbClr val="F8E8E2"/>
-                      </a:solidFill>
-                      <a:prstDash val="solid"/>
-                      <a:round/>
-                      <a:headEnd type="none" w="med" len="med"/>
-                      <a:tailEnd type="none" w="med" len="med"/>
+                    <a:lnR w="0" cap="flat" cmpd="sng" algn="ctr">
+                      <a:noFill/>
                     </a:lnR>
-                    <a:lnT w="6350" cap="flat" cmpd="sng" algn="ctr">
-                      <a:solidFill>
-                        <a:srgbClr val="F8E8E2"/>
-                      </a:solidFill>
-                      <a:prstDash val="solid"/>
-                      <a:round/>
-                      <a:headEnd type="none" w="med" len="med"/>
-                      <a:tailEnd type="none" w="med" len="med"/>
+                    <a:lnT w="0" cap="flat" cmpd="sng" algn="ctr">
+                      <a:noFill/>
                     </a:lnT>
                     <a:lnB w="6350" cap="flat" cmpd="sng" algn="ctr">
                       <a:solidFill>
@@ -9486,7 +9073,7 @@
                           <a:ea typeface="Arial" pitchFamily="34" charset="-122"/>
                           <a:cs typeface="Arial" pitchFamily="34" charset="-120"/>
                         </a:rPr>
-                        <a:t>−$11,550</a:t>
+                        <a:t>−$11,275</a:t>
                       </a:r>
                       <a:endParaRPr lang="en-US" sz="1100" dirty="0">
                         <a:latin typeface="Arial" charset="0"/>
@@ -9496,32 +9083,14 @@
                     </a:p>
                   </a:txBody>
                   <a:tcPr marL="54864" marR="54864" marT="18288" marB="18288" anchor="ctr">
-                    <a:lnL w="6350" cap="flat" cmpd="sng" algn="ctr">
-                      <a:solidFill>
-                        <a:srgbClr val="F8E8E2"/>
-                      </a:solidFill>
-                      <a:prstDash val="solid"/>
-                      <a:round/>
-                      <a:headEnd type="none" w="med" len="med"/>
-                      <a:tailEnd type="none" w="med" len="med"/>
+                    <a:lnL w="0" cap="flat" cmpd="sng" algn="ctr">
+                      <a:noFill/>
                     </a:lnL>
-                    <a:lnR w="6350" cap="flat" cmpd="sng" algn="ctr">
-                      <a:solidFill>
-                        <a:srgbClr val="F8E8E2"/>
-                      </a:solidFill>
-                      <a:prstDash val="solid"/>
-                      <a:round/>
-                      <a:headEnd type="none" w="med" len="med"/>
-                      <a:tailEnd type="none" w="med" len="med"/>
+                    <a:lnR w="0" cap="flat" cmpd="sng" algn="ctr">
+                      <a:noFill/>
                     </a:lnR>
-                    <a:lnT w="6350" cap="flat" cmpd="sng" algn="ctr">
-                      <a:solidFill>
-                        <a:srgbClr val="F8E8E2"/>
-                      </a:solidFill>
-                      <a:prstDash val="solid"/>
-                      <a:round/>
-                      <a:headEnd type="none" w="med" len="med"/>
-                      <a:tailEnd type="none" w="med" len="med"/>
+                    <a:lnT w="0" cap="flat" cmpd="sng" algn="ctr">
+                      <a:noFill/>
                     </a:lnT>
                     <a:lnB w="6350" cap="flat" cmpd="sng" algn="ctr">
                       <a:solidFill>
@@ -9554,7 +9123,7 @@
                           <a:ea typeface="Arial" pitchFamily="34" charset="-122"/>
                           <a:cs typeface="Arial" pitchFamily="34" charset="-120"/>
                         </a:rPr>
-                        <a:t>−$11,500</a:t>
+                        <a:t>−$10,912</a:t>
                       </a:r>
                       <a:endParaRPr lang="en-US" sz="1100" dirty="0">
                         <a:latin typeface="Arial" charset="0"/>
@@ -9564,32 +9133,14 @@
                     </a:p>
                   </a:txBody>
                   <a:tcPr marL="54864" marR="54864" marT="18288" marB="18288" anchor="ctr">
-                    <a:lnL w="6350" cap="flat" cmpd="sng" algn="ctr">
-                      <a:solidFill>
-                        <a:srgbClr val="F8E8E2"/>
-                      </a:solidFill>
-                      <a:prstDash val="solid"/>
-                      <a:round/>
-                      <a:headEnd type="none" w="med" len="med"/>
-                      <a:tailEnd type="none" w="med" len="med"/>
+                    <a:lnL w="0" cap="flat" cmpd="sng" algn="ctr">
+                      <a:noFill/>
                     </a:lnL>
-                    <a:lnR w="6350" cap="flat" cmpd="sng" algn="ctr">
-                      <a:solidFill>
-                        <a:srgbClr val="F8E8E2"/>
-                      </a:solidFill>
-                      <a:prstDash val="solid"/>
-                      <a:round/>
-                      <a:headEnd type="none" w="med" len="med"/>
-                      <a:tailEnd type="none" w="med" len="med"/>
+                    <a:lnR w="0" cap="flat" cmpd="sng" algn="ctr">
+                      <a:noFill/>
                     </a:lnR>
-                    <a:lnT w="6350" cap="flat" cmpd="sng" algn="ctr">
-                      <a:solidFill>
-                        <a:srgbClr val="F8E8E2"/>
-                      </a:solidFill>
-                      <a:prstDash val="solid"/>
-                      <a:round/>
-                      <a:headEnd type="none" w="med" len="med"/>
-                      <a:tailEnd type="none" w="med" len="med"/>
+                    <a:lnT w="0" cap="flat" cmpd="sng" algn="ctr">
+                      <a:noFill/>
                     </a:lnT>
                     <a:lnB w="6350" cap="flat" cmpd="sng" algn="ctr">
                       <a:solidFill>
@@ -9634,32 +9185,14 @@
                     </a:p>
                   </a:txBody>
                   <a:tcPr marL="54864" marR="54864" marT="18288" marB="18288" anchor="ctr">
-                    <a:lnL w="6350" cap="flat" cmpd="sng" algn="ctr">
-                      <a:solidFill>
-                        <a:srgbClr val="F8E8E2"/>
-                      </a:solidFill>
-                      <a:prstDash val="solid"/>
-                      <a:round/>
-                      <a:headEnd type="none" w="med" len="med"/>
-                      <a:tailEnd type="none" w="med" len="med"/>
+                    <a:lnL w="0" cap="flat" cmpd="sng" algn="ctr">
+                      <a:noFill/>
                     </a:lnL>
-                    <a:lnR w="6350" cap="flat" cmpd="sng" algn="ctr">
-                      <a:solidFill>
-                        <a:srgbClr val="F8E8E2"/>
-                      </a:solidFill>
-                      <a:prstDash val="solid"/>
-                      <a:round/>
-                      <a:headEnd type="none" w="med" len="med"/>
-                      <a:tailEnd type="none" w="med" len="med"/>
+                    <a:lnR w="0" cap="flat" cmpd="sng" algn="ctr">
+                      <a:noFill/>
                     </a:lnR>
-                    <a:lnT w="6350" cap="flat" cmpd="sng" algn="ctr">
-                      <a:solidFill>
-                        <a:srgbClr val="F8E8E2"/>
-                      </a:solidFill>
-                      <a:prstDash val="solid"/>
-                      <a:round/>
-                      <a:headEnd type="none" w="med" len="med"/>
-                      <a:tailEnd type="none" w="med" len="med"/>
+                    <a:lnT w="0" cap="flat" cmpd="sng" algn="ctr">
+                      <a:noFill/>
                     </a:lnT>
                     <a:lnB w="6350" cap="flat" cmpd="sng" algn="ctr">
                       <a:solidFill>
@@ -9671,7 +9204,7 @@
                       <a:tailEnd type="none" w="med" len="med"/>
                     </a:lnB>
                     <a:solidFill>
-                      <a:srgbClr val="FDF7F5"/>
+                      <a:srgbClr val="FFFFFF"/>
                     </a:solidFill>
                   </a:tcPr>
                 </a:tc>
@@ -9692,7 +9225,7 @@
                           <a:ea typeface="Arial" pitchFamily="34" charset="-122"/>
                           <a:cs typeface="Arial" pitchFamily="34" charset="-120"/>
                         </a:rPr>
-                        <a:t>−$3,241</a:t>
+                        <a:t>−$3,157</a:t>
                       </a:r>
                       <a:endParaRPr lang="en-US" sz="1100" dirty="0">
                         <a:latin typeface="Arial" charset="0"/>
@@ -9702,32 +9235,14 @@
                     </a:p>
                   </a:txBody>
                   <a:tcPr marL="54864" marR="54864" marT="18288" marB="18288" anchor="ctr">
-                    <a:lnL w="6350" cap="flat" cmpd="sng" algn="ctr">
-                      <a:solidFill>
-                        <a:srgbClr val="F8E8E2"/>
-                      </a:solidFill>
-                      <a:prstDash val="solid"/>
-                      <a:round/>
-                      <a:headEnd type="none" w="med" len="med"/>
-                      <a:tailEnd type="none" w="med" len="med"/>
+                    <a:lnL w="0" cap="flat" cmpd="sng" algn="ctr">
+                      <a:noFill/>
                     </a:lnL>
-                    <a:lnR w="6350" cap="flat" cmpd="sng" algn="ctr">
-                      <a:solidFill>
-                        <a:srgbClr val="F8E8E2"/>
-                      </a:solidFill>
-                      <a:prstDash val="solid"/>
-                      <a:round/>
-                      <a:headEnd type="none" w="med" len="med"/>
-                      <a:tailEnd type="none" w="med" len="med"/>
+                    <a:lnR w="0" cap="flat" cmpd="sng" algn="ctr">
+                      <a:noFill/>
                     </a:lnR>
-                    <a:lnT w="6350" cap="flat" cmpd="sng" algn="ctr">
-                      <a:solidFill>
-                        <a:srgbClr val="F8E8E2"/>
-                      </a:solidFill>
-                      <a:prstDash val="solid"/>
-                      <a:round/>
-                      <a:headEnd type="none" w="med" len="med"/>
-                      <a:tailEnd type="none" w="med" len="med"/>
+                    <a:lnT w="0" cap="flat" cmpd="sng" algn="ctr">
+                      <a:noFill/>
                     </a:lnT>
                     <a:lnB w="6350" cap="flat" cmpd="sng" algn="ctr">
                       <a:solidFill>
@@ -9739,7 +9254,7 @@
                       <a:tailEnd type="none" w="med" len="med"/>
                     </a:lnB>
                     <a:solidFill>
-                      <a:srgbClr val="FDF7F5"/>
+                      <a:srgbClr val="FFFFFF"/>
                     </a:solidFill>
                   </a:tcPr>
                 </a:tc>
@@ -9760,7 +9275,7 @@
                           <a:ea typeface="Arial" pitchFamily="34" charset="-122"/>
                           <a:cs typeface="Arial" pitchFamily="34" charset="-120"/>
                         </a:rPr>
-                        <a:t>−$3,234</a:t>
+                        <a:t>−$3,157</a:t>
                       </a:r>
                       <a:endParaRPr lang="en-US" sz="1100" dirty="0">
                         <a:latin typeface="Arial" charset="0"/>
@@ -9770,32 +9285,14 @@
                     </a:p>
                   </a:txBody>
                   <a:tcPr marL="54864" marR="54864" marT="18288" marB="18288" anchor="ctr">
-                    <a:lnL w="6350" cap="flat" cmpd="sng" algn="ctr">
-                      <a:solidFill>
-                        <a:srgbClr val="F8E8E2"/>
-                      </a:solidFill>
-                      <a:prstDash val="solid"/>
-                      <a:round/>
-                      <a:headEnd type="none" w="med" len="med"/>
-                      <a:tailEnd type="none" w="med" len="med"/>
+                    <a:lnL w="0" cap="flat" cmpd="sng" algn="ctr">
+                      <a:noFill/>
                     </a:lnL>
-                    <a:lnR w="6350" cap="flat" cmpd="sng" algn="ctr">
-                      <a:solidFill>
-                        <a:srgbClr val="F8E8E2"/>
-                      </a:solidFill>
-                      <a:prstDash val="solid"/>
-                      <a:round/>
-                      <a:headEnd type="none" w="med" len="med"/>
-                      <a:tailEnd type="none" w="med" len="med"/>
+                    <a:lnR w="0" cap="flat" cmpd="sng" algn="ctr">
+                      <a:noFill/>
                     </a:lnR>
-                    <a:lnT w="6350" cap="flat" cmpd="sng" algn="ctr">
-                      <a:solidFill>
-                        <a:srgbClr val="F8E8E2"/>
-                      </a:solidFill>
-                      <a:prstDash val="solid"/>
-                      <a:round/>
-                      <a:headEnd type="none" w="med" len="med"/>
-                      <a:tailEnd type="none" w="med" len="med"/>
+                    <a:lnT w="0" cap="flat" cmpd="sng" algn="ctr">
+                      <a:noFill/>
                     </a:lnT>
                     <a:lnB w="6350" cap="flat" cmpd="sng" algn="ctr">
                       <a:solidFill>
@@ -9807,7 +9304,7 @@
                       <a:tailEnd type="none" w="med" len="med"/>
                     </a:lnB>
                     <a:solidFill>
-                      <a:srgbClr val="FDF7F5"/>
+                      <a:srgbClr val="FFFFFF"/>
                     </a:solidFill>
                   </a:tcPr>
                 </a:tc>
@@ -9828,7 +9325,7 @@
                           <a:ea typeface="Arial" pitchFamily="34" charset="-122"/>
                           <a:cs typeface="Arial" pitchFamily="34" charset="-120"/>
                         </a:rPr>
-                        <a:t>−$3,220</a:t>
+                        <a:t>−$3,056</a:t>
                       </a:r>
                       <a:endParaRPr lang="en-US" sz="1100" dirty="0">
                         <a:latin typeface="Arial" charset="0"/>
@@ -9838,32 +9335,14 @@
                     </a:p>
                   </a:txBody>
                   <a:tcPr marL="54864" marR="54864" marT="18288" marB="18288" anchor="ctr">
-                    <a:lnL w="6350" cap="flat" cmpd="sng" algn="ctr">
-                      <a:solidFill>
-                        <a:srgbClr val="F8E8E2"/>
-                      </a:solidFill>
-                      <a:prstDash val="solid"/>
-                      <a:round/>
-                      <a:headEnd type="none" w="med" len="med"/>
-                      <a:tailEnd type="none" w="med" len="med"/>
+                    <a:lnL w="0" cap="flat" cmpd="sng" algn="ctr">
+                      <a:noFill/>
                     </a:lnL>
-                    <a:lnR w="6350" cap="flat" cmpd="sng" algn="ctr">
-                      <a:solidFill>
-                        <a:srgbClr val="F8E8E2"/>
-                      </a:solidFill>
-                      <a:prstDash val="solid"/>
-                      <a:round/>
-                      <a:headEnd type="none" w="med" len="med"/>
-                      <a:tailEnd type="none" w="med" len="med"/>
+                    <a:lnR w="0" cap="flat" cmpd="sng" algn="ctr">
+                      <a:noFill/>
                     </a:lnR>
-                    <a:lnT w="6350" cap="flat" cmpd="sng" algn="ctr">
-                      <a:solidFill>
-                        <a:srgbClr val="F8E8E2"/>
-                      </a:solidFill>
-                      <a:prstDash val="solid"/>
-                      <a:round/>
-                      <a:headEnd type="none" w="med" len="med"/>
-                      <a:tailEnd type="none" w="med" len="med"/>
+                    <a:lnT w="0" cap="flat" cmpd="sng" algn="ctr">
+                      <a:noFill/>
                     </a:lnT>
                     <a:lnB w="6350" cap="flat" cmpd="sng" algn="ctr">
                       <a:solidFill>
@@ -9875,7 +9354,7 @@
                       <a:tailEnd type="none" w="med" len="med"/>
                     </a:lnB>
                     <a:solidFill>
-                      <a:srgbClr val="FDF7F5"/>
+                      <a:srgbClr val="FFFFFF"/>
                     </a:solidFill>
                   </a:tcPr>
                 </a:tc>
@@ -9908,32 +9387,14 @@
                     </a:p>
                   </a:txBody>
                   <a:tcPr marL="54864" marR="54864" marT="18288" marB="18288" anchor="ctr">
-                    <a:lnL w="6350" cap="flat" cmpd="sng" algn="ctr">
-                      <a:solidFill>
-                        <a:srgbClr val="F8E8E2"/>
-                      </a:solidFill>
-                      <a:prstDash val="solid"/>
-                      <a:round/>
-                      <a:headEnd type="none" w="med" len="med"/>
-                      <a:tailEnd type="none" w="med" len="med"/>
+                    <a:lnL w="0" cap="flat" cmpd="sng" algn="ctr">
+                      <a:noFill/>
                     </a:lnL>
-                    <a:lnR w="6350" cap="flat" cmpd="sng" algn="ctr">
-                      <a:solidFill>
-                        <a:srgbClr val="F8E8E2"/>
-                      </a:solidFill>
-                      <a:prstDash val="solid"/>
-                      <a:round/>
-                      <a:headEnd type="none" w="med" len="med"/>
-                      <a:tailEnd type="none" w="med" len="med"/>
+                    <a:lnR w="0" cap="flat" cmpd="sng" algn="ctr">
+                      <a:noFill/>
                     </a:lnR>
-                    <a:lnT w="6350" cap="flat" cmpd="sng" algn="ctr">
-                      <a:solidFill>
-                        <a:srgbClr val="F8E8E2"/>
-                      </a:solidFill>
-                      <a:prstDash val="solid"/>
-                      <a:round/>
-                      <a:headEnd type="none" w="med" len="med"/>
-                      <a:tailEnd type="none" w="med" len="med"/>
+                    <a:lnT w="0" cap="flat" cmpd="sng" algn="ctr">
+                      <a:noFill/>
                     </a:lnT>
                     <a:lnB w="6350" cap="flat" cmpd="sng" algn="ctr">
                       <a:solidFill>
@@ -9966,7 +9427,7 @@
                           <a:ea typeface="Arial" pitchFamily="34" charset="-122"/>
                           <a:cs typeface="Arial" pitchFamily="34" charset="-120"/>
                         </a:rPr>
-                        <a:t>−$2,390</a:t>
+                        <a:t>−$2,330</a:t>
                       </a:r>
                       <a:endParaRPr lang="en-US" sz="1100" dirty="0">
                         <a:latin typeface="Arial" charset="0"/>
@@ -9976,32 +9437,14 @@
                     </a:p>
                   </a:txBody>
                   <a:tcPr marL="54864" marR="54864" marT="18288" marB="18288" anchor="ctr">
-                    <a:lnL w="6350" cap="flat" cmpd="sng" algn="ctr">
-                      <a:solidFill>
-                        <a:srgbClr val="F8E8E2"/>
-                      </a:solidFill>
-                      <a:prstDash val="solid"/>
-                      <a:round/>
-                      <a:headEnd type="none" w="med" len="med"/>
-                      <a:tailEnd type="none" w="med" len="med"/>
+                    <a:lnL w="0" cap="flat" cmpd="sng" algn="ctr">
+                      <a:noFill/>
                     </a:lnL>
-                    <a:lnR w="6350" cap="flat" cmpd="sng" algn="ctr">
-                      <a:solidFill>
-                        <a:srgbClr val="F8E8E2"/>
-                      </a:solidFill>
-                      <a:prstDash val="solid"/>
-                      <a:round/>
-                      <a:headEnd type="none" w="med" len="med"/>
-                      <a:tailEnd type="none" w="med" len="med"/>
+                    <a:lnR w="0" cap="flat" cmpd="sng" algn="ctr">
+                      <a:noFill/>
                     </a:lnR>
-                    <a:lnT w="6350" cap="flat" cmpd="sng" algn="ctr">
-                      <a:solidFill>
-                        <a:srgbClr val="F8E8E2"/>
-                      </a:solidFill>
-                      <a:prstDash val="solid"/>
-                      <a:round/>
-                      <a:headEnd type="none" w="med" len="med"/>
-                      <a:tailEnd type="none" w="med" len="med"/>
+                    <a:lnT w="0" cap="flat" cmpd="sng" algn="ctr">
+                      <a:noFill/>
                     </a:lnT>
                     <a:lnB w="6350" cap="flat" cmpd="sng" algn="ctr">
                       <a:solidFill>
@@ -10034,7 +9477,7 @@
                           <a:ea typeface="Arial" pitchFamily="34" charset="-122"/>
                           <a:cs typeface="Arial" pitchFamily="34" charset="-120"/>
                         </a:rPr>
-                        <a:t>−$2,385</a:t>
+                        <a:t>−$2,330</a:t>
                       </a:r>
                       <a:endParaRPr lang="en-US" sz="1100" dirty="0">
                         <a:latin typeface="Arial" charset="0"/>
@@ -10044,32 +9487,14 @@
                     </a:p>
                   </a:txBody>
                   <a:tcPr marL="54864" marR="54864" marT="18288" marB="18288" anchor="ctr">
-                    <a:lnL w="6350" cap="flat" cmpd="sng" algn="ctr">
-                      <a:solidFill>
-                        <a:srgbClr val="F8E8E2"/>
-                      </a:solidFill>
-                      <a:prstDash val="solid"/>
-                      <a:round/>
-                      <a:headEnd type="none" w="med" len="med"/>
-                      <a:tailEnd type="none" w="med" len="med"/>
+                    <a:lnL w="0" cap="flat" cmpd="sng" algn="ctr">
+                      <a:noFill/>
                     </a:lnL>
-                    <a:lnR w="6350" cap="flat" cmpd="sng" algn="ctr">
-                      <a:solidFill>
-                        <a:srgbClr val="F8E8E2"/>
-                      </a:solidFill>
-                      <a:prstDash val="solid"/>
-                      <a:round/>
-                      <a:headEnd type="none" w="med" len="med"/>
-                      <a:tailEnd type="none" w="med" len="med"/>
+                    <a:lnR w="0" cap="flat" cmpd="sng" algn="ctr">
+                      <a:noFill/>
                     </a:lnR>
-                    <a:lnT w="6350" cap="flat" cmpd="sng" algn="ctr">
-                      <a:solidFill>
-                        <a:srgbClr val="F8E8E2"/>
-                      </a:solidFill>
-                      <a:prstDash val="solid"/>
-                      <a:round/>
-                      <a:headEnd type="none" w="med" len="med"/>
-                      <a:tailEnd type="none" w="med" len="med"/>
+                    <a:lnT w="0" cap="flat" cmpd="sng" algn="ctr">
+                      <a:noFill/>
                     </a:lnT>
                     <a:lnB w="6350" cap="flat" cmpd="sng" algn="ctr">
                       <a:solidFill>
@@ -10102,7 +9527,7 @@
                           <a:ea typeface="Arial" pitchFamily="34" charset="-122"/>
                           <a:cs typeface="Arial" pitchFamily="34" charset="-120"/>
                         </a:rPr>
-                        <a:t>−$2,375</a:t>
+                        <a:t>−$2,258</a:t>
                       </a:r>
                       <a:endParaRPr lang="en-US" sz="1100" dirty="0">
                         <a:latin typeface="Arial" charset="0"/>
@@ -10112,32 +9537,14 @@
                     </a:p>
                   </a:txBody>
                   <a:tcPr marL="54864" marR="54864" marT="18288" marB="18288" anchor="ctr">
-                    <a:lnL w="6350" cap="flat" cmpd="sng" algn="ctr">
-                      <a:solidFill>
-                        <a:srgbClr val="F8E8E2"/>
-                      </a:solidFill>
-                      <a:prstDash val="solid"/>
-                      <a:round/>
-                      <a:headEnd type="none" w="med" len="med"/>
-                      <a:tailEnd type="none" w="med" len="med"/>
+                    <a:lnL w="0" cap="flat" cmpd="sng" algn="ctr">
+                      <a:noFill/>
                     </a:lnL>
-                    <a:lnR w="6350" cap="flat" cmpd="sng" algn="ctr">
-                      <a:solidFill>
-                        <a:srgbClr val="F8E8E2"/>
-                      </a:solidFill>
-                      <a:prstDash val="solid"/>
-                      <a:round/>
-                      <a:headEnd type="none" w="med" len="med"/>
-                      <a:tailEnd type="none" w="med" len="med"/>
+                    <a:lnR w="0" cap="flat" cmpd="sng" algn="ctr">
+                      <a:noFill/>
                     </a:lnR>
-                    <a:lnT w="6350" cap="flat" cmpd="sng" algn="ctr">
-                      <a:solidFill>
-                        <a:srgbClr val="F8E8E2"/>
-                      </a:solidFill>
-                      <a:prstDash val="solid"/>
-                      <a:round/>
-                      <a:headEnd type="none" w="med" len="med"/>
-                      <a:tailEnd type="none" w="med" len="med"/>
+                    <a:lnT w="0" cap="flat" cmpd="sng" algn="ctr">
+                      <a:noFill/>
                     </a:lnT>
                     <a:lnB w="6350" cap="flat" cmpd="sng" algn="ctr">
                       <a:solidFill>
@@ -10182,32 +9589,14 @@
                     </a:p>
                   </a:txBody>
                   <a:tcPr marL="54864" marR="54864" marT="18288" marB="18288" anchor="ctr">
-                    <a:lnL w="6350" cap="flat" cmpd="sng" algn="ctr">
-                      <a:solidFill>
-                        <a:srgbClr val="F8E8E2"/>
-                      </a:solidFill>
-                      <a:prstDash val="solid"/>
-                      <a:round/>
-                      <a:headEnd type="none" w="med" len="med"/>
-                      <a:tailEnd type="none" w="med" len="med"/>
+                    <a:lnL w="0" cap="flat" cmpd="sng" algn="ctr">
+                      <a:noFill/>
                     </a:lnL>
-                    <a:lnR w="6350" cap="flat" cmpd="sng" algn="ctr">
-                      <a:solidFill>
-                        <a:srgbClr val="F8E8E2"/>
-                      </a:solidFill>
-                      <a:prstDash val="solid"/>
-                      <a:round/>
-                      <a:headEnd type="none" w="med" len="med"/>
-                      <a:tailEnd type="none" w="med" len="med"/>
+                    <a:lnR w="0" cap="flat" cmpd="sng" algn="ctr">
+                      <a:noFill/>
                     </a:lnR>
-                    <a:lnT w="6350" cap="flat" cmpd="sng" algn="ctr">
-                      <a:solidFill>
-                        <a:srgbClr val="F8E8E2"/>
-                      </a:solidFill>
-                      <a:prstDash val="solid"/>
-                      <a:round/>
-                      <a:headEnd type="none" w="med" len="med"/>
-                      <a:tailEnd type="none" w="med" len="med"/>
+                    <a:lnT w="0" cap="flat" cmpd="sng" algn="ctr">
+                      <a:noFill/>
                     </a:lnT>
                     <a:lnB w="6350" cap="flat" cmpd="sng" algn="ctr">
                       <a:solidFill>
@@ -10219,7 +9608,7 @@
                       <a:tailEnd type="none" w="med" len="med"/>
                     </a:lnB>
                     <a:solidFill>
-                      <a:srgbClr val="FDF7F5"/>
+                      <a:srgbClr val="FFFFFF"/>
                     </a:solidFill>
                   </a:tcPr>
                 </a:tc>
@@ -10250,32 +9639,14 @@
                     </a:p>
                   </a:txBody>
                   <a:tcPr marL="54864" marR="54864" marT="18288" marB="18288" anchor="ctr">
-                    <a:lnL w="6350" cap="flat" cmpd="sng" algn="ctr">
-                      <a:solidFill>
-                        <a:srgbClr val="F8E8E2"/>
-                      </a:solidFill>
-                      <a:prstDash val="solid"/>
-                      <a:round/>
-                      <a:headEnd type="none" w="med" len="med"/>
-                      <a:tailEnd type="none" w="med" len="med"/>
+                    <a:lnL w="0" cap="flat" cmpd="sng" algn="ctr">
+                      <a:noFill/>
                     </a:lnL>
-                    <a:lnR w="6350" cap="flat" cmpd="sng" algn="ctr">
-                      <a:solidFill>
-                        <a:srgbClr val="F8E8E2"/>
-                      </a:solidFill>
-                      <a:prstDash val="solid"/>
-                      <a:round/>
-                      <a:headEnd type="none" w="med" len="med"/>
-                      <a:tailEnd type="none" w="med" len="med"/>
+                    <a:lnR w="0" cap="flat" cmpd="sng" algn="ctr">
+                      <a:noFill/>
                     </a:lnR>
-                    <a:lnT w="6350" cap="flat" cmpd="sng" algn="ctr">
-                      <a:solidFill>
-                        <a:srgbClr val="F8E8E2"/>
-                      </a:solidFill>
-                      <a:prstDash val="solid"/>
-                      <a:round/>
-                      <a:headEnd type="none" w="med" len="med"/>
-                      <a:tailEnd type="none" w="med" len="med"/>
+                    <a:lnT w="0" cap="flat" cmpd="sng" algn="ctr">
+                      <a:noFill/>
                     </a:lnT>
                     <a:lnB w="6350" cap="flat" cmpd="sng" algn="ctr">
                       <a:solidFill>
@@ -10287,7 +9658,7 @@
                       <a:tailEnd type="none" w="med" len="med"/>
                     </a:lnB>
                     <a:solidFill>
-                      <a:srgbClr val="FDF7F5"/>
+                      <a:srgbClr val="FFFFFF"/>
                     </a:solidFill>
                   </a:tcPr>
                 </a:tc>
@@ -10318,32 +9689,14 @@
                     </a:p>
                   </a:txBody>
                   <a:tcPr marL="54864" marR="54864" marT="18288" marB="18288" anchor="ctr">
-                    <a:lnL w="6350" cap="flat" cmpd="sng" algn="ctr">
-                      <a:solidFill>
-                        <a:srgbClr val="F8E8E2"/>
-                      </a:solidFill>
-                      <a:prstDash val="solid"/>
-                      <a:round/>
-                      <a:headEnd type="none" w="med" len="med"/>
-                      <a:tailEnd type="none" w="med" len="med"/>
+                    <a:lnL w="0" cap="flat" cmpd="sng" algn="ctr">
+                      <a:noFill/>
                     </a:lnL>
-                    <a:lnR w="6350" cap="flat" cmpd="sng" algn="ctr">
-                      <a:solidFill>
-                        <a:srgbClr val="F8E8E2"/>
-                      </a:solidFill>
-                      <a:prstDash val="solid"/>
-                      <a:round/>
-                      <a:headEnd type="none" w="med" len="med"/>
-                      <a:tailEnd type="none" w="med" len="med"/>
+                    <a:lnR w="0" cap="flat" cmpd="sng" algn="ctr">
+                      <a:noFill/>
                     </a:lnR>
-                    <a:lnT w="6350" cap="flat" cmpd="sng" algn="ctr">
-                      <a:solidFill>
-                        <a:srgbClr val="F8E8E2"/>
-                      </a:solidFill>
-                      <a:prstDash val="solid"/>
-                      <a:round/>
-                      <a:headEnd type="none" w="med" len="med"/>
-                      <a:tailEnd type="none" w="med" len="med"/>
+                    <a:lnT w="0" cap="flat" cmpd="sng" algn="ctr">
+                      <a:noFill/>
                     </a:lnT>
                     <a:lnB w="6350" cap="flat" cmpd="sng" algn="ctr">
                       <a:solidFill>
@@ -10355,7 +9708,7 @@
                       <a:tailEnd type="none" w="med" len="med"/>
                     </a:lnB>
                     <a:solidFill>
-                      <a:srgbClr val="FDF7F5"/>
+                      <a:srgbClr val="FFFFFF"/>
                     </a:solidFill>
                   </a:tcPr>
                 </a:tc>
@@ -10386,32 +9739,14 @@
                     </a:p>
                   </a:txBody>
                   <a:tcPr marL="54864" marR="54864" marT="18288" marB="18288" anchor="ctr">
-                    <a:lnL w="6350" cap="flat" cmpd="sng" algn="ctr">
-                      <a:solidFill>
-                        <a:srgbClr val="F8E8E2"/>
-                      </a:solidFill>
-                      <a:prstDash val="solid"/>
-                      <a:round/>
-                      <a:headEnd type="none" w="med" len="med"/>
-                      <a:tailEnd type="none" w="med" len="med"/>
+                    <a:lnL w="0" cap="flat" cmpd="sng" algn="ctr">
+                      <a:noFill/>
                     </a:lnL>
-                    <a:lnR w="6350" cap="flat" cmpd="sng" algn="ctr">
-                      <a:solidFill>
-                        <a:srgbClr val="F8E8E2"/>
-                      </a:solidFill>
-                      <a:prstDash val="solid"/>
-                      <a:round/>
-                      <a:headEnd type="none" w="med" len="med"/>
-                      <a:tailEnd type="none" w="med" len="med"/>
+                    <a:lnR w="0" cap="flat" cmpd="sng" algn="ctr">
+                      <a:noFill/>
                     </a:lnR>
-                    <a:lnT w="6350" cap="flat" cmpd="sng" algn="ctr">
-                      <a:solidFill>
-                        <a:srgbClr val="F8E8E2"/>
-                      </a:solidFill>
-                      <a:prstDash val="solid"/>
-                      <a:round/>
-                      <a:headEnd type="none" w="med" len="med"/>
-                      <a:tailEnd type="none" w="med" len="med"/>
+                    <a:lnT w="0" cap="flat" cmpd="sng" algn="ctr">
+                      <a:noFill/>
                     </a:lnT>
                     <a:lnB w="6350" cap="flat" cmpd="sng" algn="ctr">
                       <a:solidFill>
@@ -10423,7 +9758,7 @@
                       <a:tailEnd type="none" w="med" len="med"/>
                     </a:lnB>
                     <a:solidFill>
-                      <a:srgbClr val="FDF7F5"/>
+                      <a:srgbClr val="FFFFFF"/>
                     </a:solidFill>
                   </a:tcPr>
                 </a:tc>
@@ -10456,32 +9791,14 @@
                     </a:p>
                   </a:txBody>
                   <a:tcPr marL="54864" marR="54864" marT="18288" marB="18288" anchor="ctr">
-                    <a:lnL w="6350" cap="flat" cmpd="sng" algn="ctr">
-                      <a:solidFill>
-                        <a:srgbClr val="F8E8E2"/>
-                      </a:solidFill>
-                      <a:prstDash val="solid"/>
-                      <a:round/>
-                      <a:headEnd type="none" w="med" len="med"/>
-                      <a:tailEnd type="none" w="med" len="med"/>
+                    <a:lnL w="0" cap="flat" cmpd="sng" algn="ctr">
+                      <a:noFill/>
                     </a:lnL>
-                    <a:lnR w="6350" cap="flat" cmpd="sng" algn="ctr">
-                      <a:solidFill>
-                        <a:srgbClr val="F8E8E2"/>
-                      </a:solidFill>
-                      <a:prstDash val="solid"/>
-                      <a:round/>
-                      <a:headEnd type="none" w="med" len="med"/>
-                      <a:tailEnd type="none" w="med" len="med"/>
+                    <a:lnR w="0" cap="flat" cmpd="sng" algn="ctr">
+                      <a:noFill/>
                     </a:lnR>
-                    <a:lnT w="6350" cap="flat" cmpd="sng" algn="ctr">
-                      <a:solidFill>
-                        <a:srgbClr val="F8E8E2"/>
-                      </a:solidFill>
-                      <a:prstDash val="solid"/>
-                      <a:round/>
-                      <a:headEnd type="none" w="med" len="med"/>
-                      <a:tailEnd type="none" w="med" len="med"/>
+                    <a:lnT w="0" cap="flat" cmpd="sng" algn="ctr">
+                      <a:noFill/>
                     </a:lnT>
                     <a:lnB w="6350" cap="flat" cmpd="sng" algn="ctr">
                       <a:solidFill>
@@ -10524,32 +9841,14 @@
                     </a:p>
                   </a:txBody>
                   <a:tcPr marL="54864" marR="54864" marT="18288" marB="18288" anchor="ctr">
-                    <a:lnL w="6350" cap="flat" cmpd="sng" algn="ctr">
-                      <a:solidFill>
-                        <a:srgbClr val="F8E8E2"/>
-                      </a:solidFill>
-                      <a:prstDash val="solid"/>
-                      <a:round/>
-                      <a:headEnd type="none" w="med" len="med"/>
-                      <a:tailEnd type="none" w="med" len="med"/>
+                    <a:lnL w="0" cap="flat" cmpd="sng" algn="ctr">
+                      <a:noFill/>
                     </a:lnL>
-                    <a:lnR w="6350" cap="flat" cmpd="sng" algn="ctr">
-                      <a:solidFill>
-                        <a:srgbClr val="F8E8E2"/>
-                      </a:solidFill>
-                      <a:prstDash val="solid"/>
-                      <a:round/>
-                      <a:headEnd type="none" w="med" len="med"/>
-                      <a:tailEnd type="none" w="med" len="med"/>
+                    <a:lnR w="0" cap="flat" cmpd="sng" algn="ctr">
+                      <a:noFill/>
                     </a:lnR>
-                    <a:lnT w="6350" cap="flat" cmpd="sng" algn="ctr">
-                      <a:solidFill>
-                        <a:srgbClr val="F8E8E2"/>
-                      </a:solidFill>
-                      <a:prstDash val="solid"/>
-                      <a:round/>
-                      <a:headEnd type="none" w="med" len="med"/>
-                      <a:tailEnd type="none" w="med" len="med"/>
+                    <a:lnT w="0" cap="flat" cmpd="sng" algn="ctr">
+                      <a:noFill/>
                     </a:lnT>
                     <a:lnB w="6350" cap="flat" cmpd="sng" algn="ctr">
                       <a:solidFill>
@@ -10592,32 +9891,14 @@
                     </a:p>
                   </a:txBody>
                   <a:tcPr marL="54864" marR="54864" marT="18288" marB="18288" anchor="ctr">
-                    <a:lnL w="6350" cap="flat" cmpd="sng" algn="ctr">
-                      <a:solidFill>
-                        <a:srgbClr val="F8E8E2"/>
-                      </a:solidFill>
-                      <a:prstDash val="solid"/>
-                      <a:round/>
-                      <a:headEnd type="none" w="med" len="med"/>
-                      <a:tailEnd type="none" w="med" len="med"/>
+                    <a:lnL w="0" cap="flat" cmpd="sng" algn="ctr">
+                      <a:noFill/>
                     </a:lnL>
-                    <a:lnR w="6350" cap="flat" cmpd="sng" algn="ctr">
-                      <a:solidFill>
-                        <a:srgbClr val="F8E8E2"/>
-                      </a:solidFill>
-                      <a:prstDash val="solid"/>
-                      <a:round/>
-                      <a:headEnd type="none" w="med" len="med"/>
-                      <a:tailEnd type="none" w="med" len="med"/>
+                    <a:lnR w="0" cap="flat" cmpd="sng" algn="ctr">
+                      <a:noFill/>
                     </a:lnR>
-                    <a:lnT w="6350" cap="flat" cmpd="sng" algn="ctr">
-                      <a:solidFill>
-                        <a:srgbClr val="F8E8E2"/>
-                      </a:solidFill>
-                      <a:prstDash val="solid"/>
-                      <a:round/>
-                      <a:headEnd type="none" w="med" len="med"/>
-                      <a:tailEnd type="none" w="med" len="med"/>
+                    <a:lnT w="0" cap="flat" cmpd="sng" algn="ctr">
+                      <a:noFill/>
                     </a:lnT>
                     <a:lnB w="6350" cap="flat" cmpd="sng" algn="ctr">
                       <a:solidFill>
@@ -10660,7 +9941,16 @@
                     </a:p>
                   </a:txBody>
                   <a:tcPr marL="54864" marR="54864" marT="18288" marB="18288" anchor="ctr">
-                    <a:lnL w="6350" cap="flat" cmpd="sng" algn="ctr">
+                    <a:lnL w="0" cap="flat" cmpd="sng" algn="ctr">
+                      <a:noFill/>
+                    </a:lnL>
+                    <a:lnR w="0" cap="flat" cmpd="sng" algn="ctr">
+                      <a:noFill/>
+                    </a:lnR>
+                    <a:lnT w="0" cap="flat" cmpd="sng" algn="ctr">
+                      <a:noFill/>
+                    </a:lnT>
+                    <a:lnB w="6350" cap="flat" cmpd="sng" algn="ctr">
                       <a:solidFill>
                         <a:srgbClr val="F8E8E2"/>
                       </a:solidFill>
@@ -10668,8 +9958,57 @@
                       <a:round/>
                       <a:headEnd type="none" w="med" len="med"/>
                       <a:tailEnd type="none" w="med" len="med"/>
+                    </a:lnB>
+                    <a:solidFill>
+                      <a:srgbClr val="FFFFFF"/>
+                    </a:solidFill>
+                  </a:tcPr>
+                </a:tc>
+              </a:tr>
+              <a:tr h="292608">
+                <a:tc>
+                  <a:txBody>
+                    <a:bodyPr/>
+                    <a:lstStyle/>
+                    <a:p>
+                      <a:pPr algn="l" indent="0" marL="0">
+                        <a:buNone/>
+                      </a:pPr>
+                      <a:r>
+                        <a:rPr lang="en-US" sz="1100" b="1" dirty="0">
+                          <a:solidFill>
+                            <a:srgbClr val="1A1A1A"/>
+                          </a:solidFill>
+                          <a:latin typeface="Arial" pitchFamily="34" charset="0"/>
+                          <a:ea typeface="Arial" pitchFamily="34" charset="-122"/>
+                          <a:cs typeface="Arial" pitchFamily="34" charset="-120"/>
+                        </a:rPr>
+                        <a:t>Estimated Net Before Mortgage Payoff</a:t>
+                      </a:r>
+                      <a:endParaRPr lang="en-US" sz="1100" dirty="0">
+                        <a:latin typeface="Arial" charset="0"/>
+                        <a:ea typeface="Arial" charset="0"/>
+                        <a:cs typeface="Arial" charset="0"/>
+                      </a:endParaRPr>
+                    </a:p>
+                  </a:txBody>
+                  <a:tcPr marL="54864" marR="54864" marT="18288" marB="18288" anchor="ctr">
+                    <a:lnL w="0" cap="flat" cmpd="sng" algn="ctr">
+                      <a:noFill/>
                     </a:lnL>
-                    <a:lnR w="6350" cap="flat" cmpd="sng" algn="ctr">
+                    <a:lnR w="0" cap="flat" cmpd="sng" algn="ctr">
+                      <a:noFill/>
+                    </a:lnR>
+                    <a:lnT w="15875" cap="flat" cmpd="sng" algn="ctr">
+                      <a:solidFill>
+                        <a:srgbClr val="C2410C"/>
+                      </a:solidFill>
+                      <a:prstDash val="solid"/>
+                      <a:round/>
+                      <a:headEnd type="none" w="med" len="med"/>
+                      <a:tailEnd type="none" w="med" len="med"/>
+                    </a:lnT>
+                    <a:lnB w="6350" cap="flat" cmpd="sng" algn="ctr">
                       <a:solidFill>
                         <a:srgbClr val="F8E8E2"/>
                       </a:solidFill>
@@ -10677,10 +10016,160 @@
                       <a:round/>
                       <a:headEnd type="none" w="med" len="med"/>
                       <a:tailEnd type="none" w="med" len="med"/>
+                    </a:lnB>
+                    <a:solidFill>
+                      <a:srgbClr val="FFFFFF"/>
+                    </a:solidFill>
+                  </a:tcPr>
+                </a:tc>
+                <a:tc>
+                  <a:txBody>
+                    <a:bodyPr/>
+                    <a:lstStyle/>
+                    <a:p>
+                      <a:pPr algn="r" indent="0" marL="0">
+                        <a:buNone/>
+                      </a:pPr>
+                      <a:r>
+                        <a:rPr lang="en-US" sz="1100" b="1" dirty="0">
+                          <a:solidFill>
+                            <a:srgbClr val="1A1A1A"/>
+                          </a:solidFill>
+                          <a:latin typeface="Arial" pitchFamily="34" charset="0"/>
+                          <a:ea typeface="Arial" pitchFamily="34" charset="-122"/>
+                          <a:cs typeface="Arial" pitchFamily="34" charset="-120"/>
+                        </a:rPr>
+                        <a:t>$411,818</a:t>
+                      </a:r>
+                      <a:endParaRPr lang="en-US" sz="1100" dirty="0">
+                        <a:latin typeface="Arial" charset="0"/>
+                        <a:ea typeface="Arial" charset="0"/>
+                        <a:cs typeface="Arial" charset="0"/>
+                      </a:endParaRPr>
+                    </a:p>
+                  </a:txBody>
+                  <a:tcPr marL="54864" marR="54864" marT="18288" marB="18288" anchor="ctr">
+                    <a:lnL w="0" cap="flat" cmpd="sng" algn="ctr">
+                      <a:noFill/>
+                    </a:lnL>
+                    <a:lnR w="0" cap="flat" cmpd="sng" algn="ctr">
+                      <a:noFill/>
                     </a:lnR>
-                    <a:lnT w="6350" cap="flat" cmpd="sng" algn="ctr">
+                    <a:lnT w="15875" cap="flat" cmpd="sng" algn="ctr">
+                      <a:solidFill>
+                        <a:srgbClr val="C2410C"/>
+                      </a:solidFill>
+                      <a:prstDash val="solid"/>
+                      <a:round/>
+                      <a:headEnd type="none" w="med" len="med"/>
+                      <a:tailEnd type="none" w="med" len="med"/>
+                    </a:lnT>
+                    <a:lnB w="6350" cap="flat" cmpd="sng" algn="ctr">
                       <a:solidFill>
                         <a:srgbClr val="F8E8E2"/>
+                      </a:solidFill>
+                      <a:prstDash val="solid"/>
+                      <a:round/>
+                      <a:headEnd type="none" w="med" len="med"/>
+                      <a:tailEnd type="none" w="med" len="med"/>
+                    </a:lnB>
+                    <a:solidFill>
+                      <a:srgbClr val="FFFFFF"/>
+                    </a:solidFill>
+                  </a:tcPr>
+                </a:tc>
+                <a:tc>
+                  <a:txBody>
+                    <a:bodyPr/>
+                    <a:lstStyle/>
+                    <a:p>
+                      <a:pPr algn="r" indent="0" marL="0">
+                        <a:buNone/>
+                      </a:pPr>
+                      <a:r>
+                        <a:rPr lang="en-US" sz="1100" b="1" dirty="0">
+                          <a:solidFill>
+                            <a:srgbClr val="1A1A1A"/>
+                          </a:solidFill>
+                          <a:latin typeface="Arial" pitchFamily="34" charset="0"/>
+                          <a:ea typeface="Arial" pitchFamily="34" charset="-122"/>
+                          <a:cs typeface="Arial" pitchFamily="34" charset="-120"/>
+                        </a:rPr>
+                        <a:t>$411,818</a:t>
+                      </a:r>
+                      <a:endParaRPr lang="en-US" sz="1100" dirty="0">
+                        <a:latin typeface="Arial" charset="0"/>
+                        <a:ea typeface="Arial" charset="0"/>
+                        <a:cs typeface="Arial" charset="0"/>
+                      </a:endParaRPr>
+                    </a:p>
+                  </a:txBody>
+                  <a:tcPr marL="54864" marR="54864" marT="18288" marB="18288" anchor="ctr">
+                    <a:lnL w="0" cap="flat" cmpd="sng" algn="ctr">
+                      <a:noFill/>
+                    </a:lnL>
+                    <a:lnR w="0" cap="flat" cmpd="sng" algn="ctr">
+                      <a:noFill/>
+                    </a:lnR>
+                    <a:lnT w="15875" cap="flat" cmpd="sng" algn="ctr">
+                      <a:solidFill>
+                        <a:srgbClr val="C2410C"/>
+                      </a:solidFill>
+                      <a:prstDash val="solid"/>
+                      <a:round/>
+                      <a:headEnd type="none" w="med" len="med"/>
+                      <a:tailEnd type="none" w="med" len="med"/>
+                    </a:lnT>
+                    <a:lnB w="6350" cap="flat" cmpd="sng" algn="ctr">
+                      <a:solidFill>
+                        <a:srgbClr val="F8E8E2"/>
+                      </a:solidFill>
+                      <a:prstDash val="solid"/>
+                      <a:round/>
+                      <a:headEnd type="none" w="med" len="med"/>
+                      <a:tailEnd type="none" w="med" len="med"/>
+                    </a:lnB>
+                    <a:solidFill>
+                      <a:srgbClr val="FFFFFF"/>
+                    </a:solidFill>
+                  </a:tcPr>
+                </a:tc>
+                <a:tc>
+                  <a:txBody>
+                    <a:bodyPr/>
+                    <a:lstStyle/>
+                    <a:p>
+                      <a:pPr algn="r" indent="0" marL="0">
+                        <a:buNone/>
+                      </a:pPr>
+                      <a:r>
+                        <a:rPr lang="en-US" sz="1100" b="1" dirty="0">
+                          <a:solidFill>
+                            <a:srgbClr val="1A1A1A"/>
+                          </a:solidFill>
+                          <a:latin typeface="Arial" pitchFamily="34" charset="0"/>
+                          <a:ea typeface="Arial" pitchFamily="34" charset="-122"/>
+                          <a:cs typeface="Arial" pitchFamily="34" charset="-120"/>
+                        </a:rPr>
+                        <a:t>$403,216</a:t>
+                      </a:r>
+                      <a:endParaRPr lang="en-US" sz="1100" dirty="0">
+                        <a:latin typeface="Arial" charset="0"/>
+                        <a:ea typeface="Arial" charset="0"/>
+                        <a:cs typeface="Arial" charset="0"/>
+                      </a:endParaRPr>
+                    </a:p>
+                  </a:txBody>
+                  <a:tcPr marL="54864" marR="54864" marT="18288" marB="18288" anchor="ctr">
+                    <a:lnL w="0" cap="flat" cmpd="sng" algn="ctr">
+                      <a:noFill/>
+                    </a:lnL>
+                    <a:lnR w="0" cap="flat" cmpd="sng" algn="ctr">
+                      <a:noFill/>
+                    </a:lnR>
+                    <a:lnT w="15875" cap="flat" cmpd="sng" algn="ctr">
+                      <a:solidFill>
+                        <a:srgbClr val="C2410C"/>
                       </a:solidFill>
                       <a:prstDash val="solid"/>
                       <a:round/>
@@ -10720,280 +10209,6 @@
                           <a:ea typeface="Arial" pitchFamily="34" charset="-122"/>
                           <a:cs typeface="Arial" pitchFamily="34" charset="-120"/>
                         </a:rPr>
-                        <a:t>Estimated Net Before Mortgage Payoff</a:t>
-                      </a:r>
-                      <a:endParaRPr lang="en-US" sz="1100" dirty="0">
-                        <a:latin typeface="Arial" charset="0"/>
-                        <a:ea typeface="Arial" charset="0"/>
-                        <a:cs typeface="Arial" charset="0"/>
-                      </a:endParaRPr>
-                    </a:p>
-                  </a:txBody>
-                  <a:tcPr marL="54864" marR="54864" marT="18288" marB="18288" anchor="ctr">
-                    <a:lnL w="6350" cap="flat" cmpd="sng" algn="ctr">
-                      <a:solidFill>
-                        <a:srgbClr val="F8E8E2"/>
-                      </a:solidFill>
-                      <a:prstDash val="solid"/>
-                      <a:round/>
-                      <a:headEnd type="none" w="med" len="med"/>
-                      <a:tailEnd type="none" w="med" len="med"/>
-                    </a:lnL>
-                    <a:lnR w="6350" cap="flat" cmpd="sng" algn="ctr">
-                      <a:solidFill>
-                        <a:srgbClr val="F8E8E2"/>
-                      </a:solidFill>
-                      <a:prstDash val="solid"/>
-                      <a:round/>
-                      <a:headEnd type="none" w="med" len="med"/>
-                      <a:tailEnd type="none" w="med" len="med"/>
-                    </a:lnR>
-                    <a:lnT w="6350" cap="flat" cmpd="sng" algn="ctr">
-                      <a:solidFill>
-                        <a:srgbClr val="F8E8E2"/>
-                      </a:solidFill>
-                      <a:prstDash val="solid"/>
-                      <a:round/>
-                      <a:headEnd type="none" w="med" len="med"/>
-                      <a:tailEnd type="none" w="med" len="med"/>
-                    </a:lnT>
-                    <a:lnB w="6350" cap="flat" cmpd="sng" algn="ctr">
-                      <a:solidFill>
-                        <a:srgbClr val="F8E8E2"/>
-                      </a:solidFill>
-                      <a:prstDash val="solid"/>
-                      <a:round/>
-                      <a:headEnd type="none" w="med" len="med"/>
-                      <a:tailEnd type="none" w="med" len="med"/>
-                    </a:lnB>
-                    <a:solidFill>
-                      <a:srgbClr val="FDF7F5"/>
-                    </a:solidFill>
-                  </a:tcPr>
-                </a:tc>
-                <a:tc>
-                  <a:txBody>
-                    <a:bodyPr/>
-                    <a:lstStyle/>
-                    <a:p>
-                      <a:pPr algn="r" indent="0" marL="0">
-                        <a:buNone/>
-                      </a:pPr>
-                      <a:r>
-                        <a:rPr lang="en-US" sz="1100" dirty="0">
-                          <a:solidFill>
-                            <a:srgbClr val="1A1A1A"/>
-                          </a:solidFill>
-                          <a:latin typeface="Arial" pitchFamily="34" charset="0"/>
-                          <a:ea typeface="Arial" pitchFamily="34" charset="-122"/>
-                          <a:cs typeface="Arial" pitchFamily="34" charset="-120"/>
-                        </a:rPr>
-                        <a:t>$423,074</a:t>
-                      </a:r>
-                      <a:endParaRPr lang="en-US" sz="1100" dirty="0">
-                        <a:latin typeface="Arial" charset="0"/>
-                        <a:ea typeface="Arial" charset="0"/>
-                        <a:cs typeface="Arial" charset="0"/>
-                      </a:endParaRPr>
-                    </a:p>
-                  </a:txBody>
-                  <a:tcPr marL="54864" marR="54864" marT="18288" marB="18288" anchor="ctr">
-                    <a:lnL w="6350" cap="flat" cmpd="sng" algn="ctr">
-                      <a:solidFill>
-                        <a:srgbClr val="F8E8E2"/>
-                      </a:solidFill>
-                      <a:prstDash val="solid"/>
-                      <a:round/>
-                      <a:headEnd type="none" w="med" len="med"/>
-                      <a:tailEnd type="none" w="med" len="med"/>
-                    </a:lnL>
-                    <a:lnR w="6350" cap="flat" cmpd="sng" algn="ctr">
-                      <a:solidFill>
-                        <a:srgbClr val="F8E8E2"/>
-                      </a:solidFill>
-                      <a:prstDash val="solid"/>
-                      <a:round/>
-                      <a:headEnd type="none" w="med" len="med"/>
-                      <a:tailEnd type="none" w="med" len="med"/>
-                    </a:lnR>
-                    <a:lnT w="6350" cap="flat" cmpd="sng" algn="ctr">
-                      <a:solidFill>
-                        <a:srgbClr val="F8E8E2"/>
-                      </a:solidFill>
-                      <a:prstDash val="solid"/>
-                      <a:round/>
-                      <a:headEnd type="none" w="med" len="med"/>
-                      <a:tailEnd type="none" w="med" len="med"/>
-                    </a:lnT>
-                    <a:lnB w="6350" cap="flat" cmpd="sng" algn="ctr">
-                      <a:solidFill>
-                        <a:srgbClr val="F8E8E2"/>
-                      </a:solidFill>
-                      <a:prstDash val="solid"/>
-                      <a:round/>
-                      <a:headEnd type="none" w="med" len="med"/>
-                      <a:tailEnd type="none" w="med" len="med"/>
-                    </a:lnB>
-                    <a:solidFill>
-                      <a:srgbClr val="FDF7F5"/>
-                    </a:solidFill>
-                  </a:tcPr>
-                </a:tc>
-                <a:tc>
-                  <a:txBody>
-                    <a:bodyPr/>
-                    <a:lstStyle/>
-                    <a:p>
-                      <a:pPr algn="r" indent="0" marL="0">
-                        <a:buNone/>
-                      </a:pPr>
-                      <a:r>
-                        <a:rPr lang="en-US" sz="1100" dirty="0">
-                          <a:solidFill>
-                            <a:srgbClr val="1A1A1A"/>
-                          </a:solidFill>
-                          <a:latin typeface="Arial" pitchFamily="34" charset="0"/>
-                          <a:ea typeface="Arial" pitchFamily="34" charset="-122"/>
-                          <a:cs typeface="Arial" pitchFamily="34" charset="-120"/>
-                        </a:rPr>
-                        <a:t>$422,136</a:t>
-                      </a:r>
-                      <a:endParaRPr lang="en-US" sz="1100" dirty="0">
-                        <a:latin typeface="Arial" charset="0"/>
-                        <a:ea typeface="Arial" charset="0"/>
-                        <a:cs typeface="Arial" charset="0"/>
-                      </a:endParaRPr>
-                    </a:p>
-                  </a:txBody>
-                  <a:tcPr marL="54864" marR="54864" marT="18288" marB="18288" anchor="ctr">
-                    <a:lnL w="6350" cap="flat" cmpd="sng" algn="ctr">
-                      <a:solidFill>
-                        <a:srgbClr val="F8E8E2"/>
-                      </a:solidFill>
-                      <a:prstDash val="solid"/>
-                      <a:round/>
-                      <a:headEnd type="none" w="med" len="med"/>
-                      <a:tailEnd type="none" w="med" len="med"/>
-                    </a:lnL>
-                    <a:lnR w="6350" cap="flat" cmpd="sng" algn="ctr">
-                      <a:solidFill>
-                        <a:srgbClr val="F8E8E2"/>
-                      </a:solidFill>
-                      <a:prstDash val="solid"/>
-                      <a:round/>
-                      <a:headEnd type="none" w="med" len="med"/>
-                      <a:tailEnd type="none" w="med" len="med"/>
-                    </a:lnR>
-                    <a:lnT w="6350" cap="flat" cmpd="sng" algn="ctr">
-                      <a:solidFill>
-                        <a:srgbClr val="F8E8E2"/>
-                      </a:solidFill>
-                      <a:prstDash val="solid"/>
-                      <a:round/>
-                      <a:headEnd type="none" w="med" len="med"/>
-                      <a:tailEnd type="none" w="med" len="med"/>
-                    </a:lnT>
-                    <a:lnB w="6350" cap="flat" cmpd="sng" algn="ctr">
-                      <a:solidFill>
-                        <a:srgbClr val="F8E8E2"/>
-                      </a:solidFill>
-                      <a:prstDash val="solid"/>
-                      <a:round/>
-                      <a:headEnd type="none" w="med" len="med"/>
-                      <a:tailEnd type="none" w="med" len="med"/>
-                    </a:lnB>
-                    <a:solidFill>
-                      <a:srgbClr val="FDF7F5"/>
-                    </a:solidFill>
-                  </a:tcPr>
-                </a:tc>
-                <a:tc>
-                  <a:txBody>
-                    <a:bodyPr/>
-                    <a:lstStyle/>
-                    <a:p>
-                      <a:pPr algn="r" indent="0" marL="0">
-                        <a:buNone/>
-                      </a:pPr>
-                      <a:r>
-                        <a:rPr lang="en-US" sz="1100" dirty="0">
-                          <a:solidFill>
-                            <a:srgbClr val="1A1A1A"/>
-                          </a:solidFill>
-                          <a:latin typeface="Arial" pitchFamily="34" charset="0"/>
-                          <a:ea typeface="Arial" pitchFamily="34" charset="-122"/>
-                          <a:cs typeface="Arial" pitchFamily="34" charset="-120"/>
-                        </a:rPr>
-                        <a:t>$425,260</a:t>
-                      </a:r>
-                      <a:endParaRPr lang="en-US" sz="1100" dirty="0">
-                        <a:latin typeface="Arial" charset="0"/>
-                        <a:ea typeface="Arial" charset="0"/>
-                        <a:cs typeface="Arial" charset="0"/>
-                      </a:endParaRPr>
-                    </a:p>
-                  </a:txBody>
-                  <a:tcPr marL="54864" marR="54864" marT="18288" marB="18288" anchor="ctr">
-                    <a:lnL w="6350" cap="flat" cmpd="sng" algn="ctr">
-                      <a:solidFill>
-                        <a:srgbClr val="F8E8E2"/>
-                      </a:solidFill>
-                      <a:prstDash val="solid"/>
-                      <a:round/>
-                      <a:headEnd type="none" w="med" len="med"/>
-                      <a:tailEnd type="none" w="med" len="med"/>
-                    </a:lnL>
-                    <a:lnR w="6350" cap="flat" cmpd="sng" algn="ctr">
-                      <a:solidFill>
-                        <a:srgbClr val="F8E8E2"/>
-                      </a:solidFill>
-                      <a:prstDash val="solid"/>
-                      <a:round/>
-                      <a:headEnd type="none" w="med" len="med"/>
-                      <a:tailEnd type="none" w="med" len="med"/>
-                    </a:lnR>
-                    <a:lnT w="6350" cap="flat" cmpd="sng" algn="ctr">
-                      <a:solidFill>
-                        <a:srgbClr val="F8E8E2"/>
-                      </a:solidFill>
-                      <a:prstDash val="solid"/>
-                      <a:round/>
-                      <a:headEnd type="none" w="med" len="med"/>
-                      <a:tailEnd type="none" w="med" len="med"/>
-                    </a:lnT>
-                    <a:lnB w="6350" cap="flat" cmpd="sng" algn="ctr">
-                      <a:solidFill>
-                        <a:srgbClr val="F8E8E2"/>
-                      </a:solidFill>
-                      <a:prstDash val="solid"/>
-                      <a:round/>
-                      <a:headEnd type="none" w="med" len="med"/>
-                      <a:tailEnd type="none" w="med" len="med"/>
-                    </a:lnB>
-                    <a:solidFill>
-                      <a:srgbClr val="FDF7F5"/>
-                    </a:solidFill>
-                  </a:tcPr>
-                </a:tc>
-              </a:tr>
-              <a:tr h="292608">
-                <a:tc>
-                  <a:txBody>
-                    <a:bodyPr/>
-                    <a:lstStyle/>
-                    <a:p>
-                      <a:pPr algn="l" indent="0" marL="0">
-                        <a:buNone/>
-                      </a:pPr>
-                      <a:r>
-                        <a:rPr lang="en-US" sz="1100" dirty="0">
-                          <a:solidFill>
-                            <a:srgbClr val="1A1A1A"/>
-                          </a:solidFill>
-                          <a:latin typeface="Arial" pitchFamily="34" charset="0"/>
-                          <a:ea typeface="Arial" pitchFamily="34" charset="-122"/>
-                          <a:cs typeface="Arial" pitchFamily="34" charset="-120"/>
-                        </a:rPr>
                         <a:t>Holding Costs Until Closing (Est.)</a:t>
                       </a:r>
                       <a:endParaRPr lang="en-US" sz="1100" dirty="0">
@@ -11004,32 +10219,14 @@
                     </a:p>
                   </a:txBody>
                   <a:tcPr marL="54864" marR="54864" marT="18288" marB="18288" anchor="ctr">
-                    <a:lnL w="6350" cap="flat" cmpd="sng" algn="ctr">
-                      <a:solidFill>
-                        <a:srgbClr val="F8E8E2"/>
-                      </a:solidFill>
-                      <a:prstDash val="solid"/>
-                      <a:round/>
-                      <a:headEnd type="none" w="med" len="med"/>
-                      <a:tailEnd type="none" w="med" len="med"/>
+                    <a:lnL w="0" cap="flat" cmpd="sng" algn="ctr">
+                      <a:noFill/>
                     </a:lnL>
-                    <a:lnR w="6350" cap="flat" cmpd="sng" algn="ctr">
-                      <a:solidFill>
-                        <a:srgbClr val="F8E8E2"/>
-                      </a:solidFill>
-                      <a:prstDash val="solid"/>
-                      <a:round/>
-                      <a:headEnd type="none" w="med" len="med"/>
-                      <a:tailEnd type="none" w="med" len="med"/>
+                    <a:lnR w="0" cap="flat" cmpd="sng" algn="ctr">
+                      <a:noFill/>
                     </a:lnR>
-                    <a:lnT w="6350" cap="flat" cmpd="sng" algn="ctr">
-                      <a:solidFill>
-                        <a:srgbClr val="F8E8E2"/>
-                      </a:solidFill>
-                      <a:prstDash val="solid"/>
-                      <a:round/>
-                      <a:headEnd type="none" w="med" len="med"/>
-                      <a:tailEnd type="none" w="med" len="med"/>
+                    <a:lnT w="0" cap="flat" cmpd="sng" algn="ctr">
+                      <a:noFill/>
                     </a:lnT>
                     <a:lnB w="6350" cap="flat" cmpd="sng" algn="ctr">
                       <a:solidFill>
@@ -11072,32 +10269,14 @@
                     </a:p>
                   </a:txBody>
                   <a:tcPr marL="54864" marR="54864" marT="18288" marB="18288" anchor="ctr">
-                    <a:lnL w="6350" cap="flat" cmpd="sng" algn="ctr">
-                      <a:solidFill>
-                        <a:srgbClr val="F8E8E2"/>
-                      </a:solidFill>
-                      <a:prstDash val="solid"/>
-                      <a:round/>
-                      <a:headEnd type="none" w="med" len="med"/>
-                      <a:tailEnd type="none" w="med" len="med"/>
+                    <a:lnL w="0" cap="flat" cmpd="sng" algn="ctr">
+                      <a:noFill/>
                     </a:lnL>
-                    <a:lnR w="6350" cap="flat" cmpd="sng" algn="ctr">
-                      <a:solidFill>
-                        <a:srgbClr val="F8E8E2"/>
-                      </a:solidFill>
-                      <a:prstDash val="solid"/>
-                      <a:round/>
-                      <a:headEnd type="none" w="med" len="med"/>
-                      <a:tailEnd type="none" w="med" len="med"/>
+                    <a:lnR w="0" cap="flat" cmpd="sng" algn="ctr">
+                      <a:noFill/>
                     </a:lnR>
-                    <a:lnT w="6350" cap="flat" cmpd="sng" algn="ctr">
-                      <a:solidFill>
-                        <a:srgbClr val="F8E8E2"/>
-                      </a:solidFill>
-                      <a:prstDash val="solid"/>
-                      <a:round/>
-                      <a:headEnd type="none" w="med" len="med"/>
-                      <a:tailEnd type="none" w="med" len="med"/>
+                    <a:lnT w="0" cap="flat" cmpd="sng" algn="ctr">
+                      <a:noFill/>
                     </a:lnT>
                     <a:lnB w="6350" cap="flat" cmpd="sng" algn="ctr">
                       <a:solidFill>
@@ -11140,32 +10319,14 @@
                     </a:p>
                   </a:txBody>
                   <a:tcPr marL="54864" marR="54864" marT="18288" marB="18288" anchor="ctr">
-                    <a:lnL w="6350" cap="flat" cmpd="sng" algn="ctr">
-                      <a:solidFill>
-                        <a:srgbClr val="F8E8E2"/>
-                      </a:solidFill>
-                      <a:prstDash val="solid"/>
-                      <a:round/>
-                      <a:headEnd type="none" w="med" len="med"/>
-                      <a:tailEnd type="none" w="med" len="med"/>
+                    <a:lnL w="0" cap="flat" cmpd="sng" algn="ctr">
+                      <a:noFill/>
                     </a:lnL>
-                    <a:lnR w="6350" cap="flat" cmpd="sng" algn="ctr">
-                      <a:solidFill>
-                        <a:srgbClr val="F8E8E2"/>
-                      </a:solidFill>
-                      <a:prstDash val="solid"/>
-                      <a:round/>
-                      <a:headEnd type="none" w="med" len="med"/>
-                      <a:tailEnd type="none" w="med" len="med"/>
+                    <a:lnR w="0" cap="flat" cmpd="sng" algn="ctr">
+                      <a:noFill/>
                     </a:lnR>
-                    <a:lnT w="6350" cap="flat" cmpd="sng" algn="ctr">
-                      <a:solidFill>
-                        <a:srgbClr val="F8E8E2"/>
-                      </a:solidFill>
-                      <a:prstDash val="solid"/>
-                      <a:round/>
-                      <a:headEnd type="none" w="med" len="med"/>
-                      <a:tailEnd type="none" w="med" len="med"/>
+                    <a:lnT w="0" cap="flat" cmpd="sng" algn="ctr">
+                      <a:noFill/>
                     </a:lnT>
                     <a:lnB w="6350" cap="flat" cmpd="sng" algn="ctr">
                       <a:solidFill>
@@ -11208,32 +10369,14 @@
                     </a:p>
                   </a:txBody>
                   <a:tcPr marL="54864" marR="54864" marT="18288" marB="18288" anchor="ctr">
-                    <a:lnL w="6350" cap="flat" cmpd="sng" algn="ctr">
-                      <a:solidFill>
-                        <a:srgbClr val="F8E8E2"/>
-                      </a:solidFill>
-                      <a:prstDash val="solid"/>
-                      <a:round/>
-                      <a:headEnd type="none" w="med" len="med"/>
-                      <a:tailEnd type="none" w="med" len="med"/>
+                    <a:lnL w="0" cap="flat" cmpd="sng" algn="ctr">
+                      <a:noFill/>
                     </a:lnL>
-                    <a:lnR w="6350" cap="flat" cmpd="sng" algn="ctr">
-                      <a:solidFill>
-                        <a:srgbClr val="F8E8E2"/>
-                      </a:solidFill>
-                      <a:prstDash val="solid"/>
-                      <a:round/>
-                      <a:headEnd type="none" w="med" len="med"/>
-                      <a:tailEnd type="none" w="med" len="med"/>
+                    <a:lnR w="0" cap="flat" cmpd="sng" algn="ctr">
+                      <a:noFill/>
                     </a:lnR>
-                    <a:lnT w="6350" cap="flat" cmpd="sng" algn="ctr">
-                      <a:solidFill>
-                        <a:srgbClr val="F8E8E2"/>
-                      </a:solidFill>
-                      <a:prstDash val="solid"/>
-                      <a:round/>
-                      <a:headEnd type="none" w="med" len="med"/>
-                      <a:tailEnd type="none" w="med" len="med"/>
+                    <a:lnT w="0" cap="flat" cmpd="sng" algn="ctr">
+                      <a:noFill/>
                     </a:lnT>
                     <a:lnB w="6350" cap="flat" cmpd="sng" algn="ctr">
                       <a:solidFill>
@@ -11278,27 +10421,15 @@
                     </a:p>
                   </a:txBody>
                   <a:tcPr marL="54864" marR="54864" marT="18288" marB="18288" anchor="ctr">
-                    <a:lnL w="6350" cap="flat" cmpd="sng" algn="ctr">
+                    <a:lnL w="0" cap="flat" cmpd="sng" algn="ctr">
+                      <a:noFill/>
+                    </a:lnL>
+                    <a:lnR w="0" cap="flat" cmpd="sng" algn="ctr">
+                      <a:noFill/>
+                    </a:lnR>
+                    <a:lnT w="15875" cap="flat" cmpd="sng" algn="ctr">
                       <a:solidFill>
-                        <a:srgbClr val="F8E8E2"/>
-                      </a:solidFill>
-                      <a:prstDash val="solid"/>
-                      <a:round/>
-                      <a:headEnd type="none" w="med" len="med"/>
-                      <a:tailEnd type="none" w="med" len="med"/>
-                    </a:lnL>
-                    <a:lnR w="6350" cap="flat" cmpd="sng" algn="ctr">
-                      <a:solidFill>
-                        <a:srgbClr val="F8E8E2"/>
-                      </a:solidFill>
-                      <a:prstDash val="solid"/>
-                      <a:round/>
-                      <a:headEnd type="none" w="med" len="med"/>
-                      <a:tailEnd type="none" w="med" len="med"/>
-                    </a:lnR>
-                    <a:lnT w="6350" cap="flat" cmpd="sng" algn="ctr">
-                      <a:solidFill>
-                        <a:srgbClr val="F8E8E2"/>
+                        <a:srgbClr val="C2410C"/>
                       </a:solidFill>
                       <a:prstDash val="solid"/>
                       <a:round/>
@@ -11315,7 +10446,7 @@
                       <a:tailEnd type="none" w="med" len="med"/>
                     </a:lnB>
                     <a:solidFill>
-                      <a:srgbClr val="FBF2EE"/>
+                      <a:srgbClr val="FFFFFF"/>
                     </a:solidFill>
                   </a:tcPr>
                 </a:tc>
@@ -11336,7 +10467,7 @@
                           <a:ea typeface="Arial" pitchFamily="34" charset="-122"/>
                           <a:cs typeface="Arial" pitchFamily="34" charset="-120"/>
                         </a:rPr>
-                        <a:t>$420,954</a:t>
+                        <a:t>$409,698</a:t>
                       </a:r>
                       <a:endParaRPr lang="en-US" sz="1100" dirty="0">
                         <a:latin typeface="Arial" charset="0"/>
@@ -11346,27 +10477,15 @@
                     </a:p>
                   </a:txBody>
                   <a:tcPr marL="54864" marR="54864" marT="18288" marB="18288" anchor="ctr">
-                    <a:lnL w="6350" cap="flat" cmpd="sng" algn="ctr">
+                    <a:lnL w="0" cap="flat" cmpd="sng" algn="ctr">
+                      <a:noFill/>
+                    </a:lnL>
+                    <a:lnR w="0" cap="flat" cmpd="sng" algn="ctr">
+                      <a:noFill/>
+                    </a:lnR>
+                    <a:lnT w="15875" cap="flat" cmpd="sng" algn="ctr">
                       <a:solidFill>
-                        <a:srgbClr val="F8E8E2"/>
-                      </a:solidFill>
-                      <a:prstDash val="solid"/>
-                      <a:round/>
-                      <a:headEnd type="none" w="med" len="med"/>
-                      <a:tailEnd type="none" w="med" len="med"/>
-                    </a:lnL>
-                    <a:lnR w="6350" cap="flat" cmpd="sng" algn="ctr">
-                      <a:solidFill>
-                        <a:srgbClr val="F8E8E2"/>
-                      </a:solidFill>
-                      <a:prstDash val="solid"/>
-                      <a:round/>
-                      <a:headEnd type="none" w="med" len="med"/>
-                      <a:tailEnd type="none" w="med" len="med"/>
-                    </a:lnR>
-                    <a:lnT w="6350" cap="flat" cmpd="sng" algn="ctr">
-                      <a:solidFill>
-                        <a:srgbClr val="F8E8E2"/>
+                        <a:srgbClr val="C2410C"/>
                       </a:solidFill>
                       <a:prstDash val="solid"/>
                       <a:round/>
@@ -11383,7 +10502,7 @@
                       <a:tailEnd type="none" w="med" len="med"/>
                     </a:lnB>
                     <a:solidFill>
-                      <a:srgbClr val="FBF2EE"/>
+                      <a:srgbClr val="FFFFFF"/>
                     </a:solidFill>
                   </a:tcPr>
                 </a:tc>
@@ -11404,7 +10523,7 @@
                           <a:ea typeface="Arial" pitchFamily="34" charset="-122"/>
                           <a:cs typeface="Arial" pitchFamily="34" charset="-120"/>
                         </a:rPr>
-                        <a:t>$421,060</a:t>
+                        <a:t>$410,742</a:t>
                       </a:r>
                       <a:endParaRPr lang="en-US" sz="1100" dirty="0">
                         <a:latin typeface="Arial" charset="0"/>
@@ -11414,27 +10533,15 @@
                     </a:p>
                   </a:txBody>
                   <a:tcPr marL="54864" marR="54864" marT="18288" marB="18288" anchor="ctr">
-                    <a:lnL w="6350" cap="flat" cmpd="sng" algn="ctr">
+                    <a:lnL w="0" cap="flat" cmpd="sng" algn="ctr">
+                      <a:noFill/>
+                    </a:lnL>
+                    <a:lnR w="0" cap="flat" cmpd="sng" algn="ctr">
+                      <a:noFill/>
+                    </a:lnR>
+                    <a:lnT w="15875" cap="flat" cmpd="sng" algn="ctr">
                       <a:solidFill>
-                        <a:srgbClr val="F8E8E2"/>
-                      </a:solidFill>
-                      <a:prstDash val="solid"/>
-                      <a:round/>
-                      <a:headEnd type="none" w="med" len="med"/>
-                      <a:tailEnd type="none" w="med" len="med"/>
-                    </a:lnL>
-                    <a:lnR w="6350" cap="flat" cmpd="sng" algn="ctr">
-                      <a:solidFill>
-                        <a:srgbClr val="F8E8E2"/>
-                      </a:solidFill>
-                      <a:prstDash val="solid"/>
-                      <a:round/>
-                      <a:headEnd type="none" w="med" len="med"/>
-                      <a:tailEnd type="none" w="med" len="med"/>
-                    </a:lnR>
-                    <a:lnT w="6350" cap="flat" cmpd="sng" algn="ctr">
-                      <a:solidFill>
-                        <a:srgbClr val="F8E8E2"/>
+                        <a:srgbClr val="C2410C"/>
                       </a:solidFill>
                       <a:prstDash val="solid"/>
                       <a:round/>
@@ -11451,7 +10558,7 @@
                       <a:tailEnd type="none" w="med" len="med"/>
                     </a:lnB>
                     <a:solidFill>
-                      <a:srgbClr val="FBF2EE"/>
+                      <a:srgbClr val="FFFFFF"/>
                     </a:solidFill>
                   </a:tcPr>
                 </a:tc>
@@ -11472,7 +10579,7 @@
                           <a:ea typeface="Arial" pitchFamily="34" charset="-122"/>
                           <a:cs typeface="Arial" pitchFamily="34" charset="-120"/>
                         </a:rPr>
-                        <a:t>$424,486</a:t>
+                        <a:t>$402,442</a:t>
                       </a:r>
                       <a:endParaRPr lang="en-US" sz="1100" dirty="0">
                         <a:latin typeface="Arial" charset="0"/>
@@ -11482,27 +10589,15 @@
                     </a:p>
                   </a:txBody>
                   <a:tcPr marL="54864" marR="54864" marT="18288" marB="18288" anchor="ctr">
-                    <a:lnL w="6350" cap="flat" cmpd="sng" algn="ctr">
+                    <a:lnL w="0" cap="flat" cmpd="sng" algn="ctr">
+                      <a:noFill/>
+                    </a:lnL>
+                    <a:lnR w="0" cap="flat" cmpd="sng" algn="ctr">
+                      <a:noFill/>
+                    </a:lnR>
+                    <a:lnT w="15875" cap="flat" cmpd="sng" algn="ctr">
                       <a:solidFill>
-                        <a:srgbClr val="F8E8E2"/>
-                      </a:solidFill>
-                      <a:prstDash val="solid"/>
-                      <a:round/>
-                      <a:headEnd type="none" w="med" len="med"/>
-                      <a:tailEnd type="none" w="med" len="med"/>
-                    </a:lnL>
-                    <a:lnR w="6350" cap="flat" cmpd="sng" algn="ctr">
-                      <a:solidFill>
-                        <a:srgbClr val="F8E8E2"/>
-                      </a:solidFill>
-                      <a:prstDash val="solid"/>
-                      <a:round/>
-                      <a:headEnd type="none" w="med" len="med"/>
-                      <a:tailEnd type="none" w="med" len="med"/>
-                    </a:lnR>
-                    <a:lnT w="6350" cap="flat" cmpd="sng" algn="ctr">
-                      <a:solidFill>
-                        <a:srgbClr val="F8E8E2"/>
+                        <a:srgbClr val="C2410C"/>
                       </a:solidFill>
                       <a:prstDash val="solid"/>
                       <a:round/>
@@ -11519,7 +10614,7 @@
                       <a:tailEnd type="none" w="med" len="med"/>
                     </a:lnB>
                     <a:solidFill>
-                      <a:srgbClr val="FBF2EE"/>
+                      <a:srgbClr val="FFFFFF"/>
                     </a:solidFill>
                   </a:tcPr>
                 </a:tc>
@@ -11555,7 +10650,7 @@
             <a:r>
               <a:rPr lang="en-US" sz="1000" dirty="0">
                 <a:solidFill>
-                  <a:srgbClr val="5A6672"/>
+                  <a:srgbClr val="5E5E5E"/>
                 </a:solidFill>
                 <a:latin typeface="Arial" pitchFamily="34" charset="0"/>
                 <a:ea typeface="Arial" pitchFamily="34" charset="-122"/>
@@ -11594,7 +10689,7 @@
             <a:r>
               <a:rPr lang="en-US" sz="800" dirty="0">
                 <a:solidFill>
-                  <a:srgbClr val="5A6672"/>
+                  <a:srgbClr val="5E5E5E"/>
                 </a:solidFill>
                 <a:latin typeface="Arial" pitchFamily="34" charset="0"/>
                 <a:ea typeface="Arial" pitchFamily="34" charset="-122"/>
@@ -11633,7 +10728,7 @@
             <a:r>
               <a:rPr lang="en-US" sz="800" dirty="0">
                 <a:solidFill>
-                  <a:srgbClr val="5A6672"/>
+                  <a:srgbClr val="5E5E5E"/>
                 </a:solidFill>
                 <a:latin typeface="Arial" pitchFamily="34" charset="0"/>
                 <a:ea typeface="Arial" pitchFamily="34" charset="-122"/>
@@ -11756,7 +10851,7 @@
                       <a:r>
                         <a:rPr lang="en-US" sz="1100" b="1" dirty="0">
                           <a:solidFill>
-                            <a:srgbClr val="FFFFFF"/>
+                            <a:srgbClr val="A23200"/>
                           </a:solidFill>
                           <a:latin typeface="Arial" pitchFamily="34" charset="0"/>
                           <a:ea typeface="Arial" pitchFamily="34" charset="-122"/>
@@ -11772,36 +10867,18 @@
                     </a:p>
                   </a:txBody>
                   <a:tcPr marL="54864" marR="54864" marT="18288" marB="18288" anchor="ctr">
-                    <a:lnL w="6350" cap="flat" cmpd="sng" algn="ctr">
+                    <a:lnL w="0" cap="flat" cmpd="sng" algn="ctr">
+                      <a:noFill/>
+                    </a:lnL>
+                    <a:lnR w="0" cap="flat" cmpd="sng" algn="ctr">
+                      <a:noFill/>
+                    </a:lnR>
+                    <a:lnT w="0" cap="flat" cmpd="sng" algn="ctr">
+                      <a:noFill/>
+                    </a:lnT>
+                    <a:lnB w="19050" cap="flat" cmpd="sng" algn="ctr">
                       <a:solidFill>
-                        <a:srgbClr val="F8E8E2"/>
-                      </a:solidFill>
-                      <a:prstDash val="solid"/>
-                      <a:round/>
-                      <a:headEnd type="none" w="med" len="med"/>
-                      <a:tailEnd type="none" w="med" len="med"/>
-                    </a:lnL>
-                    <a:lnR w="6350" cap="flat" cmpd="sng" algn="ctr">
-                      <a:solidFill>
-                        <a:srgbClr val="F8E8E2"/>
-                      </a:solidFill>
-                      <a:prstDash val="solid"/>
-                      <a:round/>
-                      <a:headEnd type="none" w="med" len="med"/>
-                      <a:tailEnd type="none" w="med" len="med"/>
-                    </a:lnR>
-                    <a:lnT w="6350" cap="flat" cmpd="sng" algn="ctr">
-                      <a:solidFill>
-                        <a:srgbClr val="F8E8E2"/>
-                      </a:solidFill>
-                      <a:prstDash val="solid"/>
-                      <a:round/>
-                      <a:headEnd type="none" w="med" len="med"/>
-                      <a:tailEnd type="none" w="med" len="med"/>
-                    </a:lnT>
-                    <a:lnB w="6350" cap="flat" cmpd="sng" algn="ctr">
-                      <a:solidFill>
-                        <a:srgbClr val="F8E8E2"/>
+                        <a:srgbClr val="C2410C"/>
                       </a:solidFill>
                       <a:prstDash val="solid"/>
                       <a:round/>
@@ -11809,7 +10886,7 @@
                       <a:tailEnd type="none" w="med" len="med"/>
                     </a:lnB>
                     <a:solidFill>
-                      <a:srgbClr val="C2410C"/>
+                      <a:srgbClr val="FFFFFF"/>
                     </a:solidFill>
                   </a:tcPr>
                 </a:tc>
@@ -11824,7 +10901,7 @@
                       <a:r>
                         <a:rPr lang="en-US" sz="1100" b="1" dirty="0">
                           <a:solidFill>
-                            <a:srgbClr val="FFFFFF"/>
+                            <a:srgbClr val="A23200"/>
                           </a:solidFill>
                           <a:latin typeface="Arial" pitchFamily="34" charset="0"/>
                           <a:ea typeface="Arial" pitchFamily="34" charset="-122"/>
@@ -11840,36 +10917,18 @@
                     </a:p>
                   </a:txBody>
                   <a:tcPr marL="54864" marR="54864" marT="18288" marB="18288" anchor="ctr">
-                    <a:lnL w="6350" cap="flat" cmpd="sng" algn="ctr">
+                    <a:lnL w="0" cap="flat" cmpd="sng" algn="ctr">
+                      <a:noFill/>
+                    </a:lnL>
+                    <a:lnR w="0" cap="flat" cmpd="sng" algn="ctr">
+                      <a:noFill/>
+                    </a:lnR>
+                    <a:lnT w="0" cap="flat" cmpd="sng" algn="ctr">
+                      <a:noFill/>
+                    </a:lnT>
+                    <a:lnB w="19050" cap="flat" cmpd="sng" algn="ctr">
                       <a:solidFill>
-                        <a:srgbClr val="F8E8E2"/>
-                      </a:solidFill>
-                      <a:prstDash val="solid"/>
-                      <a:round/>
-                      <a:headEnd type="none" w="med" len="med"/>
-                      <a:tailEnd type="none" w="med" len="med"/>
-                    </a:lnL>
-                    <a:lnR w="6350" cap="flat" cmpd="sng" algn="ctr">
-                      <a:solidFill>
-                        <a:srgbClr val="F8E8E2"/>
-                      </a:solidFill>
-                      <a:prstDash val="solid"/>
-                      <a:round/>
-                      <a:headEnd type="none" w="med" len="med"/>
-                      <a:tailEnd type="none" w="med" len="med"/>
-                    </a:lnR>
-                    <a:lnT w="6350" cap="flat" cmpd="sng" algn="ctr">
-                      <a:solidFill>
-                        <a:srgbClr val="F8E8E2"/>
-                      </a:solidFill>
-                      <a:prstDash val="solid"/>
-                      <a:round/>
-                      <a:headEnd type="none" w="med" len="med"/>
-                      <a:tailEnd type="none" w="med" len="med"/>
-                    </a:lnT>
-                    <a:lnB w="6350" cap="flat" cmpd="sng" algn="ctr">
-                      <a:solidFill>
-                        <a:srgbClr val="F8E8E2"/>
+                        <a:srgbClr val="C2410C"/>
                       </a:solidFill>
                       <a:prstDash val="solid"/>
                       <a:round/>
@@ -11877,7 +10936,7 @@
                       <a:tailEnd type="none" w="med" len="med"/>
                     </a:lnB>
                     <a:solidFill>
-                      <a:srgbClr val="C2410C"/>
+                      <a:srgbClr val="FFFFFF"/>
                     </a:solidFill>
                   </a:tcPr>
                 </a:tc>
@@ -11892,7 +10951,7 @@
                       <a:r>
                         <a:rPr lang="en-US" sz="1100" b="1" dirty="0">
                           <a:solidFill>
-                            <a:srgbClr val="FFFFFF"/>
+                            <a:srgbClr val="A23200"/>
                           </a:solidFill>
                           <a:latin typeface="Arial" pitchFamily="34" charset="0"/>
                           <a:ea typeface="Arial" pitchFamily="34" charset="-122"/>
@@ -11908,36 +10967,18 @@
                     </a:p>
                   </a:txBody>
                   <a:tcPr marL="54864" marR="54864" marT="18288" marB="18288" anchor="ctr">
-                    <a:lnL w="6350" cap="flat" cmpd="sng" algn="ctr">
+                    <a:lnL w="0" cap="flat" cmpd="sng" algn="ctr">
+                      <a:noFill/>
+                    </a:lnL>
+                    <a:lnR w="0" cap="flat" cmpd="sng" algn="ctr">
+                      <a:noFill/>
+                    </a:lnR>
+                    <a:lnT w="0" cap="flat" cmpd="sng" algn="ctr">
+                      <a:noFill/>
+                    </a:lnT>
+                    <a:lnB w="19050" cap="flat" cmpd="sng" algn="ctr">
                       <a:solidFill>
-                        <a:srgbClr val="F8E8E2"/>
-                      </a:solidFill>
-                      <a:prstDash val="solid"/>
-                      <a:round/>
-                      <a:headEnd type="none" w="med" len="med"/>
-                      <a:tailEnd type="none" w="med" len="med"/>
-                    </a:lnL>
-                    <a:lnR w="6350" cap="flat" cmpd="sng" algn="ctr">
-                      <a:solidFill>
-                        <a:srgbClr val="F8E8E2"/>
-                      </a:solidFill>
-                      <a:prstDash val="solid"/>
-                      <a:round/>
-                      <a:headEnd type="none" w="med" len="med"/>
-                      <a:tailEnd type="none" w="med" len="med"/>
-                    </a:lnR>
-                    <a:lnT w="6350" cap="flat" cmpd="sng" algn="ctr">
-                      <a:solidFill>
-                        <a:srgbClr val="F8E8E2"/>
-                      </a:solidFill>
-                      <a:prstDash val="solid"/>
-                      <a:round/>
-                      <a:headEnd type="none" w="med" len="med"/>
-                      <a:tailEnd type="none" w="med" len="med"/>
-                    </a:lnT>
-                    <a:lnB w="6350" cap="flat" cmpd="sng" algn="ctr">
-                      <a:solidFill>
-                        <a:srgbClr val="F8E8E2"/>
+                        <a:srgbClr val="C2410C"/>
                       </a:solidFill>
                       <a:prstDash val="solid"/>
                       <a:round/>
@@ -11945,7 +10986,7 @@
                       <a:tailEnd type="none" w="med" len="med"/>
                     </a:lnB>
                     <a:solidFill>
-                      <a:srgbClr val="C2410C"/>
+                      <a:srgbClr val="FFFFFF"/>
                     </a:solidFill>
                   </a:tcPr>
                 </a:tc>
@@ -11960,7 +11001,7 @@
                       <a:r>
                         <a:rPr lang="en-US" sz="1100" b="1" dirty="0">
                           <a:solidFill>
-                            <a:srgbClr val="FFFFFF"/>
+                            <a:srgbClr val="A23200"/>
                           </a:solidFill>
                           <a:latin typeface="Arial" pitchFamily="34" charset="0"/>
                           <a:ea typeface="Arial" pitchFamily="34" charset="-122"/>
@@ -11976,36 +11017,18 @@
                     </a:p>
                   </a:txBody>
                   <a:tcPr marL="54864" marR="54864" marT="18288" marB="18288" anchor="ctr">
-                    <a:lnL w="6350" cap="flat" cmpd="sng" algn="ctr">
+                    <a:lnL w="0" cap="flat" cmpd="sng" algn="ctr">
+                      <a:noFill/>
+                    </a:lnL>
+                    <a:lnR w="0" cap="flat" cmpd="sng" algn="ctr">
+                      <a:noFill/>
+                    </a:lnR>
+                    <a:lnT w="0" cap="flat" cmpd="sng" algn="ctr">
+                      <a:noFill/>
+                    </a:lnT>
+                    <a:lnB w="19050" cap="flat" cmpd="sng" algn="ctr">
                       <a:solidFill>
-                        <a:srgbClr val="F8E8E2"/>
-                      </a:solidFill>
-                      <a:prstDash val="solid"/>
-                      <a:round/>
-                      <a:headEnd type="none" w="med" len="med"/>
-                      <a:tailEnd type="none" w="med" len="med"/>
-                    </a:lnL>
-                    <a:lnR w="6350" cap="flat" cmpd="sng" algn="ctr">
-                      <a:solidFill>
-                        <a:srgbClr val="F8E8E2"/>
-                      </a:solidFill>
-                      <a:prstDash val="solid"/>
-                      <a:round/>
-                      <a:headEnd type="none" w="med" len="med"/>
-                      <a:tailEnd type="none" w="med" len="med"/>
-                    </a:lnR>
-                    <a:lnT w="6350" cap="flat" cmpd="sng" algn="ctr">
-                      <a:solidFill>
-                        <a:srgbClr val="F8E8E2"/>
-                      </a:solidFill>
-                      <a:prstDash val="solid"/>
-                      <a:round/>
-                      <a:headEnd type="none" w="med" len="med"/>
-                      <a:tailEnd type="none" w="med" len="med"/>
-                    </a:lnT>
-                    <a:lnB w="6350" cap="flat" cmpd="sng" algn="ctr">
-                      <a:solidFill>
-                        <a:srgbClr val="F8E8E2"/>
+                        <a:srgbClr val="C2410C"/>
                       </a:solidFill>
                       <a:prstDash val="solid"/>
                       <a:round/>
@@ -12013,7 +11036,7 @@
                       <a:tailEnd type="none" w="med" len="med"/>
                     </a:lnB>
                     <a:solidFill>
-                      <a:srgbClr val="C2410C"/>
+                      <a:srgbClr val="FFFFFF"/>
                     </a:solidFill>
                   </a:tcPr>
                 </a:tc>
@@ -12046,32 +11069,14 @@
                     </a:p>
                   </a:txBody>
                   <a:tcPr marL="54864" marR="54864" marT="18288" marB="18288" anchor="ctr">
-                    <a:lnL w="6350" cap="flat" cmpd="sng" algn="ctr">
-                      <a:solidFill>
-                        <a:srgbClr val="F8E8E2"/>
-                      </a:solidFill>
-                      <a:prstDash val="solid"/>
-                      <a:round/>
-                      <a:headEnd type="none" w="med" len="med"/>
-                      <a:tailEnd type="none" w="med" len="med"/>
+                    <a:lnL w="0" cap="flat" cmpd="sng" algn="ctr">
+                      <a:noFill/>
                     </a:lnL>
-                    <a:lnR w="6350" cap="flat" cmpd="sng" algn="ctr">
-                      <a:solidFill>
-                        <a:srgbClr val="F8E8E2"/>
-                      </a:solidFill>
-                      <a:prstDash val="solid"/>
-                      <a:round/>
-                      <a:headEnd type="none" w="med" len="med"/>
-                      <a:tailEnd type="none" w="med" len="med"/>
+                    <a:lnR w="0" cap="flat" cmpd="sng" algn="ctr">
+                      <a:noFill/>
                     </a:lnR>
-                    <a:lnT w="6350" cap="flat" cmpd="sng" algn="ctr">
-                      <a:solidFill>
-                        <a:srgbClr val="F8E8E2"/>
-                      </a:solidFill>
-                      <a:prstDash val="solid"/>
-                      <a:round/>
-                      <a:headEnd type="none" w="med" len="med"/>
-                      <a:tailEnd type="none" w="med" len="med"/>
+                    <a:lnT w="0" cap="flat" cmpd="sng" algn="ctr">
+                      <a:noFill/>
                     </a:lnT>
                     <a:lnB w="6350" cap="flat" cmpd="sng" algn="ctr">
                       <a:solidFill>
@@ -12114,32 +11119,14 @@
                     </a:p>
                   </a:txBody>
                   <a:tcPr marL="54864" marR="54864" marT="18288" marB="18288" anchor="ctr">
-                    <a:lnL w="6350" cap="flat" cmpd="sng" algn="ctr">
-                      <a:solidFill>
-                        <a:srgbClr val="F8E8E2"/>
-                      </a:solidFill>
-                      <a:prstDash val="solid"/>
-                      <a:round/>
-                      <a:headEnd type="none" w="med" len="med"/>
-                      <a:tailEnd type="none" w="med" len="med"/>
+                    <a:lnL w="0" cap="flat" cmpd="sng" algn="ctr">
+                      <a:noFill/>
                     </a:lnL>
-                    <a:lnR w="6350" cap="flat" cmpd="sng" algn="ctr">
-                      <a:solidFill>
-                        <a:srgbClr val="F8E8E2"/>
-                      </a:solidFill>
-                      <a:prstDash val="solid"/>
-                      <a:round/>
-                      <a:headEnd type="none" w="med" len="med"/>
-                      <a:tailEnd type="none" w="med" len="med"/>
+                    <a:lnR w="0" cap="flat" cmpd="sng" algn="ctr">
+                      <a:noFill/>
                     </a:lnR>
-                    <a:lnT w="6350" cap="flat" cmpd="sng" algn="ctr">
-                      <a:solidFill>
-                        <a:srgbClr val="F8E8E2"/>
-                      </a:solidFill>
-                      <a:prstDash val="solid"/>
-                      <a:round/>
-                      <a:headEnd type="none" w="med" len="med"/>
-                      <a:tailEnd type="none" w="med" len="med"/>
+                    <a:lnT w="0" cap="flat" cmpd="sng" algn="ctr">
+                      <a:noFill/>
                     </a:lnT>
                     <a:lnB w="6350" cap="flat" cmpd="sng" algn="ctr">
                       <a:solidFill>
@@ -12182,32 +11169,14 @@
                     </a:p>
                   </a:txBody>
                   <a:tcPr marL="54864" marR="54864" marT="18288" marB="18288" anchor="ctr">
-                    <a:lnL w="6350" cap="flat" cmpd="sng" algn="ctr">
-                      <a:solidFill>
-                        <a:srgbClr val="F8E8E2"/>
-                      </a:solidFill>
-                      <a:prstDash val="solid"/>
-                      <a:round/>
-                      <a:headEnd type="none" w="med" len="med"/>
-                      <a:tailEnd type="none" w="med" len="med"/>
+                    <a:lnL w="0" cap="flat" cmpd="sng" algn="ctr">
+                      <a:noFill/>
                     </a:lnL>
-                    <a:lnR w="6350" cap="flat" cmpd="sng" algn="ctr">
-                      <a:solidFill>
-                        <a:srgbClr val="F8E8E2"/>
-                      </a:solidFill>
-                      <a:prstDash val="solid"/>
-                      <a:round/>
-                      <a:headEnd type="none" w="med" len="med"/>
-                      <a:tailEnd type="none" w="med" len="med"/>
+                    <a:lnR w="0" cap="flat" cmpd="sng" algn="ctr">
+                      <a:noFill/>
                     </a:lnR>
-                    <a:lnT w="6350" cap="flat" cmpd="sng" algn="ctr">
-                      <a:solidFill>
-                        <a:srgbClr val="F8E8E2"/>
-                      </a:solidFill>
-                      <a:prstDash val="solid"/>
-                      <a:round/>
-                      <a:headEnd type="none" w="med" len="med"/>
-                      <a:tailEnd type="none" w="med" len="med"/>
+                    <a:lnT w="0" cap="flat" cmpd="sng" algn="ctr">
+                      <a:noFill/>
                     </a:lnT>
                     <a:lnB w="6350" cap="flat" cmpd="sng" algn="ctr">
                       <a:solidFill>
@@ -12250,32 +11219,14 @@
                     </a:p>
                   </a:txBody>
                   <a:tcPr marL="54864" marR="54864" marT="18288" marB="18288" anchor="ctr">
-                    <a:lnL w="6350" cap="flat" cmpd="sng" algn="ctr">
-                      <a:solidFill>
-                        <a:srgbClr val="F8E8E2"/>
-                      </a:solidFill>
-                      <a:prstDash val="solid"/>
-                      <a:round/>
-                      <a:headEnd type="none" w="med" len="med"/>
-                      <a:tailEnd type="none" w="med" len="med"/>
+                    <a:lnL w="0" cap="flat" cmpd="sng" algn="ctr">
+                      <a:noFill/>
                     </a:lnL>
-                    <a:lnR w="6350" cap="flat" cmpd="sng" algn="ctr">
-                      <a:solidFill>
-                        <a:srgbClr val="F8E8E2"/>
-                      </a:solidFill>
-                      <a:prstDash val="solid"/>
-                      <a:round/>
-                      <a:headEnd type="none" w="med" len="med"/>
-                      <a:tailEnd type="none" w="med" len="med"/>
+                    <a:lnR w="0" cap="flat" cmpd="sng" algn="ctr">
+                      <a:noFill/>
                     </a:lnR>
-                    <a:lnT w="6350" cap="flat" cmpd="sng" algn="ctr">
-                      <a:solidFill>
-                        <a:srgbClr val="F8E8E2"/>
-                      </a:solidFill>
-                      <a:prstDash val="solid"/>
-                      <a:round/>
-                      <a:headEnd type="none" w="med" len="med"/>
-                      <a:tailEnd type="none" w="med" len="med"/>
+                    <a:lnT w="0" cap="flat" cmpd="sng" algn="ctr">
+                      <a:noFill/>
                     </a:lnT>
                     <a:lnB w="6350" cap="flat" cmpd="sng" algn="ctr">
                       <a:solidFill>
@@ -12320,32 +11271,14 @@
                     </a:p>
                   </a:txBody>
                   <a:tcPr marL="54864" marR="54864" marT="18288" marB="18288" anchor="ctr">
-                    <a:lnL w="6350" cap="flat" cmpd="sng" algn="ctr">
-                      <a:solidFill>
-                        <a:srgbClr val="F8E8E2"/>
-                      </a:solidFill>
-                      <a:prstDash val="solid"/>
-                      <a:round/>
-                      <a:headEnd type="none" w="med" len="med"/>
-                      <a:tailEnd type="none" w="med" len="med"/>
+                    <a:lnL w="0" cap="flat" cmpd="sng" algn="ctr">
+                      <a:noFill/>
                     </a:lnL>
-                    <a:lnR w="6350" cap="flat" cmpd="sng" algn="ctr">
-                      <a:solidFill>
-                        <a:srgbClr val="F8E8E2"/>
-                      </a:solidFill>
-                      <a:prstDash val="solid"/>
-                      <a:round/>
-                      <a:headEnd type="none" w="med" len="med"/>
-                      <a:tailEnd type="none" w="med" len="med"/>
+                    <a:lnR w="0" cap="flat" cmpd="sng" algn="ctr">
+                      <a:noFill/>
                     </a:lnR>
-                    <a:lnT w="6350" cap="flat" cmpd="sng" algn="ctr">
-                      <a:solidFill>
-                        <a:srgbClr val="F8E8E2"/>
-                      </a:solidFill>
-                      <a:prstDash val="solid"/>
-                      <a:round/>
-                      <a:headEnd type="none" w="med" len="med"/>
-                      <a:tailEnd type="none" w="med" len="med"/>
+                    <a:lnT w="0" cap="flat" cmpd="sng" algn="ctr">
+                      <a:noFill/>
                     </a:lnT>
                     <a:lnB w="6350" cap="flat" cmpd="sng" algn="ctr">
                       <a:solidFill>
@@ -12357,7 +11290,7 @@
                       <a:tailEnd type="none" w="med" len="med"/>
                     </a:lnB>
                     <a:solidFill>
-                      <a:srgbClr val="FDF7F5"/>
+                      <a:srgbClr val="FFFFFF"/>
                     </a:solidFill>
                   </a:tcPr>
                 </a:tc>
@@ -12388,32 +11321,14 @@
                     </a:p>
                   </a:txBody>
                   <a:tcPr marL="54864" marR="54864" marT="18288" marB="18288" anchor="ctr">
-                    <a:lnL w="6350" cap="flat" cmpd="sng" algn="ctr">
-                      <a:solidFill>
-                        <a:srgbClr val="F8E8E2"/>
-                      </a:solidFill>
-                      <a:prstDash val="solid"/>
-                      <a:round/>
-                      <a:headEnd type="none" w="med" len="med"/>
-                      <a:tailEnd type="none" w="med" len="med"/>
+                    <a:lnL w="0" cap="flat" cmpd="sng" algn="ctr">
+                      <a:noFill/>
                     </a:lnL>
-                    <a:lnR w="6350" cap="flat" cmpd="sng" algn="ctr">
-                      <a:solidFill>
-                        <a:srgbClr val="F8E8E2"/>
-                      </a:solidFill>
-                      <a:prstDash val="solid"/>
-                      <a:round/>
-                      <a:headEnd type="none" w="med" len="med"/>
-                      <a:tailEnd type="none" w="med" len="med"/>
+                    <a:lnR w="0" cap="flat" cmpd="sng" algn="ctr">
+                      <a:noFill/>
                     </a:lnR>
-                    <a:lnT w="6350" cap="flat" cmpd="sng" algn="ctr">
-                      <a:solidFill>
-                        <a:srgbClr val="F8E8E2"/>
-                      </a:solidFill>
-                      <a:prstDash val="solid"/>
-                      <a:round/>
-                      <a:headEnd type="none" w="med" len="med"/>
-                      <a:tailEnd type="none" w="med" len="med"/>
+                    <a:lnT w="0" cap="flat" cmpd="sng" algn="ctr">
+                      <a:noFill/>
                     </a:lnT>
                     <a:lnB w="6350" cap="flat" cmpd="sng" algn="ctr">
                       <a:solidFill>
@@ -12425,7 +11340,7 @@
                       <a:tailEnd type="none" w="med" len="med"/>
                     </a:lnB>
                     <a:solidFill>
-                      <a:srgbClr val="FDF7F5"/>
+                      <a:srgbClr val="FFFFFF"/>
                     </a:solidFill>
                   </a:tcPr>
                 </a:tc>
@@ -12456,32 +11371,14 @@
                     </a:p>
                   </a:txBody>
                   <a:tcPr marL="54864" marR="54864" marT="18288" marB="18288" anchor="ctr">
-                    <a:lnL w="6350" cap="flat" cmpd="sng" algn="ctr">
-                      <a:solidFill>
-                        <a:srgbClr val="F8E8E2"/>
-                      </a:solidFill>
-                      <a:prstDash val="solid"/>
-                      <a:round/>
-                      <a:headEnd type="none" w="med" len="med"/>
-                      <a:tailEnd type="none" w="med" len="med"/>
+                    <a:lnL w="0" cap="flat" cmpd="sng" algn="ctr">
+                      <a:noFill/>
                     </a:lnL>
-                    <a:lnR w="6350" cap="flat" cmpd="sng" algn="ctr">
-                      <a:solidFill>
-                        <a:srgbClr val="F8E8E2"/>
-                      </a:solidFill>
-                      <a:prstDash val="solid"/>
-                      <a:round/>
-                      <a:headEnd type="none" w="med" len="med"/>
-                      <a:tailEnd type="none" w="med" len="med"/>
+                    <a:lnR w="0" cap="flat" cmpd="sng" algn="ctr">
+                      <a:noFill/>
                     </a:lnR>
-                    <a:lnT w="6350" cap="flat" cmpd="sng" algn="ctr">
-                      <a:solidFill>
-                        <a:srgbClr val="F8E8E2"/>
-                      </a:solidFill>
-                      <a:prstDash val="solid"/>
-                      <a:round/>
-                      <a:headEnd type="none" w="med" len="med"/>
-                      <a:tailEnd type="none" w="med" len="med"/>
+                    <a:lnT w="0" cap="flat" cmpd="sng" algn="ctr">
+                      <a:noFill/>
                     </a:lnT>
                     <a:lnB w="6350" cap="flat" cmpd="sng" algn="ctr">
                       <a:solidFill>
@@ -12493,7 +11390,7 @@
                       <a:tailEnd type="none" w="med" len="med"/>
                     </a:lnB>
                     <a:solidFill>
-                      <a:srgbClr val="FDF7F5"/>
+                      <a:srgbClr val="FFFFFF"/>
                     </a:solidFill>
                   </a:tcPr>
                 </a:tc>
@@ -12524,32 +11421,14 @@
                     </a:p>
                   </a:txBody>
                   <a:tcPr marL="54864" marR="54864" marT="18288" marB="18288" anchor="ctr">
-                    <a:lnL w="6350" cap="flat" cmpd="sng" algn="ctr">
-                      <a:solidFill>
-                        <a:srgbClr val="F8E8E2"/>
-                      </a:solidFill>
-                      <a:prstDash val="solid"/>
-                      <a:round/>
-                      <a:headEnd type="none" w="med" len="med"/>
-                      <a:tailEnd type="none" w="med" len="med"/>
+                    <a:lnL w="0" cap="flat" cmpd="sng" algn="ctr">
+                      <a:noFill/>
                     </a:lnL>
-                    <a:lnR w="6350" cap="flat" cmpd="sng" algn="ctr">
-                      <a:solidFill>
-                        <a:srgbClr val="F8E8E2"/>
-                      </a:solidFill>
-                      <a:prstDash val="solid"/>
-                      <a:round/>
-                      <a:headEnd type="none" w="med" len="med"/>
-                      <a:tailEnd type="none" w="med" len="med"/>
+                    <a:lnR w="0" cap="flat" cmpd="sng" algn="ctr">
+                      <a:noFill/>
                     </a:lnR>
-                    <a:lnT w="6350" cap="flat" cmpd="sng" algn="ctr">
-                      <a:solidFill>
-                        <a:srgbClr val="F8E8E2"/>
-                      </a:solidFill>
-                      <a:prstDash val="solid"/>
-                      <a:round/>
-                      <a:headEnd type="none" w="med" len="med"/>
-                      <a:tailEnd type="none" w="med" len="med"/>
+                    <a:lnT w="0" cap="flat" cmpd="sng" algn="ctr">
+                      <a:noFill/>
                     </a:lnT>
                     <a:lnB w="6350" cap="flat" cmpd="sng" algn="ctr">
                       <a:solidFill>
@@ -12561,7 +11440,7 @@
                       <a:tailEnd type="none" w="med" len="med"/>
                     </a:lnB>
                     <a:solidFill>
-                      <a:srgbClr val="FDF7F5"/>
+                      <a:srgbClr val="FFFFFF"/>
                     </a:solidFill>
                   </a:tcPr>
                 </a:tc>
@@ -12594,32 +11473,14 @@
                     </a:p>
                   </a:txBody>
                   <a:tcPr marL="54864" marR="54864" marT="18288" marB="18288" anchor="ctr">
-                    <a:lnL w="6350" cap="flat" cmpd="sng" algn="ctr">
-                      <a:solidFill>
-                        <a:srgbClr val="F8E8E2"/>
-                      </a:solidFill>
-                      <a:prstDash val="solid"/>
-                      <a:round/>
-                      <a:headEnd type="none" w="med" len="med"/>
-                      <a:tailEnd type="none" w="med" len="med"/>
+                    <a:lnL w="0" cap="flat" cmpd="sng" algn="ctr">
+                      <a:noFill/>
                     </a:lnL>
-                    <a:lnR w="6350" cap="flat" cmpd="sng" algn="ctr">
-                      <a:solidFill>
-                        <a:srgbClr val="F8E8E2"/>
-                      </a:solidFill>
-                      <a:prstDash val="solid"/>
-                      <a:round/>
-                      <a:headEnd type="none" w="med" len="med"/>
-                      <a:tailEnd type="none" w="med" len="med"/>
+                    <a:lnR w="0" cap="flat" cmpd="sng" algn="ctr">
+                      <a:noFill/>
                     </a:lnR>
-                    <a:lnT w="6350" cap="flat" cmpd="sng" algn="ctr">
-                      <a:solidFill>
-                        <a:srgbClr val="F8E8E2"/>
-                      </a:solidFill>
-                      <a:prstDash val="solid"/>
-                      <a:round/>
-                      <a:headEnd type="none" w="med" len="med"/>
-                      <a:tailEnd type="none" w="med" len="med"/>
+                    <a:lnT w="0" cap="flat" cmpd="sng" algn="ctr">
+                      <a:noFill/>
                     </a:lnT>
                     <a:lnB w="6350" cap="flat" cmpd="sng" algn="ctr">
                       <a:solidFill>
@@ -12662,32 +11523,14 @@
                     </a:p>
                   </a:txBody>
                   <a:tcPr marL="54864" marR="54864" marT="18288" marB="18288" anchor="ctr">
-                    <a:lnL w="6350" cap="flat" cmpd="sng" algn="ctr">
-                      <a:solidFill>
-                        <a:srgbClr val="F8E8E2"/>
-                      </a:solidFill>
-                      <a:prstDash val="solid"/>
-                      <a:round/>
-                      <a:headEnd type="none" w="med" len="med"/>
-                      <a:tailEnd type="none" w="med" len="med"/>
+                    <a:lnL w="0" cap="flat" cmpd="sng" algn="ctr">
+                      <a:noFill/>
                     </a:lnL>
-                    <a:lnR w="6350" cap="flat" cmpd="sng" algn="ctr">
-                      <a:solidFill>
-                        <a:srgbClr val="F8E8E2"/>
-                      </a:solidFill>
-                      <a:prstDash val="solid"/>
-                      <a:round/>
-                      <a:headEnd type="none" w="med" len="med"/>
-                      <a:tailEnd type="none" w="med" len="med"/>
+                    <a:lnR w="0" cap="flat" cmpd="sng" algn="ctr">
+                      <a:noFill/>
                     </a:lnR>
-                    <a:lnT w="6350" cap="flat" cmpd="sng" algn="ctr">
-                      <a:solidFill>
-                        <a:srgbClr val="F8E8E2"/>
-                      </a:solidFill>
-                      <a:prstDash val="solid"/>
-                      <a:round/>
-                      <a:headEnd type="none" w="med" len="med"/>
-                      <a:tailEnd type="none" w="med" len="med"/>
+                    <a:lnT w="0" cap="flat" cmpd="sng" algn="ctr">
+                      <a:noFill/>
                     </a:lnT>
                     <a:lnB w="6350" cap="flat" cmpd="sng" algn="ctr">
                       <a:solidFill>
@@ -12730,32 +11573,14 @@
                     </a:p>
                   </a:txBody>
                   <a:tcPr marL="54864" marR="54864" marT="18288" marB="18288" anchor="ctr">
-                    <a:lnL w="6350" cap="flat" cmpd="sng" algn="ctr">
-                      <a:solidFill>
-                        <a:srgbClr val="F8E8E2"/>
-                      </a:solidFill>
-                      <a:prstDash val="solid"/>
-                      <a:round/>
-                      <a:headEnd type="none" w="med" len="med"/>
-                      <a:tailEnd type="none" w="med" len="med"/>
+                    <a:lnL w="0" cap="flat" cmpd="sng" algn="ctr">
+                      <a:noFill/>
                     </a:lnL>
-                    <a:lnR w="6350" cap="flat" cmpd="sng" algn="ctr">
-                      <a:solidFill>
-                        <a:srgbClr val="F8E8E2"/>
-                      </a:solidFill>
-                      <a:prstDash val="solid"/>
-                      <a:round/>
-                      <a:headEnd type="none" w="med" len="med"/>
-                      <a:tailEnd type="none" w="med" len="med"/>
+                    <a:lnR w="0" cap="flat" cmpd="sng" algn="ctr">
+                      <a:noFill/>
                     </a:lnR>
-                    <a:lnT w="6350" cap="flat" cmpd="sng" algn="ctr">
-                      <a:solidFill>
-                        <a:srgbClr val="F8E8E2"/>
-                      </a:solidFill>
-                      <a:prstDash val="solid"/>
-                      <a:round/>
-                      <a:headEnd type="none" w="med" len="med"/>
-                      <a:tailEnd type="none" w="med" len="med"/>
+                    <a:lnT w="0" cap="flat" cmpd="sng" algn="ctr">
+                      <a:noFill/>
                     </a:lnT>
                     <a:lnB w="6350" cap="flat" cmpd="sng" algn="ctr">
                       <a:solidFill>
@@ -12798,32 +11623,14 @@
                     </a:p>
                   </a:txBody>
                   <a:tcPr marL="54864" marR="54864" marT="18288" marB="18288" anchor="ctr">
-                    <a:lnL w="6350" cap="flat" cmpd="sng" algn="ctr">
-                      <a:solidFill>
-                        <a:srgbClr val="F8E8E2"/>
-                      </a:solidFill>
-                      <a:prstDash val="solid"/>
-                      <a:round/>
-                      <a:headEnd type="none" w="med" len="med"/>
-                      <a:tailEnd type="none" w="med" len="med"/>
+                    <a:lnL w="0" cap="flat" cmpd="sng" algn="ctr">
+                      <a:noFill/>
                     </a:lnL>
-                    <a:lnR w="6350" cap="flat" cmpd="sng" algn="ctr">
-                      <a:solidFill>
-                        <a:srgbClr val="F8E8E2"/>
-                      </a:solidFill>
-                      <a:prstDash val="solid"/>
-                      <a:round/>
-                      <a:headEnd type="none" w="med" len="med"/>
-                      <a:tailEnd type="none" w="med" len="med"/>
+                    <a:lnR w="0" cap="flat" cmpd="sng" algn="ctr">
+                      <a:noFill/>
                     </a:lnR>
-                    <a:lnT w="6350" cap="flat" cmpd="sng" algn="ctr">
-                      <a:solidFill>
-                        <a:srgbClr val="F8E8E2"/>
-                      </a:solidFill>
-                      <a:prstDash val="solid"/>
-                      <a:round/>
-                      <a:headEnd type="none" w="med" len="med"/>
-                      <a:tailEnd type="none" w="med" len="med"/>
+                    <a:lnT w="0" cap="flat" cmpd="sng" algn="ctr">
+                      <a:noFill/>
                     </a:lnT>
                     <a:lnB w="6350" cap="flat" cmpd="sng" algn="ctr">
                       <a:solidFill>
@@ -12868,32 +11675,14 @@
                     </a:p>
                   </a:txBody>
                   <a:tcPr marL="54864" marR="54864" marT="18288" marB="18288" anchor="ctr">
-                    <a:lnL w="6350" cap="flat" cmpd="sng" algn="ctr">
-                      <a:solidFill>
-                        <a:srgbClr val="F8E8E2"/>
-                      </a:solidFill>
-                      <a:prstDash val="solid"/>
-                      <a:round/>
-                      <a:headEnd type="none" w="med" len="med"/>
-                      <a:tailEnd type="none" w="med" len="med"/>
+                    <a:lnL w="0" cap="flat" cmpd="sng" algn="ctr">
+                      <a:noFill/>
                     </a:lnL>
-                    <a:lnR w="6350" cap="flat" cmpd="sng" algn="ctr">
-                      <a:solidFill>
-                        <a:srgbClr val="F8E8E2"/>
-                      </a:solidFill>
-                      <a:prstDash val="solid"/>
-                      <a:round/>
-                      <a:headEnd type="none" w="med" len="med"/>
-                      <a:tailEnd type="none" w="med" len="med"/>
+                    <a:lnR w="0" cap="flat" cmpd="sng" algn="ctr">
+                      <a:noFill/>
                     </a:lnR>
-                    <a:lnT w="6350" cap="flat" cmpd="sng" algn="ctr">
-                      <a:solidFill>
-                        <a:srgbClr val="F8E8E2"/>
-                      </a:solidFill>
-                      <a:prstDash val="solid"/>
-                      <a:round/>
-                      <a:headEnd type="none" w="med" len="med"/>
-                      <a:tailEnd type="none" w="med" len="med"/>
+                    <a:lnT w="0" cap="flat" cmpd="sng" algn="ctr">
+                      <a:noFill/>
                     </a:lnT>
                     <a:lnB w="6350" cap="flat" cmpd="sng" algn="ctr">
                       <a:solidFill>
@@ -12905,7 +11694,7 @@
                       <a:tailEnd type="none" w="med" len="med"/>
                     </a:lnB>
                     <a:solidFill>
-                      <a:srgbClr val="FDF7F5"/>
+                      <a:srgbClr val="FFFFFF"/>
                     </a:solidFill>
                   </a:tcPr>
                 </a:tc>
@@ -12936,32 +11725,14 @@
                     </a:p>
                   </a:txBody>
                   <a:tcPr marL="54864" marR="54864" marT="18288" marB="18288" anchor="ctr">
-                    <a:lnL w="6350" cap="flat" cmpd="sng" algn="ctr">
-                      <a:solidFill>
-                        <a:srgbClr val="F8E8E2"/>
-                      </a:solidFill>
-                      <a:prstDash val="solid"/>
-                      <a:round/>
-                      <a:headEnd type="none" w="med" len="med"/>
-                      <a:tailEnd type="none" w="med" len="med"/>
+                    <a:lnL w="0" cap="flat" cmpd="sng" algn="ctr">
+                      <a:noFill/>
                     </a:lnL>
-                    <a:lnR w="6350" cap="flat" cmpd="sng" algn="ctr">
-                      <a:solidFill>
-                        <a:srgbClr val="F8E8E2"/>
-                      </a:solidFill>
-                      <a:prstDash val="solid"/>
-                      <a:round/>
-                      <a:headEnd type="none" w="med" len="med"/>
-                      <a:tailEnd type="none" w="med" len="med"/>
+                    <a:lnR w="0" cap="flat" cmpd="sng" algn="ctr">
+                      <a:noFill/>
                     </a:lnR>
-                    <a:lnT w="6350" cap="flat" cmpd="sng" algn="ctr">
-                      <a:solidFill>
-                        <a:srgbClr val="F8E8E2"/>
-                      </a:solidFill>
-                      <a:prstDash val="solid"/>
-                      <a:round/>
-                      <a:headEnd type="none" w="med" len="med"/>
-                      <a:tailEnd type="none" w="med" len="med"/>
+                    <a:lnT w="0" cap="flat" cmpd="sng" algn="ctr">
+                      <a:noFill/>
                     </a:lnT>
                     <a:lnB w="6350" cap="flat" cmpd="sng" algn="ctr">
                       <a:solidFill>
@@ -12973,7 +11744,7 @@
                       <a:tailEnd type="none" w="med" len="med"/>
                     </a:lnB>
                     <a:solidFill>
-                      <a:srgbClr val="FDF7F5"/>
+                      <a:srgbClr val="FFFFFF"/>
                     </a:solidFill>
                   </a:tcPr>
                 </a:tc>
@@ -13004,32 +11775,14 @@
                     </a:p>
                   </a:txBody>
                   <a:tcPr marL="54864" marR="54864" marT="18288" marB="18288" anchor="ctr">
-                    <a:lnL w="6350" cap="flat" cmpd="sng" algn="ctr">
-                      <a:solidFill>
-                        <a:srgbClr val="F8E8E2"/>
-                      </a:solidFill>
-                      <a:prstDash val="solid"/>
-                      <a:round/>
-                      <a:headEnd type="none" w="med" len="med"/>
-                      <a:tailEnd type="none" w="med" len="med"/>
+                    <a:lnL w="0" cap="flat" cmpd="sng" algn="ctr">
+                      <a:noFill/>
                     </a:lnL>
-                    <a:lnR w="6350" cap="flat" cmpd="sng" algn="ctr">
-                      <a:solidFill>
-                        <a:srgbClr val="F8E8E2"/>
-                      </a:solidFill>
-                      <a:prstDash val="solid"/>
-                      <a:round/>
-                      <a:headEnd type="none" w="med" len="med"/>
-                      <a:tailEnd type="none" w="med" len="med"/>
+                    <a:lnR w="0" cap="flat" cmpd="sng" algn="ctr">
+                      <a:noFill/>
                     </a:lnR>
-                    <a:lnT w="6350" cap="flat" cmpd="sng" algn="ctr">
-                      <a:solidFill>
-                        <a:srgbClr val="F8E8E2"/>
-                      </a:solidFill>
-                      <a:prstDash val="solid"/>
-                      <a:round/>
-                      <a:headEnd type="none" w="med" len="med"/>
-                      <a:tailEnd type="none" w="med" len="med"/>
+                    <a:lnT w="0" cap="flat" cmpd="sng" algn="ctr">
+                      <a:noFill/>
                     </a:lnT>
                     <a:lnB w="6350" cap="flat" cmpd="sng" algn="ctr">
                       <a:solidFill>
@@ -13041,7 +11794,7 @@
                       <a:tailEnd type="none" w="med" len="med"/>
                     </a:lnB>
                     <a:solidFill>
-                      <a:srgbClr val="FDF7F5"/>
+                      <a:srgbClr val="FFFFFF"/>
                     </a:solidFill>
                   </a:tcPr>
                 </a:tc>
@@ -13072,32 +11825,14 @@
                     </a:p>
                   </a:txBody>
                   <a:tcPr marL="54864" marR="54864" marT="18288" marB="18288" anchor="ctr">
-                    <a:lnL w="6350" cap="flat" cmpd="sng" algn="ctr">
-                      <a:solidFill>
-                        <a:srgbClr val="F8E8E2"/>
-                      </a:solidFill>
-                      <a:prstDash val="solid"/>
-                      <a:round/>
-                      <a:headEnd type="none" w="med" len="med"/>
-                      <a:tailEnd type="none" w="med" len="med"/>
+                    <a:lnL w="0" cap="flat" cmpd="sng" algn="ctr">
+                      <a:noFill/>
                     </a:lnL>
-                    <a:lnR w="6350" cap="flat" cmpd="sng" algn="ctr">
-                      <a:solidFill>
-                        <a:srgbClr val="F8E8E2"/>
-                      </a:solidFill>
-                      <a:prstDash val="solid"/>
-                      <a:round/>
-                      <a:headEnd type="none" w="med" len="med"/>
-                      <a:tailEnd type="none" w="med" len="med"/>
+                    <a:lnR w="0" cap="flat" cmpd="sng" algn="ctr">
+                      <a:noFill/>
                     </a:lnR>
-                    <a:lnT w="6350" cap="flat" cmpd="sng" algn="ctr">
-                      <a:solidFill>
-                        <a:srgbClr val="F8E8E2"/>
-                      </a:solidFill>
-                      <a:prstDash val="solid"/>
-                      <a:round/>
-                      <a:headEnd type="none" w="med" len="med"/>
-                      <a:tailEnd type="none" w="med" len="med"/>
+                    <a:lnT w="0" cap="flat" cmpd="sng" algn="ctr">
+                      <a:noFill/>
                     </a:lnT>
                     <a:lnB w="6350" cap="flat" cmpd="sng" algn="ctr">
                       <a:solidFill>
@@ -13109,7 +11844,7 @@
                       <a:tailEnd type="none" w="med" len="med"/>
                     </a:lnB>
                     <a:solidFill>
-                      <a:srgbClr val="FDF7F5"/>
+                      <a:srgbClr val="FFFFFF"/>
                     </a:solidFill>
                   </a:tcPr>
                 </a:tc>
@@ -13142,32 +11877,14 @@
                     </a:p>
                   </a:txBody>
                   <a:tcPr marL="54864" marR="54864" marT="18288" marB="18288" anchor="ctr">
-                    <a:lnL w="6350" cap="flat" cmpd="sng" algn="ctr">
-                      <a:solidFill>
-                        <a:srgbClr val="F8E8E2"/>
-                      </a:solidFill>
-                      <a:prstDash val="solid"/>
-                      <a:round/>
-                      <a:headEnd type="none" w="med" len="med"/>
-                      <a:tailEnd type="none" w="med" len="med"/>
+                    <a:lnL w="0" cap="flat" cmpd="sng" algn="ctr">
+                      <a:noFill/>
                     </a:lnL>
-                    <a:lnR w="6350" cap="flat" cmpd="sng" algn="ctr">
-                      <a:solidFill>
-                        <a:srgbClr val="F8E8E2"/>
-                      </a:solidFill>
-                      <a:prstDash val="solid"/>
-                      <a:round/>
-                      <a:headEnd type="none" w="med" len="med"/>
-                      <a:tailEnd type="none" w="med" len="med"/>
+                    <a:lnR w="0" cap="flat" cmpd="sng" algn="ctr">
+                      <a:noFill/>
                     </a:lnR>
-                    <a:lnT w="6350" cap="flat" cmpd="sng" algn="ctr">
-                      <a:solidFill>
-                        <a:srgbClr val="F8E8E2"/>
-                      </a:solidFill>
-                      <a:prstDash val="solid"/>
-                      <a:round/>
-                      <a:headEnd type="none" w="med" len="med"/>
-                      <a:tailEnd type="none" w="med" len="med"/>
+                    <a:lnT w="0" cap="flat" cmpd="sng" algn="ctr">
+                      <a:noFill/>
                     </a:lnT>
                     <a:lnB w="6350" cap="flat" cmpd="sng" algn="ctr">
                       <a:solidFill>
@@ -13210,32 +11927,14 @@
                     </a:p>
                   </a:txBody>
                   <a:tcPr marL="54864" marR="54864" marT="18288" marB="18288" anchor="ctr">
-                    <a:lnL w="6350" cap="flat" cmpd="sng" algn="ctr">
-                      <a:solidFill>
-                        <a:srgbClr val="F8E8E2"/>
-                      </a:solidFill>
-                      <a:prstDash val="solid"/>
-                      <a:round/>
-                      <a:headEnd type="none" w="med" len="med"/>
-                      <a:tailEnd type="none" w="med" len="med"/>
+                    <a:lnL w="0" cap="flat" cmpd="sng" algn="ctr">
+                      <a:noFill/>
                     </a:lnL>
-                    <a:lnR w="6350" cap="flat" cmpd="sng" algn="ctr">
-                      <a:solidFill>
-                        <a:srgbClr val="F8E8E2"/>
-                      </a:solidFill>
-                      <a:prstDash val="solid"/>
-                      <a:round/>
-                      <a:headEnd type="none" w="med" len="med"/>
-                      <a:tailEnd type="none" w="med" len="med"/>
+                    <a:lnR w="0" cap="flat" cmpd="sng" algn="ctr">
+                      <a:noFill/>
                     </a:lnR>
-                    <a:lnT w="6350" cap="flat" cmpd="sng" algn="ctr">
-                      <a:solidFill>
-                        <a:srgbClr val="F8E8E2"/>
-                      </a:solidFill>
-                      <a:prstDash val="solid"/>
-                      <a:round/>
-                      <a:headEnd type="none" w="med" len="med"/>
-                      <a:tailEnd type="none" w="med" len="med"/>
+                    <a:lnT w="0" cap="flat" cmpd="sng" algn="ctr">
+                      <a:noFill/>
                     </a:lnT>
                     <a:lnB w="6350" cap="flat" cmpd="sng" algn="ctr">
                       <a:solidFill>
@@ -13278,32 +11977,14 @@
                     </a:p>
                   </a:txBody>
                   <a:tcPr marL="54864" marR="54864" marT="18288" marB="18288" anchor="ctr">
-                    <a:lnL w="6350" cap="flat" cmpd="sng" algn="ctr">
-                      <a:solidFill>
-                        <a:srgbClr val="F8E8E2"/>
-                      </a:solidFill>
-                      <a:prstDash val="solid"/>
-                      <a:round/>
-                      <a:headEnd type="none" w="med" len="med"/>
-                      <a:tailEnd type="none" w="med" len="med"/>
+                    <a:lnL w="0" cap="flat" cmpd="sng" algn="ctr">
+                      <a:noFill/>
                     </a:lnL>
-                    <a:lnR w="6350" cap="flat" cmpd="sng" algn="ctr">
-                      <a:solidFill>
-                        <a:srgbClr val="F8E8E2"/>
-                      </a:solidFill>
-                      <a:prstDash val="solid"/>
-                      <a:round/>
-                      <a:headEnd type="none" w="med" len="med"/>
-                      <a:tailEnd type="none" w="med" len="med"/>
+                    <a:lnR w="0" cap="flat" cmpd="sng" algn="ctr">
+                      <a:noFill/>
                     </a:lnR>
-                    <a:lnT w="6350" cap="flat" cmpd="sng" algn="ctr">
-                      <a:solidFill>
-                        <a:srgbClr val="F8E8E2"/>
-                      </a:solidFill>
-                      <a:prstDash val="solid"/>
-                      <a:round/>
-                      <a:headEnd type="none" w="med" len="med"/>
-                      <a:tailEnd type="none" w="med" len="med"/>
+                    <a:lnT w="0" cap="flat" cmpd="sng" algn="ctr">
+                      <a:noFill/>
                     </a:lnT>
                     <a:lnB w="6350" cap="flat" cmpd="sng" algn="ctr">
                       <a:solidFill>
@@ -13346,32 +12027,14 @@
                     </a:p>
                   </a:txBody>
                   <a:tcPr marL="54864" marR="54864" marT="18288" marB="18288" anchor="ctr">
-                    <a:lnL w="6350" cap="flat" cmpd="sng" algn="ctr">
-                      <a:solidFill>
-                        <a:srgbClr val="F8E8E2"/>
-                      </a:solidFill>
-                      <a:prstDash val="solid"/>
-                      <a:round/>
-                      <a:headEnd type="none" w="med" len="med"/>
-                      <a:tailEnd type="none" w="med" len="med"/>
+                    <a:lnL w="0" cap="flat" cmpd="sng" algn="ctr">
+                      <a:noFill/>
                     </a:lnL>
-                    <a:lnR w="6350" cap="flat" cmpd="sng" algn="ctr">
-                      <a:solidFill>
-                        <a:srgbClr val="F8E8E2"/>
-                      </a:solidFill>
-                      <a:prstDash val="solid"/>
-                      <a:round/>
-                      <a:headEnd type="none" w="med" len="med"/>
-                      <a:tailEnd type="none" w="med" len="med"/>
+                    <a:lnR w="0" cap="flat" cmpd="sng" algn="ctr">
+                      <a:noFill/>
                     </a:lnR>
-                    <a:lnT w="6350" cap="flat" cmpd="sng" algn="ctr">
-                      <a:solidFill>
-                        <a:srgbClr val="F8E8E2"/>
-                      </a:solidFill>
-                      <a:prstDash val="solid"/>
-                      <a:round/>
-                      <a:headEnd type="none" w="med" len="med"/>
-                      <a:tailEnd type="none" w="med" len="med"/>
+                    <a:lnT w="0" cap="flat" cmpd="sng" algn="ctr">
+                      <a:noFill/>
                     </a:lnT>
                     <a:lnB w="6350" cap="flat" cmpd="sng" algn="ctr">
                       <a:solidFill>
@@ -13416,27 +12079,15 @@
                     </a:p>
                   </a:txBody>
                   <a:tcPr marL="54864" marR="54864" marT="18288" marB="18288" anchor="ctr">
-                    <a:lnL w="6350" cap="flat" cmpd="sng" algn="ctr">
+                    <a:lnL w="0" cap="flat" cmpd="sng" algn="ctr">
+                      <a:noFill/>
+                    </a:lnL>
+                    <a:lnR w="0" cap="flat" cmpd="sng" algn="ctr">
+                      <a:noFill/>
+                    </a:lnR>
+                    <a:lnT w="15875" cap="flat" cmpd="sng" algn="ctr">
                       <a:solidFill>
-                        <a:srgbClr val="F8E8E2"/>
-                      </a:solidFill>
-                      <a:prstDash val="solid"/>
-                      <a:round/>
-                      <a:headEnd type="none" w="med" len="med"/>
-                      <a:tailEnd type="none" w="med" len="med"/>
-                    </a:lnL>
-                    <a:lnR w="6350" cap="flat" cmpd="sng" algn="ctr">
-                      <a:solidFill>
-                        <a:srgbClr val="F8E8E2"/>
-                      </a:solidFill>
-                      <a:prstDash val="solid"/>
-                      <a:round/>
-                      <a:headEnd type="none" w="med" len="med"/>
-                      <a:tailEnd type="none" w="med" len="med"/>
-                    </a:lnR>
-                    <a:lnT w="6350" cap="flat" cmpd="sng" algn="ctr">
-                      <a:solidFill>
-                        <a:srgbClr val="F8E8E2"/>
+                        <a:srgbClr val="C2410C"/>
                       </a:solidFill>
                       <a:prstDash val="solid"/>
                       <a:round/>
@@ -13453,7 +12104,7 @@
                       <a:tailEnd type="none" w="med" len="med"/>
                     </a:lnB>
                     <a:solidFill>
-                      <a:srgbClr val="F8E8E2"/>
+                      <a:srgbClr val="FFFFFF"/>
                     </a:solidFill>
                   </a:tcPr>
                 </a:tc>
@@ -13484,27 +12135,15 @@
                     </a:p>
                   </a:txBody>
                   <a:tcPr marL="54864" marR="54864" marT="18288" marB="18288" anchor="ctr">
-                    <a:lnL w="6350" cap="flat" cmpd="sng" algn="ctr">
+                    <a:lnL w="0" cap="flat" cmpd="sng" algn="ctr">
+                      <a:noFill/>
+                    </a:lnL>
+                    <a:lnR w="0" cap="flat" cmpd="sng" algn="ctr">
+                      <a:noFill/>
+                    </a:lnR>
+                    <a:lnT w="15875" cap="flat" cmpd="sng" algn="ctr">
                       <a:solidFill>
-                        <a:srgbClr val="F8E8E2"/>
-                      </a:solidFill>
-                      <a:prstDash val="solid"/>
-                      <a:round/>
-                      <a:headEnd type="none" w="med" len="med"/>
-                      <a:tailEnd type="none" w="med" len="med"/>
-                    </a:lnL>
-                    <a:lnR w="6350" cap="flat" cmpd="sng" algn="ctr">
-                      <a:solidFill>
-                        <a:srgbClr val="F8E8E2"/>
-                      </a:solidFill>
-                      <a:prstDash val="solid"/>
-                      <a:round/>
-                      <a:headEnd type="none" w="med" len="med"/>
-                      <a:tailEnd type="none" w="med" len="med"/>
-                    </a:lnR>
-                    <a:lnT w="6350" cap="flat" cmpd="sng" algn="ctr">
-                      <a:solidFill>
-                        <a:srgbClr val="F8E8E2"/>
+                        <a:srgbClr val="C2410C"/>
                       </a:solidFill>
                       <a:prstDash val="solid"/>
                       <a:round/>
@@ -13521,7 +12160,7 @@
                       <a:tailEnd type="none" w="med" len="med"/>
                     </a:lnB>
                     <a:solidFill>
-                      <a:srgbClr val="F8E8E2"/>
+                      <a:srgbClr val="FFFFFF"/>
                     </a:solidFill>
                   </a:tcPr>
                 </a:tc>
@@ -13534,7 +12173,7 @@
                         <a:buNone/>
                       </a:pPr>
                       <a:r>
-                        <a:rPr lang="en-US" sz="1100" dirty="0">
+                        <a:rPr lang="en-US" sz="1100" b="1" dirty="0">
                           <a:solidFill>
                             <a:srgbClr val="1A1A1A"/>
                           </a:solidFill>
@@ -13552,27 +12191,15 @@
                     </a:p>
                   </a:txBody>
                   <a:tcPr marL="54864" marR="54864" marT="18288" marB="18288" anchor="ctr">
-                    <a:lnL w="6350" cap="flat" cmpd="sng" algn="ctr">
+                    <a:lnL w="0" cap="flat" cmpd="sng" algn="ctr">
+                      <a:noFill/>
+                    </a:lnL>
+                    <a:lnR w="0" cap="flat" cmpd="sng" algn="ctr">
+                      <a:noFill/>
+                    </a:lnR>
+                    <a:lnT w="15875" cap="flat" cmpd="sng" algn="ctr">
                       <a:solidFill>
-                        <a:srgbClr val="F8E8E2"/>
-                      </a:solidFill>
-                      <a:prstDash val="solid"/>
-                      <a:round/>
-                      <a:headEnd type="none" w="med" len="med"/>
-                      <a:tailEnd type="none" w="med" len="med"/>
-                    </a:lnL>
-                    <a:lnR w="6350" cap="flat" cmpd="sng" algn="ctr">
-                      <a:solidFill>
-                        <a:srgbClr val="F8E8E2"/>
-                      </a:solidFill>
-                      <a:prstDash val="solid"/>
-                      <a:round/>
-                      <a:headEnd type="none" w="med" len="med"/>
-                      <a:tailEnd type="none" w="med" len="med"/>
-                    </a:lnR>
-                    <a:lnT w="6350" cap="flat" cmpd="sng" algn="ctr">
-                      <a:solidFill>
-                        <a:srgbClr val="F8E8E2"/>
+                        <a:srgbClr val="C2410C"/>
                       </a:solidFill>
                       <a:prstDash val="solid"/>
                       <a:round/>
@@ -13589,7 +12216,7 @@
                       <a:tailEnd type="none" w="med" len="med"/>
                     </a:lnB>
                     <a:solidFill>
-                      <a:srgbClr val="F8E8E2"/>
+                      <a:srgbClr val="FFFFFF"/>
                     </a:solidFill>
                   </a:tcPr>
                 </a:tc>
@@ -13620,27 +12247,15 @@
                     </a:p>
                   </a:txBody>
                   <a:tcPr marL="54864" marR="54864" marT="18288" marB="18288" anchor="ctr">
-                    <a:lnL w="6350" cap="flat" cmpd="sng" algn="ctr">
+                    <a:lnL w="0" cap="flat" cmpd="sng" algn="ctr">
+                      <a:noFill/>
+                    </a:lnL>
+                    <a:lnR w="0" cap="flat" cmpd="sng" algn="ctr">
+                      <a:noFill/>
+                    </a:lnR>
+                    <a:lnT w="15875" cap="flat" cmpd="sng" algn="ctr">
                       <a:solidFill>
-                        <a:srgbClr val="F8E8E2"/>
-                      </a:solidFill>
-                      <a:prstDash val="solid"/>
-                      <a:round/>
-                      <a:headEnd type="none" w="med" len="med"/>
-                      <a:tailEnd type="none" w="med" len="med"/>
-                    </a:lnL>
-                    <a:lnR w="6350" cap="flat" cmpd="sng" algn="ctr">
-                      <a:solidFill>
-                        <a:srgbClr val="F8E8E2"/>
-                      </a:solidFill>
-                      <a:prstDash val="solid"/>
-                      <a:round/>
-                      <a:headEnd type="none" w="med" len="med"/>
-                      <a:tailEnd type="none" w="med" len="med"/>
-                    </a:lnR>
-                    <a:lnT w="6350" cap="flat" cmpd="sng" algn="ctr">
-                      <a:solidFill>
-                        <a:srgbClr val="F8E8E2"/>
+                        <a:srgbClr val="C2410C"/>
                       </a:solidFill>
                       <a:prstDash val="solid"/>
                       <a:round/>
@@ -13657,7 +12272,7 @@
                       <a:tailEnd type="none" w="med" len="med"/>
                     </a:lnB>
                     <a:solidFill>
-                      <a:srgbClr val="F8E8E2"/>
+                      <a:srgbClr val="FFFFFF"/>
                     </a:solidFill>
                   </a:tcPr>
                 </a:tc>
@@ -13693,7 +12308,7 @@
             <a:r>
               <a:rPr lang="en-US" sz="1000" dirty="0">
                 <a:solidFill>
-                  <a:srgbClr val="5A6672"/>
+                  <a:srgbClr val="5E5E5E"/>
                 </a:solidFill>
                 <a:latin typeface="Arial" pitchFamily="34" charset="0"/>
                 <a:ea typeface="Arial" pitchFamily="34" charset="-122"/>
@@ -13732,7 +12347,7 @@
             <a:r>
               <a:rPr lang="en-US" sz="800" dirty="0">
                 <a:solidFill>
-                  <a:srgbClr val="5A6672"/>
+                  <a:srgbClr val="5E5E5E"/>
                 </a:solidFill>
                 <a:latin typeface="Arial" pitchFamily="34" charset="0"/>
                 <a:ea typeface="Arial" pitchFamily="34" charset="-122"/>
@@ -13771,7 +12386,7 @@
             <a:r>
               <a:rPr lang="en-US" sz="800" dirty="0">
                 <a:solidFill>
-                  <a:srgbClr val="5A6672"/>
+                  <a:srgbClr val="5E5E5E"/>
                 </a:solidFill>
                 <a:latin typeface="Arial" pitchFamily="34" charset="0"/>
                 <a:ea typeface="Arial" pitchFamily="34" charset="-122"/>
@@ -13881,7 +12496,7 @@
             <a:r>
               <a:rPr lang="en-US" sz="1400" dirty="0">
                 <a:solidFill>
-                  <a:srgbClr val="5A6672"/>
+                  <a:srgbClr val="5E5E5E"/>
                 </a:solidFill>
                 <a:latin typeface="Arial" pitchFamily="34" charset="0"/>
                 <a:ea typeface="Arial" pitchFamily="34" charset="-122"/>
@@ -14025,7 +12640,7 @@
             <a:r>
               <a:rPr lang="en-US" sz="1200" dirty="0">
                 <a:solidFill>
-                  <a:srgbClr val="5A6672"/>
+                  <a:srgbClr val="5E5E5E"/>
                 </a:solidFill>
                 <a:latin typeface="Arial" pitchFamily="34" charset="0"/>
                 <a:ea typeface="Arial" pitchFamily="34" charset="-122"/>
@@ -14103,7 +12718,7 @@
             <a:r>
               <a:rPr lang="en-US" sz="1100" dirty="0">
                 <a:solidFill>
-                  <a:srgbClr val="5A6672"/>
+                  <a:srgbClr val="5E5E5E"/>
                 </a:solidFill>
                 <a:latin typeface="Arial" pitchFamily="34" charset="0"/>
                 <a:ea typeface="Arial" pitchFamily="34" charset="-122"/>
@@ -14169,7 +12784,7 @@
             <a:r>
               <a:rPr lang="en-US" sz="1200" dirty="0">
                 <a:solidFill>
-                  <a:srgbClr val="5A6672"/>
+                  <a:srgbClr val="5E5E5E"/>
                 </a:solidFill>
                 <a:latin typeface="Arial" pitchFamily="34" charset="0"/>
                 <a:ea typeface="Arial" pitchFamily="34" charset="-122"/>
@@ -14206,7 +12821,7 @@
               <a:buNone/>
             </a:pPr>
             <a:r>
-              <a:rPr lang="en-US" sz="2150" b="1" dirty="0">
+              <a:rPr lang="en-US" sz="2400" b="1" dirty="0">
                 <a:solidFill>
                   <a:srgbClr val="1A1A1A"/>
                 </a:solidFill>
@@ -14214,9 +12829,9 @@
                 <a:ea typeface="Arial" pitchFamily="34" charset="-122"/>
                 <a:cs typeface="Arial" pitchFamily="34" charset="-120"/>
               </a:rPr>
-              <a:t>Low-to-mid $460,000s</a:t>
-            </a:r>
-            <a:endParaRPr lang="en-US" sz="2150" dirty="0"/>
+              <a:t>About $451,000</a:t>
+            </a:r>
+            <a:endParaRPr lang="en-US" sz="2400" dirty="0"/>
           </a:p>
         </p:txBody>
       </p:sp>
@@ -14247,7 +12862,7 @@
             <a:r>
               <a:rPr lang="en-US" sz="1100" dirty="0">
                 <a:solidFill>
-                  <a:srgbClr val="5A6672"/>
+                  <a:srgbClr val="5E5E5E"/>
                 </a:solidFill>
                 <a:latin typeface="Arial" pitchFamily="34" charset="0"/>
                 <a:ea typeface="Arial" pitchFamily="34" charset="-122"/>
@@ -14286,7 +12901,7 @@
             <a:r>
               <a:rPr lang="en-US" sz="800" dirty="0">
                 <a:solidFill>
-                  <a:srgbClr val="5A6672"/>
+                  <a:srgbClr val="5E5E5E"/>
                 </a:solidFill>
                 <a:latin typeface="Arial" pitchFamily="34" charset="0"/>
                 <a:ea typeface="Arial" pitchFamily="34" charset="-122"/>
@@ -14325,7 +12940,7 @@
             <a:r>
               <a:rPr lang="en-US" sz="800" dirty="0">
                 <a:solidFill>
-                  <a:srgbClr val="5A6672"/>
+                  <a:srgbClr val="5E5E5E"/>
                 </a:solidFill>
                 <a:latin typeface="Arial" pitchFamily="34" charset="0"/>
                 <a:ea typeface="Arial" pitchFamily="34" charset="-122"/>
@@ -14435,7 +13050,7 @@
             <a:r>
               <a:rPr lang="en-US" sz="1300" dirty="0">
                 <a:solidFill>
-                  <a:srgbClr val="5A6672"/>
+                  <a:srgbClr val="5E5E5E"/>
                 </a:solidFill>
                 <a:latin typeface="Arial" pitchFamily="34" charset="0"/>
                 <a:ea typeface="Arial" pitchFamily="34" charset="-122"/>
@@ -15248,13 +13863,13 @@
             <a:r>
               <a:rPr lang="en-US" sz="1100" dirty="0">
                 <a:solidFill>
-                  <a:srgbClr val="5A6672"/>
-                </a:solidFill>
-                <a:latin typeface="Arial" pitchFamily="34" charset="0"/>
-                <a:ea typeface="Arial" pitchFamily="34" charset="-122"/>
-                <a:cs typeface="Arial" pitchFamily="34" charset="-120"/>
-              </a:rPr>
-              <a:t>Adjustments cover size, larger corner lot, market since the sale, documented recent systems, renovation, partial update vs. full renovation, larger canal lot and seller credits.</a:t>
+                  <a:srgbClr val="5E5E5E"/>
+                </a:solidFill>
+                <a:latin typeface="Arial" pitchFamily="34" charset="0"/>
+                <a:ea typeface="Arial" pitchFamily="34" charset="-122"/>
+                <a:cs typeface="Arial" pitchFamily="34" charset="-120"/>
+              </a:rPr>
+              <a:t>Adjustments cover size, lot, market changes since each sale, roof and systems, condition and updates, view or water and seller credits.</a:t>
             </a:r>
             <a:endParaRPr lang="en-US" sz="1100" dirty="0"/>
           </a:p>
@@ -15287,7 +13902,7 @@
             <a:r>
               <a:rPr lang="en-US" sz="800" dirty="0">
                 <a:solidFill>
-                  <a:srgbClr val="5A6672"/>
+                  <a:srgbClr val="5E5E5E"/>
                 </a:solidFill>
                 <a:latin typeface="Arial" pitchFamily="34" charset="0"/>
                 <a:ea typeface="Arial" pitchFamily="34" charset="-122"/>
@@ -15326,7 +13941,7 @@
             <a:r>
               <a:rPr lang="en-US" sz="800" dirty="0">
                 <a:solidFill>
-                  <a:srgbClr val="5A6672"/>
+                  <a:srgbClr val="5E5E5E"/>
                 </a:solidFill>
                 <a:latin typeface="Arial" pitchFamily="34" charset="0"/>
                 <a:ea typeface="Arial" pitchFamily="34" charset="-122"/>
@@ -15524,7 +14139,7 @@
             <a:r>
               <a:rPr lang="en-US" sz="1200" dirty="0">
                 <a:solidFill>
-                  <a:srgbClr val="5A6672"/>
+                  <a:srgbClr val="5E5E5E"/>
                 </a:solidFill>
                 <a:latin typeface="Arial" pitchFamily="34" charset="0"/>
                 <a:ea typeface="Arial" pitchFamily="34" charset="-122"/>
@@ -15651,7 +14266,7 @@
             <a:r>
               <a:rPr lang="en-US" sz="1200" dirty="0">
                 <a:solidFill>
-                  <a:srgbClr val="5A6672"/>
+                  <a:srgbClr val="5E5E5E"/>
                 </a:solidFill>
                 <a:latin typeface="Arial" pitchFamily="34" charset="0"/>
                 <a:ea typeface="Arial" pitchFamily="34" charset="-122"/>
@@ -15778,7 +14393,7 @@
             <a:r>
               <a:rPr lang="en-US" sz="1200" dirty="0">
                 <a:solidFill>
-                  <a:srgbClr val="5A6672"/>
+                  <a:srgbClr val="5E5E5E"/>
                 </a:solidFill>
                 <a:latin typeface="Arial" pitchFamily="34" charset="0"/>
                 <a:ea typeface="Arial" pitchFamily="34" charset="-122"/>
@@ -15905,7 +14520,7 @@
             <a:r>
               <a:rPr lang="en-US" sz="1200" dirty="0">
                 <a:solidFill>
-                  <a:srgbClr val="5A6672"/>
+                  <a:srgbClr val="5E5E5E"/>
                 </a:solidFill>
                 <a:latin typeface="Arial" pitchFamily="34" charset="0"/>
                 <a:ea typeface="Arial" pitchFamily="34" charset="-122"/>
@@ -16264,7 +14879,7 @@
             <a:r>
               <a:rPr lang="en-US" sz="800" dirty="0">
                 <a:solidFill>
-                  <a:srgbClr val="5A6672"/>
+                  <a:srgbClr val="5E5E5E"/>
                 </a:solidFill>
                 <a:latin typeface="Arial" pitchFamily="34" charset="0"/>
                 <a:ea typeface="Arial" pitchFamily="34" charset="-122"/>
@@ -16303,7 +14918,7 @@
             <a:r>
               <a:rPr lang="en-US" sz="800" dirty="0">
                 <a:solidFill>
-                  <a:srgbClr val="5A6672"/>
+                  <a:srgbClr val="5E5E5E"/>
                 </a:solidFill>
                 <a:latin typeface="Arial" pitchFamily="34" charset="0"/>
                 <a:ea typeface="Arial" pitchFamily="34" charset="-122"/>
@@ -16413,7 +15028,7 @@
             <a:r>
               <a:rPr lang="en-US" sz="1300" dirty="0">
                 <a:solidFill>
-                  <a:srgbClr val="5A6672"/>
+                  <a:srgbClr val="5E5E5E"/>
                 </a:solidFill>
                 <a:latin typeface="Arial" pitchFamily="34" charset="0"/>
                 <a:ea typeface="Arial" pitchFamily="34" charset="-122"/>
@@ -16500,7 +15115,7 @@
             <a:r>
               <a:rPr lang="en-US" sz="1000" dirty="0">
                 <a:solidFill>
-                  <a:srgbClr val="5A6672"/>
+                  <a:srgbClr val="5E5E5E"/>
                 </a:solidFill>
                 <a:latin typeface="Arial" pitchFamily="34" charset="0"/>
                 <a:ea typeface="Arial" pitchFamily="34" charset="-122"/>
@@ -16562,7 +15177,7 @@
             <a:r>
               <a:rPr lang="en-US" sz="1000" dirty="0">
                 <a:solidFill>
-                  <a:srgbClr val="5A6672"/>
+                  <a:srgbClr val="5E5E5E"/>
                 </a:solidFill>
                 <a:latin typeface="Arial" pitchFamily="34" charset="0"/>
                 <a:ea typeface="Arial" pitchFamily="34" charset="-122"/>
@@ -16624,7 +15239,7 @@
             <a:r>
               <a:rPr lang="en-US" sz="1000" dirty="0">
                 <a:solidFill>
-                  <a:srgbClr val="5A6672"/>
+                  <a:srgbClr val="5E5E5E"/>
                 </a:solidFill>
                 <a:latin typeface="Arial" pitchFamily="34" charset="0"/>
                 <a:ea typeface="Arial" pitchFamily="34" charset="-122"/>
@@ -16686,7 +15301,7 @@
             <a:r>
               <a:rPr lang="en-US" sz="1000" dirty="0">
                 <a:solidFill>
-                  <a:srgbClr val="5A6672"/>
+                  <a:srgbClr val="5E5E5E"/>
                 </a:solidFill>
                 <a:latin typeface="Arial" pitchFamily="34" charset="0"/>
                 <a:ea typeface="Arial" pitchFamily="34" charset="-122"/>
@@ -16748,7 +15363,7 @@
             <a:r>
               <a:rPr lang="en-US" sz="1000" dirty="0">
                 <a:solidFill>
-                  <a:srgbClr val="5A6672"/>
+                  <a:srgbClr val="5E5E5E"/>
                 </a:solidFill>
                 <a:latin typeface="Arial" pitchFamily="34" charset="0"/>
                 <a:ea typeface="Arial" pitchFamily="34" charset="-122"/>
@@ -16810,7 +15425,7 @@
             <a:r>
               <a:rPr lang="en-US" sz="1000" dirty="0">
                 <a:solidFill>
-                  <a:srgbClr val="5A6672"/>
+                  <a:srgbClr val="5E5E5E"/>
                 </a:solidFill>
                 <a:latin typeface="Arial" pitchFamily="34" charset="0"/>
                 <a:ea typeface="Arial" pitchFamily="34" charset="-122"/>
@@ -16950,7 +15565,7 @@
             <a:r>
               <a:rPr lang="en-US" sz="950" dirty="0">
                 <a:solidFill>
-                  <a:srgbClr val="5A6672"/>
+                  <a:srgbClr val="5E5E5E"/>
                 </a:solidFill>
                 <a:latin typeface="Arial" pitchFamily="34" charset="0"/>
                 <a:ea typeface="Arial" pitchFamily="34" charset="-122"/>
@@ -17092,7 +15707,7 @@
             <a:r>
               <a:rPr lang="en-US" sz="950" dirty="0">
                 <a:solidFill>
-                  <a:srgbClr val="5A6672"/>
+                  <a:srgbClr val="5E5E5E"/>
                 </a:solidFill>
                 <a:latin typeface="Arial" pitchFamily="34" charset="0"/>
                 <a:ea typeface="Arial" pitchFamily="34" charset="-122"/>
@@ -17234,7 +15849,7 @@
             <a:r>
               <a:rPr lang="en-US" sz="950" dirty="0">
                 <a:solidFill>
-                  <a:srgbClr val="5A6672"/>
+                  <a:srgbClr val="5E5E5E"/>
                 </a:solidFill>
                 <a:latin typeface="Arial" pitchFamily="34" charset="0"/>
                 <a:ea typeface="Arial" pitchFamily="34" charset="-122"/>
@@ -17376,7 +15991,7 @@
             <a:r>
               <a:rPr lang="en-US" sz="950" dirty="0">
                 <a:solidFill>
-                  <a:srgbClr val="5A6672"/>
+                  <a:srgbClr val="5E5E5E"/>
                 </a:solidFill>
                 <a:latin typeface="Arial" pitchFamily="34" charset="0"/>
                 <a:ea typeface="Arial" pitchFamily="34" charset="-122"/>
@@ -17518,7 +16133,7 @@
             <a:r>
               <a:rPr lang="en-US" sz="950" dirty="0">
                 <a:solidFill>
-                  <a:srgbClr val="5A6672"/>
+                  <a:srgbClr val="5E5E5E"/>
                 </a:solidFill>
                 <a:latin typeface="Arial" pitchFamily="34" charset="0"/>
                 <a:ea typeface="Arial" pitchFamily="34" charset="-122"/>
@@ -17674,7 +16289,7 @@
             <a:r>
               <a:rPr lang="en-US" sz="800" dirty="0">
                 <a:solidFill>
-                  <a:srgbClr val="5A6672"/>
+                  <a:srgbClr val="5E5E5E"/>
                 </a:solidFill>
                 <a:latin typeface="Arial" pitchFamily="34" charset="0"/>
                 <a:ea typeface="Arial" pitchFamily="34" charset="-122"/>
@@ -17713,7 +16328,7 @@
             <a:r>
               <a:rPr lang="en-US" sz="800" dirty="0">
                 <a:solidFill>
-                  <a:srgbClr val="5A6672"/>
+                  <a:srgbClr val="5E5E5E"/>
                 </a:solidFill>
                 <a:latin typeface="Arial" pitchFamily="34" charset="0"/>
                 <a:ea typeface="Arial" pitchFamily="34" charset="-122"/>
@@ -17796,15 +16411,79 @@
           </a:p>
         </p:txBody>
       </p:sp>
+      <p:sp>
+        <p:nvSpPr>
+          <p:cNvPr id="3" name="Shape 1"/>
+          <p:cNvSpPr/>
+          <p:nvPr/>
+        </p:nvSpPr>
+        <p:spPr>
+          <a:xfrm>
+            <a:off x="1150315" y="2303961"/>
+            <a:ext cx="5557266" cy="195943"/>
+          </a:xfrm>
+          <a:prstGeom prst="rect">
+            <a:avLst/>
+          </a:prstGeom>
+          <a:solidFill>
+            <a:srgbClr val="FBF2EE"/>
+          </a:solidFill>
+          <a:ln w="12700">
+            <a:solidFill>
+              <a:srgbClr val="FBF2EE"/>
+            </a:solidFill>
+            <a:prstDash val="solid"/>
+          </a:ln>
+        </p:spPr>
+      </p:sp>
+      <p:sp>
+        <p:nvSpPr>
+          <p:cNvPr id="4" name="Text 2"/>
+          <p:cNvSpPr txBox="1"/>
+          <p:nvPr/>
+        </p:nvSpPr>
+        <p:spPr>
+          <a:xfrm>
+            <a:off x="1223467" y="2331393"/>
+            <a:ext cx="2743200" cy="201168"/>
+          </a:xfrm>
+          <a:prstGeom prst="rect">
+            <a:avLst/>
+          </a:prstGeom>
+          <a:noFill/>
+          <a:ln/>
+        </p:spPr>
+        <p:txBody>
+          <a:bodyPr wrap="square" lIns="0" tIns="0" rIns="0" bIns="0" rtlCol="0" anchor="ctr"/>
+          <a:lstStyle/>
+          <a:p>
+            <a:pPr indent="0" marL="0">
+              <a:buNone/>
+            </a:pPr>
+            <a:r>
+              <a:rPr lang="en-US" sz="900" b="1" dirty="0">
+                <a:solidFill>
+                  <a:srgbClr val="A23200"/>
+                </a:solidFill>
+                <a:latin typeface="Arial" pitchFamily="34" charset="0"/>
+                <a:ea typeface="Arial" pitchFamily="34" charset="-122"/>
+                <a:cs typeface="Arial" pitchFamily="34" charset="-120"/>
+              </a:rPr>
+              <a:t>Supported Range $455K–$480K</a:t>
+            </a:r>
+            <a:endParaRPr lang="en-US" sz="900" dirty="0"/>
+          </a:p>
+        </p:txBody>
+      </p:sp>
       <p:graphicFrame>
         <p:nvGraphicFramePr>
-          <p:cNvPr id="3" name="Chart 0" descr=""/>
+          <p:cNvPr id="5" name="Chart 0" descr=""/>
           <p:cNvGraphicFramePr/>
           <p:nvPr/>
         </p:nvGraphicFramePr>
         <p:xfrm>
           <a:off x="365760" y="868680"/>
-          <a:ext cx="6537960" cy="3931920"/>
+          <a:ext cx="6537960" cy="3429000"/>
         </p:xfrm>
         <a:graphic xmlns:a="http://schemas.openxmlformats.org/drawingml/2006/main">
           <a:graphicData uri="http://schemas.openxmlformats.org/drawingml/2006/chart">
@@ -17814,7 +16493,325 @@
       </p:graphicFrame>
       <p:sp>
         <p:nvSpPr>
-          <p:cNvPr id="4" name="Shape 1"/>
+          <p:cNvPr id="6" name="Shape 3"/>
+          <p:cNvSpPr/>
+          <p:nvPr/>
+        </p:nvSpPr>
+        <p:spPr>
+          <a:xfrm>
+            <a:off x="621792" y="4434840"/>
+            <a:ext cx="91440" cy="91440"/>
+          </a:xfrm>
+          <a:prstGeom prst="ellipse">
+            <a:avLst/>
+          </a:prstGeom>
+          <a:solidFill>
+            <a:srgbClr val="DBDBDB"/>
+          </a:solidFill>
+          <a:ln w="6350">
+            <a:solidFill>
+              <a:srgbClr val="DBDBDB"/>
+            </a:solidFill>
+            <a:prstDash val="solid"/>
+          </a:ln>
+        </p:spPr>
+      </p:sp>
+      <p:sp>
+        <p:nvSpPr>
+          <p:cNvPr id="7" name="Text 4"/>
+          <p:cNvSpPr txBox="1"/>
+          <p:nvPr/>
+        </p:nvSpPr>
+        <p:spPr>
+          <a:xfrm>
+            <a:off x="841248" y="4407408"/>
+            <a:ext cx="673364" cy="164592"/>
+          </a:xfrm>
+          <a:prstGeom prst="rect">
+            <a:avLst/>
+          </a:prstGeom>
+          <a:noFill/>
+          <a:ln/>
+        </p:spPr>
+        <p:txBody>
+          <a:bodyPr wrap="square" lIns="0" tIns="0" rIns="0" bIns="0" rtlCol="0" anchor="ctr"/>
+          <a:lstStyle/>
+          <a:p>
+            <a:pPr indent="0" marL="0">
+              <a:buNone/>
+            </a:pPr>
+            <a:r>
+              <a:rPr lang="en-US" sz="900" dirty="0">
+                <a:solidFill>
+                  <a:srgbClr val="1A1A1A"/>
+                </a:solidFill>
+                <a:latin typeface="Arial" pitchFamily="34" charset="0"/>
+                <a:ea typeface="Arial" pitchFamily="34" charset="-122"/>
+                <a:cs typeface="Arial" pitchFamily="34" charset="-120"/>
+              </a:rPr>
+              <a:t>Other Sales</a:t>
+            </a:r>
+            <a:endParaRPr lang="en-US" sz="900" dirty="0"/>
+          </a:p>
+        </p:txBody>
+      </p:sp>
+      <p:sp>
+        <p:nvSpPr>
+          <p:cNvPr id="8" name="Shape 5"/>
+          <p:cNvSpPr/>
+          <p:nvPr/>
+        </p:nvSpPr>
+        <p:spPr>
+          <a:xfrm>
+            <a:off x="1756928" y="4421124"/>
+            <a:ext cx="118872" cy="118872"/>
+          </a:xfrm>
+          <a:prstGeom prst="ellipse">
+            <a:avLst/>
+          </a:prstGeom>
+          <a:solidFill>
+            <a:srgbClr val="A6A6A6"/>
+          </a:solidFill>
+          <a:ln w="6350">
+            <a:solidFill>
+              <a:srgbClr val="A6A6A6"/>
+            </a:solidFill>
+            <a:prstDash val="solid"/>
+          </a:ln>
+        </p:spPr>
+      </p:sp>
+      <p:sp>
+        <p:nvSpPr>
+          <p:cNvPr id="9" name="Text 6"/>
+          <p:cNvSpPr txBox="1"/>
+          <p:nvPr/>
+        </p:nvSpPr>
+        <p:spPr>
+          <a:xfrm>
+            <a:off x="1990100" y="4407408"/>
+            <a:ext cx="765728" cy="164592"/>
+          </a:xfrm>
+          <a:prstGeom prst="rect">
+            <a:avLst/>
+          </a:prstGeom>
+          <a:noFill/>
+          <a:ln/>
+        </p:spPr>
+        <p:txBody>
+          <a:bodyPr wrap="square" lIns="0" tIns="0" rIns="0" bIns="0" rtlCol="0" anchor="ctr"/>
+          <a:lstStyle/>
+          <a:p>
+            <a:pPr indent="0" marL="0">
+              <a:buNone/>
+            </a:pPr>
+            <a:r>
+              <a:rPr lang="en-US" sz="900" dirty="0">
+                <a:solidFill>
+                  <a:srgbClr val="1A1A1A"/>
+                </a:solidFill>
+                <a:latin typeface="Arial" pitchFamily="34" charset="0"/>
+                <a:ea typeface="Arial" pitchFamily="34" charset="-122"/>
+                <a:cs typeface="Arial" pitchFamily="34" charset="-120"/>
+              </a:rPr>
+              <a:t>For Sale Now</a:t>
+            </a:r>
+            <a:endParaRPr lang="en-US" sz="900" dirty="0"/>
+          </a:p>
+        </p:txBody>
+      </p:sp>
+      <p:sp>
+        <p:nvSpPr>
+          <p:cNvPr id="10" name="Shape 7"/>
+          <p:cNvSpPr/>
+          <p:nvPr/>
+        </p:nvSpPr>
+        <p:spPr>
+          <a:xfrm>
+            <a:off x="2938708" y="4480560"/>
+            <a:ext cx="237744" cy="0"/>
+          </a:xfrm>
+          <a:prstGeom prst="line">
+            <a:avLst/>
+          </a:prstGeom>
+          <a:noFill/>
+          <a:ln w="15875">
+            <a:solidFill>
+              <a:srgbClr val="5E5E5E"/>
+            </a:solidFill>
+            <a:prstDash val="dash"/>
+          </a:ln>
+        </p:spPr>
+      </p:sp>
+      <p:sp>
+        <p:nvSpPr>
+          <p:cNvPr id="11" name="Text 8"/>
+          <p:cNvSpPr txBox="1"/>
+          <p:nvPr/>
+        </p:nvSpPr>
+        <p:spPr>
+          <a:xfrm>
+            <a:off x="3231316" y="4407408"/>
+            <a:ext cx="904451" cy="164592"/>
+          </a:xfrm>
+          <a:prstGeom prst="rect">
+            <a:avLst/>
+          </a:prstGeom>
+          <a:noFill/>
+          <a:ln/>
+        </p:spPr>
+        <p:txBody>
+          <a:bodyPr wrap="square" lIns="0" tIns="0" rIns="0" bIns="0" rtlCol="0" anchor="ctr"/>
+          <a:lstStyle/>
+          <a:p>
+            <a:pPr indent="0" marL="0">
+              <a:buNone/>
+            </a:pPr>
+            <a:r>
+              <a:rPr lang="en-US" sz="900" dirty="0">
+                <a:solidFill>
+                  <a:srgbClr val="1A1A1A"/>
+                </a:solidFill>
+                <a:latin typeface="Arial" pitchFamily="34" charset="0"/>
+                <a:ea typeface="Arial" pitchFamily="34" charset="-122"/>
+                <a:cs typeface="Arial" pitchFamily="34" charset="-120"/>
+              </a:rPr>
+              <a:t>Size-Only Trend</a:t>
+            </a:r>
+            <a:endParaRPr lang="en-US" sz="900" dirty="0"/>
+          </a:p>
+        </p:txBody>
+      </p:sp>
+      <p:sp>
+        <p:nvSpPr>
+          <p:cNvPr id="12" name="Shape 9"/>
+          <p:cNvSpPr/>
+          <p:nvPr/>
+        </p:nvSpPr>
+        <p:spPr>
+          <a:xfrm>
+            <a:off x="4378083" y="4421124"/>
+            <a:ext cx="118872" cy="118872"/>
+          </a:xfrm>
+          <a:prstGeom prst="ellipse">
+            <a:avLst/>
+          </a:prstGeom>
+          <a:solidFill>
+            <a:srgbClr val="C2410C"/>
+          </a:solidFill>
+          <a:ln w="6350">
+            <a:solidFill>
+              <a:srgbClr val="C2410C"/>
+            </a:solidFill>
+            <a:prstDash val="solid"/>
+          </a:ln>
+        </p:spPr>
+      </p:sp>
+      <p:sp>
+        <p:nvSpPr>
+          <p:cNvPr id="13" name="Text 10"/>
+          <p:cNvSpPr txBox="1"/>
+          <p:nvPr/>
+        </p:nvSpPr>
+        <p:spPr>
+          <a:xfrm>
+            <a:off x="4611255" y="4407408"/>
+            <a:ext cx="1023442" cy="164592"/>
+          </a:xfrm>
+          <a:prstGeom prst="rect">
+            <a:avLst/>
+          </a:prstGeom>
+          <a:noFill/>
+          <a:ln/>
+        </p:spPr>
+        <p:txBody>
+          <a:bodyPr wrap="square" lIns="0" tIns="0" rIns="0" bIns="0" rtlCol="0" anchor="ctr"/>
+          <a:lstStyle/>
+          <a:p>
+            <a:pPr indent="0" marL="0">
+              <a:buNone/>
+            </a:pPr>
+            <a:r>
+              <a:rPr lang="en-US" sz="900" dirty="0">
+                <a:solidFill>
+                  <a:srgbClr val="1A1A1A"/>
+                </a:solidFill>
+                <a:latin typeface="Arial" pitchFamily="34" charset="0"/>
+                <a:ea typeface="Arial" pitchFamily="34" charset="-122"/>
+                <a:cs typeface="Arial" pitchFamily="34" charset="-120"/>
+              </a:rPr>
+              <a:t>Comparable Sales</a:t>
+            </a:r>
+            <a:endParaRPr lang="en-US" sz="900" dirty="0"/>
+          </a:p>
+        </p:txBody>
+      </p:sp>
+      <p:sp>
+        <p:nvSpPr>
+          <p:cNvPr id="14" name="Shape 11"/>
+          <p:cNvSpPr/>
+          <p:nvPr/>
+        </p:nvSpPr>
+        <p:spPr>
+          <a:xfrm>
+            <a:off x="5863297" y="4407408"/>
+            <a:ext cx="146304" cy="146304"/>
+          </a:xfrm>
+          <a:prstGeom prst="diamond">
+            <a:avLst/>
+          </a:prstGeom>
+          <a:solidFill>
+            <a:srgbClr val="1A1A1A"/>
+          </a:solidFill>
+          <a:ln w="6350">
+            <a:solidFill>
+              <a:srgbClr val="1A1A1A"/>
+            </a:solidFill>
+            <a:prstDash val="solid"/>
+          </a:ln>
+        </p:spPr>
+      </p:sp>
+      <p:sp>
+        <p:nvSpPr>
+          <p:cNvPr id="15" name="Text 12"/>
+          <p:cNvSpPr txBox="1"/>
+          <p:nvPr/>
+        </p:nvSpPr>
+        <p:spPr>
+          <a:xfrm>
+            <a:off x="6110185" y="4407408"/>
+            <a:ext cx="1518901" cy="164592"/>
+          </a:xfrm>
+          <a:prstGeom prst="rect">
+            <a:avLst/>
+          </a:prstGeom>
+          <a:noFill/>
+          <a:ln/>
+        </p:spPr>
+        <p:txBody>
+          <a:bodyPr wrap="square" lIns="0" tIns="0" rIns="0" bIns="0" rtlCol="0" anchor="ctr"/>
+          <a:lstStyle/>
+          <a:p>
+            <a:pPr indent="0" marL="0">
+              <a:buNone/>
+            </a:pPr>
+            <a:r>
+              <a:rPr lang="en-US" sz="900" dirty="0">
+                <a:solidFill>
+                  <a:srgbClr val="1A1A1A"/>
+                </a:solidFill>
+                <a:latin typeface="Arial" pitchFamily="34" charset="0"/>
+                <a:ea typeface="Arial" pitchFamily="34" charset="-122"/>
+                <a:cs typeface="Arial" pitchFamily="34" charset="-120"/>
+              </a:rPr>
+              <a:t>Your Home, Recommended</a:t>
+            </a:r>
+            <a:endParaRPr lang="en-US" sz="900" dirty="0"/>
+          </a:p>
+        </p:txBody>
+      </p:sp>
+      <p:sp>
+        <p:nvSpPr>
+          <p:cNvPr id="16" name="Shape 13"/>
           <p:cNvSpPr/>
           <p:nvPr/>
         </p:nvSpPr>
@@ -17839,7 +16836,7 @@
       </p:sp>
       <p:sp>
         <p:nvSpPr>
-          <p:cNvPr id="5" name="Text 2"/>
+          <p:cNvPr id="17" name="Text 14"/>
           <p:cNvSpPr txBox="1"/>
           <p:nvPr/>
         </p:nvSpPr>
@@ -17878,7 +16875,7 @@
       </p:sp>
       <p:sp>
         <p:nvSpPr>
-          <p:cNvPr id="6" name="Text 3"/>
+          <p:cNvPr id="18" name="Text 15"/>
           <p:cNvSpPr txBox="1"/>
           <p:nvPr/>
         </p:nvSpPr>
@@ -17903,7 +16900,7 @@
             <a:r>
               <a:rPr lang="en-US" sz="1100" dirty="0">
                 <a:solidFill>
-                  <a:srgbClr val="5A6672"/>
+                  <a:srgbClr val="5E5E5E"/>
                 </a:solidFill>
                 <a:latin typeface="Arial" pitchFamily="34" charset="0"/>
                 <a:ea typeface="Arial" pitchFamily="34" charset="-122"/>
@@ -17917,7 +16914,7 @@
       </p:sp>
       <p:sp>
         <p:nvSpPr>
-          <p:cNvPr id="7" name="Text 4"/>
+          <p:cNvPr id="19" name="Text 16"/>
           <p:cNvSpPr txBox="1"/>
           <p:nvPr/>
         </p:nvSpPr>
@@ -17942,7 +16939,7 @@
             <a:r>
               <a:rPr lang="en-US" sz="800" dirty="0">
                 <a:solidFill>
-                  <a:srgbClr val="5A6672"/>
+                  <a:srgbClr val="5E5E5E"/>
                 </a:solidFill>
                 <a:latin typeface="Arial" pitchFamily="34" charset="0"/>
                 <a:ea typeface="Arial" pitchFamily="34" charset="-122"/>
@@ -17956,7 +16953,7 @@
       </p:sp>
       <p:sp>
         <p:nvSpPr>
-          <p:cNvPr id="8" name="Text 5"/>
+          <p:cNvPr id="20" name="Text 17"/>
           <p:cNvSpPr txBox="1"/>
           <p:nvPr/>
         </p:nvSpPr>
@@ -17981,7 +16978,7 @@
             <a:r>
               <a:rPr lang="en-US" sz="800" dirty="0">
                 <a:solidFill>
-                  <a:srgbClr val="5A6672"/>
+                  <a:srgbClr val="5E5E5E"/>
                 </a:solidFill>
                 <a:latin typeface="Arial" pitchFamily="34" charset="0"/>
                 <a:ea typeface="Arial" pitchFamily="34" charset="-122"/>
@@ -18091,7 +17088,7 @@
             <a:r>
               <a:rPr lang="en-US" sz="1300" dirty="0">
                 <a:solidFill>
-                  <a:srgbClr val="5A6672"/>
+                  <a:srgbClr val="5E5E5E"/>
                 </a:solidFill>
                 <a:latin typeface="Arial" pitchFamily="34" charset="0"/>
                 <a:ea typeface="Arial" pitchFamily="34" charset="-122"/>
@@ -18245,7 +17242,7 @@
             <a:r>
               <a:rPr lang="en-US" sz="900" dirty="0">
                 <a:solidFill>
-                  <a:srgbClr val="5A6672"/>
+                  <a:srgbClr val="5E5E5E"/>
                 </a:solidFill>
                 <a:latin typeface="Arial" pitchFamily="34" charset="0"/>
                 <a:ea typeface="Arial" pitchFamily="34" charset="-122"/>
@@ -18284,13 +17281,13 @@
             <a:r>
               <a:rPr lang="en-US" sz="1500" dirty="0">
                 <a:solidFill>
-                  <a:srgbClr val="5A6672"/>
-                </a:solidFill>
-                <a:latin typeface="Arial" pitchFamily="34" charset="0"/>
-                <a:ea typeface="Arial" pitchFamily="34" charset="-122"/>
-                <a:cs typeface="Arial" pitchFamily="34" charset="-120"/>
-              </a:rPr>
-              <a:t>100%</a:t>
+                  <a:srgbClr val="5E5E5E"/>
+                </a:solidFill>
+                <a:latin typeface="Arial" pitchFamily="34" charset="0"/>
+                <a:ea typeface="Arial" pitchFamily="34" charset="-122"/>
+                <a:cs typeface="Arial" pitchFamily="34" charset="-120"/>
+              </a:rPr>
+              <a:t>98.7%</a:t>
             </a:r>
             <a:endParaRPr lang="en-US" sz="1500" dirty="0"/>
           </a:p>
@@ -18368,7 +17365,7 @@
                 <a:ea typeface="Arial" pitchFamily="34" charset="-122"/>
                 <a:cs typeface="Arial" pitchFamily="34" charset="-120"/>
               </a:rPr>
-              <a:t>95.2%</a:t>
+              <a:t>93.9%</a:t>
             </a:r>
             <a:endParaRPr lang="en-US" sz="2800" dirty="0"/>
           </a:p>
@@ -18516,7 +17513,7 @@
             <a:r>
               <a:rPr lang="en-US" sz="900" dirty="0">
                 <a:solidFill>
-                  <a:srgbClr val="5A6672"/>
+                  <a:srgbClr val="5E5E5E"/>
                 </a:solidFill>
                 <a:latin typeface="Arial" pitchFamily="34" charset="0"/>
                 <a:ea typeface="Arial" pitchFamily="34" charset="-122"/>
@@ -18555,7 +17552,7 @@
             <a:r>
               <a:rPr lang="en-US" sz="1500" dirty="0">
                 <a:solidFill>
-                  <a:srgbClr val="5A6672"/>
+                  <a:srgbClr val="5E5E5E"/>
                 </a:solidFill>
                 <a:latin typeface="Arial" pitchFamily="34" charset="0"/>
                 <a:ea typeface="Arial" pitchFamily="34" charset="-122"/>
@@ -18787,7 +17784,7 @@
             <a:r>
               <a:rPr lang="en-US" sz="900" dirty="0">
                 <a:solidFill>
-                  <a:srgbClr val="5A6672"/>
+                  <a:srgbClr val="5E5E5E"/>
                 </a:solidFill>
                 <a:latin typeface="Arial" pitchFamily="34" charset="0"/>
                 <a:ea typeface="Arial" pitchFamily="34" charset="-122"/>
@@ -18826,7 +17823,7 @@
             <a:r>
               <a:rPr lang="en-US" sz="1500" dirty="0">
                 <a:solidFill>
-                  <a:srgbClr val="5A6672"/>
+                  <a:srgbClr val="5E5E5E"/>
                 </a:solidFill>
                 <a:latin typeface="Arial" pitchFamily="34" charset="0"/>
                 <a:ea typeface="Arial" pitchFamily="34" charset="-122"/>
@@ -19058,7 +18055,7 @@
             <a:r>
               <a:rPr lang="en-US" sz="900" dirty="0">
                 <a:solidFill>
-                  <a:srgbClr val="5A6672"/>
+                  <a:srgbClr val="5E5E5E"/>
                 </a:solidFill>
                 <a:latin typeface="Arial" pitchFamily="34" charset="0"/>
                 <a:ea typeface="Arial" pitchFamily="34" charset="-122"/>
@@ -19097,7 +18094,7 @@
             <a:r>
               <a:rPr lang="en-US" sz="1500" dirty="0">
                 <a:solidFill>
-                  <a:srgbClr val="5A6672"/>
+                  <a:srgbClr val="5E5E5E"/>
                 </a:solidFill>
                 <a:latin typeface="Arial" pitchFamily="34" charset="0"/>
                 <a:ea typeface="Arial" pitchFamily="34" charset="-122"/>
@@ -19253,7 +18250,7 @@
             <a:r>
               <a:rPr lang="en-US" sz="800" dirty="0">
                 <a:solidFill>
-                  <a:srgbClr val="5A6672"/>
+                  <a:srgbClr val="5E5E5E"/>
                 </a:solidFill>
                 <a:latin typeface="Arial" pitchFamily="34" charset="0"/>
                 <a:ea typeface="Arial" pitchFamily="34" charset="-122"/>
@@ -19292,7 +18289,7 @@
             <a:r>
               <a:rPr lang="en-US" sz="800" dirty="0">
                 <a:solidFill>
-                  <a:srgbClr val="5A6672"/>
+                  <a:srgbClr val="5E5E5E"/>
                 </a:solidFill>
                 <a:latin typeface="Arial" pitchFamily="34" charset="0"/>
                 <a:ea typeface="Arial" pitchFamily="34" charset="-122"/>
@@ -19402,7 +18399,7 @@
             <a:r>
               <a:rPr lang="en-US" sz="1300" dirty="0">
                 <a:solidFill>
-                  <a:srgbClr val="5A6672"/>
+                  <a:srgbClr val="5E5E5E"/>
                 </a:solidFill>
                 <a:latin typeface="Arial" pitchFamily="34" charset="0"/>
                 <a:ea typeface="Arial" pitchFamily="34" charset="-122"/>
@@ -20050,7 +19047,7 @@
             <a:r>
               <a:rPr lang="en-US" sz="800" dirty="0">
                 <a:solidFill>
-                  <a:srgbClr val="5A6672"/>
+                  <a:srgbClr val="5E5E5E"/>
                 </a:solidFill>
                 <a:latin typeface="Arial" pitchFamily="34" charset="0"/>
                 <a:ea typeface="Arial" pitchFamily="34" charset="-122"/>
@@ -20089,7 +19086,7 @@
             <a:r>
               <a:rPr lang="en-US" sz="800" dirty="0">
                 <a:solidFill>
-                  <a:srgbClr val="5A6672"/>
+                  <a:srgbClr val="5E5E5E"/>
                 </a:solidFill>
                 <a:latin typeface="Arial" pitchFamily="34" charset="0"/>
                 <a:ea typeface="Arial" pitchFamily="34" charset="-122"/>
@@ -20265,7 +19262,7 @@
             <a:r>
               <a:rPr lang="en-US" sz="1100" dirty="0">
                 <a:solidFill>
-                  <a:srgbClr val="5A6672"/>
+                  <a:srgbClr val="5E5E5E"/>
                 </a:solidFill>
                 <a:latin typeface="Arial" pitchFamily="34" charset="0"/>
                 <a:ea typeface="Arial" pitchFamily="34" charset="-122"/>
@@ -20343,7 +19340,7 @@
             <a:r>
               <a:rPr lang="en-US" sz="1100" dirty="0">
                 <a:solidFill>
-                  <a:srgbClr val="5A6672"/>
+                  <a:srgbClr val="5E5E5E"/>
                 </a:solidFill>
                 <a:latin typeface="Arial" pitchFamily="34" charset="0"/>
                 <a:ea typeface="Arial" pitchFamily="34" charset="-122"/>
@@ -20388,7 +19385,7 @@
                 <a:ea typeface="Arial" pitchFamily="34" charset="-122"/>
                 <a:cs typeface="Arial" pitchFamily="34" charset="-120"/>
               </a:rPr>
-              <a:t>$463,000</a:t>
+              <a:t>$451,000</a:t>
             </a:r>
             <a:endParaRPr lang="en-US" sz="1300" dirty="0"/>
           </a:p>
@@ -20421,7 +19418,7 @@
             <a:r>
               <a:rPr lang="en-US" sz="1050" dirty="0">
                 <a:solidFill>
-                  <a:srgbClr val="5A6672"/>
+                  <a:srgbClr val="5E5E5E"/>
                 </a:solidFill>
                 <a:latin typeface="Arial" pitchFamily="34" charset="0"/>
                 <a:ea typeface="Arial" pitchFamily="34" charset="-122"/>
@@ -20766,7 +19763,7 @@
                 <a:ea typeface="Arial" pitchFamily="34" charset="-122"/>
                 <a:cs typeface="Arial" pitchFamily="34" charset="-120"/>
               </a:rPr>
-              <a:t>$462,000</a:t>
+              <a:t>$451,000</a:t>
             </a:r>
             <a:endParaRPr lang="en-US" sz="1300" dirty="0"/>
           </a:p>
@@ -20982,7 +19979,7 @@
             <a:r>
               <a:rPr lang="en-US" sz="1100" dirty="0">
                 <a:solidFill>
-                  <a:srgbClr val="5A6672"/>
+                  <a:srgbClr val="5E5E5E"/>
                 </a:solidFill>
                 <a:latin typeface="Arial" pitchFamily="34" charset="0"/>
                 <a:ea typeface="Arial" pitchFamily="34" charset="-122"/>
@@ -21060,7 +20057,7 @@
             <a:r>
               <a:rPr lang="en-US" sz="1100" dirty="0">
                 <a:solidFill>
-                  <a:srgbClr val="5A6672"/>
+                  <a:srgbClr val="5E5E5E"/>
                 </a:solidFill>
                 <a:latin typeface="Arial" pitchFamily="34" charset="0"/>
                 <a:ea typeface="Arial" pitchFamily="34" charset="-122"/>
@@ -21105,7 +20102,7 @@
                 <a:ea typeface="Arial" pitchFamily="34" charset="-122"/>
                 <a:cs typeface="Arial" pitchFamily="34" charset="-120"/>
               </a:rPr>
-              <a:t>$460,000</a:t>
+              <a:t>$436,500</a:t>
             </a:r>
             <a:endParaRPr lang="en-US" sz="1300" dirty="0"/>
           </a:p>
@@ -21138,7 +20135,7 @@
             <a:r>
               <a:rPr lang="en-US" sz="1100" dirty="0">
                 <a:solidFill>
-                  <a:srgbClr val="5A6672"/>
+                  <a:srgbClr val="5E5E5E"/>
                 </a:solidFill>
                 <a:latin typeface="Arial" pitchFamily="34" charset="0"/>
                 <a:ea typeface="Arial" pitchFamily="34" charset="-122"/>
@@ -21294,7 +20291,7 @@
             <a:r>
               <a:rPr lang="en-US" sz="800" dirty="0">
                 <a:solidFill>
-                  <a:srgbClr val="5A6672"/>
+                  <a:srgbClr val="5E5E5E"/>
                 </a:solidFill>
                 <a:latin typeface="Arial" pitchFamily="34" charset="0"/>
                 <a:ea typeface="Arial" pitchFamily="34" charset="-122"/>
@@ -21333,7 +20330,7 @@
             <a:r>
               <a:rPr lang="en-US" sz="800" dirty="0">
                 <a:solidFill>
-                  <a:srgbClr val="5A6672"/>
+                  <a:srgbClr val="5E5E5E"/>
                 </a:solidFill>
                 <a:latin typeface="Arial" pitchFamily="34" charset="0"/>
                 <a:ea typeface="Arial" pitchFamily="34" charset="-122"/>

--- a/samples/seller-cma/517-Larkwood-Ave-Listing-Presentation.pptx
+++ b/samples/seller-cma/517-Larkwood-Ave-Listing-Presentation.pptx
@@ -2966,13 +2966,13 @@
                 <c:formatCode>General</c:formatCode>
                 <c:ptCount val="3"/>
                 <c:pt idx="0">
-                  <c:v>409698</c:v>
+                  <c:v>423768</c:v>
                 </c:pt>
                 <c:pt idx="1">
-                  <c:v>410742</c:v>
+                  <c:v>424812</c:v>
                 </c:pt>
                 <c:pt idx="2">
-                  <c:v>402442</c:v>
+                  <c:v>419796</c:v>
                 </c:pt>
               </c:numCache>
             </c:numRef>
@@ -3607,7 +3607,7 @@
           <a:p>
             <a:r>
               <a:rPr lang="en-US" dirty="0"/>
-              <a:t>Before mortgage payoff. Brokerage is a 2.5% + 2.5% placeholder until we finalize the listing agreement.</a:t>
+              <a:t>Before mortgage payoff. Brokerage is assumed at 2.5% + 2.5% until we finalize the listing agreement.</a:t>
             </a:r>
             <a:endParaRPr lang="en-US" dirty="0"/>
           </a:p>
@@ -5539,7 +5539,7 @@
                 <a:ea typeface="Arial" pitchFamily="34" charset="-122"/>
                 <a:cs typeface="Arial" pitchFamily="34" charset="-120"/>
               </a:rPr>
-              <a:t>$8,300</a:t>
+              <a:t>$5,016</a:t>
             </a:r>
             <a:endParaRPr lang="en-US" sz="3200" dirty="0"/>
           </a:p>
@@ -7090,7 +7090,7 @@
                 <a:ea typeface="Arial" pitchFamily="34" charset="-122"/>
                 <a:cs typeface="Arial" pitchFamily="34" charset="-120"/>
               </a:rPr>
-              <a:t>Seller-Credit Budget</a:t>
+              <a:t>Decide on a Seller-Credit Budget</a:t>
             </a:r>
             <a:endParaRPr lang="en-US" sz="1300" dirty="0"/>
           </a:p>
@@ -7244,7 +7244,7 @@
                 <a:ea typeface="Arial" pitchFamily="34" charset="-122"/>
                 <a:cs typeface="Arial" pitchFamily="34" charset="-120"/>
               </a:rPr>
-              <a:t>3-Week Review</a:t>
+              <a:t>Agree on a Review Point</a:t>
             </a:r>
             <a:endParaRPr lang="en-US" sz="1300" dirty="0"/>
           </a:p>
@@ -8619,7 +8619,7 @@
                           <a:ea typeface="Arial" pitchFamily="34" charset="-122"/>
                           <a:cs typeface="Arial" pitchFamily="34" charset="-120"/>
                         </a:rPr>
-                        <a:t>$451,000</a:t>
+                        <a:t>$466,000</a:t>
                       </a:r>
                       <a:endParaRPr lang="en-US" sz="1100" dirty="0">
                         <a:latin typeface="Arial" charset="0"/>
@@ -8669,7 +8669,7 @@
                           <a:ea typeface="Arial" pitchFamily="34" charset="-122"/>
                           <a:cs typeface="Arial" pitchFamily="34" charset="-120"/>
                         </a:rPr>
-                        <a:t>$451,000</a:t>
+                        <a:t>$466,000</a:t>
                       </a:r>
                       <a:endParaRPr lang="en-US" sz="1100" dirty="0">
                         <a:latin typeface="Arial" charset="0"/>
@@ -8719,7 +8719,7 @@
                           <a:ea typeface="Arial" pitchFamily="34" charset="-122"/>
                           <a:cs typeface="Arial" pitchFamily="34" charset="-120"/>
                         </a:rPr>
-                        <a:t>$436,500</a:t>
+                        <a:t>$455,000</a:t>
                       </a:r>
                       <a:endParaRPr lang="en-US" sz="1100" dirty="0">
                         <a:latin typeface="Arial" charset="0"/>
@@ -8821,7 +8821,7 @@
                           <a:ea typeface="Arial" pitchFamily="34" charset="-122"/>
                           <a:cs typeface="Arial" pitchFamily="34" charset="-120"/>
                         </a:rPr>
-                        <a:t>−$11,275</a:t>
+                        <a:t>−$11,650</a:t>
                       </a:r>
                       <a:endParaRPr lang="en-US" sz="1100" dirty="0">
                         <a:latin typeface="Arial" charset="0"/>
@@ -8871,7 +8871,7 @@
                           <a:ea typeface="Arial" pitchFamily="34" charset="-122"/>
                           <a:cs typeface="Arial" pitchFamily="34" charset="-120"/>
                         </a:rPr>
-                        <a:t>−$11,275</a:t>
+                        <a:t>−$11,650</a:t>
                       </a:r>
                       <a:endParaRPr lang="en-US" sz="1100" dirty="0">
                         <a:latin typeface="Arial" charset="0"/>
@@ -8921,7 +8921,7 @@
                           <a:ea typeface="Arial" pitchFamily="34" charset="-122"/>
                           <a:cs typeface="Arial" pitchFamily="34" charset="-120"/>
                         </a:rPr>
-                        <a:t>−$10,912</a:t>
+                        <a:t>−$11,375</a:t>
                       </a:r>
                       <a:endParaRPr lang="en-US" sz="1100" dirty="0">
                         <a:latin typeface="Arial" charset="0"/>
@@ -9023,7 +9023,7 @@
                           <a:ea typeface="Arial" pitchFamily="34" charset="-122"/>
                           <a:cs typeface="Arial" pitchFamily="34" charset="-120"/>
                         </a:rPr>
-                        <a:t>−$11,275</a:t>
+                        <a:t>−$11,650</a:t>
                       </a:r>
                       <a:endParaRPr lang="en-US" sz="1100" dirty="0">
                         <a:latin typeface="Arial" charset="0"/>
@@ -9073,7 +9073,7 @@
                           <a:ea typeface="Arial" pitchFamily="34" charset="-122"/>
                           <a:cs typeface="Arial" pitchFamily="34" charset="-120"/>
                         </a:rPr>
-                        <a:t>−$11,275</a:t>
+                        <a:t>−$11,650</a:t>
                       </a:r>
                       <a:endParaRPr lang="en-US" sz="1100" dirty="0">
                         <a:latin typeface="Arial" charset="0"/>
@@ -9123,7 +9123,7 @@
                           <a:ea typeface="Arial" pitchFamily="34" charset="-122"/>
                           <a:cs typeface="Arial" pitchFamily="34" charset="-120"/>
                         </a:rPr>
-                        <a:t>−$10,912</a:t>
+                        <a:t>−$11,375</a:t>
                       </a:r>
                       <a:endParaRPr lang="en-US" sz="1100" dirty="0">
                         <a:latin typeface="Arial" charset="0"/>
@@ -9225,7 +9225,7 @@
                           <a:ea typeface="Arial" pitchFamily="34" charset="-122"/>
                           <a:cs typeface="Arial" pitchFamily="34" charset="-120"/>
                         </a:rPr>
-                        <a:t>−$3,157</a:t>
+                        <a:t>−$3,262</a:t>
                       </a:r>
                       <a:endParaRPr lang="en-US" sz="1100" dirty="0">
                         <a:latin typeface="Arial" charset="0"/>
@@ -9275,7 +9275,7 @@
                           <a:ea typeface="Arial" pitchFamily="34" charset="-122"/>
                           <a:cs typeface="Arial" pitchFamily="34" charset="-120"/>
                         </a:rPr>
-                        <a:t>−$3,157</a:t>
+                        <a:t>−$3,262</a:t>
                       </a:r>
                       <a:endParaRPr lang="en-US" sz="1100" dirty="0">
                         <a:latin typeface="Arial" charset="0"/>
@@ -9325,7 +9325,7 @@
                           <a:ea typeface="Arial" pitchFamily="34" charset="-122"/>
                           <a:cs typeface="Arial" pitchFamily="34" charset="-120"/>
                         </a:rPr>
-                        <a:t>−$3,056</a:t>
+                        <a:t>−$3,185</a:t>
                       </a:r>
                       <a:endParaRPr lang="en-US" sz="1100" dirty="0">
                         <a:latin typeface="Arial" charset="0"/>
@@ -9427,7 +9427,7 @@
                           <a:ea typeface="Arial" pitchFamily="34" charset="-122"/>
                           <a:cs typeface="Arial" pitchFamily="34" charset="-120"/>
                         </a:rPr>
-                        <a:t>−$2,330</a:t>
+                        <a:t>−$2,405</a:t>
                       </a:r>
                       <a:endParaRPr lang="en-US" sz="1100" dirty="0">
                         <a:latin typeface="Arial" charset="0"/>
@@ -9477,7 +9477,7 @@
                           <a:ea typeface="Arial" pitchFamily="34" charset="-122"/>
                           <a:cs typeface="Arial" pitchFamily="34" charset="-120"/>
                         </a:rPr>
-                        <a:t>−$2,330</a:t>
+                        <a:t>−$2,405</a:t>
                       </a:r>
                       <a:endParaRPr lang="en-US" sz="1100" dirty="0">
                         <a:latin typeface="Arial" charset="0"/>
@@ -9527,7 +9527,7 @@
                           <a:ea typeface="Arial" pitchFamily="34" charset="-122"/>
                           <a:cs typeface="Arial" pitchFamily="34" charset="-120"/>
                         </a:rPr>
-                        <a:t>−$2,258</a:t>
+                        <a:t>−$2,350</a:t>
                       </a:r>
                       <a:endParaRPr lang="en-US" sz="1100" dirty="0">
                         <a:latin typeface="Arial" charset="0"/>
@@ -10039,7 +10039,7 @@
                           <a:ea typeface="Arial" pitchFamily="34" charset="-122"/>
                           <a:cs typeface="Arial" pitchFamily="34" charset="-120"/>
                         </a:rPr>
-                        <a:t>$411,818</a:t>
+                        <a:t>$425,888</a:t>
                       </a:r>
                       <a:endParaRPr lang="en-US" sz="1100" dirty="0">
                         <a:latin typeface="Arial" charset="0"/>
@@ -10095,7 +10095,7 @@
                           <a:ea typeface="Arial" pitchFamily="34" charset="-122"/>
                           <a:cs typeface="Arial" pitchFamily="34" charset="-120"/>
                         </a:rPr>
-                        <a:t>$411,818</a:t>
+                        <a:t>$425,888</a:t>
                       </a:r>
                       <a:endParaRPr lang="en-US" sz="1100" dirty="0">
                         <a:latin typeface="Arial" charset="0"/>
@@ -10151,7 +10151,7 @@
                           <a:ea typeface="Arial" pitchFamily="34" charset="-122"/>
                           <a:cs typeface="Arial" pitchFamily="34" charset="-120"/>
                         </a:rPr>
-                        <a:t>$403,216</a:t>
+                        <a:t>$420,570</a:t>
                       </a:r>
                       <a:endParaRPr lang="en-US" sz="1100" dirty="0">
                         <a:latin typeface="Arial" charset="0"/>
@@ -10467,7 +10467,7 @@
                           <a:ea typeface="Arial" pitchFamily="34" charset="-122"/>
                           <a:cs typeface="Arial" pitchFamily="34" charset="-120"/>
                         </a:rPr>
-                        <a:t>$409,698</a:t>
+                        <a:t>$423,768</a:t>
                       </a:r>
                       <a:endParaRPr lang="en-US" sz="1100" dirty="0">
                         <a:latin typeface="Arial" charset="0"/>
@@ -10523,7 +10523,7 @@
                           <a:ea typeface="Arial" pitchFamily="34" charset="-122"/>
                           <a:cs typeface="Arial" pitchFamily="34" charset="-120"/>
                         </a:rPr>
-                        <a:t>$410,742</a:t>
+                        <a:t>$424,812</a:t>
                       </a:r>
                       <a:endParaRPr lang="en-US" sz="1100" dirty="0">
                         <a:latin typeface="Arial" charset="0"/>
@@ -10579,7 +10579,7 @@
                           <a:ea typeface="Arial" pitchFamily="34" charset="-122"/>
                           <a:cs typeface="Arial" pitchFamily="34" charset="-120"/>
                         </a:rPr>
-                        <a:t>$402,442</a:t>
+                        <a:t>$419,796</a:t>
                       </a:r>
                       <a:endParaRPr lang="en-US" sz="1100" dirty="0">
                         <a:latin typeface="Arial" charset="0"/>
@@ -12829,7 +12829,7 @@
                 <a:ea typeface="Arial" pitchFamily="34" charset="-122"/>
                 <a:cs typeface="Arial" pitchFamily="34" charset="-120"/>
               </a:rPr>
-              <a:t>About $451,000</a:t>
+              <a:t>About $466,000</a:t>
             </a:r>
             <a:endParaRPr lang="en-US" sz="2400" dirty="0"/>
           </a:p>
@@ -19385,7 +19385,7 @@
                 <a:ea typeface="Arial" pitchFamily="34" charset="-122"/>
                 <a:cs typeface="Arial" pitchFamily="34" charset="-120"/>
               </a:rPr>
-              <a:t>$451,000</a:t>
+              <a:t>$466,000</a:t>
             </a:r>
             <a:endParaRPr lang="en-US" sz="1300" dirty="0"/>
           </a:p>
@@ -19763,7 +19763,7 @@
                 <a:ea typeface="Arial" pitchFamily="34" charset="-122"/>
                 <a:cs typeface="Arial" pitchFamily="34" charset="-120"/>
               </a:rPr>
-              <a:t>$451,000</a:t>
+              <a:t>$466,000</a:t>
             </a:r>
             <a:endParaRPr lang="en-US" sz="1300" dirty="0"/>
           </a:p>
@@ -20102,7 +20102,7 @@
                 <a:ea typeface="Arial" pitchFamily="34" charset="-122"/>
                 <a:cs typeface="Arial" pitchFamily="34" charset="-120"/>
               </a:rPr>
-              <a:t>$436,500</a:t>
+              <a:t>$455,000</a:t>
             </a:r>
             <a:endParaRPr lang="en-US" sz="1300" dirty="0"/>
           </a:p>

--- a/samples/seller-cma/517-Larkwood-Ave-Listing-Presentation.pptx
+++ b/samples/seller-cma/517-Larkwood-Ave-Listing-Presentation.pptx
@@ -663,7 +663,7 @@
           </c:tx>
           <c:spPr>
             <a:solidFill>
-              <a:srgbClr val="A6A6A6"/>
+              <a:srgbClr val="5E5E5E"/>
             </a:solidFill>
             <a:ln>
               <a:noFill/>
@@ -675,11 +675,11 @@
             <c:size val="7"/>
             <c:spPr>
               <a:solidFill>
-                <a:srgbClr val="A6A6A6"/>
+                <a:srgbClr val="FFFFFF"/>
               </a:solidFill>
               <a:ln w="15875">
                 <a:solidFill>
-                  <a:srgbClr val="A6A6A6"/>
+                  <a:srgbClr val="5E5E5E"/>
                 </a:solidFill>
               </a:ln>
             </c:spPr>
@@ -2185,12 +2185,12 @@
           </c:spPr>
           <c:marker>
             <c:symbol val="diamond"/>
-            <c:size val="14"/>
+            <c:size val="11"/>
             <c:spPr>
               <a:solidFill>
                 <a:srgbClr val="1A1A1A"/>
               </a:solidFill>
-              <a:ln w="12700">
+              <a:ln w="19050">
                 <a:solidFill>
                   <a:srgbClr val="FFFFFF"/>
                 </a:solidFill>
@@ -8024,7 +8024,7 @@
                 <a:ea typeface="Arial" pitchFamily="34" charset="-122"/>
                 <a:cs typeface="Arial" pitchFamily="34" charset="-120"/>
               </a:rPr>
-              <a:t>Week 3</a:t>
+              <a:t>Early October</a:t>
             </a:r>
             <a:endParaRPr lang="en-US" sz="1200" dirty="0"/>
           </a:p>
@@ -11209,7 +11209,7 @@
                           <a:ea typeface="Arial" pitchFamily="34" charset="-122"/>
                           <a:cs typeface="Arial" pitchFamily="34" charset="-120"/>
                         </a:rPr>
-                        <a:t>$492,300</a:t>
+                        <a:t>$493,900</a:t>
                       </a:r>
                       <a:endParaRPr lang="en-US" sz="1100" dirty="0">
                         <a:latin typeface="Arial" charset="0"/>
@@ -11411,7 +11411,7 @@
                           <a:ea typeface="Arial" pitchFamily="34" charset="-122"/>
                           <a:cs typeface="Arial" pitchFamily="34" charset="-120"/>
                         </a:rPr>
-                        <a:t>$483,800</a:t>
+                        <a:t>$484,000</a:t>
                       </a:r>
                       <a:endParaRPr lang="en-US" sz="1100" dirty="0">
                         <a:latin typeface="Arial" charset="0"/>
@@ -11815,7 +11815,7 @@
                           <a:ea typeface="Arial" pitchFamily="34" charset="-122"/>
                           <a:cs typeface="Arial" pitchFamily="34" charset="-120"/>
                         </a:rPr>
-                        <a:t>$438,400</a:t>
+                        <a:t>$440,200</a:t>
                       </a:r>
                       <a:endParaRPr lang="en-US" sz="1100" dirty="0">
                         <a:latin typeface="Arial" charset="0"/>
@@ -12017,7 +12017,7 @@
                           <a:ea typeface="Arial" pitchFamily="34" charset="-122"/>
                           <a:cs typeface="Arial" pitchFamily="34" charset="-120"/>
                         </a:rPr>
-                        <a:t>$436,200</a:t>
+                        <a:t>$435,900</a:t>
                       </a:r>
                       <a:endParaRPr lang="en-US" sz="1100" dirty="0">
                         <a:latin typeface="Arial" charset="0"/>
@@ -13466,7 +13466,7 @@
                 <a:ea typeface="Arial" pitchFamily="34" charset="-122"/>
                 <a:cs typeface="Arial" pitchFamily="34" charset="-120"/>
               </a:rPr>
-              <a:t>$436K–$492K</a:t>
+              <a:t>$436K–$494K</a:t>
             </a:r>
             <a:endParaRPr lang="en-US" sz="2200" dirty="0"/>
           </a:p>
@@ -15585,7 +15585,7 @@
         </p:nvSpPr>
         <p:spPr>
           <a:xfrm>
-            <a:off x="7155180" y="1536192"/>
+            <a:off x="7228332" y="1536192"/>
             <a:ext cx="164592" cy="164592"/>
           </a:xfrm>
           <a:prstGeom prst="ellipse">
@@ -15610,7 +15610,7 @@
         </p:nvSpPr>
         <p:spPr>
           <a:xfrm>
-            <a:off x="7347204" y="1490472"/>
+            <a:off x="7420356" y="1490472"/>
             <a:ext cx="640080" cy="237744"/>
           </a:xfrm>
           <a:prstGeom prst="rect">
@@ -15635,7 +15635,7 @@
                 <a:ea typeface="Arial" pitchFamily="34" charset="-122"/>
                 <a:cs typeface="Arial" pitchFamily="34" charset="-120"/>
               </a:rPr>
-              <a:t>$492K</a:t>
+              <a:t>$494K</a:t>
             </a:r>
             <a:endParaRPr lang="en-US" sz="1000" dirty="0"/>
           </a:p>
@@ -15727,7 +15727,7 @@
         </p:nvSpPr>
         <p:spPr>
           <a:xfrm>
-            <a:off x="6766560" y="1993392"/>
+            <a:off x="6775704" y="1993392"/>
             <a:ext cx="164592" cy="164592"/>
           </a:xfrm>
           <a:prstGeom prst="ellipse">
@@ -15752,7 +15752,7 @@
         </p:nvSpPr>
         <p:spPr>
           <a:xfrm>
-            <a:off x="6958584" y="1947672"/>
+            <a:off x="6967728" y="1947672"/>
             <a:ext cx="640080" cy="237744"/>
           </a:xfrm>
           <a:prstGeom prst="rect">
@@ -15855,7 +15855,7 @@
                 <a:ea typeface="Arial" pitchFamily="34" charset="-122"/>
                 <a:cs typeface="Arial" pitchFamily="34" charset="-120"/>
               </a:rPr>
-              <a:t>Most recent pool sale; not renovated</a:t>
+              <a:t>Strongest match · Most recent pool sale; not renovated</a:t>
             </a:r>
             <a:endParaRPr lang="en-US" sz="950" dirty="0"/>
           </a:p>
@@ -16011,7 +16011,7 @@
         </p:nvSpPr>
         <p:spPr>
           <a:xfrm>
-            <a:off x="4690872" y="2907792"/>
+            <a:off x="4773168" y="2907792"/>
             <a:ext cx="164592" cy="164592"/>
           </a:xfrm>
           <a:prstGeom prst="ellipse">
@@ -16036,7 +16036,7 @@
         </p:nvSpPr>
         <p:spPr>
           <a:xfrm>
-            <a:off x="4882896" y="2862072"/>
+            <a:off x="4965192" y="2862072"/>
             <a:ext cx="640080" cy="237744"/>
           </a:xfrm>
           <a:prstGeom prst="rect">
@@ -16061,7 +16061,7 @@
                 <a:ea typeface="Arial" pitchFamily="34" charset="-122"/>
                 <a:cs typeface="Arial" pitchFamily="34" charset="-120"/>
               </a:rPr>
-              <a:t>$438K</a:t>
+              <a:t>$440K</a:t>
             </a:r>
             <a:endParaRPr lang="en-US" sz="1000" dirty="0"/>
           </a:p>
@@ -16153,7 +16153,7 @@
         </p:nvSpPr>
         <p:spPr>
           <a:xfrm>
-            <a:off x="4590288" y="3364992"/>
+            <a:off x="4576572" y="3364992"/>
             <a:ext cx="164592" cy="164592"/>
           </a:xfrm>
           <a:prstGeom prst="ellipse">
@@ -16178,7 +16178,7 @@
         </p:nvSpPr>
         <p:spPr>
           <a:xfrm>
-            <a:off x="4782312" y="3319272"/>
+            <a:off x="4768596" y="3319272"/>
             <a:ext cx="640080" cy="237744"/>
           </a:xfrm>
           <a:prstGeom prst="rect">
@@ -16436,48 +16436,9 @@
           </a:ln>
         </p:spPr>
       </p:sp>
-      <p:sp>
-        <p:nvSpPr>
-          <p:cNvPr id="4" name="Text 2"/>
-          <p:cNvSpPr txBox="1"/>
-          <p:nvPr/>
-        </p:nvSpPr>
-        <p:spPr>
-          <a:xfrm>
-            <a:off x="1223467" y="2331393"/>
-            <a:ext cx="2743200" cy="201168"/>
-          </a:xfrm>
-          <a:prstGeom prst="rect">
-            <a:avLst/>
-          </a:prstGeom>
-          <a:noFill/>
-          <a:ln/>
-        </p:spPr>
-        <p:txBody>
-          <a:bodyPr wrap="square" lIns="0" tIns="0" rIns="0" bIns="0" rtlCol="0" anchor="ctr"/>
-          <a:lstStyle/>
-          <a:p>
-            <a:pPr indent="0" marL="0">
-              <a:buNone/>
-            </a:pPr>
-            <a:r>
-              <a:rPr lang="en-US" sz="900" b="1" dirty="0">
-                <a:solidFill>
-                  <a:srgbClr val="A23200"/>
-                </a:solidFill>
-                <a:latin typeface="Arial" pitchFamily="34" charset="0"/>
-                <a:ea typeface="Arial" pitchFamily="34" charset="-122"/>
-                <a:cs typeface="Arial" pitchFamily="34" charset="-120"/>
-              </a:rPr>
-              <a:t>Supported Range $455K–$480K</a:t>
-            </a:r>
-            <a:endParaRPr lang="en-US" sz="900" dirty="0"/>
-          </a:p>
-        </p:txBody>
-      </p:sp>
       <p:graphicFrame>
         <p:nvGraphicFramePr>
-          <p:cNvPr id="5" name="Chart 0" descr=""/>
+          <p:cNvPr id="4" name="Chart 0" descr=""/>
           <p:cNvGraphicFramePr/>
           <p:nvPr/>
         </p:nvGraphicFramePr>
@@ -16493,6 +16454,47 @@
       </p:graphicFrame>
       <p:sp>
         <p:nvSpPr>
+          <p:cNvPr id="5" name="Text 2"/>
+          <p:cNvSpPr txBox="1"/>
+          <p:nvPr/>
+        </p:nvSpPr>
+        <p:spPr>
+          <a:xfrm>
+            <a:off x="1205179" y="2331393"/>
+            <a:ext cx="1899940" cy="182880"/>
+          </a:xfrm>
+          <a:prstGeom prst="rect">
+            <a:avLst/>
+          </a:prstGeom>
+          <a:solidFill>
+            <a:srgbClr val="FBF2EE"/>
+          </a:solidFill>
+          <a:ln/>
+        </p:spPr>
+        <p:txBody>
+          <a:bodyPr wrap="square" lIns="0" tIns="762" rIns="762" bIns="0" rtlCol="0" anchor="ctr"/>
+          <a:lstStyle/>
+          <a:p>
+            <a:pPr indent="0" marL="0">
+              <a:buNone/>
+            </a:pPr>
+            <a:r>
+              <a:rPr lang="en-US" sz="900" b="1" dirty="0">
+                <a:solidFill>
+                  <a:srgbClr val="A23200"/>
+                </a:solidFill>
+                <a:latin typeface="Arial" pitchFamily="34" charset="0"/>
+                <a:ea typeface="Arial" pitchFamily="34" charset="-122"/>
+                <a:cs typeface="Arial" pitchFamily="34" charset="-120"/>
+              </a:rPr>
+              <a:t>Supported Range $455K–$480K</a:t>
+            </a:r>
+            <a:endParaRPr lang="en-US" sz="900" dirty="0"/>
+          </a:p>
+        </p:txBody>
+      </p:sp>
+      <p:sp>
+        <p:nvSpPr>
           <p:cNvPr id="6" name="Shape 3"/>
           <p:cNvSpPr/>
           <p:nvPr/>
@@ -16570,11 +16572,11 @@
             <a:avLst/>
           </a:prstGeom>
           <a:solidFill>
-            <a:srgbClr val="A6A6A6"/>
+            <a:srgbClr val="FFFFFF"/>
           </a:solidFill>
-          <a:ln w="6350">
+          <a:ln w="15875">
             <a:solidFill>
-              <a:srgbClr val="A6A6A6"/>
+              <a:srgbClr val="5E5E5E"/>
             </a:solidFill>
             <a:prstDash val="solid"/>
           </a:ln>

--- a/samples/seller-cma/517-Larkwood-Ave-Listing-Presentation.pptx
+++ b/samples/seller-cma/517-Larkwood-Ave-Listing-Presentation.pptx
@@ -9579,7 +9579,7 @@
                           <a:ea typeface="Arial" pitchFamily="34" charset="-122"/>
                           <a:cs typeface="Arial" pitchFamily="34" charset="-120"/>
                         </a:rPr>
-                        <a:t>Title Company Fees (Estimate)</a:t>
+                        <a:t>Title Company Fees</a:t>
                       </a:r>
                       <a:endParaRPr lang="en-US" sz="1100" dirty="0">
                         <a:latin typeface="Arial" charset="0"/>
@@ -10209,7 +10209,7 @@
                           <a:ea typeface="Arial" pitchFamily="34" charset="-122"/>
                           <a:cs typeface="Arial" pitchFamily="34" charset="-120"/>
                         </a:rPr>
-                        <a:t>Holding Costs Until Closing (Est.)</a:t>
+                        <a:t>Holding Costs Until Closing</a:t>
                       </a:r>
                       <a:endParaRPr lang="en-US" sz="1100" dirty="0">
                         <a:latin typeface="Arial" charset="0"/>
@@ -19418,7 +19418,7 @@
               <a:buNone/>
             </a:pPr>
             <a:r>
-              <a:rPr lang="en-US" sz="1050" dirty="0">
+              <a:rPr lang="en-US" sz="1100" dirty="0">
                 <a:solidFill>
                   <a:srgbClr val="5E5E5E"/>
                 </a:solidFill>
@@ -19426,9 +19426,9 @@
                 <a:ea typeface="Arial" pitchFamily="34" charset="-122"/>
                 <a:cs typeface="Arial" pitchFamily="34" charset="-120"/>
               </a:rPr>
-              <a:t>Seller Credit Assumed</a:t>
-            </a:r>
-            <a:endParaRPr lang="en-US" sz="1050" dirty="0"/>
+              <a:t>Seller Credit</a:t>
+            </a:r>
+            <a:endParaRPr lang="en-US" sz="1100" dirty="0"/>
           </a:p>
         </p:txBody>
       </p:sp>
@@ -19796,7 +19796,7 @@
               <a:buNone/>
             </a:pPr>
             <a:r>
-              <a:rPr lang="en-US" sz="1050" dirty="0">
+              <a:rPr lang="en-US" sz="1100" dirty="0">
                 <a:solidFill>
                   <a:srgbClr val="FFFFFF"/>
                 </a:solidFill>
@@ -19804,9 +19804,9 @@
                 <a:ea typeface="Arial" pitchFamily="34" charset="-122"/>
                 <a:cs typeface="Arial" pitchFamily="34" charset="-120"/>
               </a:rPr>
-              <a:t>Seller Credit Assumed</a:t>
-            </a:r>
-            <a:endParaRPr lang="en-US" sz="1050" dirty="0"/>
+              <a:t>Seller Credit</a:t>
+            </a:r>
+            <a:endParaRPr lang="en-US" sz="1100" dirty="0"/>
           </a:p>
         </p:txBody>
       </p:sp>
@@ -20143,7 +20143,7 @@
                 <a:ea typeface="Arial" pitchFamily="34" charset="-122"/>
                 <a:cs typeface="Arial" pitchFamily="34" charset="-120"/>
               </a:rPr>
-              <a:t>Seller Credit Assumed</a:t>
+              <a:t>Seller Credit</a:t>
             </a:r>
             <a:endParaRPr lang="en-US" sz="1100" dirty="0"/>
           </a:p>

--- a/samples/seller-cma/517-Larkwood-Ave-Listing-Presentation.pptx
+++ b/samples/seller-cma/517-Larkwood-Ave-Listing-Presentation.pptx
@@ -307,88 +307,88 @@
                   <c:v>2100</c:v>
                 </c:pt>
                 <c:pt idx="41">
-                  <c:v>1450</c:v>
+                  <c:v>1400</c:v>
                 </c:pt>
                 <c:pt idx="42">
-                  <c:v>1485.1851851851852</c:v>
+                  <c:v>1444.4444444444443</c:v>
                 </c:pt>
                 <c:pt idx="43">
-                  <c:v>1520.3703703703704</c:v>
+                  <c:v>1488.888888888889</c:v>
                 </c:pt>
                 <c:pt idx="44">
-                  <c:v>1555.5555555555557</c:v>
+                  <c:v>1533.3333333333333</c:v>
                 </c:pt>
                 <c:pt idx="45">
-                  <c:v>1590.7407407407406</c:v>
+                  <c:v>1577.7777777777778</c:v>
                 </c:pt>
                 <c:pt idx="46">
-                  <c:v>1625.9259259259259</c:v>
+                  <c:v>1622.2222222222222</c:v>
                 </c:pt>
                 <c:pt idx="47">
-                  <c:v>1661.111111111111</c:v>
+                  <c:v>1666.6666666666667</c:v>
                 </c:pt>
                 <c:pt idx="48">
-                  <c:v>1696.2962962962963</c:v>
+                  <c:v>1711.111111111111</c:v>
                 </c:pt>
                 <c:pt idx="49">
-                  <c:v>1731.4814814814815</c:v>
+                  <c:v>1755.5555555555557</c:v>
                 </c:pt>
                 <c:pt idx="50">
-                  <c:v>1766.6666666666667</c:v>
+                  <c:v>1800</c:v>
                 </c:pt>
                 <c:pt idx="51">
-                  <c:v>1801.8518518518517</c:v>
+                  <c:v>1844.4444444444443</c:v>
                 </c:pt>
                 <c:pt idx="52">
-                  <c:v>1837.037037037037</c:v>
+                  <c:v>1888.888888888889</c:v>
                 </c:pt>
                 <c:pt idx="53">
-                  <c:v>1872.2222222222222</c:v>
+                  <c:v>1933.3333333333335</c:v>
                 </c:pt>
                 <c:pt idx="54">
-                  <c:v>1907.4074074074074</c:v>
+                  <c:v>1977.7777777777778</c:v>
                 </c:pt>
                 <c:pt idx="55">
-                  <c:v>1942.5925925925926</c:v>
+                  <c:v>2022.2222222222222</c:v>
                 </c:pt>
                 <c:pt idx="56">
-                  <c:v>1977.7777777777778</c:v>
+                  <c:v>2066.6666666666665</c:v>
                 </c:pt>
                 <c:pt idx="57">
-                  <c:v>2012.962962962963</c:v>
+                  <c:v>2111.1111111111113</c:v>
                 </c:pt>
                 <c:pt idx="58">
-                  <c:v>2048.1481481481483</c:v>
+                  <c:v>2155.5555555555557</c:v>
                 </c:pt>
                 <c:pt idx="59">
-                  <c:v>2083.3333333333335</c:v>
+                  <c:v>2200</c:v>
                 </c:pt>
                 <c:pt idx="60">
-                  <c:v>2118.5185185185182</c:v>
+                  <c:v>2244.4444444444443</c:v>
                 </c:pt>
                 <c:pt idx="61">
-                  <c:v>2153.7037037037035</c:v>
+                  <c:v>2288.8888888888887</c:v>
                 </c:pt>
                 <c:pt idx="62">
-                  <c:v>2188.8888888888887</c:v>
+                  <c:v>2333.3333333333335</c:v>
                 </c:pt>
                 <c:pt idx="63">
-                  <c:v>2224.074074074074</c:v>
+                  <c:v>2377.777777777778</c:v>
                 </c:pt>
                 <c:pt idx="64">
-                  <c:v>2259.259259259259</c:v>
+                  <c:v>2422.222222222222</c:v>
                 </c:pt>
                 <c:pt idx="65">
-                  <c:v>2294.4444444444443</c:v>
+                  <c:v>2466.666666666667</c:v>
                 </c:pt>
                 <c:pt idx="66">
-                  <c:v>2329.6296296296296</c:v>
+                  <c:v>2511.1111111111113</c:v>
                 </c:pt>
                 <c:pt idx="67">
-                  <c:v>2364.814814814815</c:v>
+                  <c:v>2555.5555555555557</c:v>
                 </c:pt>
                 <c:pt idx="68">
-                  <c:v>2400</c:v>
+                  <c:v>2600</c:v>
                 </c:pt>
                 <c:pt idx="69">
                   <c:v>1824</c:v>
@@ -671,16 +671,14 @@
             <a:effectLst/>
           </c:spPr>
           <c:marker>
-            <c:symbol val="circle"/>
-            <c:size val="7"/>
+            <c:symbol val="square"/>
+            <c:size val="6"/>
             <c:spPr>
               <a:solidFill>
-                <a:srgbClr val="FFFFFF"/>
+                <a:srgbClr val="5E5E5E"/>
               </a:solidFill>
-              <a:ln w="15875">
-                <a:solidFill>
-                  <a:srgbClr val="5E5E5E"/>
-                </a:solidFill>
+              <a:ln>
+                <a:noFill/>
               </a:ln>
             </c:spPr>
           </c:marker>
@@ -814,88 +812,88 @@
                   <c:v>2100</c:v>
                 </c:pt>
                 <c:pt idx="41">
-                  <c:v>1450</c:v>
+                  <c:v>1400</c:v>
                 </c:pt>
                 <c:pt idx="42">
-                  <c:v>1485.1851851851852</c:v>
+                  <c:v>1444.4444444444443</c:v>
                 </c:pt>
                 <c:pt idx="43">
-                  <c:v>1520.3703703703704</c:v>
+                  <c:v>1488.888888888889</c:v>
                 </c:pt>
                 <c:pt idx="44">
-                  <c:v>1555.5555555555557</c:v>
+                  <c:v>1533.3333333333333</c:v>
                 </c:pt>
                 <c:pt idx="45">
-                  <c:v>1590.7407407407406</c:v>
+                  <c:v>1577.7777777777778</c:v>
                 </c:pt>
                 <c:pt idx="46">
-                  <c:v>1625.9259259259259</c:v>
+                  <c:v>1622.2222222222222</c:v>
                 </c:pt>
                 <c:pt idx="47">
-                  <c:v>1661.111111111111</c:v>
+                  <c:v>1666.6666666666667</c:v>
                 </c:pt>
                 <c:pt idx="48">
-                  <c:v>1696.2962962962963</c:v>
+                  <c:v>1711.111111111111</c:v>
                 </c:pt>
                 <c:pt idx="49">
-                  <c:v>1731.4814814814815</c:v>
+                  <c:v>1755.5555555555557</c:v>
                 </c:pt>
                 <c:pt idx="50">
-                  <c:v>1766.6666666666667</c:v>
+                  <c:v>1800</c:v>
                 </c:pt>
                 <c:pt idx="51">
-                  <c:v>1801.8518518518517</c:v>
+                  <c:v>1844.4444444444443</c:v>
                 </c:pt>
                 <c:pt idx="52">
-                  <c:v>1837.037037037037</c:v>
+                  <c:v>1888.888888888889</c:v>
                 </c:pt>
                 <c:pt idx="53">
-                  <c:v>1872.2222222222222</c:v>
+                  <c:v>1933.3333333333335</c:v>
                 </c:pt>
                 <c:pt idx="54">
-                  <c:v>1907.4074074074074</c:v>
+                  <c:v>1977.7777777777778</c:v>
                 </c:pt>
                 <c:pt idx="55">
-                  <c:v>1942.5925925925926</c:v>
+                  <c:v>2022.2222222222222</c:v>
                 </c:pt>
                 <c:pt idx="56">
-                  <c:v>1977.7777777777778</c:v>
+                  <c:v>2066.6666666666665</c:v>
                 </c:pt>
                 <c:pt idx="57">
-                  <c:v>2012.962962962963</c:v>
+                  <c:v>2111.1111111111113</c:v>
                 </c:pt>
                 <c:pt idx="58">
-                  <c:v>2048.1481481481483</c:v>
+                  <c:v>2155.5555555555557</c:v>
                 </c:pt>
                 <c:pt idx="59">
-                  <c:v>2083.3333333333335</c:v>
+                  <c:v>2200</c:v>
                 </c:pt>
                 <c:pt idx="60">
-                  <c:v>2118.5185185185182</c:v>
+                  <c:v>2244.4444444444443</c:v>
                 </c:pt>
                 <c:pt idx="61">
-                  <c:v>2153.7037037037035</c:v>
+                  <c:v>2288.8888888888887</c:v>
                 </c:pt>
                 <c:pt idx="62">
-                  <c:v>2188.8888888888887</c:v>
+                  <c:v>2333.3333333333335</c:v>
                 </c:pt>
                 <c:pt idx="63">
-                  <c:v>2224.074074074074</c:v>
+                  <c:v>2377.777777777778</c:v>
                 </c:pt>
                 <c:pt idx="64">
-                  <c:v>2259.259259259259</c:v>
+                  <c:v>2422.222222222222</c:v>
                 </c:pt>
                 <c:pt idx="65">
-                  <c:v>2294.4444444444443</c:v>
+                  <c:v>2466.666666666667</c:v>
                 </c:pt>
                 <c:pt idx="66">
-                  <c:v>2329.6296296296296</c:v>
+                  <c:v>2511.1111111111113</c:v>
                 </c:pt>
                 <c:pt idx="67">
-                  <c:v>2364.814814814815</c:v>
+                  <c:v>2555.5555555555557</c:v>
                 </c:pt>
                 <c:pt idx="68">
-                  <c:v>2400</c:v>
+                  <c:v>2600</c:v>
                 </c:pt>
                 <c:pt idx="69">
                   <c:v>1824</c:v>
@@ -1313,88 +1311,88 @@
                   <c:v>2100</c:v>
                 </c:pt>
                 <c:pt idx="41">
-                  <c:v>1450</c:v>
+                  <c:v>1400</c:v>
                 </c:pt>
                 <c:pt idx="42">
-                  <c:v>1485.1851851851852</c:v>
+                  <c:v>1444.4444444444443</c:v>
                 </c:pt>
                 <c:pt idx="43">
-                  <c:v>1520.3703703703704</c:v>
+                  <c:v>1488.888888888889</c:v>
                 </c:pt>
                 <c:pt idx="44">
-                  <c:v>1555.5555555555557</c:v>
+                  <c:v>1533.3333333333333</c:v>
                 </c:pt>
                 <c:pt idx="45">
-                  <c:v>1590.7407407407406</c:v>
+                  <c:v>1577.7777777777778</c:v>
                 </c:pt>
                 <c:pt idx="46">
-                  <c:v>1625.9259259259259</c:v>
+                  <c:v>1622.2222222222222</c:v>
                 </c:pt>
                 <c:pt idx="47">
-                  <c:v>1661.111111111111</c:v>
+                  <c:v>1666.6666666666667</c:v>
                 </c:pt>
                 <c:pt idx="48">
-                  <c:v>1696.2962962962963</c:v>
+                  <c:v>1711.111111111111</c:v>
                 </c:pt>
                 <c:pt idx="49">
-                  <c:v>1731.4814814814815</c:v>
+                  <c:v>1755.5555555555557</c:v>
                 </c:pt>
                 <c:pt idx="50">
-                  <c:v>1766.6666666666667</c:v>
+                  <c:v>1800</c:v>
                 </c:pt>
                 <c:pt idx="51">
-                  <c:v>1801.8518518518517</c:v>
+                  <c:v>1844.4444444444443</c:v>
                 </c:pt>
                 <c:pt idx="52">
-                  <c:v>1837.037037037037</c:v>
+                  <c:v>1888.888888888889</c:v>
                 </c:pt>
                 <c:pt idx="53">
-                  <c:v>1872.2222222222222</c:v>
+                  <c:v>1933.3333333333335</c:v>
                 </c:pt>
                 <c:pt idx="54">
-                  <c:v>1907.4074074074074</c:v>
+                  <c:v>1977.7777777777778</c:v>
                 </c:pt>
                 <c:pt idx="55">
-                  <c:v>1942.5925925925926</c:v>
+                  <c:v>2022.2222222222222</c:v>
                 </c:pt>
                 <c:pt idx="56">
-                  <c:v>1977.7777777777778</c:v>
+                  <c:v>2066.6666666666665</c:v>
                 </c:pt>
                 <c:pt idx="57">
-                  <c:v>2012.962962962963</c:v>
+                  <c:v>2111.1111111111113</c:v>
                 </c:pt>
                 <c:pt idx="58">
-                  <c:v>2048.1481481481483</c:v>
+                  <c:v>2155.5555555555557</c:v>
                 </c:pt>
                 <c:pt idx="59">
-                  <c:v>2083.3333333333335</c:v>
+                  <c:v>2200</c:v>
                 </c:pt>
                 <c:pt idx="60">
-                  <c:v>2118.5185185185182</c:v>
+                  <c:v>2244.4444444444443</c:v>
                 </c:pt>
                 <c:pt idx="61">
-                  <c:v>2153.7037037037035</c:v>
+                  <c:v>2288.8888888888887</c:v>
                 </c:pt>
                 <c:pt idx="62">
-                  <c:v>2188.8888888888887</c:v>
+                  <c:v>2333.3333333333335</c:v>
                 </c:pt>
                 <c:pt idx="63">
-                  <c:v>2224.074074074074</c:v>
+                  <c:v>2377.777777777778</c:v>
                 </c:pt>
                 <c:pt idx="64">
-                  <c:v>2259.259259259259</c:v>
+                  <c:v>2422.222222222222</c:v>
                 </c:pt>
                 <c:pt idx="65">
-                  <c:v>2294.4444444444443</c:v>
+                  <c:v>2466.666666666667</c:v>
                 </c:pt>
                 <c:pt idx="66">
-                  <c:v>2329.6296296296296</c:v>
+                  <c:v>2511.1111111111113</c:v>
                 </c:pt>
                 <c:pt idx="67">
-                  <c:v>2364.814814814815</c:v>
+                  <c:v>2555.5555555555557</c:v>
                 </c:pt>
                 <c:pt idx="68">
-                  <c:v>2400</c:v>
+                  <c:v>2600</c:v>
                 </c:pt>
                 <c:pt idx="69">
                   <c:v>1824</c:v>
@@ -1547,88 +1545,88 @@
                   <c:v/>
                 </c:pt>
                 <c:pt idx="41">
-                  <c:v>353370.74537409266</c:v>
+                  <c:v>342131.321903495</c:v>
                 </c:pt>
                 <c:pt idx="42">
-                  <c:v>361279.9692978465</c:v>
+                  <c:v>352121.9205440262</c:v>
                 </c:pt>
                 <c:pt idx="43">
-                  <c:v>369189.1932216004</c:v>
+                  <c:v>362112.51918455743</c:v>
                 </c:pt>
                 <c:pt idx="44">
-                  <c:v>377098.41714535427</c:v>
+                  <c:v>372103.1178250886</c:v>
                 </c:pt>
                 <c:pt idx="45">
-                  <c:v>385007.6410691081</c:v>
+                  <c:v>382093.71646561986</c:v>
                 </c:pt>
                 <c:pt idx="46">
-                  <c:v>392916.864992862</c:v>
+                  <c:v>392084.31510615104</c:v>
                 </c:pt>
                 <c:pt idx="47">
-                  <c:v>400826.0889166159</c:v>
+                  <c:v>402074.9137466823</c:v>
                 </c:pt>
                 <c:pt idx="48">
-                  <c:v>408735.31284036976</c:v>
+                  <c:v>412065.5123872135</c:v>
                 </c:pt>
                 <c:pt idx="49">
-                  <c:v>416644.53676412365</c:v>
+                  <c:v>422056.1110277447</c:v>
                 </c:pt>
                 <c:pt idx="50">
-                  <c:v>424553.7606878775</c:v>
+                  <c:v>432046.7096682759</c:v>
                 </c:pt>
                 <c:pt idx="51">
-                  <c:v>432462.9846116313</c:v>
+                  <c:v>442037.3083088071</c:v>
                 </c:pt>
                 <c:pt idx="52">
-                  <c:v>440372.2085353852</c:v>
+                  <c:v>452027.9069493383</c:v>
                 </c:pt>
                 <c:pt idx="53">
-                  <c:v>448281.4324591391</c:v>
+                  <c:v>462018.5055898696</c:v>
                 </c:pt>
                 <c:pt idx="54">
-                  <c:v>456190.656382893</c:v>
+                  <c:v>472009.10423040076</c:v>
                 </c:pt>
                 <c:pt idx="55">
-                  <c:v>464099.88030664687</c:v>
+                  <c:v>481999.70287093194</c:v>
                 </c:pt>
                 <c:pt idx="56">
-                  <c:v>472009.10423040076</c:v>
+                  <c:v>491990.3015114631</c:v>
                 </c:pt>
                 <c:pt idx="57">
-                  <c:v>479918.32815415465</c:v>
+                  <c:v>501980.90015199437</c:v>
                 </c:pt>
                 <c:pt idx="58">
-                  <c:v>487827.5520779085</c:v>
+                  <c:v>511971.49879252556</c:v>
                 </c:pt>
                 <c:pt idx="59">
-                  <c:v>495736.77600166237</c:v>
+                  <c:v>521962.09743305674</c:v>
                 </c:pt>
                 <c:pt idx="60">
-                  <c:v>503645.99992541614</c:v>
+                  <c:v>531952.696073588</c:v>
                 </c:pt>
                 <c:pt idx="61">
-                  <c:v>511555.22384917</c:v>
+                  <c:v>541943.294714119</c:v>
                 </c:pt>
                 <c:pt idx="62">
-                  <c:v>519464.4477729239</c:v>
+                  <c:v>551933.8933546504</c:v>
                 </c:pt>
                 <c:pt idx="63">
-                  <c:v>527373.6716966778</c:v>
+                  <c:v>561924.4919951817</c:v>
                 </c:pt>
                 <c:pt idx="64">
-                  <c:v>535282.8956204318</c:v>
+                  <c:v>571915.0906357127</c:v>
                 </c:pt>
                 <c:pt idx="65">
-                  <c:v>543192.1195441856</c:v>
+                  <c:v>581905.689276244</c:v>
                 </c:pt>
                 <c:pt idx="66">
-                  <c:v>551101.3434679394</c:v>
+                  <c:v>591896.2879167753</c:v>
                 </c:pt>
                 <c:pt idx="67">
-                  <c:v>559010.5673916934</c:v>
+                  <c:v>601886.8865573064</c:v>
                 </c:pt>
                 <c:pt idx="68">
-                  <c:v>566919.7913154473</c:v>
+                  <c:v>611877.4851978377</c:v>
                 </c:pt>
                 <c:pt idx="69">
                   <c:v/>
@@ -1683,7 +1681,7 @@
               <a:solidFill>
                 <a:srgbClr val="C2410C"/>
               </a:solidFill>
-              <a:ln w="9525">
+              <a:ln w="19050">
                 <a:solidFill>
                   <a:srgbClr val="C2410C"/>
                 </a:solidFill>
@@ -1820,88 +1818,88 @@
                   <c:v>2100</c:v>
                 </c:pt>
                 <c:pt idx="41">
-                  <c:v>1450</c:v>
+                  <c:v>1400</c:v>
                 </c:pt>
                 <c:pt idx="42">
-                  <c:v>1485.1851851851852</c:v>
+                  <c:v>1444.4444444444443</c:v>
                 </c:pt>
                 <c:pt idx="43">
-                  <c:v>1520.3703703703704</c:v>
+                  <c:v>1488.888888888889</c:v>
                 </c:pt>
                 <c:pt idx="44">
-                  <c:v>1555.5555555555557</c:v>
+                  <c:v>1533.3333333333333</c:v>
                 </c:pt>
                 <c:pt idx="45">
-                  <c:v>1590.7407407407406</c:v>
+                  <c:v>1577.7777777777778</c:v>
                 </c:pt>
                 <c:pt idx="46">
-                  <c:v>1625.9259259259259</c:v>
+                  <c:v>1622.2222222222222</c:v>
                 </c:pt>
                 <c:pt idx="47">
-                  <c:v>1661.111111111111</c:v>
+                  <c:v>1666.6666666666667</c:v>
                 </c:pt>
                 <c:pt idx="48">
-                  <c:v>1696.2962962962963</c:v>
+                  <c:v>1711.111111111111</c:v>
                 </c:pt>
                 <c:pt idx="49">
-                  <c:v>1731.4814814814815</c:v>
+                  <c:v>1755.5555555555557</c:v>
                 </c:pt>
                 <c:pt idx="50">
-                  <c:v>1766.6666666666667</c:v>
+                  <c:v>1800</c:v>
                 </c:pt>
                 <c:pt idx="51">
-                  <c:v>1801.8518518518517</c:v>
+                  <c:v>1844.4444444444443</c:v>
                 </c:pt>
                 <c:pt idx="52">
-                  <c:v>1837.037037037037</c:v>
+                  <c:v>1888.888888888889</c:v>
                 </c:pt>
                 <c:pt idx="53">
-                  <c:v>1872.2222222222222</c:v>
+                  <c:v>1933.3333333333335</c:v>
                 </c:pt>
                 <c:pt idx="54">
-                  <c:v>1907.4074074074074</c:v>
+                  <c:v>1977.7777777777778</c:v>
                 </c:pt>
                 <c:pt idx="55">
-                  <c:v>1942.5925925925926</c:v>
+                  <c:v>2022.2222222222222</c:v>
                 </c:pt>
                 <c:pt idx="56">
-                  <c:v>1977.7777777777778</c:v>
+                  <c:v>2066.6666666666665</c:v>
                 </c:pt>
                 <c:pt idx="57">
-                  <c:v>2012.962962962963</c:v>
+                  <c:v>2111.1111111111113</c:v>
                 </c:pt>
                 <c:pt idx="58">
-                  <c:v>2048.1481481481483</c:v>
+                  <c:v>2155.5555555555557</c:v>
                 </c:pt>
                 <c:pt idx="59">
-                  <c:v>2083.3333333333335</c:v>
+                  <c:v>2200</c:v>
                 </c:pt>
                 <c:pt idx="60">
-                  <c:v>2118.5185185185182</c:v>
+                  <c:v>2244.4444444444443</c:v>
                 </c:pt>
                 <c:pt idx="61">
-                  <c:v>2153.7037037037035</c:v>
+                  <c:v>2288.8888888888887</c:v>
                 </c:pt>
                 <c:pt idx="62">
-                  <c:v>2188.8888888888887</c:v>
+                  <c:v>2333.3333333333335</c:v>
                 </c:pt>
                 <c:pt idx="63">
-                  <c:v>2224.074074074074</c:v>
+                  <c:v>2377.777777777778</c:v>
                 </c:pt>
                 <c:pt idx="64">
-                  <c:v>2259.259259259259</c:v>
+                  <c:v>2422.222222222222</c:v>
                 </c:pt>
                 <c:pt idx="65">
-                  <c:v>2294.4444444444443</c:v>
+                  <c:v>2466.666666666667</c:v>
                 </c:pt>
                 <c:pt idx="66">
-                  <c:v>2329.6296296296296</c:v>
+                  <c:v>2511.1111111111113</c:v>
                 </c:pt>
                 <c:pt idx="67">
-                  <c:v>2364.814814814815</c:v>
+                  <c:v>2555.5555555555557</c:v>
                 </c:pt>
                 <c:pt idx="68">
-                  <c:v>2400</c:v>
+                  <c:v>2600</c:v>
                 </c:pt>
                 <c:pt idx="69">
                   <c:v>1824</c:v>
@@ -2327,88 +2325,88 @@
                   <c:v>2100</c:v>
                 </c:pt>
                 <c:pt idx="41">
-                  <c:v>1450</c:v>
+                  <c:v>1400</c:v>
                 </c:pt>
                 <c:pt idx="42">
-                  <c:v>1485.1851851851852</c:v>
+                  <c:v>1444.4444444444443</c:v>
                 </c:pt>
                 <c:pt idx="43">
-                  <c:v>1520.3703703703704</c:v>
+                  <c:v>1488.888888888889</c:v>
                 </c:pt>
                 <c:pt idx="44">
-                  <c:v>1555.5555555555557</c:v>
+                  <c:v>1533.3333333333333</c:v>
                 </c:pt>
                 <c:pt idx="45">
-                  <c:v>1590.7407407407406</c:v>
+                  <c:v>1577.7777777777778</c:v>
                 </c:pt>
                 <c:pt idx="46">
-                  <c:v>1625.9259259259259</c:v>
+                  <c:v>1622.2222222222222</c:v>
                 </c:pt>
                 <c:pt idx="47">
-                  <c:v>1661.111111111111</c:v>
+                  <c:v>1666.6666666666667</c:v>
                 </c:pt>
                 <c:pt idx="48">
-                  <c:v>1696.2962962962963</c:v>
+                  <c:v>1711.111111111111</c:v>
                 </c:pt>
                 <c:pt idx="49">
-                  <c:v>1731.4814814814815</c:v>
+                  <c:v>1755.5555555555557</c:v>
                 </c:pt>
                 <c:pt idx="50">
-                  <c:v>1766.6666666666667</c:v>
+                  <c:v>1800</c:v>
                 </c:pt>
                 <c:pt idx="51">
-                  <c:v>1801.8518518518517</c:v>
+                  <c:v>1844.4444444444443</c:v>
                 </c:pt>
                 <c:pt idx="52">
-                  <c:v>1837.037037037037</c:v>
+                  <c:v>1888.888888888889</c:v>
                 </c:pt>
                 <c:pt idx="53">
-                  <c:v>1872.2222222222222</c:v>
+                  <c:v>1933.3333333333335</c:v>
                 </c:pt>
                 <c:pt idx="54">
-                  <c:v>1907.4074074074074</c:v>
+                  <c:v>1977.7777777777778</c:v>
                 </c:pt>
                 <c:pt idx="55">
-                  <c:v>1942.5925925925926</c:v>
+                  <c:v>2022.2222222222222</c:v>
                 </c:pt>
                 <c:pt idx="56">
-                  <c:v>1977.7777777777778</c:v>
+                  <c:v>2066.6666666666665</c:v>
                 </c:pt>
                 <c:pt idx="57">
-                  <c:v>2012.962962962963</c:v>
+                  <c:v>2111.1111111111113</c:v>
                 </c:pt>
                 <c:pt idx="58">
-                  <c:v>2048.1481481481483</c:v>
+                  <c:v>2155.5555555555557</c:v>
                 </c:pt>
                 <c:pt idx="59">
-                  <c:v>2083.3333333333335</c:v>
+                  <c:v>2200</c:v>
                 </c:pt>
                 <c:pt idx="60">
-                  <c:v>2118.5185185185182</c:v>
+                  <c:v>2244.4444444444443</c:v>
                 </c:pt>
                 <c:pt idx="61">
-                  <c:v>2153.7037037037035</c:v>
+                  <c:v>2288.8888888888887</c:v>
                 </c:pt>
                 <c:pt idx="62">
-                  <c:v>2188.8888888888887</c:v>
+                  <c:v>2333.3333333333335</c:v>
                 </c:pt>
                 <c:pt idx="63">
-                  <c:v>2224.074074074074</c:v>
+                  <c:v>2377.777777777778</c:v>
                 </c:pt>
                 <c:pt idx="64">
-                  <c:v>2259.259259259259</c:v>
+                  <c:v>2422.222222222222</c:v>
                 </c:pt>
                 <c:pt idx="65">
-                  <c:v>2294.4444444444443</c:v>
+                  <c:v>2466.666666666667</c:v>
                 </c:pt>
                 <c:pt idx="66">
-                  <c:v>2329.6296296296296</c:v>
+                  <c:v>2511.1111111111113</c:v>
                 </c:pt>
                 <c:pt idx="67">
-                  <c:v>2364.814814814815</c:v>
+                  <c:v>2555.5555555555557</c:v>
                 </c:pt>
                 <c:pt idx="68">
-                  <c:v>2400</c:v>
+                  <c:v>2600</c:v>
                 </c:pt>
                 <c:pt idx="69">
                   <c:v>1824</c:v>
@@ -2796,36 +2794,7 @@
             </a:ln>
           </c:spPr>
         </c:majorGridlines>
-        <c:title>
-          <c:tx>
-            <c:rich>
-              <a:bodyPr/>
-              <a:lstStyle/>
-              <a:p>
-                <a:pPr>
-                  <a:defRPr sz="1000" b="0" i="0" u="none" strike="noStrike">
-                    <a:solidFill>
-                      <a:srgbClr val="5E5E5E"/>
-                    </a:solidFill>
-                    <a:latin typeface="Arial"/>
-                  </a:defRPr>
-                </a:pPr>
-                <a:r>
-                  <a:rPr sz="1000" b="0" i="0" u="none" strike="noStrike">
-                    <a:solidFill>
-                      <a:srgbClr val="5E5E5E"/>
-                    </a:solidFill>
-                    <a:latin typeface="Arial"/>
-                  </a:rPr>
-                  <a:t>Price</a:t>
-                </a:r>
-              </a:p>
-            </c:rich>
-          </c:tx>
-          <c:layout/>
-          <c:overlay val="0"/>
-        </c:title>
-        <c:numFmt formatCode="$#,##0,&quot;K&quot;" sourceLinked="0"/>
+        <c:numFmt formatCode=";;;" sourceLinked="0"/>
         <c:majorTickMark val="none"/>
         <c:minorTickMark val="none"/>
         <c:tickLblPos val="nextTo"/>
@@ -2917,7 +2886,7 @@
           </c:spPr>
           <c:invertIfNegative val="0"/>
           <c:dLbls>
-            <c:numFmt formatCode="$#,##0" sourceLinked="0"/>
+            <c:numFmt formatCode="$#,##0;&quot;−&quot;$#,##0" sourceLinked="0"/>
             <c:txPr>
               <a:bodyPr/>
               <a:lstStyle/>
@@ -2947,13 +2916,13 @@
                 <c:ptCount val="3"/>
                 <c:lvl>
                   <c:pt idx="0">
-                    <c:v>List $479,900</c:v>
+                    <c:v>List at $479,900</c:v>
                   </c:pt>
                   <c:pt idx="1">
-                    <c:v>List $469,900</c:v>
+                    <c:v>List at $469,900</c:v>
                   </c:pt>
                   <c:pt idx="2">
-                    <c:v>List $459,900</c:v>
+                    <c:v>List at $459,900</c:v>
                   </c:pt>
                 </c:lvl>
               </c:multiLvlStrCache>
@@ -2966,20 +2935,20 @@
                 <c:formatCode>General</c:formatCode>
                 <c:ptCount val="3"/>
                 <c:pt idx="0">
-                  <c:v>423768</c:v>
+                  <c:v>423519</c:v>
                 </c:pt>
                 <c:pt idx="1">
-                  <c:v>424812</c:v>
+                  <c:v>424563</c:v>
                 </c:pt>
                 <c:pt idx="2">
-                  <c:v>419796</c:v>
+                  <c:v>419558</c:v>
                 </c:pt>
               </c:numCache>
             </c:numRef>
           </c:val>
         </c:ser>
         <c:dLbls>
-          <c:numFmt formatCode="$#,##0" sourceLinked="0"/>
+          <c:numFmt formatCode="$#,##0;&quot;−&quot;$#,##0" sourceLinked="0"/>
           <c:txPr>
             <a:bodyPr/>
             <a:lstStyle/>
@@ -3055,20 +3024,9 @@
           <c:orientation val="minMax"/>
           <c:min val="0"/>
         </c:scaling>
-        <c:delete val="0"/>
+        <c:delete val="1"/>
         <c:axPos val="l"/>
-        <c:majorGridlines>
-          <c:spPr>
-            <a:ln w="6350" cap="flat">
-              <a:solidFill>
-                <a:srgbClr val="F8E8E2"/>
-              </a:solidFill>
-              <a:prstDash val="solid"/>
-              <a:round/>
-            </a:ln>
-          </c:spPr>
-        </c:majorGridlines>
-        <c:numFmt formatCode="$#,##0,&quot;K&quot;" sourceLinked="0"/>
+        <c:numFmt formatCode="General" sourceLinked="0"/>
         <c:majorTickMark val="out"/>
         <c:minorTickMark val="none"/>
         <c:tickLblPos val="nextTo"/>
@@ -3086,9 +3044,9 @@
           <a:lstStyle/>
           <a:p>
             <a:pPr>
-              <a:defRPr sz="900" b="0" i="0" u="none" strike="noStrike">
-                <a:solidFill>
-                  <a:srgbClr val="5E5E5E"/>
+              <a:defRPr sz="1200" b="0" i="0" u="none" strike="noStrike">
+                <a:solidFill>
+                  <a:srgbClr val="000000"/>
                 </a:solidFill>
                 <a:latin typeface="Arial"/>
               </a:defRPr>
@@ -3607,7 +3565,7 @@
           <a:p>
             <a:r>
               <a:rPr lang="en-US" dirty="0"/>
-              <a:t>Before mortgage payoff. Brokerage is assumed at 2.5% + 2.5% until we finalize the listing agreement.</a:t>
+              <a:t>The appendix has every line of the net sheet, and the notes say what each rests on.</a:t>
             </a:r>
             <a:endParaRPr lang="en-US" dirty="0"/>
           </a:p>
@@ -3695,7 +3653,7 @@
           <a:p>
             <a:r>
               <a:rPr lang="en-US" dirty="0"/>
-              <a:t>Conventional loan, 5% down, 6.95%, city taxes with homestead, $3,600 insurance, 0.5% PMI.</a:t>
+              <a:t>Buyers shop by payment; the report's notes give the loan and tax basis.</a:t>
             </a:r>
             <a:endParaRPr lang="en-US" dirty="0"/>
           </a:p>
@@ -3959,7 +3917,7 @@
           <a:p>
             <a:r>
               <a:rPr lang="en-US" dirty="0"/>
-              <a:t>Holding costs: about $530 a month (insurance and utilities; no loan interest, since no mortgage payoff was given; property tax is not included) for each option's time to contract plus 1 month to close. Commissions are negotiable and not set by law. Not included: this year's property tax proration. Taxes here are paid in arrears, so the seller credits the buyer from Jan 1; add the tax bill and the expected closing date to include it. Title company fees are typical local charges (settlement fee $700, title search $250, municipal lien search $125, recording $70); the title company's quote replaces them. Estimates only. Not included: mortgage payoff, tax proration and repairs; the closing agent provides exact figures.</a:t>
+              <a:t>Expected sales are estimates, not guarantees: each option's list price times an assumed 97.0% of its final asking price after seller-paid costs, plus that option's seller credit, to the nearest $500. None is below the supported range (the comps are already net of seller credits) or above its list price or the top of the range. At $479,900 we expect the recommended option's sale: a price above the range usually sells after a cut, so it costs time rather than adding to the sale. Holding costs: about $530 a month (insurance and utilities; no loan interest, since no mortgage payoff was given) from the report date to each option's closing; property tax is in the proration. Title company fees are typical local charges (settlement fee $700, title search $250, municipal lien search $125, recording $70); the title company's quote replaces them. Buyer payments: Conventional loan, 5% down, 6.95% 30-year fixed, property taxes at 18.1808 mills, with homestead, $3,600 a year insurance, and 0.5% a year mortgage insurance. Commissions are negotiable and not set by law. Not included: your mortgage payoff, this year's property tax proration (the tax bill and the expected closing date add it) and any repairs agreed after inspection. The closing agent provides the exact figures. Flood zone X: a lender may not require flood insurance, but a Citizens policy on a home with a dwelling replacement cost of $400,000 or more must carry flood insurance, and from January 1, 2027 every Citizens policy must (s. 627.351(6)(aa)). Get a quote; the total leaves it out until then.</a:t>
             </a:r>
             <a:endParaRPr lang="en-US" dirty="0"/>
           </a:p>
@@ -4047,7 +4005,7 @@
           <a:p>
             <a:r>
               <a:rPr lang="en-US" dirty="0"/>
-              <a:t>Adjustments: about $75 per sq ft of size difference; $30,000–$45,000 for renovation level; $5,000–$10,000 for larger or better lots; 1–2% for market change since the sale; seller-paid costs subtracted. A broker's opinion of value from comparable sales, not an appraisal, and not for lending. Sales data: Stellar MLS as of September 22, 2026. Deemed reliable but not guaranteed. This comparative market analysis is an opinion of price, not an appraisal, and isn't for lending purposes. Payment, tax and cost figures are estimates only, not lending or tax advice. Equal Housing Opportunity.</a:t>
+              <a:t>Adjusted for size ($1,200 to $1,800), lot ($5,000), market changes since each sale (1% a quarter off sales before July), roof and systems ($5,000), condition and updates ($30,000 to $45,000), view or water ($10,000) and seller credits (taken off each sale price). These are the five closest matches, sold Apr 24, 2026 to Aug 20, 2026 (one since July), all within a mile.</a:t>
             </a:r>
             <a:endParaRPr lang="en-US" dirty="0"/>
           </a:p>
@@ -4223,7 +4181,7 @@
           <a:p>
             <a:r>
               <a:rPr lang="en-US" dirty="0"/>
-              <a:t>33 sales within a mile since April; we kept the 5 closest in size, pool, age and neighborhood, adjusted each for differences from your home, and the median adjusted value is about $469,800.</a:t>
+              <a:t>We started from every nearby sale, kept the closest matches in size, pool, age and neighborhood, and adjusted each for its differences from your home.</a:t>
             </a:r>
             <a:endParaRPr lang="en-US" dirty="0"/>
           </a:p>
@@ -4399,7 +4357,7 @@
           <a:p>
             <a:r>
               <a:rPr lang="en-US" dirty="0"/>
-              <a:t>Each bar is what that home would have sold for if it were yours. Adjustment details are in the report and the appendix.</a:t>
+              <a:t>Each dot is what that home would have sold for if it were yours. Adjustment details are in the report and the appendix.</a:t>
             </a:r>
             <a:endParaRPr lang="en-US" dirty="0"/>
           </a:p>
@@ -4487,7 +4445,7 @@
           <a:p>
             <a:r>
               <a:rPr lang="en-US" dirty="0"/>
-              <a:t>Every sale and listing within a mile. The dotted line is size alone; renovation and pool push homes above it.</a:t>
+              <a:t>Every sale and listing nearby. The dashed line is size alone; renovation and a pool push homes above it.</a:t>
             </a:r>
             <a:endParaRPr lang="en-US" dirty="0"/>
           </a:p>
@@ -4575,7 +4533,7 @@
           <a:p>
             <a:r>
               <a:rPr lang="en-US" dirty="0"/>
-              <a:t>Spring = April to June sales; summer = July to mid-September. Rates are the Freddie Mac 30-year average.</a:t>
+              <a:t>The earlier period is the spring sales; now is the summer sales. The report's market table has every figure.</a:t>
             </a:r>
             <a:endParaRPr lang="en-US" dirty="0"/>
           </a:p>
@@ -4751,7 +4709,7 @@
           <a:p>
             <a:r>
               <a:rPr lang="en-US" dirty="0"/>
-              <a:t>Expected sale prices and timelines are estimates from recent sales. The $459,900 option assumes competing offers reduce the seller credit to $5,000.</a:t>
+              <a:t>Expected sale prices and timelines are estimates from recent sales. The competing-offer option assumes a smaller seller credit.</a:t>
             </a:r>
             <a:endParaRPr lang="en-US" dirty="0"/>
           </a:p>
@@ -5221,7 +5179,7 @@
         <p:spPr>
           <a:xfrm>
             <a:off x="457200" y="2606040"/>
-            <a:ext cx="7772400" cy="411480"/>
+            <a:ext cx="7772400" cy="365760"/>
           </a:xfrm>
           <a:prstGeom prst="rect">
             <a:avLst/>
@@ -5259,7 +5217,7 @@
         </p:nvSpPr>
         <p:spPr>
           <a:xfrm>
-            <a:off x="457200" y="3429000"/>
+            <a:off x="457200" y="3520440"/>
             <a:ext cx="7772400" cy="1097280"/>
           </a:xfrm>
           <a:prstGeom prst="rect">
@@ -5471,7 +5429,7 @@
         </p:nvGraphicFramePr>
         <p:xfrm>
           <a:off x="457200" y="1234440"/>
-          <a:ext cx="5120640" cy="3200400"/>
+          <a:ext cx="5120640" cy="3108960"/>
         </p:xfrm>
         <a:graphic xmlns:a="http://schemas.openxmlformats.org/drawingml/2006/main">
           <a:graphicData uri="http://schemas.openxmlformats.org/drawingml/2006/chart">
@@ -5539,7 +5497,7 @@
                 <a:ea typeface="Arial" pitchFamily="34" charset="-122"/>
                 <a:cs typeface="Arial" pitchFamily="34" charset="-120"/>
               </a:rPr>
-              <a:t>$5,016</a:t>
+              <a:t>$5,005</a:t>
             </a:r>
             <a:endParaRPr lang="en-US" sz="3200" dirty="0"/>
           </a:p>
@@ -5617,7 +5575,7 @@
                 <a:ea typeface="Arial" pitchFamily="34" charset="-122"/>
                 <a:cs typeface="Arial" pitchFamily="34" charset="-120"/>
               </a:rPr>
-              <a:t>All three net within a few thousand dollars. The real choice is time and risk.</a:t>
+              <a:t>The nets are close. The real choice is time and risk.</a:t>
             </a:r>
             <a:endParaRPr lang="en-US" sz="1300" dirty="0"/>
           </a:p>
@@ -5871,7 +5829,7 @@
                 <a:ea typeface="Arial" pitchFamily="34" charset="-122"/>
                 <a:cs typeface="Arial" pitchFamily="34" charset="-120"/>
               </a:rPr>
-              <a:t>List $479,900</a:t>
+              <a:t>List at $479,900</a:t>
             </a:r>
             <a:endParaRPr lang="en-US" sz="1300" dirty="0"/>
           </a:p>
@@ -6015,7 +5973,7 @@
                 <a:ea typeface="Arial" pitchFamily="34" charset="-122"/>
                 <a:cs typeface="Arial" pitchFamily="34" charset="-120"/>
               </a:rPr>
-              <a:t>List $469,900</a:t>
+              <a:t>List at $469,900</a:t>
             </a:r>
             <a:endParaRPr lang="en-US" sz="1300" dirty="0"/>
           </a:p>
@@ -6159,7 +6117,7 @@
                 <a:ea typeface="Arial" pitchFamily="34" charset="-122"/>
                 <a:cs typeface="Arial" pitchFamily="34" charset="-120"/>
               </a:rPr>
-              <a:t>List $459,900</a:t>
+              <a:t>List at $459,900</a:t>
             </a:r>
             <a:endParaRPr lang="en-US" sz="1300" dirty="0"/>
           </a:p>
@@ -6198,7 +6156,7 @@
                 <a:ea typeface="Arial" pitchFamily="34" charset="-122"/>
                 <a:cs typeface="Arial" pitchFamily="34" charset="-120"/>
               </a:rPr>
-              <a:t>$4,005/mo</a:t>
+              <a:t>$4,004/mo</a:t>
             </a:r>
             <a:endParaRPr lang="en-US" sz="2800" dirty="0"/>
           </a:p>
@@ -6251,7 +6209,7 @@
         </p:nvSpPr>
         <p:spPr>
           <a:xfrm>
-            <a:off x="457200" y="3429000"/>
+            <a:off x="457200" y="3383280"/>
             <a:ext cx="502920" cy="502920"/>
           </a:xfrm>
           <a:prstGeom prst="ellipse">
@@ -6284,7 +6242,7 @@
         </p:blipFill>
         <p:spPr>
           <a:xfrm>
-            <a:off x="577901" y="3549701"/>
+            <a:off x="577901" y="3503981"/>
             <a:ext cx="261518" cy="261518"/>
           </a:xfrm>
           <a:prstGeom prst="rect">
@@ -6300,8 +6258,8 @@
         </p:nvSpPr>
         <p:spPr>
           <a:xfrm>
-            <a:off x="1143000" y="3383280"/>
-            <a:ext cx="7543800" cy="594360"/>
+            <a:off x="1143000" y="3310128"/>
+            <a:ext cx="7543800" cy="292608"/>
           </a:xfrm>
           <a:prstGeom prst="rect">
             <a:avLst/>
@@ -6317,7 +6275,46 @@
               <a:buNone/>
             </a:pPr>
             <a:r>
-              <a:rPr lang="en-US" sz="1500" b="1" dirty="0">
+              <a:rPr lang="en-US" sz="1400" b="1" dirty="0">
+                <a:solidFill>
+                  <a:srgbClr val="C2410C"/>
+                </a:solidFill>
+                <a:latin typeface="Arial" pitchFamily="34" charset="0"/>
+                <a:ea typeface="Arial" pitchFamily="34" charset="-122"/>
+                <a:cs typeface="Arial" pitchFamily="34" charset="-120"/>
+              </a:rPr>
+              <a:t>Every $10,000 in price is about $83 a month to a buyer.</a:t>
+            </a:r>
+            <a:endParaRPr lang="en-US" sz="1400" dirty="0"/>
+          </a:p>
+        </p:txBody>
+      </p:sp>
+      <p:sp>
+        <p:nvSpPr>
+          <p:cNvPr id="19" name="Text 16"/>
+          <p:cNvSpPr txBox="1"/>
+          <p:nvPr/>
+        </p:nvSpPr>
+        <p:spPr>
+          <a:xfrm>
+            <a:off x="1143000" y="3639312"/>
+            <a:ext cx="7543800" cy="1065276"/>
+          </a:xfrm>
+          <a:prstGeom prst="rect">
+            <a:avLst/>
+          </a:prstGeom>
+          <a:noFill/>
+          <a:ln/>
+        </p:spPr>
+        <p:txBody>
+          <a:bodyPr wrap="square" lIns="0" tIns="0" rIns="0" bIns="0" rtlCol="0" anchor="t"/>
+          <a:lstStyle/>
+          <a:p>
+            <a:pPr indent="0" marL="0">
+              <a:buNone/>
+            </a:pPr>
+            <a:r>
+              <a:rPr lang="en-US" sz="1400" b="1" dirty="0">
                 <a:solidFill>
                   <a:srgbClr val="1A1A1A"/>
                 </a:solidFill>
@@ -6325,15 +6322,15 @@
                 <a:ea typeface="Arial" pitchFamily="34" charset="-122"/>
                 <a:cs typeface="Arial" pitchFamily="34" charset="-120"/>
               </a:rPr>
-              <a:t>Buyers shop by payment. Every $10,000 is about $80 a month to them.</a:t>
-            </a:r>
-            <a:endParaRPr lang="en-US" sz="1500" dirty="0"/>
-          </a:p>
-        </p:txBody>
-      </p:sp>
-      <p:sp>
-        <p:nvSpPr>
-          <p:cNvPr id="19" name="Text 16"/>
+              <a:t>Buyers shop by payment, so a small change in price moves the number they see.</a:t>
+            </a:r>
+            <a:endParaRPr lang="en-US" sz="1400" dirty="0"/>
+          </a:p>
+        </p:txBody>
+      </p:sp>
+      <p:sp>
+        <p:nvSpPr>
+          <p:cNvPr id="20" name="Text 17"/>
           <p:cNvSpPr txBox="1"/>
           <p:nvPr/>
         </p:nvSpPr>
@@ -6372,7 +6369,7 @@
       </p:sp>
       <p:sp>
         <p:nvSpPr>
-          <p:cNvPr id="20" name="Text 17"/>
+          <p:cNvPr id="21" name="Text 18"/>
           <p:cNvSpPr txBox="1"/>
           <p:nvPr/>
         </p:nvSpPr>
@@ -6667,7 +6664,7 @@
                 <a:ea typeface="Arial" pitchFamily="34" charset="-122"/>
                 <a:cs typeface="Arial" pitchFamily="34" charset="-120"/>
               </a:rPr>
-              <a:t>Permit and date, ready to share</a:t>
+              <a:t>Permit and date, ready for buyers and insurers</a:t>
             </a:r>
             <a:endParaRPr lang="en-US" sz="1100" dirty="0"/>
           </a:p>
@@ -6774,7 +6771,7 @@
               <a:buNone/>
             </a:pPr>
             <a:r>
-              <a:rPr lang="en-US" sz="1250" b="1" dirty="0">
+              <a:rPr lang="en-US" sz="1300" b="1" dirty="0">
                 <a:solidFill>
                   <a:srgbClr val="1A1A1A"/>
                 </a:solidFill>
@@ -6782,9 +6779,9 @@
                 <a:ea typeface="Arial" pitchFamily="34" charset="-122"/>
                 <a:cs typeface="Arial" pitchFamily="34" charset="-120"/>
               </a:rPr>
-              <a:t>Pre-Listing Inspection</a:t>
-            </a:r>
-            <a:endParaRPr lang="en-US" sz="1250" dirty="0"/>
+              <a:t>Get the Inspections</a:t>
+            </a:r>
+            <a:endParaRPr lang="en-US" sz="1300" dirty="0"/>
           </a:p>
         </p:txBody>
       </p:sp>
@@ -6821,7 +6818,7 @@
                 <a:ea typeface="Arial" pitchFamily="34" charset="-122"/>
                 <a:cs typeface="Arial" pitchFamily="34" charset="-120"/>
               </a:rPr>
-              <a:t>Plus 4-point and wind-mitigation reports</a:t>
+              <a:t>Pre-listing, four-point and wind-mitigation reports</a:t>
             </a:r>
             <a:endParaRPr lang="en-US" sz="1100" dirty="0"/>
           </a:p>
@@ -6936,7 +6933,7 @@
                 <a:ea typeface="Arial" pitchFamily="34" charset="-122"/>
                 <a:cs typeface="Arial" pitchFamily="34" charset="-120"/>
               </a:rPr>
-              <a:t>Gather Permits</a:t>
+              <a:t>Gather the Renovation Permits</a:t>
             </a:r>
             <a:endParaRPr lang="en-US" sz="1300" dirty="0"/>
           </a:p>
@@ -7082,7 +7079,7 @@
               <a:buNone/>
             </a:pPr>
             <a:r>
-              <a:rPr lang="en-US" sz="1300" b="1" dirty="0">
+              <a:rPr lang="en-US" sz="1250" b="1" dirty="0">
                 <a:solidFill>
                   <a:srgbClr val="1A1A1A"/>
                 </a:solidFill>
@@ -7090,9 +7087,9 @@
                 <a:ea typeface="Arial" pitchFamily="34" charset="-122"/>
                 <a:cs typeface="Arial" pitchFamily="34" charset="-120"/>
               </a:rPr>
-              <a:t>Decide on a Seller-Credit Budget</a:t>
-            </a:r>
-            <a:endParaRPr lang="en-US" sz="1300" dirty="0"/>
+              <a:t>Make It Easy to Show</a:t>
+            </a:r>
+            <a:endParaRPr lang="en-US" sz="1250" dirty="0"/>
           </a:p>
         </p:txBody>
       </p:sp>
@@ -7129,7 +7126,7 @@
                 <a:ea typeface="Arial" pitchFamily="34" charset="-122"/>
                 <a:cs typeface="Arial" pitchFamily="34" charset="-120"/>
               </a:rPr>
-              <a:t>Decide it now, before offers arrive</a:t>
+              <a:t>Short-notice showings in the first weeks</a:t>
             </a:r>
             <a:endParaRPr lang="en-US" sz="1100" dirty="0"/>
           </a:p>
@@ -7244,7 +7241,7 @@
                 <a:ea typeface="Arial" pitchFamily="34" charset="-122"/>
                 <a:cs typeface="Arial" pitchFamily="34" charset="-120"/>
               </a:rPr>
-              <a:t>Agree on a Review Point</a:t>
+              <a:t>Decide on a Seller-Credit Budget</a:t>
             </a:r>
             <a:endParaRPr lang="en-US" sz="1300" dirty="0"/>
           </a:p>
@@ -7283,6 +7280,160 @@
                 <a:ea typeface="Arial" pitchFamily="34" charset="-122"/>
                 <a:cs typeface="Arial" pitchFamily="34" charset="-120"/>
               </a:rPr>
+              <a:t>Decide it now, before offers arrive</a:t>
+            </a:r>
+            <a:endParaRPr lang="en-US" sz="1100" dirty="0"/>
+          </a:p>
+        </p:txBody>
+      </p:sp>
+      <p:sp>
+        <p:nvSpPr>
+          <p:cNvPr id="29" name="Shape 22"/>
+          <p:cNvSpPr/>
+          <p:nvPr/>
+        </p:nvSpPr>
+        <p:spPr>
+          <a:xfrm>
+            <a:off x="6126480" y="2834640"/>
+            <a:ext cx="2560320" cy="1280160"/>
+          </a:xfrm>
+          <a:prstGeom prst="roundRect">
+            <a:avLst>
+              <a:gd name="adj" fmla="val 5714"/>
+            </a:avLst>
+          </a:prstGeom>
+          <a:solidFill>
+            <a:srgbClr val="FBF2EE"/>
+          </a:solidFill>
+          <a:ln w="12700">
+            <a:solidFill>
+              <a:srgbClr val="FBF2EE"/>
+            </a:solidFill>
+            <a:prstDash val="solid"/>
+          </a:ln>
+        </p:spPr>
+      </p:sp>
+      <p:sp>
+        <p:nvSpPr>
+          <p:cNvPr id="30" name="Shape 23"/>
+          <p:cNvSpPr/>
+          <p:nvPr/>
+        </p:nvSpPr>
+        <p:spPr>
+          <a:xfrm>
+            <a:off x="6291072" y="3017520"/>
+            <a:ext cx="411480" cy="411480"/>
+          </a:xfrm>
+          <a:prstGeom prst="ellipse">
+            <a:avLst/>
+          </a:prstGeom>
+          <a:solidFill>
+            <a:srgbClr val="C2410C"/>
+          </a:solidFill>
+          <a:ln w="12700">
+            <a:solidFill>
+              <a:srgbClr val="C2410C"/>
+            </a:solidFill>
+            <a:prstDash val="solid"/>
+          </a:ln>
+        </p:spPr>
+      </p:sp>
+      <p:pic>
+        <p:nvPicPr>
+          <p:cNvPr id="31" name="Image 5" descr="preencoded.png">    </p:cNvPr>
+          <p:cNvPicPr>
+            <a:picLocks noChangeAspect="1"/>
+          </p:cNvPicPr>
+          <p:nvPr/>
+        </p:nvPicPr>
+        <p:blipFill>
+          <a:blip r:embed="rId6"/>
+          <a:stretch>
+            <a:fillRect/>
+          </a:stretch>
+        </p:blipFill>
+        <p:spPr>
+          <a:xfrm>
+            <a:off x="6389827" y="3116275"/>
+            <a:ext cx="213970" cy="213970"/>
+          </a:xfrm>
+          <a:prstGeom prst="rect">
+            <a:avLst/>
+          </a:prstGeom>
+        </p:spPr>
+      </p:pic>
+      <p:sp>
+        <p:nvSpPr>
+          <p:cNvPr id="32" name="Text 24"/>
+          <p:cNvSpPr txBox="1"/>
+          <p:nvPr/>
+        </p:nvSpPr>
+        <p:spPr>
+          <a:xfrm>
+            <a:off x="6812280" y="2990088"/>
+            <a:ext cx="1737360" cy="457200"/>
+          </a:xfrm>
+          <a:prstGeom prst="rect">
+            <a:avLst/>
+          </a:prstGeom>
+          <a:noFill/>
+          <a:ln/>
+        </p:spPr>
+        <p:txBody>
+          <a:bodyPr wrap="square" lIns="0" tIns="0" rIns="0" bIns="0" rtlCol="0" anchor="ctr"/>
+          <a:lstStyle/>
+          <a:p>
+            <a:pPr indent="0" marL="0">
+              <a:buNone/>
+            </a:pPr>
+            <a:r>
+              <a:rPr lang="en-US" sz="1300" b="1" dirty="0">
+                <a:solidFill>
+                  <a:srgbClr val="1A1A1A"/>
+                </a:solidFill>
+                <a:latin typeface="Arial" pitchFamily="34" charset="0"/>
+                <a:ea typeface="Arial" pitchFamily="34" charset="-122"/>
+                <a:cs typeface="Arial" pitchFamily="34" charset="-120"/>
+              </a:rPr>
+              <a:t>Agree on a Review Point</a:t>
+            </a:r>
+            <a:endParaRPr lang="en-US" sz="1300" dirty="0"/>
+          </a:p>
+        </p:txBody>
+      </p:sp>
+      <p:sp>
+        <p:nvSpPr>
+          <p:cNvPr id="33" name="Text 25"/>
+          <p:cNvSpPr txBox="1"/>
+          <p:nvPr/>
+        </p:nvSpPr>
+        <p:spPr>
+          <a:xfrm>
+            <a:off x="6309360" y="3566160"/>
+            <a:ext cx="2194560" cy="475488"/>
+          </a:xfrm>
+          <a:prstGeom prst="rect">
+            <a:avLst/>
+          </a:prstGeom>
+          <a:noFill/>
+          <a:ln/>
+        </p:spPr>
+        <p:txBody>
+          <a:bodyPr wrap="square" lIns="0" tIns="0" rIns="0" bIns="0" rtlCol="0" anchor="t"/>
+          <a:lstStyle/>
+          <a:p>
+            <a:pPr indent="0" marL="0">
+              <a:buNone/>
+            </a:pPr>
+            <a:r>
+              <a:rPr lang="en-US" sz="1100" dirty="0">
+                <a:solidFill>
+                  <a:srgbClr val="5E5E5E"/>
+                </a:solidFill>
+                <a:latin typeface="Arial" pitchFamily="34" charset="0"/>
+                <a:ea typeface="Arial" pitchFamily="34" charset="-122"/>
+                <a:cs typeface="Arial" pitchFamily="34" charset="-120"/>
+              </a:rPr>
               <a:t>Steady showings but no offer? Revisit the price</a:t>
             </a:r>
             <a:endParaRPr lang="en-US" sz="1100" dirty="0"/>
@@ -7291,7 +7442,7 @@
       </p:sp>
       <p:sp>
         <p:nvSpPr>
-          <p:cNvPr id="29" name="Text 22"/>
+          <p:cNvPr id="34" name="Text 26"/>
           <p:cNvSpPr txBox="1"/>
           <p:nvPr/>
         </p:nvSpPr>
@@ -7330,7 +7481,7 @@
       </p:sp>
       <p:sp>
         <p:nvSpPr>
-          <p:cNvPr id="30" name="Text 23"/>
+          <p:cNvPr id="35" name="Text 27"/>
           <p:cNvSpPr txBox="1"/>
           <p:nvPr/>
         </p:nvSpPr>
@@ -7514,7 +7665,7 @@
                 <a:ea typeface="Arial" pitchFamily="34" charset="-122"/>
                 <a:cs typeface="Arial" pitchFamily="34" charset="-120"/>
               </a:rPr>
-              <a:t>Roof permit and date, plus any 4-point or wind-mitigation report</a:t>
+              <a:t>Roof permit and date, and any inspection reports</a:t>
             </a:r>
             <a:endParaRPr lang="en-US" sz="1250" dirty="0"/>
           </a:p>
@@ -7535,7 +7686,7 @@
                 <a:ea typeface="Arial" pitchFamily="34" charset="-122"/>
                 <a:cs typeface="Arial" pitchFamily="34" charset="-120"/>
               </a:rPr>
-              <a:t>Ages of AC, water heater, and pool equipment</a:t>
+              <a:t>Ages of the AC, water heater and pool equipment</a:t>
             </a:r>
             <a:endParaRPr lang="en-US" sz="1250" dirty="0"/>
           </a:p>
@@ -7577,7 +7728,7 @@
                 <a:ea typeface="Arial" pitchFamily="34" charset="-122"/>
                 <a:cs typeface="Arial" pitchFamily="34" charset="-120"/>
               </a:rPr>
-              <a:t>Anything known about leaks, claims, or repairs</a:t>
+              <a:t>Anything known about leaks, claims or repairs</a:t>
             </a:r>
             <a:endParaRPr lang="en-US" sz="1250" dirty="0"/>
           </a:p>
@@ -7598,7 +7749,7 @@
                 <a:ea typeface="Arial" pitchFamily="34" charset="-122"/>
                 <a:cs typeface="Arial" pitchFamily="34" charset="-120"/>
               </a:rPr>
-              <a:t>Your estimated mortgage payoff and target closing date</a:t>
+              <a:t>Your mortgage payoff and target closing date</a:t>
             </a:r>
             <a:endParaRPr lang="en-US" sz="1250" dirty="0"/>
           </a:p>
@@ -7779,7 +7930,7 @@
                 <a:ea typeface="Arial" pitchFamily="34" charset="-122"/>
                 <a:cs typeface="Arial" pitchFamily="34" charset="-120"/>
               </a:rPr>
-              <a:t>Sign listing agreement; order inspections</a:t>
+              <a:t>Sign the listing agreement; order the inspections</a:t>
             </a:r>
             <a:endParaRPr lang="en-US" sz="1100" dirty="0"/>
           </a:p>
@@ -7882,7 +8033,7 @@
                 <a:ea typeface="Arial" pitchFamily="34" charset="-122"/>
                 <a:cs typeface="Arial" pitchFamily="34" charset="-120"/>
               </a:rPr>
-              <a:t>Week 2</a:t>
+              <a:t>Before Launch</a:t>
             </a:r>
             <a:endParaRPr lang="en-US" sz="1200" dirty="0"/>
           </a:p>
@@ -7921,7 +8072,7 @@
                 <a:ea typeface="Arial" pitchFamily="34" charset="-122"/>
                 <a:cs typeface="Arial" pitchFamily="34" charset="-120"/>
               </a:rPr>
-              <a:t>Photos, documents, and pricing review</a:t>
+              <a:t>Photos, documents and a final pricing review</a:t>
             </a:r>
             <a:endParaRPr lang="en-US" sz="1100" dirty="0"/>
           </a:p>
@@ -8024,7 +8175,7 @@
                 <a:ea typeface="Arial" pitchFamily="34" charset="-122"/>
                 <a:cs typeface="Arial" pitchFamily="34" charset="-120"/>
               </a:rPr>
-              <a:t>Early October</a:t>
+              <a:t>Oct 6</a:t>
             </a:r>
             <a:endParaRPr lang="en-US" sz="1200" dirty="0"/>
           </a:p>
@@ -8166,7 +8317,7 @@
                 <a:ea typeface="Arial" pitchFamily="34" charset="-122"/>
                 <a:cs typeface="Arial" pitchFamily="34" charset="-120"/>
               </a:rPr>
-              <a:t>Week 6</a:t>
+              <a:t>After Launch</a:t>
             </a:r>
             <a:endParaRPr lang="en-US" sz="1200" dirty="0"/>
           </a:p>
@@ -8205,7 +8356,7 @@
                 <a:ea typeface="Arial" pitchFamily="34" charset="-122"/>
                 <a:cs typeface="Arial" pitchFamily="34" charset="-120"/>
               </a:rPr>
-              <a:t>Price review if no offer</a:t>
+              <a:t>Price review if steady showings bring no offer</a:t>
             </a:r>
             <a:endParaRPr lang="en-US" sz="1100" dirty="0"/>
           </a:p>
@@ -8349,7 +8500,7 @@
                 <a:gridCol w="1645920"/>
                 <a:gridCol w="1645920"/>
               </a:tblGrid>
-              <a:tr h="292608">
+              <a:tr h="270976">
                 <a:tc>
                   <a:txBody>
                     <a:bodyPr/>
@@ -8417,7 +8568,7 @@
                           <a:ea typeface="Arial" pitchFamily="34" charset="-122"/>
                           <a:cs typeface="Arial" pitchFamily="34" charset="-120"/>
                         </a:rPr>
-                        <a:t>List $479,900</a:t>
+                        <a:t>List at $479,900</a:t>
                       </a:r>
                       <a:endParaRPr lang="en-US" sz="1100" dirty="0">
                         <a:latin typeface="Arial" charset="0"/>
@@ -8467,7 +8618,7 @@
                           <a:ea typeface="Arial" pitchFamily="34" charset="-122"/>
                           <a:cs typeface="Arial" pitchFamily="34" charset="-120"/>
                         </a:rPr>
-                        <a:t>List $469,900</a:t>
+                        <a:t>List at $469,900</a:t>
                       </a:r>
                       <a:endParaRPr lang="en-US" sz="1100" dirty="0">
                         <a:latin typeface="Arial" charset="0"/>
@@ -8517,7 +8668,7 @@
                           <a:ea typeface="Arial" pitchFamily="34" charset="-122"/>
                           <a:cs typeface="Arial" pitchFamily="34" charset="-120"/>
                         </a:rPr>
-                        <a:t>List $459,900</a:t>
+                        <a:t>List at $459,900</a:t>
                       </a:r>
                       <a:endParaRPr lang="en-US" sz="1100" dirty="0">
                         <a:latin typeface="Arial" charset="0"/>
@@ -8551,7 +8702,7 @@
                   </a:tcPr>
                 </a:tc>
               </a:tr>
-              <a:tr h="292608">
+              <a:tr h="270976">
                 <a:tc>
                   <a:txBody>
                     <a:bodyPr/>
@@ -8753,7 +8904,209 @@
                   </a:tcPr>
                 </a:tc>
               </a:tr>
-              <a:tr h="292608">
+              <a:tr h="270976">
+                <a:tc>
+                  <a:txBody>
+                    <a:bodyPr/>
+                    <a:lstStyle/>
+                    <a:p>
+                      <a:pPr algn="l" indent="0" marL="0">
+                        <a:buNone/>
+                      </a:pPr>
+                      <a:r>
+                        <a:rPr lang="en-US" sz="1100" dirty="0">
+                          <a:solidFill>
+                            <a:srgbClr val="1A1A1A"/>
+                          </a:solidFill>
+                          <a:latin typeface="Arial" pitchFamily="34" charset="0"/>
+                          <a:ea typeface="Arial" pitchFamily="34" charset="-122"/>
+                          <a:cs typeface="Arial" pitchFamily="34" charset="-120"/>
+                        </a:rPr>
+                        <a:t>Expected Closing</a:t>
+                      </a:r>
+                      <a:endParaRPr lang="en-US" sz="1100" dirty="0">
+                        <a:latin typeface="Arial" charset="0"/>
+                        <a:ea typeface="Arial" charset="0"/>
+                        <a:cs typeface="Arial" charset="0"/>
+                      </a:endParaRPr>
+                    </a:p>
+                  </a:txBody>
+                  <a:tcPr marL="54864" marR="54864" marT="18288" marB="18288" anchor="ctr">
+                    <a:lnL w="0" cap="flat" cmpd="sng" algn="ctr">
+                      <a:noFill/>
+                    </a:lnL>
+                    <a:lnR w="0" cap="flat" cmpd="sng" algn="ctr">
+                      <a:noFill/>
+                    </a:lnR>
+                    <a:lnT w="0" cap="flat" cmpd="sng" algn="ctr">
+                      <a:noFill/>
+                    </a:lnT>
+                    <a:lnB w="6350" cap="flat" cmpd="sng" algn="ctr">
+                      <a:solidFill>
+                        <a:srgbClr val="F8E8E2"/>
+                      </a:solidFill>
+                      <a:prstDash val="solid"/>
+                      <a:round/>
+                      <a:headEnd type="none" w="med" len="med"/>
+                      <a:tailEnd type="none" w="med" len="med"/>
+                    </a:lnB>
+                    <a:solidFill>
+                      <a:srgbClr val="FFFFFF"/>
+                    </a:solidFill>
+                  </a:tcPr>
+                </a:tc>
+                <a:tc>
+                  <a:txBody>
+                    <a:bodyPr/>
+                    <a:lstStyle/>
+                    <a:p>
+                      <a:pPr algn="r" indent="0" marL="0">
+                        <a:buNone/>
+                      </a:pPr>
+                      <a:r>
+                        <a:rPr lang="en-US" sz="1100" dirty="0">
+                          <a:solidFill>
+                            <a:srgbClr val="1A1A1A"/>
+                          </a:solidFill>
+                          <a:latin typeface="Arial" pitchFamily="34" charset="0"/>
+                          <a:ea typeface="Arial" pitchFamily="34" charset="-122"/>
+                          <a:cs typeface="Arial" pitchFamily="34" charset="-120"/>
+                        </a:rPr>
+                        <a:t>Feb 5, 2027</a:t>
+                      </a:r>
+                      <a:endParaRPr lang="en-US" sz="1100" dirty="0">
+                        <a:latin typeface="Arial" charset="0"/>
+                        <a:ea typeface="Arial" charset="0"/>
+                        <a:cs typeface="Arial" charset="0"/>
+                      </a:endParaRPr>
+                    </a:p>
+                  </a:txBody>
+                  <a:tcPr marL="54864" marR="54864" marT="18288" marB="18288" anchor="ctr">
+                    <a:lnL w="0" cap="flat" cmpd="sng" algn="ctr">
+                      <a:noFill/>
+                    </a:lnL>
+                    <a:lnR w="0" cap="flat" cmpd="sng" algn="ctr">
+                      <a:noFill/>
+                    </a:lnR>
+                    <a:lnT w="0" cap="flat" cmpd="sng" algn="ctr">
+                      <a:noFill/>
+                    </a:lnT>
+                    <a:lnB w="6350" cap="flat" cmpd="sng" algn="ctr">
+                      <a:solidFill>
+                        <a:srgbClr val="F8E8E2"/>
+                      </a:solidFill>
+                      <a:prstDash val="solid"/>
+                      <a:round/>
+                      <a:headEnd type="none" w="med" len="med"/>
+                      <a:tailEnd type="none" w="med" len="med"/>
+                    </a:lnB>
+                    <a:solidFill>
+                      <a:srgbClr val="FFFFFF"/>
+                    </a:solidFill>
+                  </a:tcPr>
+                </a:tc>
+                <a:tc>
+                  <a:txBody>
+                    <a:bodyPr/>
+                    <a:lstStyle/>
+                    <a:p>
+                      <a:pPr algn="r" indent="0" marL="0">
+                        <a:buNone/>
+                      </a:pPr>
+                      <a:r>
+                        <a:rPr lang="en-US" sz="1100" dirty="0">
+                          <a:solidFill>
+                            <a:srgbClr val="1A1A1A"/>
+                          </a:solidFill>
+                          <a:latin typeface="Arial" pitchFamily="34" charset="0"/>
+                          <a:ea typeface="Arial" pitchFamily="34" charset="-122"/>
+                          <a:cs typeface="Arial" pitchFamily="34" charset="-120"/>
+                        </a:rPr>
+                        <a:t>Dec 7, 2026</a:t>
+                      </a:r>
+                      <a:endParaRPr lang="en-US" sz="1100" dirty="0">
+                        <a:latin typeface="Arial" charset="0"/>
+                        <a:ea typeface="Arial" charset="0"/>
+                        <a:cs typeface="Arial" charset="0"/>
+                      </a:endParaRPr>
+                    </a:p>
+                  </a:txBody>
+                  <a:tcPr marL="54864" marR="54864" marT="18288" marB="18288" anchor="ctr">
+                    <a:lnL w="0" cap="flat" cmpd="sng" algn="ctr">
+                      <a:noFill/>
+                    </a:lnL>
+                    <a:lnR w="0" cap="flat" cmpd="sng" algn="ctr">
+                      <a:noFill/>
+                    </a:lnR>
+                    <a:lnT w="0" cap="flat" cmpd="sng" algn="ctr">
+                      <a:noFill/>
+                    </a:lnT>
+                    <a:lnB w="6350" cap="flat" cmpd="sng" algn="ctr">
+                      <a:solidFill>
+                        <a:srgbClr val="F8E8E2"/>
+                      </a:solidFill>
+                      <a:prstDash val="solid"/>
+                      <a:round/>
+                      <a:headEnd type="none" w="med" len="med"/>
+                      <a:tailEnd type="none" w="med" len="med"/>
+                    </a:lnB>
+                    <a:solidFill>
+                      <a:srgbClr val="FFFFFF"/>
+                    </a:solidFill>
+                  </a:tcPr>
+                </a:tc>
+                <a:tc>
+                  <a:txBody>
+                    <a:bodyPr/>
+                    <a:lstStyle/>
+                    <a:p>
+                      <a:pPr algn="r" indent="0" marL="0">
+                        <a:buNone/>
+                      </a:pPr>
+                      <a:r>
+                        <a:rPr lang="en-US" sz="1100" dirty="0">
+                          <a:solidFill>
+                            <a:srgbClr val="1A1A1A"/>
+                          </a:solidFill>
+                          <a:latin typeface="Arial" pitchFamily="34" charset="0"/>
+                          <a:ea typeface="Arial" pitchFamily="34" charset="-122"/>
+                          <a:cs typeface="Arial" pitchFamily="34" charset="-120"/>
+                        </a:rPr>
+                        <a:t>Nov 19, 2026</a:t>
+                      </a:r>
+                      <a:endParaRPr lang="en-US" sz="1100" dirty="0">
+                        <a:latin typeface="Arial" charset="0"/>
+                        <a:ea typeface="Arial" charset="0"/>
+                        <a:cs typeface="Arial" charset="0"/>
+                      </a:endParaRPr>
+                    </a:p>
+                  </a:txBody>
+                  <a:tcPr marL="54864" marR="54864" marT="18288" marB="18288" anchor="ctr">
+                    <a:lnL w="0" cap="flat" cmpd="sng" algn="ctr">
+                      <a:noFill/>
+                    </a:lnL>
+                    <a:lnR w="0" cap="flat" cmpd="sng" algn="ctr">
+                      <a:noFill/>
+                    </a:lnR>
+                    <a:lnT w="0" cap="flat" cmpd="sng" algn="ctr">
+                      <a:noFill/>
+                    </a:lnT>
+                    <a:lnB w="6350" cap="flat" cmpd="sng" algn="ctr">
+                      <a:solidFill>
+                        <a:srgbClr val="F8E8E2"/>
+                      </a:solidFill>
+                      <a:prstDash val="solid"/>
+                      <a:round/>
+                      <a:headEnd type="none" w="med" len="med"/>
+                      <a:tailEnd type="none" w="med" len="med"/>
+                    </a:lnB>
+                    <a:solidFill>
+                      <a:srgbClr val="FFFFFF"/>
+                    </a:solidFill>
+                  </a:tcPr>
+                </a:tc>
+              </a:tr>
+              <a:tr h="270976">
                 <a:tc>
                   <a:txBody>
                     <a:bodyPr/>
@@ -8955,7 +9308,7 @@
                   </a:tcPr>
                 </a:tc>
               </a:tr>
-              <a:tr h="292608">
+              <a:tr h="270976">
                 <a:tc>
                   <a:txBody>
                     <a:bodyPr/>
@@ -9157,7 +9510,7 @@
                   </a:tcPr>
                 </a:tc>
               </a:tr>
-              <a:tr h="292608">
+              <a:tr h="270976">
                 <a:tc>
                   <a:txBody>
                     <a:bodyPr/>
@@ -9359,7 +9712,7 @@
                   </a:tcPr>
                 </a:tc>
               </a:tr>
-              <a:tr h="292608">
+              <a:tr h="270976">
                 <a:tc>
                   <a:txBody>
                     <a:bodyPr/>
@@ -9561,7 +9914,7 @@
                   </a:tcPr>
                 </a:tc>
               </a:tr>
-              <a:tr h="292608">
+              <a:tr h="270976">
                 <a:tc>
                   <a:txBody>
                     <a:bodyPr/>
@@ -9763,7 +10116,7 @@
                   </a:tcPr>
                 </a:tc>
               </a:tr>
-              <a:tr h="292608">
+              <a:tr h="270976">
                 <a:tc>
                   <a:txBody>
                     <a:bodyPr/>
@@ -9965,7 +10318,7 @@
                   </a:tcPr>
                 </a:tc>
               </a:tr>
-              <a:tr h="292608">
+              <a:tr h="270976">
                 <a:tc>
                   <a:txBody>
                     <a:bodyPr/>
@@ -10191,7 +10544,7 @@
                   </a:tcPr>
                 </a:tc>
               </a:tr>
-              <a:tr h="292608">
+              <a:tr h="270976">
                 <a:tc>
                   <a:txBody>
                     <a:bodyPr/>
@@ -10259,7 +10612,7 @@
                           <a:ea typeface="Arial" pitchFamily="34" charset="-122"/>
                           <a:cs typeface="Arial" pitchFamily="34" charset="-120"/>
                         </a:rPr>
-                        <a:t>−$2,120</a:t>
+                        <a:t>−$2,369</a:t>
                       </a:r>
                       <a:endParaRPr lang="en-US" sz="1100" dirty="0">
                         <a:latin typeface="Arial" charset="0"/>
@@ -10309,7 +10662,7 @@
                           <a:ea typeface="Arial" pitchFamily="34" charset="-122"/>
                           <a:cs typeface="Arial" pitchFamily="34" charset="-120"/>
                         </a:rPr>
-                        <a:t>−$1,076</a:t>
+                        <a:t>−$1,325</a:t>
                       </a:r>
                       <a:endParaRPr lang="en-US" sz="1100" dirty="0">
                         <a:latin typeface="Arial" charset="0"/>
@@ -10359,7 +10712,7 @@
                           <a:ea typeface="Arial" pitchFamily="34" charset="-122"/>
                           <a:cs typeface="Arial" pitchFamily="34" charset="-120"/>
                         </a:rPr>
-                        <a:t>−$774</a:t>
+                        <a:t>−$1,012</a:t>
                       </a:r>
                       <a:endParaRPr lang="en-US" sz="1100" dirty="0">
                         <a:latin typeface="Arial" charset="0"/>
@@ -10393,7 +10746,7 @@
                   </a:tcPr>
                 </a:tc>
               </a:tr>
-              <a:tr h="292608">
+              <a:tr h="270976">
                 <a:tc>
                   <a:txBody>
                     <a:bodyPr/>
@@ -10467,7 +10820,7 @@
                           <a:ea typeface="Arial" pitchFamily="34" charset="-122"/>
                           <a:cs typeface="Arial" pitchFamily="34" charset="-120"/>
                         </a:rPr>
-                        <a:t>$423,768</a:t>
+                        <a:t>$423,519</a:t>
                       </a:r>
                       <a:endParaRPr lang="en-US" sz="1100" dirty="0">
                         <a:latin typeface="Arial" charset="0"/>
@@ -10523,7 +10876,7 @@
                           <a:ea typeface="Arial" pitchFamily="34" charset="-122"/>
                           <a:cs typeface="Arial" pitchFamily="34" charset="-120"/>
                         </a:rPr>
-                        <a:t>$424,812</a:t>
+                        <a:t>$424,563</a:t>
                       </a:r>
                       <a:endParaRPr lang="en-US" sz="1100" dirty="0">
                         <a:latin typeface="Arial" charset="0"/>
@@ -10579,7 +10932,7 @@
                           <a:ea typeface="Arial" pitchFamily="34" charset="-122"/>
                           <a:cs typeface="Arial" pitchFamily="34" charset="-120"/>
                         </a:rPr>
-                        <a:t>$419,796</a:t>
+                        <a:t>$419,558</a:t>
                       </a:r>
                       <a:endParaRPr lang="en-US" sz="1100" dirty="0">
                         <a:latin typeface="Arial" charset="0"/>
@@ -10631,8 +10984,8 @@
         </p:nvSpPr>
         <p:spPr>
           <a:xfrm>
-            <a:off x="457200" y="4361688"/>
-            <a:ext cx="8229600" cy="370332"/>
+            <a:off x="457200" y="4394708"/>
+            <a:ext cx="8229600" cy="309880"/>
           </a:xfrm>
           <a:prstGeom prst="rect">
             <a:avLst/>
@@ -10656,7 +11009,7 @@
                 <a:ea typeface="Arial" pitchFamily="34" charset="-122"/>
                 <a:cs typeface="Arial" pitchFamily="34" charset="-120"/>
               </a:rPr>
-              <a:t>Estimates only. Not included: mortgage payoff, tax proration and repairs; the closing agent provides exact figures. Commissions are negotiable and not set by law.</a:t>
+              <a:t>Commissions are negotiable and not set by law. Not included: your mortgage payoff, this year's property tax proration (the tax bill and the expected closing date add it) and any repairs agreed after inspection. The closing agent provides the exact figures.</a:t>
             </a:r>
             <a:endParaRPr lang="en-US" sz="1000" dirty="0"/>
           </a:p>
@@ -12290,7 +12643,7 @@
         <p:spPr>
           <a:xfrm>
             <a:off x="457200" y="3191256"/>
-            <a:ext cx="8229600" cy="1540764"/>
+            <a:ext cx="8229600" cy="1513332"/>
           </a:xfrm>
           <a:prstGeom prst="rect">
             <a:avLst/>
@@ -12314,7 +12667,7 @@
                 <a:ea typeface="Arial" pitchFamily="34" charset="-122"/>
                 <a:cs typeface="Arial" pitchFamily="34" charset="-120"/>
               </a:rPr>
-              <a:t>A broker's opinion of value from comparable sales, not an appraisal, and not for lending. Sales data: Stellar MLS as of September 22, 2026. Deemed reliable but not guaranteed. Equal Housing Opportunity.</a:t>
+              <a:t>Sales data: Stellar MLS as of September 22, 2026. Deemed reliable but not guaranteed. This comparative market analysis is an opinion of price, not an appraisal, and isn't for lending purposes. Payment, tax and cost figures are estimates only, not lending or tax advice. Equal Housing Opportunity.</a:t>
             </a:r>
             <a:endParaRPr lang="en-US" sz="1000" dirty="0"/>
           </a:p>
@@ -12685,7 +13038,7 @@
                 <a:ea typeface="Arial" pitchFamily="34" charset="-122"/>
                 <a:cs typeface="Arial" pitchFamily="34" charset="-120"/>
               </a:rPr>
-              <a:t>$455K – $480K</a:t>
+              <a:t>$455K–$480K</a:t>
             </a:r>
             <a:endParaRPr lang="en-US" sz="2400" dirty="0"/>
           </a:p>
@@ -13830,7 +14183,7 @@
                 <a:ea typeface="Arial" pitchFamily="34" charset="-122"/>
                 <a:cs typeface="Arial" pitchFamily="34" charset="-120"/>
               </a:rPr>
-              <a:t>$455K – $480K</a:t>
+              <a:t>$455K–$480K</a:t>
             </a:r>
             <a:endParaRPr lang="en-US" sz="1800" dirty="0"/>
           </a:p>
@@ -13844,8 +14197,8 @@
         </p:nvSpPr>
         <p:spPr>
           <a:xfrm>
-            <a:off x="457200" y="4160520"/>
-            <a:ext cx="8229600" cy="502920"/>
+            <a:off x="457200" y="4078224"/>
+            <a:ext cx="8229600" cy="626364"/>
           </a:xfrm>
           <a:prstGeom prst="rect">
             <a:avLst/>
@@ -13869,7 +14222,7 @@
                 <a:ea typeface="Arial" pitchFamily="34" charset="-122"/>
                 <a:cs typeface="Arial" pitchFamily="34" charset="-120"/>
               </a:rPr>
-              <a:t>Adjustments cover size, lot, market changes since each sale, roof and systems, condition and updates, view or water and seller credits.</a:t>
+              <a:t>Adjusted for size ($1,200 to $1,800), lot ($5,000), market changes since each sale (1% a quarter off sales before July), roof and systems ($5,000), condition and updates ($30,000 to $45,000), view or water ($10,000) and seller credits (taken off each sale price).</a:t>
             </a:r>
             <a:endParaRPr lang="en-US" sz="1100" dirty="0"/>
           </a:p>
@@ -15096,8 +15449,8 @@
         </p:nvSpPr>
         <p:spPr>
           <a:xfrm>
-            <a:off x="3566160" y="3840480"/>
-            <a:ext cx="731520" cy="228600"/>
+            <a:off x="3520440" y="3840480"/>
+            <a:ext cx="822960" cy="228600"/>
           </a:xfrm>
           <a:prstGeom prst="rect">
             <a:avLst/>
@@ -15158,8 +15511,8 @@
         </p:nvSpPr>
         <p:spPr>
           <a:xfrm>
-            <a:off x="4480560" y="3840480"/>
-            <a:ext cx="731520" cy="228600"/>
+            <a:off x="4434840" y="3840480"/>
+            <a:ext cx="822960" cy="228600"/>
           </a:xfrm>
           <a:prstGeom prst="rect">
             <a:avLst/>
@@ -15220,8 +15573,8 @@
         </p:nvSpPr>
         <p:spPr>
           <a:xfrm>
-            <a:off x="5394960" y="3840480"/>
-            <a:ext cx="731520" cy="228600"/>
+            <a:off x="5349240" y="3840480"/>
+            <a:ext cx="822960" cy="228600"/>
           </a:xfrm>
           <a:prstGeom prst="rect">
             <a:avLst/>
@@ -15282,8 +15635,8 @@
         </p:nvSpPr>
         <p:spPr>
           <a:xfrm>
-            <a:off x="6309360" y="3840480"/>
-            <a:ext cx="731520" cy="228600"/>
+            <a:off x="6263640" y="3840480"/>
+            <a:ext cx="822960" cy="228600"/>
           </a:xfrm>
           <a:prstGeom prst="rect">
             <a:avLst/>
@@ -15344,8 +15697,8 @@
         </p:nvSpPr>
         <p:spPr>
           <a:xfrm>
-            <a:off x="7223760" y="3840480"/>
-            <a:ext cx="731520" cy="228600"/>
+            <a:off x="7178040" y="3840480"/>
+            <a:ext cx="822960" cy="228600"/>
           </a:xfrm>
           <a:prstGeom prst="rect">
             <a:avLst/>
@@ -15406,8 +15759,8 @@
         </p:nvSpPr>
         <p:spPr>
           <a:xfrm>
-            <a:off x="8138160" y="3840480"/>
-            <a:ext cx="731520" cy="228600"/>
+            <a:off x="8092440" y="3840480"/>
+            <a:ext cx="822960" cy="228600"/>
           </a:xfrm>
           <a:prstGeom prst="rect">
             <a:avLst/>
@@ -15571,7 +15924,7 @@
                 <a:ea typeface="Arial" pitchFamily="34" charset="-122"/>
                 <a:cs typeface="Arial" pitchFamily="34" charset="-120"/>
               </a:rPr>
-              <a:t>Renovated pool home; April, before rates rose</a:t>
+              <a:t>Renovated pool home; sold in the spring</a:t>
             </a:r>
             <a:endParaRPr lang="en-US" sz="950" dirty="0"/>
           </a:p>
@@ -15713,7 +16066,7 @@
                 <a:ea typeface="Arial" pitchFamily="34" charset="-122"/>
                 <a:cs typeface="Arial" pitchFamily="34" charset="-120"/>
               </a:rPr>
-              <a:t>Same year and size; systems documented</a:t>
+              <a:t>Same era and size; systems documented</a:t>
             </a:r>
             <a:endParaRPr lang="en-US" sz="950" dirty="0"/>
           </a:p>
@@ -16217,8 +16570,8 @@
         </p:nvSpPr>
         <p:spPr>
           <a:xfrm>
-            <a:off x="457200" y="4114800"/>
-            <a:ext cx="8229600" cy="502920"/>
+            <a:off x="457200" y="4160520"/>
+            <a:ext cx="8229600" cy="544068"/>
           </a:xfrm>
           <a:prstGeom prst="rect">
             <a:avLst/>
@@ -16459,6 +16812,357 @@
           <p:nvPr/>
         </p:nvSpPr>
         <p:spPr>
+          <a:xfrm rot="16200000">
+            <a:off x="-175565" y="2233422"/>
+            <a:ext cx="1097280" cy="219456"/>
+          </a:xfrm>
+          <a:prstGeom prst="rect">
+            <a:avLst/>
+          </a:prstGeom>
+          <a:noFill/>
+          <a:ln/>
+        </p:spPr>
+        <p:txBody>
+          <a:bodyPr wrap="square" lIns="0" tIns="0" rIns="0" bIns="0" rtlCol="0" anchor="ctr"/>
+          <a:lstStyle/>
+          <a:p>
+            <a:pPr algn="ctr" indent="0" marL="0">
+              <a:buNone/>
+            </a:pPr>
+            <a:r>
+              <a:rPr lang="en-US" sz="1000" dirty="0">
+                <a:solidFill>
+                  <a:srgbClr val="5E5E5E"/>
+                </a:solidFill>
+                <a:latin typeface="Arial" pitchFamily="34" charset="0"/>
+                <a:ea typeface="Arial" pitchFamily="34" charset="-122"/>
+                <a:cs typeface="Arial" pitchFamily="34" charset="-120"/>
+              </a:rPr>
+              <a:t>Price</a:t>
+            </a:r>
+            <a:endParaRPr lang="en-US" sz="1000" dirty="0"/>
+          </a:p>
+        </p:txBody>
+      </p:sp>
+      <p:sp>
+        <p:nvSpPr>
+          <p:cNvPr id="6" name="Text 3"/>
+          <p:cNvSpPr txBox="1"/>
+          <p:nvPr/>
+        </p:nvSpPr>
+        <p:spPr>
+          <a:xfrm>
+            <a:off x="583387" y="3623310"/>
+            <a:ext cx="512064" cy="182880"/>
+          </a:xfrm>
+          <a:prstGeom prst="rect">
+            <a:avLst/>
+          </a:prstGeom>
+          <a:noFill/>
+          <a:ln/>
+        </p:spPr>
+        <p:txBody>
+          <a:bodyPr wrap="square" lIns="0" tIns="0" rIns="0" bIns="0" rtlCol="0" anchor="ctr"/>
+          <a:lstStyle/>
+          <a:p>
+            <a:pPr algn="r" indent="0" marL="0">
+              <a:buNone/>
+            </a:pPr>
+            <a:r>
+              <a:rPr lang="en-US" sz="900" dirty="0">
+                <a:solidFill>
+                  <a:srgbClr val="5E5E5E"/>
+                </a:solidFill>
+                <a:latin typeface="Arial" pitchFamily="34" charset="0"/>
+                <a:ea typeface="Arial" pitchFamily="34" charset="-122"/>
+                <a:cs typeface="Arial" pitchFamily="34" charset="-120"/>
+              </a:rPr>
+              <a:t>$300K</a:t>
+            </a:r>
+            <a:endParaRPr lang="en-US" sz="900" dirty="0"/>
+          </a:p>
+        </p:txBody>
+      </p:sp>
+      <p:sp>
+        <p:nvSpPr>
+          <p:cNvPr id="7" name="Text 4"/>
+          <p:cNvSpPr txBox="1"/>
+          <p:nvPr/>
+        </p:nvSpPr>
+        <p:spPr>
+          <a:xfrm>
+            <a:off x="583387" y="3231424"/>
+            <a:ext cx="512064" cy="182880"/>
+          </a:xfrm>
+          <a:prstGeom prst="rect">
+            <a:avLst/>
+          </a:prstGeom>
+          <a:noFill/>
+          <a:ln/>
+        </p:spPr>
+        <p:txBody>
+          <a:bodyPr wrap="square" lIns="0" tIns="0" rIns="0" bIns="0" rtlCol="0" anchor="ctr"/>
+          <a:lstStyle/>
+          <a:p>
+            <a:pPr algn="r" indent="0" marL="0">
+              <a:buNone/>
+            </a:pPr>
+            <a:r>
+              <a:rPr lang="en-US" sz="900" dirty="0">
+                <a:solidFill>
+                  <a:srgbClr val="5E5E5E"/>
+                </a:solidFill>
+                <a:latin typeface="Arial" pitchFamily="34" charset="0"/>
+                <a:ea typeface="Arial" pitchFamily="34" charset="-122"/>
+                <a:cs typeface="Arial" pitchFamily="34" charset="-120"/>
+              </a:rPr>
+              <a:t>$350K</a:t>
+            </a:r>
+            <a:endParaRPr lang="en-US" sz="900" dirty="0"/>
+          </a:p>
+        </p:txBody>
+      </p:sp>
+      <p:sp>
+        <p:nvSpPr>
+          <p:cNvPr id="8" name="Text 5"/>
+          <p:cNvSpPr txBox="1"/>
+          <p:nvPr/>
+        </p:nvSpPr>
+        <p:spPr>
+          <a:xfrm>
+            <a:off x="583387" y="2839539"/>
+            <a:ext cx="512064" cy="182880"/>
+          </a:xfrm>
+          <a:prstGeom prst="rect">
+            <a:avLst/>
+          </a:prstGeom>
+          <a:noFill/>
+          <a:ln/>
+        </p:spPr>
+        <p:txBody>
+          <a:bodyPr wrap="square" lIns="0" tIns="0" rIns="0" bIns="0" rtlCol="0" anchor="ctr"/>
+          <a:lstStyle/>
+          <a:p>
+            <a:pPr algn="r" indent="0" marL="0">
+              <a:buNone/>
+            </a:pPr>
+            <a:r>
+              <a:rPr lang="en-US" sz="900" dirty="0">
+                <a:solidFill>
+                  <a:srgbClr val="5E5E5E"/>
+                </a:solidFill>
+                <a:latin typeface="Arial" pitchFamily="34" charset="0"/>
+                <a:ea typeface="Arial" pitchFamily="34" charset="-122"/>
+                <a:cs typeface="Arial" pitchFamily="34" charset="-120"/>
+              </a:rPr>
+              <a:t>$400K</a:t>
+            </a:r>
+            <a:endParaRPr lang="en-US" sz="900" dirty="0"/>
+          </a:p>
+        </p:txBody>
+      </p:sp>
+      <p:sp>
+        <p:nvSpPr>
+          <p:cNvPr id="9" name="Text 6"/>
+          <p:cNvSpPr txBox="1"/>
+          <p:nvPr/>
+        </p:nvSpPr>
+        <p:spPr>
+          <a:xfrm>
+            <a:off x="583387" y="2447653"/>
+            <a:ext cx="512064" cy="182880"/>
+          </a:xfrm>
+          <a:prstGeom prst="rect">
+            <a:avLst/>
+          </a:prstGeom>
+          <a:noFill/>
+          <a:ln/>
+        </p:spPr>
+        <p:txBody>
+          <a:bodyPr wrap="square" lIns="0" tIns="0" rIns="0" bIns="0" rtlCol="0" anchor="ctr"/>
+          <a:lstStyle/>
+          <a:p>
+            <a:pPr algn="r" indent="0" marL="0">
+              <a:buNone/>
+            </a:pPr>
+            <a:r>
+              <a:rPr lang="en-US" sz="900" dirty="0">
+                <a:solidFill>
+                  <a:srgbClr val="5E5E5E"/>
+                </a:solidFill>
+                <a:latin typeface="Arial" pitchFamily="34" charset="0"/>
+                <a:ea typeface="Arial" pitchFamily="34" charset="-122"/>
+                <a:cs typeface="Arial" pitchFamily="34" charset="-120"/>
+              </a:rPr>
+              <a:t>$450K</a:t>
+            </a:r>
+            <a:endParaRPr lang="en-US" sz="900" dirty="0"/>
+          </a:p>
+        </p:txBody>
+      </p:sp>
+      <p:sp>
+        <p:nvSpPr>
+          <p:cNvPr id="10" name="Text 7"/>
+          <p:cNvSpPr txBox="1"/>
+          <p:nvPr/>
+        </p:nvSpPr>
+        <p:spPr>
+          <a:xfrm>
+            <a:off x="583387" y="2055767"/>
+            <a:ext cx="512064" cy="182880"/>
+          </a:xfrm>
+          <a:prstGeom prst="rect">
+            <a:avLst/>
+          </a:prstGeom>
+          <a:noFill/>
+          <a:ln/>
+        </p:spPr>
+        <p:txBody>
+          <a:bodyPr wrap="square" lIns="0" tIns="0" rIns="0" bIns="0" rtlCol="0" anchor="ctr"/>
+          <a:lstStyle/>
+          <a:p>
+            <a:pPr algn="r" indent="0" marL="0">
+              <a:buNone/>
+            </a:pPr>
+            <a:r>
+              <a:rPr lang="en-US" sz="900" dirty="0">
+                <a:solidFill>
+                  <a:srgbClr val="5E5E5E"/>
+                </a:solidFill>
+                <a:latin typeface="Arial" pitchFamily="34" charset="0"/>
+                <a:ea typeface="Arial" pitchFamily="34" charset="-122"/>
+                <a:cs typeface="Arial" pitchFamily="34" charset="-120"/>
+              </a:rPr>
+              <a:t>$500K</a:t>
+            </a:r>
+            <a:endParaRPr lang="en-US" sz="900" dirty="0"/>
+          </a:p>
+        </p:txBody>
+      </p:sp>
+      <p:sp>
+        <p:nvSpPr>
+          <p:cNvPr id="11" name="Text 8"/>
+          <p:cNvSpPr txBox="1"/>
+          <p:nvPr/>
+        </p:nvSpPr>
+        <p:spPr>
+          <a:xfrm>
+            <a:off x="583387" y="1663881"/>
+            <a:ext cx="512064" cy="182880"/>
+          </a:xfrm>
+          <a:prstGeom prst="rect">
+            <a:avLst/>
+          </a:prstGeom>
+          <a:noFill/>
+          <a:ln/>
+        </p:spPr>
+        <p:txBody>
+          <a:bodyPr wrap="square" lIns="0" tIns="0" rIns="0" bIns="0" rtlCol="0" anchor="ctr"/>
+          <a:lstStyle/>
+          <a:p>
+            <a:pPr algn="r" indent="0" marL="0">
+              <a:buNone/>
+            </a:pPr>
+            <a:r>
+              <a:rPr lang="en-US" sz="900" dirty="0">
+                <a:solidFill>
+                  <a:srgbClr val="5E5E5E"/>
+                </a:solidFill>
+                <a:latin typeface="Arial" pitchFamily="34" charset="0"/>
+                <a:ea typeface="Arial" pitchFamily="34" charset="-122"/>
+                <a:cs typeface="Arial" pitchFamily="34" charset="-120"/>
+              </a:rPr>
+              <a:t>$550K</a:t>
+            </a:r>
+            <a:endParaRPr lang="en-US" sz="900" dirty="0"/>
+          </a:p>
+        </p:txBody>
+      </p:sp>
+      <p:sp>
+        <p:nvSpPr>
+          <p:cNvPr id="12" name="Text 9"/>
+          <p:cNvSpPr txBox="1"/>
+          <p:nvPr/>
+        </p:nvSpPr>
+        <p:spPr>
+          <a:xfrm>
+            <a:off x="583387" y="1271996"/>
+            <a:ext cx="512064" cy="182880"/>
+          </a:xfrm>
+          <a:prstGeom prst="rect">
+            <a:avLst/>
+          </a:prstGeom>
+          <a:noFill/>
+          <a:ln/>
+        </p:spPr>
+        <p:txBody>
+          <a:bodyPr wrap="square" lIns="0" tIns="0" rIns="0" bIns="0" rtlCol="0" anchor="ctr"/>
+          <a:lstStyle/>
+          <a:p>
+            <a:pPr algn="r" indent="0" marL="0">
+              <a:buNone/>
+            </a:pPr>
+            <a:r>
+              <a:rPr lang="en-US" sz="900" dirty="0">
+                <a:solidFill>
+                  <a:srgbClr val="5E5E5E"/>
+                </a:solidFill>
+                <a:latin typeface="Arial" pitchFamily="34" charset="0"/>
+                <a:ea typeface="Arial" pitchFamily="34" charset="-122"/>
+                <a:cs typeface="Arial" pitchFamily="34" charset="-120"/>
+              </a:rPr>
+              <a:t>$600K</a:t>
+            </a:r>
+            <a:endParaRPr lang="en-US" sz="900" dirty="0"/>
+          </a:p>
+        </p:txBody>
+      </p:sp>
+      <p:sp>
+        <p:nvSpPr>
+          <p:cNvPr id="13" name="Text 10"/>
+          <p:cNvSpPr txBox="1"/>
+          <p:nvPr/>
+        </p:nvSpPr>
+        <p:spPr>
+          <a:xfrm>
+            <a:off x="583387" y="880110"/>
+            <a:ext cx="512064" cy="182880"/>
+          </a:xfrm>
+          <a:prstGeom prst="rect">
+            <a:avLst/>
+          </a:prstGeom>
+          <a:noFill/>
+          <a:ln/>
+        </p:spPr>
+        <p:txBody>
+          <a:bodyPr wrap="square" lIns="0" tIns="0" rIns="0" bIns="0" rtlCol="0" anchor="ctr"/>
+          <a:lstStyle/>
+          <a:p>
+            <a:pPr algn="r" indent="0" marL="0">
+              <a:buNone/>
+            </a:pPr>
+            <a:r>
+              <a:rPr lang="en-US" sz="900" dirty="0">
+                <a:solidFill>
+                  <a:srgbClr val="5E5E5E"/>
+                </a:solidFill>
+                <a:latin typeface="Arial" pitchFamily="34" charset="0"/>
+                <a:ea typeface="Arial" pitchFamily="34" charset="-122"/>
+                <a:cs typeface="Arial" pitchFamily="34" charset="-120"/>
+              </a:rPr>
+              <a:t>$650K</a:t>
+            </a:r>
+            <a:endParaRPr lang="en-US" sz="900" dirty="0"/>
+          </a:p>
+        </p:txBody>
+      </p:sp>
+      <p:sp>
+        <p:nvSpPr>
+          <p:cNvPr id="14" name="Text 11"/>
+          <p:cNvSpPr txBox="1"/>
+          <p:nvPr/>
+        </p:nvSpPr>
+        <p:spPr>
           <a:xfrm>
             <a:off x="1205179" y="2331393"/>
             <a:ext cx="1899940" cy="182880"/>
@@ -16495,14 +17199,14 @@
       </p:sp>
       <p:sp>
         <p:nvSpPr>
-          <p:cNvPr id="6" name="Shape 3"/>
+          <p:cNvPr id="15" name="Shape 12"/>
           <p:cNvSpPr/>
           <p:nvPr/>
         </p:nvSpPr>
         <p:spPr>
           <a:xfrm>
-            <a:off x="621792" y="4434840"/>
-            <a:ext cx="91440" cy="91440"/>
+            <a:off x="626237" y="4439285"/>
+            <a:ext cx="82550" cy="82550"/>
           </a:xfrm>
           <a:prstGeom prst="ellipse">
             <a:avLst/>
@@ -16520,7 +17224,7 @@
       </p:sp>
       <p:sp>
         <p:nvSpPr>
-          <p:cNvPr id="7" name="Text 4"/>
+          <p:cNvPr id="16" name="Text 13"/>
           <p:cNvSpPr txBox="1"/>
           <p:nvPr/>
         </p:nvSpPr>
@@ -16559,22 +17263,22 @@
       </p:sp>
       <p:sp>
         <p:nvSpPr>
-          <p:cNvPr id="8" name="Shape 5"/>
+          <p:cNvPr id="17" name="Shape 14"/>
           <p:cNvSpPr/>
           <p:nvPr/>
         </p:nvSpPr>
         <p:spPr>
           <a:xfrm>
-            <a:off x="1756928" y="4421124"/>
-            <a:ext cx="118872" cy="118872"/>
-          </a:xfrm>
-          <a:prstGeom prst="ellipse">
+            <a:off x="1766834" y="4431030"/>
+            <a:ext cx="99060" cy="99060"/>
+          </a:xfrm>
+          <a:prstGeom prst="rect">
             <a:avLst/>
           </a:prstGeom>
           <a:solidFill>
-            <a:srgbClr val="FFFFFF"/>
+            <a:srgbClr val="5E5E5E"/>
           </a:solidFill>
-          <a:ln w="15875">
+          <a:ln w="6350">
             <a:solidFill>
               <a:srgbClr val="5E5E5E"/>
             </a:solidFill>
@@ -16584,7 +17288,7 @@
       </p:sp>
       <p:sp>
         <p:nvSpPr>
-          <p:cNvPr id="9" name="Text 6"/>
+          <p:cNvPr id="18" name="Text 15"/>
           <p:cNvSpPr txBox="1"/>
           <p:nvPr/>
         </p:nvSpPr>
@@ -16623,7 +17327,7 @@
       </p:sp>
       <p:sp>
         <p:nvSpPr>
-          <p:cNvPr id="10" name="Shape 7"/>
+          <p:cNvPr id="19" name="Shape 16"/>
           <p:cNvSpPr/>
           <p:nvPr/>
         </p:nvSpPr>
@@ -16646,7 +17350,7 @@
       </p:sp>
       <p:sp>
         <p:nvSpPr>
-          <p:cNvPr id="11" name="Text 8"/>
+          <p:cNvPr id="20" name="Text 17"/>
           <p:cNvSpPr txBox="1"/>
           <p:nvPr/>
         </p:nvSpPr>
@@ -16685,14 +17389,14 @@
       </p:sp>
       <p:sp>
         <p:nvSpPr>
-          <p:cNvPr id="12" name="Shape 9"/>
+          <p:cNvPr id="21" name="Shape 18"/>
           <p:cNvSpPr/>
           <p:nvPr/>
         </p:nvSpPr>
         <p:spPr>
           <a:xfrm>
-            <a:off x="4378083" y="4421124"/>
-            <a:ext cx="118872" cy="118872"/>
+            <a:off x="4371479" y="4414520"/>
+            <a:ext cx="132080" cy="132080"/>
           </a:xfrm>
           <a:prstGeom prst="ellipse">
             <a:avLst/>
@@ -16710,7 +17414,7 @@
       </p:sp>
       <p:sp>
         <p:nvSpPr>
-          <p:cNvPr id="13" name="Text 10"/>
+          <p:cNvPr id="22" name="Text 19"/>
           <p:cNvSpPr txBox="1"/>
           <p:nvPr/>
         </p:nvSpPr>
@@ -16749,14 +17453,14 @@
       </p:sp>
       <p:sp>
         <p:nvSpPr>
-          <p:cNvPr id="14" name="Shape 11"/>
+          <p:cNvPr id="23" name="Shape 20"/>
           <p:cNvSpPr/>
           <p:nvPr/>
         </p:nvSpPr>
         <p:spPr>
           <a:xfrm>
-            <a:off x="5863297" y="4407408"/>
-            <a:ext cx="146304" cy="146304"/>
+            <a:off x="5854153" y="4398264"/>
+            <a:ext cx="164592" cy="164592"/>
           </a:xfrm>
           <a:prstGeom prst="diamond">
             <a:avLst/>
@@ -16766,7 +17470,7 @@
           </a:solidFill>
           <a:ln w="6350">
             <a:solidFill>
-              <a:srgbClr val="1A1A1A"/>
+              <a:srgbClr val="FFFFFF"/>
             </a:solidFill>
             <a:prstDash val="solid"/>
           </a:ln>
@@ -16774,7 +17478,7 @@
       </p:sp>
       <p:sp>
         <p:nvSpPr>
-          <p:cNvPr id="15" name="Text 12"/>
+          <p:cNvPr id="24" name="Text 21"/>
           <p:cNvSpPr txBox="1"/>
           <p:nvPr/>
         </p:nvSpPr>
@@ -16813,7 +17517,7 @@
       </p:sp>
       <p:sp>
         <p:nvSpPr>
-          <p:cNvPr id="16" name="Shape 13"/>
+          <p:cNvPr id="25" name="Shape 22"/>
           <p:cNvSpPr/>
           <p:nvPr/>
         </p:nvSpPr>
@@ -16838,7 +17542,7 @@
       </p:sp>
       <p:sp>
         <p:nvSpPr>
-          <p:cNvPr id="17" name="Text 14"/>
+          <p:cNvPr id="26" name="Text 23"/>
           <p:cNvSpPr txBox="1"/>
           <p:nvPr/>
         </p:nvSpPr>
@@ -16869,7 +17573,7 @@
                 <a:ea typeface="Arial" pitchFamily="34" charset="-122"/>
                 <a:cs typeface="Arial" pitchFamily="34" charset="-120"/>
               </a:rPr>
-              <a:t>The renovated comparable sales sit well above the neighborhood trend. At $469,900, yours sits among them without testing the ceiling.</a:t>
+              <a:t>The renovated comparable sales sit well above the neighborhood trend, and yours sits among them without testing the ceiling.</a:t>
             </a:r>
             <a:endParaRPr lang="en-US" sz="1300" dirty="0"/>
           </a:p>
@@ -16877,14 +17581,14 @@
       </p:sp>
       <p:sp>
         <p:nvSpPr>
-          <p:cNvPr id="18" name="Text 15"/>
-          <p:cNvSpPr txBox="1"/>
-          <p:nvPr/>
-        </p:nvSpPr>
-        <p:spPr>
-          <a:xfrm>
-            <a:off x="7086600" y="2910840"/>
-            <a:ext cx="1600200" cy="1249680"/>
+          <p:cNvPr id="27" name="Text 24"/>
+          <p:cNvSpPr txBox="1"/>
+          <p:nvPr/>
+        </p:nvSpPr>
+        <p:spPr>
+          <a:xfrm>
+            <a:off x="7086600" y="2735834"/>
+            <a:ext cx="1600200" cy="1424686"/>
           </a:xfrm>
           <a:prstGeom prst="rect">
             <a:avLst/>
@@ -16908,7 +17612,7 @@
                 <a:ea typeface="Arial" pitchFamily="34" charset="-122"/>
                 <a:cs typeface="Arial" pitchFamily="34" charset="-120"/>
               </a:rPr>
-              <a:t>Size alone predicts about $443K at your size. Your price is about $27K above the line.</a:t>
+              <a:t>Size alone predicts about $443K at your size. Your price is about $27,000 above the line.</a:t>
             </a:r>
             <a:endParaRPr lang="en-US" sz="1100" dirty="0"/>
           </a:p>
@@ -16916,7 +17620,7 @@
       </p:sp>
       <p:sp>
         <p:nvSpPr>
-          <p:cNvPr id="19" name="Text 16"/>
+          <p:cNvPr id="28" name="Text 25"/>
           <p:cNvSpPr txBox="1"/>
           <p:nvPr/>
         </p:nvSpPr>
@@ -16955,7 +17659,7 @@
       </p:sp>
       <p:sp>
         <p:nvSpPr>
-          <p:cNvPr id="20" name="Text 17"/>
+          <p:cNvPr id="29" name="Text 26"/>
           <p:cNvSpPr txBox="1"/>
           <p:nvPr/>
         </p:nvSpPr>
@@ -17096,7 +17800,7 @@
                 <a:ea typeface="Arial" pitchFamily="34" charset="-122"/>
                 <a:cs typeface="Arial" pitchFamily="34" charset="-120"/>
               </a:rPr>
-              <a:t>Nearby sales, April–June vs. July–mid-September</a:t>
+              <a:t>Nearby sales, April–June vs. July–September</a:t>
             </a:r>
             <a:endParaRPr lang="en-US" sz="1300" dirty="0"/>
           </a:p>
@@ -17250,7 +17954,7 @@
                 <a:ea typeface="Arial" pitchFamily="34" charset="-122"/>
                 <a:cs typeface="Arial" pitchFamily="34" charset="-120"/>
               </a:rPr>
-              <a:t>Spring</a:t>
+              <a:t>Earlier</a:t>
             </a:r>
             <a:endParaRPr lang="en-US" sz="900" dirty="0"/>
           </a:p>
@@ -17521,7 +18225,7 @@
                 <a:ea typeface="Arial" pitchFamily="34" charset="-122"/>
                 <a:cs typeface="Arial" pitchFamily="34" charset="-120"/>
               </a:rPr>
-              <a:t>Spring</a:t>
+              <a:t>Earlier</a:t>
             </a:r>
             <a:endParaRPr lang="en-US" sz="900" dirty="0"/>
           </a:p>
@@ -17560,7 +18264,7 @@
                 <a:ea typeface="Arial" pitchFamily="34" charset="-122"/>
                 <a:cs typeface="Arial" pitchFamily="34" charset="-120"/>
               </a:rPr>
-              <a:t>8</a:t>
+              <a:t>8 days</a:t>
             </a:r>
             <a:endParaRPr lang="en-US" sz="1500" dirty="0"/>
           </a:p>
@@ -17638,7 +18342,7 @@
                 <a:ea typeface="Arial" pitchFamily="34" charset="-122"/>
                 <a:cs typeface="Arial" pitchFamily="34" charset="-120"/>
               </a:rPr>
-              <a:t>22</a:t>
+              <a:t>22 days</a:t>
             </a:r>
             <a:endParaRPr lang="en-US" sz="2800" dirty="0"/>
           </a:p>
@@ -17792,7 +18496,7 @@
                 <a:ea typeface="Arial" pitchFamily="34" charset="-122"/>
                 <a:cs typeface="Arial" pitchFamily="34" charset="-120"/>
               </a:rPr>
-              <a:t>Spring</a:t>
+              <a:t>Earlier</a:t>
             </a:r>
             <a:endParaRPr lang="en-US" sz="900" dirty="0"/>
           </a:p>
@@ -18024,7 +18728,7 @@
                 <a:ea typeface="Arial" pitchFamily="34" charset="-122"/>
                 <a:cs typeface="Arial" pitchFamily="34" charset="-120"/>
               </a:rPr>
-              <a:t>30-Year Mortgage Rate</a:t>
+              <a:t>Typical Seller Credit</a:t>
             </a:r>
             <a:endParaRPr lang="en-US" sz="1200" dirty="0"/>
           </a:p>
@@ -18063,7 +18767,7 @@
                 <a:ea typeface="Arial" pitchFamily="34" charset="-122"/>
                 <a:cs typeface="Arial" pitchFamily="34" charset="-120"/>
               </a:rPr>
-              <a:t>Spring</a:t>
+              <a:t>Earlier</a:t>
             </a:r>
             <a:endParaRPr lang="en-US" sz="900" dirty="0"/>
           </a:p>
@@ -18102,7 +18806,7 @@
                 <a:ea typeface="Arial" pitchFamily="34" charset="-122"/>
                 <a:cs typeface="Arial" pitchFamily="34" charset="-120"/>
               </a:rPr>
-              <a:t>~6.3%</a:t>
+              <a:t>$8,250</a:t>
             </a:r>
             <a:endParaRPr lang="en-US" sz="1500" dirty="0"/>
           </a:p>
@@ -18180,7 +18884,7 @@
                 <a:ea typeface="Arial" pitchFamily="34" charset="-122"/>
                 <a:cs typeface="Arial" pitchFamily="34" charset="-120"/>
               </a:rPr>
-              <a:t>6.95%</a:t>
+              <a:t>$12,100</a:t>
             </a:r>
             <a:endParaRPr lang="en-US" sz="2800" dirty="0"/>
           </a:p>
@@ -18194,8 +18898,8 @@
         </p:nvSpPr>
         <p:spPr>
           <a:xfrm>
-            <a:off x="457200" y="4005072"/>
-            <a:ext cx="8229600" cy="548640"/>
+            <a:off x="457200" y="3931920"/>
+            <a:ext cx="8229600" cy="772668"/>
           </a:xfrm>
           <a:prstGeom prst="rect">
             <a:avLst/>
@@ -18219,7 +18923,7 @@
                 <a:ea typeface="Arial" pitchFamily="34" charset="-122"/>
                 <a:cs typeface="Arial" pitchFamily="34" charset="-120"/>
               </a:rPr>
-              <a:t>Buyers are negotiating again. Price for the market we have now, not the one from April.</a:t>
+              <a:t>Buyers are negotiating again. Price for the market we have now, not the one from the spring.</a:t>
             </a:r>
             <a:endParaRPr lang="en-US" sz="1400" dirty="0"/>
           </a:p>
@@ -18438,13 +19142,6 @@
             </a:solidFill>
             <a:prstDash val="solid"/>
           </a:ln>
-          <a:effectLst>
-            <a:outerShdw sx="100000" sy="100000" kx="0" ky="0" algn="bl" rotWithShape="0" blurRad="76200" dist="25400" dir="5400000">
-              <a:srgbClr val="1A1A1A">
-                <a:alpha val="12000"/>
-              </a:srgbClr>
-            </a:outerShdw>
-          </a:effectLst>
         </p:spPr>
       </p:sp>
       <p:sp>
@@ -18465,7 +19162,7 @@
           <a:ln/>
         </p:spPr>
         <p:txBody>
-          <a:bodyPr wrap="square" lIns="0" tIns="0" rIns="0" bIns="0" rtlCol="0" anchor="ctr"/>
+          <a:bodyPr wrap="square" lIns="0" tIns="0" rIns="0" bIns="0" rtlCol="0" anchor="t"/>
           <a:lstStyle/>
           <a:p>
             <a:pPr indent="0" marL="0">
@@ -18628,13 +19325,6 @@
             </a:solidFill>
             <a:prstDash val="solid"/>
           </a:ln>
-          <a:effectLst>
-            <a:outerShdw sx="100000" sy="100000" kx="0" ky="0" algn="bl" rotWithShape="0" blurRad="76200" dist="25400" dir="5400000">
-              <a:srgbClr val="1A1A1A">
-                <a:alpha val="12000"/>
-              </a:srgbClr>
-            </a:outerShdw>
-          </a:effectLst>
         </p:spPr>
       </p:sp>
       <p:sp>
@@ -18655,7 +19345,7 @@
           <a:ln/>
         </p:spPr>
         <p:txBody>
-          <a:bodyPr wrap="square" lIns="0" tIns="0" rIns="0" bIns="0" rtlCol="0" anchor="ctr"/>
+          <a:bodyPr wrap="square" lIns="0" tIns="0" rIns="0" bIns="0" rtlCol="0" anchor="t"/>
           <a:lstStyle/>
           <a:p>
             <a:pPr indent="0" marL="0">
@@ -18748,7 +19438,7 @@
                 <a:ea typeface="Arial" pitchFamily="34" charset="-122"/>
                 <a:cs typeface="Arial" pitchFamily="34" charset="-120"/>
               </a:rPr>
-              <a:t>Under contract in 9 days</a:t>
+              <a:t>Under contract · 9 days</a:t>
             </a:r>
             <a:endParaRPr lang="en-US" sz="1100" dirty="0"/>
           </a:p>
@@ -18818,13 +19508,6 @@
             </a:solidFill>
             <a:prstDash val="solid"/>
           </a:ln>
-          <a:effectLst>
-            <a:outerShdw sx="100000" sy="100000" kx="0" ky="0" algn="bl" rotWithShape="0" blurRad="76200" dist="25400" dir="5400000">
-              <a:srgbClr val="1A1A1A">
-                <a:alpha val="12000"/>
-              </a:srgbClr>
-            </a:outerShdw>
-          </a:effectLst>
         </p:spPr>
       </p:sp>
       <p:sp>
@@ -18845,7 +19528,7 @@
           <a:ln/>
         </p:spPr>
         <p:txBody>
-          <a:bodyPr wrap="square" lIns="0" tIns="0" rIns="0" bIns="0" rtlCol="0" anchor="ctr"/>
+          <a:bodyPr wrap="square" lIns="0" tIns="0" rIns="0" bIns="0" rtlCol="0" anchor="t"/>
           <a:lstStyle/>
           <a:p>
             <a:pPr indent="0" marL="0">
@@ -18991,8 +19674,8 @@
         </p:nvSpPr>
         <p:spPr>
           <a:xfrm>
-            <a:off x="457200" y="3977640"/>
-            <a:ext cx="8229600" cy="502920"/>
+            <a:off x="457200" y="3931920"/>
+            <a:ext cx="8229600" cy="772668"/>
           </a:xfrm>
           <a:prstGeom prst="rect">
             <a:avLst/>
@@ -19180,7 +19863,7 @@
         <p:spPr>
           <a:xfrm>
             <a:off x="457200" y="1051560"/>
-            <a:ext cx="2560320" cy="3017520"/>
+            <a:ext cx="2560320" cy="2926080"/>
           </a:xfrm>
           <a:prstGeom prst="roundRect">
             <a:avLst>
@@ -19479,8 +20162,8 @@
         </p:nvSpPr>
         <p:spPr>
           <a:xfrm>
-            <a:off x="658368" y="3291840"/>
-            <a:ext cx="2157984" cy="685800"/>
+            <a:off x="658368" y="3264408"/>
+            <a:ext cx="2157984" cy="640080"/>
           </a:xfrm>
           <a:prstGeom prst="rect">
             <a:avLst/>
@@ -19519,7 +20202,7 @@
         <p:spPr>
           <a:xfrm>
             <a:off x="3291840" y="1051560"/>
-            <a:ext cx="2560320" cy="3017520"/>
+            <a:ext cx="2560320" cy="2926080"/>
           </a:xfrm>
           <a:prstGeom prst="roundRect">
             <a:avLst>
@@ -19857,8 +20540,8 @@
         </p:nvSpPr>
         <p:spPr>
           <a:xfrm>
-            <a:off x="3493008" y="3291840"/>
-            <a:ext cx="2157984" cy="685800"/>
+            <a:off x="3493008" y="3264408"/>
+            <a:ext cx="2157984" cy="640080"/>
           </a:xfrm>
           <a:prstGeom prst="rect">
             <a:avLst/>
@@ -19897,7 +20580,7 @@
         <p:spPr>
           <a:xfrm>
             <a:off x="6126480" y="1051560"/>
-            <a:ext cx="2560320" cy="3017520"/>
+            <a:ext cx="2560320" cy="2926080"/>
           </a:xfrm>
           <a:prstGeom prst="roundRect">
             <a:avLst>
@@ -20196,8 +20879,8 @@
         </p:nvSpPr>
         <p:spPr>
           <a:xfrm>
-            <a:off x="6327648" y="3291840"/>
-            <a:ext cx="2157984" cy="685800"/>
+            <a:off x="6327648" y="3264408"/>
+            <a:ext cx="2157984" cy="640080"/>
           </a:xfrm>
           <a:prstGeom prst="rect">
             <a:avLst/>
@@ -20235,8 +20918,8 @@
         </p:nvSpPr>
         <p:spPr>
           <a:xfrm>
-            <a:off x="457200" y="4206240"/>
-            <a:ext cx="8229600" cy="365760"/>
+            <a:off x="457200" y="4114800"/>
+            <a:ext cx="8229600" cy="589788"/>
           </a:xfrm>
           <a:prstGeom prst="rect">
             <a:avLst/>
@@ -20260,7 +20943,7 @@
                 <a:ea typeface="Arial" pitchFamily="34" charset="-122"/>
                 <a:cs typeface="Arial" pitchFamily="34" charset="-120"/>
               </a:rPr>
-              <a:t>All three net within a few thousand dollars. The real choice is time and risk.</a:t>
+              <a:t>The nets are close. The real choice is time and risk.</a:t>
             </a:r>
             <a:endParaRPr lang="en-US" sz="1400" dirty="0"/>
           </a:p>

--- a/samples/seller-cma/517-Larkwood-Ave-Listing-Presentation.pptx
+++ b/samples/seller-cma/517-Larkwood-Ave-Listing-Presentation.pptx
@@ -2916,13 +2916,13 @@
                 <c:ptCount val="3"/>
                 <c:lvl>
                   <c:pt idx="0">
-                    <c:v>List at $479,900</c:v>
+                    <c:v>Premium at $474,900</c:v>
                   </c:pt>
                   <c:pt idx="1">
-                    <c:v>List at $469,900</c:v>
+                    <c:v>Market Price at $469,900</c:v>
                   </c:pt>
                   <c:pt idx="2">
-                    <c:v>List at $459,900</c:v>
+                    <c:v>Draw Offers at $459,900</c:v>
                   </c:pt>
                 </c:lvl>
               </c:multiLvlStrCache>
@@ -2935,13 +2935,13 @@
                 <c:formatCode>General</c:formatCode>
                 <c:ptCount val="3"/>
                 <c:pt idx="0">
-                  <c:v>423519</c:v>
+                  <c:v>424222</c:v>
                 </c:pt>
                 <c:pt idx="1">
-                  <c:v>424563</c:v>
+                  <c:v>424636</c:v>
                 </c:pt>
                 <c:pt idx="2">
-                  <c:v>419558</c:v>
+                  <c:v>415497</c:v>
                 </c:pt>
               </c:numCache>
             </c:numRef>
@@ -3917,7 +3917,7 @@
           <a:p>
             <a:r>
               <a:rPr lang="en-US" dirty="0"/>
-              <a:t>Expected sales are estimates, not guarantees: each option's list price times an assumed 97.0% of its final asking price after seller-paid costs, plus that option's seller credit, to the nearest $500. None is below the supported range (the comps are already net of seller credits) or above its list price or the top of the range. At $479,900 we expect the recommended option's sale: a price above the range usually sells after a cut, so it costs time rather than adding to the sale. Holding costs: about $530 a month (insurance and utilities; no loan interest, since no mortgage payoff was given) from the report date to each option's closing; property tax is in the proration. Title company fees are typical local charges (settlement fee $700, title search $250, municipal lien search $125, recording $70); the title company's quote replaces them. Buyer payments: Conventional loan, 5% down, 6.95% 30-year fixed, property taxes at 18.1808 mills, with homestead, $3,600 a year insurance, and 0.5% a year mortgage insurance. Commissions are negotiable and not set by law. Not included: your mortgage payoff, this year's property tax proration (the tax bill and the expected closing date add it) and any repairs agreed after inspection. The closing agent provides the exact figures. Flood zone X: a lender may not require flood insurance, but a Citizens policy on a home with a dwelling replacement cost of $400,000 or more must carry flood insurance, and from January 1, 2027 every Citizens policy must (s. 627.351(6)(aa)). Get a quote; the total leaves it out until then.</a:t>
+              <a:t>Expected sales are estimates, not guarantees: each option's list price times an assumed 97.0% of its final asking price after seller-paid costs, plus that option's seller credit, to the nearest $500. At $474,900 we expect the recommended option's sale: a price above the recommended one usually sells after a cut, so it costs time rather than adding to the sale. Times to contract are estimates from the recent median of 22 days on market: longer for a higher price, shorter for a price that draws competing offers. Each option assumes a $11,000 seller credit toward the buyer's costs: how often recent sellers paid buyer costs times the typical amount. Holding costs: about $520 a month (insurance at the recommended $469,900 list price and utilities; no loan interest, since no mortgage payoff was given) from the report date to each option's closing; property tax is in the proration. Title company fees are typical local charges (settlement fee $700, title search $250, municipal lien search $125, recording $70); the title company's quote replaces them. Buyer payments: Conventional loan, 5% down, 6.95% 30-year fixed, property taxes at 18.1808 mills, with homestead, $3,600 a year insurance, and 0.5% a year mortgage insurance. Commissions are negotiable and not set by law. Not included: your mortgage payoff, this year's property tax proration (the tax bill and the expected closing date add it) and any repairs agreed after inspection. The closing agent provides the exact figures. Flood zone X: a lender may not require flood insurance, but a Citizens policy on a home with a dwelling replacement cost of $400,000 or more must carry flood insurance, and from January 1, 2027 every Citizens policy must (s. 627.351(6)(aa)). Get a quote; the total leaves it out until then.</a:t>
             </a:r>
             <a:endParaRPr lang="en-US" dirty="0"/>
           </a:p>
@@ -4005,7 +4005,7 @@
           <a:p>
             <a:r>
               <a:rPr lang="en-US" dirty="0"/>
-              <a:t>Adjusted for size ($1,200 to $1,800), lot ($5,000), market changes since each sale (1% a quarter off sales before July), roof and systems ($5,000), condition and updates ($30,000 to $45,000), view or water ($10,000) and seller credits (taken off each sale price). These are the five closest matches, sold Apr 24, 2026 to Aug 20, 2026 (one since July), all within a mile.</a:t>
+              <a:t>Adjusted for size ($1,200 to $1,800), lot ($5,000), market changes since each sale (1% a quarter off sales before July), roof and systems ($5,000), condition and updates ($30,000 to $45,000, against this home's full renovation), view or water ($10,000) and seller credits (taken off each sale price). These are the five closest matches, sold Apr 24, 2026 to Aug 20, 2026 (one since July), all within a mile.</a:t>
             </a:r>
             <a:endParaRPr lang="en-US" dirty="0"/>
           </a:p>
@@ -4533,7 +4533,7 @@
           <a:p>
             <a:r>
               <a:rPr lang="en-US" dirty="0"/>
-              <a:t>The earlier period is the spring sales; now is the summer sales. The report's market table has every figure.</a:t>
+              <a:t>The earlier period holds the older sales; now holds the recent ones. The report's market table has every figure.</a:t>
             </a:r>
             <a:endParaRPr lang="en-US" dirty="0"/>
           </a:p>
@@ -5497,7 +5497,7 @@
                 <a:ea typeface="Arial" pitchFamily="34" charset="-122"/>
                 <a:cs typeface="Arial" pitchFamily="34" charset="-120"/>
               </a:rPr>
-              <a:t>$5,005</a:t>
+              <a:t>$9,139</a:t>
             </a:r>
             <a:endParaRPr lang="en-US" sz="3200" dirty="0"/>
           </a:p>
@@ -5829,7 +5829,7 @@
                 <a:ea typeface="Arial" pitchFamily="34" charset="-122"/>
                 <a:cs typeface="Arial" pitchFamily="34" charset="-120"/>
               </a:rPr>
-              <a:t>List at $479,900</a:t>
+              <a:t>Premium at $474,900</a:t>
             </a:r>
             <a:endParaRPr lang="en-US" sz="1300" dirty="0"/>
           </a:p>
@@ -5868,7 +5868,7 @@
                 <a:ea typeface="Arial" pitchFamily="34" charset="-122"/>
                 <a:cs typeface="Arial" pitchFamily="34" charset="-120"/>
               </a:rPr>
-              <a:t>$4,169/mo</a:t>
+              <a:t>$4,127/mo</a:t>
             </a:r>
             <a:endParaRPr lang="en-US" sz="2800" dirty="0"/>
           </a:p>
@@ -5907,7 +5907,7 @@
                 <a:ea typeface="Arial" pitchFamily="34" charset="-122"/>
                 <a:cs typeface="Arial" pitchFamily="34" charset="-120"/>
               </a:rPr>
-              <a:t>$23,995 down (5%)</a:t>
+              <a:t>$23,745 down (5%)</a:t>
             </a:r>
             <a:endParaRPr lang="en-US" sz="1100" dirty="0"/>
           </a:p>
@@ -5973,7 +5973,7 @@
                 <a:ea typeface="Arial" pitchFamily="34" charset="-122"/>
                 <a:cs typeface="Arial" pitchFamily="34" charset="-120"/>
               </a:rPr>
-              <a:t>List at $469,900</a:t>
+              <a:t>Market Price at $469,900</a:t>
             </a:r>
             <a:endParaRPr lang="en-US" sz="1300" dirty="0"/>
           </a:p>
@@ -6117,7 +6117,7 @@
                 <a:ea typeface="Arial" pitchFamily="34" charset="-122"/>
                 <a:cs typeface="Arial" pitchFamily="34" charset="-120"/>
               </a:rPr>
-              <a:t>List at $459,900</a:t>
+              <a:t>Draw Offers at $459,900</a:t>
             </a:r>
             <a:endParaRPr lang="en-US" sz="1300" dirty="0"/>
           </a:p>
@@ -8500,7 +8500,7 @@
                 <a:gridCol w="1645920"/>
                 <a:gridCol w="1645920"/>
               </a:tblGrid>
-              <a:tr h="270976">
+              <a:tr h="258064">
                 <a:tc>
                   <a:txBody>
                     <a:bodyPr/>
@@ -8510,7 +8510,7 @@
                         <a:buNone/>
                       </a:pPr>
                       <a:r>
-                        <a:rPr lang="en-US" sz="1100" b="1" dirty="0">
+                        <a:rPr lang="en-US" sz="1000" b="1" dirty="0">
                           <a:solidFill>
                             <a:srgbClr val="A23200"/>
                           </a:solidFill>
@@ -8520,7 +8520,7 @@
                         </a:rPr>
                         <a:t>Estimated at Closing</a:t>
                       </a:r>
-                      <a:endParaRPr lang="en-US" sz="1100" dirty="0">
+                      <a:endParaRPr lang="en-US" sz="1000" dirty="0">
                         <a:latin typeface="Arial" charset="0"/>
                         <a:ea typeface="Arial" charset="0"/>
                         <a:cs typeface="Arial" charset="0"/>
@@ -8560,7 +8560,7 @@
                         <a:buNone/>
                       </a:pPr>
                       <a:r>
-                        <a:rPr lang="en-US" sz="1100" b="1" dirty="0">
+                        <a:rPr lang="en-US" sz="1000" b="1" dirty="0">
                           <a:solidFill>
                             <a:srgbClr val="A23200"/>
                           </a:solidFill>
@@ -8568,9 +8568,9 @@
                           <a:ea typeface="Arial" pitchFamily="34" charset="-122"/>
                           <a:cs typeface="Arial" pitchFamily="34" charset="-120"/>
                         </a:rPr>
-                        <a:t>List at $479,900</a:t>
+                        <a:t>Premium at $474,900</a:t>
                       </a:r>
-                      <a:endParaRPr lang="en-US" sz="1100" dirty="0">
+                      <a:endParaRPr lang="en-US" sz="1000" dirty="0">
                         <a:latin typeface="Arial" charset="0"/>
                         <a:ea typeface="Arial" charset="0"/>
                         <a:cs typeface="Arial" charset="0"/>
@@ -8610,7 +8610,7 @@
                         <a:buNone/>
                       </a:pPr>
                       <a:r>
-                        <a:rPr lang="en-US" sz="1100" b="1" dirty="0">
+                        <a:rPr lang="en-US" sz="1000" b="1" dirty="0">
                           <a:solidFill>
                             <a:srgbClr val="A23200"/>
                           </a:solidFill>
@@ -8618,9 +8618,9 @@
                           <a:ea typeface="Arial" pitchFamily="34" charset="-122"/>
                           <a:cs typeface="Arial" pitchFamily="34" charset="-120"/>
                         </a:rPr>
-                        <a:t>List at $469,900</a:t>
+                        <a:t>Market Price at $469,900</a:t>
                       </a:r>
-                      <a:endParaRPr lang="en-US" sz="1100" dirty="0">
+                      <a:endParaRPr lang="en-US" sz="1000" dirty="0">
                         <a:latin typeface="Arial" charset="0"/>
                         <a:ea typeface="Arial" charset="0"/>
                         <a:cs typeface="Arial" charset="0"/>
@@ -8660,7 +8660,7 @@
                         <a:buNone/>
                       </a:pPr>
                       <a:r>
-                        <a:rPr lang="en-US" sz="1100" b="1" dirty="0">
+                        <a:rPr lang="en-US" sz="1000" b="1" dirty="0">
                           <a:solidFill>
                             <a:srgbClr val="A23200"/>
                           </a:solidFill>
@@ -8668,9 +8668,9 @@
                           <a:ea typeface="Arial" pitchFamily="34" charset="-122"/>
                           <a:cs typeface="Arial" pitchFamily="34" charset="-120"/>
                         </a:rPr>
-                        <a:t>List at $459,900</a:t>
+                        <a:t>Draw Offers at $459,900</a:t>
                       </a:r>
-                      <a:endParaRPr lang="en-US" sz="1100" dirty="0">
+                      <a:endParaRPr lang="en-US" sz="1000" dirty="0">
                         <a:latin typeface="Arial" charset="0"/>
                         <a:ea typeface="Arial" charset="0"/>
                         <a:cs typeface="Arial" charset="0"/>
@@ -8702,7 +8702,7 @@
                   </a:tcPr>
                 </a:tc>
               </a:tr>
-              <a:tr h="270976">
+              <a:tr h="258064">
                 <a:tc>
                   <a:txBody>
                     <a:bodyPr/>
@@ -8712,7 +8712,7 @@
                         <a:buNone/>
                       </a:pPr>
                       <a:r>
-                        <a:rPr lang="en-US" sz="1100" dirty="0">
+                        <a:rPr lang="en-US" sz="1000" dirty="0">
                           <a:solidFill>
                             <a:srgbClr val="1A1A1A"/>
                           </a:solidFill>
@@ -8722,7 +8722,7 @@
                         </a:rPr>
                         <a:t>Expected Sale Price</a:t>
                       </a:r>
-                      <a:endParaRPr lang="en-US" sz="1100" dirty="0">
+                      <a:endParaRPr lang="en-US" sz="1000" dirty="0">
                         <a:latin typeface="Arial" charset="0"/>
                         <a:ea typeface="Arial" charset="0"/>
                         <a:cs typeface="Arial" charset="0"/>
@@ -8762,7 +8762,7 @@
                         <a:buNone/>
                       </a:pPr>
                       <a:r>
-                        <a:rPr lang="en-US" sz="1100" dirty="0">
+                        <a:rPr lang="en-US" sz="1000" dirty="0">
                           <a:solidFill>
                             <a:srgbClr val="1A1A1A"/>
                           </a:solidFill>
@@ -8770,9 +8770,9 @@
                           <a:ea typeface="Arial" pitchFamily="34" charset="-122"/>
                           <a:cs typeface="Arial" pitchFamily="34" charset="-120"/>
                         </a:rPr>
-                        <a:t>$466,000</a:t>
+                        <a:t>$467,000</a:t>
                       </a:r>
-                      <a:endParaRPr lang="en-US" sz="1100" dirty="0">
+                      <a:endParaRPr lang="en-US" sz="1000" dirty="0">
                         <a:latin typeface="Arial" charset="0"/>
                         <a:ea typeface="Arial" charset="0"/>
                         <a:cs typeface="Arial" charset="0"/>
@@ -8812,7 +8812,7 @@
                         <a:buNone/>
                       </a:pPr>
                       <a:r>
-                        <a:rPr lang="en-US" sz="1100" dirty="0">
+                        <a:rPr lang="en-US" sz="1000" dirty="0">
                           <a:solidFill>
                             <a:srgbClr val="1A1A1A"/>
                           </a:solidFill>
@@ -8820,9 +8820,9 @@
                           <a:ea typeface="Arial" pitchFamily="34" charset="-122"/>
                           <a:cs typeface="Arial" pitchFamily="34" charset="-120"/>
                         </a:rPr>
-                        <a:t>$466,000</a:t>
+                        <a:t>$467,000</a:t>
                       </a:r>
-                      <a:endParaRPr lang="en-US" sz="1100" dirty="0">
+                      <a:endParaRPr lang="en-US" sz="1000" dirty="0">
                         <a:latin typeface="Arial" charset="0"/>
                         <a:ea typeface="Arial" charset="0"/>
                         <a:cs typeface="Arial" charset="0"/>
@@ -8862,7 +8862,7 @@
                         <a:buNone/>
                       </a:pPr>
                       <a:r>
-                        <a:rPr lang="en-US" sz="1100" dirty="0">
+                        <a:rPr lang="en-US" sz="1000" dirty="0">
                           <a:solidFill>
                             <a:srgbClr val="1A1A1A"/>
                           </a:solidFill>
@@ -8870,9 +8870,9 @@
                           <a:ea typeface="Arial" pitchFamily="34" charset="-122"/>
                           <a:cs typeface="Arial" pitchFamily="34" charset="-120"/>
                         </a:rPr>
-                        <a:t>$455,000</a:t>
+                        <a:t>$457,000</a:t>
                       </a:r>
-                      <a:endParaRPr lang="en-US" sz="1100" dirty="0">
+                      <a:endParaRPr lang="en-US" sz="1000" dirty="0">
                         <a:latin typeface="Arial" charset="0"/>
                         <a:ea typeface="Arial" charset="0"/>
                         <a:cs typeface="Arial" charset="0"/>
@@ -8904,7 +8904,7 @@
                   </a:tcPr>
                 </a:tc>
               </a:tr>
-              <a:tr h="270976">
+              <a:tr h="258064">
                 <a:tc>
                   <a:txBody>
                     <a:bodyPr/>
@@ -8914,7 +8914,7 @@
                         <a:buNone/>
                       </a:pPr>
                       <a:r>
-                        <a:rPr lang="en-US" sz="1100" dirty="0">
+                        <a:rPr lang="en-US" sz="1000" dirty="0">
                           <a:solidFill>
                             <a:srgbClr val="1A1A1A"/>
                           </a:solidFill>
@@ -8924,7 +8924,7 @@
                         </a:rPr>
                         <a:t>Expected Closing</a:t>
                       </a:r>
-                      <a:endParaRPr lang="en-US" sz="1100" dirty="0">
+                      <a:endParaRPr lang="en-US" sz="1000" dirty="0">
                         <a:latin typeface="Arial" charset="0"/>
                         <a:ea typeface="Arial" charset="0"/>
                         <a:cs typeface="Arial" charset="0"/>
@@ -8964,7 +8964,7 @@
                         <a:buNone/>
                       </a:pPr>
                       <a:r>
-                        <a:rPr lang="en-US" sz="1100" dirty="0">
+                        <a:rPr lang="en-US" sz="1000" dirty="0">
                           <a:solidFill>
                             <a:srgbClr val="1A1A1A"/>
                           </a:solidFill>
@@ -8972,9 +8972,9 @@
                           <a:ea typeface="Arial" pitchFamily="34" charset="-122"/>
                           <a:cs typeface="Arial" pitchFamily="34" charset="-120"/>
                         </a:rPr>
-                        <a:t>Feb 5, 2027</a:t>
+                        <a:t>Dec 24, 2026</a:t>
                       </a:r>
-                      <a:endParaRPr lang="en-US" sz="1100" dirty="0">
+                      <a:endParaRPr lang="en-US" sz="1000" dirty="0">
                         <a:latin typeface="Arial" charset="0"/>
                         <a:ea typeface="Arial" charset="0"/>
                         <a:cs typeface="Arial" charset="0"/>
@@ -9014,7 +9014,7 @@
                         <a:buNone/>
                       </a:pPr>
                       <a:r>
-                        <a:rPr lang="en-US" sz="1100" dirty="0">
+                        <a:rPr lang="en-US" sz="1000" dirty="0">
                           <a:solidFill>
                             <a:srgbClr val="1A1A1A"/>
                           </a:solidFill>
@@ -9022,9 +9022,9 @@
                           <a:ea typeface="Arial" pitchFamily="34" charset="-122"/>
                           <a:cs typeface="Arial" pitchFamily="34" charset="-120"/>
                         </a:rPr>
-                        <a:t>Dec 7, 2026</a:t>
+                        <a:t>Nov 30, 2026</a:t>
                       </a:r>
-                      <a:endParaRPr lang="en-US" sz="1100" dirty="0">
+                      <a:endParaRPr lang="en-US" sz="1000" dirty="0">
                         <a:latin typeface="Arial" charset="0"/>
                         <a:ea typeface="Arial" charset="0"/>
                         <a:cs typeface="Arial" charset="0"/>
@@ -9064,7 +9064,7 @@
                         <a:buNone/>
                       </a:pPr>
                       <a:r>
-                        <a:rPr lang="en-US" sz="1100" dirty="0">
+                        <a:rPr lang="en-US" sz="1000" dirty="0">
                           <a:solidFill>
                             <a:srgbClr val="1A1A1A"/>
                           </a:solidFill>
@@ -9072,9 +9072,9 @@
                           <a:ea typeface="Arial" pitchFamily="34" charset="-122"/>
                           <a:cs typeface="Arial" pitchFamily="34" charset="-120"/>
                         </a:rPr>
-                        <a:t>Nov 19, 2026</a:t>
+                        <a:t>Nov 16, 2026</a:t>
                       </a:r>
-                      <a:endParaRPr lang="en-US" sz="1100" dirty="0">
+                      <a:endParaRPr lang="en-US" sz="1000" dirty="0">
                         <a:latin typeface="Arial" charset="0"/>
                         <a:ea typeface="Arial" charset="0"/>
                         <a:cs typeface="Arial" charset="0"/>
@@ -9106,7 +9106,7 @@
                   </a:tcPr>
                 </a:tc>
               </a:tr>
-              <a:tr h="270976">
+              <a:tr h="258064">
                 <a:tc>
                   <a:txBody>
                     <a:bodyPr/>
@@ -9116,7 +9116,7 @@
                         <a:buNone/>
                       </a:pPr>
                       <a:r>
-                        <a:rPr lang="en-US" sz="1100" dirty="0">
+                        <a:rPr lang="en-US" sz="1000" dirty="0">
                           <a:solidFill>
                             <a:srgbClr val="1A1A1A"/>
                           </a:solidFill>
@@ -9126,7 +9126,7 @@
                         </a:rPr>
                         <a:t>Listing Brokerage (2.5%)</a:t>
                       </a:r>
-                      <a:endParaRPr lang="en-US" sz="1100" dirty="0">
+                      <a:endParaRPr lang="en-US" sz="1000" dirty="0">
                         <a:latin typeface="Arial" charset="0"/>
                         <a:ea typeface="Arial" charset="0"/>
                         <a:cs typeface="Arial" charset="0"/>
@@ -9166,7 +9166,7 @@
                         <a:buNone/>
                       </a:pPr>
                       <a:r>
-                        <a:rPr lang="en-US" sz="1100" dirty="0">
+                        <a:rPr lang="en-US" sz="1000" dirty="0">
                           <a:solidFill>
                             <a:srgbClr val="1A1A1A"/>
                           </a:solidFill>
@@ -9174,9 +9174,9 @@
                           <a:ea typeface="Arial" pitchFamily="34" charset="-122"/>
                           <a:cs typeface="Arial" pitchFamily="34" charset="-120"/>
                         </a:rPr>
-                        <a:t>−$11,650</a:t>
+                        <a:t>−$11,675</a:t>
                       </a:r>
-                      <a:endParaRPr lang="en-US" sz="1100" dirty="0">
+                      <a:endParaRPr lang="en-US" sz="1000" dirty="0">
                         <a:latin typeface="Arial" charset="0"/>
                         <a:ea typeface="Arial" charset="0"/>
                         <a:cs typeface="Arial" charset="0"/>
@@ -9216,7 +9216,7 @@
                         <a:buNone/>
                       </a:pPr>
                       <a:r>
-                        <a:rPr lang="en-US" sz="1100" dirty="0">
+                        <a:rPr lang="en-US" sz="1000" dirty="0">
                           <a:solidFill>
                             <a:srgbClr val="1A1A1A"/>
                           </a:solidFill>
@@ -9224,9 +9224,9 @@
                           <a:ea typeface="Arial" pitchFamily="34" charset="-122"/>
                           <a:cs typeface="Arial" pitchFamily="34" charset="-120"/>
                         </a:rPr>
-                        <a:t>−$11,650</a:t>
+                        <a:t>−$11,675</a:t>
                       </a:r>
-                      <a:endParaRPr lang="en-US" sz="1100" dirty="0">
+                      <a:endParaRPr lang="en-US" sz="1000" dirty="0">
                         <a:latin typeface="Arial" charset="0"/>
                         <a:ea typeface="Arial" charset="0"/>
                         <a:cs typeface="Arial" charset="0"/>
@@ -9266,7 +9266,7 @@
                         <a:buNone/>
                       </a:pPr>
                       <a:r>
-                        <a:rPr lang="en-US" sz="1100" dirty="0">
+                        <a:rPr lang="en-US" sz="1000" dirty="0">
                           <a:solidFill>
                             <a:srgbClr val="1A1A1A"/>
                           </a:solidFill>
@@ -9274,9 +9274,9 @@
                           <a:ea typeface="Arial" pitchFamily="34" charset="-122"/>
                           <a:cs typeface="Arial" pitchFamily="34" charset="-120"/>
                         </a:rPr>
-                        <a:t>−$11,375</a:t>
+                        <a:t>−$11,425</a:t>
                       </a:r>
-                      <a:endParaRPr lang="en-US" sz="1100" dirty="0">
+                      <a:endParaRPr lang="en-US" sz="1000" dirty="0">
                         <a:latin typeface="Arial" charset="0"/>
                         <a:ea typeface="Arial" charset="0"/>
                         <a:cs typeface="Arial" charset="0"/>
@@ -9308,7 +9308,7 @@
                   </a:tcPr>
                 </a:tc>
               </a:tr>
-              <a:tr h="270976">
+              <a:tr h="258064">
                 <a:tc>
                   <a:txBody>
                     <a:bodyPr/>
@@ -9318,7 +9318,7 @@
                         <a:buNone/>
                       </a:pPr>
                       <a:r>
-                        <a:rPr lang="en-US" sz="1100" dirty="0">
+                        <a:rPr lang="en-US" sz="1000" dirty="0">
                           <a:solidFill>
                             <a:srgbClr val="1A1A1A"/>
                           </a:solidFill>
@@ -9328,7 +9328,7 @@
                         </a:rPr>
                         <a:t>Buyer's Agent Compensation (2.5%)</a:t>
                       </a:r>
-                      <a:endParaRPr lang="en-US" sz="1100" dirty="0">
+                      <a:endParaRPr lang="en-US" sz="1000" dirty="0">
                         <a:latin typeface="Arial" charset="0"/>
                         <a:ea typeface="Arial" charset="0"/>
                         <a:cs typeface="Arial" charset="0"/>
@@ -9368,7 +9368,7 @@
                         <a:buNone/>
                       </a:pPr>
                       <a:r>
-                        <a:rPr lang="en-US" sz="1100" dirty="0">
+                        <a:rPr lang="en-US" sz="1000" dirty="0">
                           <a:solidFill>
                             <a:srgbClr val="1A1A1A"/>
                           </a:solidFill>
@@ -9376,9 +9376,9 @@
                           <a:ea typeface="Arial" pitchFamily="34" charset="-122"/>
                           <a:cs typeface="Arial" pitchFamily="34" charset="-120"/>
                         </a:rPr>
-                        <a:t>−$11,650</a:t>
+                        <a:t>−$11,675</a:t>
                       </a:r>
-                      <a:endParaRPr lang="en-US" sz="1100" dirty="0">
+                      <a:endParaRPr lang="en-US" sz="1000" dirty="0">
                         <a:latin typeface="Arial" charset="0"/>
                         <a:ea typeface="Arial" charset="0"/>
                         <a:cs typeface="Arial" charset="0"/>
@@ -9418,7 +9418,7 @@
                         <a:buNone/>
                       </a:pPr>
                       <a:r>
-                        <a:rPr lang="en-US" sz="1100" dirty="0">
+                        <a:rPr lang="en-US" sz="1000" dirty="0">
                           <a:solidFill>
                             <a:srgbClr val="1A1A1A"/>
                           </a:solidFill>
@@ -9426,9 +9426,9 @@
                           <a:ea typeface="Arial" pitchFamily="34" charset="-122"/>
                           <a:cs typeface="Arial" pitchFamily="34" charset="-120"/>
                         </a:rPr>
-                        <a:t>−$11,650</a:t>
+                        <a:t>−$11,675</a:t>
                       </a:r>
-                      <a:endParaRPr lang="en-US" sz="1100" dirty="0">
+                      <a:endParaRPr lang="en-US" sz="1000" dirty="0">
                         <a:latin typeface="Arial" charset="0"/>
                         <a:ea typeface="Arial" charset="0"/>
                         <a:cs typeface="Arial" charset="0"/>
@@ -9468,7 +9468,7 @@
                         <a:buNone/>
                       </a:pPr>
                       <a:r>
-                        <a:rPr lang="en-US" sz="1100" dirty="0">
+                        <a:rPr lang="en-US" sz="1000" dirty="0">
                           <a:solidFill>
                             <a:srgbClr val="1A1A1A"/>
                           </a:solidFill>
@@ -9476,9 +9476,9 @@
                           <a:ea typeface="Arial" pitchFamily="34" charset="-122"/>
                           <a:cs typeface="Arial" pitchFamily="34" charset="-120"/>
                         </a:rPr>
-                        <a:t>−$11,375</a:t>
+                        <a:t>−$11,425</a:t>
                       </a:r>
-                      <a:endParaRPr lang="en-US" sz="1100" dirty="0">
+                      <a:endParaRPr lang="en-US" sz="1000" dirty="0">
                         <a:latin typeface="Arial" charset="0"/>
                         <a:ea typeface="Arial" charset="0"/>
                         <a:cs typeface="Arial" charset="0"/>
@@ -9510,7 +9510,7 @@
                   </a:tcPr>
                 </a:tc>
               </a:tr>
-              <a:tr h="270976">
+              <a:tr h="258064">
                 <a:tc>
                   <a:txBody>
                     <a:bodyPr/>
@@ -9520,7 +9520,7 @@
                         <a:buNone/>
                       </a:pPr>
                       <a:r>
-                        <a:rPr lang="en-US" sz="1100" dirty="0">
+                        <a:rPr lang="en-US" sz="1000" dirty="0">
                           <a:solidFill>
                             <a:srgbClr val="1A1A1A"/>
                           </a:solidFill>
@@ -9530,7 +9530,7 @@
                         </a:rPr>
                         <a:t>Documentary Stamp Tax on the Deed (0.70%)</a:t>
                       </a:r>
-                      <a:endParaRPr lang="en-US" sz="1100" dirty="0">
+                      <a:endParaRPr lang="en-US" sz="1000" dirty="0">
                         <a:latin typeface="Arial" charset="0"/>
                         <a:ea typeface="Arial" charset="0"/>
                         <a:cs typeface="Arial" charset="0"/>
@@ -9570,7 +9570,7 @@
                         <a:buNone/>
                       </a:pPr>
                       <a:r>
-                        <a:rPr lang="en-US" sz="1100" dirty="0">
+                        <a:rPr lang="en-US" sz="1000" dirty="0">
                           <a:solidFill>
                             <a:srgbClr val="1A1A1A"/>
                           </a:solidFill>
@@ -9578,9 +9578,9 @@
                           <a:ea typeface="Arial" pitchFamily="34" charset="-122"/>
                           <a:cs typeface="Arial" pitchFamily="34" charset="-120"/>
                         </a:rPr>
-                        <a:t>−$3,262</a:t>
+                        <a:t>−$3,269</a:t>
                       </a:r>
-                      <a:endParaRPr lang="en-US" sz="1100" dirty="0">
+                      <a:endParaRPr lang="en-US" sz="1000" dirty="0">
                         <a:latin typeface="Arial" charset="0"/>
                         <a:ea typeface="Arial" charset="0"/>
                         <a:cs typeface="Arial" charset="0"/>
@@ -9620,7 +9620,7 @@
                         <a:buNone/>
                       </a:pPr>
                       <a:r>
-                        <a:rPr lang="en-US" sz="1100" dirty="0">
+                        <a:rPr lang="en-US" sz="1000" dirty="0">
                           <a:solidFill>
                             <a:srgbClr val="1A1A1A"/>
                           </a:solidFill>
@@ -9628,9 +9628,9 @@
                           <a:ea typeface="Arial" pitchFamily="34" charset="-122"/>
                           <a:cs typeface="Arial" pitchFamily="34" charset="-120"/>
                         </a:rPr>
-                        <a:t>−$3,262</a:t>
+                        <a:t>−$3,269</a:t>
                       </a:r>
-                      <a:endParaRPr lang="en-US" sz="1100" dirty="0">
+                      <a:endParaRPr lang="en-US" sz="1000" dirty="0">
                         <a:latin typeface="Arial" charset="0"/>
                         <a:ea typeface="Arial" charset="0"/>
                         <a:cs typeface="Arial" charset="0"/>
@@ -9670,7 +9670,7 @@
                         <a:buNone/>
                       </a:pPr>
                       <a:r>
-                        <a:rPr lang="en-US" sz="1100" dirty="0">
+                        <a:rPr lang="en-US" sz="1000" dirty="0">
                           <a:solidFill>
                             <a:srgbClr val="1A1A1A"/>
                           </a:solidFill>
@@ -9678,9 +9678,9 @@
                           <a:ea typeface="Arial" pitchFamily="34" charset="-122"/>
                           <a:cs typeface="Arial" pitchFamily="34" charset="-120"/>
                         </a:rPr>
-                        <a:t>−$3,185</a:t>
+                        <a:t>−$3,199</a:t>
                       </a:r>
-                      <a:endParaRPr lang="en-US" sz="1100" dirty="0">
+                      <a:endParaRPr lang="en-US" sz="1000" dirty="0">
                         <a:latin typeface="Arial" charset="0"/>
                         <a:ea typeface="Arial" charset="0"/>
                         <a:cs typeface="Arial" charset="0"/>
@@ -9712,7 +9712,7 @@
                   </a:tcPr>
                 </a:tc>
               </a:tr>
-              <a:tr h="270976">
+              <a:tr h="258064">
                 <a:tc>
                   <a:txBody>
                     <a:bodyPr/>
@@ -9722,7 +9722,7 @@
                         <a:buNone/>
                       </a:pPr>
                       <a:r>
-                        <a:rPr lang="en-US" sz="1100" dirty="0">
+                        <a:rPr lang="en-US" sz="1000" dirty="0">
                           <a:solidFill>
                             <a:srgbClr val="1A1A1A"/>
                           </a:solidFill>
@@ -9732,7 +9732,7 @@
                         </a:rPr>
                         <a:t>Owner's Title Insurance</a:t>
                       </a:r>
-                      <a:endParaRPr lang="en-US" sz="1100" dirty="0">
+                      <a:endParaRPr lang="en-US" sz="1000" dirty="0">
                         <a:latin typeface="Arial" charset="0"/>
                         <a:ea typeface="Arial" charset="0"/>
                         <a:cs typeface="Arial" charset="0"/>
@@ -9772,7 +9772,7 @@
                         <a:buNone/>
                       </a:pPr>
                       <a:r>
-                        <a:rPr lang="en-US" sz="1100" dirty="0">
+                        <a:rPr lang="en-US" sz="1000" dirty="0">
                           <a:solidFill>
                             <a:srgbClr val="1A1A1A"/>
                           </a:solidFill>
@@ -9780,9 +9780,9 @@
                           <a:ea typeface="Arial" pitchFamily="34" charset="-122"/>
                           <a:cs typeface="Arial" pitchFamily="34" charset="-120"/>
                         </a:rPr>
-                        <a:t>−$2,405</a:t>
+                        <a:t>−$2,410</a:t>
                       </a:r>
-                      <a:endParaRPr lang="en-US" sz="1100" dirty="0">
+                      <a:endParaRPr lang="en-US" sz="1000" dirty="0">
                         <a:latin typeface="Arial" charset="0"/>
                         <a:ea typeface="Arial" charset="0"/>
                         <a:cs typeface="Arial" charset="0"/>
@@ -9822,7 +9822,7 @@
                         <a:buNone/>
                       </a:pPr>
                       <a:r>
-                        <a:rPr lang="en-US" sz="1100" dirty="0">
+                        <a:rPr lang="en-US" sz="1000" dirty="0">
                           <a:solidFill>
                             <a:srgbClr val="1A1A1A"/>
                           </a:solidFill>
@@ -9830,9 +9830,9 @@
                           <a:ea typeface="Arial" pitchFamily="34" charset="-122"/>
                           <a:cs typeface="Arial" pitchFamily="34" charset="-120"/>
                         </a:rPr>
-                        <a:t>−$2,405</a:t>
+                        <a:t>−$2,410</a:t>
                       </a:r>
-                      <a:endParaRPr lang="en-US" sz="1100" dirty="0">
+                      <a:endParaRPr lang="en-US" sz="1000" dirty="0">
                         <a:latin typeface="Arial" charset="0"/>
                         <a:ea typeface="Arial" charset="0"/>
                         <a:cs typeface="Arial" charset="0"/>
@@ -9872,7 +9872,7 @@
                         <a:buNone/>
                       </a:pPr>
                       <a:r>
-                        <a:rPr lang="en-US" sz="1100" dirty="0">
+                        <a:rPr lang="en-US" sz="1000" dirty="0">
                           <a:solidFill>
                             <a:srgbClr val="1A1A1A"/>
                           </a:solidFill>
@@ -9880,9 +9880,9 @@
                           <a:ea typeface="Arial" pitchFamily="34" charset="-122"/>
                           <a:cs typeface="Arial" pitchFamily="34" charset="-120"/>
                         </a:rPr>
-                        <a:t>−$2,350</a:t>
+                        <a:t>−$2,360</a:t>
                       </a:r>
-                      <a:endParaRPr lang="en-US" sz="1100" dirty="0">
+                      <a:endParaRPr lang="en-US" sz="1000" dirty="0">
                         <a:latin typeface="Arial" charset="0"/>
                         <a:ea typeface="Arial" charset="0"/>
                         <a:cs typeface="Arial" charset="0"/>
@@ -9914,7 +9914,7 @@
                   </a:tcPr>
                 </a:tc>
               </a:tr>
-              <a:tr h="270976">
+              <a:tr h="258064">
                 <a:tc>
                   <a:txBody>
                     <a:bodyPr/>
@@ -9924,7 +9924,7 @@
                         <a:buNone/>
                       </a:pPr>
                       <a:r>
-                        <a:rPr lang="en-US" sz="1100" dirty="0">
+                        <a:rPr lang="en-US" sz="1000" dirty="0">
                           <a:solidFill>
                             <a:srgbClr val="1A1A1A"/>
                           </a:solidFill>
@@ -9934,7 +9934,7 @@
                         </a:rPr>
                         <a:t>Title Company Fees</a:t>
                       </a:r>
-                      <a:endParaRPr lang="en-US" sz="1100" dirty="0">
+                      <a:endParaRPr lang="en-US" sz="1000" dirty="0">
                         <a:latin typeface="Arial" charset="0"/>
                         <a:ea typeface="Arial" charset="0"/>
                         <a:cs typeface="Arial" charset="0"/>
@@ -9974,7 +9974,7 @@
                         <a:buNone/>
                       </a:pPr>
                       <a:r>
-                        <a:rPr lang="en-US" sz="1100" dirty="0">
+                        <a:rPr lang="en-US" sz="1000" dirty="0">
                           <a:solidFill>
                             <a:srgbClr val="1A1A1A"/>
                           </a:solidFill>
@@ -9984,7 +9984,7 @@
                         </a:rPr>
                         <a:t>−$1,145</a:t>
                       </a:r>
-                      <a:endParaRPr lang="en-US" sz="1100" dirty="0">
+                      <a:endParaRPr lang="en-US" sz="1000" dirty="0">
                         <a:latin typeface="Arial" charset="0"/>
                         <a:ea typeface="Arial" charset="0"/>
                         <a:cs typeface="Arial" charset="0"/>
@@ -10024,7 +10024,7 @@
                         <a:buNone/>
                       </a:pPr>
                       <a:r>
-                        <a:rPr lang="en-US" sz="1100" dirty="0">
+                        <a:rPr lang="en-US" sz="1000" dirty="0">
                           <a:solidFill>
                             <a:srgbClr val="1A1A1A"/>
                           </a:solidFill>
@@ -10034,7 +10034,7 @@
                         </a:rPr>
                         <a:t>−$1,145</a:t>
                       </a:r>
-                      <a:endParaRPr lang="en-US" sz="1100" dirty="0">
+                      <a:endParaRPr lang="en-US" sz="1000" dirty="0">
                         <a:latin typeface="Arial" charset="0"/>
                         <a:ea typeface="Arial" charset="0"/>
                         <a:cs typeface="Arial" charset="0"/>
@@ -10074,7 +10074,7 @@
                         <a:buNone/>
                       </a:pPr>
                       <a:r>
-                        <a:rPr lang="en-US" sz="1100" dirty="0">
+                        <a:rPr lang="en-US" sz="1000" dirty="0">
                           <a:solidFill>
                             <a:srgbClr val="1A1A1A"/>
                           </a:solidFill>
@@ -10084,7 +10084,7 @@
                         </a:rPr>
                         <a:t>−$1,145</a:t>
                       </a:r>
-                      <a:endParaRPr lang="en-US" sz="1100" dirty="0">
+                      <a:endParaRPr lang="en-US" sz="1000" dirty="0">
                         <a:latin typeface="Arial" charset="0"/>
                         <a:ea typeface="Arial" charset="0"/>
                         <a:cs typeface="Arial" charset="0"/>
@@ -10116,7 +10116,7 @@
                   </a:tcPr>
                 </a:tc>
               </a:tr>
-              <a:tr h="270976">
+              <a:tr h="258064">
                 <a:tc>
                   <a:txBody>
                     <a:bodyPr/>
@@ -10126,7 +10126,7 @@
                         <a:buNone/>
                       </a:pPr>
                       <a:r>
-                        <a:rPr lang="en-US" sz="1100" dirty="0">
+                        <a:rPr lang="en-US" sz="1000" dirty="0">
                           <a:solidFill>
                             <a:srgbClr val="1A1A1A"/>
                           </a:solidFill>
@@ -10136,7 +10136,7 @@
                         </a:rPr>
                         <a:t>Seller-Paid Buyer Costs</a:t>
                       </a:r>
-                      <a:endParaRPr lang="en-US" sz="1100" dirty="0">
+                      <a:endParaRPr lang="en-US" sz="1000" dirty="0">
                         <a:latin typeface="Arial" charset="0"/>
                         <a:ea typeface="Arial" charset="0"/>
                         <a:cs typeface="Arial" charset="0"/>
@@ -10176,7 +10176,7 @@
                         <a:buNone/>
                       </a:pPr>
                       <a:r>
-                        <a:rPr lang="en-US" sz="1100" dirty="0">
+                        <a:rPr lang="en-US" sz="1000" dirty="0">
                           <a:solidFill>
                             <a:srgbClr val="1A1A1A"/>
                           </a:solidFill>
@@ -10184,9 +10184,9 @@
                           <a:ea typeface="Arial" pitchFamily="34" charset="-122"/>
                           <a:cs typeface="Arial" pitchFamily="34" charset="-120"/>
                         </a:rPr>
-                        <a:t>−$10,000</a:t>
+                        <a:t>−$11,000</a:t>
                       </a:r>
-                      <a:endParaRPr lang="en-US" sz="1100" dirty="0">
+                      <a:endParaRPr lang="en-US" sz="1000" dirty="0">
                         <a:latin typeface="Arial" charset="0"/>
                         <a:ea typeface="Arial" charset="0"/>
                         <a:cs typeface="Arial" charset="0"/>
@@ -10226,7 +10226,7 @@
                         <a:buNone/>
                       </a:pPr>
                       <a:r>
-                        <a:rPr lang="en-US" sz="1100" dirty="0">
+                        <a:rPr lang="en-US" sz="1000" dirty="0">
                           <a:solidFill>
                             <a:srgbClr val="1A1A1A"/>
                           </a:solidFill>
@@ -10234,9 +10234,9 @@
                           <a:ea typeface="Arial" pitchFamily="34" charset="-122"/>
                           <a:cs typeface="Arial" pitchFamily="34" charset="-120"/>
                         </a:rPr>
-                        <a:t>−$10,000</a:t>
+                        <a:t>−$11,000</a:t>
                       </a:r>
-                      <a:endParaRPr lang="en-US" sz="1100" dirty="0">
+                      <a:endParaRPr lang="en-US" sz="1000" dirty="0">
                         <a:latin typeface="Arial" charset="0"/>
                         <a:ea typeface="Arial" charset="0"/>
                         <a:cs typeface="Arial" charset="0"/>
@@ -10276,7 +10276,7 @@
                         <a:buNone/>
                       </a:pPr>
                       <a:r>
-                        <a:rPr lang="en-US" sz="1100" dirty="0">
+                        <a:rPr lang="en-US" sz="1000" dirty="0">
                           <a:solidFill>
                             <a:srgbClr val="1A1A1A"/>
                           </a:solidFill>
@@ -10284,9 +10284,9 @@
                           <a:ea typeface="Arial" pitchFamily="34" charset="-122"/>
                           <a:cs typeface="Arial" pitchFamily="34" charset="-120"/>
                         </a:rPr>
-                        <a:t>−$5,000</a:t>
+                        <a:t>−$11,000</a:t>
                       </a:r>
-                      <a:endParaRPr lang="en-US" sz="1100" dirty="0">
+                      <a:endParaRPr lang="en-US" sz="1000" dirty="0">
                         <a:latin typeface="Arial" charset="0"/>
                         <a:ea typeface="Arial" charset="0"/>
                         <a:cs typeface="Arial" charset="0"/>
@@ -10318,7 +10318,7 @@
                   </a:tcPr>
                 </a:tc>
               </a:tr>
-              <a:tr h="270976">
+              <a:tr h="258064">
                 <a:tc>
                   <a:txBody>
                     <a:bodyPr/>
@@ -10328,7 +10328,7 @@
                         <a:buNone/>
                       </a:pPr>
                       <a:r>
-                        <a:rPr lang="en-US" sz="1100" b="1" dirty="0">
+                        <a:rPr lang="en-US" sz="1000" b="1" dirty="0">
                           <a:solidFill>
                             <a:srgbClr val="1A1A1A"/>
                           </a:solidFill>
@@ -10338,7 +10338,7 @@
                         </a:rPr>
                         <a:t>Estimated Net Before Mortgage Payoff</a:t>
                       </a:r>
-                      <a:endParaRPr lang="en-US" sz="1100" dirty="0">
+                      <a:endParaRPr lang="en-US" sz="1000" dirty="0">
                         <a:latin typeface="Arial" charset="0"/>
                         <a:ea typeface="Arial" charset="0"/>
                         <a:cs typeface="Arial" charset="0"/>
@@ -10384,7 +10384,7 @@
                         <a:buNone/>
                       </a:pPr>
                       <a:r>
-                        <a:rPr lang="en-US" sz="1100" b="1" dirty="0">
+                        <a:rPr lang="en-US" sz="1000" b="1" dirty="0">
                           <a:solidFill>
                             <a:srgbClr val="1A1A1A"/>
                           </a:solidFill>
@@ -10392,9 +10392,9 @@
                           <a:ea typeface="Arial" pitchFamily="34" charset="-122"/>
                           <a:cs typeface="Arial" pitchFamily="34" charset="-120"/>
                         </a:rPr>
-                        <a:t>$425,888</a:t>
+                        <a:t>$425,826</a:t>
                       </a:r>
-                      <a:endParaRPr lang="en-US" sz="1100" dirty="0">
+                      <a:endParaRPr lang="en-US" sz="1000" dirty="0">
                         <a:latin typeface="Arial" charset="0"/>
                         <a:ea typeface="Arial" charset="0"/>
                         <a:cs typeface="Arial" charset="0"/>
@@ -10440,7 +10440,7 @@
                         <a:buNone/>
                       </a:pPr>
                       <a:r>
-                        <a:rPr lang="en-US" sz="1100" b="1" dirty="0">
+                        <a:rPr lang="en-US" sz="1000" b="1" dirty="0">
                           <a:solidFill>
                             <a:srgbClr val="1A1A1A"/>
                           </a:solidFill>
@@ -10448,9 +10448,9 @@
                           <a:ea typeface="Arial" pitchFamily="34" charset="-122"/>
                           <a:cs typeface="Arial" pitchFamily="34" charset="-120"/>
                         </a:rPr>
-                        <a:t>$425,888</a:t>
+                        <a:t>$425,826</a:t>
                       </a:r>
-                      <a:endParaRPr lang="en-US" sz="1100" dirty="0">
+                      <a:endParaRPr lang="en-US" sz="1000" dirty="0">
                         <a:latin typeface="Arial" charset="0"/>
                         <a:ea typeface="Arial" charset="0"/>
                         <a:cs typeface="Arial" charset="0"/>
@@ -10496,7 +10496,7 @@
                         <a:buNone/>
                       </a:pPr>
                       <a:r>
-                        <a:rPr lang="en-US" sz="1100" b="1" dirty="0">
+                        <a:rPr lang="en-US" sz="1000" b="1" dirty="0">
                           <a:solidFill>
                             <a:srgbClr val="1A1A1A"/>
                           </a:solidFill>
@@ -10504,9 +10504,9 @@
                           <a:ea typeface="Arial" pitchFamily="34" charset="-122"/>
                           <a:cs typeface="Arial" pitchFamily="34" charset="-120"/>
                         </a:rPr>
-                        <a:t>$420,570</a:t>
+                        <a:t>$416,446</a:t>
                       </a:r>
-                      <a:endParaRPr lang="en-US" sz="1100" dirty="0">
+                      <a:endParaRPr lang="en-US" sz="1000" dirty="0">
                         <a:latin typeface="Arial" charset="0"/>
                         <a:ea typeface="Arial" charset="0"/>
                         <a:cs typeface="Arial" charset="0"/>
@@ -10544,7 +10544,7 @@
                   </a:tcPr>
                 </a:tc>
               </a:tr>
-              <a:tr h="270976">
+              <a:tr h="258064">
                 <a:tc>
                   <a:txBody>
                     <a:bodyPr/>
@@ -10554,7 +10554,7 @@
                         <a:buNone/>
                       </a:pPr>
                       <a:r>
-                        <a:rPr lang="en-US" sz="1100" dirty="0">
+                        <a:rPr lang="en-US" sz="1000" dirty="0">
                           <a:solidFill>
                             <a:srgbClr val="1A1A1A"/>
                           </a:solidFill>
@@ -10564,7 +10564,7 @@
                         </a:rPr>
                         <a:t>Holding Costs Until Closing</a:t>
                       </a:r>
-                      <a:endParaRPr lang="en-US" sz="1100" dirty="0">
+                      <a:endParaRPr lang="en-US" sz="1000" dirty="0">
                         <a:latin typeface="Arial" charset="0"/>
                         <a:ea typeface="Arial" charset="0"/>
                         <a:cs typeface="Arial" charset="0"/>
@@ -10604,7 +10604,7 @@
                         <a:buNone/>
                       </a:pPr>
                       <a:r>
-                        <a:rPr lang="en-US" sz="1100" dirty="0">
+                        <a:rPr lang="en-US" sz="1000" dirty="0">
                           <a:solidFill>
                             <a:srgbClr val="1A1A1A"/>
                           </a:solidFill>
@@ -10612,9 +10612,9 @@
                           <a:ea typeface="Arial" pitchFamily="34" charset="-122"/>
                           <a:cs typeface="Arial" pitchFamily="34" charset="-120"/>
                         </a:rPr>
-                        <a:t>−$2,369</a:t>
+                        <a:t>−$1,604</a:t>
                       </a:r>
-                      <a:endParaRPr lang="en-US" sz="1100" dirty="0">
+                      <a:endParaRPr lang="en-US" sz="1000" dirty="0">
                         <a:latin typeface="Arial" charset="0"/>
                         <a:ea typeface="Arial" charset="0"/>
                         <a:cs typeface="Arial" charset="0"/>
@@ -10654,7 +10654,7 @@
                         <a:buNone/>
                       </a:pPr>
                       <a:r>
-                        <a:rPr lang="en-US" sz="1100" dirty="0">
+                        <a:rPr lang="en-US" sz="1000" dirty="0">
                           <a:solidFill>
                             <a:srgbClr val="1A1A1A"/>
                           </a:solidFill>
@@ -10662,9 +10662,9 @@
                           <a:ea typeface="Arial" pitchFamily="34" charset="-122"/>
                           <a:cs typeface="Arial" pitchFamily="34" charset="-120"/>
                         </a:rPr>
-                        <a:t>−$1,325</a:t>
+                        <a:t>−$1,190</a:t>
                       </a:r>
-                      <a:endParaRPr lang="en-US" sz="1100" dirty="0">
+                      <a:endParaRPr lang="en-US" sz="1000" dirty="0">
                         <a:latin typeface="Arial" charset="0"/>
                         <a:ea typeface="Arial" charset="0"/>
                         <a:cs typeface="Arial" charset="0"/>
@@ -10704,7 +10704,7 @@
                         <a:buNone/>
                       </a:pPr>
                       <a:r>
-                        <a:rPr lang="en-US" sz="1100" dirty="0">
+                        <a:rPr lang="en-US" sz="1000" dirty="0">
                           <a:solidFill>
                             <a:srgbClr val="1A1A1A"/>
                           </a:solidFill>
@@ -10712,9 +10712,9 @@
                           <a:ea typeface="Arial" pitchFamily="34" charset="-122"/>
                           <a:cs typeface="Arial" pitchFamily="34" charset="-120"/>
                         </a:rPr>
-                        <a:t>−$1,012</a:t>
+                        <a:t>−$949</a:t>
                       </a:r>
-                      <a:endParaRPr lang="en-US" sz="1100" dirty="0">
+                      <a:endParaRPr lang="en-US" sz="1000" dirty="0">
                         <a:latin typeface="Arial" charset="0"/>
                         <a:ea typeface="Arial" charset="0"/>
                         <a:cs typeface="Arial" charset="0"/>
@@ -10746,7 +10746,7 @@
                   </a:tcPr>
                 </a:tc>
               </a:tr>
-              <a:tr h="270976">
+              <a:tr h="258064">
                 <a:tc>
                   <a:txBody>
                     <a:bodyPr/>
@@ -10756,7 +10756,7 @@
                         <a:buNone/>
                       </a:pPr>
                       <a:r>
-                        <a:rPr lang="en-US" sz="1100" b="1" dirty="0">
+                        <a:rPr lang="en-US" sz="1000" b="1" dirty="0">
                           <a:solidFill>
                             <a:srgbClr val="1A1A1A"/>
                           </a:solidFill>
@@ -10766,7 +10766,7 @@
                         </a:rPr>
                         <a:t>Net After Holding Costs</a:t>
                       </a:r>
-                      <a:endParaRPr lang="en-US" sz="1100" dirty="0">
+                      <a:endParaRPr lang="en-US" sz="1000" dirty="0">
                         <a:latin typeface="Arial" charset="0"/>
                         <a:ea typeface="Arial" charset="0"/>
                         <a:cs typeface="Arial" charset="0"/>
@@ -10812,7 +10812,7 @@
                         <a:buNone/>
                       </a:pPr>
                       <a:r>
-                        <a:rPr lang="en-US" sz="1100" b="1" dirty="0">
+                        <a:rPr lang="en-US" sz="1000" b="1" dirty="0">
                           <a:solidFill>
                             <a:srgbClr val="1A1A1A"/>
                           </a:solidFill>
@@ -10820,9 +10820,9 @@
                           <a:ea typeface="Arial" pitchFamily="34" charset="-122"/>
                           <a:cs typeface="Arial" pitchFamily="34" charset="-120"/>
                         </a:rPr>
-                        <a:t>$423,519</a:t>
+                        <a:t>$424,222</a:t>
                       </a:r>
-                      <a:endParaRPr lang="en-US" sz="1100" dirty="0">
+                      <a:endParaRPr lang="en-US" sz="1000" dirty="0">
                         <a:latin typeface="Arial" charset="0"/>
                         <a:ea typeface="Arial" charset="0"/>
                         <a:cs typeface="Arial" charset="0"/>
@@ -10868,7 +10868,7 @@
                         <a:buNone/>
                       </a:pPr>
                       <a:r>
-                        <a:rPr lang="en-US" sz="1100" b="1" dirty="0">
+                        <a:rPr lang="en-US" sz="1000" b="1" dirty="0">
                           <a:solidFill>
                             <a:srgbClr val="1A1A1A"/>
                           </a:solidFill>
@@ -10876,9 +10876,9 @@
                           <a:ea typeface="Arial" pitchFamily="34" charset="-122"/>
                           <a:cs typeface="Arial" pitchFamily="34" charset="-120"/>
                         </a:rPr>
-                        <a:t>$424,563</a:t>
+                        <a:t>$424,636</a:t>
                       </a:r>
-                      <a:endParaRPr lang="en-US" sz="1100" dirty="0">
+                      <a:endParaRPr lang="en-US" sz="1000" dirty="0">
                         <a:latin typeface="Arial" charset="0"/>
                         <a:ea typeface="Arial" charset="0"/>
                         <a:cs typeface="Arial" charset="0"/>
@@ -10924,7 +10924,7 @@
                         <a:buNone/>
                       </a:pPr>
                       <a:r>
-                        <a:rPr lang="en-US" sz="1100" b="1" dirty="0">
+                        <a:rPr lang="en-US" sz="1000" b="1" dirty="0">
                           <a:solidFill>
                             <a:srgbClr val="1A1A1A"/>
                           </a:solidFill>
@@ -10932,9 +10932,9 @@
                           <a:ea typeface="Arial" pitchFamily="34" charset="-122"/>
                           <a:cs typeface="Arial" pitchFamily="34" charset="-120"/>
                         </a:rPr>
-                        <a:t>$419,558</a:t>
+                        <a:t>$415,497</a:t>
                       </a:r>
-                      <a:endParaRPr lang="en-US" sz="1100" dirty="0">
+                      <a:endParaRPr lang="en-US" sz="1000" dirty="0">
                         <a:latin typeface="Arial" charset="0"/>
                         <a:ea typeface="Arial" charset="0"/>
                         <a:cs typeface="Arial" charset="0"/>
@@ -10984,8 +10984,8 @@
         </p:nvSpPr>
         <p:spPr>
           <a:xfrm>
-            <a:off x="457200" y="4394708"/>
-            <a:ext cx="8229600" cy="309880"/>
+            <a:off x="457200" y="4346448"/>
+            <a:ext cx="8229600" cy="358140"/>
           </a:xfrm>
           <a:prstGeom prst="rect">
             <a:avLst/>
@@ -13182,7 +13182,7 @@
                 <a:ea typeface="Arial" pitchFamily="34" charset="-122"/>
                 <a:cs typeface="Arial" pitchFamily="34" charset="-120"/>
               </a:rPr>
-              <a:t>About $466,000</a:t>
+              <a:t>About $467,000</a:t>
             </a:r>
             <a:endParaRPr lang="en-US" sz="2400" dirty="0"/>
           </a:p>
@@ -14222,7 +14222,7 @@
                 <a:ea typeface="Arial" pitchFamily="34" charset="-122"/>
                 <a:cs typeface="Arial" pitchFamily="34" charset="-120"/>
               </a:rPr>
-              <a:t>Adjusted for size ($1,200 to $1,800), lot ($5,000), market changes since each sale (1% a quarter off sales before July), roof and systems ($5,000), condition and updates ($30,000 to $45,000), view or water ($10,000) and seller credits (taken off each sale price).</a:t>
+              <a:t>Adjusted for size ($1,200 to $1,800), lot ($5,000), market changes since each sale (1% a quarter off sales before July), roof and systems ($5,000), condition and updates ($30,000 to $45,000, against this home's full renovation), view or water ($10,000) and seller credits (taken off each sale price).</a:t>
             </a:r>
             <a:endParaRPr lang="en-US" sz="1100" dirty="0"/>
           </a:p>
@@ -15924,7 +15924,7 @@
                 <a:ea typeface="Arial" pitchFamily="34" charset="-122"/>
                 <a:cs typeface="Arial" pitchFamily="34" charset="-120"/>
               </a:rPr>
-              <a:t>Renovated pool home; sold in the spring</a:t>
+              <a:t>Renovated pool home; sold earlier in the year</a:t>
             </a:r>
             <a:endParaRPr lang="en-US" sz="950" dirty="0"/>
           </a:p>
@@ -16609,7 +16609,7 @@
                 <a:ea typeface="Arial" pitchFamily="34" charset="-122"/>
                 <a:cs typeface="Arial" pitchFamily="34" charset="-120"/>
               </a:rPr>
-              <a:t>The two highest sold in the spring. The recent sales point to the middle of the range.</a:t>
+              <a:t>The two highest sold earlier in the year. The recent sales point to the middle of the range.</a:t>
             </a:r>
             <a:endParaRPr lang="en-US" sz="1200" dirty="0"/>
           </a:p>
@@ -17761,7 +17761,7 @@
                 <a:ea typeface="Arial" pitchFamily="34" charset="-122"/>
                 <a:cs typeface="Arial" pitchFamily="34" charset="-120"/>
               </a:rPr>
-              <a:t>The Market Shifted Since Spring</a:t>
+              <a:t>The Market Has Shifted</a:t>
             </a:r>
             <a:endParaRPr lang="en-US" sz="2600" dirty="0"/>
           </a:p>
@@ -18923,7 +18923,7 @@
                 <a:ea typeface="Arial" pitchFamily="34" charset="-122"/>
                 <a:cs typeface="Arial" pitchFamily="34" charset="-120"/>
               </a:rPr>
-              <a:t>Buyers are negotiating again. Price for the market we have now, not the one from the spring.</a:t>
+              <a:t>Buyers are negotiating again. Price for the market we have now, not the one from earlier in the year.</a:t>
             </a:r>
             <a:endParaRPr lang="en-US" sz="1400" dirty="0"/>
           </a:p>
@@ -19889,6 +19889,45 @@
         </p:nvSpPr>
         <p:spPr>
           <a:xfrm>
+            <a:off x="658368" y="1188720"/>
+            <a:ext cx="2157984" cy="228600"/>
+          </a:xfrm>
+          <a:prstGeom prst="rect">
+            <a:avLst/>
+          </a:prstGeom>
+          <a:noFill/>
+          <a:ln/>
+        </p:spPr>
+        <p:txBody>
+          <a:bodyPr wrap="square" lIns="0" tIns="0" rIns="0" bIns="0" rtlCol="0" anchor="ctr"/>
+          <a:lstStyle/>
+          <a:p>
+            <a:pPr indent="0" marL="0">
+              <a:buNone/>
+            </a:pPr>
+            <a:r>
+              <a:rPr lang="en-US" sz="1000" b="1" dirty="0">
+                <a:solidFill>
+                  <a:srgbClr val="C2410C"/>
+                </a:solidFill>
+                <a:latin typeface="Arial" pitchFamily="34" charset="0"/>
+                <a:ea typeface="Arial" pitchFamily="34" charset="-122"/>
+                <a:cs typeface="Arial" pitchFamily="34" charset="-120"/>
+              </a:rPr>
+              <a:t>PREMIUM</a:t>
+            </a:r>
+            <a:endParaRPr lang="en-US" sz="1000" dirty="0"/>
+          </a:p>
+        </p:txBody>
+      </p:sp>
+      <p:sp>
+        <p:nvSpPr>
+          <p:cNvPr id="5" name="Text 3"/>
+          <p:cNvSpPr txBox="1"/>
+          <p:nvPr/>
+        </p:nvSpPr>
+        <p:spPr>
+          <a:xfrm>
             <a:off x="658368" y="1435608"/>
             <a:ext cx="2157984" cy="548640"/>
           </a:xfrm>
@@ -19914,7 +19953,7 @@
                 <a:ea typeface="Arial" pitchFamily="34" charset="-122"/>
                 <a:cs typeface="Arial" pitchFamily="34" charset="-120"/>
               </a:rPr>
-              <a:t>$479,900</a:t>
+              <a:t>$474,900</a:t>
             </a:r>
             <a:endParaRPr lang="en-US" sz="3000" dirty="0"/>
           </a:p>
@@ -19922,14 +19961,14 @@
       </p:sp>
       <p:sp>
         <p:nvSpPr>
-          <p:cNvPr id="5" name="Text 3"/>
+          <p:cNvPr id="6" name="Text 4"/>
           <p:cNvSpPr txBox="1"/>
           <p:nvPr/>
         </p:nvSpPr>
         <p:spPr>
           <a:xfrm>
             <a:off x="658368" y="2075688"/>
-            <a:ext cx="1075809" cy="347472"/>
+            <a:ext cx="1180377" cy="347472"/>
           </a:xfrm>
           <a:prstGeom prst="rect">
             <a:avLst/>
@@ -19961,14 +20000,14 @@
       </p:sp>
       <p:sp>
         <p:nvSpPr>
-          <p:cNvPr id="6" name="Text 4"/>
-          <p:cNvSpPr txBox="1"/>
-          <p:nvPr/>
-        </p:nvSpPr>
-        <p:spPr>
-          <a:xfrm>
-            <a:off x="1825617" y="2075688"/>
-            <a:ext cx="990735" cy="347472"/>
+          <p:cNvPr id="7" name="Text 5"/>
+          <p:cNvSpPr txBox="1"/>
+          <p:nvPr/>
+        </p:nvSpPr>
+        <p:spPr>
+          <a:xfrm>
+            <a:off x="1930185" y="2075688"/>
+            <a:ext cx="886167" cy="347472"/>
           </a:xfrm>
           <a:prstGeom prst="rect">
             <a:avLst/>
@@ -19992,7 +20031,7 @@
                 <a:ea typeface="Arial" pitchFamily="34" charset="-122"/>
                 <a:cs typeface="Arial" pitchFamily="34" charset="-120"/>
               </a:rPr>
-              <a:t>2–4 months</a:t>
+              <a:t>5–9 weeks</a:t>
             </a:r>
             <a:endParaRPr lang="en-US" sz="1300" dirty="0"/>
           </a:p>
@@ -20000,7 +20039,7 @@
       </p:sp>
       <p:sp>
         <p:nvSpPr>
-          <p:cNvPr id="7" name="Text 5"/>
+          <p:cNvPr id="8" name="Text 6"/>
           <p:cNvSpPr txBox="1"/>
           <p:nvPr/>
         </p:nvSpPr>
@@ -20039,7 +20078,7 @@
       </p:sp>
       <p:sp>
         <p:nvSpPr>
-          <p:cNvPr id="8" name="Text 6"/>
+          <p:cNvPr id="9" name="Text 7"/>
           <p:cNvSpPr txBox="1"/>
           <p:nvPr/>
         </p:nvSpPr>
@@ -20070,7 +20109,7 @@
                 <a:ea typeface="Arial" pitchFamily="34" charset="-122"/>
                 <a:cs typeface="Arial" pitchFamily="34" charset="-120"/>
               </a:rPr>
-              <a:t>$466,000</a:t>
+              <a:t>$467,000</a:t>
             </a:r>
             <a:endParaRPr lang="en-US" sz="1300" dirty="0"/>
           </a:p>
@@ -20078,7 +20117,7 @@
       </p:sp>
       <p:sp>
         <p:nvSpPr>
-          <p:cNvPr id="9" name="Text 7"/>
+          <p:cNvPr id="10" name="Text 8"/>
           <p:cNvSpPr txBox="1"/>
           <p:nvPr/>
         </p:nvSpPr>
@@ -20117,7 +20156,7 @@
       </p:sp>
       <p:sp>
         <p:nvSpPr>
-          <p:cNvPr id="10" name="Text 8"/>
+          <p:cNvPr id="11" name="Text 9"/>
           <p:cNvSpPr txBox="1"/>
           <p:nvPr/>
         </p:nvSpPr>
@@ -20148,7 +20187,7 @@
                 <a:ea typeface="Arial" pitchFamily="34" charset="-122"/>
                 <a:cs typeface="Arial" pitchFamily="34" charset="-120"/>
               </a:rPr>
-              <a:t>$10,000</a:t>
+              <a:t>$11,000</a:t>
             </a:r>
             <a:endParaRPr lang="en-US" sz="1300" dirty="0"/>
           </a:p>
@@ -20156,7 +20195,7 @@
       </p:sp>
       <p:sp>
         <p:nvSpPr>
-          <p:cNvPr id="11" name="Text 9"/>
+          <p:cNvPr id="12" name="Text 10"/>
           <p:cNvSpPr txBox="1"/>
           <p:nvPr/>
         </p:nvSpPr>
@@ -20187,7 +20226,7 @@
                 <a:ea typeface="Arial" pitchFamily="34" charset="-122"/>
                 <a:cs typeface="Arial" pitchFamily="34" charset="-120"/>
               </a:rPr>
-              <a:t>Tests the top of the range; likely needs a price cut before an offer</a:t>
+              <a:t>Tests the upper part of the range; takes longer and may need a price cut before an offer</a:t>
             </a:r>
             <a:endParaRPr lang="en-US" sz="1100" dirty="0"/>
           </a:p>
@@ -20195,7 +20234,7 @@
       </p:sp>
       <p:sp>
         <p:nvSpPr>
-          <p:cNvPr id="12" name="Shape 10"/>
+          <p:cNvPr id="13" name="Shape 11"/>
           <p:cNvSpPr/>
           <p:nvPr/>
         </p:nvSpPr>
@@ -20222,7 +20261,7 @@
       </p:sp>
       <p:sp>
         <p:nvSpPr>
-          <p:cNvPr id="13" name="Text 11"/>
+          <p:cNvPr id="14" name="Text 12"/>
           <p:cNvSpPr txBox="1"/>
           <p:nvPr/>
         </p:nvSpPr>
@@ -20245,7 +20284,7 @@
               <a:buNone/>
             </a:pPr>
             <a:r>
-              <a:rPr lang="en-US" sz="1000" b="1" spc="200" kern="0" dirty="0">
+              <a:rPr lang="en-US" sz="950" b="1" dirty="0">
                 <a:solidFill>
                   <a:srgbClr val="FFFFFF"/>
                 </a:solidFill>
@@ -20253,15 +20292,15 @@
                 <a:ea typeface="Arial" pitchFamily="34" charset="-122"/>
                 <a:cs typeface="Arial" pitchFamily="34" charset="-120"/>
               </a:rPr>
-              <a:t>RECOMMENDED</a:t>
-            </a:r>
-            <a:endParaRPr lang="en-US" sz="1000" dirty="0"/>
-          </a:p>
-        </p:txBody>
-      </p:sp>
-      <p:sp>
-        <p:nvSpPr>
-          <p:cNvPr id="14" name="Text 12"/>
+              <a:t>MARKET PRICE · RECOMMENDED</a:t>
+            </a:r>
+            <a:endParaRPr lang="en-US" sz="950" dirty="0"/>
+          </a:p>
+        </p:txBody>
+      </p:sp>
+      <p:sp>
+        <p:nvSpPr>
+          <p:cNvPr id="15" name="Text 13"/>
           <p:cNvSpPr txBox="1"/>
           <p:nvPr/>
         </p:nvSpPr>
@@ -20300,7 +20339,7 @@
       </p:sp>
       <p:sp>
         <p:nvSpPr>
-          <p:cNvPr id="15" name="Text 13"/>
+          <p:cNvPr id="16" name="Text 14"/>
           <p:cNvSpPr txBox="1"/>
           <p:nvPr/>
         </p:nvSpPr>
@@ -20339,7 +20378,7 @@
       </p:sp>
       <p:sp>
         <p:nvSpPr>
-          <p:cNvPr id="16" name="Text 14"/>
+          <p:cNvPr id="17" name="Text 15"/>
           <p:cNvSpPr txBox="1"/>
           <p:nvPr/>
         </p:nvSpPr>
@@ -20370,7 +20409,7 @@
                 <a:ea typeface="Arial" pitchFamily="34" charset="-122"/>
                 <a:cs typeface="Arial" pitchFamily="34" charset="-120"/>
               </a:rPr>
-              <a:t>3–6 weeks</a:t>
+              <a:t>2–5 weeks</a:t>
             </a:r>
             <a:endParaRPr lang="en-US" sz="1300" dirty="0"/>
           </a:p>
@@ -20378,7 +20417,7 @@
       </p:sp>
       <p:sp>
         <p:nvSpPr>
-          <p:cNvPr id="17" name="Text 15"/>
+          <p:cNvPr id="18" name="Text 16"/>
           <p:cNvSpPr txBox="1"/>
           <p:nvPr/>
         </p:nvSpPr>
@@ -20417,7 +20456,7 @@
       </p:sp>
       <p:sp>
         <p:nvSpPr>
-          <p:cNvPr id="18" name="Text 16"/>
+          <p:cNvPr id="19" name="Text 17"/>
           <p:cNvSpPr txBox="1"/>
           <p:nvPr/>
         </p:nvSpPr>
@@ -20448,7 +20487,7 @@
                 <a:ea typeface="Arial" pitchFamily="34" charset="-122"/>
                 <a:cs typeface="Arial" pitchFamily="34" charset="-120"/>
               </a:rPr>
-              <a:t>$466,000</a:t>
+              <a:t>$467,000</a:t>
             </a:r>
             <a:endParaRPr lang="en-US" sz="1300" dirty="0"/>
           </a:p>
@@ -20456,7 +20495,7 @@
       </p:sp>
       <p:sp>
         <p:nvSpPr>
-          <p:cNvPr id="19" name="Text 17"/>
+          <p:cNvPr id="20" name="Text 18"/>
           <p:cNvSpPr txBox="1"/>
           <p:nvPr/>
         </p:nvSpPr>
@@ -20495,7 +20534,7 @@
       </p:sp>
       <p:sp>
         <p:nvSpPr>
-          <p:cNvPr id="20" name="Text 18"/>
+          <p:cNvPr id="21" name="Text 19"/>
           <p:cNvSpPr txBox="1"/>
           <p:nvPr/>
         </p:nvSpPr>
@@ -20526,7 +20565,7 @@
                 <a:ea typeface="Arial" pitchFamily="34" charset="-122"/>
                 <a:cs typeface="Arial" pitchFamily="34" charset="-120"/>
               </a:rPr>
-              <a:t>$10,000</a:t>
+              <a:t>$11,000</a:t>
             </a:r>
             <a:endParaRPr lang="en-US" sz="1300" dirty="0"/>
           </a:p>
@@ -20534,7 +20573,7 @@
       </p:sp>
       <p:sp>
         <p:nvSpPr>
-          <p:cNvPr id="21" name="Text 19"/>
+          <p:cNvPr id="22" name="Text 20"/>
           <p:cNvSpPr txBox="1"/>
           <p:nvPr/>
         </p:nvSpPr>
@@ -20565,7 +20604,7 @@
                 <a:ea typeface="Arial" pitchFamily="34" charset="-122"/>
                 <a:cs typeface="Arial" pitchFamily="34" charset="-120"/>
               </a:rPr>
-              <a:t>Priced at the middle of recent adjusted sales; room to negotiate</a:t>
+              <a:t>Priced where recent adjusted sales support; room to negotiate</a:t>
             </a:r>
             <a:endParaRPr lang="en-US" sz="1100" dirty="0"/>
           </a:p>
@@ -20573,7 +20612,7 @@
       </p:sp>
       <p:sp>
         <p:nvSpPr>
-          <p:cNvPr id="22" name="Shape 20"/>
+          <p:cNvPr id="23" name="Shape 21"/>
           <p:cNvSpPr/>
           <p:nvPr/>
         </p:nvSpPr>
@@ -20600,7 +20639,46 @@
       </p:sp>
       <p:sp>
         <p:nvSpPr>
-          <p:cNvPr id="23" name="Text 21"/>
+          <p:cNvPr id="24" name="Text 22"/>
+          <p:cNvSpPr txBox="1"/>
+          <p:nvPr/>
+        </p:nvSpPr>
+        <p:spPr>
+          <a:xfrm>
+            <a:off x="6327648" y="1188720"/>
+            <a:ext cx="2157984" cy="228600"/>
+          </a:xfrm>
+          <a:prstGeom prst="rect">
+            <a:avLst/>
+          </a:prstGeom>
+          <a:noFill/>
+          <a:ln/>
+        </p:spPr>
+        <p:txBody>
+          <a:bodyPr wrap="square" lIns="0" tIns="0" rIns="0" bIns="0" rtlCol="0" anchor="ctr"/>
+          <a:lstStyle/>
+          <a:p>
+            <a:pPr indent="0" marL="0">
+              <a:buNone/>
+            </a:pPr>
+            <a:r>
+              <a:rPr lang="en-US" sz="1000" b="1" dirty="0">
+                <a:solidFill>
+                  <a:srgbClr val="C2410C"/>
+                </a:solidFill>
+                <a:latin typeface="Arial" pitchFamily="34" charset="0"/>
+                <a:ea typeface="Arial" pitchFamily="34" charset="-122"/>
+                <a:cs typeface="Arial" pitchFamily="34" charset="-120"/>
+              </a:rPr>
+              <a:t>DRAW OFFERS</a:t>
+            </a:r>
+            <a:endParaRPr lang="en-US" sz="1000" dirty="0"/>
+          </a:p>
+        </p:txBody>
+      </p:sp>
+      <p:sp>
+        <p:nvSpPr>
+          <p:cNvPr id="25" name="Text 23"/>
           <p:cNvSpPr txBox="1"/>
           <p:nvPr/>
         </p:nvSpPr>
@@ -20639,7 +20717,7 @@
       </p:sp>
       <p:sp>
         <p:nvSpPr>
-          <p:cNvPr id="24" name="Text 22"/>
+          <p:cNvPr id="26" name="Text 24"/>
           <p:cNvSpPr txBox="1"/>
           <p:nvPr/>
         </p:nvSpPr>
@@ -20678,7 +20756,7 @@
       </p:sp>
       <p:sp>
         <p:nvSpPr>
-          <p:cNvPr id="25" name="Text 23"/>
+          <p:cNvPr id="27" name="Text 25"/>
           <p:cNvSpPr txBox="1"/>
           <p:nvPr/>
         </p:nvSpPr>
@@ -20709,7 +20787,7 @@
                 <a:ea typeface="Arial" pitchFamily="34" charset="-122"/>
                 <a:cs typeface="Arial" pitchFamily="34" charset="-120"/>
               </a:rPr>
-              <a:t>1–3 weeks</a:t>
+              <a:t>1–2 weeks</a:t>
             </a:r>
             <a:endParaRPr lang="en-US" sz="1300" dirty="0"/>
           </a:p>
@@ -20717,7 +20795,7 @@
       </p:sp>
       <p:sp>
         <p:nvSpPr>
-          <p:cNvPr id="26" name="Text 24"/>
+          <p:cNvPr id="28" name="Text 26"/>
           <p:cNvSpPr txBox="1"/>
           <p:nvPr/>
         </p:nvSpPr>
@@ -20756,7 +20834,7 @@
       </p:sp>
       <p:sp>
         <p:nvSpPr>
-          <p:cNvPr id="27" name="Text 25"/>
+          <p:cNvPr id="29" name="Text 27"/>
           <p:cNvSpPr txBox="1"/>
           <p:nvPr/>
         </p:nvSpPr>
@@ -20787,7 +20865,7 @@
                 <a:ea typeface="Arial" pitchFamily="34" charset="-122"/>
                 <a:cs typeface="Arial" pitchFamily="34" charset="-120"/>
               </a:rPr>
-              <a:t>$455,000</a:t>
+              <a:t>$457,000</a:t>
             </a:r>
             <a:endParaRPr lang="en-US" sz="1300" dirty="0"/>
           </a:p>
@@ -20795,14 +20873,14 @@
       </p:sp>
       <p:sp>
         <p:nvSpPr>
-          <p:cNvPr id="28" name="Text 26"/>
+          <p:cNvPr id="30" name="Text 28"/>
           <p:cNvSpPr txBox="1"/>
           <p:nvPr/>
         </p:nvSpPr>
         <p:spPr>
           <a:xfrm>
             <a:off x="6327648" y="2843784"/>
-            <a:ext cx="1504897" cy="347472"/>
+            <a:ext cx="1409430" cy="347472"/>
           </a:xfrm>
           <a:prstGeom prst="rect">
             <a:avLst/>
@@ -20834,14 +20912,14 @@
       </p:sp>
       <p:sp>
         <p:nvSpPr>
-          <p:cNvPr id="29" name="Text 27"/>
-          <p:cNvSpPr txBox="1"/>
-          <p:nvPr/>
-        </p:nvSpPr>
-        <p:spPr>
-          <a:xfrm>
-            <a:off x="7923985" y="2843784"/>
-            <a:ext cx="561647" cy="347472"/>
+          <p:cNvPr id="31" name="Text 29"/>
+          <p:cNvSpPr txBox="1"/>
+          <p:nvPr/>
+        </p:nvSpPr>
+        <p:spPr>
+          <a:xfrm>
+            <a:off x="7828518" y="2843784"/>
+            <a:ext cx="657114" cy="347472"/>
           </a:xfrm>
           <a:prstGeom prst="rect">
             <a:avLst/>
@@ -20865,7 +20943,7 @@
                 <a:ea typeface="Arial" pitchFamily="34" charset="-122"/>
                 <a:cs typeface="Arial" pitchFamily="34" charset="-120"/>
               </a:rPr>
-              <a:t>$5,000</a:t>
+              <a:t>$11,000</a:t>
             </a:r>
             <a:endParaRPr lang="en-US" sz="1300" dirty="0"/>
           </a:p>
@@ -20873,7 +20951,7 @@
       </p:sp>
       <p:sp>
         <p:nvSpPr>
-          <p:cNvPr id="30" name="Text 28"/>
+          <p:cNvPr id="32" name="Text 30"/>
           <p:cNvSpPr txBox="1"/>
           <p:nvPr/>
         </p:nvSpPr>
@@ -20904,7 +20982,7 @@
                 <a:ea typeface="Arial" pitchFamily="34" charset="-122"/>
                 <a:cs typeface="Arial" pitchFamily="34" charset="-120"/>
               </a:rPr>
-              <a:t>Aims for competing offers; depends on them materializing</a:t>
+              <a:t>Priced to bring the most buyers in early and draw offers; usually the fastest to contract</a:t>
             </a:r>
             <a:endParaRPr lang="en-US" sz="1100" dirty="0"/>
           </a:p>
@@ -20912,7 +20990,7 @@
       </p:sp>
       <p:sp>
         <p:nvSpPr>
-          <p:cNvPr id="31" name="Text 29"/>
+          <p:cNvPr id="33" name="Text 31"/>
           <p:cNvSpPr txBox="1"/>
           <p:nvPr/>
         </p:nvSpPr>
@@ -20951,7 +21029,7 @@
       </p:sp>
       <p:sp>
         <p:nvSpPr>
-          <p:cNvPr id="32" name="Text 30"/>
+          <p:cNvPr id="34" name="Text 32"/>
           <p:cNvSpPr txBox="1"/>
           <p:nvPr/>
         </p:nvSpPr>
@@ -20990,7 +21068,7 @@
       </p:sp>
       <p:sp>
         <p:nvSpPr>
-          <p:cNvPr id="33" name="Text 31"/>
+          <p:cNvPr id="35" name="Text 33"/>
           <p:cNvSpPr txBox="1"/>
           <p:nvPr/>
         </p:nvSpPr>

--- a/samples/seller-cma/517-Larkwood-Ave-Listing-Presentation.pptx
+++ b/samples/seller-cma/517-Larkwood-Ave-Listing-Presentation.pptx
@@ -5391,16 +5391,16 @@
         <p:spPr>
           <a:xfrm>
             <a:off x="457200" y="841248"/>
-            <a:ext cx="8229600" cy="329184"/>
-          </a:xfrm>
-          <a:prstGeom prst="rect">
-            <a:avLst/>
-          </a:prstGeom>
-          <a:noFill/>
-          <a:ln/>
-        </p:spPr>
-        <p:txBody>
-          <a:bodyPr wrap="square" lIns="0" tIns="0" rIns="0" bIns="0" rtlCol="0" anchor="ctr"/>
+            <a:ext cx="8229600" cy="201422"/>
+          </a:xfrm>
+          <a:prstGeom prst="rect">
+            <a:avLst/>
+          </a:prstGeom>
+          <a:noFill/>
+          <a:ln/>
+        </p:spPr>
+        <p:txBody>
+          <a:bodyPr wrap="square" lIns="0" tIns="0" rIns="0" bIns="0" rtlCol="0" anchor="t"/>
           <a:lstStyle/>
           <a:p>
             <a:pPr indent="0" marL="0">
@@ -5739,16 +5739,16 @@
         <p:spPr>
           <a:xfrm>
             <a:off x="457200" y="841248"/>
-            <a:ext cx="8229600" cy="329184"/>
-          </a:xfrm>
-          <a:prstGeom prst="rect">
-            <a:avLst/>
-          </a:prstGeom>
-          <a:noFill/>
-          <a:ln/>
-        </p:spPr>
-        <p:txBody>
-          <a:bodyPr wrap="square" lIns="0" tIns="0" rIns="0" bIns="0" rtlCol="0" anchor="ctr"/>
+            <a:ext cx="8229600" cy="201422"/>
+          </a:xfrm>
+          <a:prstGeom prst="rect">
+            <a:avLst/>
+          </a:prstGeom>
+          <a:noFill/>
+          <a:ln/>
+        </p:spPr>
+        <p:txBody>
+          <a:bodyPr wrap="square" lIns="0" tIns="0" rIns="0" bIns="0" rtlCol="0" anchor="t"/>
           <a:lstStyle/>
           <a:p>
             <a:pPr indent="0" marL="0">
@@ -6486,16 +6486,16 @@
         <p:spPr>
           <a:xfrm>
             <a:off x="457200" y="841248"/>
-            <a:ext cx="8229600" cy="329184"/>
-          </a:xfrm>
-          <a:prstGeom prst="rect">
-            <a:avLst/>
-          </a:prstGeom>
-          <a:noFill/>
-          <a:ln/>
-        </p:spPr>
-        <p:txBody>
-          <a:bodyPr wrap="square" lIns="0" tIns="0" rIns="0" bIns="0" rtlCol="0" anchor="ctr"/>
+            <a:ext cx="8229600" cy="201422"/>
+          </a:xfrm>
+          <a:prstGeom prst="rect">
+            <a:avLst/>
+          </a:prstGeom>
+          <a:noFill/>
+          <a:ln/>
+        </p:spPr>
+        <p:txBody>
+          <a:bodyPr wrap="square" lIns="0" tIns="0" rIns="0" bIns="0" rtlCol="0" anchor="t"/>
           <a:lstStyle/>
           <a:p>
             <a:pPr indent="0" marL="0">
@@ -13385,16 +13385,16 @@
         <p:spPr>
           <a:xfrm>
             <a:off x="457200" y="841248"/>
-            <a:ext cx="8229600" cy="329184"/>
-          </a:xfrm>
-          <a:prstGeom prst="rect">
-            <a:avLst/>
-          </a:prstGeom>
-          <a:noFill/>
-          <a:ln/>
-        </p:spPr>
-        <p:txBody>
-          <a:bodyPr wrap="square" lIns="0" tIns="0" rIns="0" bIns="0" rtlCol="0" anchor="ctr"/>
+            <a:ext cx="8229600" cy="201422"/>
+          </a:xfrm>
+          <a:prstGeom prst="rect">
+            <a:avLst/>
+          </a:prstGeom>
+          <a:noFill/>
+          <a:ln/>
+        </p:spPr>
+        <p:txBody>
+          <a:bodyPr wrap="square" lIns="0" tIns="0" rIns="0" bIns="0" rtlCol="0" anchor="t"/>
           <a:lstStyle/>
           <a:p>
             <a:pPr indent="0" marL="0">
@@ -15363,16 +15363,16 @@
         <p:spPr>
           <a:xfrm>
             <a:off x="457200" y="841248"/>
-            <a:ext cx="8229600" cy="329184"/>
-          </a:xfrm>
-          <a:prstGeom prst="rect">
-            <a:avLst/>
-          </a:prstGeom>
-          <a:noFill/>
-          <a:ln/>
-        </p:spPr>
-        <p:txBody>
-          <a:bodyPr wrap="square" lIns="0" tIns="0" rIns="0" bIns="0" rtlCol="0" anchor="ctr"/>
+            <a:ext cx="8229600" cy="201422"/>
+          </a:xfrm>
+          <a:prstGeom prst="rect">
+            <a:avLst/>
+          </a:prstGeom>
+          <a:noFill/>
+          <a:ln/>
+        </p:spPr>
+        <p:txBody>
+          <a:bodyPr wrap="square" lIns="0" tIns="0" rIns="0" bIns="0" rtlCol="0" anchor="t"/>
           <a:lstStyle/>
           <a:p>
             <a:pPr indent="0" marL="0">
@@ -15401,7 +15401,7 @@
         </p:nvSpPr>
         <p:spPr>
           <a:xfrm>
-            <a:off x="5532120" y="1325880"/>
+            <a:off x="5532120" y="1463294"/>
             <a:ext cx="1143000" cy="2468880"/>
           </a:xfrm>
           <a:prstGeom prst="rect">
@@ -15426,7 +15426,7 @@
         </p:nvSpPr>
         <p:spPr>
           <a:xfrm>
-            <a:off x="3931920" y="1325880"/>
+            <a:off x="3931920" y="1463294"/>
             <a:ext cx="0" cy="2468880"/>
           </a:xfrm>
           <a:prstGeom prst="line">
@@ -15449,7 +15449,7 @@
         </p:nvSpPr>
         <p:spPr>
           <a:xfrm>
-            <a:off x="3520440" y="3840480"/>
+            <a:off x="3520440" y="3977894"/>
             <a:ext cx="822960" cy="228600"/>
           </a:xfrm>
           <a:prstGeom prst="rect">
@@ -15488,7 +15488,7 @@
         </p:nvSpPr>
         <p:spPr>
           <a:xfrm>
-            <a:off x="4846320" y="1325880"/>
+            <a:off x="4846320" y="1463294"/>
             <a:ext cx="0" cy="2468880"/>
           </a:xfrm>
           <a:prstGeom prst="line">
@@ -15511,7 +15511,7 @@
         </p:nvSpPr>
         <p:spPr>
           <a:xfrm>
-            <a:off x="4434840" y="3840480"/>
+            <a:off x="4434840" y="3977894"/>
             <a:ext cx="822960" cy="228600"/>
           </a:xfrm>
           <a:prstGeom prst="rect">
@@ -15550,7 +15550,7 @@
         </p:nvSpPr>
         <p:spPr>
           <a:xfrm>
-            <a:off x="5760720" y="1325880"/>
+            <a:off x="5760720" y="1463294"/>
             <a:ext cx="0" cy="2468880"/>
           </a:xfrm>
           <a:prstGeom prst="line">
@@ -15573,7 +15573,7 @@
         </p:nvSpPr>
         <p:spPr>
           <a:xfrm>
-            <a:off x="5349240" y="3840480"/>
+            <a:off x="5349240" y="3977894"/>
             <a:ext cx="822960" cy="228600"/>
           </a:xfrm>
           <a:prstGeom prst="rect">
@@ -15612,7 +15612,7 @@
         </p:nvSpPr>
         <p:spPr>
           <a:xfrm>
-            <a:off x="6675120" y="1325880"/>
+            <a:off x="6675120" y="1463294"/>
             <a:ext cx="0" cy="2468880"/>
           </a:xfrm>
           <a:prstGeom prst="line">
@@ -15635,7 +15635,7 @@
         </p:nvSpPr>
         <p:spPr>
           <a:xfrm>
-            <a:off x="6263640" y="3840480"/>
+            <a:off x="6263640" y="3977894"/>
             <a:ext cx="822960" cy="228600"/>
           </a:xfrm>
           <a:prstGeom prst="rect">
@@ -15674,7 +15674,7 @@
         </p:nvSpPr>
         <p:spPr>
           <a:xfrm>
-            <a:off x="7589520" y="1325880"/>
+            <a:off x="7589520" y="1463294"/>
             <a:ext cx="0" cy="2468880"/>
           </a:xfrm>
           <a:prstGeom prst="line">
@@ -15697,7 +15697,7 @@
         </p:nvSpPr>
         <p:spPr>
           <a:xfrm>
-            <a:off x="7178040" y="3840480"/>
+            <a:off x="7178040" y="3977894"/>
             <a:ext cx="822960" cy="228600"/>
           </a:xfrm>
           <a:prstGeom prst="rect">
@@ -15736,7 +15736,7 @@
         </p:nvSpPr>
         <p:spPr>
           <a:xfrm>
-            <a:off x="8503920" y="1325880"/>
+            <a:off x="8503920" y="1463294"/>
             <a:ext cx="0" cy="2468880"/>
           </a:xfrm>
           <a:prstGeom prst="line">
@@ -15759,7 +15759,7 @@
         </p:nvSpPr>
         <p:spPr>
           <a:xfrm>
-            <a:off x="8092440" y="3840480"/>
+            <a:off x="8092440" y="3977894"/>
             <a:ext cx="822960" cy="228600"/>
           </a:xfrm>
           <a:prstGeom prst="rect">
@@ -15798,7 +15798,7 @@
         </p:nvSpPr>
         <p:spPr>
           <a:xfrm>
-            <a:off x="6213348" y="1188720"/>
+            <a:off x="6213348" y="1326134"/>
             <a:ext cx="0" cy="2606040"/>
           </a:xfrm>
           <a:prstGeom prst="line">
@@ -15821,7 +15821,7 @@
         </p:nvSpPr>
         <p:spPr>
           <a:xfrm>
-            <a:off x="5207508" y="960120"/>
+            <a:off x="5207508" y="1097534"/>
             <a:ext cx="2011680" cy="228600"/>
           </a:xfrm>
           <a:prstGeom prst="rect">
@@ -15860,7 +15860,7 @@
         </p:nvSpPr>
         <p:spPr>
           <a:xfrm>
-            <a:off x="457200" y="1417320"/>
+            <a:off x="457200" y="1554734"/>
             <a:ext cx="3291840" cy="219456"/>
           </a:xfrm>
           <a:prstGeom prst="rect">
@@ -15899,7 +15899,7 @@
         </p:nvSpPr>
         <p:spPr>
           <a:xfrm>
-            <a:off x="457200" y="1618488"/>
+            <a:off x="457200" y="1755902"/>
             <a:ext cx="3291840" cy="201168"/>
           </a:xfrm>
           <a:prstGeom prst="rect">
@@ -15938,7 +15938,7 @@
         </p:nvSpPr>
         <p:spPr>
           <a:xfrm>
-            <a:off x="7228332" y="1536192"/>
+            <a:off x="7228332" y="1673606"/>
             <a:ext cx="164592" cy="164592"/>
           </a:xfrm>
           <a:prstGeom prst="ellipse">
@@ -15963,7 +15963,7 @@
         </p:nvSpPr>
         <p:spPr>
           <a:xfrm>
-            <a:off x="7420356" y="1490472"/>
+            <a:off x="7420356" y="1627886"/>
             <a:ext cx="640080" cy="237744"/>
           </a:xfrm>
           <a:prstGeom prst="rect">
@@ -16002,7 +16002,7 @@
         </p:nvSpPr>
         <p:spPr>
           <a:xfrm>
-            <a:off x="457200" y="1874520"/>
+            <a:off x="457200" y="2011934"/>
             <a:ext cx="3291840" cy="219456"/>
           </a:xfrm>
           <a:prstGeom prst="rect">
@@ -16041,7 +16041,7 @@
         </p:nvSpPr>
         <p:spPr>
           <a:xfrm>
-            <a:off x="457200" y="2075688"/>
+            <a:off x="457200" y="2213102"/>
             <a:ext cx="3291840" cy="201168"/>
           </a:xfrm>
           <a:prstGeom prst="rect">
@@ -16080,7 +16080,7 @@
         </p:nvSpPr>
         <p:spPr>
           <a:xfrm>
-            <a:off x="6775704" y="1993392"/>
+            <a:off x="6775704" y="2130806"/>
             <a:ext cx="164592" cy="164592"/>
           </a:xfrm>
           <a:prstGeom prst="ellipse">
@@ -16105,7 +16105,7 @@
         </p:nvSpPr>
         <p:spPr>
           <a:xfrm>
-            <a:off x="6967728" y="1947672"/>
+            <a:off x="6967728" y="2085086"/>
             <a:ext cx="640080" cy="237744"/>
           </a:xfrm>
           <a:prstGeom prst="rect">
@@ -16144,7 +16144,7 @@
         </p:nvSpPr>
         <p:spPr>
           <a:xfrm>
-            <a:off x="457200" y="2331720"/>
+            <a:off x="457200" y="2469134"/>
             <a:ext cx="3291840" cy="219456"/>
           </a:xfrm>
           <a:prstGeom prst="rect">
@@ -16183,7 +16183,7 @@
         </p:nvSpPr>
         <p:spPr>
           <a:xfrm>
-            <a:off x="457200" y="2532888"/>
+            <a:off x="457200" y="2670302"/>
             <a:ext cx="3291840" cy="201168"/>
           </a:xfrm>
           <a:prstGeom prst="rect">
@@ -16222,7 +16222,7 @@
         </p:nvSpPr>
         <p:spPr>
           <a:xfrm>
-            <a:off x="6126480" y="2450592"/>
+            <a:off x="6126480" y="2588006"/>
             <a:ext cx="164592" cy="164592"/>
           </a:xfrm>
           <a:prstGeom prst="ellipse">
@@ -16247,7 +16247,7 @@
         </p:nvSpPr>
         <p:spPr>
           <a:xfrm>
-            <a:off x="6318504" y="2404872"/>
+            <a:off x="6318504" y="2542286"/>
             <a:ext cx="640080" cy="237744"/>
           </a:xfrm>
           <a:prstGeom prst="rect">
@@ -16286,7 +16286,7 @@
         </p:nvSpPr>
         <p:spPr>
           <a:xfrm>
-            <a:off x="457200" y="2788920"/>
+            <a:off x="457200" y="2926334"/>
             <a:ext cx="3291840" cy="219456"/>
           </a:xfrm>
           <a:prstGeom prst="rect">
@@ -16325,7 +16325,7 @@
         </p:nvSpPr>
         <p:spPr>
           <a:xfrm>
-            <a:off x="457200" y="2990088"/>
+            <a:off x="457200" y="3127502"/>
             <a:ext cx="3291840" cy="201168"/>
           </a:xfrm>
           <a:prstGeom prst="rect">
@@ -16364,7 +16364,7 @@
         </p:nvSpPr>
         <p:spPr>
           <a:xfrm>
-            <a:off x="4773168" y="2907792"/>
+            <a:off x="4773168" y="3045206"/>
             <a:ext cx="164592" cy="164592"/>
           </a:xfrm>
           <a:prstGeom prst="ellipse">
@@ -16389,7 +16389,7 @@
         </p:nvSpPr>
         <p:spPr>
           <a:xfrm>
-            <a:off x="4965192" y="2862072"/>
+            <a:off x="4965192" y="2999486"/>
             <a:ext cx="640080" cy="237744"/>
           </a:xfrm>
           <a:prstGeom prst="rect">
@@ -16428,7 +16428,7 @@
         </p:nvSpPr>
         <p:spPr>
           <a:xfrm>
-            <a:off x="457200" y="3246120"/>
+            <a:off x="457200" y="3383534"/>
             <a:ext cx="3291840" cy="219456"/>
           </a:xfrm>
           <a:prstGeom prst="rect">
@@ -16467,7 +16467,7 @@
         </p:nvSpPr>
         <p:spPr>
           <a:xfrm>
-            <a:off x="457200" y="3447288"/>
+            <a:off x="457200" y="3584702"/>
             <a:ext cx="3291840" cy="201168"/>
           </a:xfrm>
           <a:prstGeom prst="rect">
@@ -16506,7 +16506,7 @@
         </p:nvSpPr>
         <p:spPr>
           <a:xfrm>
-            <a:off x="4576572" y="3364992"/>
+            <a:off x="4576572" y="3502406"/>
             <a:ext cx="164592" cy="164592"/>
           </a:xfrm>
           <a:prstGeom prst="ellipse">
@@ -16531,7 +16531,7 @@
         </p:nvSpPr>
         <p:spPr>
           <a:xfrm>
-            <a:off x="4768596" y="3319272"/>
+            <a:off x="4768596" y="3456686"/>
             <a:ext cx="640080" cy="237744"/>
           </a:xfrm>
           <a:prstGeom prst="rect">
@@ -16570,8 +16570,8 @@
         </p:nvSpPr>
         <p:spPr>
           <a:xfrm>
-            <a:off x="457200" y="4160520"/>
-            <a:ext cx="8229600" cy="544068"/>
+            <a:off x="457200" y="4297934"/>
+            <a:ext cx="8229600" cy="406654"/>
           </a:xfrm>
           <a:prstGeom prst="rect">
             <a:avLst/>
@@ -17776,16 +17776,16 @@
         <p:spPr>
           <a:xfrm>
             <a:off x="457200" y="841248"/>
-            <a:ext cx="8229600" cy="329184"/>
-          </a:xfrm>
-          <a:prstGeom prst="rect">
-            <a:avLst/>
-          </a:prstGeom>
-          <a:noFill/>
-          <a:ln/>
-        </p:spPr>
-        <p:txBody>
-          <a:bodyPr wrap="square" lIns="0" tIns="0" rIns="0" bIns="0" rtlCol="0" anchor="ctr"/>
+            <a:ext cx="8229600" cy="201422"/>
+          </a:xfrm>
+          <a:prstGeom prst="rect">
+            <a:avLst/>
+          </a:prstGeom>
+          <a:noFill/>
+          <a:ln/>
+        </p:spPr>
+        <p:txBody>
+          <a:bodyPr wrap="square" lIns="0" tIns="0" rIns="0" bIns="0" rtlCol="0" anchor="t"/>
           <a:lstStyle/>
           <a:p>
             <a:pPr indent="0" marL="0">
@@ -19087,16 +19087,16 @@
         <p:spPr>
           <a:xfrm>
             <a:off x="457200" y="841248"/>
-            <a:ext cx="8229600" cy="329184"/>
-          </a:xfrm>
-          <a:prstGeom prst="rect">
-            <a:avLst/>
-          </a:prstGeom>
-          <a:noFill/>
-          <a:ln/>
-        </p:spPr>
-        <p:txBody>
-          <a:bodyPr wrap="square" lIns="0" tIns="0" rIns="0" bIns="0" rtlCol="0" anchor="ctr"/>
+            <a:ext cx="8229600" cy="201422"/>
+          </a:xfrm>
+          <a:prstGeom prst="rect">
+            <a:avLst/>
+          </a:prstGeom>
+          <a:noFill/>
+          <a:ln/>
+        </p:spPr>
+        <p:txBody>
+          <a:bodyPr wrap="square" lIns="0" tIns="0" rIns="0" bIns="0" rtlCol="0" anchor="t"/>
           <a:lstStyle/>
           <a:p>
             <a:pPr indent="0" marL="0">

--- a/samples/seller-cma/517-Larkwood-Ave-Listing-Presentation.pptx
+++ b/samples/seller-cma/517-Larkwood-Ave-Listing-Presentation.pptx
@@ -2935,7 +2935,7 @@
                 <c:formatCode>General</c:formatCode>
                 <c:ptCount val="3"/>
                 <c:pt idx="0">
-                  <c:v>424222</c:v>
+                  <c:v>428442</c:v>
                 </c:pt>
                 <c:pt idx="1">
                   <c:v>424636</c:v>
@@ -3917,7 +3917,7 @@
           <a:p>
             <a:r>
               <a:rPr lang="en-US" dirty="0"/>
-              <a:t>Expected sales are estimates, not guarantees: each option's list price times an assumed 97.0% of its final asking price after seller-paid costs, plus that option's seller credit, to the nearest $500. At $474,900 we expect the recommended option's sale: a price above the recommended one usually sells after a cut, so it costs time rather than adding to the sale. Times to contract are estimates from the recent median of 22 days on market: longer for a higher price, shorter for a price that draws competing offers. Each option assumes a $11,000 seller credit toward the buyer's costs: how often recent sellers paid buyer costs times the typical amount. Holding costs: about $520 a month (insurance at the recommended $469,900 list price and utilities; no loan interest, since no mortgage payoff was given) from the report date to each option's closing; property tax is in the proration. Title company fees are typical local charges (settlement fee $700, title search $250, municipal lien search $125, recording $70); the title company's quote replaces them. Buyer payments: Conventional loan, 5% down, 6.95% 30-year fixed, property taxes at 18.1808 mills, with homestead, $3,600 a year insurance, and 0.5% a year mortgage insurance. Commissions are negotiable and not set by law. Not included: your mortgage payoff, this year's property tax proration (the tax bill and the expected closing date add it) and any repairs agreed after inspection. The closing agent provides the exact figures. Flood zone X: a lender may not require flood insurance, but a Citizens policy on a home with a dwelling replacement cost of $400,000 or more must carry flood insurance, and from January 1, 2027 every Citizens policy must (s. 627.351(6)(aa)). Get a quote; the total leaves it out until then.</a:t>
+              <a:t>Expected sales are estimates, not guarantees: each option's list price times an assumed 97.0% of its final asking price after seller-paid costs, plus that option's seller credit, to the nearest $500. Times to contract are estimates from the recent median of 22 days on market: longer for a higher price, shorter for a price that draws competing offers. Each option assumes a $11,000 seller credit toward the buyer's costs: how often recent sellers paid buyer costs times the typical amount. Holding costs: about $520 a month (insurance at the recommended $469,900 list price and utilities; no loan interest, since no mortgage payoff was given) from the report date to each option's closing; property tax is in the proration. Title company fees are typical local charges (settlement fee $700, title search $250, municipal lien search $125, recording $70); the title company's quote replaces them. Buyer payments: Conventional loan, 5% down, 6.95% 30-year fixed, property taxes at 18.1808 mills, with homestead, $3,600 a year insurance, and 0.5% a year mortgage insurance. Commissions are negotiable and not set by law. Not included: your mortgage payoff, this year's property tax proration (the tax bill and the expected closing date add it) and any repairs agreed after inspection. The closing agent provides the exact figures. Flood zone X: a lender may not require flood insurance, but a Citizens policy on a home with a dwelling replacement cost of $400,000 or more must carry flood insurance, and from January 1, 2027 every Citizens policy must (s. 627.351(6)(aa)). Get a quote; the total leaves it out until then.</a:t>
             </a:r>
             <a:endParaRPr lang="en-US" dirty="0"/>
           </a:p>
@@ -4005,7 +4005,7 @@
           <a:p>
             <a:r>
               <a:rPr lang="en-US" dirty="0"/>
-              <a:t>Adjusted for size ($1,200 to $1,800), lot ($5,000), market changes since each sale (1% a quarter off sales before July), roof and systems ($5,000), condition and updates ($30,000 to $45,000, against this home's full renovation), view or water ($10,000) and seller credits (taken off each sale price). These are the five closest matches, sold Apr 24, 2026 to Aug 20, 2026 (one since July), all within a mile.</a:t>
+              <a:t>Adjusted for size ($1,200 to $1,800); lot ($5,000); market changes since each sale (1% a quarter off sales before July); roof and systems ($5,000); condition and updates ($30,000 to $45,000, against this home's full renovation); view or water ($10,000); and seller credits (taken off each sale price). These are the five closest matches, sold Apr 24, 2026 to Aug 20, 2026 (one since July), all within a mile.</a:t>
             </a:r>
             <a:endParaRPr lang="en-US" dirty="0"/>
           </a:p>
@@ -5497,7 +5497,7 @@
                 <a:ea typeface="Arial" pitchFamily="34" charset="-122"/>
                 <a:cs typeface="Arial" pitchFamily="34" charset="-120"/>
               </a:rPr>
-              <a:t>$9,139</a:t>
+              <a:t>$12,945</a:t>
             </a:r>
             <a:endParaRPr lang="en-US" sz="3200" dirty="0"/>
           </a:p>
@@ -8770,7 +8770,7 @@
                           <a:ea typeface="Arial" pitchFamily="34" charset="-122"/>
                           <a:cs typeface="Arial" pitchFamily="34" charset="-120"/>
                         </a:rPr>
-                        <a:t>$467,000</a:t>
+                        <a:t>$471,500</a:t>
                       </a:r>
                       <a:endParaRPr lang="en-US" sz="1000" dirty="0">
                         <a:latin typeface="Arial" charset="0"/>
@@ -9174,7 +9174,7 @@
                           <a:ea typeface="Arial" pitchFamily="34" charset="-122"/>
                           <a:cs typeface="Arial" pitchFamily="34" charset="-120"/>
                         </a:rPr>
-                        <a:t>−$11,675</a:t>
+                        <a:t>−$11,788</a:t>
                       </a:r>
                       <a:endParaRPr lang="en-US" sz="1000" dirty="0">
                         <a:latin typeface="Arial" charset="0"/>
@@ -9376,7 +9376,7 @@
                           <a:ea typeface="Arial" pitchFamily="34" charset="-122"/>
                           <a:cs typeface="Arial" pitchFamily="34" charset="-120"/>
                         </a:rPr>
-                        <a:t>−$11,675</a:t>
+                        <a:t>−$11,788</a:t>
                       </a:r>
                       <a:endParaRPr lang="en-US" sz="1000" dirty="0">
                         <a:latin typeface="Arial" charset="0"/>
@@ -9578,7 +9578,7 @@
                           <a:ea typeface="Arial" pitchFamily="34" charset="-122"/>
                           <a:cs typeface="Arial" pitchFamily="34" charset="-120"/>
                         </a:rPr>
-                        <a:t>−$3,269</a:t>
+                        <a:t>−$3,301</a:t>
                       </a:r>
                       <a:endParaRPr lang="en-US" sz="1000" dirty="0">
                         <a:latin typeface="Arial" charset="0"/>
@@ -9780,7 +9780,7 @@
                           <a:ea typeface="Arial" pitchFamily="34" charset="-122"/>
                           <a:cs typeface="Arial" pitchFamily="34" charset="-120"/>
                         </a:rPr>
-                        <a:t>−$2,410</a:t>
+                        <a:t>−$2,432</a:t>
                       </a:r>
                       <a:endParaRPr lang="en-US" sz="1000" dirty="0">
                         <a:latin typeface="Arial" charset="0"/>
@@ -10392,7 +10392,7 @@
                           <a:ea typeface="Arial" pitchFamily="34" charset="-122"/>
                           <a:cs typeface="Arial" pitchFamily="34" charset="-120"/>
                         </a:rPr>
-                        <a:t>$425,826</a:t>
+                        <a:t>$430,046</a:t>
                       </a:r>
                       <a:endParaRPr lang="en-US" sz="1000" dirty="0">
                         <a:latin typeface="Arial" charset="0"/>
@@ -10820,7 +10820,7 @@
                           <a:ea typeface="Arial" pitchFamily="34" charset="-122"/>
                           <a:cs typeface="Arial" pitchFamily="34" charset="-120"/>
                         </a:rPr>
-                        <a:t>$424,222</a:t>
+                        <a:t>$428,442</a:t>
                       </a:r>
                       <a:endParaRPr lang="en-US" sz="1000" dirty="0">
                         <a:latin typeface="Arial" charset="0"/>
@@ -14222,7 +14222,7 @@
                 <a:ea typeface="Arial" pitchFamily="34" charset="-122"/>
                 <a:cs typeface="Arial" pitchFamily="34" charset="-120"/>
               </a:rPr>
-              <a:t>Adjusted for size ($1,200 to $1,800), lot ($5,000), market changes since each sale (1% a quarter off sales before July), roof and systems ($5,000), condition and updates ($30,000 to $45,000, against this home's full renovation), view or water ($10,000) and seller credits (taken off each sale price).</a:t>
+              <a:t>Adjusted for size ($1,200 to $1,800); lot ($5,000); market changes since each sale (1% a quarter off sales before July); roof and systems ($5,000); condition and updates ($30,000 to $45,000, against this home's full renovation); view or water ($10,000); and seller credits (taken off each sale price).</a:t>
             </a:r>
             <a:endParaRPr lang="en-US" sz="1100" dirty="0"/>
           </a:p>
@@ -20109,7 +20109,7 @@
                 <a:ea typeface="Arial" pitchFamily="34" charset="-122"/>
                 <a:cs typeface="Arial" pitchFamily="34" charset="-120"/>
               </a:rPr>
-              <a:t>$467,000</a:t>
+              <a:t>$471,500</a:t>
             </a:r>
             <a:endParaRPr lang="en-US" sz="1300" dirty="0"/>
           </a:p>

--- a/samples/seller-cma/517-Larkwood-Ave-Listing-Presentation.pptx
+++ b/samples/seller-cma/517-Larkwood-Ave-Listing-Presentation.pptx
@@ -2658,7 +2658,7 @@
                   <c:v/>
                 </c:pt>
                 <c:pt idx="74">
-                  <c:v>469900</c:v>
+                  <c:v>470000</c:v>
                 </c:pt>
               </c:numCache>
             </c:numRef>
@@ -2916,13 +2916,13 @@
                 <c:ptCount val="3"/>
                 <c:lvl>
                   <c:pt idx="0">
-                    <c:v>Premium at $474,900</c:v>
+                    <c:v>Premium at $475,000</c:v>
                   </c:pt>
                   <c:pt idx="1">
-                    <c:v>Market Price at $469,900</c:v>
+                    <c:v>Market Price at $470,000</c:v>
                   </c:pt>
                   <c:pt idx="2">
-                    <c:v>Draw Offers at $459,900</c:v>
+                    <c:v>Draw Offers at $460,000</c:v>
                   </c:pt>
                 </c:lvl>
               </c:multiLvlStrCache>
@@ -2935,7 +2935,7 @@
                 <c:formatCode>General</c:formatCode>
                 <c:ptCount val="3"/>
                 <c:pt idx="0">
-                  <c:v>428442</c:v>
+                  <c:v>428912</c:v>
                 </c:pt>
                 <c:pt idx="1">
                   <c:v>424636</c:v>
@@ -3917,7 +3917,7 @@
           <a:p>
             <a:r>
               <a:rPr lang="en-US" dirty="0"/>
-              <a:t>Expected sales are estimates, not guarantees: each option's list price times an assumed 97.0% of its final asking price after seller-paid costs, plus that option's seller credit, to the nearest $500. Times to contract are estimates from the recent median of 22 days on market: longer for a higher price, shorter for a price that draws competing offers. Each option assumes a $11,000 seller credit toward the buyer's costs: how often recent sellers paid buyer costs times the typical amount. Holding costs: about $520 a month (insurance at the recommended $469,900 list price and utilities; no loan interest, since no mortgage payoff was given) from the report date to each option's closing; property tax is in the proration. Title company fees are typical local charges (settlement fee $700, title search $250, municipal lien search $125, recording $70); the title company's quote replaces them. Buyer payments: Conventional loan, 5% down, 6.95% 30-year fixed, property taxes at 18.1808 mills, with homestead, $3,600 a year insurance, and 0.5% a year mortgage insurance. Commissions are negotiable and not set by law. Not included: your mortgage payoff, this year's property tax proration (the tax bill and the expected closing date add it) and any repairs agreed after inspection. The closing agent provides the exact figures. Flood zone X: a lender may not require flood insurance, but a Citizens policy on a home with a dwelling replacement cost of $400,000 or more must carry flood insurance, and from January 1, 2027 every Citizens policy must (s. 627.351(6)(aa)). Get a quote; the total leaves it out until then.</a:t>
+              <a:t>Expected sales are estimates, not guarantees: each option's list price times an assumed 97.0% of its final asking price after seller-paid costs, plus that option's seller credit, to the nearest $500. Times to contract are estimates from the recent median of 22 days on market: longer for a higher price, shorter for a price that draws competing offers. Each option assumes a $11,000 seller credit toward the buyer's costs: how often recent sellers paid buyer costs times the typical amount. Holding costs: about $520 a month (insurance at the recommended $470,000 list price and utilities; no loan interest, since no mortgage payoff was given) from the report date to each option's closing; property tax is in the proration. Title company fees are typical local charges (settlement fee $700, title search $250, municipal lien search $125, recording $70); the title company's quote replaces them. Buyer payments: Conventional loan, 5% down, 6.95% 30-year fixed, property taxes at 18.1808 mills, with homestead, $3,600 a year insurance, and 0.5% a year mortgage insurance. Commissions are negotiable and not set by law. Not included: your mortgage payoff, this year's property tax proration (the tax bill and the expected closing date add it) and any repairs agreed after inspection. The closing agent provides the exact figures. Flood zone X: a lender may not require flood insurance, but a Citizens policy on a home with a dwelling replacement cost of $400,000 or more must carry flood insurance, and from January 1, 2027 every Citizens policy must (s. 627.351(6)(aa)). Get a quote; the total leaves it out until then.</a:t>
             </a:r>
             <a:endParaRPr lang="en-US" dirty="0"/>
           </a:p>
@@ -5497,7 +5497,7 @@
                 <a:ea typeface="Arial" pitchFamily="34" charset="-122"/>
                 <a:cs typeface="Arial" pitchFamily="34" charset="-120"/>
               </a:rPr>
-              <a:t>$12,945</a:t>
+              <a:t>$13,415</a:t>
             </a:r>
             <a:endParaRPr lang="en-US" sz="3200" dirty="0"/>
           </a:p>
@@ -5829,7 +5829,7 @@
                 <a:ea typeface="Arial" pitchFamily="34" charset="-122"/>
                 <a:cs typeface="Arial" pitchFamily="34" charset="-120"/>
               </a:rPr>
-              <a:t>Premium at $474,900</a:t>
+              <a:t>Premium at $475,000</a:t>
             </a:r>
             <a:endParaRPr lang="en-US" sz="1300" dirty="0"/>
           </a:p>
@@ -5868,7 +5868,7 @@
                 <a:ea typeface="Arial" pitchFamily="34" charset="-122"/>
                 <a:cs typeface="Arial" pitchFamily="34" charset="-120"/>
               </a:rPr>
-              <a:t>$4,127/mo</a:t>
+              <a:t>$4,128/mo</a:t>
             </a:r>
             <a:endParaRPr lang="en-US" sz="2800" dirty="0"/>
           </a:p>
@@ -5907,7 +5907,7 @@
                 <a:ea typeface="Arial" pitchFamily="34" charset="-122"/>
                 <a:cs typeface="Arial" pitchFamily="34" charset="-120"/>
               </a:rPr>
-              <a:t>$23,745 down (5%)</a:t>
+              <a:t>$23,750 down (5%)</a:t>
             </a:r>
             <a:endParaRPr lang="en-US" sz="1100" dirty="0"/>
           </a:p>
@@ -5973,7 +5973,7 @@
                 <a:ea typeface="Arial" pitchFamily="34" charset="-122"/>
                 <a:cs typeface="Arial" pitchFamily="34" charset="-120"/>
               </a:rPr>
-              <a:t>Market Price at $469,900</a:t>
+              <a:t>Market Price at $470,000</a:t>
             </a:r>
             <a:endParaRPr lang="en-US" sz="1300" dirty="0"/>
           </a:p>
@@ -6012,7 +6012,7 @@
                 <a:ea typeface="Arial" pitchFamily="34" charset="-122"/>
                 <a:cs typeface="Arial" pitchFamily="34" charset="-120"/>
               </a:rPr>
-              <a:t>$4,087/mo</a:t>
+              <a:t>$4,088/mo</a:t>
             </a:r>
             <a:endParaRPr lang="en-US" sz="2800" dirty="0"/>
           </a:p>
@@ -6051,7 +6051,7 @@
                 <a:ea typeface="Arial" pitchFamily="34" charset="-122"/>
                 <a:cs typeface="Arial" pitchFamily="34" charset="-120"/>
               </a:rPr>
-              <a:t>$23,495 down (5%)</a:t>
+              <a:t>$23,500 down (5%)</a:t>
             </a:r>
             <a:endParaRPr lang="en-US" sz="1100" dirty="0"/>
           </a:p>
@@ -6117,7 +6117,7 @@
                 <a:ea typeface="Arial" pitchFamily="34" charset="-122"/>
                 <a:cs typeface="Arial" pitchFamily="34" charset="-120"/>
               </a:rPr>
-              <a:t>Draw Offers at $459,900</a:t>
+              <a:t>Draw Offers at $460,000</a:t>
             </a:r>
             <a:endParaRPr lang="en-US" sz="1300" dirty="0"/>
           </a:p>
@@ -6156,7 +6156,7 @@
                 <a:ea typeface="Arial" pitchFamily="34" charset="-122"/>
                 <a:cs typeface="Arial" pitchFamily="34" charset="-120"/>
               </a:rPr>
-              <a:t>$4,004/mo</a:t>
+              <a:t>$4,006/mo</a:t>
             </a:r>
             <a:endParaRPr lang="en-US" sz="2800" dirty="0"/>
           </a:p>
@@ -6195,7 +6195,7 @@
                 <a:ea typeface="Arial" pitchFamily="34" charset="-122"/>
                 <a:cs typeface="Arial" pitchFamily="34" charset="-120"/>
               </a:rPr>
-              <a:t>$22,995 down (5%)</a:t>
+              <a:t>$23,000 down (5%)</a:t>
             </a:r>
             <a:endParaRPr lang="en-US" sz="1100" dirty="0"/>
           </a:p>
@@ -6283,7 +6283,7 @@
                 <a:ea typeface="Arial" pitchFamily="34" charset="-122"/>
                 <a:cs typeface="Arial" pitchFamily="34" charset="-120"/>
               </a:rPr>
-              <a:t>Every $10,000 in price is about $83 a month to a buyer.</a:t>
+              <a:t>Every $10,000 in price is about $82 a month to a buyer.</a:t>
             </a:r>
             <a:endParaRPr lang="en-US" sz="1400" dirty="0"/>
           </a:p>
@@ -8214,7 +8214,7 @@
                 <a:ea typeface="Arial" pitchFamily="34" charset="-122"/>
                 <a:cs typeface="Arial" pitchFamily="34" charset="-120"/>
               </a:rPr>
-              <a:t>Go live at $469,900</a:t>
+              <a:t>Go live at $470,000</a:t>
             </a:r>
             <a:endParaRPr lang="en-US" sz="1100" dirty="0"/>
           </a:p>
@@ -8568,7 +8568,7 @@
                           <a:ea typeface="Arial" pitchFamily="34" charset="-122"/>
                           <a:cs typeface="Arial" pitchFamily="34" charset="-120"/>
                         </a:rPr>
-                        <a:t>Premium at $474,900</a:t>
+                        <a:t>Premium at $475,000</a:t>
                       </a:r>
                       <a:endParaRPr lang="en-US" sz="1000" dirty="0">
                         <a:latin typeface="Arial" charset="0"/>
@@ -8618,7 +8618,7 @@
                           <a:ea typeface="Arial" pitchFamily="34" charset="-122"/>
                           <a:cs typeface="Arial" pitchFamily="34" charset="-120"/>
                         </a:rPr>
-                        <a:t>Market Price at $469,900</a:t>
+                        <a:t>Market Price at $470,000</a:t>
                       </a:r>
                       <a:endParaRPr lang="en-US" sz="1000" dirty="0">
                         <a:latin typeface="Arial" charset="0"/>
@@ -8668,7 +8668,7 @@
                           <a:ea typeface="Arial" pitchFamily="34" charset="-122"/>
                           <a:cs typeface="Arial" pitchFamily="34" charset="-120"/>
                         </a:rPr>
-                        <a:t>Draw Offers at $459,900</a:t>
+                        <a:t>Draw Offers at $460,000</a:t>
                       </a:r>
                       <a:endParaRPr lang="en-US" sz="1000" dirty="0">
                         <a:latin typeface="Arial" charset="0"/>
@@ -8770,7 +8770,7 @@
                           <a:ea typeface="Arial" pitchFamily="34" charset="-122"/>
                           <a:cs typeface="Arial" pitchFamily="34" charset="-120"/>
                         </a:rPr>
-                        <a:t>$471,500</a:t>
+                        <a:t>$472,000</a:t>
                       </a:r>
                       <a:endParaRPr lang="en-US" sz="1000" dirty="0">
                         <a:latin typeface="Arial" charset="0"/>
@@ -9174,7 +9174,7 @@
                           <a:ea typeface="Arial" pitchFamily="34" charset="-122"/>
                           <a:cs typeface="Arial" pitchFamily="34" charset="-120"/>
                         </a:rPr>
-                        <a:t>−$11,788</a:t>
+                        <a:t>−$11,800</a:t>
                       </a:r>
                       <a:endParaRPr lang="en-US" sz="1000" dirty="0">
                         <a:latin typeface="Arial" charset="0"/>
@@ -9376,7 +9376,7 @@
                           <a:ea typeface="Arial" pitchFamily="34" charset="-122"/>
                           <a:cs typeface="Arial" pitchFamily="34" charset="-120"/>
                         </a:rPr>
-                        <a:t>−$11,788</a:t>
+                        <a:t>−$11,800</a:t>
                       </a:r>
                       <a:endParaRPr lang="en-US" sz="1000" dirty="0">
                         <a:latin typeface="Arial" charset="0"/>
@@ -9578,7 +9578,7 @@
                           <a:ea typeface="Arial" pitchFamily="34" charset="-122"/>
                           <a:cs typeface="Arial" pitchFamily="34" charset="-120"/>
                         </a:rPr>
-                        <a:t>−$3,301</a:t>
+                        <a:t>−$3,304</a:t>
                       </a:r>
                       <a:endParaRPr lang="en-US" sz="1000" dirty="0">
                         <a:latin typeface="Arial" charset="0"/>
@@ -9780,7 +9780,7 @@
                           <a:ea typeface="Arial" pitchFamily="34" charset="-122"/>
                           <a:cs typeface="Arial" pitchFamily="34" charset="-120"/>
                         </a:rPr>
-                        <a:t>−$2,432</a:t>
+                        <a:t>−$2,435</a:t>
                       </a:r>
                       <a:endParaRPr lang="en-US" sz="1000" dirty="0">
                         <a:latin typeface="Arial" charset="0"/>
@@ -10392,7 +10392,7 @@
                           <a:ea typeface="Arial" pitchFamily="34" charset="-122"/>
                           <a:cs typeface="Arial" pitchFamily="34" charset="-120"/>
                         </a:rPr>
-                        <a:t>$430,046</a:t>
+                        <a:t>$430,516</a:t>
                       </a:r>
                       <a:endParaRPr lang="en-US" sz="1000" dirty="0">
                         <a:latin typeface="Arial" charset="0"/>
@@ -10820,7 +10820,7 @@
                           <a:ea typeface="Arial" pitchFamily="34" charset="-122"/>
                           <a:cs typeface="Arial" pitchFamily="34" charset="-120"/>
                         </a:rPr>
-                        <a:t>$428,442</a:t>
+                        <a:t>$428,912</a:t>
                       </a:r>
                       <a:endParaRPr lang="en-US" sz="1000" dirty="0">
                         <a:latin typeface="Arial" charset="0"/>
@@ -12478,7 +12478,7 @@
                           <a:ea typeface="Arial" pitchFamily="34" charset="-122"/>
                           <a:cs typeface="Arial" pitchFamily="34" charset="-120"/>
                         </a:rPr>
-                        <a:t>$469,900</a:t>
+                        <a:t>$470,000</a:t>
                       </a:r>
                       <a:endParaRPr lang="en-US" sz="1100" dirty="0">
                         <a:latin typeface="Arial" charset="0"/>
@@ -12894,7 +12894,7 @@
                 <a:ea typeface="Arial" pitchFamily="34" charset="-122"/>
                 <a:cs typeface="Arial" pitchFamily="34" charset="-120"/>
               </a:rPr>
-              <a:t>$469,900</a:t>
+              <a:t>$470,000</a:t>
             </a:r>
             <a:endParaRPr lang="en-US" sz="6400" dirty="0"/>
           </a:p>
@@ -14105,7 +14105,7 @@
                 <a:ea typeface="Arial" pitchFamily="34" charset="-122"/>
                 <a:cs typeface="Arial" pitchFamily="34" charset="-120"/>
               </a:rPr>
-              <a:t>$469,900</a:t>
+              <a:t>$470,000</a:t>
             </a:r>
             <a:endParaRPr lang="en-US" sz="4000" dirty="0"/>
           </a:p>
@@ -15798,7 +15798,7 @@
         </p:nvSpPr>
         <p:spPr>
           <a:xfrm>
-            <a:off x="6213348" y="1326134"/>
+            <a:off x="6217920" y="1326134"/>
             <a:ext cx="0" cy="2606040"/>
           </a:xfrm>
           <a:prstGeom prst="line">
@@ -15821,7 +15821,7 @@
         </p:nvSpPr>
         <p:spPr>
           <a:xfrm>
-            <a:off x="5207508" y="1097534"/>
+            <a:off x="5212080" y="1097534"/>
             <a:ext cx="2011680" cy="228600"/>
           </a:xfrm>
           <a:prstGeom prst="rect">
@@ -15846,7 +15846,7 @@
                 <a:ea typeface="Arial" pitchFamily="34" charset="-122"/>
                 <a:cs typeface="Arial" pitchFamily="34" charset="-120"/>
               </a:rPr>
-              <a:t>Recommended $469,900</a:t>
+              <a:t>Recommended $470,000</a:t>
             </a:r>
             <a:endParaRPr lang="en-US" sz="1000" dirty="0"/>
           </a:p>
@@ -19953,7 +19953,7 @@
                 <a:ea typeface="Arial" pitchFamily="34" charset="-122"/>
                 <a:cs typeface="Arial" pitchFamily="34" charset="-120"/>
               </a:rPr>
-              <a:t>$474,900</a:t>
+              <a:t>$475,000</a:t>
             </a:r>
             <a:endParaRPr lang="en-US" sz="3000" dirty="0"/>
           </a:p>
@@ -20109,7 +20109,7 @@
                 <a:ea typeface="Arial" pitchFamily="34" charset="-122"/>
                 <a:cs typeface="Arial" pitchFamily="34" charset="-120"/>
               </a:rPr>
-              <a:t>$471,500</a:t>
+              <a:t>$472,000</a:t>
             </a:r>
             <a:endParaRPr lang="en-US" sz="1300" dirty="0"/>
           </a:p>
@@ -20331,7 +20331,7 @@
                 <a:ea typeface="Arial" pitchFamily="34" charset="-122"/>
                 <a:cs typeface="Arial" pitchFamily="34" charset="-120"/>
               </a:rPr>
-              <a:t>$469,900</a:t>
+              <a:t>$470,000</a:t>
             </a:r>
             <a:endParaRPr lang="en-US" sz="3000" dirty="0"/>
           </a:p>
@@ -20709,7 +20709,7 @@
                 <a:ea typeface="Arial" pitchFamily="34" charset="-122"/>
                 <a:cs typeface="Arial" pitchFamily="34" charset="-120"/>
               </a:rPr>
-              <a:t>$459,900</a:t>
+              <a:t>$460,000</a:t>
             </a:r>
             <a:endParaRPr lang="en-US" sz="3000" dirty="0"/>
           </a:p>

--- a/samples/seller-cma/517-Larkwood-Ave-Listing-Presentation.pptx
+++ b/samples/seller-cma/517-Larkwood-Ave-Listing-Presentation.pptx
@@ -2935,7 +2935,7 @@
                 <c:formatCode>General</c:formatCode>
                 <c:ptCount val="3"/>
                 <c:pt idx="0">
-                  <c:v>428912</c:v>
+                  <c:v>424690</c:v>
                 </c:pt>
                 <c:pt idx="1">
                   <c:v>424636</c:v>
@@ -3917,7 +3917,7 @@
           <a:p>
             <a:r>
               <a:rPr lang="en-US" dirty="0"/>
-              <a:t>Expected sales are estimates, not guarantees: each option's list price times an assumed 97.0% of its final asking price after seller-paid costs, plus that option's seller credit, to the nearest $500. Times to contract are estimates from the recent median of 22 days on market: longer for a higher price, shorter for a price that draws competing offers. Each option assumes a $11,000 seller credit toward the buyer's costs: how often recent sellers paid buyer costs times the typical amount. Holding costs: about $520 a month (insurance at the recommended $470,000 list price and utilities; no loan interest, since no mortgage payoff was given) from the report date to each option's closing; property tax is in the proration. Title company fees are typical local charges (settlement fee $700, title search $250, municipal lien search $125, recording $70); the title company's quote replaces them. Buyer payments: Conventional loan, 5% down, 6.95% 30-year fixed, property taxes at 18.1808 mills, with homestead, $3,600 a year insurance, and 0.5% a year mortgage insurance. Commissions are negotiable and not set by law. Not included: your mortgage payoff, this year's property tax proration (the tax bill and the expected closing date add it) and any repairs agreed after inspection. The closing agent provides the exact figures. Flood zone X: a lender may not require flood insurance, but a Citizens policy on a home with a dwelling replacement cost of $400,000 or more must carry flood insurance, and from January 1, 2027 every Citizens policy must (s. 627.351(6)(aa)). Get a quote; the total leaves it out until then.</a:t>
+              <a:t>Expected sales are estimates, not guarantees: each option's list price times an assumed 97.0% of its final asking price after seller-paid costs, plus that option's seller credit, to the nearest $500. The $475,000 option uses 93.9% instead, what recent nearby sales got against their original asking price after seller-paid costs, since a price above the market usually sells only after a cut. Times to contract are estimates from the recent median of 22 days on market: longer for a higher price, shorter for a price that draws competing offers. Each option assumes a $11,000 seller credit toward the buyer's costs: how often recent sellers paid buyer costs times the typical amount. Holding costs: about $520 a month (insurance at the recommended $470,000 list price and utilities; no loan interest, since no mortgage payoff was given) from the report date to each option's closing. Title company fees are typical local charges (settlement fee $700, title search $250, municipal lien search $125, recording $70); the title company's quote replaces them. Buyer payments: Conventional loan, 5% down, 6.95% 30-year fixed, property taxes at 18.1808 mills, with homestead, $3,600 a year insurance, and 0.5% a year mortgage insurance. Commissions are negotiable and not set by law. Not included: your mortgage payoff, this year's property tax proration (the current tax bill adds it) and any repairs agreed after inspection. The closing agent provides the exact figures. These proceeds are before any income tax on the sale; a CPA can estimate it. Flood zone X: a lender may not require flood insurance, but a Citizens policy on a home with a dwelling replacement cost of $400,000 or more must carry flood insurance, and from January 1, 2027 every Citizens policy must (s. 627.351(6)(aa)). Get a quote; the total leaves it out until then.</a:t>
             </a:r>
             <a:endParaRPr lang="en-US" dirty="0"/>
           </a:p>
@@ -5497,7 +5497,7 @@
                 <a:ea typeface="Arial" pitchFamily="34" charset="-122"/>
                 <a:cs typeface="Arial" pitchFamily="34" charset="-120"/>
               </a:rPr>
-              <a:t>$13,415</a:t>
+              <a:t>$9,193</a:t>
             </a:r>
             <a:endParaRPr lang="en-US" sz="3200" dirty="0"/>
           </a:p>
@@ -8770,7 +8770,7 @@
                           <a:ea typeface="Arial" pitchFamily="34" charset="-122"/>
                           <a:cs typeface="Arial" pitchFamily="34" charset="-120"/>
                         </a:rPr>
-                        <a:t>$472,000</a:t>
+                        <a:t>$467,500</a:t>
                       </a:r>
                       <a:endParaRPr lang="en-US" sz="1000" dirty="0">
                         <a:latin typeface="Arial" charset="0"/>
@@ -9174,7 +9174,7 @@
                           <a:ea typeface="Arial" pitchFamily="34" charset="-122"/>
                           <a:cs typeface="Arial" pitchFamily="34" charset="-120"/>
                         </a:rPr>
-                        <a:t>−$11,800</a:t>
+                        <a:t>−$11,688</a:t>
                       </a:r>
                       <a:endParaRPr lang="en-US" sz="1000" dirty="0">
                         <a:latin typeface="Arial" charset="0"/>
@@ -9376,7 +9376,7 @@
                           <a:ea typeface="Arial" pitchFamily="34" charset="-122"/>
                           <a:cs typeface="Arial" pitchFamily="34" charset="-120"/>
                         </a:rPr>
-                        <a:t>−$11,800</a:t>
+                        <a:t>−$11,688</a:t>
                       </a:r>
                       <a:endParaRPr lang="en-US" sz="1000" dirty="0">
                         <a:latin typeface="Arial" charset="0"/>
@@ -9578,7 +9578,7 @@
                           <a:ea typeface="Arial" pitchFamily="34" charset="-122"/>
                           <a:cs typeface="Arial" pitchFamily="34" charset="-120"/>
                         </a:rPr>
-                        <a:t>−$3,304</a:t>
+                        <a:t>−$3,273</a:t>
                       </a:r>
                       <a:endParaRPr lang="en-US" sz="1000" dirty="0">
                         <a:latin typeface="Arial" charset="0"/>
@@ -9780,7 +9780,7 @@
                           <a:ea typeface="Arial" pitchFamily="34" charset="-122"/>
                           <a:cs typeface="Arial" pitchFamily="34" charset="-120"/>
                         </a:rPr>
-                        <a:t>−$2,435</a:t>
+                        <a:t>−$2,412</a:t>
                       </a:r>
                       <a:endParaRPr lang="en-US" sz="1000" dirty="0">
                         <a:latin typeface="Arial" charset="0"/>
@@ -10392,7 +10392,7 @@
                           <a:ea typeface="Arial" pitchFamily="34" charset="-122"/>
                           <a:cs typeface="Arial" pitchFamily="34" charset="-120"/>
                         </a:rPr>
-                        <a:t>$430,516</a:t>
+                        <a:t>$426,294</a:t>
                       </a:r>
                       <a:endParaRPr lang="en-US" sz="1000" dirty="0">
                         <a:latin typeface="Arial" charset="0"/>
@@ -10820,7 +10820,7 @@
                           <a:ea typeface="Arial" pitchFamily="34" charset="-122"/>
                           <a:cs typeface="Arial" pitchFamily="34" charset="-120"/>
                         </a:rPr>
-                        <a:t>$428,912</a:t>
+                        <a:t>$424,690</a:t>
                       </a:r>
                       <a:endParaRPr lang="en-US" sz="1000" dirty="0">
                         <a:latin typeface="Arial" charset="0"/>
@@ -11009,7 +11009,7 @@
                 <a:ea typeface="Arial" pitchFamily="34" charset="-122"/>
                 <a:cs typeface="Arial" pitchFamily="34" charset="-120"/>
               </a:rPr>
-              <a:t>Commissions are negotiable and not set by law. Not included: your mortgage payoff, this year's property tax proration (the tax bill and the expected closing date add it) and any repairs agreed after inspection. The closing agent provides the exact figures.</a:t>
+              <a:t>Commissions are negotiable and not set by law. Not included: your mortgage payoff, this year's property tax proration (the current tax bill adds it) and any repairs agreed after inspection. The closing agent provides the exact figures.</a:t>
             </a:r>
             <a:endParaRPr lang="en-US" sz="1000" dirty="0"/>
           </a:p>
@@ -20109,7 +20109,7 @@
                 <a:ea typeface="Arial" pitchFamily="34" charset="-122"/>
                 <a:cs typeface="Arial" pitchFamily="34" charset="-120"/>
               </a:rPr>
-              <a:t>$472,000</a:t>
+              <a:t>$467,500</a:t>
             </a:r>
             <a:endParaRPr lang="en-US" sz="1300" dirty="0"/>
           </a:p>

--- a/samples/seller-cma/517-Larkwood-Ave-Listing-Presentation.pptx
+++ b/samples/seller-cma/517-Larkwood-Ave-Listing-Presentation.pptx
@@ -4005,7 +4005,7 @@
           <a:p>
             <a:r>
               <a:rPr lang="en-US" dirty="0"/>
-              <a:t>Adjusted for size ($1,200 to $1,800); lot ($5,000); market changes since each sale (1% a quarter off sales before July); roof and systems ($5,000); condition and updates ($30,000 to $45,000, against this home's full renovation); view or water ($10,000); and seller credits (taken off each sale price). These are the five closest matches, sold Apr 24, 2026 to Aug 20, 2026 (one since July), all within a mile.</a:t>
+              <a:t>Adjusted for size ($1,200 to $1,800); lot ($5,000); market changes since each sale (2% a quarter off sales before July); roof and systems ($5,000); condition and updates ($30,000 to $45,000, against this home's full renovation); view or water ($10,000); and seller credits (taken off each sale price). These are the five closest matches, sold Apr 24, 2026 to Aug 20, 2026 (one since July), all within a mile. This home's roof age isn't known, so no sale is adjusted for its roof.</a:t>
             </a:r>
             <a:endParaRPr lang="en-US" dirty="0"/>
           </a:p>
@@ -11562,7 +11562,7 @@
                           <a:ea typeface="Arial" pitchFamily="34" charset="-122"/>
                           <a:cs typeface="Arial" pitchFamily="34" charset="-120"/>
                         </a:rPr>
-                        <a:t>$493,900</a:t>
+                        <a:t>$485,600</a:t>
                       </a:r>
                       <a:endParaRPr lang="en-US" sz="1100" dirty="0">
                         <a:latin typeface="Arial" charset="0"/>
@@ -11764,7 +11764,7 @@
                           <a:ea typeface="Arial" pitchFamily="34" charset="-122"/>
                           <a:cs typeface="Arial" pitchFamily="34" charset="-120"/>
                         </a:rPr>
-                        <a:t>$484,000</a:t>
+                        <a:t>$479,300</a:t>
                       </a:r>
                       <a:endParaRPr lang="en-US" sz="1100" dirty="0">
                         <a:latin typeface="Arial" charset="0"/>
@@ -12168,7 +12168,7 @@
                           <a:ea typeface="Arial" pitchFamily="34" charset="-122"/>
                           <a:cs typeface="Arial" pitchFamily="34" charset="-120"/>
                         </a:rPr>
-                        <a:t>$440,200</a:t>
+                        <a:t>$433,500</a:t>
                       </a:r>
                       <a:endParaRPr lang="en-US" sz="1100" dirty="0">
                         <a:latin typeface="Arial" charset="0"/>
@@ -12370,7 +12370,7 @@
                           <a:ea typeface="Arial" pitchFamily="34" charset="-122"/>
                           <a:cs typeface="Arial" pitchFamily="34" charset="-120"/>
                         </a:rPr>
-                        <a:t>$435,900</a:t>
+                        <a:t>$431,200</a:t>
                       </a:r>
                       <a:endParaRPr lang="en-US" sz="1100" dirty="0">
                         <a:latin typeface="Arial" charset="0"/>
@@ -13819,7 +13819,7 @@
                 <a:ea typeface="Arial" pitchFamily="34" charset="-122"/>
                 <a:cs typeface="Arial" pitchFamily="34" charset="-120"/>
               </a:rPr>
-              <a:t>$436K–$494K</a:t>
+              <a:t>$431K–$486K</a:t>
             </a:r>
             <a:endParaRPr lang="en-US" sz="2200" dirty="0"/>
           </a:p>
@@ -14222,7 +14222,7 @@
                 <a:ea typeface="Arial" pitchFamily="34" charset="-122"/>
                 <a:cs typeface="Arial" pitchFamily="34" charset="-120"/>
               </a:rPr>
-              <a:t>Adjusted for size ($1,200 to $1,800); lot ($5,000); market changes since each sale (1% a quarter off sales before July); roof and systems ($5,000); condition and updates ($30,000 to $45,000, against this home's full renovation); view or water ($10,000); and seller credits (taken off each sale price).</a:t>
+              <a:t>Adjusted for size ($1,200 to $1,800); lot ($5,000); market changes since each sale (2% a quarter off sales before July); roof and systems ($5,000); condition and updates ($30,000 to $45,000, against this home's full renovation); view or water ($10,000); and seller credits (taken off each sale price).</a:t>
             </a:r>
             <a:endParaRPr lang="en-US" sz="1100" dirty="0"/>
           </a:p>
@@ -15401,8 +15401,8 @@
         </p:nvSpPr>
         <p:spPr>
           <a:xfrm>
-            <a:off x="5532120" y="1463294"/>
-            <a:ext cx="1143000" cy="2468880"/>
+            <a:off x="5932170" y="1463294"/>
+            <a:ext cx="1428750" cy="2468880"/>
           </a:xfrm>
           <a:prstGeom prst="rect">
             <a:avLst/>
@@ -15488,7 +15488,7 @@
         </p:nvSpPr>
         <p:spPr>
           <a:xfrm>
-            <a:off x="4846320" y="1463294"/>
+            <a:off x="5074920" y="1463294"/>
             <a:ext cx="0" cy="2468880"/>
           </a:xfrm>
           <a:prstGeom prst="line">
@@ -15511,7 +15511,7 @@
         </p:nvSpPr>
         <p:spPr>
           <a:xfrm>
-            <a:off x="4434840" y="3977894"/>
+            <a:off x="4663440" y="3977894"/>
             <a:ext cx="822960" cy="228600"/>
           </a:xfrm>
           <a:prstGeom prst="rect">
@@ -15550,7 +15550,7 @@
         </p:nvSpPr>
         <p:spPr>
           <a:xfrm>
-            <a:off x="5760720" y="1463294"/>
+            <a:off x="6217920" y="1463294"/>
             <a:ext cx="0" cy="2468880"/>
           </a:xfrm>
           <a:prstGeom prst="line">
@@ -15573,7 +15573,7 @@
         </p:nvSpPr>
         <p:spPr>
           <a:xfrm>
-            <a:off x="5349240" y="3977894"/>
+            <a:off x="5806440" y="3977894"/>
             <a:ext cx="822960" cy="228600"/>
           </a:xfrm>
           <a:prstGeom prst="rect">
@@ -15612,7 +15612,7 @@
         </p:nvSpPr>
         <p:spPr>
           <a:xfrm>
-            <a:off x="6675120" y="1463294"/>
+            <a:off x="7360920" y="1463294"/>
             <a:ext cx="0" cy="2468880"/>
           </a:xfrm>
           <a:prstGeom prst="line">
@@ -15635,7 +15635,7 @@
         </p:nvSpPr>
         <p:spPr>
           <a:xfrm>
-            <a:off x="6263640" y="3977894"/>
+            <a:off x="6949440" y="3977894"/>
             <a:ext cx="822960" cy="228600"/>
           </a:xfrm>
           <a:prstGeom prst="rect">
@@ -15674,7 +15674,7 @@
         </p:nvSpPr>
         <p:spPr>
           <a:xfrm>
-            <a:off x="7589520" y="1463294"/>
+            <a:off x="8503920" y="1463294"/>
             <a:ext cx="0" cy="2468880"/>
           </a:xfrm>
           <a:prstGeom prst="line">
@@ -15697,7 +15697,7 @@
         </p:nvSpPr>
         <p:spPr>
           <a:xfrm>
-            <a:off x="7178040" y="3977894"/>
+            <a:off x="8092440" y="3977894"/>
             <a:ext cx="822960" cy="228600"/>
           </a:xfrm>
           <a:prstGeom prst="rect">
@@ -15736,69 +15736,7 @@
         </p:nvSpPr>
         <p:spPr>
           <a:xfrm>
-            <a:off x="8503920" y="1463294"/>
-            <a:ext cx="0" cy="2468880"/>
-          </a:xfrm>
-          <a:prstGeom prst="line">
-            <a:avLst/>
-          </a:prstGeom>
-          <a:noFill/>
-          <a:ln w="9525">
-            <a:solidFill>
-              <a:srgbClr val="F8E8E2"/>
-            </a:solidFill>
-            <a:prstDash val="solid"/>
-          </a:ln>
-        </p:spPr>
-      </p:sp>
-      <p:sp>
-        <p:nvSpPr>
-          <p:cNvPr id="16" name="Text 14"/>
-          <p:cNvSpPr txBox="1"/>
-          <p:nvPr/>
-        </p:nvSpPr>
-        <p:spPr>
-          <a:xfrm>
-            <a:off x="8092440" y="3977894"/>
-            <a:ext cx="822960" cy="228600"/>
-          </a:xfrm>
-          <a:prstGeom prst="rect">
-            <a:avLst/>
-          </a:prstGeom>
-          <a:noFill/>
-          <a:ln/>
-        </p:spPr>
-        <p:txBody>
-          <a:bodyPr wrap="square" lIns="0" tIns="0" rIns="0" bIns="0" rtlCol="0" anchor="ctr"/>
-          <a:lstStyle/>
-          <a:p>
-            <a:pPr algn="ctr" indent="0" marL="0">
-              <a:buNone/>
-            </a:pPr>
-            <a:r>
-              <a:rPr lang="en-US" sz="1000" dirty="0">
-                <a:solidFill>
-                  <a:srgbClr val="5E5E5E"/>
-                </a:solidFill>
-                <a:latin typeface="Arial" pitchFamily="34" charset="0"/>
-                <a:ea typeface="Arial" pitchFamily="34" charset="-122"/>
-                <a:cs typeface="Arial" pitchFamily="34" charset="-120"/>
-              </a:rPr>
-              <a:t>$520K</a:t>
-            </a:r>
-            <a:endParaRPr lang="en-US" sz="1000" dirty="0"/>
-          </a:p>
-        </p:txBody>
-      </p:sp>
-      <p:sp>
-        <p:nvSpPr>
-          <p:cNvPr id="17" name="Shape 15"/>
-          <p:cNvSpPr/>
-          <p:nvPr/>
-        </p:nvSpPr>
-        <p:spPr>
-          <a:xfrm>
-            <a:off x="6217920" y="1326134"/>
+            <a:off x="6789420" y="1326134"/>
             <a:ext cx="0" cy="2606040"/>
           </a:xfrm>
           <a:prstGeom prst="line">
@@ -15815,13 +15753,13 @@
       </p:sp>
       <p:sp>
         <p:nvSpPr>
-          <p:cNvPr id="18" name="Text 16"/>
-          <p:cNvSpPr txBox="1"/>
-          <p:nvPr/>
-        </p:nvSpPr>
-        <p:spPr>
-          <a:xfrm>
-            <a:off x="5212080" y="1097534"/>
+          <p:cNvPr id="16" name="Text 14"/>
+          <p:cNvSpPr txBox="1"/>
+          <p:nvPr/>
+        </p:nvSpPr>
+        <p:spPr>
+          <a:xfrm>
+            <a:off x="5783580" y="1097534"/>
             <a:ext cx="2011680" cy="228600"/>
           </a:xfrm>
           <a:prstGeom prst="rect">
@@ -15854,7 +15792,7 @@
       </p:sp>
       <p:sp>
         <p:nvSpPr>
-          <p:cNvPr id="19" name="Text 17"/>
+          <p:cNvPr id="17" name="Text 15"/>
           <p:cNvSpPr txBox="1"/>
           <p:nvPr/>
         </p:nvSpPr>
@@ -15893,7 +15831,7 @@
       </p:sp>
       <p:sp>
         <p:nvSpPr>
-          <p:cNvPr id="20" name="Text 18"/>
+          <p:cNvPr id="18" name="Text 16"/>
           <p:cNvSpPr txBox="1"/>
           <p:nvPr/>
         </p:nvSpPr>
@@ -15932,13 +15870,13 @@
       </p:sp>
       <p:sp>
         <p:nvSpPr>
-          <p:cNvPr id="21" name="Shape 19"/>
+          <p:cNvPr id="19" name="Shape 17"/>
           <p:cNvSpPr/>
           <p:nvPr/>
         </p:nvSpPr>
         <p:spPr>
           <a:xfrm>
-            <a:off x="7228332" y="1673606"/>
+            <a:off x="7598664" y="1673606"/>
             <a:ext cx="164592" cy="164592"/>
           </a:xfrm>
           <a:prstGeom prst="ellipse">
@@ -15957,13 +15895,13 @@
       </p:sp>
       <p:sp>
         <p:nvSpPr>
-          <p:cNvPr id="22" name="Text 20"/>
-          <p:cNvSpPr txBox="1"/>
-          <p:nvPr/>
-        </p:nvSpPr>
-        <p:spPr>
-          <a:xfrm>
-            <a:off x="7420356" y="1627886"/>
+          <p:cNvPr id="20" name="Text 18"/>
+          <p:cNvSpPr txBox="1"/>
+          <p:nvPr/>
+        </p:nvSpPr>
+        <p:spPr>
+          <a:xfrm>
+            <a:off x="7790688" y="1627886"/>
             <a:ext cx="640080" cy="237744"/>
           </a:xfrm>
           <a:prstGeom prst="rect">
@@ -15988,7 +15926,7 @@
                 <a:ea typeface="Arial" pitchFamily="34" charset="-122"/>
                 <a:cs typeface="Arial" pitchFamily="34" charset="-120"/>
               </a:rPr>
-              <a:t>$494K</a:t>
+              <a:t>$486K</a:t>
             </a:r>
             <a:endParaRPr lang="en-US" sz="1000" dirty="0"/>
           </a:p>
@@ -15996,7 +15934,7 @@
       </p:sp>
       <p:sp>
         <p:nvSpPr>
-          <p:cNvPr id="23" name="Text 21"/>
+          <p:cNvPr id="21" name="Text 19"/>
           <p:cNvSpPr txBox="1"/>
           <p:nvPr/>
         </p:nvSpPr>
@@ -16035,7 +15973,7 @@
       </p:sp>
       <p:sp>
         <p:nvSpPr>
-          <p:cNvPr id="24" name="Text 22"/>
+          <p:cNvPr id="22" name="Text 20"/>
           <p:cNvSpPr txBox="1"/>
           <p:nvPr/>
         </p:nvSpPr>
@@ -16058,7 +15996,7 @@
               <a:buNone/>
             </a:pPr>
             <a:r>
-              <a:rPr lang="en-US" sz="950" dirty="0">
+              <a:rPr lang="en-US" sz="900" dirty="0">
                 <a:solidFill>
                   <a:srgbClr val="5E5E5E"/>
                 </a:solidFill>
@@ -16066,21 +16004,21 @@
                 <a:ea typeface="Arial" pitchFamily="34" charset="-122"/>
                 <a:cs typeface="Arial" pitchFamily="34" charset="-120"/>
               </a:rPr>
-              <a:t>Same era and size; systems documented</a:t>
-            </a:r>
-            <a:endParaRPr lang="en-US" sz="950" dirty="0"/>
-          </a:p>
-        </p:txBody>
-      </p:sp>
-      <p:sp>
-        <p:nvSpPr>
-          <p:cNvPr id="25" name="Shape 23"/>
+              <a:t>Strongest match · Same era and size; systems documented</a:t>
+            </a:r>
+            <a:endParaRPr lang="en-US" sz="900" dirty="0"/>
+          </a:p>
+        </p:txBody>
+      </p:sp>
+      <p:sp>
+        <p:nvSpPr>
+          <p:cNvPr id="23" name="Shape 21"/>
           <p:cNvSpPr/>
           <p:nvPr/>
         </p:nvSpPr>
         <p:spPr>
           <a:xfrm>
-            <a:off x="6775704" y="2130806"/>
+            <a:off x="7238619" y="2130806"/>
             <a:ext cx="164592" cy="164592"/>
           </a:xfrm>
           <a:prstGeom prst="ellipse">
@@ -16099,13 +16037,13 @@
       </p:sp>
       <p:sp>
         <p:nvSpPr>
-          <p:cNvPr id="26" name="Text 24"/>
-          <p:cNvSpPr txBox="1"/>
-          <p:nvPr/>
-        </p:nvSpPr>
-        <p:spPr>
-          <a:xfrm>
-            <a:off x="6967728" y="2085086"/>
+          <p:cNvPr id="24" name="Text 22"/>
+          <p:cNvSpPr txBox="1"/>
+          <p:nvPr/>
+        </p:nvSpPr>
+        <p:spPr>
+          <a:xfrm>
+            <a:off x="7430643" y="2085086"/>
             <a:ext cx="640080" cy="237744"/>
           </a:xfrm>
           <a:prstGeom prst="rect">
@@ -16130,7 +16068,7 @@
                 <a:ea typeface="Arial" pitchFamily="34" charset="-122"/>
                 <a:cs typeface="Arial" pitchFamily="34" charset="-120"/>
               </a:rPr>
-              <a:t>$484K</a:t>
+              <a:t>$479K</a:t>
             </a:r>
             <a:endParaRPr lang="en-US" sz="1000" dirty="0"/>
           </a:p>
@@ -16138,7 +16076,7 @@
       </p:sp>
       <p:sp>
         <p:nvSpPr>
-          <p:cNvPr id="27" name="Text 25"/>
+          <p:cNvPr id="25" name="Text 23"/>
           <p:cNvSpPr txBox="1"/>
           <p:nvPr/>
         </p:nvSpPr>
@@ -16177,7 +16115,7 @@
       </p:sp>
       <p:sp>
         <p:nvSpPr>
-          <p:cNvPr id="28" name="Text 26"/>
+          <p:cNvPr id="26" name="Text 24"/>
           <p:cNvSpPr txBox="1"/>
           <p:nvPr/>
         </p:nvSpPr>
@@ -16208,7 +16146,7 @@
                 <a:ea typeface="Arial" pitchFamily="34" charset="-122"/>
                 <a:cs typeface="Arial" pitchFamily="34" charset="-120"/>
               </a:rPr>
-              <a:t>Strongest match · Most recent pool sale; not renovated</a:t>
+              <a:t>Most recent pool sale; not renovated</a:t>
             </a:r>
             <a:endParaRPr lang="en-US" sz="950" dirty="0"/>
           </a:p>
@@ -16216,13 +16154,13 @@
       </p:sp>
       <p:sp>
         <p:nvSpPr>
-          <p:cNvPr id="29" name="Shape 27"/>
+          <p:cNvPr id="27" name="Shape 25"/>
           <p:cNvSpPr/>
           <p:nvPr/>
         </p:nvSpPr>
         <p:spPr>
           <a:xfrm>
-            <a:off x="6126480" y="2588006"/>
+            <a:off x="6695694" y="2588006"/>
             <a:ext cx="164592" cy="164592"/>
           </a:xfrm>
           <a:prstGeom prst="ellipse">
@@ -16241,13 +16179,13 @@
       </p:sp>
       <p:sp>
         <p:nvSpPr>
-          <p:cNvPr id="30" name="Text 28"/>
-          <p:cNvSpPr txBox="1"/>
-          <p:nvPr/>
-        </p:nvSpPr>
-        <p:spPr>
-          <a:xfrm>
-            <a:off x="6318504" y="2542286"/>
+          <p:cNvPr id="28" name="Text 26"/>
+          <p:cNvSpPr txBox="1"/>
+          <p:nvPr/>
+        </p:nvSpPr>
+        <p:spPr>
+          <a:xfrm>
+            <a:off x="6887718" y="2542286"/>
             <a:ext cx="640080" cy="237744"/>
           </a:xfrm>
           <a:prstGeom prst="rect">
@@ -16280,7 +16218,7 @@
       </p:sp>
       <p:sp>
         <p:nvSpPr>
-          <p:cNvPr id="31" name="Text 29"/>
+          <p:cNvPr id="29" name="Text 27"/>
           <p:cNvSpPr txBox="1"/>
           <p:nvPr/>
         </p:nvSpPr>
@@ -16319,7 +16257,7 @@
       </p:sp>
       <p:sp>
         <p:nvSpPr>
-          <p:cNvPr id="32" name="Text 30"/>
+          <p:cNvPr id="30" name="Text 28"/>
           <p:cNvSpPr txBox="1"/>
           <p:nvPr/>
         </p:nvSpPr>
@@ -16358,13 +16296,13 @@
       </p:sp>
       <p:sp>
         <p:nvSpPr>
-          <p:cNvPr id="33" name="Shape 31"/>
+          <p:cNvPr id="31" name="Shape 29"/>
           <p:cNvSpPr/>
           <p:nvPr/>
         </p:nvSpPr>
         <p:spPr>
           <a:xfrm>
-            <a:off x="4773168" y="3045206"/>
+            <a:off x="4621149" y="3045206"/>
             <a:ext cx="164592" cy="164592"/>
           </a:xfrm>
           <a:prstGeom prst="ellipse">
@@ -16383,13 +16321,13 @@
       </p:sp>
       <p:sp>
         <p:nvSpPr>
-          <p:cNvPr id="34" name="Text 32"/>
-          <p:cNvSpPr txBox="1"/>
-          <p:nvPr/>
-        </p:nvSpPr>
-        <p:spPr>
-          <a:xfrm>
-            <a:off x="4965192" y="2999486"/>
+          <p:cNvPr id="32" name="Text 30"/>
+          <p:cNvSpPr txBox="1"/>
+          <p:nvPr/>
+        </p:nvSpPr>
+        <p:spPr>
+          <a:xfrm>
+            <a:off x="4813173" y="2999486"/>
             <a:ext cx="640080" cy="237744"/>
           </a:xfrm>
           <a:prstGeom prst="rect">
@@ -16414,7 +16352,7 @@
                 <a:ea typeface="Arial" pitchFamily="34" charset="-122"/>
                 <a:cs typeface="Arial" pitchFamily="34" charset="-120"/>
               </a:rPr>
-              <a:t>$440K</a:t>
+              <a:t>$434K</a:t>
             </a:r>
             <a:endParaRPr lang="en-US" sz="1000" dirty="0"/>
           </a:p>
@@ -16422,7 +16360,7 @@
       </p:sp>
       <p:sp>
         <p:nvSpPr>
-          <p:cNvPr id="35" name="Text 33"/>
+          <p:cNvPr id="33" name="Text 31"/>
           <p:cNvSpPr txBox="1"/>
           <p:nvPr/>
         </p:nvSpPr>
@@ -16461,7 +16399,7 @@
       </p:sp>
       <p:sp>
         <p:nvSpPr>
-          <p:cNvPr id="36" name="Text 34"/>
+          <p:cNvPr id="34" name="Text 32"/>
           <p:cNvSpPr txBox="1"/>
           <p:nvPr/>
         </p:nvSpPr>
@@ -16500,13 +16438,13 @@
       </p:sp>
       <p:sp>
         <p:nvSpPr>
-          <p:cNvPr id="37" name="Shape 35"/>
+          <p:cNvPr id="35" name="Shape 33"/>
           <p:cNvSpPr/>
           <p:nvPr/>
         </p:nvSpPr>
         <p:spPr>
           <a:xfrm>
-            <a:off x="4576572" y="3502406"/>
+            <a:off x="4489704" y="3502406"/>
             <a:ext cx="164592" cy="164592"/>
           </a:xfrm>
           <a:prstGeom prst="ellipse">
@@ -16525,13 +16463,13 @@
       </p:sp>
       <p:sp>
         <p:nvSpPr>
-          <p:cNvPr id="38" name="Text 36"/>
-          <p:cNvSpPr txBox="1"/>
-          <p:nvPr/>
-        </p:nvSpPr>
-        <p:spPr>
-          <a:xfrm>
-            <a:off x="4768596" y="3456686"/>
+          <p:cNvPr id="36" name="Text 34"/>
+          <p:cNvSpPr txBox="1"/>
+          <p:nvPr/>
+        </p:nvSpPr>
+        <p:spPr>
+          <a:xfrm>
+            <a:off x="4681728" y="3456686"/>
             <a:ext cx="640080" cy="237744"/>
           </a:xfrm>
           <a:prstGeom prst="rect">
@@ -16556,7 +16494,7 @@
                 <a:ea typeface="Arial" pitchFamily="34" charset="-122"/>
                 <a:cs typeface="Arial" pitchFamily="34" charset="-120"/>
               </a:rPr>
-              <a:t>$436K</a:t>
+              <a:t>$431K</a:t>
             </a:r>
             <a:endParaRPr lang="en-US" sz="1000" dirty="0"/>
           </a:p>
@@ -16564,7 +16502,7 @@
       </p:sp>
       <p:sp>
         <p:nvSpPr>
-          <p:cNvPr id="39" name="Text 37"/>
+          <p:cNvPr id="37" name="Text 35"/>
           <p:cNvSpPr txBox="1"/>
           <p:nvPr/>
         </p:nvSpPr>
@@ -16617,7 +16555,7 @@
       </p:sp>
       <p:sp>
         <p:nvSpPr>
-          <p:cNvPr id="40" name="Text 38"/>
+          <p:cNvPr id="38" name="Text 36"/>
           <p:cNvSpPr txBox="1"/>
           <p:nvPr/>
         </p:nvSpPr>
@@ -16656,7 +16594,7 @@
       </p:sp>
       <p:sp>
         <p:nvSpPr>
-          <p:cNvPr id="41" name="Text 39"/>
+          <p:cNvPr id="39" name="Text 37"/>
           <p:cNvSpPr txBox="1"/>
           <p:nvPr/>
         </p:nvSpPr>

--- a/samples/seller-cma/517-Larkwood-Ave-Listing-Presentation.pptx
+++ b/samples/seller-cma/517-Larkwood-Ave-Listing-Presentation.pptx
@@ -4005,7 +4005,7 @@
           <a:p>
             <a:r>
               <a:rPr lang="en-US" dirty="0"/>
-              <a:t>Adjusted for size ($1,200 to $1,800); lot ($5,000); market changes since each sale (2% a quarter off sales before July); roof and systems ($5,000); condition and updates ($30,000 to $45,000, against this home's full renovation); view or water ($10,000); and seller credits (taken off each sale price). These are the five closest matches, sold Apr 24, 2026 to Aug 20, 2026 (one since July), all within a mile. This home's roof age isn't known, so no sale is adjusted for its roof.</a:t>
+              <a:t>Adjusted for size ($1,200 to $1,875); lot ($5,000 to $10,000); market changes since each sale (2% a quarter off sales before July); roof and systems ($5,000); condition and updates ($30,000 to $45,000, against this home's full renovation); and seller credits (taken off each sale price). These are the five closest matches, sold Apr 24, 2026 to Aug 20, 2026 (one since July), all within a mile. This home's roof age isn't known, so no sale is adjusted for its roof.</a:t>
             </a:r>
             <a:endParaRPr lang="en-US" dirty="0"/>
           </a:p>
@@ -11562,7 +11562,7 @@
                           <a:ea typeface="Arial" pitchFamily="34" charset="-122"/>
                           <a:cs typeface="Arial" pitchFamily="34" charset="-120"/>
                         </a:rPr>
-                        <a:t>$485,600</a:t>
+                        <a:t>$485,700</a:t>
                       </a:r>
                       <a:endParaRPr lang="en-US" sz="1100" dirty="0">
                         <a:latin typeface="Arial" charset="0"/>
@@ -11966,7 +11966,7 @@
                           <a:ea typeface="Arial" pitchFamily="34" charset="-122"/>
                           <a:cs typeface="Arial" pitchFamily="34" charset="-120"/>
                         </a:rPr>
-                        <a:t>$469,800</a:t>
+                        <a:t>$469,900</a:t>
                       </a:r>
                       <a:endParaRPr lang="en-US" sz="1100" dirty="0">
                         <a:latin typeface="Arial" charset="0"/>
@@ -13961,7 +13961,7 @@
                 <a:ea typeface="Arial" pitchFamily="34" charset="-122"/>
                 <a:cs typeface="Arial" pitchFamily="34" charset="-120"/>
               </a:rPr>
-              <a:t>$469,800</a:t>
+              <a:t>$469,900</a:t>
             </a:r>
             <a:endParaRPr lang="en-US" sz="2200" dirty="0"/>
           </a:p>
@@ -14222,7 +14222,7 @@
                 <a:ea typeface="Arial" pitchFamily="34" charset="-122"/>
                 <a:cs typeface="Arial" pitchFamily="34" charset="-120"/>
               </a:rPr>
-              <a:t>Adjusted for size ($1,200 to $1,800); lot ($5,000); market changes since each sale (2% a quarter off sales before July); roof and systems ($5,000); condition and updates ($30,000 to $45,000, against this home's full renovation); view or water ($10,000); and seller credits (taken off each sale price).</a:t>
+              <a:t>Adjusted for size ($1,200 to $1,875); lot ($5,000 to $10,000); market changes since each sale (2% a quarter off sales before July); roof and systems ($5,000); condition and updates ($30,000 to $45,000, against this home's full renovation); and seller credits (taken off each sale price).</a:t>
             </a:r>
             <a:endParaRPr lang="en-US" sz="1100" dirty="0"/>
           </a:p>
@@ -15876,7 +15876,7 @@
         </p:nvSpPr>
         <p:spPr>
           <a:xfrm>
-            <a:off x="7598664" y="1673606"/>
+            <a:off x="7602950" y="1673606"/>
             <a:ext cx="164592" cy="164592"/>
           </a:xfrm>
           <a:prstGeom prst="ellipse">
@@ -15901,7 +15901,7 @@
         </p:nvSpPr>
         <p:spPr>
           <a:xfrm>
-            <a:off x="7790688" y="1627886"/>
+            <a:off x="7794974" y="1627886"/>
             <a:ext cx="640080" cy="237744"/>
           </a:xfrm>
           <a:prstGeom prst="rect">
@@ -16160,7 +16160,7 @@
         </p:nvSpPr>
         <p:spPr>
           <a:xfrm>
-            <a:off x="6695694" y="2588006"/>
+            <a:off x="6698552" y="2588006"/>
             <a:ext cx="164592" cy="164592"/>
           </a:xfrm>
           <a:prstGeom prst="ellipse">
@@ -16185,7 +16185,7 @@
         </p:nvSpPr>
         <p:spPr>
           <a:xfrm>
-            <a:off x="6887718" y="2542286"/>
+            <a:off x="6890576" y="2542286"/>
             <a:ext cx="640080" cy="237744"/>
           </a:xfrm>
           <a:prstGeom prst="rect">
@@ -16444,7 +16444,7 @@
         </p:nvSpPr>
         <p:spPr>
           <a:xfrm>
-            <a:off x="4489704" y="3502406"/>
+            <a:off x="4491361" y="3502406"/>
             <a:ext cx="164592" cy="164592"/>
           </a:xfrm>
           <a:prstGeom prst="ellipse">
@@ -16469,7 +16469,7 @@
         </p:nvSpPr>
         <p:spPr>
           <a:xfrm>
-            <a:off x="4681728" y="3456686"/>
+            <a:off x="4683385" y="3456686"/>
             <a:ext cx="640080" cy="237744"/>
           </a:xfrm>
           <a:prstGeom prst="rect">

--- a/samples/seller-cma/517-Larkwood-Ave-Listing-Presentation.pptx
+++ b/samples/seller-cma/517-Larkwood-Ave-Listing-Presentation.pptx
@@ -4005,7 +4005,7 @@
           <a:p>
             <a:r>
               <a:rPr lang="en-US" dirty="0"/>
-              <a:t>Adjusted for size ($1,200 to $1,875); lot ($5,000 to $10,000); market changes since each sale (2% a quarter off sales before July); roof and systems ($5,000); condition and updates ($30,000 to $45,000, against this home's full renovation); and seller credits (taken off each sale price). These are the five closest matches, sold Apr 24, 2026 to Aug 20, 2026 (one since July), all within a mile. This home's roof age isn't known, so no sale is adjusted for its roof.</a:t>
+              <a:t>Adjusted for size ($1,200 to $1,875); lot ($5,000 to $10,000); market changes since each sale (2% a quarter off sales before July); recent systems ($5,000); condition and updates ($30,000 to $45,000, against this home's full renovation); and seller credits (taken off each sale price). These are the five closest matches, sold Apr 24, 2026 to Aug 20, 2026 (one since July), all within a mile. This home's roof age isn't known, so no sale is adjusted for its roof.</a:t>
             </a:r>
             <a:endParaRPr lang="en-US" dirty="0"/>
           </a:p>
@@ -14222,7 +14222,7 @@
                 <a:ea typeface="Arial" pitchFamily="34" charset="-122"/>
                 <a:cs typeface="Arial" pitchFamily="34" charset="-120"/>
               </a:rPr>
-              <a:t>Adjusted for size ($1,200 to $1,875); lot ($5,000 to $10,000); market changes since each sale (2% a quarter off sales before July); roof and systems ($5,000); condition and updates ($30,000 to $45,000, against this home's full renovation); and seller credits (taken off each sale price).</a:t>
+              <a:t>Adjusted for size ($1,200 to $1,875); lot ($5,000 to $10,000); market changes since each sale (2% a quarter off sales before July); recent systems ($5,000); condition and updates ($30,000 to $45,000, against this home's full renovation); and seller credits (taken off each sale price).</a:t>
             </a:r>
             <a:endParaRPr lang="en-US" sz="1100" dirty="0"/>
           </a:p>

--- a/samples/seller-cma/517-Larkwood-Ave-Listing-Presentation.pptx
+++ b/samples/seller-cma/517-Larkwood-Ave-Listing-Presentation.pptx
@@ -2174,7 +2174,7 @@
           </c:tx>
           <c:spPr>
             <a:solidFill>
-              <a:srgbClr val="1A1A1A"/>
+              <a:srgbClr val="7B2400"/>
             </a:solidFill>
             <a:ln>
               <a:noFill/>
@@ -2186,7 +2186,7 @@
             <c:size val="11"/>
             <c:spPr>
               <a:solidFill>
-                <a:srgbClr val="1A1A1A"/>
+                <a:srgbClr val="7B2400"/>
               </a:solidFill>
               <a:ln w="19050">
                 <a:solidFill>
@@ -12416,7 +12416,7 @@
                       <a:r>
                         <a:rPr lang="en-US" sz="1100" b="1" dirty="0">
                           <a:solidFill>
-                            <a:srgbClr val="1A1A1A"/>
+                            <a:srgbClr val="7B2400"/>
                           </a:solidFill>
                           <a:latin typeface="Arial" pitchFamily="34" charset="0"/>
                           <a:ea typeface="Arial" pitchFamily="34" charset="-122"/>
@@ -12472,7 +12472,7 @@
                       <a:r>
                         <a:rPr lang="en-US" sz="1100" b="1" dirty="0">
                           <a:solidFill>
-                            <a:srgbClr val="1A1A1A"/>
+                            <a:srgbClr val="7B2400"/>
                           </a:solidFill>
                           <a:latin typeface="Arial" pitchFamily="34" charset="0"/>
                           <a:ea typeface="Arial" pitchFamily="34" charset="-122"/>
@@ -12528,7 +12528,7 @@
                       <a:r>
                         <a:rPr lang="en-US" sz="1100" b="1" dirty="0">
                           <a:solidFill>
-                            <a:srgbClr val="1A1A1A"/>
+                            <a:srgbClr val="7B2400"/>
                           </a:solidFill>
                           <a:latin typeface="Arial" pitchFamily="34" charset="0"/>
                           <a:ea typeface="Arial" pitchFamily="34" charset="-122"/>
@@ -12584,7 +12584,7 @@
                       <a:r>
                         <a:rPr lang="en-US" sz="1100" b="1" dirty="0">
                           <a:solidFill>
-                            <a:srgbClr val="1A1A1A"/>
+                            <a:srgbClr val="7B2400"/>
                           </a:solidFill>
                           <a:latin typeface="Arial" pitchFamily="34" charset="0"/>
                           <a:ea typeface="Arial" pitchFamily="34" charset="-122"/>
@@ -15745,7 +15745,7 @@
           <a:noFill/>
           <a:ln w="25400">
             <a:solidFill>
-              <a:srgbClr val="1A1A1A"/>
+              <a:srgbClr val="7B2400"/>
             </a:solidFill>
             <a:prstDash val="dash"/>
           </a:ln>
@@ -15778,7 +15778,7 @@
             <a:r>
               <a:rPr lang="en-US" sz="1000" b="1" dirty="0">
                 <a:solidFill>
-                  <a:srgbClr val="1A1A1A"/>
+                  <a:srgbClr val="7B2400"/>
                 </a:solidFill>
                 <a:latin typeface="Arial" pitchFamily="34" charset="0"/>
                 <a:ea typeface="Arial" pitchFamily="34" charset="-122"/>
@@ -17404,7 +17404,7 @@
             <a:avLst/>
           </a:prstGeom>
           <a:solidFill>
-            <a:srgbClr val="1A1A1A"/>
+            <a:srgbClr val="7B2400"/>
           </a:solidFill>
           <a:ln w="6350">
             <a:solidFill>

--- a/samples/seller-cma/517-Larkwood-Ave-Listing-Presentation.pptx
+++ b/samples/seller-cma/517-Larkwood-Ave-Listing-Presentation.pptx
@@ -13221,7 +13221,7 @@
                 <a:ea typeface="Arial" pitchFamily="34" charset="-122"/>
                 <a:cs typeface="Arial" pitchFamily="34" charset="-120"/>
               </a:rPr>
-              <a:t>After the negotiating that is normal now</a:t>
+              <a:t>After the usual negotiation in today's market</a:t>
             </a:r>
             <a:endParaRPr lang="en-US" sz="1100" dirty="0"/>
           </a:p>
